--- a/문헌고찰_NLC_RLS_LSB/03_LSB/LSB_발표.pptx
+++ b/문헌고찰_NLC_RLS_LSB/03_LSB/LSB_발표.pptx
@@ -14,6 +14,9 @@
     <p:sldId id="262" r:id="rId13"/>
     <p:sldId id="263" r:id="rId14"/>
     <p:sldId id="264" r:id="rId15"/>
+    <p:sldId id="265" r:id="rId16"/>
+    <p:sldId id="266" r:id="rId17"/>
+    <p:sldId id="267" r:id="rId18"/>
   </p:sldIdLst>
   <p:sldSz cx="12191695" cy="6858000" type="screen4x3"/>
   <p:notesSz cx="6858000" cy="9144000"/>
@@ -3515,6 +3518,2011 @@
 </p:sld>
 </file>
 
+<file path=ppt/slides/slide10.xml><?xml version="1.0" encoding="utf-8"?>
+<p:sld xmlns:a="http://schemas.openxmlformats.org/drawingml/2006/main" xmlns:p="http://schemas.openxmlformats.org/presentationml/2006/main" xmlns:r="http://schemas.openxmlformats.org/officeDocument/2006/relationships">
+  <p:cSld>
+    <p:spTree>
+      <p:nvGrpSpPr>
+        <p:cNvPr id="1" name=""/>
+        <p:cNvGrpSpPr/>
+        <p:nvPr/>
+      </p:nvGrpSpPr>
+      <p:grpSpPr/>
+      <p:sp>
+        <p:nvSpPr>
+          <p:cNvPr id="2" name="Rectangle 1"/>
+          <p:cNvSpPr/>
+          <p:nvPr/>
+        </p:nvSpPr>
+        <p:spPr>
+          <a:xfrm>
+            <a:off x="502920" y="310896"/>
+            <a:ext cx="109728" cy="457200"/>
+          </a:xfrm>
+          <a:prstGeom prst="rect">
+            <a:avLst/>
+          </a:prstGeom>
+          <a:solidFill>
+            <a:srgbClr val="2C898A"/>
+          </a:solidFill>
+          <a:ln>
+            <a:noFill/>
+          </a:ln>
+          <a:effectLst/>
+        </p:spPr>
+        <p:style>
+          <a:lnRef idx="1">
+            <a:schemeClr val="accent1"/>
+          </a:lnRef>
+          <a:fillRef idx="3">
+            <a:schemeClr val="accent1"/>
+          </a:fillRef>
+          <a:effectRef idx="2">
+            <a:schemeClr val="accent1"/>
+          </a:effectRef>
+          <a:fontRef idx="minor">
+            <a:schemeClr val="lt1"/>
+          </a:fontRef>
+        </p:style>
+        <p:txBody>
+          <a:bodyPr rtlCol="0" anchor="ctr"/>
+          <a:lstStyle/>
+          <a:p>
+            <a:pPr algn="ctr"/>
+          </a:p>
+        </p:txBody>
+      </p:sp>
+      <p:sp>
+        <p:nvSpPr>
+          <p:cNvPr id="3" name="TextBox 2"/>
+          <p:cNvSpPr txBox="1"/>
+          <p:nvPr/>
+        </p:nvSpPr>
+        <p:spPr>
+          <a:xfrm>
+            <a:off x="731520" y="237744"/>
+            <a:ext cx="9509760" cy="685800"/>
+          </a:xfrm>
+          <a:prstGeom prst="rect">
+            <a:avLst/>
+          </a:prstGeom>
+          <a:noFill/>
+        </p:spPr>
+        <p:txBody>
+          <a:bodyPr wrap="square" anchor="ctr" lIns="0" rIns="0" tIns="0" bIns="0">
+            <a:spAutoFit/>
+          </a:bodyPr>
+          <a:lstStyle/>
+          <a:p>
+            <a:pPr algn="l">
+              <a:lnSpc>
+                <a:spcPct val="108000"/>
+              </a:lnSpc>
+              <a:spcAft>
+                <a:spcPts val="400"/>
+              </a:spcAft>
+            </a:pPr>
+            <a:r>
+              <a:rPr sz="2400" b="1" i="0">
+                <a:solidFill>
+                  <a:srgbClr val="1B355E"/>
+                </a:solidFill>
+                <a:latin typeface="NanumGothic"/>
+                <a:ea typeface="NanumGothic"/>
+              </a:rPr>
+              <a:t>합병증 · 안전성 · 근거수준</a:t>
+            </a:r>
+          </a:p>
+        </p:txBody>
+      </p:sp>
+      <p:sp>
+        <p:nvSpPr>
+          <p:cNvPr id="4" name="TextBox 3"/>
+          <p:cNvSpPr txBox="1"/>
+          <p:nvPr/>
+        </p:nvSpPr>
+        <p:spPr>
+          <a:xfrm>
+            <a:off x="749808" y="109728"/>
+            <a:ext cx="7315200" cy="219456"/>
+          </a:xfrm>
+          <a:prstGeom prst="rect">
+            <a:avLst/>
+          </a:prstGeom>
+          <a:noFill/>
+        </p:spPr>
+        <p:txBody>
+          <a:bodyPr wrap="square" anchor="t" lIns="0" rIns="0" tIns="0" bIns="0">
+            <a:spAutoFit/>
+          </a:bodyPr>
+          <a:lstStyle/>
+          <a:p>
+            <a:pPr algn="l">
+              <a:lnSpc>
+                <a:spcPct val="108000"/>
+              </a:lnSpc>
+              <a:spcAft>
+                <a:spcPts val="400"/>
+              </a:spcAft>
+            </a:pPr>
+            <a:r>
+              <a:rPr sz="1100" b="1" i="0">
+                <a:solidFill>
+                  <a:srgbClr val="1F6E70"/>
+                </a:solidFill>
+                <a:latin typeface="NanumGothic"/>
+                <a:ea typeface="NanumGothic"/>
+              </a:rPr>
+              <a:t>안전성 · 결론</a:t>
+            </a:r>
+          </a:p>
+        </p:txBody>
+      </p:sp>
+      <p:sp>
+        <p:nvSpPr>
+          <p:cNvPr id="5" name="Rectangle 4"/>
+          <p:cNvSpPr/>
+          <p:nvPr/>
+        </p:nvSpPr>
+        <p:spPr>
+          <a:xfrm>
+            <a:off x="731520" y="969264"/>
+            <a:ext cx="10881360" cy="17780"/>
+          </a:xfrm>
+          <a:prstGeom prst="rect">
+            <a:avLst/>
+          </a:prstGeom>
+          <a:solidFill>
+            <a:srgbClr val="D5DEE7"/>
+          </a:solidFill>
+          <a:ln>
+            <a:noFill/>
+          </a:ln>
+          <a:effectLst/>
+        </p:spPr>
+        <p:style>
+          <a:lnRef idx="1">
+            <a:schemeClr val="accent1"/>
+          </a:lnRef>
+          <a:fillRef idx="3">
+            <a:schemeClr val="accent1"/>
+          </a:fillRef>
+          <a:effectRef idx="2">
+            <a:schemeClr val="accent1"/>
+          </a:effectRef>
+          <a:fontRef idx="minor">
+            <a:schemeClr val="lt1"/>
+          </a:fontRef>
+        </p:style>
+        <p:txBody>
+          <a:bodyPr rtlCol="0" anchor="ctr"/>
+          <a:lstStyle/>
+          <a:p>
+            <a:pPr algn="ctr"/>
+          </a:p>
+        </p:txBody>
+      </p:sp>
+      <p:sp>
+        <p:nvSpPr>
+          <p:cNvPr id="6" name="Rounded Rectangle 5"/>
+          <p:cNvSpPr/>
+          <p:nvPr/>
+        </p:nvSpPr>
+        <p:spPr>
+          <a:xfrm>
+            <a:off x="11085272" y="365760"/>
+            <a:ext cx="603503" cy="347472"/>
+          </a:xfrm>
+          <a:prstGeom prst="roundRect">
+            <a:avLst>
+              <a:gd name="adj" fmla="val 8000"/>
+            </a:avLst>
+          </a:prstGeom>
+          <a:solidFill>
+            <a:srgbClr val="B03A2E"/>
+          </a:solidFill>
+          <a:ln>
+            <a:noFill/>
+          </a:ln>
+          <a:effectLst/>
+        </p:spPr>
+        <p:style>
+          <a:lnRef idx="1">
+            <a:schemeClr val="accent1"/>
+          </a:lnRef>
+          <a:fillRef idx="3">
+            <a:schemeClr val="accent1"/>
+          </a:fillRef>
+          <a:effectRef idx="2">
+            <a:schemeClr val="accent1"/>
+          </a:effectRef>
+          <a:fontRef idx="minor">
+            <a:schemeClr val="lt1"/>
+          </a:fontRef>
+        </p:style>
+        <p:txBody>
+          <a:bodyPr rtlCol="0" anchor="ctr"/>
+          <a:lstStyle/>
+          <a:p>
+            <a:pPr algn="ctr"/>
+          </a:p>
+        </p:txBody>
+      </p:sp>
+      <p:sp>
+        <p:nvSpPr>
+          <p:cNvPr id="7" name="TextBox 6"/>
+          <p:cNvSpPr txBox="1"/>
+          <p:nvPr/>
+        </p:nvSpPr>
+        <p:spPr>
+          <a:xfrm>
+            <a:off x="11085272" y="365760"/>
+            <a:ext cx="603503" cy="347472"/>
+          </a:xfrm>
+          <a:prstGeom prst="rect">
+            <a:avLst/>
+          </a:prstGeom>
+          <a:noFill/>
+        </p:spPr>
+        <p:txBody>
+          <a:bodyPr wrap="square" anchor="ctr" lIns="0" rIns="0" tIns="0" bIns="0">
+            <a:spAutoFit/>
+          </a:bodyPr>
+          <a:lstStyle/>
+          <a:p>
+            <a:pPr algn="ctr">
+              <a:lnSpc>
+                <a:spcPct val="108000"/>
+              </a:lnSpc>
+              <a:spcAft>
+                <a:spcPts val="400"/>
+              </a:spcAft>
+            </a:pPr>
+            <a:r>
+              <a:rPr sz="1150" b="1" i="0">
+                <a:solidFill>
+                  <a:srgbClr val="FFFFFF"/>
+                </a:solidFill>
+                <a:latin typeface="NanumGothic"/>
+                <a:ea typeface="NanumGothic"/>
+              </a:rPr>
+              <a:t>안전성</a:t>
+            </a:r>
+          </a:p>
+        </p:txBody>
+      </p:sp>
+      <p:sp>
+        <p:nvSpPr>
+          <p:cNvPr id="8" name="TextBox 7"/>
+          <p:cNvSpPr txBox="1"/>
+          <p:nvPr/>
+        </p:nvSpPr>
+        <p:spPr>
+          <a:xfrm>
+            <a:off x="731520" y="1371600"/>
+            <a:ext cx="10835640" cy="4754880"/>
+          </a:xfrm>
+          <a:prstGeom prst="rect">
+            <a:avLst/>
+          </a:prstGeom>
+          <a:noFill/>
+        </p:spPr>
+        <p:txBody>
+          <a:bodyPr wrap="square" lIns="0" rIns="0" tIns="0" bIns="0">
+            <a:spAutoFit/>
+          </a:bodyPr>
+          <a:lstStyle/>
+          <a:p>
+            <a:pPr algn="l">
+              <a:lnSpc>
+                <a:spcPct val="108000"/>
+              </a:lnSpc>
+              <a:spcAft>
+                <a:spcPts val="900"/>
+              </a:spcAft>
+            </a:pPr>
+            <a:r>
+              <a:rPr sz="1050" b="1" i="0">
+                <a:solidFill>
+                  <a:srgbClr val="2C898A"/>
+                </a:solidFill>
+                <a:latin typeface="NanumGothic"/>
+                <a:ea typeface="NanumGothic"/>
+              </a:rPr>
+              <a:t>●  </a:t>
+            </a:r>
+            <a:r>
+              <a:rPr sz="1500" b="1" i="0">
+                <a:solidFill>
+                  <a:srgbClr val="B03A2E"/>
+                </a:solidFill>
+                <a:latin typeface="NanumGothic"/>
+                <a:ea typeface="NanumGothic"/>
+              </a:rPr>
+              <a:t>합병증: 생식대퇴신경통(신경파괴 시 5–10%), 외측대퇴피신경 손상, 기립성 저혈압.</a:t>
+            </a:r>
+          </a:p>
+          <a:p>
+            <a:pPr algn="l">
+              <a:lnSpc>
+                <a:spcPct val="108000"/>
+              </a:lnSpc>
+              <a:spcAft>
+                <a:spcPts val="900"/>
+              </a:spcAft>
+            </a:pPr>
+            <a:r>
+              <a:rPr sz="1050" b="1" i="0">
+                <a:solidFill>
+                  <a:srgbClr val="2C898A"/>
+                </a:solidFill>
+                <a:latin typeface="NanumGothic"/>
+                <a:ea typeface="NanumGothic"/>
+              </a:rPr>
+              <a:t>●  </a:t>
+            </a:r>
+            <a:r>
+              <a:rPr sz="1500" b="0" i="0">
+                <a:solidFill>
+                  <a:srgbClr val="1A202C"/>
+                </a:solidFill>
+                <a:latin typeface="NanumGothic"/>
+                <a:ea typeface="NanumGothic"/>
+              </a:rPr>
+              <a:t>혈관·요관·신장 등 내장 구조 천공, 출혈, 신경축(neuraxial) 확산, 신경파괴 후 통증성 신경염(dysesthesia).</a:t>
+            </a:r>
+          </a:p>
+          <a:p>
+            <a:pPr algn="l">
+              <a:lnSpc>
+                <a:spcPct val="108000"/>
+              </a:lnSpc>
+              <a:spcAft>
+                <a:spcPts val="900"/>
+              </a:spcAft>
+            </a:pPr>
+            <a:r>
+              <a:rPr sz="1050" b="1" i="0">
+                <a:solidFill>
+                  <a:srgbClr val="2C898A"/>
+                </a:solidFill>
+                <a:latin typeface="NanumGothic"/>
+                <a:ea typeface="NanumGothic"/>
+              </a:rPr>
+              <a:t>●  </a:t>
+            </a:r>
+            <a:r>
+              <a:rPr sz="1500" b="0" i="0">
+                <a:solidFill>
+                  <a:srgbClr val="1A202C"/>
+                </a:solidFill>
+                <a:latin typeface="NanumGothic"/>
+                <a:ea typeface="NanumGothic"/>
+              </a:rPr>
+              <a:t>근거수준: 대부분 관찰·증례군·소규모 전향연구, 대규모 RCT는 부족(허혈질환·CRPS Level III~IV).</a:t>
+            </a:r>
+          </a:p>
+          <a:p>
+            <a:pPr algn="l">
+              <a:lnSpc>
+                <a:spcPct val="108000"/>
+              </a:lnSpc>
+              <a:spcAft>
+                <a:spcPts val="900"/>
+              </a:spcAft>
+            </a:pPr>
+            <a:r>
+              <a:rPr sz="1500" b="1" i="0">
+                <a:solidFill>
+                  <a:srgbClr val="5A6B7B"/>
+                </a:solidFill>
+                <a:latin typeface="NanumGothic"/>
+                <a:ea typeface="NanumGothic"/>
+              </a:rPr>
+              <a:t/>
+            </a:r>
+            <a:r>
+              <a:rPr sz="1500" b="1" i="0">
+                <a:solidFill>
+                  <a:srgbClr val="1F6E70"/>
+                </a:solidFill>
+                <a:latin typeface="NanumGothic"/>
+                <a:ea typeface="NanumGothic"/>
+              </a:rPr>
+              <a:t>그럼에도 조기 CRPS·재건 불가능한 중증 하지허혈(안정통)에서 임상적으로 유용.</a:t>
+            </a:r>
+          </a:p>
+        </p:txBody>
+      </p:sp>
+      <p:sp>
+        <p:nvSpPr>
+          <p:cNvPr id="9" name="TextBox 8"/>
+          <p:cNvSpPr txBox="1"/>
+          <p:nvPr/>
+        </p:nvSpPr>
+        <p:spPr>
+          <a:xfrm>
+            <a:off x="731520" y="6455664"/>
+            <a:ext cx="9875520" cy="292608"/>
+          </a:xfrm>
+          <a:prstGeom prst="rect">
+            <a:avLst/>
+          </a:prstGeom>
+          <a:noFill/>
+        </p:spPr>
+        <p:txBody>
+          <a:bodyPr wrap="square" anchor="ctr" lIns="0" rIns="0" tIns="0" bIns="0">
+            <a:spAutoFit/>
+          </a:bodyPr>
+          <a:lstStyle/>
+          <a:p>
+            <a:pPr algn="l">
+              <a:lnSpc>
+                <a:spcPct val="108000"/>
+              </a:lnSpc>
+              <a:spcAft>
+                <a:spcPts val="400"/>
+              </a:spcAft>
+            </a:pPr>
+            <a:r>
+              <a:rPr sz="900" b="0" i="0">
+                <a:solidFill>
+                  <a:srgbClr val="5A6B7B"/>
+                </a:solidFill>
+                <a:latin typeface="NanumGothic"/>
+                <a:ea typeface="NanumGothic"/>
+              </a:rPr>
+              <a:t>근거: StatPearls; 문헌고찰 종합</a:t>
+            </a:r>
+          </a:p>
+        </p:txBody>
+      </p:sp>
+      <p:sp>
+        <p:nvSpPr>
+          <p:cNvPr id="10" name="TextBox 9"/>
+          <p:cNvSpPr txBox="1"/>
+          <p:nvPr/>
+        </p:nvSpPr>
+        <p:spPr>
+          <a:xfrm>
+            <a:off x="11064240" y="6455664"/>
+            <a:ext cx="822960" cy="292608"/>
+          </a:xfrm>
+          <a:prstGeom prst="rect">
+            <a:avLst/>
+          </a:prstGeom>
+          <a:noFill/>
+        </p:spPr>
+        <p:txBody>
+          <a:bodyPr wrap="square" anchor="ctr" lIns="0" rIns="0" tIns="0" bIns="0">
+            <a:spAutoFit/>
+          </a:bodyPr>
+          <a:lstStyle/>
+          <a:p>
+            <a:pPr algn="r">
+              <a:lnSpc>
+                <a:spcPct val="108000"/>
+              </a:lnSpc>
+              <a:spcAft>
+                <a:spcPts val="400"/>
+              </a:spcAft>
+            </a:pPr>
+            <a:r>
+              <a:rPr sz="1000" b="1" i="0">
+                <a:solidFill>
+                  <a:srgbClr val="5A6B7B"/>
+                </a:solidFill>
+                <a:latin typeface="NanumGothic"/>
+                <a:ea typeface="NanumGothic"/>
+              </a:rPr>
+              <a:t>10</a:t>
+            </a:r>
+          </a:p>
+        </p:txBody>
+      </p:sp>
+    </p:spTree>
+  </p:cSld>
+  <p:clrMapOvr>
+    <a:masterClrMapping/>
+  </p:clrMapOvr>
+</p:sld>
+</file>
+
+<file path=ppt/slides/slide11.xml><?xml version="1.0" encoding="utf-8"?>
+<p:sld xmlns:a="http://schemas.openxmlformats.org/drawingml/2006/main" xmlns:p="http://schemas.openxmlformats.org/presentationml/2006/main" xmlns:r="http://schemas.openxmlformats.org/officeDocument/2006/relationships">
+  <p:cSld>
+    <p:spTree>
+      <p:nvGrpSpPr>
+        <p:cNvPr id="1" name=""/>
+        <p:cNvGrpSpPr/>
+        <p:nvPr/>
+      </p:nvGrpSpPr>
+      <p:grpSpPr/>
+      <p:sp>
+        <p:nvSpPr>
+          <p:cNvPr id="2" name="Rectangle 1"/>
+          <p:cNvSpPr/>
+          <p:nvPr/>
+        </p:nvSpPr>
+        <p:spPr>
+          <a:xfrm>
+            <a:off x="0" y="0"/>
+            <a:ext cx="12191695" cy="6858000"/>
+          </a:xfrm>
+          <a:prstGeom prst="rect">
+            <a:avLst/>
+          </a:prstGeom>
+          <a:solidFill>
+            <a:srgbClr val="1B355E"/>
+          </a:solidFill>
+          <a:ln>
+            <a:noFill/>
+          </a:ln>
+          <a:effectLst/>
+        </p:spPr>
+        <p:style>
+          <a:lnRef idx="1">
+            <a:schemeClr val="accent1"/>
+          </a:lnRef>
+          <a:fillRef idx="3">
+            <a:schemeClr val="accent1"/>
+          </a:fillRef>
+          <a:effectRef idx="2">
+            <a:schemeClr val="accent1"/>
+          </a:effectRef>
+          <a:fontRef idx="minor">
+            <a:schemeClr val="lt1"/>
+          </a:fontRef>
+        </p:style>
+        <p:txBody>
+          <a:bodyPr rtlCol="0" anchor="ctr"/>
+          <a:lstStyle/>
+          <a:p>
+            <a:pPr algn="ctr"/>
+          </a:p>
+        </p:txBody>
+      </p:sp>
+      <p:sp>
+        <p:nvSpPr>
+          <p:cNvPr id="3" name="Rectangle 2"/>
+          <p:cNvSpPr/>
+          <p:nvPr/>
+        </p:nvSpPr>
+        <p:spPr>
+          <a:xfrm>
+            <a:off x="0" y="0"/>
+            <a:ext cx="201168" cy="6858000"/>
+          </a:xfrm>
+          <a:prstGeom prst="rect">
+            <a:avLst/>
+          </a:prstGeom>
+          <a:solidFill>
+            <a:srgbClr val="2C898A"/>
+          </a:solidFill>
+          <a:ln>
+            <a:noFill/>
+          </a:ln>
+          <a:effectLst/>
+        </p:spPr>
+        <p:style>
+          <a:lnRef idx="1">
+            <a:schemeClr val="accent1"/>
+          </a:lnRef>
+          <a:fillRef idx="3">
+            <a:schemeClr val="accent1"/>
+          </a:fillRef>
+          <a:effectRef idx="2">
+            <a:schemeClr val="accent1"/>
+          </a:effectRef>
+          <a:fontRef idx="minor">
+            <a:schemeClr val="lt1"/>
+          </a:fontRef>
+        </p:style>
+        <p:txBody>
+          <a:bodyPr rtlCol="0" anchor="ctr"/>
+          <a:lstStyle/>
+          <a:p>
+            <a:pPr algn="ctr"/>
+          </a:p>
+        </p:txBody>
+      </p:sp>
+      <p:sp>
+        <p:nvSpPr>
+          <p:cNvPr id="4" name="TextBox 3"/>
+          <p:cNvSpPr txBox="1"/>
+          <p:nvPr/>
+        </p:nvSpPr>
+        <p:spPr>
+          <a:xfrm>
+            <a:off x="822960" y="640080"/>
+            <a:ext cx="10515600" cy="457200"/>
+          </a:xfrm>
+          <a:prstGeom prst="rect">
+            <a:avLst/>
+          </a:prstGeom>
+          <a:noFill/>
+        </p:spPr>
+        <p:txBody>
+          <a:bodyPr wrap="square" anchor="t" lIns="0" rIns="0" tIns="0" bIns="0">
+            <a:spAutoFit/>
+          </a:bodyPr>
+          <a:lstStyle/>
+          <a:p>
+            <a:pPr algn="l">
+              <a:lnSpc>
+                <a:spcPct val="108000"/>
+              </a:lnSpc>
+              <a:spcAft>
+                <a:spcPts val="400"/>
+              </a:spcAft>
+            </a:pPr>
+            <a:r>
+              <a:rPr sz="1300" b="1" i="0">
+                <a:solidFill>
+                  <a:srgbClr val="9FE0D8"/>
+                </a:solidFill>
+                <a:latin typeface="NanumGothic"/>
+                <a:ea typeface="NanumGothic"/>
+              </a:rPr>
+              <a:t>핵심 메시지 — LSB</a:t>
+            </a:r>
+          </a:p>
+        </p:txBody>
+      </p:sp>
+      <p:sp>
+        <p:nvSpPr>
+          <p:cNvPr id="5" name="TextBox 4"/>
+          <p:cNvSpPr txBox="1"/>
+          <p:nvPr/>
+        </p:nvSpPr>
+        <p:spPr>
+          <a:xfrm>
+            <a:off x="822960" y="1097280"/>
+            <a:ext cx="10515600" cy="914400"/>
+          </a:xfrm>
+          <a:prstGeom prst="rect">
+            <a:avLst/>
+          </a:prstGeom>
+          <a:noFill/>
+        </p:spPr>
+        <p:txBody>
+          <a:bodyPr wrap="square" anchor="t" lIns="0" rIns="0" tIns="0" bIns="0">
+            <a:spAutoFit/>
+          </a:bodyPr>
+          <a:lstStyle/>
+          <a:p>
+            <a:pPr algn="l">
+              <a:lnSpc>
+                <a:spcPct val="110000"/>
+              </a:lnSpc>
+              <a:spcAft>
+                <a:spcPts val="400"/>
+              </a:spcAft>
+            </a:pPr>
+            <a:r>
+              <a:rPr sz="2200" b="1" i="0">
+                <a:solidFill>
+                  <a:srgbClr val="FFFFFF"/>
+                </a:solidFill>
+                <a:latin typeface="NanumGothic"/>
+                <a:ea typeface="NanumGothic"/>
+              </a:rPr>
+              <a:t>표준은 투시 유도 방척추 접근, 성공은 온도 ≥2°C</a:t>
+            </a:r>
+          </a:p>
+        </p:txBody>
+      </p:sp>
+      <p:sp>
+        <p:nvSpPr>
+          <p:cNvPr id="6" name="Rectangle 5"/>
+          <p:cNvSpPr/>
+          <p:nvPr/>
+        </p:nvSpPr>
+        <p:spPr>
+          <a:xfrm>
+            <a:off x="822960" y="2322576"/>
+            <a:ext cx="146304" cy="445385"/>
+          </a:xfrm>
+          <a:prstGeom prst="rect">
+            <a:avLst/>
+          </a:prstGeom>
+          <a:solidFill>
+            <a:srgbClr val="2C898A"/>
+          </a:solidFill>
+          <a:ln>
+            <a:noFill/>
+          </a:ln>
+          <a:effectLst/>
+        </p:spPr>
+        <p:style>
+          <a:lnRef idx="1">
+            <a:schemeClr val="accent1"/>
+          </a:lnRef>
+          <a:fillRef idx="3">
+            <a:schemeClr val="accent1"/>
+          </a:fillRef>
+          <a:effectRef idx="2">
+            <a:schemeClr val="accent1"/>
+          </a:effectRef>
+          <a:fontRef idx="minor">
+            <a:schemeClr val="lt1"/>
+          </a:fontRef>
+        </p:style>
+        <p:txBody>
+          <a:bodyPr rtlCol="0" anchor="ctr"/>
+          <a:lstStyle/>
+          <a:p>
+            <a:pPr algn="ctr"/>
+          </a:p>
+        </p:txBody>
+      </p:sp>
+      <p:sp>
+        <p:nvSpPr>
+          <p:cNvPr id="7" name="TextBox 6"/>
+          <p:cNvSpPr txBox="1"/>
+          <p:nvPr/>
+        </p:nvSpPr>
+        <p:spPr>
+          <a:xfrm>
+            <a:off x="1143000" y="2286000"/>
+            <a:ext cx="2926080" cy="674827"/>
+          </a:xfrm>
+          <a:prstGeom prst="rect">
+            <a:avLst/>
+          </a:prstGeom>
+          <a:noFill/>
+        </p:spPr>
+        <p:txBody>
+          <a:bodyPr wrap="square" anchor="ctr" lIns="0" rIns="0" tIns="0" bIns="0">
+            <a:spAutoFit/>
+          </a:bodyPr>
+          <a:lstStyle/>
+          <a:p>
+            <a:pPr algn="l">
+              <a:lnSpc>
+                <a:spcPct val="108000"/>
+              </a:lnSpc>
+              <a:spcAft>
+                <a:spcPts val="400"/>
+              </a:spcAft>
+            </a:pPr>
+            <a:r>
+              <a:rPr sz="1400" b="1" i="0">
+                <a:solidFill>
+                  <a:srgbClr val="9FE0D8"/>
+                </a:solidFill>
+                <a:latin typeface="NanumGothic"/>
+                <a:ea typeface="NanumGothic"/>
+              </a:rPr>
+              <a:t>방법</a:t>
+            </a:r>
+          </a:p>
+        </p:txBody>
+      </p:sp>
+      <p:sp>
+        <p:nvSpPr>
+          <p:cNvPr id="8" name="TextBox 7"/>
+          <p:cNvSpPr txBox="1"/>
+          <p:nvPr/>
+        </p:nvSpPr>
+        <p:spPr>
+          <a:xfrm>
+            <a:off x="4114800" y="2286000"/>
+            <a:ext cx="7406640" cy="674827"/>
+          </a:xfrm>
+          <a:prstGeom prst="rect">
+            <a:avLst/>
+          </a:prstGeom>
+          <a:noFill/>
+        </p:spPr>
+        <p:txBody>
+          <a:bodyPr wrap="square" anchor="ctr" lIns="0" rIns="0" tIns="0" bIns="0">
+            <a:spAutoFit/>
+          </a:bodyPr>
+          <a:lstStyle/>
+          <a:p>
+            <a:pPr algn="l">
+              <a:lnSpc>
+                <a:spcPct val="105000"/>
+              </a:lnSpc>
+              <a:spcAft>
+                <a:spcPts val="400"/>
+              </a:spcAft>
+            </a:pPr>
+            <a:r>
+              <a:rPr sz="1250" b="0" i="0">
+                <a:solidFill>
+                  <a:srgbClr val="FFFFFF"/>
+                </a:solidFill>
+                <a:latin typeface="NanumGothic"/>
+                <a:ea typeface="NanumGothic"/>
+              </a:rPr>
+              <a:t>L2–L3 방척추 접근·투시, 정중선 7 cm 외측, 조영제 두미측 확산, 성공지표 온도 ≥2°C.</a:t>
+            </a:r>
+          </a:p>
+        </p:txBody>
+      </p:sp>
+      <p:sp>
+        <p:nvSpPr>
+          <p:cNvPr id="9" name="Rectangle 8"/>
+          <p:cNvSpPr/>
+          <p:nvPr/>
+        </p:nvSpPr>
+        <p:spPr>
+          <a:xfrm>
+            <a:off x="822960" y="3072384"/>
+            <a:ext cx="146304" cy="445385"/>
+          </a:xfrm>
+          <a:prstGeom prst="rect">
+            <a:avLst/>
+          </a:prstGeom>
+          <a:solidFill>
+            <a:srgbClr val="2C898A"/>
+          </a:solidFill>
+          <a:ln>
+            <a:noFill/>
+          </a:ln>
+          <a:effectLst/>
+        </p:spPr>
+        <p:style>
+          <a:lnRef idx="1">
+            <a:schemeClr val="accent1"/>
+          </a:lnRef>
+          <a:fillRef idx="3">
+            <a:schemeClr val="accent1"/>
+          </a:fillRef>
+          <a:effectRef idx="2">
+            <a:schemeClr val="accent1"/>
+          </a:effectRef>
+          <a:fontRef idx="minor">
+            <a:schemeClr val="lt1"/>
+          </a:fontRef>
+        </p:style>
+        <p:txBody>
+          <a:bodyPr rtlCol="0" anchor="ctr"/>
+          <a:lstStyle/>
+          <a:p>
+            <a:pPr algn="ctr"/>
+          </a:p>
+        </p:txBody>
+      </p:sp>
+      <p:sp>
+        <p:nvSpPr>
+          <p:cNvPr id="10" name="TextBox 9"/>
+          <p:cNvSpPr txBox="1"/>
+          <p:nvPr/>
+        </p:nvSpPr>
+        <p:spPr>
+          <a:xfrm>
+            <a:off x="1143000" y="3035808"/>
+            <a:ext cx="2926080" cy="674827"/>
+          </a:xfrm>
+          <a:prstGeom prst="rect">
+            <a:avLst/>
+          </a:prstGeom>
+          <a:noFill/>
+        </p:spPr>
+        <p:txBody>
+          <a:bodyPr wrap="square" anchor="ctr" lIns="0" rIns="0" tIns="0" bIns="0">
+            <a:spAutoFit/>
+          </a:bodyPr>
+          <a:lstStyle/>
+          <a:p>
+            <a:pPr algn="l">
+              <a:lnSpc>
+                <a:spcPct val="108000"/>
+              </a:lnSpc>
+              <a:spcAft>
+                <a:spcPts val="400"/>
+              </a:spcAft>
+            </a:pPr>
+            <a:r>
+              <a:rPr sz="1400" b="1" i="0">
+                <a:solidFill>
+                  <a:srgbClr val="9FE0D8"/>
+                </a:solidFill>
+                <a:latin typeface="NanumGothic"/>
+                <a:ea typeface="NanumGothic"/>
+              </a:rPr>
+              <a:t>약제</a:t>
+            </a:r>
+          </a:p>
+        </p:txBody>
+      </p:sp>
+      <p:sp>
+        <p:nvSpPr>
+          <p:cNvPr id="11" name="TextBox 10"/>
+          <p:cNvSpPr txBox="1"/>
+          <p:nvPr/>
+        </p:nvSpPr>
+        <p:spPr>
+          <a:xfrm>
+            <a:off x="4114800" y="3035808"/>
+            <a:ext cx="7406640" cy="674827"/>
+          </a:xfrm>
+          <a:prstGeom prst="rect">
+            <a:avLst/>
+          </a:prstGeom>
+          <a:noFill/>
+        </p:spPr>
+        <p:txBody>
+          <a:bodyPr wrap="square" anchor="ctr" lIns="0" rIns="0" tIns="0" bIns="0">
+            <a:spAutoFit/>
+          </a:bodyPr>
+          <a:lstStyle/>
+          <a:p>
+            <a:pPr algn="l">
+              <a:lnSpc>
+                <a:spcPct val="105000"/>
+              </a:lnSpc>
+              <a:spcAft>
+                <a:spcPts val="400"/>
+              </a:spcAft>
+            </a:pPr>
+            <a:r>
+              <a:rPr sz="1250" b="0" i="0">
+                <a:solidFill>
+                  <a:srgbClr val="FFFFFF"/>
+                </a:solidFill>
+                <a:latin typeface="NanumGothic"/>
+                <a:ea typeface="NanumGothic"/>
+              </a:rPr>
+              <a:t>진단/치료는 국소마취제, 신경파괴는 무수알코올/phenol·RFA — 진단차단 양성 시에만.</a:t>
+            </a:r>
+          </a:p>
+        </p:txBody>
+      </p:sp>
+      <p:sp>
+        <p:nvSpPr>
+          <p:cNvPr id="12" name="Rectangle 11"/>
+          <p:cNvSpPr/>
+          <p:nvPr/>
+        </p:nvSpPr>
+        <p:spPr>
+          <a:xfrm>
+            <a:off x="822960" y="3822191"/>
+            <a:ext cx="146304" cy="445385"/>
+          </a:xfrm>
+          <a:prstGeom prst="rect">
+            <a:avLst/>
+          </a:prstGeom>
+          <a:solidFill>
+            <a:srgbClr val="2C898A"/>
+          </a:solidFill>
+          <a:ln>
+            <a:noFill/>
+          </a:ln>
+          <a:effectLst/>
+        </p:spPr>
+        <p:style>
+          <a:lnRef idx="1">
+            <a:schemeClr val="accent1"/>
+          </a:lnRef>
+          <a:fillRef idx="3">
+            <a:schemeClr val="accent1"/>
+          </a:fillRef>
+          <a:effectRef idx="2">
+            <a:schemeClr val="accent1"/>
+          </a:effectRef>
+          <a:fontRef idx="minor">
+            <a:schemeClr val="lt1"/>
+          </a:fontRef>
+        </p:style>
+        <p:txBody>
+          <a:bodyPr rtlCol="0" anchor="ctr"/>
+          <a:lstStyle/>
+          <a:p>
+            <a:pPr algn="ctr"/>
+          </a:p>
+        </p:txBody>
+      </p:sp>
+      <p:sp>
+        <p:nvSpPr>
+          <p:cNvPr id="13" name="TextBox 12"/>
+          <p:cNvSpPr txBox="1"/>
+          <p:nvPr/>
+        </p:nvSpPr>
+        <p:spPr>
+          <a:xfrm>
+            <a:off x="1143000" y="3785615"/>
+            <a:ext cx="2926080" cy="674827"/>
+          </a:xfrm>
+          <a:prstGeom prst="rect">
+            <a:avLst/>
+          </a:prstGeom>
+          <a:noFill/>
+        </p:spPr>
+        <p:txBody>
+          <a:bodyPr wrap="square" anchor="ctr" lIns="0" rIns="0" tIns="0" bIns="0">
+            <a:spAutoFit/>
+          </a:bodyPr>
+          <a:lstStyle/>
+          <a:p>
+            <a:pPr algn="l">
+              <a:lnSpc>
+                <a:spcPct val="108000"/>
+              </a:lnSpc>
+              <a:spcAft>
+                <a:spcPts val="400"/>
+              </a:spcAft>
+            </a:pPr>
+            <a:r>
+              <a:rPr sz="1400" b="1" i="0">
+                <a:solidFill>
+                  <a:srgbClr val="9FE0D8"/>
+                </a:solidFill>
+                <a:latin typeface="NanumGothic"/>
+                <a:ea typeface="NanumGothic"/>
+              </a:rPr>
+              <a:t>적응증</a:t>
+            </a:r>
+          </a:p>
+        </p:txBody>
+      </p:sp>
+      <p:sp>
+        <p:nvSpPr>
+          <p:cNvPr id="14" name="TextBox 13"/>
+          <p:cNvSpPr txBox="1"/>
+          <p:nvPr/>
+        </p:nvSpPr>
+        <p:spPr>
+          <a:xfrm>
+            <a:off x="4114800" y="3785615"/>
+            <a:ext cx="7406640" cy="674827"/>
+          </a:xfrm>
+          <a:prstGeom prst="rect">
+            <a:avLst/>
+          </a:prstGeom>
+          <a:noFill/>
+        </p:spPr>
+        <p:txBody>
+          <a:bodyPr wrap="square" anchor="ctr" lIns="0" rIns="0" tIns="0" bIns="0">
+            <a:spAutoFit/>
+          </a:bodyPr>
+          <a:lstStyle/>
+          <a:p>
+            <a:pPr algn="l">
+              <a:lnSpc>
+                <a:spcPct val="105000"/>
+              </a:lnSpc>
+              <a:spcAft>
+                <a:spcPts val="400"/>
+              </a:spcAft>
+            </a:pPr>
+            <a:r>
+              <a:rPr sz="1250" b="0" i="0">
+                <a:solidFill>
+                  <a:srgbClr val="FFFFFF"/>
+                </a:solidFill>
+                <a:latin typeface="NanumGothic"/>
+                <a:ea typeface="NanumGothic"/>
+              </a:rPr>
+              <a:t>조기 CRPS·PAD/CLI 안정통·신경병증·다한증 등. 특발성 NLC·정맥질환(정맥류)은 적응 아님.</a:t>
+            </a:r>
+          </a:p>
+        </p:txBody>
+      </p:sp>
+      <p:sp>
+        <p:nvSpPr>
+          <p:cNvPr id="15" name="Rectangle 14"/>
+          <p:cNvSpPr/>
+          <p:nvPr/>
+        </p:nvSpPr>
+        <p:spPr>
+          <a:xfrm>
+            <a:off x="822960" y="4572000"/>
+            <a:ext cx="146304" cy="445385"/>
+          </a:xfrm>
+          <a:prstGeom prst="rect">
+            <a:avLst/>
+          </a:prstGeom>
+          <a:solidFill>
+            <a:srgbClr val="2C898A"/>
+          </a:solidFill>
+          <a:ln>
+            <a:noFill/>
+          </a:ln>
+          <a:effectLst/>
+        </p:spPr>
+        <p:style>
+          <a:lnRef idx="1">
+            <a:schemeClr val="accent1"/>
+          </a:lnRef>
+          <a:fillRef idx="3">
+            <a:schemeClr val="accent1"/>
+          </a:fillRef>
+          <a:effectRef idx="2">
+            <a:schemeClr val="accent1"/>
+          </a:effectRef>
+          <a:fontRef idx="minor">
+            <a:schemeClr val="lt1"/>
+          </a:fontRef>
+        </p:style>
+        <p:txBody>
+          <a:bodyPr rtlCol="0" anchor="ctr"/>
+          <a:lstStyle/>
+          <a:p>
+            <a:pPr algn="ctr"/>
+          </a:p>
+        </p:txBody>
+      </p:sp>
+      <p:sp>
+        <p:nvSpPr>
+          <p:cNvPr id="16" name="TextBox 15"/>
+          <p:cNvSpPr txBox="1"/>
+          <p:nvPr/>
+        </p:nvSpPr>
+        <p:spPr>
+          <a:xfrm>
+            <a:off x="1143000" y="4535424"/>
+            <a:ext cx="2926080" cy="674827"/>
+          </a:xfrm>
+          <a:prstGeom prst="rect">
+            <a:avLst/>
+          </a:prstGeom>
+          <a:noFill/>
+        </p:spPr>
+        <p:txBody>
+          <a:bodyPr wrap="square" anchor="ctr" lIns="0" rIns="0" tIns="0" bIns="0">
+            <a:spAutoFit/>
+          </a:bodyPr>
+          <a:lstStyle/>
+          <a:p>
+            <a:pPr algn="l">
+              <a:lnSpc>
+                <a:spcPct val="108000"/>
+              </a:lnSpc>
+              <a:spcAft>
+                <a:spcPts val="400"/>
+              </a:spcAft>
+            </a:pPr>
+            <a:r>
+              <a:rPr sz="1400" b="1" i="0">
+                <a:solidFill>
+                  <a:srgbClr val="9FE0D8"/>
+                </a:solidFill>
+                <a:latin typeface="NanumGothic"/>
+                <a:ea typeface="NanumGothic"/>
+              </a:rPr>
+              <a:t>효과</a:t>
+            </a:r>
+          </a:p>
+        </p:txBody>
+      </p:sp>
+      <p:sp>
+        <p:nvSpPr>
+          <p:cNvPr id="17" name="TextBox 16"/>
+          <p:cNvSpPr txBox="1"/>
+          <p:nvPr/>
+        </p:nvSpPr>
+        <p:spPr>
+          <a:xfrm>
+            <a:off x="4114800" y="4535424"/>
+            <a:ext cx="7406640" cy="674827"/>
+          </a:xfrm>
+          <a:prstGeom prst="rect">
+            <a:avLst/>
+          </a:prstGeom>
+          <a:noFill/>
+        </p:spPr>
+        <p:txBody>
+          <a:bodyPr wrap="square" anchor="ctr" lIns="0" rIns="0" tIns="0" bIns="0">
+            <a:spAutoFit/>
+          </a:bodyPr>
+          <a:lstStyle/>
+          <a:p>
+            <a:pPr algn="l">
+              <a:lnSpc>
+                <a:spcPct val="105000"/>
+              </a:lnSpc>
+              <a:spcAft>
+                <a:spcPts val="400"/>
+              </a:spcAft>
+            </a:pPr>
+            <a:r>
+              <a:rPr sz="1250" b="0" i="0">
+                <a:solidFill>
+                  <a:srgbClr val="FFFFFF"/>
+                </a:solidFill>
+                <a:latin typeface="NanumGothic"/>
+                <a:ea typeface="NanumGothic"/>
+              </a:rPr>
+              <a:t>관류 실측 개선(Dickey), 허혈통 최대 75%↓, CRPS 통증완화(교감피부반응으로 예측).</a:t>
+            </a:r>
+          </a:p>
+        </p:txBody>
+      </p:sp>
+      <p:sp>
+        <p:nvSpPr>
+          <p:cNvPr id="18" name="Rectangle 17"/>
+          <p:cNvSpPr/>
+          <p:nvPr/>
+        </p:nvSpPr>
+        <p:spPr>
+          <a:xfrm>
+            <a:off x="822960" y="5321807"/>
+            <a:ext cx="146304" cy="445385"/>
+          </a:xfrm>
+          <a:prstGeom prst="rect">
+            <a:avLst/>
+          </a:prstGeom>
+          <a:solidFill>
+            <a:srgbClr val="2C898A"/>
+          </a:solidFill>
+          <a:ln>
+            <a:noFill/>
+          </a:ln>
+          <a:effectLst/>
+        </p:spPr>
+        <p:style>
+          <a:lnRef idx="1">
+            <a:schemeClr val="accent1"/>
+          </a:lnRef>
+          <a:fillRef idx="3">
+            <a:schemeClr val="accent1"/>
+          </a:fillRef>
+          <a:effectRef idx="2">
+            <a:schemeClr val="accent1"/>
+          </a:effectRef>
+          <a:fontRef idx="minor">
+            <a:schemeClr val="lt1"/>
+          </a:fontRef>
+        </p:style>
+        <p:txBody>
+          <a:bodyPr rtlCol="0" anchor="ctr"/>
+          <a:lstStyle/>
+          <a:p>
+            <a:pPr algn="ctr"/>
+          </a:p>
+        </p:txBody>
+      </p:sp>
+      <p:sp>
+        <p:nvSpPr>
+          <p:cNvPr id="19" name="TextBox 18"/>
+          <p:cNvSpPr txBox="1"/>
+          <p:nvPr/>
+        </p:nvSpPr>
+        <p:spPr>
+          <a:xfrm>
+            <a:off x="1143000" y="5285231"/>
+            <a:ext cx="2926080" cy="674827"/>
+          </a:xfrm>
+          <a:prstGeom prst="rect">
+            <a:avLst/>
+          </a:prstGeom>
+          <a:noFill/>
+        </p:spPr>
+        <p:txBody>
+          <a:bodyPr wrap="square" anchor="ctr" lIns="0" rIns="0" tIns="0" bIns="0">
+            <a:spAutoFit/>
+          </a:bodyPr>
+          <a:lstStyle/>
+          <a:p>
+            <a:pPr algn="l">
+              <a:lnSpc>
+                <a:spcPct val="108000"/>
+              </a:lnSpc>
+              <a:spcAft>
+                <a:spcPts val="400"/>
+              </a:spcAft>
+            </a:pPr>
+            <a:r>
+              <a:rPr sz="1400" b="1" i="0">
+                <a:solidFill>
+                  <a:srgbClr val="9FE0D8"/>
+                </a:solidFill>
+                <a:latin typeface="NanumGothic"/>
+                <a:ea typeface="NanumGothic"/>
+              </a:rPr>
+              <a:t>근거</a:t>
+            </a:r>
+          </a:p>
+        </p:txBody>
+      </p:sp>
+      <p:sp>
+        <p:nvSpPr>
+          <p:cNvPr id="20" name="TextBox 19"/>
+          <p:cNvSpPr txBox="1"/>
+          <p:nvPr/>
+        </p:nvSpPr>
+        <p:spPr>
+          <a:xfrm>
+            <a:off x="4114800" y="5285231"/>
+            <a:ext cx="7406640" cy="674827"/>
+          </a:xfrm>
+          <a:prstGeom prst="rect">
+            <a:avLst/>
+          </a:prstGeom>
+          <a:noFill/>
+        </p:spPr>
+        <p:txBody>
+          <a:bodyPr wrap="square" anchor="ctr" lIns="0" rIns="0" tIns="0" bIns="0">
+            <a:spAutoFit/>
+          </a:bodyPr>
+          <a:lstStyle/>
+          <a:p>
+            <a:pPr algn="l">
+              <a:lnSpc>
+                <a:spcPct val="105000"/>
+              </a:lnSpc>
+              <a:spcAft>
+                <a:spcPts val="400"/>
+              </a:spcAft>
+            </a:pPr>
+            <a:r>
+              <a:rPr sz="1250" b="0" i="0">
+                <a:solidFill>
+                  <a:srgbClr val="FFFFFF"/>
+                </a:solidFill>
+                <a:latin typeface="NanumGothic"/>
+                <a:ea typeface="NanumGothic"/>
+              </a:rPr>
+              <a:t>대규모 RCT 부족(관찰·증례 중심). 조기 CRPS·비재건성 CLI에서 유용.</a:t>
+            </a:r>
+          </a:p>
+        </p:txBody>
+      </p:sp>
+    </p:spTree>
+  </p:cSld>
+  <p:clrMapOvr>
+    <a:masterClrMapping/>
+  </p:clrMapOvr>
+</p:sld>
+</file>
+
+<file path=ppt/slides/slide12.xml><?xml version="1.0" encoding="utf-8"?>
+<p:sld xmlns:a="http://schemas.openxmlformats.org/drawingml/2006/main" xmlns:p="http://schemas.openxmlformats.org/presentationml/2006/main" xmlns:r="http://schemas.openxmlformats.org/officeDocument/2006/relationships">
+  <p:cSld>
+    <p:spTree>
+      <p:nvGrpSpPr>
+        <p:cNvPr id="1" name=""/>
+        <p:cNvGrpSpPr/>
+        <p:nvPr/>
+      </p:nvGrpSpPr>
+      <p:grpSpPr/>
+      <p:sp>
+        <p:nvSpPr>
+          <p:cNvPr id="2" name="Rectangle 1"/>
+          <p:cNvSpPr/>
+          <p:nvPr/>
+        </p:nvSpPr>
+        <p:spPr>
+          <a:xfrm>
+            <a:off x="502920" y="310896"/>
+            <a:ext cx="109728" cy="457200"/>
+          </a:xfrm>
+          <a:prstGeom prst="rect">
+            <a:avLst/>
+          </a:prstGeom>
+          <a:solidFill>
+            <a:srgbClr val="2C898A"/>
+          </a:solidFill>
+          <a:ln>
+            <a:noFill/>
+          </a:ln>
+          <a:effectLst/>
+        </p:spPr>
+        <p:style>
+          <a:lnRef idx="1">
+            <a:schemeClr val="accent1"/>
+          </a:lnRef>
+          <a:fillRef idx="3">
+            <a:schemeClr val="accent1"/>
+          </a:fillRef>
+          <a:effectRef idx="2">
+            <a:schemeClr val="accent1"/>
+          </a:effectRef>
+          <a:fontRef idx="minor">
+            <a:schemeClr val="lt1"/>
+          </a:fontRef>
+        </p:style>
+        <p:txBody>
+          <a:bodyPr rtlCol="0" anchor="ctr"/>
+          <a:lstStyle/>
+          <a:p>
+            <a:pPr algn="ctr"/>
+          </a:p>
+        </p:txBody>
+      </p:sp>
+      <p:sp>
+        <p:nvSpPr>
+          <p:cNvPr id="3" name="TextBox 2"/>
+          <p:cNvSpPr txBox="1"/>
+          <p:nvPr/>
+        </p:nvSpPr>
+        <p:spPr>
+          <a:xfrm>
+            <a:off x="731520" y="237744"/>
+            <a:ext cx="9509760" cy="685800"/>
+          </a:xfrm>
+          <a:prstGeom prst="rect">
+            <a:avLst/>
+          </a:prstGeom>
+          <a:noFill/>
+        </p:spPr>
+        <p:txBody>
+          <a:bodyPr wrap="square" anchor="ctr" lIns="0" rIns="0" tIns="0" bIns="0">
+            <a:spAutoFit/>
+          </a:bodyPr>
+          <a:lstStyle/>
+          <a:p>
+            <a:pPr algn="l">
+              <a:lnSpc>
+                <a:spcPct val="108000"/>
+              </a:lnSpc>
+              <a:spcAft>
+                <a:spcPts val="400"/>
+              </a:spcAft>
+            </a:pPr>
+            <a:r>
+              <a:rPr sz="2400" b="1" i="0">
+                <a:solidFill>
+                  <a:srgbClr val="1B355E"/>
+                </a:solidFill>
+                <a:latin typeface="NanumGothic"/>
+                <a:ea typeface="NanumGothic"/>
+              </a:rPr>
+              <a:t>참고문헌 — LSB</a:t>
+            </a:r>
+          </a:p>
+        </p:txBody>
+      </p:sp>
+      <p:sp>
+        <p:nvSpPr>
+          <p:cNvPr id="4" name="TextBox 3"/>
+          <p:cNvSpPr txBox="1"/>
+          <p:nvPr/>
+        </p:nvSpPr>
+        <p:spPr>
+          <a:xfrm>
+            <a:off x="749808" y="109728"/>
+            <a:ext cx="7315200" cy="219456"/>
+          </a:xfrm>
+          <a:prstGeom prst="rect">
+            <a:avLst/>
+          </a:prstGeom>
+          <a:noFill/>
+        </p:spPr>
+        <p:txBody>
+          <a:bodyPr wrap="square" anchor="t" lIns="0" rIns="0" tIns="0" bIns="0">
+            <a:spAutoFit/>
+          </a:bodyPr>
+          <a:lstStyle/>
+          <a:p>
+            <a:pPr algn="l">
+              <a:lnSpc>
+                <a:spcPct val="108000"/>
+              </a:lnSpc>
+              <a:spcAft>
+                <a:spcPts val="400"/>
+              </a:spcAft>
+            </a:pPr>
+            <a:r>
+              <a:rPr sz="1100" b="1" i="0">
+                <a:solidFill>
+                  <a:srgbClr val="1F6E70"/>
+                </a:solidFill>
+                <a:latin typeface="NanumGothic"/>
+                <a:ea typeface="NanumGothic"/>
+              </a:rPr>
+              <a:t>참고문헌</a:t>
+            </a:r>
+          </a:p>
+        </p:txBody>
+      </p:sp>
+      <p:sp>
+        <p:nvSpPr>
+          <p:cNvPr id="5" name="Rectangle 4"/>
+          <p:cNvSpPr/>
+          <p:nvPr/>
+        </p:nvSpPr>
+        <p:spPr>
+          <a:xfrm>
+            <a:off x="731520" y="969264"/>
+            <a:ext cx="10881360" cy="17780"/>
+          </a:xfrm>
+          <a:prstGeom prst="rect">
+            <a:avLst/>
+          </a:prstGeom>
+          <a:solidFill>
+            <a:srgbClr val="D5DEE7"/>
+          </a:solidFill>
+          <a:ln>
+            <a:noFill/>
+          </a:ln>
+          <a:effectLst/>
+        </p:spPr>
+        <p:style>
+          <a:lnRef idx="1">
+            <a:schemeClr val="accent1"/>
+          </a:lnRef>
+          <a:fillRef idx="3">
+            <a:schemeClr val="accent1"/>
+          </a:fillRef>
+          <a:effectRef idx="2">
+            <a:schemeClr val="accent1"/>
+          </a:effectRef>
+          <a:fontRef idx="minor">
+            <a:schemeClr val="lt1"/>
+          </a:fontRef>
+        </p:style>
+        <p:txBody>
+          <a:bodyPr rtlCol="0" anchor="ctr"/>
+          <a:lstStyle/>
+          <a:p>
+            <a:pPr algn="ctr"/>
+          </a:p>
+        </p:txBody>
+      </p:sp>
+      <p:sp>
+        <p:nvSpPr>
+          <p:cNvPr id="6" name="Rounded Rectangle 5"/>
+          <p:cNvSpPr/>
+          <p:nvPr/>
+        </p:nvSpPr>
+        <p:spPr>
+          <a:xfrm>
+            <a:off x="10317175" y="365760"/>
+            <a:ext cx="1371600" cy="347472"/>
+          </a:xfrm>
+          <a:prstGeom prst="roundRect">
+            <a:avLst>
+              <a:gd name="adj" fmla="val 8000"/>
+            </a:avLst>
+          </a:prstGeom>
+          <a:solidFill>
+            <a:srgbClr val="2C898A"/>
+          </a:solidFill>
+          <a:ln>
+            <a:noFill/>
+          </a:ln>
+          <a:effectLst/>
+        </p:spPr>
+        <p:style>
+          <a:lnRef idx="1">
+            <a:schemeClr val="accent1"/>
+          </a:lnRef>
+          <a:fillRef idx="3">
+            <a:schemeClr val="accent1"/>
+          </a:fillRef>
+          <a:effectRef idx="2">
+            <a:schemeClr val="accent1"/>
+          </a:effectRef>
+          <a:fontRef idx="minor">
+            <a:schemeClr val="lt1"/>
+          </a:fontRef>
+        </p:style>
+        <p:txBody>
+          <a:bodyPr rtlCol="0" anchor="ctr"/>
+          <a:lstStyle/>
+          <a:p>
+            <a:pPr algn="ctr"/>
+          </a:p>
+        </p:txBody>
+      </p:sp>
+      <p:sp>
+        <p:nvSpPr>
+          <p:cNvPr id="7" name="TextBox 6"/>
+          <p:cNvSpPr txBox="1"/>
+          <p:nvPr/>
+        </p:nvSpPr>
+        <p:spPr>
+          <a:xfrm>
+            <a:off x="10317175" y="365760"/>
+            <a:ext cx="1371600" cy="347472"/>
+          </a:xfrm>
+          <a:prstGeom prst="rect">
+            <a:avLst/>
+          </a:prstGeom>
+          <a:noFill/>
+        </p:spPr>
+        <p:txBody>
+          <a:bodyPr wrap="square" anchor="ctr" lIns="0" rIns="0" tIns="0" bIns="0">
+            <a:spAutoFit/>
+          </a:bodyPr>
+          <a:lstStyle/>
+          <a:p>
+            <a:pPr algn="ctr">
+              <a:lnSpc>
+                <a:spcPct val="108000"/>
+              </a:lnSpc>
+              <a:spcAft>
+                <a:spcPts val="400"/>
+              </a:spcAft>
+            </a:pPr>
+            <a:r>
+              <a:rPr sz="1150" b="1" i="0">
+                <a:solidFill>
+                  <a:srgbClr val="FFFFFF"/>
+                </a:solidFill>
+                <a:latin typeface="NanumGothic"/>
+                <a:ea typeface="NanumGothic"/>
+              </a:rPr>
+              <a:t>References</a:t>
+            </a:r>
+          </a:p>
+        </p:txBody>
+      </p:sp>
+      <p:sp>
+        <p:nvSpPr>
+          <p:cNvPr id="8" name="TextBox 7"/>
+          <p:cNvSpPr txBox="1"/>
+          <p:nvPr/>
+        </p:nvSpPr>
+        <p:spPr>
+          <a:xfrm>
+            <a:off x="731520" y="1371600"/>
+            <a:ext cx="5257800" cy="4846320"/>
+          </a:xfrm>
+          <a:prstGeom prst="rect">
+            <a:avLst/>
+          </a:prstGeom>
+          <a:noFill/>
+        </p:spPr>
+        <p:txBody>
+          <a:bodyPr wrap="square" anchor="t" lIns="0" rIns="0" tIns="0" bIns="0">
+            <a:spAutoFit/>
+          </a:bodyPr>
+          <a:lstStyle/>
+          <a:p>
+            <a:pPr algn="l">
+              <a:lnSpc>
+                <a:spcPct val="105000"/>
+              </a:lnSpc>
+              <a:spcAft>
+                <a:spcPts val="700"/>
+              </a:spcAft>
+            </a:pPr>
+            <a:r>
+              <a:rPr sz="1000" b="0" i="0">
+                <a:solidFill>
+                  <a:srgbClr val="1A202C"/>
+                </a:solidFill>
+                <a:latin typeface="NanumGothic"/>
+                <a:ea typeface="NanumGothic"/>
+              </a:rPr>
+              <a:t>Dua A, Varacallo MA. Lumbar sympathetic block. StatPearls. 2026. NBK431107.</a:t>
+            </a:r>
+          </a:p>
+          <a:p>
+            <a:pPr algn="l">
+              <a:lnSpc>
+                <a:spcPct val="105000"/>
+              </a:lnSpc>
+              <a:spcAft>
+                <a:spcPts val="700"/>
+              </a:spcAft>
+            </a:pPr>
+            <a:r>
+              <a:rPr sz="1000" b="0" i="0">
+                <a:solidFill>
+                  <a:srgbClr val="1A202C"/>
+                </a:solidFill>
+                <a:latin typeface="NanumGothic"/>
+                <a:ea typeface="NanumGothic"/>
+              </a:rPr>
+              <a:t>Lumbar sympatholysis. StatPearls. NBK560514.</a:t>
+            </a:r>
+          </a:p>
+          <a:p>
+            <a:pPr algn="l">
+              <a:lnSpc>
+                <a:spcPct val="105000"/>
+              </a:lnSpc>
+              <a:spcAft>
+                <a:spcPts val="700"/>
+              </a:spcAft>
+            </a:pPr>
+            <a:r>
+              <a:rPr sz="1000" b="0" i="0">
+                <a:solidFill>
+                  <a:srgbClr val="1A202C"/>
+                </a:solidFill>
+                <a:latin typeface="NanumGothic"/>
+                <a:ea typeface="NanumGothic"/>
+              </a:rPr>
+              <a:t>Zhang JH, Deng YP, Geng MJ. Efficacy of the lumbar sympathetic ganglion block in lower limb pain. Ibrain. 2022;8(4):442-52. PMID 37786587.</a:t>
+            </a:r>
+          </a:p>
+          <a:p>
+            <a:pPr algn="l">
+              <a:lnSpc>
+                <a:spcPct val="105000"/>
+              </a:lnSpc>
+              <a:spcAft>
+                <a:spcPts val="700"/>
+              </a:spcAft>
+            </a:pPr>
+            <a:r>
+              <a:rPr sz="1000" b="0" i="0">
+                <a:solidFill>
+                  <a:srgbClr val="1A202C"/>
+                </a:solidFill>
+                <a:latin typeface="NanumGothic"/>
+                <a:ea typeface="NanumGothic"/>
+              </a:rPr>
+              <a:t>Dickey Z, Sharma N. Lumbar sympathetic block leading to increased arterial diameter and blood flow. Cureus. 2024;16(6):e61755. PMID 38975506.</a:t>
+            </a:r>
+          </a:p>
+          <a:p>
+            <a:pPr algn="l">
+              <a:lnSpc>
+                <a:spcPct val="105000"/>
+              </a:lnSpc>
+              <a:spcAft>
+                <a:spcPts val="700"/>
+              </a:spcAft>
+            </a:pPr>
+            <a:r>
+              <a:rPr sz="1000" b="0" i="0">
+                <a:solidFill>
+                  <a:srgbClr val="1A202C"/>
+                </a:solidFill>
+                <a:latin typeface="NanumGothic"/>
+                <a:ea typeface="NanumGothic"/>
+              </a:rPr>
+              <a:t>Barreto Junior EPS, et al. Neurolytic block of the lumbar sympathetic chain in critical lower limb ischemia. Braz J Anesthesiol. 2018;68(1):100-3. PMC9391669.</a:t>
+            </a:r>
+          </a:p>
+          <a:p>
+            <a:pPr algn="l">
+              <a:lnSpc>
+                <a:spcPct val="105000"/>
+              </a:lnSpc>
+              <a:spcAft>
+                <a:spcPts val="700"/>
+              </a:spcAft>
+            </a:pPr>
+            <a:r>
+              <a:rPr sz="1000" b="0" i="0">
+                <a:solidFill>
+                  <a:srgbClr val="1A202C"/>
+                </a:solidFill>
+                <a:latin typeface="NanumGothic"/>
+                <a:ea typeface="NanumGothic"/>
+              </a:rPr>
+              <a:t>Choi EJ, et al. Effect duration of lumbar sympathetic ganglion neurolysis in CRPS. Sci Rep. 2024;14(1):12693. PMID 38830944.</a:t>
+            </a:r>
+          </a:p>
+        </p:txBody>
+      </p:sp>
+      <p:sp>
+        <p:nvSpPr>
+          <p:cNvPr id="9" name="TextBox 8"/>
+          <p:cNvSpPr txBox="1"/>
+          <p:nvPr/>
+        </p:nvSpPr>
+        <p:spPr>
+          <a:xfrm>
+            <a:off x="6217920" y="1371600"/>
+            <a:ext cx="5257800" cy="4846320"/>
+          </a:xfrm>
+          <a:prstGeom prst="rect">
+            <a:avLst/>
+          </a:prstGeom>
+          <a:noFill/>
+        </p:spPr>
+        <p:txBody>
+          <a:bodyPr wrap="square" anchor="t" lIns="0" rIns="0" tIns="0" bIns="0">
+            <a:spAutoFit/>
+          </a:bodyPr>
+          <a:lstStyle/>
+          <a:p>
+            <a:pPr algn="l">
+              <a:lnSpc>
+                <a:spcPct val="105000"/>
+              </a:lnSpc>
+              <a:spcAft>
+                <a:spcPts val="700"/>
+              </a:spcAft>
+            </a:pPr>
+            <a:r>
+              <a:rPr sz="1000" b="0" i="0">
+                <a:solidFill>
+                  <a:srgbClr val="1A202C"/>
+                </a:solidFill>
+                <a:latin typeface="NanumGothic"/>
+                <a:ea typeface="NanumGothic"/>
+              </a:rPr>
+              <a:t>Gungor S, et al. Sympathetic blocks for CRPS: a case series. Medicine (Baltimore). 2018;97(19):e0705. PMID 29742728.</a:t>
+            </a:r>
+          </a:p>
+          <a:p>
+            <a:pPr algn="l">
+              <a:lnSpc>
+                <a:spcPct val="105000"/>
+              </a:lnSpc>
+              <a:spcAft>
+                <a:spcPts val="700"/>
+              </a:spcAft>
+            </a:pPr>
+            <a:r>
+              <a:rPr sz="1000" b="0" i="0">
+                <a:solidFill>
+                  <a:srgbClr val="1A202C"/>
+                </a:solidFill>
+                <a:latin typeface="NanumGothic"/>
+                <a:ea typeface="NanumGothic"/>
+              </a:rPr>
+              <a:t>Effect of lumbar sympathetic blockade on pain, Fontaine classification, collateral perfusion in PAD. Medicina (Kaunas). 2024;60(5):682.</a:t>
+            </a:r>
+          </a:p>
+          <a:p>
+            <a:pPr algn="l">
+              <a:lnSpc>
+                <a:spcPct val="105000"/>
+              </a:lnSpc>
+              <a:spcAft>
+                <a:spcPts val="700"/>
+              </a:spcAft>
+            </a:pPr>
+            <a:r>
+              <a:rPr sz="1000" b="0" i="0">
+                <a:solidFill>
+                  <a:srgbClr val="1A202C"/>
+                </a:solidFill>
+                <a:latin typeface="NanumGothic"/>
+                <a:ea typeface="NanumGothic"/>
+              </a:rPr>
+              <a:t>Prediction of LSB efficacy in CRPS type 1 by sympathetic skin response. Pain Ther. 2023;12(3):809-22. PMC10199976.</a:t>
+            </a:r>
+          </a:p>
+          <a:p>
+            <a:pPr algn="l">
+              <a:lnSpc>
+                <a:spcPct val="105000"/>
+              </a:lnSpc>
+              <a:spcAft>
+                <a:spcPts val="700"/>
+              </a:spcAft>
+            </a:pPr>
+            <a:r>
+              <a:rPr sz="1000" b="0" i="0">
+                <a:solidFill>
+                  <a:srgbClr val="1A202C"/>
+                </a:solidFill>
+                <a:latin typeface="NanumGothic"/>
+                <a:ea typeface="NanumGothic"/>
+              </a:rPr>
+              <a:t>Continuous LSB + sympatholysis for refractory painful diabetic neuropathy — RCT. 2020. PMID 32915421.</a:t>
+            </a:r>
+          </a:p>
+          <a:p>
+            <a:pPr algn="l">
+              <a:lnSpc>
+                <a:spcPct val="105000"/>
+              </a:lnSpc>
+              <a:spcAft>
+                <a:spcPts val="700"/>
+              </a:spcAft>
+            </a:pPr>
+            <a:r>
+              <a:rPr sz="1000" b="0" i="0">
+                <a:solidFill>
+                  <a:srgbClr val="1A202C"/>
+                </a:solidFill>
+                <a:latin typeface="NanumGothic"/>
+                <a:ea typeface="NanumGothic"/>
+              </a:rPr>
+              <a:t>Sympathetic blocks: sustained relief in refractory painful diabetic neuropathy (case). 2012. PMID 22606406.</a:t>
+            </a:r>
+          </a:p>
+          <a:p>
+            <a:pPr algn="l">
+              <a:lnSpc>
+                <a:spcPct val="105000"/>
+              </a:lnSpc>
+              <a:spcAft>
+                <a:spcPts val="700"/>
+              </a:spcAft>
+            </a:pPr>
+            <a:r>
+              <a:rPr sz="1000" b="0" i="0">
+                <a:solidFill>
+                  <a:srgbClr val="1A202C"/>
+                </a:solidFill>
+                <a:latin typeface="NanumGothic"/>
+                <a:ea typeface="NanumGothic"/>
+              </a:rPr>
+              <a:t>Lumbar sympathectomy for ischaemia·vasculitis·diabetic neuropathy·hyperhidrosis — series. 2018. PMID 29516399.</a:t>
+            </a:r>
+          </a:p>
+        </p:txBody>
+      </p:sp>
+      <p:sp>
+        <p:nvSpPr>
+          <p:cNvPr id="10" name="TextBox 9"/>
+          <p:cNvSpPr txBox="1"/>
+          <p:nvPr/>
+        </p:nvSpPr>
+        <p:spPr>
+          <a:xfrm>
+            <a:off x="731520" y="6455664"/>
+            <a:ext cx="9875520" cy="292608"/>
+          </a:xfrm>
+          <a:prstGeom prst="rect">
+            <a:avLst/>
+          </a:prstGeom>
+          <a:noFill/>
+        </p:spPr>
+        <p:txBody>
+          <a:bodyPr wrap="square" anchor="ctr" lIns="0" rIns="0" tIns="0" bIns="0">
+            <a:spAutoFit/>
+          </a:bodyPr>
+          <a:lstStyle/>
+          <a:p>
+            <a:pPr algn="l">
+              <a:lnSpc>
+                <a:spcPct val="108000"/>
+              </a:lnSpc>
+              <a:spcAft>
+                <a:spcPts val="400"/>
+              </a:spcAft>
+            </a:pPr>
+            <a:r>
+              <a:rPr sz="900" b="0" i="0">
+                <a:solidFill>
+                  <a:srgbClr val="5A6B7B"/>
+                </a:solidFill>
+                <a:latin typeface="NanumGothic"/>
+                <a:ea typeface="NanumGothic"/>
+              </a:rPr>
+              <a:t>근거: PubMed/저널 목록 대조 — 조작 인용 없음</a:t>
+            </a:r>
+          </a:p>
+        </p:txBody>
+      </p:sp>
+      <p:sp>
+        <p:nvSpPr>
+          <p:cNvPr id="11" name="TextBox 10"/>
+          <p:cNvSpPr txBox="1"/>
+          <p:nvPr/>
+        </p:nvSpPr>
+        <p:spPr>
+          <a:xfrm>
+            <a:off x="11064240" y="6455664"/>
+            <a:ext cx="822960" cy="292608"/>
+          </a:xfrm>
+          <a:prstGeom prst="rect">
+            <a:avLst/>
+          </a:prstGeom>
+          <a:noFill/>
+        </p:spPr>
+        <p:txBody>
+          <a:bodyPr wrap="square" anchor="ctr" lIns="0" rIns="0" tIns="0" bIns="0">
+            <a:spAutoFit/>
+          </a:bodyPr>
+          <a:lstStyle/>
+          <a:p>
+            <a:pPr algn="r">
+              <a:lnSpc>
+                <a:spcPct val="108000"/>
+              </a:lnSpc>
+              <a:spcAft>
+                <a:spcPts val="400"/>
+              </a:spcAft>
+            </a:pPr>
+            <a:r>
+              <a:rPr sz="1000" b="1" i="0">
+                <a:solidFill>
+                  <a:srgbClr val="5A6B7B"/>
+                </a:solidFill>
+                <a:latin typeface="NanumGothic"/>
+                <a:ea typeface="NanumGothic"/>
+              </a:rPr>
+              <a:t>12</a:t>
+            </a:r>
+          </a:p>
+        </p:txBody>
+      </p:sp>
+    </p:spTree>
+  </p:cSld>
+  <p:clrMapOvr>
+    <a:masterClrMapping/>
+  </p:clrMapOvr>
+</p:sld>
+</file>
+
 <file path=ppt/slides/slide2.xml><?xml version="1.0" encoding="utf-8"?>
 <p:sld xmlns:a="http://schemas.openxmlformats.org/drawingml/2006/main" xmlns:p="http://schemas.openxmlformats.org/presentationml/2006/main" xmlns:r="http://schemas.openxmlformats.org/officeDocument/2006/relationships">
   <p:cSld>
@@ -5577,7 +7585,7 @@
                 <a:latin typeface="NanumGothic"/>
                 <a:ea typeface="NanumGothic"/>
               </a:rPr>
-              <a:t>효과 (1) 관류 개선 · 허혈성 통증</a:t>
+              <a:t>적응증별 환자 증상·호소 ① — 통증증후군·허혈</a:t>
             </a:r>
           </a:p>
         </p:txBody>
@@ -5620,7 +7628,7 @@
                 <a:latin typeface="NanumGothic"/>
                 <a:ea typeface="NanumGothic"/>
               </a:rPr>
-              <a:t>효과</a:t>
+              <a:t>적응증 · 증상</a:t>
             </a:r>
           </a:p>
         </p:txBody>
@@ -5677,8 +7685,8 @@
         </p:nvSpPr>
         <p:spPr>
           <a:xfrm>
-            <a:off x="11194999" y="365760"/>
-            <a:ext cx="493776" cy="347472"/>
+            <a:off x="10865816" y="365760"/>
+            <a:ext cx="822959" cy="347472"/>
           </a:xfrm>
           <a:prstGeom prst="roundRect">
             <a:avLst>
@@ -5686,7 +7694,7 @@
             </a:avLst>
           </a:prstGeom>
           <a:solidFill>
-            <a:srgbClr val="2E7D32"/>
+            <a:srgbClr val="2C898A"/>
           </a:solidFill>
           <a:ln>
             <a:noFill/>
@@ -5723,8 +7731,8 @@
         </p:nvSpPr>
         <p:spPr>
           <a:xfrm>
-            <a:off x="11194999" y="365760"/>
-            <a:ext cx="493776" cy="347472"/>
+            <a:off x="10865816" y="365760"/>
+            <a:ext cx="822959" cy="347472"/>
           </a:xfrm>
           <a:prstGeom prst="rect">
             <a:avLst/>
@@ -5753,7 +7761,7 @@
                 <a:latin typeface="NanumGothic"/>
                 <a:ea typeface="NanumGothic"/>
               </a:rPr>
-              <a:t>효과</a:t>
+              <a:t>환자 증상</a:t>
             </a:r>
           </a:p>
         </p:txBody>
@@ -5767,7 +7775,7 @@
         <p:spPr>
           <a:xfrm>
             <a:off x="731520" y="1371600"/>
-            <a:ext cx="6400800" cy="4663440"/>
+            <a:ext cx="10835640" cy="4754880"/>
           </a:xfrm>
           <a:prstGeom prst="rect">
             <a:avLst/>
@@ -5785,7 +7793,7 @@
                 <a:spcPct val="108000"/>
               </a:lnSpc>
               <a:spcAft>
-                <a:spcPts val="800"/>
+                <a:spcPts val="600"/>
               </a:spcAft>
             </a:pPr>
             <a:r>
@@ -5806,16 +7814,76 @@
                 <a:latin typeface="NanumGothic"/>
                 <a:ea typeface="NanumGothic"/>
               </a:rPr>
-              <a:t>관류 실측(Dickey 2024): LSB 후 후경골동맥 직경 0.17→0.27 cm(+58.8%), 모세혈관 재충혈 3.92→1.30초, 족부온도 +2.8°C.</a:t>
-            </a:r>
-          </a:p>
-          <a:p>
-            <a:pPr algn="l">
-              <a:lnSpc>
-                <a:spcPct val="108000"/>
-              </a:lnSpc>
-              <a:spcAft>
-                <a:spcPts val="800"/>
+              <a:t>하지 CRPS I/II (복합부위통증증후군) — 교감신경 매개 통증의 전형</a:t>
+            </a:r>
+          </a:p>
+          <a:p>
+            <a:pPr algn="l">
+              <a:lnSpc>
+                <a:spcPct val="108000"/>
+              </a:lnSpc>
+              <a:spcAft>
+                <a:spcPts val="600"/>
+              </a:spcAft>
+            </a:pPr>
+            <a:r>
+              <a:rPr sz="1400" b="1" i="0">
+                <a:solidFill>
+                  <a:srgbClr val="5A6B7B"/>
+                </a:solidFill>
+                <a:latin typeface="NanumGothic"/>
+                <a:ea typeface="NanumGothic"/>
+              </a:rPr>
+              <a:t>      –  </a:t>
+            </a:r>
+            <a:r>
+              <a:rPr sz="1400" b="0" i="0">
+                <a:solidFill>
+                  <a:srgbClr val="1A202C"/>
+                </a:solidFill>
+                <a:latin typeface="NanumGothic"/>
+                <a:ea typeface="NanumGothic"/>
+              </a:rPr>
+              <a:t>작열통·이질통(옷·바람 스침에도 통증)·통각과민 · 부종 · 피부색(발적↔창백)·좌우 온도차 · 발한 이상</a:t>
+            </a:r>
+          </a:p>
+          <a:p>
+            <a:pPr algn="l">
+              <a:lnSpc>
+                <a:spcPct val="108000"/>
+              </a:lnSpc>
+              <a:spcAft>
+                <a:spcPts val="600"/>
+              </a:spcAft>
+            </a:pPr>
+            <a:r>
+              <a:rPr sz="1400" b="1" i="0">
+                <a:solidFill>
+                  <a:srgbClr val="5A6B7B"/>
+                </a:solidFill>
+                <a:latin typeface="NanumGothic"/>
+                <a:ea typeface="NanumGothic"/>
+              </a:rPr>
+              <a:t>      –  </a:t>
+            </a:r>
+            <a:r>
+              <a:rPr sz="1400" b="0" i="0">
+                <a:solidFill>
+                  <a:srgbClr val="5A6B7B"/>
+                </a:solidFill>
+                <a:latin typeface="NanumGothic"/>
+                <a:ea typeface="NanumGothic"/>
+              </a:rPr>
+              <a:t>호소: “발이 타는 듯 화끈거려요” · “이불만 스쳐도 아파요” · “붓고 색이 자꾸 변해요”</a:t>
+            </a:r>
+          </a:p>
+          <a:p>
+            <a:pPr algn="l">
+              <a:lnSpc>
+                <a:spcPct val="108000"/>
+              </a:lnSpc>
+              <a:spcAft>
+                <a:spcPts val="600"/>
               </a:spcAft>
             </a:pPr>
             <a:r>
@@ -5829,283 +7897,111 @@
               <a:t>●  </a:t>
             </a:r>
             <a:r>
+              <a:rPr sz="1400" b="1" i="0">
+                <a:solidFill>
+                  <a:srgbClr val="2E7D32"/>
+                </a:solidFill>
+                <a:latin typeface="NanumGothic"/>
+                <a:ea typeface="NanumGothic"/>
+              </a:rPr>
+              <a:t>허혈질환 — PAD·중증 하지허혈(CLI)·버거병 (동맥성 허혈)</a:t>
+            </a:r>
+          </a:p>
+          <a:p>
+            <a:pPr algn="l">
+              <a:lnSpc>
+                <a:spcPct val="108000"/>
+              </a:lnSpc>
+              <a:spcAft>
+                <a:spcPts val="600"/>
+              </a:spcAft>
+            </a:pPr>
+            <a:r>
+              <a:rPr sz="1400" b="1" i="0">
+                <a:solidFill>
+                  <a:srgbClr val="5A6B7B"/>
+                </a:solidFill>
+                <a:latin typeface="NanumGothic"/>
+                <a:ea typeface="NanumGothic"/>
+              </a:rPr>
+              <a:t>      –  </a:t>
+            </a:r>
+            <a:r>
               <a:rPr sz="1400" b="0" i="0">
                 <a:solidFill>
-                  <a:srgbClr val="2E7D32"/>
-                </a:solidFill>
-                <a:latin typeface="NanumGothic"/>
-                <a:ea typeface="NanumGothic"/>
-              </a:rPr>
-              <a:t>허혈성 통증(PAD): 하지 통증 최대 75%↓, Fontaine 분류·측부관류 개선(Medicina 2024).</a:t>
-            </a:r>
-          </a:p>
-          <a:p>
-            <a:pPr algn="l">
-              <a:lnSpc>
-                <a:spcPct val="108000"/>
-              </a:lnSpc>
-              <a:spcAft>
-                <a:spcPts val="800"/>
-              </a:spcAft>
-            </a:pPr>
-            <a:r>
-              <a:rPr sz="979" b="1" i="0">
-                <a:solidFill>
-                  <a:srgbClr val="2C898A"/>
-                </a:solidFill>
-                <a:latin typeface="NanumGothic"/>
-                <a:ea typeface="NanumGothic"/>
-              </a:rPr>
-              <a:t>●  </a:t>
+                  <a:srgbClr val="1A202C"/>
+                </a:solidFill>
+                <a:latin typeface="NanumGothic"/>
+                <a:ea typeface="NanumGothic"/>
+              </a:rPr>
+              <a:t>간헐적 파행(걷다 종아리 통증→쉬면 완화) → 진행 시 야간 안정통(다리 내리면 완화) · 차고 창백한 발 · 비치유 궤양·괴저</a:t>
+            </a:r>
+          </a:p>
+          <a:p>
+            <a:pPr algn="l">
+              <a:lnSpc>
+                <a:spcPct val="108000"/>
+              </a:lnSpc>
+              <a:spcAft>
+                <a:spcPts val="600"/>
+              </a:spcAft>
+            </a:pPr>
+            <a:r>
+              <a:rPr sz="1400" b="1" i="0">
+                <a:solidFill>
+                  <a:srgbClr val="5A6B7B"/>
+                </a:solidFill>
+                <a:latin typeface="NanumGothic"/>
+                <a:ea typeface="NanumGothic"/>
+              </a:rPr>
+              <a:t>      –  </a:t>
             </a:r>
             <a:r>
               <a:rPr sz="1400" b="0" i="0">
                 <a:solidFill>
-                  <a:srgbClr val="1A202C"/>
-                </a:solidFill>
-                <a:latin typeface="NanumGothic"/>
-                <a:ea typeface="NanumGothic"/>
-              </a:rPr>
-              <a:t>비재건성 CLI: 교감신경 신경파괴가 절단 외 대안이 없는 환자의 통증조절에 효과적·안전(Barreto 2018).</a:t>
-            </a:r>
-          </a:p>
-        </p:txBody>
-      </p:sp>
-      <p:sp>
-        <p:nvSpPr>
-          <p:cNvPr id="9" name="Rounded Rectangle 8"/>
-          <p:cNvSpPr/>
-          <p:nvPr/>
-        </p:nvSpPr>
-        <p:spPr>
-          <a:xfrm>
-            <a:off x="7406640" y="1463040"/>
-            <a:ext cx="4114800" cy="4480560"/>
-          </a:xfrm>
-          <a:prstGeom prst="roundRect">
-            <a:avLst>
-              <a:gd name="adj" fmla="val 8000"/>
-            </a:avLst>
-          </a:prstGeom>
-          <a:solidFill>
-            <a:srgbClr val="1B355E"/>
-          </a:solidFill>
-          <a:ln>
-            <a:noFill/>
-          </a:ln>
-          <a:effectLst/>
-        </p:spPr>
-        <p:style>
-          <a:lnRef idx="1">
-            <a:schemeClr val="accent1"/>
-          </a:lnRef>
-          <a:fillRef idx="3">
-            <a:schemeClr val="accent1"/>
-          </a:fillRef>
-          <a:effectRef idx="2">
-            <a:schemeClr val="accent1"/>
-          </a:effectRef>
-          <a:fontRef idx="minor">
-            <a:schemeClr val="lt1"/>
-          </a:fontRef>
-        </p:style>
-        <p:txBody>
-          <a:bodyPr rtlCol="0" anchor="ctr"/>
-          <a:lstStyle/>
-          <a:p>
-            <a:pPr algn="ctr"/>
-          </a:p>
-        </p:txBody>
-      </p:sp>
-      <p:sp>
-        <p:nvSpPr>
-          <p:cNvPr id="10" name="TextBox 9"/>
-          <p:cNvSpPr txBox="1"/>
-          <p:nvPr/>
-        </p:nvSpPr>
-        <p:spPr>
-          <a:xfrm>
-            <a:off x="7680960" y="1691640"/>
-            <a:ext cx="3657600" cy="365760"/>
-          </a:xfrm>
-          <a:prstGeom prst="rect">
-            <a:avLst/>
-          </a:prstGeom>
-          <a:noFill/>
-        </p:spPr>
-        <p:txBody>
-          <a:bodyPr wrap="square" anchor="t" lIns="0" rIns="0" tIns="0" bIns="0">
-            <a:spAutoFit/>
-          </a:bodyPr>
-          <a:lstStyle/>
-          <a:p>
-            <a:pPr algn="l">
-              <a:lnSpc>
-                <a:spcPct val="108000"/>
-              </a:lnSpc>
-              <a:spcAft>
-                <a:spcPts val="400"/>
-              </a:spcAft>
-            </a:pPr>
-            <a:r>
-              <a:rPr sz="1300" b="1" i="0">
-                <a:solidFill>
-                  <a:srgbClr val="BFD3E6"/>
-                </a:solidFill>
-                <a:latin typeface="NanumGothic"/>
-                <a:ea typeface="NanumGothic"/>
-              </a:rPr>
-              <a:t>실측 수치(Dickey 2024)</a:t>
-            </a:r>
-          </a:p>
-        </p:txBody>
-      </p:sp>
-      <p:sp>
-        <p:nvSpPr>
-          <p:cNvPr id="11" name="TextBox 10"/>
-          <p:cNvSpPr txBox="1"/>
-          <p:nvPr/>
-        </p:nvSpPr>
-        <p:spPr>
-          <a:xfrm>
-            <a:off x="7680960" y="2194560"/>
-            <a:ext cx="3611880" cy="3657600"/>
-          </a:xfrm>
-          <a:prstGeom prst="rect">
-            <a:avLst/>
-          </a:prstGeom>
-          <a:noFill/>
-        </p:spPr>
-        <p:txBody>
-          <a:bodyPr wrap="square" lIns="0" rIns="0" tIns="0" bIns="0">
-            <a:spAutoFit/>
-          </a:bodyPr>
-          <a:lstStyle/>
-          <a:p>
-            <a:pPr algn="l">
-              <a:lnSpc>
-                <a:spcPct val="108000"/>
-              </a:lnSpc>
-              <a:spcAft>
-                <a:spcPts val="800"/>
-              </a:spcAft>
-            </a:pPr>
-            <a:r>
-              <a:rPr sz="875" b="1" i="0">
-                <a:solidFill>
-                  <a:srgbClr val="2C898A"/>
-                </a:solidFill>
-                <a:latin typeface="NanumGothic"/>
-                <a:ea typeface="NanumGothic"/>
-              </a:rPr>
-              <a:t>●  </a:t>
-            </a:r>
-            <a:r>
-              <a:rPr sz="1250" b="1" i="0">
-                <a:solidFill>
-                  <a:srgbClr val="9FE0D8"/>
-                </a:solidFill>
-                <a:latin typeface="NanumGothic"/>
-                <a:ea typeface="NanumGothic"/>
-              </a:rPr>
-              <a:t>후경골동맥 +58.8%</a:t>
-            </a:r>
-          </a:p>
-          <a:p>
-            <a:pPr algn="l">
-              <a:lnSpc>
-                <a:spcPct val="108000"/>
-              </a:lnSpc>
-              <a:spcAft>
-                <a:spcPts val="800"/>
-              </a:spcAft>
-            </a:pPr>
-            <a:r>
-              <a:rPr sz="875" b="1" i="0">
-                <a:solidFill>
-                  <a:srgbClr val="2C898A"/>
-                </a:solidFill>
-                <a:latin typeface="NanumGothic"/>
-                <a:ea typeface="NanumGothic"/>
-              </a:rPr>
-              <a:t>●  </a:t>
-            </a:r>
-            <a:r>
-              <a:rPr sz="1250" b="0" i="0">
-                <a:solidFill>
-                  <a:srgbClr val="FFFFFF"/>
-                </a:solidFill>
-                <a:latin typeface="NanumGothic"/>
-                <a:ea typeface="NanumGothic"/>
-              </a:rPr>
-              <a:t>모세혈관 재충혈 3.92→1.30초</a:t>
-            </a:r>
-          </a:p>
-          <a:p>
-            <a:pPr algn="l">
-              <a:lnSpc>
-                <a:spcPct val="108000"/>
-              </a:lnSpc>
-              <a:spcAft>
-                <a:spcPts val="800"/>
-              </a:spcAft>
-            </a:pPr>
-            <a:r>
-              <a:rPr sz="875" b="1" i="0">
-                <a:solidFill>
-                  <a:srgbClr val="2C898A"/>
-                </a:solidFill>
-                <a:latin typeface="NanumGothic"/>
-                <a:ea typeface="NanumGothic"/>
-              </a:rPr>
-              <a:t>●  </a:t>
-            </a:r>
-            <a:r>
-              <a:rPr sz="1250" b="0" i="0">
-                <a:solidFill>
-                  <a:srgbClr val="FFFFFF"/>
-                </a:solidFill>
-                <a:latin typeface="NanumGothic"/>
-                <a:ea typeface="NanumGothic"/>
-              </a:rPr>
-              <a:t>족부온도 +2.8°C</a:t>
-            </a:r>
-          </a:p>
-          <a:p>
-            <a:pPr algn="l">
-              <a:lnSpc>
-                <a:spcPct val="108000"/>
-              </a:lnSpc>
-              <a:spcAft>
-                <a:spcPts val="800"/>
-              </a:spcAft>
-            </a:pPr>
-            <a:r>
-              <a:rPr sz="875" b="1" i="0">
-                <a:solidFill>
-                  <a:srgbClr val="2C898A"/>
-                </a:solidFill>
-                <a:latin typeface="NanumGothic"/>
-                <a:ea typeface="NanumGothic"/>
-              </a:rPr>
-              <a:t>●  </a:t>
-            </a:r>
-            <a:r>
-              <a:rPr sz="1250" b="1" i="0">
-                <a:solidFill>
-                  <a:srgbClr val="9FE0D8"/>
-                </a:solidFill>
-                <a:latin typeface="NanumGothic"/>
-                <a:ea typeface="NanumGothic"/>
-              </a:rPr>
-              <a:t>→ 관류 개선의 객관 근거</a:t>
-            </a:r>
-          </a:p>
-        </p:txBody>
-      </p:sp>
-      <p:sp>
-        <p:nvSpPr>
-          <p:cNvPr id="12" name="TextBox 11"/>
+                  <a:srgbClr val="5A6B7B"/>
+                </a:solidFill>
+                <a:latin typeface="NanumGothic"/>
+                <a:ea typeface="NanumGothic"/>
+              </a:rPr>
+              <a:t>호소: “걸으면 종아리가 터질 듯 아파요” · “밤에 발이 시려 잠을 못 자요” · “상처가 안 아물어요”</a:t>
+            </a:r>
+          </a:p>
+          <a:p>
+            <a:pPr algn="l">
+              <a:lnSpc>
+                <a:spcPct val="108000"/>
+              </a:lnSpc>
+              <a:spcAft>
+                <a:spcPts val="600"/>
+              </a:spcAft>
+            </a:pPr>
+            <a:r>
+              <a:rPr sz="1400" b="1" i="0">
+                <a:solidFill>
+                  <a:srgbClr val="5A6B7B"/>
+                </a:solidFill>
+                <a:latin typeface="NanumGothic"/>
+                <a:ea typeface="NanumGothic"/>
+              </a:rPr>
+              <a:t/>
+            </a:r>
+            <a:r>
+              <a:rPr sz="1400" b="1" i="0">
+                <a:solidFill>
+                  <a:srgbClr val="1F6E70"/>
+                </a:solidFill>
+                <a:latin typeface="NanumGothic"/>
+                <a:ea typeface="NanumGothic"/>
+              </a:rPr>
+              <a:t>‘허혈’은 동맥성 부족을 의미 — 하지정맥류 등 정맥질환은 LSB 적응증 아님(압박·정맥폐색술이 표준).</a:t>
+            </a:r>
+          </a:p>
+        </p:txBody>
+      </p:sp>
+      <p:sp>
+        <p:nvSpPr>
+          <p:cNvPr id="9" name="TextBox 8"/>
           <p:cNvSpPr txBox="1"/>
           <p:nvPr/>
         </p:nvSpPr>
@@ -6141,14 +8037,14 @@
                 <a:latin typeface="NanumGothic"/>
                 <a:ea typeface="NanumGothic"/>
               </a:rPr>
-              <a:t>근거: Dickey 2024(Cureus); Medicina 2024; Barreto 2018</a:t>
-            </a:r>
-          </a:p>
-        </p:txBody>
-      </p:sp>
-      <p:sp>
-        <p:nvSpPr>
-          <p:cNvPr id="13" name="TextBox 12"/>
+              <a:t>근거: StatPearls; 문헌고찰 종합</a:t>
+            </a:r>
+          </a:p>
+        </p:txBody>
+      </p:sp>
+      <p:sp>
+        <p:nvSpPr>
+          <p:cNvPr id="10" name="TextBox 9"/>
           <p:cNvSpPr txBox="1"/>
           <p:nvPr/>
         </p:nvSpPr>
@@ -6289,7 +8185,7 @@
                 <a:latin typeface="NanumGothic"/>
                 <a:ea typeface="NanumGothic"/>
               </a:rPr>
-              <a:t>효과 (2) CRPS · 기전</a:t>
+              <a:t>적응증별 환자 증상·호소 ② — 신경병증·기타</a:t>
             </a:r>
           </a:p>
         </p:txBody>
@@ -6332,7 +8228,7 @@
                 <a:latin typeface="NanumGothic"/>
                 <a:ea typeface="NanumGothic"/>
               </a:rPr>
-              <a:t>효과</a:t>
+              <a:t>적응증 · 증상</a:t>
             </a:r>
           </a:p>
         </p:txBody>
@@ -6389,8 +8285,8 @@
         </p:nvSpPr>
         <p:spPr>
           <a:xfrm>
-            <a:off x="11194999" y="365760"/>
-            <a:ext cx="493776" cy="347472"/>
+            <a:off x="10865816" y="365760"/>
+            <a:ext cx="822959" cy="347472"/>
           </a:xfrm>
           <a:prstGeom prst="roundRect">
             <a:avLst>
@@ -6435,8 +8331,8 @@
         </p:nvSpPr>
         <p:spPr>
           <a:xfrm>
-            <a:off x="11194999" y="365760"/>
-            <a:ext cx="493776" cy="347472"/>
+            <a:off x="10865816" y="365760"/>
+            <a:ext cx="822959" cy="347472"/>
           </a:xfrm>
           <a:prstGeom prst="rect">
             <a:avLst/>
@@ -6465,7 +8361,7 @@
                 <a:latin typeface="NanumGothic"/>
                 <a:ea typeface="NanumGothic"/>
               </a:rPr>
-              <a:t>효과</a:t>
+              <a:t>환자 증상</a:t>
             </a:r>
           </a:p>
         </p:txBody>
@@ -6497,11 +8393,11 @@
                 <a:spcPct val="108000"/>
               </a:lnSpc>
               <a:spcAft>
-                <a:spcPts val="900"/>
-              </a:spcAft>
-            </a:pPr>
-            <a:r>
-              <a:rPr sz="1050" b="1" i="0">
+                <a:spcPts val="600"/>
+              </a:spcAft>
+            </a:pPr>
+            <a:r>
+              <a:rPr sz="979" b="1" i="0">
                 <a:solidFill>
                   <a:srgbClr val="2C898A"/>
                 </a:solidFill>
@@ -6511,27 +8407,87 @@
               <a:t>●  </a:t>
             </a:r>
             <a:r>
-              <a:rPr sz="1500" b="1" i="0">
+              <a:rPr sz="1400" b="1" i="0">
                 <a:solidFill>
                   <a:srgbClr val="1A202C"/>
                 </a:solidFill>
                 <a:latin typeface="NanumGothic"/>
                 <a:ea typeface="NanumGothic"/>
               </a:rPr>
-              <a:t>CRPS는 교감신경 매개 통증의 전형 → LSB 후 유의한 통증완화가 축적된 근거. 최적 환자 선택·조기 시행이 성공률↑.</a:t>
-            </a:r>
-          </a:p>
-          <a:p>
-            <a:pPr algn="l">
-              <a:lnSpc>
-                <a:spcPct val="108000"/>
-              </a:lnSpc>
-              <a:spcAft>
-                <a:spcPts val="900"/>
-              </a:spcAft>
-            </a:pPr>
-            <a:r>
-              <a:rPr sz="1050" b="1" i="0">
+              <a:t>신경병증 — 당뇨병성 신경병증/당뇨발·대상포진후신경통·환상지통</a:t>
+            </a:r>
+          </a:p>
+          <a:p>
+            <a:pPr algn="l">
+              <a:lnSpc>
+                <a:spcPct val="108000"/>
+              </a:lnSpc>
+              <a:spcAft>
+                <a:spcPts val="600"/>
+              </a:spcAft>
+            </a:pPr>
+            <a:r>
+              <a:rPr sz="1400" b="1" i="0">
+                <a:solidFill>
+                  <a:srgbClr val="5A6B7B"/>
+                </a:solidFill>
+                <a:latin typeface="NanumGothic"/>
+                <a:ea typeface="NanumGothic"/>
+              </a:rPr>
+              <a:t>      –  </a:t>
+            </a:r>
+            <a:r>
+              <a:rPr sz="1400" b="0" i="0">
+                <a:solidFill>
+                  <a:srgbClr val="1A202C"/>
+                </a:solidFill>
+                <a:latin typeface="NanumGothic"/>
+                <a:ea typeface="NanumGothic"/>
+              </a:rPr>
+              <a:t>저림·화끈거림·전기 오듯 찌름 · 이질통 · 감각저하(양말 신은 느낌) · 야간 악화 · 당뇨발 궤양·관류저하</a:t>
+            </a:r>
+          </a:p>
+          <a:p>
+            <a:pPr algn="l">
+              <a:lnSpc>
+                <a:spcPct val="108000"/>
+              </a:lnSpc>
+              <a:spcAft>
+                <a:spcPts val="600"/>
+              </a:spcAft>
+            </a:pPr>
+            <a:r>
+              <a:rPr sz="1400" b="1" i="0">
+                <a:solidFill>
+                  <a:srgbClr val="5A6B7B"/>
+                </a:solidFill>
+                <a:latin typeface="NanumGothic"/>
+                <a:ea typeface="NanumGothic"/>
+              </a:rPr>
+              <a:t>      –  </a:t>
+            </a:r>
+            <a:r>
+              <a:rPr sz="1400" b="0" i="0">
+                <a:solidFill>
+                  <a:srgbClr val="5A6B7B"/>
+                </a:solidFill>
+                <a:latin typeface="NanumGothic"/>
+                <a:ea typeface="NanumGothic"/>
+              </a:rPr>
+              <a:t>호소: “발이 저리고 화끈거려요” · “밤에 더 심해요” · “전기가 찌릿 오는 것 같아요”</a:t>
+            </a:r>
+          </a:p>
+          <a:p>
+            <a:pPr algn="l">
+              <a:lnSpc>
+                <a:spcPct val="108000"/>
+              </a:lnSpc>
+              <a:spcAft>
+                <a:spcPts val="600"/>
+              </a:spcAft>
+            </a:pPr>
+            <a:r>
+              <a:rPr sz="979" b="1" i="0">
                 <a:solidFill>
                   <a:srgbClr val="2C898A"/>
                 </a:solidFill>
@@ -6541,104 +8497,74 @@
               <a:t>●  </a:t>
             </a:r>
             <a:r>
-              <a:rPr sz="1500" b="0" i="0">
+              <a:rPr sz="1400" b="1" i="0">
                 <a:solidFill>
                   <a:srgbClr val="1A202C"/>
                 </a:solidFill>
                 <a:latin typeface="NanumGothic"/>
                 <a:ea typeface="NanumGothic"/>
               </a:rPr>
-              <a:t>Choi 2024(Sci Rep): 교감신경 신경파괴의 효과 지속기간을 전향 관찰로 제시.</a:t>
-            </a:r>
-          </a:p>
-          <a:p>
-            <a:pPr algn="l">
-              <a:lnSpc>
-                <a:spcPct val="108000"/>
-              </a:lnSpc>
-              <a:spcAft>
-                <a:spcPts val="900"/>
-              </a:spcAft>
-            </a:pPr>
-            <a:r>
-              <a:rPr sz="1050" b="1" i="0">
-                <a:solidFill>
-                  <a:srgbClr val="2C898A"/>
-                </a:solidFill>
-                <a:latin typeface="NanumGothic"/>
-                <a:ea typeface="NanumGothic"/>
-              </a:rPr>
-              <a:t>●  </a:t>
-            </a:r>
-            <a:r>
-              <a:rPr sz="1500" b="0" i="0">
+              <a:t>기타 — 족부 다한증·레이노(하지)·홍색사지통증·암성 하지통</a:t>
+            </a:r>
+          </a:p>
+          <a:p>
+            <a:pPr algn="l">
+              <a:lnSpc>
+                <a:spcPct val="108000"/>
+              </a:lnSpc>
+              <a:spcAft>
+                <a:spcPts val="600"/>
+              </a:spcAft>
+            </a:pPr>
+            <a:r>
+              <a:rPr sz="1400" b="1" i="0">
+                <a:solidFill>
+                  <a:srgbClr val="5A6B7B"/>
+                </a:solidFill>
+                <a:latin typeface="NanumGothic"/>
+                <a:ea typeface="NanumGothic"/>
+              </a:rPr>
+              <a:t>      –  </a:t>
+            </a:r>
+            <a:r>
+              <a:rPr sz="1400" b="0" i="0">
                 <a:solidFill>
                   <a:srgbClr val="1A202C"/>
                 </a:solidFill>
                 <a:latin typeface="NanumGothic"/>
                 <a:ea typeface="NanumGothic"/>
               </a:rPr>
-              <a:t>반응 예측: 교감신경 피부반응(sympathetic skin response)이 LSB 반응 예측에 유용(Pain Ther 2023).</a:t>
-            </a:r>
-          </a:p>
-          <a:p>
-            <a:pPr algn="l">
-              <a:lnSpc>
-                <a:spcPct val="108000"/>
-              </a:lnSpc>
-              <a:spcAft>
-                <a:spcPts val="900"/>
-              </a:spcAft>
-            </a:pPr>
-            <a:r>
-              <a:rPr sz="1050" b="1" i="0">
-                <a:solidFill>
-                  <a:srgbClr val="2C898A"/>
-                </a:solidFill>
-                <a:latin typeface="NanumGothic"/>
-                <a:ea typeface="NanumGothic"/>
-              </a:rPr>
-              <a:t>●  </a:t>
-            </a:r>
-            <a:r>
-              <a:rPr sz="1500" b="0" i="0">
+              <a:t>다한증(과한 발땀·축축·악취) · 레이노(추위·스트레스에 창백→청색→발적 삼색변화·저림) · 홍색사지통증(발작적 발적·작열·열감, 열에 악화)</a:t>
+            </a:r>
+          </a:p>
+          <a:p>
+            <a:pPr algn="l">
+              <a:lnSpc>
+                <a:spcPct val="108000"/>
+              </a:lnSpc>
+              <a:spcAft>
+                <a:spcPts val="600"/>
+              </a:spcAft>
+            </a:pPr>
+            <a:r>
+              <a:rPr sz="1400" b="1" i="0">
                 <a:solidFill>
                   <a:srgbClr val="5A6B7B"/>
                 </a:solidFill>
                 <a:latin typeface="NanumGothic"/>
                 <a:ea typeface="NanumGothic"/>
               </a:rPr>
-              <a:t>한계: 중추 감작이 진행되면 시간이 지날수록 효과 감소 가능.</a:t>
-            </a:r>
-          </a:p>
-          <a:p>
-            <a:pPr algn="l">
-              <a:lnSpc>
-                <a:spcPct val="108000"/>
-              </a:lnSpc>
-              <a:spcAft>
-                <a:spcPts val="900"/>
-              </a:spcAft>
-            </a:pPr>
-            <a:r>
-              <a:rPr sz="1500" b="1" i="0">
+              <a:t>      –  </a:t>
+            </a:r>
+            <a:r>
+              <a:rPr sz="1400" b="0" i="0">
                 <a:solidFill>
                   <a:srgbClr val="5A6B7B"/>
                 </a:solidFill>
                 <a:latin typeface="NanumGothic"/>
                 <a:ea typeface="NanumGothic"/>
               </a:rPr>
-              <a:t/>
-            </a:r>
-            <a:r>
-              <a:rPr sz="1500" b="1" i="0">
-                <a:solidFill>
-                  <a:srgbClr val="1F6E70"/>
-                </a:solidFill>
-                <a:latin typeface="NanumGothic"/>
-                <a:ea typeface="NanumGothic"/>
-              </a:rPr>
-              <a:t>기전 요약: 교감차단 → 측부순환 혈관확장 → 조직 산소화↑ → 통증↓ + 교감매개통 차단 + 신경파괴 직접효과.</a:t>
+              <a:t>호소: “발에 땀이 너무 많아요” · “추우면 발이 하얘졌다 파래져요” · “발이 화끈 달아올라요”</a:t>
             </a:r>
           </a:p>
         </p:txBody>
@@ -6681,7 +8607,7 @@
                 <a:latin typeface="NanumGothic"/>
                 <a:ea typeface="NanumGothic"/>
               </a:rPr>
-              <a:t>근거: Choi 2024(Sci Rep); Pain Ther 2023</a:t>
+              <a:t>근거: StatPearls; 문헌고찰 종합</a:t>
             </a:r>
           </a:p>
         </p:txBody>
@@ -6829,7 +8755,7 @@
                 <a:latin typeface="NanumGothic"/>
                 <a:ea typeface="NanumGothic"/>
               </a:rPr>
-              <a:t>합병증 · 안전성 · 근거수준</a:t>
+              <a:t>밤에 저리고 화끈거리는 다리 — 당뇨병성 신경병증과 LSB</a:t>
             </a:r>
           </a:p>
         </p:txBody>
@@ -6872,7 +8798,7 @@
                 <a:latin typeface="NanumGothic"/>
                 <a:ea typeface="NanumGothic"/>
               </a:rPr>
-              <a:t>안전성 · 결론</a:t>
+              <a:t>적응증 · 심화</a:t>
             </a:r>
           </a:p>
         </p:txBody>
@@ -6929,8 +8855,8 @@
         </p:nvSpPr>
         <p:spPr>
           <a:xfrm>
-            <a:off x="11085272" y="365760"/>
-            <a:ext cx="603503" cy="347472"/>
+            <a:off x="10536631" y="365760"/>
+            <a:ext cx="1152144" cy="347472"/>
           </a:xfrm>
           <a:prstGeom prst="roundRect">
             <a:avLst>
@@ -6938,7 +8864,7 @@
             </a:avLst>
           </a:prstGeom>
           <a:solidFill>
-            <a:srgbClr val="B03A2E"/>
+            <a:srgbClr val="2C898A"/>
           </a:solidFill>
           <a:ln>
             <a:noFill/>
@@ -6975,8 +8901,8 @@
         </p:nvSpPr>
         <p:spPr>
           <a:xfrm>
-            <a:off x="11085272" y="365760"/>
-            <a:ext cx="603503" cy="347472"/>
+            <a:off x="10536631" y="365760"/>
+            <a:ext cx="1152144" cy="347472"/>
           </a:xfrm>
           <a:prstGeom prst="rect">
             <a:avLst/>
@@ -7005,7 +8931,7 @@
                 <a:latin typeface="NanumGothic"/>
                 <a:ea typeface="NanumGothic"/>
               </a:rPr>
-              <a:t>안전성</a:t>
+              <a:t>야간 신경병증통</a:t>
             </a:r>
           </a:p>
         </p:txBody>
@@ -7019,7 +8945,7 @@
         <p:spPr>
           <a:xfrm>
             <a:off x="731520" y="1371600"/>
-            <a:ext cx="10835640" cy="4754880"/>
+            <a:ext cx="6400800" cy="4663440"/>
           </a:xfrm>
           <a:prstGeom prst="rect">
             <a:avLst/>
@@ -7037,11 +8963,11 @@
                 <a:spcPct val="108000"/>
               </a:lnSpc>
               <a:spcAft>
-                <a:spcPts val="900"/>
-              </a:spcAft>
-            </a:pPr>
-            <a:r>
-              <a:rPr sz="1050" b="1" i="0">
+                <a:spcPts val="800"/>
+              </a:spcAft>
+            </a:pPr>
+            <a:r>
+              <a:rPr sz="979" b="1" i="0">
                 <a:solidFill>
                   <a:srgbClr val="2C898A"/>
                 </a:solidFill>
@@ -7051,27 +8977,27 @@
               <a:t>●  </a:t>
             </a:r>
             <a:r>
-              <a:rPr sz="1500" b="1" i="0">
-                <a:solidFill>
-                  <a:srgbClr val="B03A2E"/>
-                </a:solidFill>
-                <a:latin typeface="NanumGothic"/>
-                <a:ea typeface="NanumGothic"/>
-              </a:rPr>
-              <a:t>합병증: 생식대퇴신경통(신경파괴 시 5–10%), 외측대퇴피신경 손상, 기립성 저혈압.</a:t>
-            </a:r>
-          </a:p>
-          <a:p>
-            <a:pPr algn="l">
-              <a:lnSpc>
-                <a:spcPct val="108000"/>
-              </a:lnSpc>
-              <a:spcAft>
-                <a:spcPts val="900"/>
-              </a:spcAft>
-            </a:pPr>
-            <a:r>
-              <a:rPr sz="1050" b="1" i="0">
+              <a:rPr sz="1400" b="1" i="0">
+                <a:solidFill>
+                  <a:srgbClr val="1A202C"/>
+                </a:solidFill>
+                <a:latin typeface="NanumGothic"/>
+                <a:ea typeface="NanumGothic"/>
+              </a:rPr>
+              <a:t>임상상: 당뇨병성 말초신경병증 — 발·종아리 저림·화끈거림·전기 찌름, 양측 ‘양말’ 분포.</a:t>
+            </a:r>
+          </a:p>
+          <a:p>
+            <a:pPr algn="l">
+              <a:lnSpc>
+                <a:spcPct val="108000"/>
+              </a:lnSpc>
+              <a:spcAft>
+                <a:spcPts val="800"/>
+              </a:spcAft>
+            </a:pPr>
+            <a:r>
+              <a:rPr sz="979" b="1" i="0">
                 <a:solidFill>
                   <a:srgbClr val="2C898A"/>
                 </a:solidFill>
@@ -7081,27 +9007,27 @@
               <a:t>●  </a:t>
             </a:r>
             <a:r>
-              <a:rPr sz="1500" b="0" i="0">
+              <a:rPr sz="1400" b="0" i="0">
                 <a:solidFill>
                   <a:srgbClr val="1A202C"/>
                 </a:solidFill>
                 <a:latin typeface="NanumGothic"/>
                 <a:ea typeface="NanumGothic"/>
               </a:rPr>
-              <a:t>혈관·요관·신장 등 내장 구조 천공, 출혈, 신경축(neuraxial) 확산, 신경파괴 후 통증성 신경염(dysesthesia).</a:t>
-            </a:r>
-          </a:p>
-          <a:p>
-            <a:pPr algn="l">
-              <a:lnSpc>
-                <a:spcPct val="108000"/>
-              </a:lnSpc>
-              <a:spcAft>
-                <a:spcPts val="900"/>
-              </a:spcAft>
-            </a:pPr>
-            <a:r>
-              <a:rPr sz="1050" b="1" i="0">
+              <a:t>야간통: 이불 온기·야간 순환·주의분산 소실 → 밤에 증폭·수면 방해.</a:t>
+            </a:r>
+          </a:p>
+          <a:p>
+            <a:pPr algn="l">
+              <a:lnSpc>
+                <a:spcPct val="108000"/>
+              </a:lnSpc>
+              <a:spcAft>
+                <a:spcPts val="800"/>
+              </a:spcAft>
+            </a:pPr>
+            <a:r>
+              <a:rPr sz="979" b="1" i="0">
                 <a:solidFill>
                   <a:srgbClr val="2C898A"/>
                 </a:solidFill>
@@ -7111,27 +9037,27 @@
               <a:t>●  </a:t>
             </a:r>
             <a:r>
-              <a:rPr sz="1500" b="0" i="0">
+              <a:rPr sz="1400" b="0" i="0">
                 <a:solidFill>
                   <a:srgbClr val="1A202C"/>
                 </a:solidFill>
                 <a:latin typeface="NanumGothic"/>
                 <a:ea typeface="NanumGothic"/>
               </a:rPr>
-              <a:t>근거수준: 대부분 관찰·증례군·소규모 전향연구, 대규모 RCT는 부족(허혈질환·CRPS Level III~IV).</a:t>
-            </a:r>
-          </a:p>
-          <a:p>
-            <a:pPr algn="l">
-              <a:lnSpc>
-                <a:spcPct val="108000"/>
-              </a:lnSpc>
-              <a:spcAft>
-                <a:spcPts val="900"/>
-              </a:spcAft>
-            </a:pPr>
-            <a:r>
-              <a:rPr sz="1500" b="1" i="0">
+              <a:t>먼저 감별: RLS(움직이면 완화)·NLC(경련)·허혈성 안정통과 구분.</a:t>
+            </a:r>
+          </a:p>
+          <a:p>
+            <a:pPr algn="l">
+              <a:lnSpc>
+                <a:spcPct val="108000"/>
+              </a:lnSpc>
+              <a:spcAft>
+                <a:spcPts val="800"/>
+              </a:spcAft>
+            </a:pPr>
+            <a:r>
+              <a:rPr sz="1400" b="1" i="0">
                 <a:solidFill>
                   <a:srgbClr val="5A6B7B"/>
                 </a:solidFill>
@@ -7141,21 +9067,253 @@
               <a:t/>
             </a:r>
             <a:r>
-              <a:rPr sz="1500" b="1" i="0">
+              <a:rPr sz="1400" b="1" i="0">
                 <a:solidFill>
                   <a:srgbClr val="1F6E70"/>
                 </a:solidFill>
                 <a:latin typeface="NanumGothic"/>
                 <a:ea typeface="NanumGothic"/>
               </a:rPr>
-              <a:t>그럼에도 조기 CRPS·재건 불가능한 중증 하지허혈(안정통)에서 임상적으로 유용.</a:t>
-            </a:r>
-          </a:p>
-        </p:txBody>
-      </p:sp>
-      <p:sp>
-        <p:nvSpPr>
-          <p:cNvPr id="9" name="TextBox 8"/>
+              <a:t>1차: 혈당조절+약물(가바펜틴·듀록세틴) → 난치성이면 LSB 고려</a:t>
+            </a:r>
+          </a:p>
+        </p:txBody>
+      </p:sp>
+      <p:sp>
+        <p:nvSpPr>
+          <p:cNvPr id="9" name="Rounded Rectangle 8"/>
+          <p:cNvSpPr/>
+          <p:nvPr/>
+        </p:nvSpPr>
+        <p:spPr>
+          <a:xfrm>
+            <a:off x="7406640" y="1463040"/>
+            <a:ext cx="4114800" cy="4480560"/>
+          </a:xfrm>
+          <a:prstGeom prst="roundRect">
+            <a:avLst>
+              <a:gd name="adj" fmla="val 8000"/>
+            </a:avLst>
+          </a:prstGeom>
+          <a:solidFill>
+            <a:srgbClr val="1B355E"/>
+          </a:solidFill>
+          <a:ln>
+            <a:noFill/>
+          </a:ln>
+          <a:effectLst/>
+        </p:spPr>
+        <p:style>
+          <a:lnRef idx="1">
+            <a:schemeClr val="accent1"/>
+          </a:lnRef>
+          <a:fillRef idx="3">
+            <a:schemeClr val="accent1"/>
+          </a:fillRef>
+          <a:effectRef idx="2">
+            <a:schemeClr val="accent1"/>
+          </a:effectRef>
+          <a:fontRef idx="minor">
+            <a:schemeClr val="lt1"/>
+          </a:fontRef>
+        </p:style>
+        <p:txBody>
+          <a:bodyPr rtlCol="0" anchor="ctr"/>
+          <a:lstStyle/>
+          <a:p>
+            <a:pPr algn="ctr"/>
+          </a:p>
+        </p:txBody>
+      </p:sp>
+      <p:sp>
+        <p:nvSpPr>
+          <p:cNvPr id="10" name="TextBox 9"/>
+          <p:cNvSpPr txBox="1"/>
+          <p:nvPr/>
+        </p:nvSpPr>
+        <p:spPr>
+          <a:xfrm>
+            <a:off x="7680960" y="1691640"/>
+            <a:ext cx="3657600" cy="365760"/>
+          </a:xfrm>
+          <a:prstGeom prst="rect">
+            <a:avLst/>
+          </a:prstGeom>
+          <a:noFill/>
+        </p:spPr>
+        <p:txBody>
+          <a:bodyPr wrap="square" anchor="t" lIns="0" rIns="0" tIns="0" bIns="0">
+            <a:spAutoFit/>
+          </a:bodyPr>
+          <a:lstStyle/>
+          <a:p>
+            <a:pPr algn="l">
+              <a:lnSpc>
+                <a:spcPct val="108000"/>
+              </a:lnSpc>
+              <a:spcAft>
+                <a:spcPts val="400"/>
+              </a:spcAft>
+            </a:pPr>
+            <a:r>
+              <a:rPr sz="1300" b="1" i="0">
+                <a:solidFill>
+                  <a:srgbClr val="BFD3E6"/>
+                </a:solidFill>
+                <a:latin typeface="NanumGothic"/>
+                <a:ea typeface="NanumGothic"/>
+              </a:rPr>
+              <a:t>LSB — 치료 삽입</a:t>
+            </a:r>
+          </a:p>
+        </p:txBody>
+      </p:sp>
+      <p:sp>
+        <p:nvSpPr>
+          <p:cNvPr id="11" name="TextBox 10"/>
+          <p:cNvSpPr txBox="1"/>
+          <p:nvPr/>
+        </p:nvSpPr>
+        <p:spPr>
+          <a:xfrm>
+            <a:off x="7680960" y="2194560"/>
+            <a:ext cx="3611880" cy="3657600"/>
+          </a:xfrm>
+          <a:prstGeom prst="rect">
+            <a:avLst/>
+          </a:prstGeom>
+          <a:noFill/>
+        </p:spPr>
+        <p:txBody>
+          <a:bodyPr wrap="square" lIns="0" rIns="0" tIns="0" bIns="0">
+            <a:spAutoFit/>
+          </a:bodyPr>
+          <a:lstStyle/>
+          <a:p>
+            <a:pPr algn="l">
+              <a:lnSpc>
+                <a:spcPct val="108000"/>
+              </a:lnSpc>
+              <a:spcAft>
+                <a:spcPts val="800"/>
+              </a:spcAft>
+            </a:pPr>
+            <a:r>
+              <a:rPr sz="875" b="1" i="0">
+                <a:solidFill>
+                  <a:srgbClr val="2C898A"/>
+                </a:solidFill>
+                <a:latin typeface="NanumGothic"/>
+                <a:ea typeface="NanumGothic"/>
+              </a:rPr>
+              <a:t>●  </a:t>
+            </a:r>
+            <a:r>
+              <a:rPr sz="1250" b="0" i="0">
+                <a:solidFill>
+                  <a:srgbClr val="FFFFFF"/>
+                </a:solidFill>
+                <a:latin typeface="NanumGothic"/>
+                <a:ea typeface="NanumGothic"/>
+              </a:rPr>
+              <a:t>기전: 교감차단 → 미세순환↑ + 교감매개통 차단</a:t>
+            </a:r>
+          </a:p>
+          <a:p>
+            <a:pPr algn="l">
+              <a:lnSpc>
+                <a:spcPct val="108000"/>
+              </a:lnSpc>
+              <a:spcAft>
+                <a:spcPts val="800"/>
+              </a:spcAft>
+            </a:pPr>
+            <a:r>
+              <a:rPr sz="875" b="1" i="0">
+                <a:solidFill>
+                  <a:srgbClr val="2C898A"/>
+                </a:solidFill>
+                <a:latin typeface="NanumGothic"/>
+                <a:ea typeface="NanumGothic"/>
+              </a:rPr>
+              <a:t>●  </a:t>
+            </a:r>
+            <a:r>
+              <a:rPr sz="1250" b="0" i="0">
+                <a:solidFill>
+                  <a:srgbClr val="FFFFFF"/>
+                </a:solidFill>
+                <a:latin typeface="NanumGothic"/>
+                <a:ea typeface="NanumGothic"/>
+              </a:rPr>
+              <a:t>근거: 난치성 DPN에 LSB+신경파괴 RCT·증례</a:t>
+            </a:r>
+          </a:p>
+          <a:p>
+            <a:pPr algn="l">
+              <a:lnSpc>
+                <a:spcPct val="108000"/>
+              </a:lnSpc>
+              <a:spcAft>
+                <a:spcPts val="800"/>
+              </a:spcAft>
+            </a:pPr>
+            <a:r>
+              <a:rPr sz="875" b="1" i="0">
+                <a:solidFill>
+                  <a:srgbClr val="2C898A"/>
+                </a:solidFill>
+                <a:latin typeface="NanumGothic"/>
+                <a:ea typeface="NanumGothic"/>
+              </a:rPr>
+              <a:t>●  </a:t>
+            </a:r>
+            <a:r>
+              <a:rPr sz="1250" b="0" i="0">
+                <a:solidFill>
+                  <a:srgbClr val="FFFFFF"/>
+                </a:solidFill>
+                <a:latin typeface="NanumGothic"/>
+                <a:ea typeface="NanumGothic"/>
+              </a:rPr>
+              <a:t>적용: 약물 불응·진단차단 양성 시 선택적 시행</a:t>
+            </a:r>
+          </a:p>
+          <a:p>
+            <a:pPr algn="l">
+              <a:lnSpc>
+                <a:spcPct val="108000"/>
+              </a:lnSpc>
+              <a:spcAft>
+                <a:spcPts val="800"/>
+              </a:spcAft>
+            </a:pPr>
+            <a:r>
+              <a:rPr sz="875" b="1" i="0">
+                <a:solidFill>
+                  <a:srgbClr val="2C898A"/>
+                </a:solidFill>
+                <a:latin typeface="NanumGothic"/>
+                <a:ea typeface="NanumGothic"/>
+              </a:rPr>
+              <a:t>●  </a:t>
+            </a:r>
+            <a:r>
+              <a:rPr sz="1250" b="0" i="0">
+                <a:solidFill>
+                  <a:srgbClr val="FFFFFF"/>
+                </a:solidFill>
+                <a:latin typeface="NanumGothic"/>
+                <a:ea typeface="NanumGothic"/>
+              </a:rPr>
+              <a:t>성공지표: 피부온도 ≥2°C↑ (근거 제한적)</a:t>
+            </a:r>
+          </a:p>
+        </p:txBody>
+      </p:sp>
+      <p:sp>
+        <p:nvSpPr>
+          <p:cNvPr id="12" name="TextBox 11"/>
           <p:cNvSpPr txBox="1"/>
           <p:nvPr/>
         </p:nvSpPr>
@@ -7191,14 +9349,14 @@
                 <a:latin typeface="NanumGothic"/>
                 <a:ea typeface="NanumGothic"/>
               </a:rPr>
-              <a:t>근거: StatPearls; 문헌고찰 종합</a:t>
-            </a:r>
-          </a:p>
-        </p:txBody>
-      </p:sp>
-      <p:sp>
-        <p:nvSpPr>
-          <p:cNvPr id="10" name="TextBox 9"/>
+              <a:t>근거: Zhang 2020(RCT) PMID 32915421; 증례 PMID 22606406; StatPearls NBK442009</a:t>
+            </a:r>
+          </a:p>
+        </p:txBody>
+      </p:sp>
+      <p:sp>
+        <p:nvSpPr>
+          <p:cNvPr id="13" name="TextBox 12"/>
           <p:cNvSpPr txBox="1"/>
           <p:nvPr/>
         </p:nvSpPr>
@@ -7265,11 +9423,389 @@
         </p:nvSpPr>
         <p:spPr>
           <a:xfrm>
-            <a:off x="0" y="0"/>
-            <a:ext cx="12191695" cy="6858000"/>
-          </a:xfrm>
-          <a:prstGeom prst="rect">
-            <a:avLst/>
+            <a:off x="502920" y="310896"/>
+            <a:ext cx="109728" cy="457200"/>
+          </a:xfrm>
+          <a:prstGeom prst="rect">
+            <a:avLst/>
+          </a:prstGeom>
+          <a:solidFill>
+            <a:srgbClr val="2C898A"/>
+          </a:solidFill>
+          <a:ln>
+            <a:noFill/>
+          </a:ln>
+          <a:effectLst/>
+        </p:spPr>
+        <p:style>
+          <a:lnRef idx="1">
+            <a:schemeClr val="accent1"/>
+          </a:lnRef>
+          <a:fillRef idx="3">
+            <a:schemeClr val="accent1"/>
+          </a:fillRef>
+          <a:effectRef idx="2">
+            <a:schemeClr val="accent1"/>
+          </a:effectRef>
+          <a:fontRef idx="minor">
+            <a:schemeClr val="lt1"/>
+          </a:fontRef>
+        </p:style>
+        <p:txBody>
+          <a:bodyPr rtlCol="0" anchor="ctr"/>
+          <a:lstStyle/>
+          <a:p>
+            <a:pPr algn="ctr"/>
+          </a:p>
+        </p:txBody>
+      </p:sp>
+      <p:sp>
+        <p:nvSpPr>
+          <p:cNvPr id="3" name="TextBox 2"/>
+          <p:cNvSpPr txBox="1"/>
+          <p:nvPr/>
+        </p:nvSpPr>
+        <p:spPr>
+          <a:xfrm>
+            <a:off x="731520" y="237744"/>
+            <a:ext cx="9509760" cy="685800"/>
+          </a:xfrm>
+          <a:prstGeom prst="rect">
+            <a:avLst/>
+          </a:prstGeom>
+          <a:noFill/>
+        </p:spPr>
+        <p:txBody>
+          <a:bodyPr wrap="square" anchor="ctr" lIns="0" rIns="0" tIns="0" bIns="0">
+            <a:spAutoFit/>
+          </a:bodyPr>
+          <a:lstStyle/>
+          <a:p>
+            <a:pPr algn="l">
+              <a:lnSpc>
+                <a:spcPct val="108000"/>
+              </a:lnSpc>
+              <a:spcAft>
+                <a:spcPts val="400"/>
+              </a:spcAft>
+            </a:pPr>
+            <a:r>
+              <a:rPr sz="2400" b="1" i="0">
+                <a:solidFill>
+                  <a:srgbClr val="1B355E"/>
+                </a:solidFill>
+                <a:latin typeface="NanumGothic"/>
+                <a:ea typeface="NanumGothic"/>
+              </a:rPr>
+              <a:t>효과 (1) 관류 개선 · 허혈성 통증</a:t>
+            </a:r>
+          </a:p>
+        </p:txBody>
+      </p:sp>
+      <p:sp>
+        <p:nvSpPr>
+          <p:cNvPr id="4" name="TextBox 3"/>
+          <p:cNvSpPr txBox="1"/>
+          <p:nvPr/>
+        </p:nvSpPr>
+        <p:spPr>
+          <a:xfrm>
+            <a:off x="749808" y="109728"/>
+            <a:ext cx="7315200" cy="219456"/>
+          </a:xfrm>
+          <a:prstGeom prst="rect">
+            <a:avLst/>
+          </a:prstGeom>
+          <a:noFill/>
+        </p:spPr>
+        <p:txBody>
+          <a:bodyPr wrap="square" anchor="t" lIns="0" rIns="0" tIns="0" bIns="0">
+            <a:spAutoFit/>
+          </a:bodyPr>
+          <a:lstStyle/>
+          <a:p>
+            <a:pPr algn="l">
+              <a:lnSpc>
+                <a:spcPct val="108000"/>
+              </a:lnSpc>
+              <a:spcAft>
+                <a:spcPts val="400"/>
+              </a:spcAft>
+            </a:pPr>
+            <a:r>
+              <a:rPr sz="1100" b="1" i="0">
+                <a:solidFill>
+                  <a:srgbClr val="1F6E70"/>
+                </a:solidFill>
+                <a:latin typeface="NanumGothic"/>
+                <a:ea typeface="NanumGothic"/>
+              </a:rPr>
+              <a:t>효과</a:t>
+            </a:r>
+          </a:p>
+        </p:txBody>
+      </p:sp>
+      <p:sp>
+        <p:nvSpPr>
+          <p:cNvPr id="5" name="Rectangle 4"/>
+          <p:cNvSpPr/>
+          <p:nvPr/>
+        </p:nvSpPr>
+        <p:spPr>
+          <a:xfrm>
+            <a:off x="731520" y="969264"/>
+            <a:ext cx="10881360" cy="17780"/>
+          </a:xfrm>
+          <a:prstGeom prst="rect">
+            <a:avLst/>
+          </a:prstGeom>
+          <a:solidFill>
+            <a:srgbClr val="D5DEE7"/>
+          </a:solidFill>
+          <a:ln>
+            <a:noFill/>
+          </a:ln>
+          <a:effectLst/>
+        </p:spPr>
+        <p:style>
+          <a:lnRef idx="1">
+            <a:schemeClr val="accent1"/>
+          </a:lnRef>
+          <a:fillRef idx="3">
+            <a:schemeClr val="accent1"/>
+          </a:fillRef>
+          <a:effectRef idx="2">
+            <a:schemeClr val="accent1"/>
+          </a:effectRef>
+          <a:fontRef idx="minor">
+            <a:schemeClr val="lt1"/>
+          </a:fontRef>
+        </p:style>
+        <p:txBody>
+          <a:bodyPr rtlCol="0" anchor="ctr"/>
+          <a:lstStyle/>
+          <a:p>
+            <a:pPr algn="ctr"/>
+          </a:p>
+        </p:txBody>
+      </p:sp>
+      <p:sp>
+        <p:nvSpPr>
+          <p:cNvPr id="6" name="Rounded Rectangle 5"/>
+          <p:cNvSpPr/>
+          <p:nvPr/>
+        </p:nvSpPr>
+        <p:spPr>
+          <a:xfrm>
+            <a:off x="11194999" y="365760"/>
+            <a:ext cx="493776" cy="347472"/>
+          </a:xfrm>
+          <a:prstGeom prst="roundRect">
+            <a:avLst>
+              <a:gd name="adj" fmla="val 8000"/>
+            </a:avLst>
+          </a:prstGeom>
+          <a:solidFill>
+            <a:srgbClr val="2E7D32"/>
+          </a:solidFill>
+          <a:ln>
+            <a:noFill/>
+          </a:ln>
+          <a:effectLst/>
+        </p:spPr>
+        <p:style>
+          <a:lnRef idx="1">
+            <a:schemeClr val="accent1"/>
+          </a:lnRef>
+          <a:fillRef idx="3">
+            <a:schemeClr val="accent1"/>
+          </a:fillRef>
+          <a:effectRef idx="2">
+            <a:schemeClr val="accent1"/>
+          </a:effectRef>
+          <a:fontRef idx="minor">
+            <a:schemeClr val="lt1"/>
+          </a:fontRef>
+        </p:style>
+        <p:txBody>
+          <a:bodyPr rtlCol="0" anchor="ctr"/>
+          <a:lstStyle/>
+          <a:p>
+            <a:pPr algn="ctr"/>
+          </a:p>
+        </p:txBody>
+      </p:sp>
+      <p:sp>
+        <p:nvSpPr>
+          <p:cNvPr id="7" name="TextBox 6"/>
+          <p:cNvSpPr txBox="1"/>
+          <p:nvPr/>
+        </p:nvSpPr>
+        <p:spPr>
+          <a:xfrm>
+            <a:off x="11194999" y="365760"/>
+            <a:ext cx="493776" cy="347472"/>
+          </a:xfrm>
+          <a:prstGeom prst="rect">
+            <a:avLst/>
+          </a:prstGeom>
+          <a:noFill/>
+        </p:spPr>
+        <p:txBody>
+          <a:bodyPr wrap="square" anchor="ctr" lIns="0" rIns="0" tIns="0" bIns="0">
+            <a:spAutoFit/>
+          </a:bodyPr>
+          <a:lstStyle/>
+          <a:p>
+            <a:pPr algn="ctr">
+              <a:lnSpc>
+                <a:spcPct val="108000"/>
+              </a:lnSpc>
+              <a:spcAft>
+                <a:spcPts val="400"/>
+              </a:spcAft>
+            </a:pPr>
+            <a:r>
+              <a:rPr sz="1150" b="1" i="0">
+                <a:solidFill>
+                  <a:srgbClr val="FFFFFF"/>
+                </a:solidFill>
+                <a:latin typeface="NanumGothic"/>
+                <a:ea typeface="NanumGothic"/>
+              </a:rPr>
+              <a:t>효과</a:t>
+            </a:r>
+          </a:p>
+        </p:txBody>
+      </p:sp>
+      <p:sp>
+        <p:nvSpPr>
+          <p:cNvPr id="8" name="TextBox 7"/>
+          <p:cNvSpPr txBox="1"/>
+          <p:nvPr/>
+        </p:nvSpPr>
+        <p:spPr>
+          <a:xfrm>
+            <a:off x="731520" y="1371600"/>
+            <a:ext cx="6400800" cy="4663440"/>
+          </a:xfrm>
+          <a:prstGeom prst="rect">
+            <a:avLst/>
+          </a:prstGeom>
+          <a:noFill/>
+        </p:spPr>
+        <p:txBody>
+          <a:bodyPr wrap="square" lIns="0" rIns="0" tIns="0" bIns="0">
+            <a:spAutoFit/>
+          </a:bodyPr>
+          <a:lstStyle/>
+          <a:p>
+            <a:pPr algn="l">
+              <a:lnSpc>
+                <a:spcPct val="108000"/>
+              </a:lnSpc>
+              <a:spcAft>
+                <a:spcPts val="800"/>
+              </a:spcAft>
+            </a:pPr>
+            <a:r>
+              <a:rPr sz="979" b="1" i="0">
+                <a:solidFill>
+                  <a:srgbClr val="2C898A"/>
+                </a:solidFill>
+                <a:latin typeface="NanumGothic"/>
+                <a:ea typeface="NanumGothic"/>
+              </a:rPr>
+              <a:t>●  </a:t>
+            </a:r>
+            <a:r>
+              <a:rPr sz="1400" b="1" i="0">
+                <a:solidFill>
+                  <a:srgbClr val="1A202C"/>
+                </a:solidFill>
+                <a:latin typeface="NanumGothic"/>
+                <a:ea typeface="NanumGothic"/>
+              </a:rPr>
+              <a:t>관류 실측(Dickey 2024): LSB 후 후경골동맥 직경 0.17→0.27 cm(+58.8%), 모세혈관 재충혈 3.92→1.30초, 족부온도 +2.8°C.</a:t>
+            </a:r>
+          </a:p>
+          <a:p>
+            <a:pPr algn="l">
+              <a:lnSpc>
+                <a:spcPct val="108000"/>
+              </a:lnSpc>
+              <a:spcAft>
+                <a:spcPts val="800"/>
+              </a:spcAft>
+            </a:pPr>
+            <a:r>
+              <a:rPr sz="979" b="1" i="0">
+                <a:solidFill>
+                  <a:srgbClr val="2C898A"/>
+                </a:solidFill>
+                <a:latin typeface="NanumGothic"/>
+                <a:ea typeface="NanumGothic"/>
+              </a:rPr>
+              <a:t>●  </a:t>
+            </a:r>
+            <a:r>
+              <a:rPr sz="1400" b="0" i="0">
+                <a:solidFill>
+                  <a:srgbClr val="2E7D32"/>
+                </a:solidFill>
+                <a:latin typeface="NanumGothic"/>
+                <a:ea typeface="NanumGothic"/>
+              </a:rPr>
+              <a:t>허혈성 통증(PAD): 하지 통증 최대 75%↓, Fontaine 분류·측부관류 개선(Medicina 2024).</a:t>
+            </a:r>
+          </a:p>
+          <a:p>
+            <a:pPr algn="l">
+              <a:lnSpc>
+                <a:spcPct val="108000"/>
+              </a:lnSpc>
+              <a:spcAft>
+                <a:spcPts val="800"/>
+              </a:spcAft>
+            </a:pPr>
+            <a:r>
+              <a:rPr sz="979" b="1" i="0">
+                <a:solidFill>
+                  <a:srgbClr val="2C898A"/>
+                </a:solidFill>
+                <a:latin typeface="NanumGothic"/>
+                <a:ea typeface="NanumGothic"/>
+              </a:rPr>
+              <a:t>●  </a:t>
+            </a:r>
+            <a:r>
+              <a:rPr sz="1400" b="0" i="0">
+                <a:solidFill>
+                  <a:srgbClr val="1A202C"/>
+                </a:solidFill>
+                <a:latin typeface="NanumGothic"/>
+                <a:ea typeface="NanumGothic"/>
+              </a:rPr>
+              <a:t>비재건성 CLI: 교감신경 신경파괴가 절단 외 대안이 없는 환자의 통증조절에 효과적·안전(Barreto 2018).</a:t>
+            </a:r>
+          </a:p>
+        </p:txBody>
+      </p:sp>
+      <p:sp>
+        <p:nvSpPr>
+          <p:cNvPr id="9" name="Rounded Rectangle 8"/>
+          <p:cNvSpPr/>
+          <p:nvPr/>
+        </p:nvSpPr>
+        <p:spPr>
+          <a:xfrm>
+            <a:off x="7406640" y="1463040"/>
+            <a:ext cx="4114800" cy="4480560"/>
+          </a:xfrm>
+          <a:prstGeom prst="roundRect">
+            <a:avLst>
+              <a:gd name="adj" fmla="val 8000"/>
+            </a:avLst>
           </a:prstGeom>
           <a:solidFill>
             <a:srgbClr val="1B355E"/>
@@ -7303,58 +9839,14 @@
       </p:sp>
       <p:sp>
         <p:nvSpPr>
-          <p:cNvPr id="3" name="Rectangle 2"/>
-          <p:cNvSpPr/>
-          <p:nvPr/>
-        </p:nvSpPr>
-        <p:spPr>
-          <a:xfrm>
-            <a:off x="0" y="0"/>
-            <a:ext cx="201168" cy="6858000"/>
-          </a:xfrm>
-          <a:prstGeom prst="rect">
-            <a:avLst/>
-          </a:prstGeom>
-          <a:solidFill>
-            <a:srgbClr val="2C898A"/>
-          </a:solidFill>
-          <a:ln>
-            <a:noFill/>
-          </a:ln>
-          <a:effectLst/>
-        </p:spPr>
-        <p:style>
-          <a:lnRef idx="1">
-            <a:schemeClr val="accent1"/>
-          </a:lnRef>
-          <a:fillRef idx="3">
-            <a:schemeClr val="accent1"/>
-          </a:fillRef>
-          <a:effectRef idx="2">
-            <a:schemeClr val="accent1"/>
-          </a:effectRef>
-          <a:fontRef idx="minor">
-            <a:schemeClr val="lt1"/>
-          </a:fontRef>
-        </p:style>
-        <p:txBody>
-          <a:bodyPr rtlCol="0" anchor="ctr"/>
-          <a:lstStyle/>
-          <a:p>
-            <a:pPr algn="ctr"/>
-          </a:p>
-        </p:txBody>
-      </p:sp>
-      <p:sp>
-        <p:nvSpPr>
-          <p:cNvPr id="4" name="TextBox 3"/>
+          <p:cNvPr id="10" name="TextBox 9"/>
           <p:cNvSpPr txBox="1"/>
           <p:nvPr/>
         </p:nvSpPr>
         <p:spPr>
           <a:xfrm>
-            <a:off x="822960" y="640080"/>
-            <a:ext cx="10515600" cy="457200"/>
+            <a:off x="7680960" y="1691640"/>
+            <a:ext cx="3657600" cy="365760"/>
           </a:xfrm>
           <a:prstGeom prst="rect">
             <a:avLst/>
@@ -7378,26 +9870,26 @@
             <a:r>
               <a:rPr sz="1300" b="1" i="0">
                 <a:solidFill>
-                  <a:srgbClr val="9FE0D8"/>
-                </a:solidFill>
-                <a:latin typeface="NanumGothic"/>
-                <a:ea typeface="NanumGothic"/>
-              </a:rPr>
-              <a:t>핵심 메시지 — LSB</a:t>
-            </a:r>
-          </a:p>
-        </p:txBody>
-      </p:sp>
-      <p:sp>
-        <p:nvSpPr>
-          <p:cNvPr id="5" name="TextBox 4"/>
+                  <a:srgbClr val="BFD3E6"/>
+                </a:solidFill>
+                <a:latin typeface="NanumGothic"/>
+                <a:ea typeface="NanumGothic"/>
+              </a:rPr>
+              <a:t>실측 수치(Dickey 2024)</a:t>
+            </a:r>
+          </a:p>
+        </p:txBody>
+      </p:sp>
+      <p:sp>
+        <p:nvSpPr>
+          <p:cNvPr id="11" name="TextBox 10"/>
           <p:cNvSpPr txBox="1"/>
           <p:nvPr/>
         </p:nvSpPr>
         <p:spPr>
           <a:xfrm>
-            <a:off x="822960" y="1097280"/>
-            <a:ext cx="10515600" cy="914400"/>
+            <a:off x="7680960" y="2194560"/>
+            <a:ext cx="3611880" cy="3657600"/>
           </a:xfrm>
           <a:prstGeom prst="rect">
             <a:avLst/>
@@ -7405,86 +9897,142 @@
           <a:noFill/>
         </p:spPr>
         <p:txBody>
-          <a:bodyPr wrap="square" anchor="t" lIns="0" rIns="0" tIns="0" bIns="0">
+          <a:bodyPr wrap="square" lIns="0" rIns="0" tIns="0" bIns="0">
             <a:spAutoFit/>
           </a:bodyPr>
           <a:lstStyle/>
           <a:p>
             <a:pPr algn="l">
               <a:lnSpc>
-                <a:spcPct val="110000"/>
-              </a:lnSpc>
-              <a:spcAft>
-                <a:spcPts val="400"/>
-              </a:spcAft>
-            </a:pPr>
-            <a:r>
-              <a:rPr sz="2200" b="1" i="0">
+                <a:spcPct val="108000"/>
+              </a:lnSpc>
+              <a:spcAft>
+                <a:spcPts val="800"/>
+              </a:spcAft>
+            </a:pPr>
+            <a:r>
+              <a:rPr sz="875" b="1" i="0">
+                <a:solidFill>
+                  <a:srgbClr val="2C898A"/>
+                </a:solidFill>
+                <a:latin typeface="NanumGothic"/>
+                <a:ea typeface="NanumGothic"/>
+              </a:rPr>
+              <a:t>●  </a:t>
+            </a:r>
+            <a:r>
+              <a:rPr sz="1250" b="1" i="0">
+                <a:solidFill>
+                  <a:srgbClr val="9FE0D8"/>
+                </a:solidFill>
+                <a:latin typeface="NanumGothic"/>
+                <a:ea typeface="NanumGothic"/>
+              </a:rPr>
+              <a:t>후경골동맥 +58.8%</a:t>
+            </a:r>
+          </a:p>
+          <a:p>
+            <a:pPr algn="l">
+              <a:lnSpc>
+                <a:spcPct val="108000"/>
+              </a:lnSpc>
+              <a:spcAft>
+                <a:spcPts val="800"/>
+              </a:spcAft>
+            </a:pPr>
+            <a:r>
+              <a:rPr sz="875" b="1" i="0">
+                <a:solidFill>
+                  <a:srgbClr val="2C898A"/>
+                </a:solidFill>
+                <a:latin typeface="NanumGothic"/>
+                <a:ea typeface="NanumGothic"/>
+              </a:rPr>
+              <a:t>●  </a:t>
+            </a:r>
+            <a:r>
+              <a:rPr sz="1250" b="0" i="0">
                 <a:solidFill>
                   <a:srgbClr val="FFFFFF"/>
                 </a:solidFill>
                 <a:latin typeface="NanumGothic"/>
                 <a:ea typeface="NanumGothic"/>
               </a:rPr>
-              <a:t>표준은 투시 유도 방척추 접근, 성공은 온도 ≥2°C</a:t>
-            </a:r>
-          </a:p>
-        </p:txBody>
-      </p:sp>
-      <p:sp>
-        <p:nvSpPr>
-          <p:cNvPr id="6" name="Rectangle 5"/>
-          <p:cNvSpPr/>
-          <p:nvPr/>
-        </p:nvSpPr>
-        <p:spPr>
-          <a:xfrm>
-            <a:off x="822960" y="2322576"/>
-            <a:ext cx="146304" cy="445385"/>
-          </a:xfrm>
-          <a:prstGeom prst="rect">
-            <a:avLst/>
-          </a:prstGeom>
-          <a:solidFill>
-            <a:srgbClr val="2C898A"/>
-          </a:solidFill>
-          <a:ln>
-            <a:noFill/>
-          </a:ln>
-          <a:effectLst/>
-        </p:spPr>
-        <p:style>
-          <a:lnRef idx="1">
-            <a:schemeClr val="accent1"/>
-          </a:lnRef>
-          <a:fillRef idx="3">
-            <a:schemeClr val="accent1"/>
-          </a:fillRef>
-          <a:effectRef idx="2">
-            <a:schemeClr val="accent1"/>
-          </a:effectRef>
-          <a:fontRef idx="minor">
-            <a:schemeClr val="lt1"/>
-          </a:fontRef>
-        </p:style>
-        <p:txBody>
-          <a:bodyPr rtlCol="0" anchor="ctr"/>
-          <a:lstStyle/>
-          <a:p>
-            <a:pPr algn="ctr"/>
-          </a:p>
-        </p:txBody>
-      </p:sp>
-      <p:sp>
-        <p:nvSpPr>
-          <p:cNvPr id="7" name="TextBox 6"/>
+              <a:t>모세혈관 재충혈 3.92→1.30초</a:t>
+            </a:r>
+          </a:p>
+          <a:p>
+            <a:pPr algn="l">
+              <a:lnSpc>
+                <a:spcPct val="108000"/>
+              </a:lnSpc>
+              <a:spcAft>
+                <a:spcPts val="800"/>
+              </a:spcAft>
+            </a:pPr>
+            <a:r>
+              <a:rPr sz="875" b="1" i="0">
+                <a:solidFill>
+                  <a:srgbClr val="2C898A"/>
+                </a:solidFill>
+                <a:latin typeface="NanumGothic"/>
+                <a:ea typeface="NanumGothic"/>
+              </a:rPr>
+              <a:t>●  </a:t>
+            </a:r>
+            <a:r>
+              <a:rPr sz="1250" b="0" i="0">
+                <a:solidFill>
+                  <a:srgbClr val="FFFFFF"/>
+                </a:solidFill>
+                <a:latin typeface="NanumGothic"/>
+                <a:ea typeface="NanumGothic"/>
+              </a:rPr>
+              <a:t>족부온도 +2.8°C</a:t>
+            </a:r>
+          </a:p>
+          <a:p>
+            <a:pPr algn="l">
+              <a:lnSpc>
+                <a:spcPct val="108000"/>
+              </a:lnSpc>
+              <a:spcAft>
+                <a:spcPts val="800"/>
+              </a:spcAft>
+            </a:pPr>
+            <a:r>
+              <a:rPr sz="875" b="1" i="0">
+                <a:solidFill>
+                  <a:srgbClr val="2C898A"/>
+                </a:solidFill>
+                <a:latin typeface="NanumGothic"/>
+                <a:ea typeface="NanumGothic"/>
+              </a:rPr>
+              <a:t>●  </a:t>
+            </a:r>
+            <a:r>
+              <a:rPr sz="1250" b="1" i="0">
+                <a:solidFill>
+                  <a:srgbClr val="9FE0D8"/>
+                </a:solidFill>
+                <a:latin typeface="NanumGothic"/>
+                <a:ea typeface="NanumGothic"/>
+              </a:rPr>
+              <a:t>→ 관류 개선의 객관 근거</a:t>
+            </a:r>
+          </a:p>
+        </p:txBody>
+      </p:sp>
+      <p:sp>
+        <p:nvSpPr>
+          <p:cNvPr id="12" name="TextBox 11"/>
           <p:cNvSpPr txBox="1"/>
           <p:nvPr/>
         </p:nvSpPr>
         <p:spPr>
           <a:xfrm>
-            <a:off x="1143000" y="2286000"/>
-            <a:ext cx="2926080" cy="674827"/>
+            <a:off x="731520" y="6455664"/>
+            <a:ext cx="9875520" cy="292608"/>
           </a:xfrm>
           <a:prstGeom prst="rect">
             <a:avLst/>
@@ -7506,28 +10054,28 @@
               </a:spcAft>
             </a:pPr>
             <a:r>
-              <a:rPr sz="1400" b="1" i="0">
-                <a:solidFill>
-                  <a:srgbClr val="9FE0D8"/>
-                </a:solidFill>
-                <a:latin typeface="NanumGothic"/>
-                <a:ea typeface="NanumGothic"/>
-              </a:rPr>
-              <a:t>방법</a:t>
-            </a:r>
-          </a:p>
-        </p:txBody>
-      </p:sp>
-      <p:sp>
-        <p:nvSpPr>
-          <p:cNvPr id="8" name="TextBox 7"/>
+              <a:rPr sz="900" b="0" i="0">
+                <a:solidFill>
+                  <a:srgbClr val="5A6B7B"/>
+                </a:solidFill>
+                <a:latin typeface="NanumGothic"/>
+                <a:ea typeface="NanumGothic"/>
+              </a:rPr>
+              <a:t>근거: Dickey 2024(Cureus); Medicina 2024; Barreto 2018</a:t>
+            </a:r>
+          </a:p>
+        </p:txBody>
+      </p:sp>
+      <p:sp>
+        <p:nvSpPr>
+          <p:cNvPr id="13" name="TextBox 12"/>
           <p:cNvSpPr txBox="1"/>
           <p:nvPr/>
         </p:nvSpPr>
         <p:spPr>
           <a:xfrm>
-            <a:off x="4114800" y="2286000"/>
-            <a:ext cx="7406640" cy="674827"/>
+            <a:off x="11064240" y="6455664"/>
+            <a:ext cx="822960" cy="292608"/>
           </a:xfrm>
           <a:prstGeom prst="rect">
             <a:avLst/>
@@ -7540,543 +10088,23 @@
           </a:bodyPr>
           <a:lstStyle/>
           <a:p>
-            <a:pPr algn="l">
-              <a:lnSpc>
-                <a:spcPct val="105000"/>
+            <a:pPr algn="r">
+              <a:lnSpc>
+                <a:spcPct val="108000"/>
               </a:lnSpc>
               <a:spcAft>
                 <a:spcPts val="400"/>
               </a:spcAft>
             </a:pPr>
             <a:r>
-              <a:rPr sz="1250" b="0" i="0">
-                <a:solidFill>
-                  <a:srgbClr val="FFFFFF"/>
-                </a:solidFill>
-                <a:latin typeface="NanumGothic"/>
-                <a:ea typeface="NanumGothic"/>
-              </a:rPr>
-              <a:t>L2–L3 방척추 접근·투시, 정중선 7 cm 외측, 조영제 두미측 확산, 성공지표 온도 ≥2°C.</a:t>
-            </a:r>
-          </a:p>
-        </p:txBody>
-      </p:sp>
-      <p:sp>
-        <p:nvSpPr>
-          <p:cNvPr id="9" name="Rectangle 8"/>
-          <p:cNvSpPr/>
-          <p:nvPr/>
-        </p:nvSpPr>
-        <p:spPr>
-          <a:xfrm>
-            <a:off x="822960" y="3072384"/>
-            <a:ext cx="146304" cy="445385"/>
-          </a:xfrm>
-          <a:prstGeom prst="rect">
-            <a:avLst/>
-          </a:prstGeom>
-          <a:solidFill>
-            <a:srgbClr val="2C898A"/>
-          </a:solidFill>
-          <a:ln>
-            <a:noFill/>
-          </a:ln>
-          <a:effectLst/>
-        </p:spPr>
-        <p:style>
-          <a:lnRef idx="1">
-            <a:schemeClr val="accent1"/>
-          </a:lnRef>
-          <a:fillRef idx="3">
-            <a:schemeClr val="accent1"/>
-          </a:fillRef>
-          <a:effectRef idx="2">
-            <a:schemeClr val="accent1"/>
-          </a:effectRef>
-          <a:fontRef idx="minor">
-            <a:schemeClr val="lt1"/>
-          </a:fontRef>
-        </p:style>
-        <p:txBody>
-          <a:bodyPr rtlCol="0" anchor="ctr"/>
-          <a:lstStyle/>
-          <a:p>
-            <a:pPr algn="ctr"/>
-          </a:p>
-        </p:txBody>
-      </p:sp>
-      <p:sp>
-        <p:nvSpPr>
-          <p:cNvPr id="10" name="TextBox 9"/>
-          <p:cNvSpPr txBox="1"/>
-          <p:nvPr/>
-        </p:nvSpPr>
-        <p:spPr>
-          <a:xfrm>
-            <a:off x="1143000" y="3035808"/>
-            <a:ext cx="2926080" cy="674827"/>
-          </a:xfrm>
-          <a:prstGeom prst="rect">
-            <a:avLst/>
-          </a:prstGeom>
-          <a:noFill/>
-        </p:spPr>
-        <p:txBody>
-          <a:bodyPr wrap="square" anchor="ctr" lIns="0" rIns="0" tIns="0" bIns="0">
-            <a:spAutoFit/>
-          </a:bodyPr>
-          <a:lstStyle/>
-          <a:p>
-            <a:pPr algn="l">
-              <a:lnSpc>
-                <a:spcPct val="108000"/>
-              </a:lnSpc>
-              <a:spcAft>
-                <a:spcPts val="400"/>
-              </a:spcAft>
-            </a:pPr>
-            <a:r>
-              <a:rPr sz="1400" b="1" i="0">
-                <a:solidFill>
-                  <a:srgbClr val="9FE0D8"/>
-                </a:solidFill>
-                <a:latin typeface="NanumGothic"/>
-                <a:ea typeface="NanumGothic"/>
-              </a:rPr>
-              <a:t>약제</a:t>
-            </a:r>
-          </a:p>
-        </p:txBody>
-      </p:sp>
-      <p:sp>
-        <p:nvSpPr>
-          <p:cNvPr id="11" name="TextBox 10"/>
-          <p:cNvSpPr txBox="1"/>
-          <p:nvPr/>
-        </p:nvSpPr>
-        <p:spPr>
-          <a:xfrm>
-            <a:off x="4114800" y="3035808"/>
-            <a:ext cx="7406640" cy="674827"/>
-          </a:xfrm>
-          <a:prstGeom prst="rect">
-            <a:avLst/>
-          </a:prstGeom>
-          <a:noFill/>
-        </p:spPr>
-        <p:txBody>
-          <a:bodyPr wrap="square" anchor="ctr" lIns="0" rIns="0" tIns="0" bIns="0">
-            <a:spAutoFit/>
-          </a:bodyPr>
-          <a:lstStyle/>
-          <a:p>
-            <a:pPr algn="l">
-              <a:lnSpc>
-                <a:spcPct val="105000"/>
-              </a:lnSpc>
-              <a:spcAft>
-                <a:spcPts val="400"/>
-              </a:spcAft>
-            </a:pPr>
-            <a:r>
-              <a:rPr sz="1250" b="0" i="0">
-                <a:solidFill>
-                  <a:srgbClr val="FFFFFF"/>
-                </a:solidFill>
-                <a:latin typeface="NanumGothic"/>
-                <a:ea typeface="NanumGothic"/>
-              </a:rPr>
-              <a:t>진단/치료는 국소마취제, 신경파괴는 무수알코올/phenol·RFA — 진단차단 양성 시에만.</a:t>
-            </a:r>
-          </a:p>
-        </p:txBody>
-      </p:sp>
-      <p:sp>
-        <p:nvSpPr>
-          <p:cNvPr id="12" name="Rectangle 11"/>
-          <p:cNvSpPr/>
-          <p:nvPr/>
-        </p:nvSpPr>
-        <p:spPr>
-          <a:xfrm>
-            <a:off x="822960" y="3822191"/>
-            <a:ext cx="146304" cy="445385"/>
-          </a:xfrm>
-          <a:prstGeom prst="rect">
-            <a:avLst/>
-          </a:prstGeom>
-          <a:solidFill>
-            <a:srgbClr val="2C898A"/>
-          </a:solidFill>
-          <a:ln>
-            <a:noFill/>
-          </a:ln>
-          <a:effectLst/>
-        </p:spPr>
-        <p:style>
-          <a:lnRef idx="1">
-            <a:schemeClr val="accent1"/>
-          </a:lnRef>
-          <a:fillRef idx="3">
-            <a:schemeClr val="accent1"/>
-          </a:fillRef>
-          <a:effectRef idx="2">
-            <a:schemeClr val="accent1"/>
-          </a:effectRef>
-          <a:fontRef idx="minor">
-            <a:schemeClr val="lt1"/>
-          </a:fontRef>
-        </p:style>
-        <p:txBody>
-          <a:bodyPr rtlCol="0" anchor="ctr"/>
-          <a:lstStyle/>
-          <a:p>
-            <a:pPr algn="ctr"/>
-          </a:p>
-        </p:txBody>
-      </p:sp>
-      <p:sp>
-        <p:nvSpPr>
-          <p:cNvPr id="13" name="TextBox 12"/>
-          <p:cNvSpPr txBox="1"/>
-          <p:nvPr/>
-        </p:nvSpPr>
-        <p:spPr>
-          <a:xfrm>
-            <a:off x="1143000" y="3785615"/>
-            <a:ext cx="2926080" cy="674827"/>
-          </a:xfrm>
-          <a:prstGeom prst="rect">
-            <a:avLst/>
-          </a:prstGeom>
-          <a:noFill/>
-        </p:spPr>
-        <p:txBody>
-          <a:bodyPr wrap="square" anchor="ctr" lIns="0" rIns="0" tIns="0" bIns="0">
-            <a:spAutoFit/>
-          </a:bodyPr>
-          <a:lstStyle/>
-          <a:p>
-            <a:pPr algn="l">
-              <a:lnSpc>
-                <a:spcPct val="108000"/>
-              </a:lnSpc>
-              <a:spcAft>
-                <a:spcPts val="400"/>
-              </a:spcAft>
-            </a:pPr>
-            <a:r>
-              <a:rPr sz="1400" b="1" i="0">
-                <a:solidFill>
-                  <a:srgbClr val="9FE0D8"/>
-                </a:solidFill>
-                <a:latin typeface="NanumGothic"/>
-                <a:ea typeface="NanumGothic"/>
-              </a:rPr>
-              <a:t>적응증</a:t>
-            </a:r>
-          </a:p>
-        </p:txBody>
-      </p:sp>
-      <p:sp>
-        <p:nvSpPr>
-          <p:cNvPr id="14" name="TextBox 13"/>
-          <p:cNvSpPr txBox="1"/>
-          <p:nvPr/>
-        </p:nvSpPr>
-        <p:spPr>
-          <a:xfrm>
-            <a:off x="4114800" y="3785615"/>
-            <a:ext cx="7406640" cy="674827"/>
-          </a:xfrm>
-          <a:prstGeom prst="rect">
-            <a:avLst/>
-          </a:prstGeom>
-          <a:noFill/>
-        </p:spPr>
-        <p:txBody>
-          <a:bodyPr wrap="square" anchor="ctr" lIns="0" rIns="0" tIns="0" bIns="0">
-            <a:spAutoFit/>
-          </a:bodyPr>
-          <a:lstStyle/>
-          <a:p>
-            <a:pPr algn="l">
-              <a:lnSpc>
-                <a:spcPct val="105000"/>
-              </a:lnSpc>
-              <a:spcAft>
-                <a:spcPts val="400"/>
-              </a:spcAft>
-            </a:pPr>
-            <a:r>
-              <a:rPr sz="1250" b="0" i="0">
-                <a:solidFill>
-                  <a:srgbClr val="FFFFFF"/>
-                </a:solidFill>
-                <a:latin typeface="NanumGothic"/>
-                <a:ea typeface="NanumGothic"/>
-              </a:rPr>
-              <a:t>조기 CRPS·PAD/CLI 안정통·신경병증·다한증 등. 특발성 NLC는 적응 아님.</a:t>
-            </a:r>
-          </a:p>
-        </p:txBody>
-      </p:sp>
-      <p:sp>
-        <p:nvSpPr>
-          <p:cNvPr id="15" name="Rectangle 14"/>
-          <p:cNvSpPr/>
-          <p:nvPr/>
-        </p:nvSpPr>
-        <p:spPr>
-          <a:xfrm>
-            <a:off x="822960" y="4572000"/>
-            <a:ext cx="146304" cy="445385"/>
-          </a:xfrm>
-          <a:prstGeom prst="rect">
-            <a:avLst/>
-          </a:prstGeom>
-          <a:solidFill>
-            <a:srgbClr val="2C898A"/>
-          </a:solidFill>
-          <a:ln>
-            <a:noFill/>
-          </a:ln>
-          <a:effectLst/>
-        </p:spPr>
-        <p:style>
-          <a:lnRef idx="1">
-            <a:schemeClr val="accent1"/>
-          </a:lnRef>
-          <a:fillRef idx="3">
-            <a:schemeClr val="accent1"/>
-          </a:fillRef>
-          <a:effectRef idx="2">
-            <a:schemeClr val="accent1"/>
-          </a:effectRef>
-          <a:fontRef idx="minor">
-            <a:schemeClr val="lt1"/>
-          </a:fontRef>
-        </p:style>
-        <p:txBody>
-          <a:bodyPr rtlCol="0" anchor="ctr"/>
-          <a:lstStyle/>
-          <a:p>
-            <a:pPr algn="ctr"/>
-          </a:p>
-        </p:txBody>
-      </p:sp>
-      <p:sp>
-        <p:nvSpPr>
-          <p:cNvPr id="16" name="TextBox 15"/>
-          <p:cNvSpPr txBox="1"/>
-          <p:nvPr/>
-        </p:nvSpPr>
-        <p:spPr>
-          <a:xfrm>
-            <a:off x="1143000" y="4535424"/>
-            <a:ext cx="2926080" cy="674827"/>
-          </a:xfrm>
-          <a:prstGeom prst="rect">
-            <a:avLst/>
-          </a:prstGeom>
-          <a:noFill/>
-        </p:spPr>
-        <p:txBody>
-          <a:bodyPr wrap="square" anchor="ctr" lIns="0" rIns="0" tIns="0" bIns="0">
-            <a:spAutoFit/>
-          </a:bodyPr>
-          <a:lstStyle/>
-          <a:p>
-            <a:pPr algn="l">
-              <a:lnSpc>
-                <a:spcPct val="108000"/>
-              </a:lnSpc>
-              <a:spcAft>
-                <a:spcPts val="400"/>
-              </a:spcAft>
-            </a:pPr>
-            <a:r>
-              <a:rPr sz="1400" b="1" i="0">
-                <a:solidFill>
-                  <a:srgbClr val="9FE0D8"/>
-                </a:solidFill>
-                <a:latin typeface="NanumGothic"/>
-                <a:ea typeface="NanumGothic"/>
-              </a:rPr>
-              <a:t>효과</a:t>
-            </a:r>
-          </a:p>
-        </p:txBody>
-      </p:sp>
-      <p:sp>
-        <p:nvSpPr>
-          <p:cNvPr id="17" name="TextBox 16"/>
-          <p:cNvSpPr txBox="1"/>
-          <p:nvPr/>
-        </p:nvSpPr>
-        <p:spPr>
-          <a:xfrm>
-            <a:off x="4114800" y="4535424"/>
-            <a:ext cx="7406640" cy="674827"/>
-          </a:xfrm>
-          <a:prstGeom prst="rect">
-            <a:avLst/>
-          </a:prstGeom>
-          <a:noFill/>
-        </p:spPr>
-        <p:txBody>
-          <a:bodyPr wrap="square" anchor="ctr" lIns="0" rIns="0" tIns="0" bIns="0">
-            <a:spAutoFit/>
-          </a:bodyPr>
-          <a:lstStyle/>
-          <a:p>
-            <a:pPr algn="l">
-              <a:lnSpc>
-                <a:spcPct val="105000"/>
-              </a:lnSpc>
-              <a:spcAft>
-                <a:spcPts val="400"/>
-              </a:spcAft>
-            </a:pPr>
-            <a:r>
-              <a:rPr sz="1250" b="0" i="0">
-                <a:solidFill>
-                  <a:srgbClr val="FFFFFF"/>
-                </a:solidFill>
-                <a:latin typeface="NanumGothic"/>
-                <a:ea typeface="NanumGothic"/>
-              </a:rPr>
-              <a:t>관류 실측 개선(Dickey), 허혈통 최대 75%↓, CRPS 통증완화(교감피부반응으로 예측).</a:t>
-            </a:r>
-          </a:p>
-        </p:txBody>
-      </p:sp>
-      <p:sp>
-        <p:nvSpPr>
-          <p:cNvPr id="18" name="Rectangle 17"/>
-          <p:cNvSpPr/>
-          <p:nvPr/>
-        </p:nvSpPr>
-        <p:spPr>
-          <a:xfrm>
-            <a:off x="822960" y="5321807"/>
-            <a:ext cx="146304" cy="445385"/>
-          </a:xfrm>
-          <a:prstGeom prst="rect">
-            <a:avLst/>
-          </a:prstGeom>
-          <a:solidFill>
-            <a:srgbClr val="2C898A"/>
-          </a:solidFill>
-          <a:ln>
-            <a:noFill/>
-          </a:ln>
-          <a:effectLst/>
-        </p:spPr>
-        <p:style>
-          <a:lnRef idx="1">
-            <a:schemeClr val="accent1"/>
-          </a:lnRef>
-          <a:fillRef idx="3">
-            <a:schemeClr val="accent1"/>
-          </a:fillRef>
-          <a:effectRef idx="2">
-            <a:schemeClr val="accent1"/>
-          </a:effectRef>
-          <a:fontRef idx="minor">
-            <a:schemeClr val="lt1"/>
-          </a:fontRef>
-        </p:style>
-        <p:txBody>
-          <a:bodyPr rtlCol="0" anchor="ctr"/>
-          <a:lstStyle/>
-          <a:p>
-            <a:pPr algn="ctr"/>
-          </a:p>
-        </p:txBody>
-      </p:sp>
-      <p:sp>
-        <p:nvSpPr>
-          <p:cNvPr id="19" name="TextBox 18"/>
-          <p:cNvSpPr txBox="1"/>
-          <p:nvPr/>
-        </p:nvSpPr>
-        <p:spPr>
-          <a:xfrm>
-            <a:off x="1143000" y="5285231"/>
-            <a:ext cx="2926080" cy="674827"/>
-          </a:xfrm>
-          <a:prstGeom prst="rect">
-            <a:avLst/>
-          </a:prstGeom>
-          <a:noFill/>
-        </p:spPr>
-        <p:txBody>
-          <a:bodyPr wrap="square" anchor="ctr" lIns="0" rIns="0" tIns="0" bIns="0">
-            <a:spAutoFit/>
-          </a:bodyPr>
-          <a:lstStyle/>
-          <a:p>
-            <a:pPr algn="l">
-              <a:lnSpc>
-                <a:spcPct val="108000"/>
-              </a:lnSpc>
-              <a:spcAft>
-                <a:spcPts val="400"/>
-              </a:spcAft>
-            </a:pPr>
-            <a:r>
-              <a:rPr sz="1400" b="1" i="0">
-                <a:solidFill>
-                  <a:srgbClr val="9FE0D8"/>
-                </a:solidFill>
-                <a:latin typeface="NanumGothic"/>
-                <a:ea typeface="NanumGothic"/>
-              </a:rPr>
-              <a:t>근거</a:t>
-            </a:r>
-          </a:p>
-        </p:txBody>
-      </p:sp>
-      <p:sp>
-        <p:nvSpPr>
-          <p:cNvPr id="20" name="TextBox 19"/>
-          <p:cNvSpPr txBox="1"/>
-          <p:nvPr/>
-        </p:nvSpPr>
-        <p:spPr>
-          <a:xfrm>
-            <a:off x="4114800" y="5285231"/>
-            <a:ext cx="7406640" cy="674827"/>
-          </a:xfrm>
-          <a:prstGeom prst="rect">
-            <a:avLst/>
-          </a:prstGeom>
-          <a:noFill/>
-        </p:spPr>
-        <p:txBody>
-          <a:bodyPr wrap="square" anchor="ctr" lIns="0" rIns="0" tIns="0" bIns="0">
-            <a:spAutoFit/>
-          </a:bodyPr>
-          <a:lstStyle/>
-          <a:p>
-            <a:pPr algn="l">
-              <a:lnSpc>
-                <a:spcPct val="105000"/>
-              </a:lnSpc>
-              <a:spcAft>
-                <a:spcPts val="400"/>
-              </a:spcAft>
-            </a:pPr>
-            <a:r>
-              <a:rPr sz="1250" b="0" i="0">
-                <a:solidFill>
-                  <a:srgbClr val="FFFFFF"/>
-                </a:solidFill>
-                <a:latin typeface="NanumGothic"/>
-                <a:ea typeface="NanumGothic"/>
-              </a:rPr>
-              <a:t>대규모 RCT 부족(관찰·증례 중심). 조기 CRPS·비재건성 CLI에서 유용.</a:t>
+              <a:rPr sz="1000" b="1" i="0">
+                <a:solidFill>
+                  <a:srgbClr val="5A6B7B"/>
+                </a:solidFill>
+                <a:latin typeface="NanumGothic"/>
+                <a:ea typeface="NanumGothic"/>
+              </a:rPr>
+              <a:t>8</a:t>
             </a:r>
           </a:p>
         </p:txBody>
@@ -8181,7 +10209,7 @@
                 <a:latin typeface="NanumGothic"/>
                 <a:ea typeface="NanumGothic"/>
               </a:rPr>
-              <a:t>참고문헌 — LSB</a:t>
+              <a:t>효과 (2) CRPS · 기전</a:t>
             </a:r>
           </a:p>
         </p:txBody>
@@ -8224,7 +10252,7 @@
                 <a:latin typeface="NanumGothic"/>
                 <a:ea typeface="NanumGothic"/>
               </a:rPr>
-              <a:t>참고문헌</a:t>
+              <a:t>효과</a:t>
             </a:r>
           </a:p>
         </p:txBody>
@@ -8281,8 +10309,8 @@
         </p:nvSpPr>
         <p:spPr>
           <a:xfrm>
-            <a:off x="10317175" y="365760"/>
-            <a:ext cx="1371600" cy="347472"/>
+            <a:off x="11194999" y="365760"/>
+            <a:ext cx="493776" cy="347472"/>
           </a:xfrm>
           <a:prstGeom prst="roundRect">
             <a:avLst>
@@ -8327,8 +10355,8 @@
         </p:nvSpPr>
         <p:spPr>
           <a:xfrm>
-            <a:off x="10317175" y="365760"/>
-            <a:ext cx="1371600" cy="347472"/>
+            <a:off x="11194999" y="365760"/>
+            <a:ext cx="493776" cy="347472"/>
           </a:xfrm>
           <a:prstGeom prst="rect">
             <a:avLst/>
@@ -8357,7 +10385,7 @@
                 <a:latin typeface="NanumGothic"/>
                 <a:ea typeface="NanumGothic"/>
               </a:rPr>
-              <a:t>References</a:t>
+              <a:t>효과</a:t>
             </a:r>
           </a:p>
         </p:txBody>
@@ -8371,7 +10399,7 @@
         <p:spPr>
           <a:xfrm>
             <a:off x="731520" y="1371600"/>
-            <a:ext cx="5257800" cy="4846320"/>
+            <a:ext cx="10835640" cy="4754880"/>
           </a:xfrm>
           <a:prstGeom prst="rect">
             <a:avLst/>
@@ -8379,108 +10407,158 @@
           <a:noFill/>
         </p:spPr>
         <p:txBody>
-          <a:bodyPr wrap="square" anchor="t" lIns="0" rIns="0" tIns="0" bIns="0">
+          <a:bodyPr wrap="square" lIns="0" rIns="0" tIns="0" bIns="0">
             <a:spAutoFit/>
           </a:bodyPr>
           <a:lstStyle/>
           <a:p>
             <a:pPr algn="l">
               <a:lnSpc>
-                <a:spcPct val="105000"/>
-              </a:lnSpc>
-              <a:spcAft>
-                <a:spcPts val="700"/>
-              </a:spcAft>
-            </a:pPr>
-            <a:r>
-              <a:rPr sz="1000" b="0" i="0">
+                <a:spcPct val="108000"/>
+              </a:lnSpc>
+              <a:spcAft>
+                <a:spcPts val="900"/>
+              </a:spcAft>
+            </a:pPr>
+            <a:r>
+              <a:rPr sz="1050" b="1" i="0">
+                <a:solidFill>
+                  <a:srgbClr val="2C898A"/>
+                </a:solidFill>
+                <a:latin typeface="NanumGothic"/>
+                <a:ea typeface="NanumGothic"/>
+              </a:rPr>
+              <a:t>●  </a:t>
+            </a:r>
+            <a:r>
+              <a:rPr sz="1500" b="1" i="0">
                 <a:solidFill>
                   <a:srgbClr val="1A202C"/>
                 </a:solidFill>
                 <a:latin typeface="NanumGothic"/>
                 <a:ea typeface="NanumGothic"/>
               </a:rPr>
-              <a:t>Dua A, Varacallo MA. Lumbar sympathetic block. StatPearls. 2026. NBK431107.</a:t>
-            </a:r>
-          </a:p>
-          <a:p>
-            <a:pPr algn="l">
-              <a:lnSpc>
-                <a:spcPct val="105000"/>
-              </a:lnSpc>
-              <a:spcAft>
-                <a:spcPts val="700"/>
-              </a:spcAft>
-            </a:pPr>
-            <a:r>
-              <a:rPr sz="1000" b="0" i="0">
+              <a:t>CRPS는 교감신경 매개 통증의 전형 → LSB 후 유의한 통증완화가 축적된 근거. 최적 환자 선택·조기 시행이 성공률↑.</a:t>
+            </a:r>
+          </a:p>
+          <a:p>
+            <a:pPr algn="l">
+              <a:lnSpc>
+                <a:spcPct val="108000"/>
+              </a:lnSpc>
+              <a:spcAft>
+                <a:spcPts val="900"/>
+              </a:spcAft>
+            </a:pPr>
+            <a:r>
+              <a:rPr sz="1050" b="1" i="0">
+                <a:solidFill>
+                  <a:srgbClr val="2C898A"/>
+                </a:solidFill>
+                <a:latin typeface="NanumGothic"/>
+                <a:ea typeface="NanumGothic"/>
+              </a:rPr>
+              <a:t>●  </a:t>
+            </a:r>
+            <a:r>
+              <a:rPr sz="1500" b="0" i="0">
                 <a:solidFill>
                   <a:srgbClr val="1A202C"/>
                 </a:solidFill>
                 <a:latin typeface="NanumGothic"/>
                 <a:ea typeface="NanumGothic"/>
               </a:rPr>
-              <a:t>Lumbar sympatholysis. StatPearls. NBK560514.</a:t>
-            </a:r>
-          </a:p>
-          <a:p>
-            <a:pPr algn="l">
-              <a:lnSpc>
-                <a:spcPct val="105000"/>
-              </a:lnSpc>
-              <a:spcAft>
-                <a:spcPts val="700"/>
-              </a:spcAft>
-            </a:pPr>
-            <a:r>
-              <a:rPr sz="1000" b="0" i="0">
+              <a:t>Choi 2024(Sci Rep): 교감신경 신경파괴의 효과 지속기간을 전향 관찰로 제시.</a:t>
+            </a:r>
+          </a:p>
+          <a:p>
+            <a:pPr algn="l">
+              <a:lnSpc>
+                <a:spcPct val="108000"/>
+              </a:lnSpc>
+              <a:spcAft>
+                <a:spcPts val="900"/>
+              </a:spcAft>
+            </a:pPr>
+            <a:r>
+              <a:rPr sz="1050" b="1" i="0">
+                <a:solidFill>
+                  <a:srgbClr val="2C898A"/>
+                </a:solidFill>
+                <a:latin typeface="NanumGothic"/>
+                <a:ea typeface="NanumGothic"/>
+              </a:rPr>
+              <a:t>●  </a:t>
+            </a:r>
+            <a:r>
+              <a:rPr sz="1500" b="0" i="0">
                 <a:solidFill>
                   <a:srgbClr val="1A202C"/>
                 </a:solidFill>
                 <a:latin typeface="NanumGothic"/>
                 <a:ea typeface="NanumGothic"/>
               </a:rPr>
-              <a:t>Zhang JH, Deng YP, Geng MJ. Efficacy of the lumbar sympathetic ganglion block in lower limb pain. Ibrain. 2022;8(4):442-52. PMID 37786587.</a:t>
-            </a:r>
-          </a:p>
-          <a:p>
-            <a:pPr algn="l">
-              <a:lnSpc>
-                <a:spcPct val="105000"/>
-              </a:lnSpc>
-              <a:spcAft>
-                <a:spcPts val="700"/>
-              </a:spcAft>
-            </a:pPr>
-            <a:r>
-              <a:rPr sz="1000" b="0" i="0">
-                <a:solidFill>
-                  <a:srgbClr val="1A202C"/>
-                </a:solidFill>
-                <a:latin typeface="NanumGothic"/>
-                <a:ea typeface="NanumGothic"/>
-              </a:rPr>
-              <a:t>Dickey Z, Sharma N. Lumbar sympathetic block leading to increased arterial diameter and blood flow. Cureus. 2024;16(6):e61755. PMID 38975506.</a:t>
-            </a:r>
-          </a:p>
-          <a:p>
-            <a:pPr algn="l">
-              <a:lnSpc>
-                <a:spcPct val="105000"/>
-              </a:lnSpc>
-              <a:spcAft>
-                <a:spcPts val="700"/>
-              </a:spcAft>
-            </a:pPr>
-            <a:r>
-              <a:rPr sz="1000" b="0" i="0">
-                <a:solidFill>
-                  <a:srgbClr val="1A202C"/>
-                </a:solidFill>
-                <a:latin typeface="NanumGothic"/>
-                <a:ea typeface="NanumGothic"/>
-              </a:rPr>
-              <a:t>Barreto Junior EPS, et al. Neurolytic block of the lumbar sympathetic chain in critical lower limb ischemia. Braz J Anesthesiol. 2018;68(1):100-3. PMC9391669.</a:t>
+              <a:t>반응 예측: 교감신경 피부반응(sympathetic skin response)이 LSB 반응 예측에 유용(Pain Ther 2023).</a:t>
+            </a:r>
+          </a:p>
+          <a:p>
+            <a:pPr algn="l">
+              <a:lnSpc>
+                <a:spcPct val="108000"/>
+              </a:lnSpc>
+              <a:spcAft>
+                <a:spcPts val="900"/>
+              </a:spcAft>
+            </a:pPr>
+            <a:r>
+              <a:rPr sz="1050" b="1" i="0">
+                <a:solidFill>
+                  <a:srgbClr val="2C898A"/>
+                </a:solidFill>
+                <a:latin typeface="NanumGothic"/>
+                <a:ea typeface="NanumGothic"/>
+              </a:rPr>
+              <a:t>●  </a:t>
+            </a:r>
+            <a:r>
+              <a:rPr sz="1500" b="0" i="0">
+                <a:solidFill>
+                  <a:srgbClr val="5A6B7B"/>
+                </a:solidFill>
+                <a:latin typeface="NanumGothic"/>
+                <a:ea typeface="NanumGothic"/>
+              </a:rPr>
+              <a:t>한계: 중추 감작이 진행되면 시간이 지날수록 효과 감소 가능.</a:t>
+            </a:r>
+          </a:p>
+          <a:p>
+            <a:pPr algn="l">
+              <a:lnSpc>
+                <a:spcPct val="108000"/>
+              </a:lnSpc>
+              <a:spcAft>
+                <a:spcPts val="900"/>
+              </a:spcAft>
+            </a:pPr>
+            <a:r>
+              <a:rPr sz="1500" b="1" i="0">
+                <a:solidFill>
+                  <a:srgbClr val="5A6B7B"/>
+                </a:solidFill>
+                <a:latin typeface="NanumGothic"/>
+                <a:ea typeface="NanumGothic"/>
+              </a:rPr>
+              <a:t/>
+            </a:r>
+            <a:r>
+              <a:rPr sz="1500" b="1" i="0">
+                <a:solidFill>
+                  <a:srgbClr val="1F6E70"/>
+                </a:solidFill>
+                <a:latin typeface="NanumGothic"/>
+                <a:ea typeface="NanumGothic"/>
+              </a:rPr>
+              <a:t>기전 요약: 교감차단 → 측부순환 혈관확장 → 조직 산소화↑ → 통증↓ + 교감매개통 차단 + 신경파괴 직접효과.</a:t>
             </a:r>
           </a:p>
         </p:txBody>
@@ -8488,109 +10566,6 @@
       <p:sp>
         <p:nvSpPr>
           <p:cNvPr id="9" name="TextBox 8"/>
-          <p:cNvSpPr txBox="1"/>
-          <p:nvPr/>
-        </p:nvSpPr>
-        <p:spPr>
-          <a:xfrm>
-            <a:off x="6217920" y="1371600"/>
-            <a:ext cx="5257800" cy="4846320"/>
-          </a:xfrm>
-          <a:prstGeom prst="rect">
-            <a:avLst/>
-          </a:prstGeom>
-          <a:noFill/>
-        </p:spPr>
-        <p:txBody>
-          <a:bodyPr wrap="square" anchor="t" lIns="0" rIns="0" tIns="0" bIns="0">
-            <a:spAutoFit/>
-          </a:bodyPr>
-          <a:lstStyle/>
-          <a:p>
-            <a:pPr algn="l">
-              <a:lnSpc>
-                <a:spcPct val="105000"/>
-              </a:lnSpc>
-              <a:spcAft>
-                <a:spcPts val="700"/>
-              </a:spcAft>
-            </a:pPr>
-            <a:r>
-              <a:rPr sz="1000" b="0" i="0">
-                <a:solidFill>
-                  <a:srgbClr val="1A202C"/>
-                </a:solidFill>
-                <a:latin typeface="NanumGothic"/>
-                <a:ea typeface="NanumGothic"/>
-              </a:rPr>
-              <a:t>Choi EJ, et al. Effect duration of lumbar sympathetic ganglion neurolysis in CRPS. Sci Rep. 2024;14(1):12693. PMID 38830944.</a:t>
-            </a:r>
-          </a:p>
-          <a:p>
-            <a:pPr algn="l">
-              <a:lnSpc>
-                <a:spcPct val="105000"/>
-              </a:lnSpc>
-              <a:spcAft>
-                <a:spcPts val="700"/>
-              </a:spcAft>
-            </a:pPr>
-            <a:r>
-              <a:rPr sz="1000" b="0" i="0">
-                <a:solidFill>
-                  <a:srgbClr val="1A202C"/>
-                </a:solidFill>
-                <a:latin typeface="NanumGothic"/>
-                <a:ea typeface="NanumGothic"/>
-              </a:rPr>
-              <a:t>Gungor S, et al. Sympathetic blocks for CRPS: a case series. Medicine (Baltimore). 2018;97(19):e0705. PMID 29742728.</a:t>
-            </a:r>
-          </a:p>
-          <a:p>
-            <a:pPr algn="l">
-              <a:lnSpc>
-                <a:spcPct val="105000"/>
-              </a:lnSpc>
-              <a:spcAft>
-                <a:spcPts val="700"/>
-              </a:spcAft>
-            </a:pPr>
-            <a:r>
-              <a:rPr sz="1000" b="0" i="0">
-                <a:solidFill>
-                  <a:srgbClr val="1A202C"/>
-                </a:solidFill>
-                <a:latin typeface="NanumGothic"/>
-                <a:ea typeface="NanumGothic"/>
-              </a:rPr>
-              <a:t>Effect of lumbar sympathetic blockade on pain, Fontaine classification, collateral perfusion in PAD. Medicina (Kaunas). 2024;60(5):682.</a:t>
-            </a:r>
-          </a:p>
-          <a:p>
-            <a:pPr algn="l">
-              <a:lnSpc>
-                <a:spcPct val="105000"/>
-              </a:lnSpc>
-              <a:spcAft>
-                <a:spcPts val="700"/>
-              </a:spcAft>
-            </a:pPr>
-            <a:r>
-              <a:rPr sz="1000" b="0" i="0">
-                <a:solidFill>
-                  <a:srgbClr val="1A202C"/>
-                </a:solidFill>
-                <a:latin typeface="NanumGothic"/>
-                <a:ea typeface="NanumGothic"/>
-              </a:rPr>
-              <a:t>Prediction of LSB efficacy in CRPS type 1 by sympathetic skin response. Pain Ther. 2023;12(3):809-22. PMC10199976.</a:t>
-            </a:r>
-          </a:p>
-        </p:txBody>
-      </p:sp>
-      <p:sp>
-        <p:nvSpPr>
-          <p:cNvPr id="10" name="TextBox 9"/>
           <p:cNvSpPr txBox="1"/>
           <p:nvPr/>
         </p:nvSpPr>
@@ -8626,14 +10601,14 @@
                 <a:latin typeface="NanumGothic"/>
                 <a:ea typeface="NanumGothic"/>
               </a:rPr>
-              <a:t>근거: PubMed/저널 목록 대조 — 조작 인용 없음</a:t>
-            </a:r>
-          </a:p>
-        </p:txBody>
-      </p:sp>
-      <p:sp>
-        <p:nvSpPr>
-          <p:cNvPr id="11" name="TextBox 10"/>
+              <a:t>근거: Choi 2024(Sci Rep); Pain Ther 2023</a:t>
+            </a:r>
+          </a:p>
+        </p:txBody>
+      </p:sp>
+      <p:sp>
+        <p:nvSpPr>
+          <p:cNvPr id="10" name="TextBox 9"/>
           <p:cNvSpPr txBox="1"/>
           <p:nvPr/>
         </p:nvSpPr>

--- a/문헌고찰_NLC_RLS_LSB/03_LSB/LSB_발표.pptx
+++ b/문헌고찰_NLC_RLS_LSB/03_LSB/LSB_발표.pptx
@@ -17,6 +17,8 @@
     <p:sldId id="265" r:id="rId16"/>
     <p:sldId id="266" r:id="rId17"/>
     <p:sldId id="267" r:id="rId18"/>
+    <p:sldId id="268" r:id="rId19"/>
+    <p:sldId id="269" r:id="rId20"/>
   </p:sldIdLst>
   <p:sldSz cx="12191695" cy="6858000" type="screen4x3"/>
   <p:notesSz cx="6858000" cy="9144000"/>
@@ -3610,7 +3612,7 @@
                 <a:latin typeface="NanumGothic"/>
                 <a:ea typeface="NanumGothic"/>
               </a:rPr>
-              <a:t>합병증 · 안전성 · 근거수준</a:t>
+              <a:t>효과 (2) CRPS · 기전</a:t>
             </a:r>
           </a:p>
         </p:txBody>
@@ -3653,7 +3655,7 @@
                 <a:latin typeface="NanumGothic"/>
                 <a:ea typeface="NanumGothic"/>
               </a:rPr>
-              <a:t>안전성 · 결론</a:t>
+              <a:t>효과</a:t>
             </a:r>
           </a:p>
         </p:txBody>
@@ -3710,8 +3712,8 @@
         </p:nvSpPr>
         <p:spPr>
           <a:xfrm>
-            <a:off x="11085272" y="365760"/>
-            <a:ext cx="603503" cy="347472"/>
+            <a:off x="10426903" y="365760"/>
+            <a:ext cx="1261872" cy="347472"/>
           </a:xfrm>
           <a:prstGeom prst="roundRect">
             <a:avLst>
@@ -3719,7 +3721,7 @@
             </a:avLst>
           </a:prstGeom>
           <a:solidFill>
-            <a:srgbClr val="B03A2E"/>
+            <a:srgbClr val="B97A0C"/>
           </a:solidFill>
           <a:ln>
             <a:noFill/>
@@ -3756,8 +3758,8 @@
         </p:nvSpPr>
         <p:spPr>
           <a:xfrm>
-            <a:off x="11085272" y="365760"/>
-            <a:ext cx="603503" cy="347472"/>
+            <a:off x="10426903" y="365760"/>
+            <a:ext cx="1261872" cy="347472"/>
           </a:xfrm>
           <a:prstGeom prst="rect">
             <a:avLst/>
@@ -3786,7 +3788,7 @@
                 <a:latin typeface="NanumGothic"/>
                 <a:ea typeface="NanumGothic"/>
               </a:rPr>
-              <a:t>안전성</a:t>
+              <a:t>Lv III–IV</a:t>
             </a:r>
           </a:p>
         </p:txBody>
@@ -3834,12 +3836,12 @@
             <a:r>
               <a:rPr sz="1500" b="1" i="0">
                 <a:solidFill>
-                  <a:srgbClr val="B03A2E"/>
-                </a:solidFill>
-                <a:latin typeface="NanumGothic"/>
-                <a:ea typeface="NanumGothic"/>
-              </a:rPr>
-              <a:t>합병증: 생식대퇴신경통(신경파괴 시 5–10%), 외측대퇴피신경 손상, 기립성 저혈압.</a:t>
+                  <a:srgbClr val="1A202C"/>
+                </a:solidFill>
+                <a:latin typeface="NanumGothic"/>
+                <a:ea typeface="NanumGothic"/>
+              </a:rPr>
+              <a:t>CRPS는 교감신경 매개 통증의 전형 → LSB 후 유의한 통증완화가 축적된 근거. 최적 환자 선택·조기 시행이 성공률↑.</a:t>
             </a:r>
           </a:p>
           <a:p>
@@ -3869,7 +3871,7 @@
                 <a:latin typeface="NanumGothic"/>
                 <a:ea typeface="NanumGothic"/>
               </a:rPr>
-              <a:t>혈관·요관·신장 등 내장 구조 천공, 출혈, 신경축(neuraxial) 확산, 신경파괴 후 통증성 신경염(dysesthesia).</a:t>
+              <a:t>Choi 2024(Sci Rep): 교감신경 신경파괴의 효과 지속기간을 전향 관찰로 제시.</a:t>
             </a:r>
           </a:p>
           <a:p>
@@ -3899,7 +3901,7 @@
                 <a:latin typeface="NanumGothic"/>
                 <a:ea typeface="NanumGothic"/>
               </a:rPr>
-              <a:t>근거수준: 대부분 관찰·증례군·소규모 전향연구, 대규모 RCT는 부족(허혈질환·CRPS Level III~IV).</a:t>
+              <a:t>반응 예측: 교감신경 피부반응(sympathetic skin response)이 LSB 반응 예측에 유용(Pain Ther 2023).</a:t>
             </a:r>
           </a:p>
           <a:p>
@@ -3912,6 +3914,36 @@
               </a:spcAft>
             </a:pPr>
             <a:r>
+              <a:rPr sz="1050" b="1" i="0">
+                <a:solidFill>
+                  <a:srgbClr val="2C898A"/>
+                </a:solidFill>
+                <a:latin typeface="NanumGothic"/>
+                <a:ea typeface="NanumGothic"/>
+              </a:rPr>
+              <a:t>●  </a:t>
+            </a:r>
+            <a:r>
+              <a:rPr sz="1500" b="0" i="0">
+                <a:solidFill>
+                  <a:srgbClr val="5A6B7B"/>
+                </a:solidFill>
+                <a:latin typeface="NanumGothic"/>
+                <a:ea typeface="NanumGothic"/>
+              </a:rPr>
+              <a:t>한계: 중추 감작이 진행되면 시간이 지날수록 효과 감소 가능.</a:t>
+            </a:r>
+          </a:p>
+          <a:p>
+            <a:pPr algn="l">
+              <a:lnSpc>
+                <a:spcPct val="108000"/>
+              </a:lnSpc>
+              <a:spcAft>
+                <a:spcPts val="900"/>
+              </a:spcAft>
+            </a:pPr>
+            <a:r>
               <a:rPr sz="1500" b="1" i="0">
                 <a:solidFill>
                   <a:srgbClr val="5A6B7B"/>
@@ -3929,7 +3961,7 @@
                 <a:latin typeface="NanumGothic"/>
                 <a:ea typeface="NanumGothic"/>
               </a:rPr>
-              <a:t>그럼에도 조기 CRPS·재건 불가능한 중증 하지허혈(안정통)에서 임상적으로 유용.</a:t>
+              <a:t>기전 요약: 교감차단 → 측부순환 혈관확장 → 조직 산소화↑ → 통증↓ + 교감매개통 차단 + 신경파괴 직접효과.</a:t>
             </a:r>
           </a:p>
         </p:txBody>
@@ -3972,7 +4004,7 @@
                 <a:latin typeface="NanumGothic"/>
                 <a:ea typeface="NanumGothic"/>
               </a:rPr>
-              <a:t>근거: StatPearls; 문헌고찰 종합</a:t>
+              <a:t>근거: Choi 2024(Sci Rep); Pain Ther 2023</a:t>
             </a:r>
           </a:p>
         </p:txBody>
@@ -4046,52 +4078,8 @@
         </p:nvSpPr>
         <p:spPr>
           <a:xfrm>
-            <a:off x="0" y="0"/>
-            <a:ext cx="12191695" cy="6858000"/>
-          </a:xfrm>
-          <a:prstGeom prst="rect">
-            <a:avLst/>
-          </a:prstGeom>
-          <a:solidFill>
-            <a:srgbClr val="1B355E"/>
-          </a:solidFill>
-          <a:ln>
-            <a:noFill/>
-          </a:ln>
-          <a:effectLst/>
-        </p:spPr>
-        <p:style>
-          <a:lnRef idx="1">
-            <a:schemeClr val="accent1"/>
-          </a:lnRef>
-          <a:fillRef idx="3">
-            <a:schemeClr val="accent1"/>
-          </a:fillRef>
-          <a:effectRef idx="2">
-            <a:schemeClr val="accent1"/>
-          </a:effectRef>
-          <a:fontRef idx="minor">
-            <a:schemeClr val="lt1"/>
-          </a:fontRef>
-        </p:style>
-        <p:txBody>
-          <a:bodyPr rtlCol="0" anchor="ctr"/>
-          <a:lstStyle/>
-          <a:p>
-            <a:pPr algn="ctr"/>
-          </a:p>
-        </p:txBody>
-      </p:sp>
-      <p:sp>
-        <p:nvSpPr>
-          <p:cNvPr id="3" name="Rectangle 2"/>
-          <p:cNvSpPr/>
-          <p:nvPr/>
-        </p:nvSpPr>
-        <p:spPr>
-          <a:xfrm>
-            <a:off x="0" y="0"/>
-            <a:ext cx="201168" cy="6858000"/>
+            <a:off x="502920" y="310896"/>
+            <a:ext cx="109728" cy="457200"/>
           </a:xfrm>
           <a:prstGeom prst="rect">
             <a:avLst/>
@@ -4128,14 +4116,57 @@
       </p:sp>
       <p:sp>
         <p:nvSpPr>
+          <p:cNvPr id="3" name="TextBox 2"/>
+          <p:cNvSpPr txBox="1"/>
+          <p:nvPr/>
+        </p:nvSpPr>
+        <p:spPr>
+          <a:xfrm>
+            <a:off x="731520" y="237744"/>
+            <a:ext cx="9509760" cy="685800"/>
+          </a:xfrm>
+          <a:prstGeom prst="rect">
+            <a:avLst/>
+          </a:prstGeom>
+          <a:noFill/>
+        </p:spPr>
+        <p:txBody>
+          <a:bodyPr wrap="square" anchor="ctr" lIns="0" rIns="0" tIns="0" bIns="0">
+            <a:spAutoFit/>
+          </a:bodyPr>
+          <a:lstStyle/>
+          <a:p>
+            <a:pPr algn="l">
+              <a:lnSpc>
+                <a:spcPct val="108000"/>
+              </a:lnSpc>
+              <a:spcAft>
+                <a:spcPts val="400"/>
+              </a:spcAft>
+            </a:pPr>
+            <a:r>
+              <a:rPr sz="2400" b="1" i="0">
+                <a:solidFill>
+                  <a:srgbClr val="1B355E"/>
+                </a:solidFill>
+                <a:latin typeface="NanumGothic"/>
+                <a:ea typeface="NanumGothic"/>
+              </a:rPr>
+              <a:t>합병증 · 안전성 · 근거수준</a:t>
+            </a:r>
+          </a:p>
+        </p:txBody>
+      </p:sp>
+      <p:sp>
+        <p:nvSpPr>
           <p:cNvPr id="4" name="TextBox 3"/>
           <p:cNvSpPr txBox="1"/>
           <p:nvPr/>
         </p:nvSpPr>
         <p:spPr>
           <a:xfrm>
-            <a:off x="822960" y="640080"/>
-            <a:ext cx="10515600" cy="457200"/>
+            <a:off x="749808" y="109728"/>
+            <a:ext cx="7315200" cy="219456"/>
           </a:xfrm>
           <a:prstGeom prst="rect">
             <a:avLst/>
@@ -4157,77 +4188,34 @@
               </a:spcAft>
             </a:pPr>
             <a:r>
-              <a:rPr sz="1300" b="1" i="0">
-                <a:solidFill>
-                  <a:srgbClr val="9FE0D8"/>
-                </a:solidFill>
-                <a:latin typeface="NanumGothic"/>
-                <a:ea typeface="NanumGothic"/>
-              </a:rPr>
-              <a:t>핵심 메시지 — LSB</a:t>
-            </a:r>
-          </a:p>
-        </p:txBody>
-      </p:sp>
-      <p:sp>
-        <p:nvSpPr>
-          <p:cNvPr id="5" name="TextBox 4"/>
-          <p:cNvSpPr txBox="1"/>
-          <p:nvPr/>
-        </p:nvSpPr>
-        <p:spPr>
-          <a:xfrm>
-            <a:off x="822960" y="1097280"/>
-            <a:ext cx="10515600" cy="914400"/>
-          </a:xfrm>
-          <a:prstGeom prst="rect">
-            <a:avLst/>
-          </a:prstGeom>
-          <a:noFill/>
-        </p:spPr>
-        <p:txBody>
-          <a:bodyPr wrap="square" anchor="t" lIns="0" rIns="0" tIns="0" bIns="0">
-            <a:spAutoFit/>
-          </a:bodyPr>
-          <a:lstStyle/>
-          <a:p>
-            <a:pPr algn="l">
-              <a:lnSpc>
-                <a:spcPct val="110000"/>
-              </a:lnSpc>
-              <a:spcAft>
-                <a:spcPts val="400"/>
-              </a:spcAft>
-            </a:pPr>
-            <a:r>
-              <a:rPr sz="2200" b="1" i="0">
-                <a:solidFill>
-                  <a:srgbClr val="FFFFFF"/>
-                </a:solidFill>
-                <a:latin typeface="NanumGothic"/>
-                <a:ea typeface="NanumGothic"/>
-              </a:rPr>
-              <a:t>표준은 투시 유도 방척추 접근, 성공은 온도 ≥2°C</a:t>
-            </a:r>
-          </a:p>
-        </p:txBody>
-      </p:sp>
-      <p:sp>
-        <p:nvSpPr>
-          <p:cNvPr id="6" name="Rectangle 5"/>
+              <a:rPr sz="1100" b="1" i="0">
+                <a:solidFill>
+                  <a:srgbClr val="1F6E70"/>
+                </a:solidFill>
+                <a:latin typeface="NanumGothic"/>
+                <a:ea typeface="NanumGothic"/>
+              </a:rPr>
+              <a:t>안전성 · 결론</a:t>
+            </a:r>
+          </a:p>
+        </p:txBody>
+      </p:sp>
+      <p:sp>
+        <p:nvSpPr>
+          <p:cNvPr id="5" name="Rectangle 4"/>
           <p:cNvSpPr/>
           <p:nvPr/>
         </p:nvSpPr>
         <p:spPr>
           <a:xfrm>
-            <a:off x="822960" y="2322576"/>
-            <a:ext cx="146304" cy="445385"/>
+            <a:off x="731520" y="969264"/>
+            <a:ext cx="10881360" cy="17780"/>
           </a:xfrm>
           <a:prstGeom prst="rect">
             <a:avLst/>
           </a:prstGeom>
           <a:solidFill>
-            <a:srgbClr val="2C898A"/>
+            <a:srgbClr val="D5DEE7"/>
           </a:solidFill>
           <a:ln>
             <a:noFill/>
@@ -4258,106 +4246,22 @@
       </p:sp>
       <p:sp>
         <p:nvSpPr>
-          <p:cNvPr id="7" name="TextBox 6"/>
-          <p:cNvSpPr txBox="1"/>
-          <p:nvPr/>
-        </p:nvSpPr>
-        <p:spPr>
-          <a:xfrm>
-            <a:off x="1143000" y="2286000"/>
-            <a:ext cx="2926080" cy="674827"/>
-          </a:xfrm>
-          <a:prstGeom prst="rect">
-            <a:avLst/>
-          </a:prstGeom>
-          <a:noFill/>
-        </p:spPr>
-        <p:txBody>
-          <a:bodyPr wrap="square" anchor="ctr" lIns="0" rIns="0" tIns="0" bIns="0">
-            <a:spAutoFit/>
-          </a:bodyPr>
-          <a:lstStyle/>
-          <a:p>
-            <a:pPr algn="l">
-              <a:lnSpc>
-                <a:spcPct val="108000"/>
-              </a:lnSpc>
-              <a:spcAft>
-                <a:spcPts val="400"/>
-              </a:spcAft>
-            </a:pPr>
-            <a:r>
-              <a:rPr sz="1400" b="1" i="0">
-                <a:solidFill>
-                  <a:srgbClr val="9FE0D8"/>
-                </a:solidFill>
-                <a:latin typeface="NanumGothic"/>
-                <a:ea typeface="NanumGothic"/>
-              </a:rPr>
-              <a:t>방법</a:t>
-            </a:r>
-          </a:p>
-        </p:txBody>
-      </p:sp>
-      <p:sp>
-        <p:nvSpPr>
-          <p:cNvPr id="8" name="TextBox 7"/>
-          <p:cNvSpPr txBox="1"/>
-          <p:nvPr/>
-        </p:nvSpPr>
-        <p:spPr>
-          <a:xfrm>
-            <a:off x="4114800" y="2286000"/>
-            <a:ext cx="7406640" cy="674827"/>
-          </a:xfrm>
-          <a:prstGeom prst="rect">
-            <a:avLst/>
-          </a:prstGeom>
-          <a:noFill/>
-        </p:spPr>
-        <p:txBody>
-          <a:bodyPr wrap="square" anchor="ctr" lIns="0" rIns="0" tIns="0" bIns="0">
-            <a:spAutoFit/>
-          </a:bodyPr>
-          <a:lstStyle/>
-          <a:p>
-            <a:pPr algn="l">
-              <a:lnSpc>
-                <a:spcPct val="105000"/>
-              </a:lnSpc>
-              <a:spcAft>
-                <a:spcPts val="400"/>
-              </a:spcAft>
-            </a:pPr>
-            <a:r>
-              <a:rPr sz="1250" b="0" i="0">
-                <a:solidFill>
-                  <a:srgbClr val="FFFFFF"/>
-                </a:solidFill>
-                <a:latin typeface="NanumGothic"/>
-                <a:ea typeface="NanumGothic"/>
-              </a:rPr>
-              <a:t>L2–L3 방척추 접근·투시, 정중선 7 cm 외측, 조영제 두미측 확산, 성공지표 온도 ≥2°C.</a:t>
-            </a:r>
-          </a:p>
-        </p:txBody>
-      </p:sp>
-      <p:sp>
-        <p:nvSpPr>
-          <p:cNvPr id="9" name="Rectangle 8"/>
+          <p:cNvPr id="6" name="Rounded Rectangle 5"/>
           <p:cNvSpPr/>
           <p:nvPr/>
         </p:nvSpPr>
         <p:spPr>
           <a:xfrm>
-            <a:off x="822960" y="3072384"/>
-            <a:ext cx="146304" cy="445385"/>
-          </a:xfrm>
-          <a:prstGeom prst="rect">
-            <a:avLst/>
+            <a:off x="11085272" y="365760"/>
+            <a:ext cx="603503" cy="347472"/>
+          </a:xfrm>
+          <a:prstGeom prst="roundRect">
+            <a:avLst>
+              <a:gd name="adj" fmla="val 8000"/>
+            </a:avLst>
           </a:prstGeom>
           <a:solidFill>
-            <a:srgbClr val="2C898A"/>
+            <a:srgbClr val="B03A2E"/>
           </a:solidFill>
           <a:ln>
             <a:noFill/>
@@ -4388,14 +4292,14 @@
       </p:sp>
       <p:sp>
         <p:nvSpPr>
-          <p:cNvPr id="10" name="TextBox 9"/>
+          <p:cNvPr id="7" name="TextBox 6"/>
           <p:cNvSpPr txBox="1"/>
           <p:nvPr/>
         </p:nvSpPr>
         <p:spPr>
           <a:xfrm>
-            <a:off x="1143000" y="3035808"/>
-            <a:ext cx="2926080" cy="674827"/>
+            <a:off x="11085272" y="365760"/>
+            <a:ext cx="603503" cy="347472"/>
           </a:xfrm>
           <a:prstGeom prst="rect">
             <a:avLst/>
@@ -4408,7 +4312,7 @@
           </a:bodyPr>
           <a:lstStyle/>
           <a:p>
-            <a:pPr algn="l">
+            <a:pPr algn="ctr">
               <a:lnSpc>
                 <a:spcPct val="108000"/>
               </a:lnSpc>
@@ -4417,28 +4321,171 @@
               </a:spcAft>
             </a:pPr>
             <a:r>
-              <a:rPr sz="1400" b="1" i="0">
-                <a:solidFill>
-                  <a:srgbClr val="9FE0D8"/>
-                </a:solidFill>
-                <a:latin typeface="NanumGothic"/>
-                <a:ea typeface="NanumGothic"/>
-              </a:rPr>
-              <a:t>약제</a:t>
-            </a:r>
-          </a:p>
-        </p:txBody>
-      </p:sp>
-      <p:sp>
-        <p:nvSpPr>
-          <p:cNvPr id="11" name="TextBox 10"/>
+              <a:rPr sz="1150" b="1" i="0">
+                <a:solidFill>
+                  <a:srgbClr val="FFFFFF"/>
+                </a:solidFill>
+                <a:latin typeface="NanumGothic"/>
+                <a:ea typeface="NanumGothic"/>
+              </a:rPr>
+              <a:t>안전성</a:t>
+            </a:r>
+          </a:p>
+        </p:txBody>
+      </p:sp>
+      <p:sp>
+        <p:nvSpPr>
+          <p:cNvPr id="8" name="TextBox 7"/>
           <p:cNvSpPr txBox="1"/>
           <p:nvPr/>
         </p:nvSpPr>
         <p:spPr>
           <a:xfrm>
-            <a:off x="4114800" y="3035808"/>
-            <a:ext cx="7406640" cy="674827"/>
+            <a:off x="731520" y="1371600"/>
+            <a:ext cx="10835640" cy="4754880"/>
+          </a:xfrm>
+          <a:prstGeom prst="rect">
+            <a:avLst/>
+          </a:prstGeom>
+          <a:noFill/>
+        </p:spPr>
+        <p:txBody>
+          <a:bodyPr wrap="square" lIns="0" rIns="0" tIns="0" bIns="0">
+            <a:spAutoFit/>
+          </a:bodyPr>
+          <a:lstStyle/>
+          <a:p>
+            <a:pPr algn="l">
+              <a:lnSpc>
+                <a:spcPct val="108000"/>
+              </a:lnSpc>
+              <a:spcAft>
+                <a:spcPts val="900"/>
+              </a:spcAft>
+            </a:pPr>
+            <a:r>
+              <a:rPr sz="1050" b="1" i="0">
+                <a:solidFill>
+                  <a:srgbClr val="2C898A"/>
+                </a:solidFill>
+                <a:latin typeface="NanumGothic"/>
+                <a:ea typeface="NanumGothic"/>
+              </a:rPr>
+              <a:t>●  </a:t>
+            </a:r>
+            <a:r>
+              <a:rPr sz="1500" b="1" i="0">
+                <a:solidFill>
+                  <a:srgbClr val="B03A2E"/>
+                </a:solidFill>
+                <a:latin typeface="NanumGothic"/>
+                <a:ea typeface="NanumGothic"/>
+              </a:rPr>
+              <a:t>합병증: 생식대퇴신경통(신경파괴 시 5–10%), 외측대퇴피신경 손상, 기립성 저혈압.</a:t>
+            </a:r>
+          </a:p>
+          <a:p>
+            <a:pPr algn="l">
+              <a:lnSpc>
+                <a:spcPct val="108000"/>
+              </a:lnSpc>
+              <a:spcAft>
+                <a:spcPts val="900"/>
+              </a:spcAft>
+            </a:pPr>
+            <a:r>
+              <a:rPr sz="1050" b="1" i="0">
+                <a:solidFill>
+                  <a:srgbClr val="2C898A"/>
+                </a:solidFill>
+                <a:latin typeface="NanumGothic"/>
+                <a:ea typeface="NanumGothic"/>
+              </a:rPr>
+              <a:t>●  </a:t>
+            </a:r>
+            <a:r>
+              <a:rPr sz="1500" b="0" i="0">
+                <a:solidFill>
+                  <a:srgbClr val="1A202C"/>
+                </a:solidFill>
+                <a:latin typeface="NanumGothic"/>
+                <a:ea typeface="NanumGothic"/>
+              </a:rPr>
+              <a:t>혈관·요관·신장 등 내장 구조 천공, 출혈, 신경축(neuraxial) 확산, 신경파괴 후 통증성 신경염(dysesthesia).</a:t>
+            </a:r>
+          </a:p>
+          <a:p>
+            <a:pPr algn="l">
+              <a:lnSpc>
+                <a:spcPct val="108000"/>
+              </a:lnSpc>
+              <a:spcAft>
+                <a:spcPts val="900"/>
+              </a:spcAft>
+            </a:pPr>
+            <a:r>
+              <a:rPr sz="1050" b="1" i="0">
+                <a:solidFill>
+                  <a:srgbClr val="2C898A"/>
+                </a:solidFill>
+                <a:latin typeface="NanumGothic"/>
+                <a:ea typeface="NanumGothic"/>
+              </a:rPr>
+              <a:t>●  </a:t>
+            </a:r>
+            <a:r>
+              <a:rPr sz="1500" b="0" i="0">
+                <a:solidFill>
+                  <a:srgbClr val="1A202C"/>
+                </a:solidFill>
+                <a:latin typeface="NanumGothic"/>
+                <a:ea typeface="NanumGothic"/>
+              </a:rPr>
+              <a:t>근거수준: 대부분 관찰·증례군·소규모 전향연구, 대규모 RCT는 부족(허혈질환·CRPS Level III~IV).</a:t>
+            </a:r>
+          </a:p>
+          <a:p>
+            <a:pPr algn="l">
+              <a:lnSpc>
+                <a:spcPct val="108000"/>
+              </a:lnSpc>
+              <a:spcAft>
+                <a:spcPts val="900"/>
+              </a:spcAft>
+            </a:pPr>
+            <a:r>
+              <a:rPr sz="1500" b="1" i="0">
+                <a:solidFill>
+                  <a:srgbClr val="5A6B7B"/>
+                </a:solidFill>
+                <a:latin typeface="NanumGothic"/>
+                <a:ea typeface="NanumGothic"/>
+              </a:rPr>
+              <a:t/>
+            </a:r>
+            <a:r>
+              <a:rPr sz="1500" b="1" i="0">
+                <a:solidFill>
+                  <a:srgbClr val="1F6E70"/>
+                </a:solidFill>
+                <a:latin typeface="NanumGothic"/>
+                <a:ea typeface="NanumGothic"/>
+              </a:rPr>
+              <a:t>그럼에도 조기 CRPS·재건 불가능한 중증 하지허혈(안정통)에서 임상적으로 유용.</a:t>
+            </a:r>
+          </a:p>
+        </p:txBody>
+      </p:sp>
+      <p:sp>
+        <p:nvSpPr>
+          <p:cNvPr id="9" name="TextBox 8"/>
+          <p:cNvSpPr txBox="1"/>
+          <p:nvPr/>
+        </p:nvSpPr>
+        <p:spPr>
+          <a:xfrm>
+            <a:off x="731520" y="6455664"/>
+            <a:ext cx="9875520" cy="292608"/>
           </a:xfrm>
           <a:prstGeom prst="rect">
             <a:avLst/>
@@ -4453,79 +4500,35 @@
           <a:p>
             <a:pPr algn="l">
               <a:lnSpc>
-                <a:spcPct val="105000"/>
+                <a:spcPct val="108000"/>
               </a:lnSpc>
               <a:spcAft>
                 <a:spcPts val="400"/>
               </a:spcAft>
             </a:pPr>
             <a:r>
-              <a:rPr sz="1250" b="0" i="0">
-                <a:solidFill>
-                  <a:srgbClr val="FFFFFF"/>
-                </a:solidFill>
-                <a:latin typeface="NanumGothic"/>
-                <a:ea typeface="NanumGothic"/>
-              </a:rPr>
-              <a:t>진단/치료는 국소마취제, 신경파괴는 무수알코올/phenol·RFA — 진단차단 양성 시에만.</a:t>
-            </a:r>
-          </a:p>
-        </p:txBody>
-      </p:sp>
-      <p:sp>
-        <p:nvSpPr>
-          <p:cNvPr id="12" name="Rectangle 11"/>
-          <p:cNvSpPr/>
-          <p:nvPr/>
-        </p:nvSpPr>
-        <p:spPr>
-          <a:xfrm>
-            <a:off x="822960" y="3822191"/>
-            <a:ext cx="146304" cy="445385"/>
-          </a:xfrm>
-          <a:prstGeom prst="rect">
-            <a:avLst/>
-          </a:prstGeom>
-          <a:solidFill>
-            <a:srgbClr val="2C898A"/>
-          </a:solidFill>
-          <a:ln>
-            <a:noFill/>
-          </a:ln>
-          <a:effectLst/>
-        </p:spPr>
-        <p:style>
-          <a:lnRef idx="1">
-            <a:schemeClr val="accent1"/>
-          </a:lnRef>
-          <a:fillRef idx="3">
-            <a:schemeClr val="accent1"/>
-          </a:fillRef>
-          <a:effectRef idx="2">
-            <a:schemeClr val="accent1"/>
-          </a:effectRef>
-          <a:fontRef idx="minor">
-            <a:schemeClr val="lt1"/>
-          </a:fontRef>
-        </p:style>
-        <p:txBody>
-          <a:bodyPr rtlCol="0" anchor="ctr"/>
-          <a:lstStyle/>
-          <a:p>
-            <a:pPr algn="ctr"/>
-          </a:p>
-        </p:txBody>
-      </p:sp>
-      <p:sp>
-        <p:nvSpPr>
-          <p:cNvPr id="13" name="TextBox 12"/>
+              <a:rPr sz="900" b="0" i="0">
+                <a:solidFill>
+                  <a:srgbClr val="5A6B7B"/>
+                </a:solidFill>
+                <a:latin typeface="NanumGothic"/>
+                <a:ea typeface="NanumGothic"/>
+              </a:rPr>
+              <a:t>근거: StatPearls; 문헌고찰 종합</a:t>
+            </a:r>
+          </a:p>
+        </p:txBody>
+      </p:sp>
+      <p:sp>
+        <p:nvSpPr>
+          <p:cNvPr id="10" name="TextBox 9"/>
           <p:cNvSpPr txBox="1"/>
           <p:nvPr/>
         </p:nvSpPr>
         <p:spPr>
           <a:xfrm>
-            <a:off x="1143000" y="3785615"/>
-            <a:ext cx="2926080" cy="674827"/>
+            <a:off x="11064240" y="6455664"/>
+            <a:ext cx="822960" cy="292608"/>
           </a:xfrm>
           <a:prstGeom prst="rect">
             <a:avLst/>
@@ -4538,7 +4541,7 @@
           </a:bodyPr>
           <a:lstStyle/>
           <a:p>
-            <a:pPr algn="l">
+            <a:pPr algn="r">
               <a:lnSpc>
                 <a:spcPct val="108000"/>
               </a:lnSpc>
@@ -4547,317 +4550,14 @@
               </a:spcAft>
             </a:pPr>
             <a:r>
-              <a:rPr sz="1400" b="1" i="0">
-                <a:solidFill>
-                  <a:srgbClr val="9FE0D8"/>
-                </a:solidFill>
-                <a:latin typeface="NanumGothic"/>
-                <a:ea typeface="NanumGothic"/>
-              </a:rPr>
-              <a:t>적응증</a:t>
-            </a:r>
-          </a:p>
-        </p:txBody>
-      </p:sp>
-      <p:sp>
-        <p:nvSpPr>
-          <p:cNvPr id="14" name="TextBox 13"/>
-          <p:cNvSpPr txBox="1"/>
-          <p:nvPr/>
-        </p:nvSpPr>
-        <p:spPr>
-          <a:xfrm>
-            <a:off x="4114800" y="3785615"/>
-            <a:ext cx="7406640" cy="674827"/>
-          </a:xfrm>
-          <a:prstGeom prst="rect">
-            <a:avLst/>
-          </a:prstGeom>
-          <a:noFill/>
-        </p:spPr>
-        <p:txBody>
-          <a:bodyPr wrap="square" anchor="ctr" lIns="0" rIns="0" tIns="0" bIns="0">
-            <a:spAutoFit/>
-          </a:bodyPr>
-          <a:lstStyle/>
-          <a:p>
-            <a:pPr algn="l">
-              <a:lnSpc>
-                <a:spcPct val="105000"/>
-              </a:lnSpc>
-              <a:spcAft>
-                <a:spcPts val="400"/>
-              </a:spcAft>
-            </a:pPr>
-            <a:r>
-              <a:rPr sz="1250" b="0" i="0">
-                <a:solidFill>
-                  <a:srgbClr val="FFFFFF"/>
-                </a:solidFill>
-                <a:latin typeface="NanumGothic"/>
-                <a:ea typeface="NanumGothic"/>
-              </a:rPr>
-              <a:t>조기 CRPS·PAD/CLI 안정통·신경병증·다한증 등. 특발성 NLC·정맥질환(정맥류)은 적응 아님.</a:t>
-            </a:r>
-          </a:p>
-        </p:txBody>
-      </p:sp>
-      <p:sp>
-        <p:nvSpPr>
-          <p:cNvPr id="15" name="Rectangle 14"/>
-          <p:cNvSpPr/>
-          <p:nvPr/>
-        </p:nvSpPr>
-        <p:spPr>
-          <a:xfrm>
-            <a:off x="822960" y="4572000"/>
-            <a:ext cx="146304" cy="445385"/>
-          </a:xfrm>
-          <a:prstGeom prst="rect">
-            <a:avLst/>
-          </a:prstGeom>
-          <a:solidFill>
-            <a:srgbClr val="2C898A"/>
-          </a:solidFill>
-          <a:ln>
-            <a:noFill/>
-          </a:ln>
-          <a:effectLst/>
-        </p:spPr>
-        <p:style>
-          <a:lnRef idx="1">
-            <a:schemeClr val="accent1"/>
-          </a:lnRef>
-          <a:fillRef idx="3">
-            <a:schemeClr val="accent1"/>
-          </a:fillRef>
-          <a:effectRef idx="2">
-            <a:schemeClr val="accent1"/>
-          </a:effectRef>
-          <a:fontRef idx="minor">
-            <a:schemeClr val="lt1"/>
-          </a:fontRef>
-        </p:style>
-        <p:txBody>
-          <a:bodyPr rtlCol="0" anchor="ctr"/>
-          <a:lstStyle/>
-          <a:p>
-            <a:pPr algn="ctr"/>
-          </a:p>
-        </p:txBody>
-      </p:sp>
-      <p:sp>
-        <p:nvSpPr>
-          <p:cNvPr id="16" name="TextBox 15"/>
-          <p:cNvSpPr txBox="1"/>
-          <p:nvPr/>
-        </p:nvSpPr>
-        <p:spPr>
-          <a:xfrm>
-            <a:off x="1143000" y="4535424"/>
-            <a:ext cx="2926080" cy="674827"/>
-          </a:xfrm>
-          <a:prstGeom prst="rect">
-            <a:avLst/>
-          </a:prstGeom>
-          <a:noFill/>
-        </p:spPr>
-        <p:txBody>
-          <a:bodyPr wrap="square" anchor="ctr" lIns="0" rIns="0" tIns="0" bIns="0">
-            <a:spAutoFit/>
-          </a:bodyPr>
-          <a:lstStyle/>
-          <a:p>
-            <a:pPr algn="l">
-              <a:lnSpc>
-                <a:spcPct val="108000"/>
-              </a:lnSpc>
-              <a:spcAft>
-                <a:spcPts val="400"/>
-              </a:spcAft>
-            </a:pPr>
-            <a:r>
-              <a:rPr sz="1400" b="1" i="0">
-                <a:solidFill>
-                  <a:srgbClr val="9FE0D8"/>
-                </a:solidFill>
-                <a:latin typeface="NanumGothic"/>
-                <a:ea typeface="NanumGothic"/>
-              </a:rPr>
-              <a:t>효과</a:t>
-            </a:r>
-          </a:p>
-        </p:txBody>
-      </p:sp>
-      <p:sp>
-        <p:nvSpPr>
-          <p:cNvPr id="17" name="TextBox 16"/>
-          <p:cNvSpPr txBox="1"/>
-          <p:nvPr/>
-        </p:nvSpPr>
-        <p:spPr>
-          <a:xfrm>
-            <a:off x="4114800" y="4535424"/>
-            <a:ext cx="7406640" cy="674827"/>
-          </a:xfrm>
-          <a:prstGeom prst="rect">
-            <a:avLst/>
-          </a:prstGeom>
-          <a:noFill/>
-        </p:spPr>
-        <p:txBody>
-          <a:bodyPr wrap="square" anchor="ctr" lIns="0" rIns="0" tIns="0" bIns="0">
-            <a:spAutoFit/>
-          </a:bodyPr>
-          <a:lstStyle/>
-          <a:p>
-            <a:pPr algn="l">
-              <a:lnSpc>
-                <a:spcPct val="105000"/>
-              </a:lnSpc>
-              <a:spcAft>
-                <a:spcPts val="400"/>
-              </a:spcAft>
-            </a:pPr>
-            <a:r>
-              <a:rPr sz="1250" b="0" i="0">
-                <a:solidFill>
-                  <a:srgbClr val="FFFFFF"/>
-                </a:solidFill>
-                <a:latin typeface="NanumGothic"/>
-                <a:ea typeface="NanumGothic"/>
-              </a:rPr>
-              <a:t>관류 실측 개선(Dickey), 허혈통 최대 75%↓, CRPS 통증완화(교감피부반응으로 예측).</a:t>
-            </a:r>
-          </a:p>
-        </p:txBody>
-      </p:sp>
-      <p:sp>
-        <p:nvSpPr>
-          <p:cNvPr id="18" name="Rectangle 17"/>
-          <p:cNvSpPr/>
-          <p:nvPr/>
-        </p:nvSpPr>
-        <p:spPr>
-          <a:xfrm>
-            <a:off x="822960" y="5321807"/>
-            <a:ext cx="146304" cy="445385"/>
-          </a:xfrm>
-          <a:prstGeom prst="rect">
-            <a:avLst/>
-          </a:prstGeom>
-          <a:solidFill>
-            <a:srgbClr val="2C898A"/>
-          </a:solidFill>
-          <a:ln>
-            <a:noFill/>
-          </a:ln>
-          <a:effectLst/>
-        </p:spPr>
-        <p:style>
-          <a:lnRef idx="1">
-            <a:schemeClr val="accent1"/>
-          </a:lnRef>
-          <a:fillRef idx="3">
-            <a:schemeClr val="accent1"/>
-          </a:fillRef>
-          <a:effectRef idx="2">
-            <a:schemeClr val="accent1"/>
-          </a:effectRef>
-          <a:fontRef idx="minor">
-            <a:schemeClr val="lt1"/>
-          </a:fontRef>
-        </p:style>
-        <p:txBody>
-          <a:bodyPr rtlCol="0" anchor="ctr"/>
-          <a:lstStyle/>
-          <a:p>
-            <a:pPr algn="ctr"/>
-          </a:p>
-        </p:txBody>
-      </p:sp>
-      <p:sp>
-        <p:nvSpPr>
-          <p:cNvPr id="19" name="TextBox 18"/>
-          <p:cNvSpPr txBox="1"/>
-          <p:nvPr/>
-        </p:nvSpPr>
-        <p:spPr>
-          <a:xfrm>
-            <a:off x="1143000" y="5285231"/>
-            <a:ext cx="2926080" cy="674827"/>
-          </a:xfrm>
-          <a:prstGeom prst="rect">
-            <a:avLst/>
-          </a:prstGeom>
-          <a:noFill/>
-        </p:spPr>
-        <p:txBody>
-          <a:bodyPr wrap="square" anchor="ctr" lIns="0" rIns="0" tIns="0" bIns="0">
-            <a:spAutoFit/>
-          </a:bodyPr>
-          <a:lstStyle/>
-          <a:p>
-            <a:pPr algn="l">
-              <a:lnSpc>
-                <a:spcPct val="108000"/>
-              </a:lnSpc>
-              <a:spcAft>
-                <a:spcPts val="400"/>
-              </a:spcAft>
-            </a:pPr>
-            <a:r>
-              <a:rPr sz="1400" b="1" i="0">
-                <a:solidFill>
-                  <a:srgbClr val="9FE0D8"/>
-                </a:solidFill>
-                <a:latin typeface="NanumGothic"/>
-                <a:ea typeface="NanumGothic"/>
-              </a:rPr>
-              <a:t>근거</a:t>
-            </a:r>
-          </a:p>
-        </p:txBody>
-      </p:sp>
-      <p:sp>
-        <p:nvSpPr>
-          <p:cNvPr id="20" name="TextBox 19"/>
-          <p:cNvSpPr txBox="1"/>
-          <p:nvPr/>
-        </p:nvSpPr>
-        <p:spPr>
-          <a:xfrm>
-            <a:off x="4114800" y="5285231"/>
-            <a:ext cx="7406640" cy="674827"/>
-          </a:xfrm>
-          <a:prstGeom prst="rect">
-            <a:avLst/>
-          </a:prstGeom>
-          <a:noFill/>
-        </p:spPr>
-        <p:txBody>
-          <a:bodyPr wrap="square" anchor="ctr" lIns="0" rIns="0" tIns="0" bIns="0">
-            <a:spAutoFit/>
-          </a:bodyPr>
-          <a:lstStyle/>
-          <a:p>
-            <a:pPr algn="l">
-              <a:lnSpc>
-                <a:spcPct val="105000"/>
-              </a:lnSpc>
-              <a:spcAft>
-                <a:spcPts val="400"/>
-              </a:spcAft>
-            </a:pPr>
-            <a:r>
-              <a:rPr sz="1250" b="0" i="0">
-                <a:solidFill>
-                  <a:srgbClr val="FFFFFF"/>
-                </a:solidFill>
-                <a:latin typeface="NanumGothic"/>
-                <a:ea typeface="NanumGothic"/>
-              </a:rPr>
-              <a:t>대규모 RCT 부족(관찰·증례 중심). 조기 CRPS·비재건성 CLI에서 유용.</a:t>
+              <a:rPr sz="1000" b="1" i="0">
+                <a:solidFill>
+                  <a:srgbClr val="5A6B7B"/>
+                </a:solidFill>
+                <a:latin typeface="NanumGothic"/>
+                <a:ea typeface="NanumGothic"/>
+              </a:rPr>
+              <a:t>11</a:t>
             </a:r>
           </a:p>
         </p:txBody>
@@ -4962,7 +4662,7 @@
                 <a:latin typeface="NanumGothic"/>
                 <a:ea typeface="NanumGothic"/>
               </a:rPr>
-              <a:t>참고문헌 — LSB</a:t>
+              <a:t>실제 진료 순서 — 교감신경 축을 겨냥한 단계적 접근</a:t>
             </a:r>
           </a:p>
         </p:txBody>
@@ -5005,7 +4705,7 @@
                 <a:latin typeface="NanumGothic"/>
                 <a:ea typeface="NanumGothic"/>
               </a:rPr>
-              <a:t>참고문헌</a:t>
+              <a:t>나의 프로토콜 · 실제 적용</a:t>
             </a:r>
           </a:p>
         </p:txBody>
@@ -5062,13 +4762,451 @@
         </p:nvSpPr>
         <p:spPr>
           <a:xfrm>
-            <a:off x="10317175" y="365760"/>
-            <a:ext cx="1371600" cy="347472"/>
+            <a:off x="10865816" y="365760"/>
+            <a:ext cx="822959" cy="347472"/>
           </a:xfrm>
           <a:prstGeom prst="roundRect">
             <a:avLst>
               <a:gd name="adj" fmla="val 8000"/>
             </a:avLst>
+          </a:prstGeom>
+          <a:solidFill>
+            <a:srgbClr val="1A202C"/>
+          </a:solidFill>
+          <a:ln>
+            <a:noFill/>
+          </a:ln>
+          <a:effectLst/>
+        </p:spPr>
+        <p:style>
+          <a:lnRef idx="1">
+            <a:schemeClr val="accent1"/>
+          </a:lnRef>
+          <a:fillRef idx="3">
+            <a:schemeClr val="accent1"/>
+          </a:fillRef>
+          <a:effectRef idx="2">
+            <a:schemeClr val="accent1"/>
+          </a:effectRef>
+          <a:fontRef idx="minor">
+            <a:schemeClr val="lt1"/>
+          </a:fontRef>
+        </p:style>
+        <p:txBody>
+          <a:bodyPr rtlCol="0" anchor="ctr"/>
+          <a:lstStyle/>
+          <a:p>
+            <a:pPr algn="ctr"/>
+          </a:p>
+        </p:txBody>
+      </p:sp>
+      <p:sp>
+        <p:nvSpPr>
+          <p:cNvPr id="7" name="TextBox 6"/>
+          <p:cNvSpPr txBox="1"/>
+          <p:nvPr/>
+        </p:nvSpPr>
+        <p:spPr>
+          <a:xfrm>
+            <a:off x="10865816" y="365760"/>
+            <a:ext cx="822959" cy="347472"/>
+          </a:xfrm>
+          <a:prstGeom prst="rect">
+            <a:avLst/>
+          </a:prstGeom>
+          <a:noFill/>
+        </p:spPr>
+        <p:txBody>
+          <a:bodyPr wrap="square" anchor="ctr" lIns="0" rIns="0" tIns="0" bIns="0">
+            <a:spAutoFit/>
+          </a:bodyPr>
+          <a:lstStyle/>
+          <a:p>
+            <a:pPr algn="ctr">
+              <a:lnSpc>
+                <a:spcPct val="108000"/>
+              </a:lnSpc>
+              <a:spcAft>
+                <a:spcPts val="400"/>
+              </a:spcAft>
+            </a:pPr>
+            <a:r>
+              <a:rPr sz="1150" b="1" i="0">
+                <a:solidFill>
+                  <a:srgbClr val="FFFFFF"/>
+                </a:solidFill>
+                <a:latin typeface="NanumGothic"/>
+                <a:ea typeface="NanumGothic"/>
+              </a:rPr>
+              <a:t>실전 순서</a:t>
+            </a:r>
+          </a:p>
+        </p:txBody>
+      </p:sp>
+      <p:sp>
+        <p:nvSpPr>
+          <p:cNvPr id="8" name="TextBox 7"/>
+          <p:cNvSpPr txBox="1"/>
+          <p:nvPr/>
+        </p:nvSpPr>
+        <p:spPr>
+          <a:xfrm>
+            <a:off x="731520" y="1371600"/>
+            <a:ext cx="10835640" cy="4754880"/>
+          </a:xfrm>
+          <a:prstGeom prst="rect">
+            <a:avLst/>
+          </a:prstGeom>
+          <a:noFill/>
+        </p:spPr>
+        <p:txBody>
+          <a:bodyPr wrap="square" lIns="0" rIns="0" tIns="0" bIns="0">
+            <a:spAutoFit/>
+          </a:bodyPr>
+          <a:lstStyle/>
+          <a:p>
+            <a:pPr algn="l">
+              <a:lnSpc>
+                <a:spcPct val="108000"/>
+              </a:lnSpc>
+              <a:spcAft>
+                <a:spcPts val="800"/>
+              </a:spcAft>
+            </a:pPr>
+            <a:r>
+              <a:rPr sz="979" b="1" i="0">
+                <a:solidFill>
+                  <a:srgbClr val="2C898A"/>
+                </a:solidFill>
+                <a:latin typeface="NanumGothic"/>
+                <a:ea typeface="NanumGothic"/>
+              </a:rPr>
+              <a:t>●  </a:t>
+            </a:r>
+            <a:r>
+              <a:rPr sz="1400" b="0" i="0">
+                <a:solidFill>
+                  <a:srgbClr val="1A202C"/>
+                </a:solidFill>
+                <a:latin typeface="NanumGothic"/>
+                <a:ea typeface="NanumGothic"/>
+              </a:rPr>
+              <a:t>① 감별·검사: '밤/하지 증상'이 동맥성 허혈(ABI·도플러)·CRPS·신경병증인지 확인. 특발 경련·RLS·정맥류 배제.</a:t>
+            </a:r>
+          </a:p>
+          <a:p>
+            <a:pPr algn="l">
+              <a:lnSpc>
+                <a:spcPct val="108000"/>
+              </a:lnSpc>
+              <a:spcAft>
+                <a:spcPts val="800"/>
+              </a:spcAft>
+            </a:pPr>
+            <a:r>
+              <a:rPr sz="979" b="1" i="0">
+                <a:solidFill>
+                  <a:srgbClr val="2C898A"/>
+                </a:solidFill>
+                <a:latin typeface="NanumGothic"/>
+                <a:ea typeface="NanumGothic"/>
+              </a:rPr>
+              <a:t>●  </a:t>
+            </a:r>
+            <a:r>
+              <a:rPr sz="1400" b="0" i="0">
+                <a:solidFill>
+                  <a:srgbClr val="1A202C"/>
+                </a:solidFill>
+                <a:latin typeface="NanumGothic"/>
+                <a:ea typeface="NanumGothic"/>
+              </a:rPr>
+              <a:t>② 방향 설정: 교감매개통·허혈로 판단되면 교감신경 축(L2–L3)을 겨냥.</a:t>
+            </a:r>
+          </a:p>
+          <a:p>
+            <a:pPr algn="l">
+              <a:lnSpc>
+                <a:spcPct val="108000"/>
+              </a:lnSpc>
+              <a:spcAft>
+                <a:spcPts val="800"/>
+              </a:spcAft>
+            </a:pPr>
+            <a:r>
+              <a:rPr sz="979" b="1" i="0">
+                <a:solidFill>
+                  <a:srgbClr val="2C898A"/>
+                </a:solidFill>
+                <a:latin typeface="NanumGothic"/>
+                <a:ea typeface="NanumGothic"/>
+              </a:rPr>
+              <a:t>●  </a:t>
+            </a:r>
+            <a:r>
+              <a:rPr sz="1400" b="1" i="0">
+                <a:solidFill>
+                  <a:srgbClr val="2E7D32"/>
+                </a:solidFill>
+                <a:latin typeface="NanumGothic"/>
+                <a:ea typeface="NanumGothic"/>
+              </a:rPr>
+              <a:t>③ 진단적 차단: 투시 유도 국소마취제 LSB → 피부온도 ≥2°C 상승·통증 반응 확인.</a:t>
+            </a:r>
+          </a:p>
+          <a:p>
+            <a:pPr algn="l">
+              <a:lnSpc>
+                <a:spcPct val="108000"/>
+              </a:lnSpc>
+              <a:spcAft>
+                <a:spcPts val="800"/>
+              </a:spcAft>
+            </a:pPr>
+            <a:r>
+              <a:rPr sz="979" b="1" i="0">
+                <a:solidFill>
+                  <a:srgbClr val="2C898A"/>
+                </a:solidFill>
+                <a:latin typeface="NanumGothic"/>
+                <a:ea typeface="NanumGothic"/>
+              </a:rPr>
+              <a:t>●  </a:t>
+            </a:r>
+            <a:r>
+              <a:rPr sz="1400" b="1" i="0">
+                <a:solidFill>
+                  <a:srgbClr val="2E7D32"/>
+                </a:solidFill>
+                <a:latin typeface="NanumGothic"/>
+                <a:ea typeface="NanumGothic"/>
+              </a:rPr>
+              <a:t>④ 반응 양호 시: 치료적 반복 차단, 또는 신경파괴(무수알코올/phenol)·RFA로 장기 완화.</a:t>
+            </a:r>
+          </a:p>
+          <a:p>
+            <a:pPr algn="l">
+              <a:lnSpc>
+                <a:spcPct val="108000"/>
+              </a:lnSpc>
+              <a:spcAft>
+                <a:spcPts val="800"/>
+              </a:spcAft>
+            </a:pPr>
+            <a:r>
+              <a:rPr sz="979" b="1" i="0">
+                <a:solidFill>
+                  <a:srgbClr val="2C898A"/>
+                </a:solidFill>
+                <a:latin typeface="NanumGothic"/>
+                <a:ea typeface="NanumGothic"/>
+              </a:rPr>
+              <a:t>●  </a:t>
+            </a:r>
+            <a:r>
+              <a:rPr sz="1400" b="0" i="0">
+                <a:solidFill>
+                  <a:srgbClr val="1A202C"/>
+                </a:solidFill>
+                <a:latin typeface="NanumGothic"/>
+                <a:ea typeface="NanumGothic"/>
+              </a:rPr>
+              <a:t>⑤ 대상별: CRPS는 조기(≤12개월) 유리 · 난치성 당뇨병성 신경병증은 지속 LSB+신경파괴(RCT).</a:t>
+            </a:r>
+          </a:p>
+          <a:p>
+            <a:pPr algn="l">
+              <a:lnSpc>
+                <a:spcPct val="108000"/>
+              </a:lnSpc>
+              <a:spcAft>
+                <a:spcPts val="800"/>
+              </a:spcAft>
+            </a:pPr>
+            <a:r>
+              <a:rPr sz="1400" b="1" i="0">
+                <a:solidFill>
+                  <a:srgbClr val="5A6B7B"/>
+                </a:solidFill>
+                <a:latin typeface="NanumGothic"/>
+                <a:ea typeface="NanumGothic"/>
+              </a:rPr>
+              <a:t/>
+            </a:r>
+            <a:r>
+              <a:rPr sz="1400" b="1" i="0">
+                <a:solidFill>
+                  <a:srgbClr val="1F6E70"/>
+                </a:solidFill>
+                <a:latin typeface="NanumGothic"/>
+                <a:ea typeface="NanumGothic"/>
+              </a:rPr>
+              <a:t>⑥ 주의: 특발성 NLC·정맥질환은 적응 아님 · 합병증(생식대퇴신경통 5–10% 등) 사전 고지.</a:t>
+            </a:r>
+          </a:p>
+        </p:txBody>
+      </p:sp>
+      <p:sp>
+        <p:nvSpPr>
+          <p:cNvPr id="9" name="TextBox 8"/>
+          <p:cNvSpPr txBox="1"/>
+          <p:nvPr/>
+        </p:nvSpPr>
+        <p:spPr>
+          <a:xfrm>
+            <a:off x="731520" y="6455664"/>
+            <a:ext cx="9875520" cy="292608"/>
+          </a:xfrm>
+          <a:prstGeom prst="rect">
+            <a:avLst/>
+          </a:prstGeom>
+          <a:noFill/>
+        </p:spPr>
+        <p:txBody>
+          <a:bodyPr wrap="square" anchor="ctr" lIns="0" rIns="0" tIns="0" bIns="0">
+            <a:spAutoFit/>
+          </a:bodyPr>
+          <a:lstStyle/>
+          <a:p>
+            <a:pPr algn="l">
+              <a:lnSpc>
+                <a:spcPct val="108000"/>
+              </a:lnSpc>
+              <a:spcAft>
+                <a:spcPts val="400"/>
+              </a:spcAft>
+            </a:pPr>
+            <a:r>
+              <a:rPr sz="900" b="0" i="0">
+                <a:solidFill>
+                  <a:srgbClr val="5A6B7B"/>
+                </a:solidFill>
+                <a:latin typeface="NanumGothic"/>
+                <a:ea typeface="NanumGothic"/>
+              </a:rPr>
+              <a:t>근거: 교육용 제안 · 개별 적용은 임상 판단 · 신경파괴는 진단차단 양성 시에만</a:t>
+            </a:r>
+          </a:p>
+        </p:txBody>
+      </p:sp>
+      <p:sp>
+        <p:nvSpPr>
+          <p:cNvPr id="10" name="TextBox 9"/>
+          <p:cNvSpPr txBox="1"/>
+          <p:nvPr/>
+        </p:nvSpPr>
+        <p:spPr>
+          <a:xfrm>
+            <a:off x="11064240" y="6455664"/>
+            <a:ext cx="822960" cy="292608"/>
+          </a:xfrm>
+          <a:prstGeom prst="rect">
+            <a:avLst/>
+          </a:prstGeom>
+          <a:noFill/>
+        </p:spPr>
+        <p:txBody>
+          <a:bodyPr wrap="square" anchor="ctr" lIns="0" rIns="0" tIns="0" bIns="0">
+            <a:spAutoFit/>
+          </a:bodyPr>
+          <a:lstStyle/>
+          <a:p>
+            <a:pPr algn="r">
+              <a:lnSpc>
+                <a:spcPct val="108000"/>
+              </a:lnSpc>
+              <a:spcAft>
+                <a:spcPts val="400"/>
+              </a:spcAft>
+            </a:pPr>
+            <a:r>
+              <a:rPr sz="1000" b="1" i="0">
+                <a:solidFill>
+                  <a:srgbClr val="5A6B7B"/>
+                </a:solidFill>
+                <a:latin typeface="NanumGothic"/>
+                <a:ea typeface="NanumGothic"/>
+              </a:rPr>
+              <a:t>12</a:t>
+            </a:r>
+          </a:p>
+        </p:txBody>
+      </p:sp>
+    </p:spTree>
+  </p:cSld>
+  <p:clrMapOvr>
+    <a:masterClrMapping/>
+  </p:clrMapOvr>
+</p:sld>
+</file>
+
+<file path=ppt/slides/slide13.xml><?xml version="1.0" encoding="utf-8"?>
+<p:sld xmlns:a="http://schemas.openxmlformats.org/drawingml/2006/main" xmlns:p="http://schemas.openxmlformats.org/presentationml/2006/main" xmlns:r="http://schemas.openxmlformats.org/officeDocument/2006/relationships">
+  <p:cSld>
+    <p:spTree>
+      <p:nvGrpSpPr>
+        <p:cNvPr id="1" name=""/>
+        <p:cNvGrpSpPr/>
+        <p:nvPr/>
+      </p:nvGrpSpPr>
+      <p:grpSpPr/>
+      <p:sp>
+        <p:nvSpPr>
+          <p:cNvPr id="2" name="Rectangle 1"/>
+          <p:cNvSpPr/>
+          <p:nvPr/>
+        </p:nvSpPr>
+        <p:spPr>
+          <a:xfrm>
+            <a:off x="0" y="0"/>
+            <a:ext cx="12191695" cy="6858000"/>
+          </a:xfrm>
+          <a:prstGeom prst="rect">
+            <a:avLst/>
+          </a:prstGeom>
+          <a:solidFill>
+            <a:srgbClr val="1B355E"/>
+          </a:solidFill>
+          <a:ln>
+            <a:noFill/>
+          </a:ln>
+          <a:effectLst/>
+        </p:spPr>
+        <p:style>
+          <a:lnRef idx="1">
+            <a:schemeClr val="accent1"/>
+          </a:lnRef>
+          <a:fillRef idx="3">
+            <a:schemeClr val="accent1"/>
+          </a:fillRef>
+          <a:effectRef idx="2">
+            <a:schemeClr val="accent1"/>
+          </a:effectRef>
+          <a:fontRef idx="minor">
+            <a:schemeClr val="lt1"/>
+          </a:fontRef>
+        </p:style>
+        <p:txBody>
+          <a:bodyPr rtlCol="0" anchor="ctr"/>
+          <a:lstStyle/>
+          <a:p>
+            <a:pPr algn="ctr"/>
+          </a:p>
+        </p:txBody>
+      </p:sp>
+      <p:sp>
+        <p:nvSpPr>
+          <p:cNvPr id="3" name="Rectangle 2"/>
+          <p:cNvSpPr/>
+          <p:nvPr/>
+        </p:nvSpPr>
+        <p:spPr>
+          <a:xfrm>
+            <a:off x="0" y="0"/>
+            <a:ext cx="201168" cy="6858000"/>
+          </a:xfrm>
+          <a:prstGeom prst="rect">
+            <a:avLst/>
           </a:prstGeom>
           <a:solidFill>
             <a:srgbClr val="2C898A"/>
@@ -5102,14 +5240,144 @@
       </p:sp>
       <p:sp>
         <p:nvSpPr>
+          <p:cNvPr id="4" name="TextBox 3"/>
+          <p:cNvSpPr txBox="1"/>
+          <p:nvPr/>
+        </p:nvSpPr>
+        <p:spPr>
+          <a:xfrm>
+            <a:off x="822960" y="640080"/>
+            <a:ext cx="10515600" cy="457200"/>
+          </a:xfrm>
+          <a:prstGeom prst="rect">
+            <a:avLst/>
+          </a:prstGeom>
+          <a:noFill/>
+        </p:spPr>
+        <p:txBody>
+          <a:bodyPr wrap="square" anchor="t" lIns="0" rIns="0" tIns="0" bIns="0">
+            <a:spAutoFit/>
+          </a:bodyPr>
+          <a:lstStyle/>
+          <a:p>
+            <a:pPr algn="l">
+              <a:lnSpc>
+                <a:spcPct val="108000"/>
+              </a:lnSpc>
+              <a:spcAft>
+                <a:spcPts val="400"/>
+              </a:spcAft>
+            </a:pPr>
+            <a:r>
+              <a:rPr sz="1300" b="1" i="0">
+                <a:solidFill>
+                  <a:srgbClr val="9FE0D8"/>
+                </a:solidFill>
+                <a:latin typeface="NanumGothic"/>
+                <a:ea typeface="NanumGothic"/>
+              </a:rPr>
+              <a:t>핵심 메시지 — LSB</a:t>
+            </a:r>
+          </a:p>
+        </p:txBody>
+      </p:sp>
+      <p:sp>
+        <p:nvSpPr>
+          <p:cNvPr id="5" name="TextBox 4"/>
+          <p:cNvSpPr txBox="1"/>
+          <p:nvPr/>
+        </p:nvSpPr>
+        <p:spPr>
+          <a:xfrm>
+            <a:off x="822960" y="1097280"/>
+            <a:ext cx="10515600" cy="914400"/>
+          </a:xfrm>
+          <a:prstGeom prst="rect">
+            <a:avLst/>
+          </a:prstGeom>
+          <a:noFill/>
+        </p:spPr>
+        <p:txBody>
+          <a:bodyPr wrap="square" anchor="t" lIns="0" rIns="0" tIns="0" bIns="0">
+            <a:spAutoFit/>
+          </a:bodyPr>
+          <a:lstStyle/>
+          <a:p>
+            <a:pPr algn="l">
+              <a:lnSpc>
+                <a:spcPct val="110000"/>
+              </a:lnSpc>
+              <a:spcAft>
+                <a:spcPts val="400"/>
+              </a:spcAft>
+            </a:pPr>
+            <a:r>
+              <a:rPr sz="2200" b="1" i="0">
+                <a:solidFill>
+                  <a:srgbClr val="FFFFFF"/>
+                </a:solidFill>
+                <a:latin typeface="NanumGothic"/>
+                <a:ea typeface="NanumGothic"/>
+              </a:rPr>
+              <a:t>표준은 투시 유도 방척추 접근, 성공은 온도 ≥2°C</a:t>
+            </a:r>
+          </a:p>
+        </p:txBody>
+      </p:sp>
+      <p:sp>
+        <p:nvSpPr>
+          <p:cNvPr id="6" name="Rectangle 5"/>
+          <p:cNvSpPr/>
+          <p:nvPr/>
+        </p:nvSpPr>
+        <p:spPr>
+          <a:xfrm>
+            <a:off x="822960" y="2322576"/>
+            <a:ext cx="146304" cy="445385"/>
+          </a:xfrm>
+          <a:prstGeom prst="rect">
+            <a:avLst/>
+          </a:prstGeom>
+          <a:solidFill>
+            <a:srgbClr val="2C898A"/>
+          </a:solidFill>
+          <a:ln>
+            <a:noFill/>
+          </a:ln>
+          <a:effectLst/>
+        </p:spPr>
+        <p:style>
+          <a:lnRef idx="1">
+            <a:schemeClr val="accent1"/>
+          </a:lnRef>
+          <a:fillRef idx="3">
+            <a:schemeClr val="accent1"/>
+          </a:fillRef>
+          <a:effectRef idx="2">
+            <a:schemeClr val="accent1"/>
+          </a:effectRef>
+          <a:fontRef idx="minor">
+            <a:schemeClr val="lt1"/>
+          </a:fontRef>
+        </p:style>
+        <p:txBody>
+          <a:bodyPr rtlCol="0" anchor="ctr"/>
+          <a:lstStyle/>
+          <a:p>
+            <a:pPr algn="ctr"/>
+          </a:p>
+        </p:txBody>
+      </p:sp>
+      <p:sp>
+        <p:nvSpPr>
           <p:cNvPr id="7" name="TextBox 6"/>
           <p:cNvSpPr txBox="1"/>
           <p:nvPr/>
         </p:nvSpPr>
         <p:spPr>
           <a:xfrm>
-            <a:off x="10317175" y="365760"/>
-            <a:ext cx="1371600" cy="347472"/>
+            <a:off x="1143000" y="2286000"/>
+            <a:ext cx="2926080" cy="674827"/>
           </a:xfrm>
           <a:prstGeom prst="rect">
             <a:avLst/>
@@ -5122,7 +5390,7 @@
           </a:bodyPr>
           <a:lstStyle/>
           <a:p>
-            <a:pPr algn="ctr">
+            <a:pPr algn="l">
               <a:lnSpc>
                 <a:spcPct val="108000"/>
               </a:lnSpc>
@@ -5131,14 +5399,14 @@
               </a:spcAft>
             </a:pPr>
             <a:r>
-              <a:rPr sz="1150" b="1" i="0">
-                <a:solidFill>
-                  <a:srgbClr val="FFFFFF"/>
-                </a:solidFill>
-                <a:latin typeface="NanumGothic"/>
-                <a:ea typeface="NanumGothic"/>
-              </a:rPr>
-              <a:t>References</a:t>
+              <a:rPr sz="1400" b="1" i="0">
+                <a:solidFill>
+                  <a:srgbClr val="9FE0D8"/>
+                </a:solidFill>
+                <a:latin typeface="NanumGothic"/>
+                <a:ea typeface="NanumGothic"/>
+              </a:rPr>
+              <a:t>방법</a:t>
             </a:r>
           </a:p>
         </p:txBody>
@@ -5151,8 +5419,676 @@
         </p:nvSpPr>
         <p:spPr>
           <a:xfrm>
-            <a:off x="731520" y="1371600"/>
-            <a:ext cx="5257800" cy="4846320"/>
+            <a:off x="4114800" y="2286000"/>
+            <a:ext cx="7406640" cy="674827"/>
+          </a:xfrm>
+          <a:prstGeom prst="rect">
+            <a:avLst/>
+          </a:prstGeom>
+          <a:noFill/>
+        </p:spPr>
+        <p:txBody>
+          <a:bodyPr wrap="square" anchor="ctr" lIns="0" rIns="0" tIns="0" bIns="0">
+            <a:spAutoFit/>
+          </a:bodyPr>
+          <a:lstStyle/>
+          <a:p>
+            <a:pPr algn="l">
+              <a:lnSpc>
+                <a:spcPct val="105000"/>
+              </a:lnSpc>
+              <a:spcAft>
+                <a:spcPts val="400"/>
+              </a:spcAft>
+            </a:pPr>
+            <a:r>
+              <a:rPr sz="1250" b="0" i="0">
+                <a:solidFill>
+                  <a:srgbClr val="FFFFFF"/>
+                </a:solidFill>
+                <a:latin typeface="NanumGothic"/>
+                <a:ea typeface="NanumGothic"/>
+              </a:rPr>
+              <a:t>L2–L3 방척추 접근·투시, 정중선 7 cm 외측, 조영제 두미측 확산, 성공지표 온도 ≥2°C.</a:t>
+            </a:r>
+          </a:p>
+        </p:txBody>
+      </p:sp>
+      <p:sp>
+        <p:nvSpPr>
+          <p:cNvPr id="9" name="Rectangle 8"/>
+          <p:cNvSpPr/>
+          <p:nvPr/>
+        </p:nvSpPr>
+        <p:spPr>
+          <a:xfrm>
+            <a:off x="822960" y="3072384"/>
+            <a:ext cx="146304" cy="445385"/>
+          </a:xfrm>
+          <a:prstGeom prst="rect">
+            <a:avLst/>
+          </a:prstGeom>
+          <a:solidFill>
+            <a:srgbClr val="2C898A"/>
+          </a:solidFill>
+          <a:ln>
+            <a:noFill/>
+          </a:ln>
+          <a:effectLst/>
+        </p:spPr>
+        <p:style>
+          <a:lnRef idx="1">
+            <a:schemeClr val="accent1"/>
+          </a:lnRef>
+          <a:fillRef idx="3">
+            <a:schemeClr val="accent1"/>
+          </a:fillRef>
+          <a:effectRef idx="2">
+            <a:schemeClr val="accent1"/>
+          </a:effectRef>
+          <a:fontRef idx="minor">
+            <a:schemeClr val="lt1"/>
+          </a:fontRef>
+        </p:style>
+        <p:txBody>
+          <a:bodyPr rtlCol="0" anchor="ctr"/>
+          <a:lstStyle/>
+          <a:p>
+            <a:pPr algn="ctr"/>
+          </a:p>
+        </p:txBody>
+      </p:sp>
+      <p:sp>
+        <p:nvSpPr>
+          <p:cNvPr id="10" name="TextBox 9"/>
+          <p:cNvSpPr txBox="1"/>
+          <p:nvPr/>
+        </p:nvSpPr>
+        <p:spPr>
+          <a:xfrm>
+            <a:off x="1143000" y="3035808"/>
+            <a:ext cx="2926080" cy="674827"/>
+          </a:xfrm>
+          <a:prstGeom prst="rect">
+            <a:avLst/>
+          </a:prstGeom>
+          <a:noFill/>
+        </p:spPr>
+        <p:txBody>
+          <a:bodyPr wrap="square" anchor="ctr" lIns="0" rIns="0" tIns="0" bIns="0">
+            <a:spAutoFit/>
+          </a:bodyPr>
+          <a:lstStyle/>
+          <a:p>
+            <a:pPr algn="l">
+              <a:lnSpc>
+                <a:spcPct val="108000"/>
+              </a:lnSpc>
+              <a:spcAft>
+                <a:spcPts val="400"/>
+              </a:spcAft>
+            </a:pPr>
+            <a:r>
+              <a:rPr sz="1400" b="1" i="0">
+                <a:solidFill>
+                  <a:srgbClr val="9FE0D8"/>
+                </a:solidFill>
+                <a:latin typeface="NanumGothic"/>
+                <a:ea typeface="NanumGothic"/>
+              </a:rPr>
+              <a:t>약제</a:t>
+            </a:r>
+          </a:p>
+        </p:txBody>
+      </p:sp>
+      <p:sp>
+        <p:nvSpPr>
+          <p:cNvPr id="11" name="TextBox 10"/>
+          <p:cNvSpPr txBox="1"/>
+          <p:nvPr/>
+        </p:nvSpPr>
+        <p:spPr>
+          <a:xfrm>
+            <a:off x="4114800" y="3035808"/>
+            <a:ext cx="7406640" cy="674827"/>
+          </a:xfrm>
+          <a:prstGeom prst="rect">
+            <a:avLst/>
+          </a:prstGeom>
+          <a:noFill/>
+        </p:spPr>
+        <p:txBody>
+          <a:bodyPr wrap="square" anchor="ctr" lIns="0" rIns="0" tIns="0" bIns="0">
+            <a:spAutoFit/>
+          </a:bodyPr>
+          <a:lstStyle/>
+          <a:p>
+            <a:pPr algn="l">
+              <a:lnSpc>
+                <a:spcPct val="105000"/>
+              </a:lnSpc>
+              <a:spcAft>
+                <a:spcPts val="400"/>
+              </a:spcAft>
+            </a:pPr>
+            <a:r>
+              <a:rPr sz="1250" b="0" i="0">
+                <a:solidFill>
+                  <a:srgbClr val="FFFFFF"/>
+                </a:solidFill>
+                <a:latin typeface="NanumGothic"/>
+                <a:ea typeface="NanumGothic"/>
+              </a:rPr>
+              <a:t>진단/치료는 국소마취제, 신경파괴는 무수알코올/phenol·RFA — 진단차단 양성 시에만.</a:t>
+            </a:r>
+          </a:p>
+        </p:txBody>
+      </p:sp>
+      <p:sp>
+        <p:nvSpPr>
+          <p:cNvPr id="12" name="Rectangle 11"/>
+          <p:cNvSpPr/>
+          <p:nvPr/>
+        </p:nvSpPr>
+        <p:spPr>
+          <a:xfrm>
+            <a:off x="822960" y="3822191"/>
+            <a:ext cx="146304" cy="445385"/>
+          </a:xfrm>
+          <a:prstGeom prst="rect">
+            <a:avLst/>
+          </a:prstGeom>
+          <a:solidFill>
+            <a:srgbClr val="2C898A"/>
+          </a:solidFill>
+          <a:ln>
+            <a:noFill/>
+          </a:ln>
+          <a:effectLst/>
+        </p:spPr>
+        <p:style>
+          <a:lnRef idx="1">
+            <a:schemeClr val="accent1"/>
+          </a:lnRef>
+          <a:fillRef idx="3">
+            <a:schemeClr val="accent1"/>
+          </a:fillRef>
+          <a:effectRef idx="2">
+            <a:schemeClr val="accent1"/>
+          </a:effectRef>
+          <a:fontRef idx="minor">
+            <a:schemeClr val="lt1"/>
+          </a:fontRef>
+        </p:style>
+        <p:txBody>
+          <a:bodyPr rtlCol="0" anchor="ctr"/>
+          <a:lstStyle/>
+          <a:p>
+            <a:pPr algn="ctr"/>
+          </a:p>
+        </p:txBody>
+      </p:sp>
+      <p:sp>
+        <p:nvSpPr>
+          <p:cNvPr id="13" name="TextBox 12"/>
+          <p:cNvSpPr txBox="1"/>
+          <p:nvPr/>
+        </p:nvSpPr>
+        <p:spPr>
+          <a:xfrm>
+            <a:off x="1143000" y="3785615"/>
+            <a:ext cx="2926080" cy="674827"/>
+          </a:xfrm>
+          <a:prstGeom prst="rect">
+            <a:avLst/>
+          </a:prstGeom>
+          <a:noFill/>
+        </p:spPr>
+        <p:txBody>
+          <a:bodyPr wrap="square" anchor="ctr" lIns="0" rIns="0" tIns="0" bIns="0">
+            <a:spAutoFit/>
+          </a:bodyPr>
+          <a:lstStyle/>
+          <a:p>
+            <a:pPr algn="l">
+              <a:lnSpc>
+                <a:spcPct val="108000"/>
+              </a:lnSpc>
+              <a:spcAft>
+                <a:spcPts val="400"/>
+              </a:spcAft>
+            </a:pPr>
+            <a:r>
+              <a:rPr sz="1400" b="1" i="0">
+                <a:solidFill>
+                  <a:srgbClr val="9FE0D8"/>
+                </a:solidFill>
+                <a:latin typeface="NanumGothic"/>
+                <a:ea typeface="NanumGothic"/>
+              </a:rPr>
+              <a:t>적응증</a:t>
+            </a:r>
+          </a:p>
+        </p:txBody>
+      </p:sp>
+      <p:sp>
+        <p:nvSpPr>
+          <p:cNvPr id="14" name="TextBox 13"/>
+          <p:cNvSpPr txBox="1"/>
+          <p:nvPr/>
+        </p:nvSpPr>
+        <p:spPr>
+          <a:xfrm>
+            <a:off x="4114800" y="3785615"/>
+            <a:ext cx="7406640" cy="674827"/>
+          </a:xfrm>
+          <a:prstGeom prst="rect">
+            <a:avLst/>
+          </a:prstGeom>
+          <a:noFill/>
+        </p:spPr>
+        <p:txBody>
+          <a:bodyPr wrap="square" anchor="ctr" lIns="0" rIns="0" tIns="0" bIns="0">
+            <a:spAutoFit/>
+          </a:bodyPr>
+          <a:lstStyle/>
+          <a:p>
+            <a:pPr algn="l">
+              <a:lnSpc>
+                <a:spcPct val="105000"/>
+              </a:lnSpc>
+              <a:spcAft>
+                <a:spcPts val="400"/>
+              </a:spcAft>
+            </a:pPr>
+            <a:r>
+              <a:rPr sz="1250" b="0" i="0">
+                <a:solidFill>
+                  <a:srgbClr val="FFFFFF"/>
+                </a:solidFill>
+                <a:latin typeface="NanumGothic"/>
+                <a:ea typeface="NanumGothic"/>
+              </a:rPr>
+              <a:t>조기 CRPS·PAD/CLI 안정통·신경병증·다한증 등. 특발성 NLC·정맥질환(정맥류)은 적응 아님.</a:t>
+            </a:r>
+          </a:p>
+        </p:txBody>
+      </p:sp>
+      <p:sp>
+        <p:nvSpPr>
+          <p:cNvPr id="15" name="Rectangle 14"/>
+          <p:cNvSpPr/>
+          <p:nvPr/>
+        </p:nvSpPr>
+        <p:spPr>
+          <a:xfrm>
+            <a:off x="822960" y="4572000"/>
+            <a:ext cx="146304" cy="445385"/>
+          </a:xfrm>
+          <a:prstGeom prst="rect">
+            <a:avLst/>
+          </a:prstGeom>
+          <a:solidFill>
+            <a:srgbClr val="2C898A"/>
+          </a:solidFill>
+          <a:ln>
+            <a:noFill/>
+          </a:ln>
+          <a:effectLst/>
+        </p:spPr>
+        <p:style>
+          <a:lnRef idx="1">
+            <a:schemeClr val="accent1"/>
+          </a:lnRef>
+          <a:fillRef idx="3">
+            <a:schemeClr val="accent1"/>
+          </a:fillRef>
+          <a:effectRef idx="2">
+            <a:schemeClr val="accent1"/>
+          </a:effectRef>
+          <a:fontRef idx="minor">
+            <a:schemeClr val="lt1"/>
+          </a:fontRef>
+        </p:style>
+        <p:txBody>
+          <a:bodyPr rtlCol="0" anchor="ctr"/>
+          <a:lstStyle/>
+          <a:p>
+            <a:pPr algn="ctr"/>
+          </a:p>
+        </p:txBody>
+      </p:sp>
+      <p:sp>
+        <p:nvSpPr>
+          <p:cNvPr id="16" name="TextBox 15"/>
+          <p:cNvSpPr txBox="1"/>
+          <p:nvPr/>
+        </p:nvSpPr>
+        <p:spPr>
+          <a:xfrm>
+            <a:off x="1143000" y="4535424"/>
+            <a:ext cx="2926080" cy="674827"/>
+          </a:xfrm>
+          <a:prstGeom prst="rect">
+            <a:avLst/>
+          </a:prstGeom>
+          <a:noFill/>
+        </p:spPr>
+        <p:txBody>
+          <a:bodyPr wrap="square" anchor="ctr" lIns="0" rIns="0" tIns="0" bIns="0">
+            <a:spAutoFit/>
+          </a:bodyPr>
+          <a:lstStyle/>
+          <a:p>
+            <a:pPr algn="l">
+              <a:lnSpc>
+                <a:spcPct val="108000"/>
+              </a:lnSpc>
+              <a:spcAft>
+                <a:spcPts val="400"/>
+              </a:spcAft>
+            </a:pPr>
+            <a:r>
+              <a:rPr sz="1400" b="1" i="0">
+                <a:solidFill>
+                  <a:srgbClr val="9FE0D8"/>
+                </a:solidFill>
+                <a:latin typeface="NanumGothic"/>
+                <a:ea typeface="NanumGothic"/>
+              </a:rPr>
+              <a:t>효과</a:t>
+            </a:r>
+          </a:p>
+        </p:txBody>
+      </p:sp>
+      <p:sp>
+        <p:nvSpPr>
+          <p:cNvPr id="17" name="TextBox 16"/>
+          <p:cNvSpPr txBox="1"/>
+          <p:nvPr/>
+        </p:nvSpPr>
+        <p:spPr>
+          <a:xfrm>
+            <a:off x="4114800" y="4535424"/>
+            <a:ext cx="7406640" cy="674827"/>
+          </a:xfrm>
+          <a:prstGeom prst="rect">
+            <a:avLst/>
+          </a:prstGeom>
+          <a:noFill/>
+        </p:spPr>
+        <p:txBody>
+          <a:bodyPr wrap="square" anchor="ctr" lIns="0" rIns="0" tIns="0" bIns="0">
+            <a:spAutoFit/>
+          </a:bodyPr>
+          <a:lstStyle/>
+          <a:p>
+            <a:pPr algn="l">
+              <a:lnSpc>
+                <a:spcPct val="105000"/>
+              </a:lnSpc>
+              <a:spcAft>
+                <a:spcPts val="400"/>
+              </a:spcAft>
+            </a:pPr>
+            <a:r>
+              <a:rPr sz="1250" b="0" i="0">
+                <a:solidFill>
+                  <a:srgbClr val="FFFFFF"/>
+                </a:solidFill>
+                <a:latin typeface="NanumGothic"/>
+                <a:ea typeface="NanumGothic"/>
+              </a:rPr>
+              <a:t>관류 실측 개선(Dickey), 허혈통 최대 75%↓, CRPS 통증완화(교감피부반응으로 예측).</a:t>
+            </a:r>
+          </a:p>
+        </p:txBody>
+      </p:sp>
+      <p:sp>
+        <p:nvSpPr>
+          <p:cNvPr id="18" name="Rectangle 17"/>
+          <p:cNvSpPr/>
+          <p:nvPr/>
+        </p:nvSpPr>
+        <p:spPr>
+          <a:xfrm>
+            <a:off x="822960" y="5321807"/>
+            <a:ext cx="146304" cy="445385"/>
+          </a:xfrm>
+          <a:prstGeom prst="rect">
+            <a:avLst/>
+          </a:prstGeom>
+          <a:solidFill>
+            <a:srgbClr val="2C898A"/>
+          </a:solidFill>
+          <a:ln>
+            <a:noFill/>
+          </a:ln>
+          <a:effectLst/>
+        </p:spPr>
+        <p:style>
+          <a:lnRef idx="1">
+            <a:schemeClr val="accent1"/>
+          </a:lnRef>
+          <a:fillRef idx="3">
+            <a:schemeClr val="accent1"/>
+          </a:fillRef>
+          <a:effectRef idx="2">
+            <a:schemeClr val="accent1"/>
+          </a:effectRef>
+          <a:fontRef idx="minor">
+            <a:schemeClr val="lt1"/>
+          </a:fontRef>
+        </p:style>
+        <p:txBody>
+          <a:bodyPr rtlCol="0" anchor="ctr"/>
+          <a:lstStyle/>
+          <a:p>
+            <a:pPr algn="ctr"/>
+          </a:p>
+        </p:txBody>
+      </p:sp>
+      <p:sp>
+        <p:nvSpPr>
+          <p:cNvPr id="19" name="TextBox 18"/>
+          <p:cNvSpPr txBox="1"/>
+          <p:nvPr/>
+        </p:nvSpPr>
+        <p:spPr>
+          <a:xfrm>
+            <a:off x="1143000" y="5285231"/>
+            <a:ext cx="2926080" cy="674827"/>
+          </a:xfrm>
+          <a:prstGeom prst="rect">
+            <a:avLst/>
+          </a:prstGeom>
+          <a:noFill/>
+        </p:spPr>
+        <p:txBody>
+          <a:bodyPr wrap="square" anchor="ctr" lIns="0" rIns="0" tIns="0" bIns="0">
+            <a:spAutoFit/>
+          </a:bodyPr>
+          <a:lstStyle/>
+          <a:p>
+            <a:pPr algn="l">
+              <a:lnSpc>
+                <a:spcPct val="108000"/>
+              </a:lnSpc>
+              <a:spcAft>
+                <a:spcPts val="400"/>
+              </a:spcAft>
+            </a:pPr>
+            <a:r>
+              <a:rPr sz="1400" b="1" i="0">
+                <a:solidFill>
+                  <a:srgbClr val="9FE0D8"/>
+                </a:solidFill>
+                <a:latin typeface="NanumGothic"/>
+                <a:ea typeface="NanumGothic"/>
+              </a:rPr>
+              <a:t>근거</a:t>
+            </a:r>
+          </a:p>
+        </p:txBody>
+      </p:sp>
+      <p:sp>
+        <p:nvSpPr>
+          <p:cNvPr id="20" name="TextBox 19"/>
+          <p:cNvSpPr txBox="1"/>
+          <p:nvPr/>
+        </p:nvSpPr>
+        <p:spPr>
+          <a:xfrm>
+            <a:off x="4114800" y="5285231"/>
+            <a:ext cx="7406640" cy="674827"/>
+          </a:xfrm>
+          <a:prstGeom prst="rect">
+            <a:avLst/>
+          </a:prstGeom>
+          <a:noFill/>
+        </p:spPr>
+        <p:txBody>
+          <a:bodyPr wrap="square" anchor="ctr" lIns="0" rIns="0" tIns="0" bIns="0">
+            <a:spAutoFit/>
+          </a:bodyPr>
+          <a:lstStyle/>
+          <a:p>
+            <a:pPr algn="l">
+              <a:lnSpc>
+                <a:spcPct val="105000"/>
+              </a:lnSpc>
+              <a:spcAft>
+                <a:spcPts val="400"/>
+              </a:spcAft>
+            </a:pPr>
+            <a:r>
+              <a:rPr sz="1250" b="0" i="0">
+                <a:solidFill>
+                  <a:srgbClr val="FFFFFF"/>
+                </a:solidFill>
+                <a:latin typeface="NanumGothic"/>
+                <a:ea typeface="NanumGothic"/>
+              </a:rPr>
+              <a:t>대규모 RCT 부족(관찰·증례 중심). 조기 CRPS·비재건성 CLI에서 유용.</a:t>
+            </a:r>
+          </a:p>
+        </p:txBody>
+      </p:sp>
+    </p:spTree>
+  </p:cSld>
+  <p:clrMapOvr>
+    <a:masterClrMapping/>
+  </p:clrMapOvr>
+</p:sld>
+</file>
+
+<file path=ppt/slides/slide14.xml><?xml version="1.0" encoding="utf-8"?>
+<p:sld xmlns:a="http://schemas.openxmlformats.org/drawingml/2006/main" xmlns:p="http://schemas.openxmlformats.org/presentationml/2006/main" xmlns:r="http://schemas.openxmlformats.org/officeDocument/2006/relationships">
+  <p:cSld>
+    <p:spTree>
+      <p:nvGrpSpPr>
+        <p:cNvPr id="1" name=""/>
+        <p:cNvGrpSpPr/>
+        <p:nvPr/>
+      </p:nvGrpSpPr>
+      <p:grpSpPr/>
+      <p:sp>
+        <p:nvSpPr>
+          <p:cNvPr id="2" name="Rectangle 1"/>
+          <p:cNvSpPr/>
+          <p:nvPr/>
+        </p:nvSpPr>
+        <p:spPr>
+          <a:xfrm>
+            <a:off x="502920" y="310896"/>
+            <a:ext cx="109728" cy="457200"/>
+          </a:xfrm>
+          <a:prstGeom prst="rect">
+            <a:avLst/>
+          </a:prstGeom>
+          <a:solidFill>
+            <a:srgbClr val="2C898A"/>
+          </a:solidFill>
+          <a:ln>
+            <a:noFill/>
+          </a:ln>
+          <a:effectLst/>
+        </p:spPr>
+        <p:style>
+          <a:lnRef idx="1">
+            <a:schemeClr val="accent1"/>
+          </a:lnRef>
+          <a:fillRef idx="3">
+            <a:schemeClr val="accent1"/>
+          </a:fillRef>
+          <a:effectRef idx="2">
+            <a:schemeClr val="accent1"/>
+          </a:effectRef>
+          <a:fontRef idx="minor">
+            <a:schemeClr val="lt1"/>
+          </a:fontRef>
+        </p:style>
+        <p:txBody>
+          <a:bodyPr rtlCol="0" anchor="ctr"/>
+          <a:lstStyle/>
+          <a:p>
+            <a:pPr algn="ctr"/>
+          </a:p>
+        </p:txBody>
+      </p:sp>
+      <p:sp>
+        <p:nvSpPr>
+          <p:cNvPr id="3" name="TextBox 2"/>
+          <p:cNvSpPr txBox="1"/>
+          <p:nvPr/>
+        </p:nvSpPr>
+        <p:spPr>
+          <a:xfrm>
+            <a:off x="731520" y="237744"/>
+            <a:ext cx="9509760" cy="685800"/>
+          </a:xfrm>
+          <a:prstGeom prst="rect">
+            <a:avLst/>
+          </a:prstGeom>
+          <a:noFill/>
+        </p:spPr>
+        <p:txBody>
+          <a:bodyPr wrap="square" anchor="ctr" lIns="0" rIns="0" tIns="0" bIns="0">
+            <a:spAutoFit/>
+          </a:bodyPr>
+          <a:lstStyle/>
+          <a:p>
+            <a:pPr algn="l">
+              <a:lnSpc>
+                <a:spcPct val="108000"/>
+              </a:lnSpc>
+              <a:spcAft>
+                <a:spcPts val="400"/>
+              </a:spcAft>
+            </a:pPr>
+            <a:r>
+              <a:rPr sz="2400" b="1" i="0">
+                <a:solidFill>
+                  <a:srgbClr val="1B355E"/>
+                </a:solidFill>
+                <a:latin typeface="NanumGothic"/>
+                <a:ea typeface="NanumGothic"/>
+              </a:rPr>
+              <a:t>참고문헌 — LSB</a:t>
+            </a:r>
+          </a:p>
+        </p:txBody>
+      </p:sp>
+      <p:sp>
+        <p:nvSpPr>
+          <p:cNvPr id="4" name="TextBox 3"/>
+          <p:cNvSpPr txBox="1"/>
+          <p:nvPr/>
+        </p:nvSpPr>
+        <p:spPr>
+          <a:xfrm>
+            <a:off x="749808" y="109728"/>
+            <a:ext cx="7315200" cy="219456"/>
           </a:xfrm>
           <a:prstGeom prst="rect">
             <a:avLst/>
@@ -5167,134 +6103,167 @@
           <a:p>
             <a:pPr algn="l">
               <a:lnSpc>
-                <a:spcPct val="105000"/>
-              </a:lnSpc>
-              <a:spcAft>
-                <a:spcPts val="700"/>
-              </a:spcAft>
-            </a:pPr>
-            <a:r>
-              <a:rPr sz="1000" b="0" i="0">
-                <a:solidFill>
-                  <a:srgbClr val="1A202C"/>
-                </a:solidFill>
-                <a:latin typeface="NanumGothic"/>
-                <a:ea typeface="NanumGothic"/>
-              </a:rPr>
-              <a:t>Dua A, Varacallo MA. Lumbar sympathetic block. StatPearls. 2026. NBK431107.</a:t>
-            </a:r>
-          </a:p>
-          <a:p>
-            <a:pPr algn="l">
-              <a:lnSpc>
-                <a:spcPct val="105000"/>
-              </a:lnSpc>
-              <a:spcAft>
-                <a:spcPts val="700"/>
-              </a:spcAft>
-            </a:pPr>
-            <a:r>
-              <a:rPr sz="1000" b="0" i="0">
-                <a:solidFill>
-                  <a:srgbClr val="1A202C"/>
-                </a:solidFill>
-                <a:latin typeface="NanumGothic"/>
-                <a:ea typeface="NanumGothic"/>
-              </a:rPr>
-              <a:t>Lumbar sympatholysis. StatPearls. NBK560514.</a:t>
-            </a:r>
-          </a:p>
-          <a:p>
-            <a:pPr algn="l">
-              <a:lnSpc>
-                <a:spcPct val="105000"/>
-              </a:lnSpc>
-              <a:spcAft>
-                <a:spcPts val="700"/>
-              </a:spcAft>
-            </a:pPr>
-            <a:r>
-              <a:rPr sz="1000" b="0" i="0">
-                <a:solidFill>
-                  <a:srgbClr val="1A202C"/>
-                </a:solidFill>
-                <a:latin typeface="NanumGothic"/>
-                <a:ea typeface="NanumGothic"/>
-              </a:rPr>
-              <a:t>Zhang JH, Deng YP, Geng MJ. Efficacy of the lumbar sympathetic ganglion block in lower limb pain. Ibrain. 2022;8(4):442-52. PMID 37786587.</a:t>
-            </a:r>
-          </a:p>
-          <a:p>
-            <a:pPr algn="l">
-              <a:lnSpc>
-                <a:spcPct val="105000"/>
-              </a:lnSpc>
-              <a:spcAft>
-                <a:spcPts val="700"/>
-              </a:spcAft>
-            </a:pPr>
-            <a:r>
-              <a:rPr sz="1000" b="0" i="0">
-                <a:solidFill>
-                  <a:srgbClr val="1A202C"/>
-                </a:solidFill>
-                <a:latin typeface="NanumGothic"/>
-                <a:ea typeface="NanumGothic"/>
-              </a:rPr>
-              <a:t>Dickey Z, Sharma N. Lumbar sympathetic block leading to increased arterial diameter and blood flow. Cureus. 2024;16(6):e61755. PMID 38975506.</a:t>
-            </a:r>
-          </a:p>
-          <a:p>
-            <a:pPr algn="l">
-              <a:lnSpc>
-                <a:spcPct val="105000"/>
-              </a:lnSpc>
-              <a:spcAft>
-                <a:spcPts val="700"/>
-              </a:spcAft>
-            </a:pPr>
-            <a:r>
-              <a:rPr sz="1000" b="0" i="0">
-                <a:solidFill>
-                  <a:srgbClr val="1A202C"/>
-                </a:solidFill>
-                <a:latin typeface="NanumGothic"/>
-                <a:ea typeface="NanumGothic"/>
-              </a:rPr>
-              <a:t>Barreto Junior EPS, et al. Neurolytic block of the lumbar sympathetic chain in critical lower limb ischemia. Braz J Anesthesiol. 2018;68(1):100-3. PMC9391669.</a:t>
-            </a:r>
-          </a:p>
-          <a:p>
-            <a:pPr algn="l">
-              <a:lnSpc>
-                <a:spcPct val="105000"/>
-              </a:lnSpc>
-              <a:spcAft>
-                <a:spcPts val="700"/>
-              </a:spcAft>
-            </a:pPr>
-            <a:r>
-              <a:rPr sz="1000" b="0" i="0">
-                <a:solidFill>
-                  <a:srgbClr val="1A202C"/>
-                </a:solidFill>
-                <a:latin typeface="NanumGothic"/>
-                <a:ea typeface="NanumGothic"/>
-              </a:rPr>
-              <a:t>Choi EJ, et al. Effect duration of lumbar sympathetic ganglion neurolysis in CRPS. Sci Rep. 2024;14(1):12693. PMID 38830944.</a:t>
-            </a:r>
-          </a:p>
-        </p:txBody>
-      </p:sp>
-      <p:sp>
-        <p:nvSpPr>
-          <p:cNvPr id="9" name="TextBox 8"/>
+                <a:spcPct val="108000"/>
+              </a:lnSpc>
+              <a:spcAft>
+                <a:spcPts val="400"/>
+              </a:spcAft>
+            </a:pPr>
+            <a:r>
+              <a:rPr sz="1100" b="1" i="0">
+                <a:solidFill>
+                  <a:srgbClr val="1F6E70"/>
+                </a:solidFill>
+                <a:latin typeface="NanumGothic"/>
+                <a:ea typeface="NanumGothic"/>
+              </a:rPr>
+              <a:t>참고문헌</a:t>
+            </a:r>
+          </a:p>
+        </p:txBody>
+      </p:sp>
+      <p:sp>
+        <p:nvSpPr>
+          <p:cNvPr id="5" name="Rectangle 4"/>
+          <p:cNvSpPr/>
+          <p:nvPr/>
+        </p:nvSpPr>
+        <p:spPr>
+          <a:xfrm>
+            <a:off x="731520" y="969264"/>
+            <a:ext cx="10881360" cy="17780"/>
+          </a:xfrm>
+          <a:prstGeom prst="rect">
+            <a:avLst/>
+          </a:prstGeom>
+          <a:solidFill>
+            <a:srgbClr val="D5DEE7"/>
+          </a:solidFill>
+          <a:ln>
+            <a:noFill/>
+          </a:ln>
+          <a:effectLst/>
+        </p:spPr>
+        <p:style>
+          <a:lnRef idx="1">
+            <a:schemeClr val="accent1"/>
+          </a:lnRef>
+          <a:fillRef idx="3">
+            <a:schemeClr val="accent1"/>
+          </a:fillRef>
+          <a:effectRef idx="2">
+            <a:schemeClr val="accent1"/>
+          </a:effectRef>
+          <a:fontRef idx="minor">
+            <a:schemeClr val="lt1"/>
+          </a:fontRef>
+        </p:style>
+        <p:txBody>
+          <a:bodyPr rtlCol="0" anchor="ctr"/>
+          <a:lstStyle/>
+          <a:p>
+            <a:pPr algn="ctr"/>
+          </a:p>
+        </p:txBody>
+      </p:sp>
+      <p:sp>
+        <p:nvSpPr>
+          <p:cNvPr id="6" name="Rounded Rectangle 5"/>
+          <p:cNvSpPr/>
+          <p:nvPr/>
+        </p:nvSpPr>
+        <p:spPr>
+          <a:xfrm>
+            <a:off x="10317175" y="365760"/>
+            <a:ext cx="1371600" cy="347472"/>
+          </a:xfrm>
+          <a:prstGeom prst="roundRect">
+            <a:avLst>
+              <a:gd name="adj" fmla="val 8000"/>
+            </a:avLst>
+          </a:prstGeom>
+          <a:solidFill>
+            <a:srgbClr val="2C898A"/>
+          </a:solidFill>
+          <a:ln>
+            <a:noFill/>
+          </a:ln>
+          <a:effectLst/>
+        </p:spPr>
+        <p:style>
+          <a:lnRef idx="1">
+            <a:schemeClr val="accent1"/>
+          </a:lnRef>
+          <a:fillRef idx="3">
+            <a:schemeClr val="accent1"/>
+          </a:fillRef>
+          <a:effectRef idx="2">
+            <a:schemeClr val="accent1"/>
+          </a:effectRef>
+          <a:fontRef idx="minor">
+            <a:schemeClr val="lt1"/>
+          </a:fontRef>
+        </p:style>
+        <p:txBody>
+          <a:bodyPr rtlCol="0" anchor="ctr"/>
+          <a:lstStyle/>
+          <a:p>
+            <a:pPr algn="ctr"/>
+          </a:p>
+        </p:txBody>
+      </p:sp>
+      <p:sp>
+        <p:nvSpPr>
+          <p:cNvPr id="7" name="TextBox 6"/>
           <p:cNvSpPr txBox="1"/>
           <p:nvPr/>
         </p:nvSpPr>
         <p:spPr>
           <a:xfrm>
-            <a:off x="6217920" y="1371600"/>
+            <a:off x="10317175" y="365760"/>
+            <a:ext cx="1371600" cy="347472"/>
+          </a:xfrm>
+          <a:prstGeom prst="rect">
+            <a:avLst/>
+          </a:prstGeom>
+          <a:noFill/>
+        </p:spPr>
+        <p:txBody>
+          <a:bodyPr wrap="square" anchor="ctr" lIns="0" rIns="0" tIns="0" bIns="0">
+            <a:spAutoFit/>
+          </a:bodyPr>
+          <a:lstStyle/>
+          <a:p>
+            <a:pPr algn="ctr">
+              <a:lnSpc>
+                <a:spcPct val="108000"/>
+              </a:lnSpc>
+              <a:spcAft>
+                <a:spcPts val="400"/>
+              </a:spcAft>
+            </a:pPr>
+            <a:r>
+              <a:rPr sz="1150" b="1" i="0">
+                <a:solidFill>
+                  <a:srgbClr val="FFFFFF"/>
+                </a:solidFill>
+                <a:latin typeface="NanumGothic"/>
+                <a:ea typeface="NanumGothic"/>
+              </a:rPr>
+              <a:t>References</a:t>
+            </a:r>
+          </a:p>
+        </p:txBody>
+      </p:sp>
+      <p:sp>
+        <p:nvSpPr>
+          <p:cNvPr id="8" name="TextBox 7"/>
+          <p:cNvSpPr txBox="1"/>
+          <p:nvPr/>
+        </p:nvSpPr>
+        <p:spPr>
+          <a:xfrm>
+            <a:off x="731520" y="1371600"/>
             <a:ext cx="5257800" cy="4846320"/>
           </a:xfrm>
           <a:prstGeom prst="rect">
@@ -5324,6 +6293,149 @@
                 <a:latin typeface="NanumGothic"/>
                 <a:ea typeface="NanumGothic"/>
               </a:rPr>
+              <a:t>Dua A, Varacallo MA. Lumbar sympathetic block. StatPearls. 2026. NBK431107.</a:t>
+            </a:r>
+          </a:p>
+          <a:p>
+            <a:pPr algn="l">
+              <a:lnSpc>
+                <a:spcPct val="105000"/>
+              </a:lnSpc>
+              <a:spcAft>
+                <a:spcPts val="700"/>
+              </a:spcAft>
+            </a:pPr>
+            <a:r>
+              <a:rPr sz="1000" b="0" i="0">
+                <a:solidFill>
+                  <a:srgbClr val="1A202C"/>
+                </a:solidFill>
+                <a:latin typeface="NanumGothic"/>
+                <a:ea typeface="NanumGothic"/>
+              </a:rPr>
+              <a:t>Lumbar sympatholysis. StatPearls. NBK560514.</a:t>
+            </a:r>
+          </a:p>
+          <a:p>
+            <a:pPr algn="l">
+              <a:lnSpc>
+                <a:spcPct val="105000"/>
+              </a:lnSpc>
+              <a:spcAft>
+                <a:spcPts val="700"/>
+              </a:spcAft>
+            </a:pPr>
+            <a:r>
+              <a:rPr sz="1000" b="0" i="0">
+                <a:solidFill>
+                  <a:srgbClr val="1A202C"/>
+                </a:solidFill>
+                <a:latin typeface="NanumGothic"/>
+                <a:ea typeface="NanumGothic"/>
+              </a:rPr>
+              <a:t>Zhang JH, Deng YP, Geng MJ. Efficacy of the lumbar sympathetic ganglion block in lower limb pain. Ibrain. 2022;8(4):442-52. PMID 37786587.</a:t>
+            </a:r>
+          </a:p>
+          <a:p>
+            <a:pPr algn="l">
+              <a:lnSpc>
+                <a:spcPct val="105000"/>
+              </a:lnSpc>
+              <a:spcAft>
+                <a:spcPts val="700"/>
+              </a:spcAft>
+            </a:pPr>
+            <a:r>
+              <a:rPr sz="1000" b="0" i="0">
+                <a:solidFill>
+                  <a:srgbClr val="1A202C"/>
+                </a:solidFill>
+                <a:latin typeface="NanumGothic"/>
+                <a:ea typeface="NanumGothic"/>
+              </a:rPr>
+              <a:t>Dickey Z, Sharma N. Lumbar sympathetic block leading to increased arterial diameter and blood flow. Cureus. 2024;16(6):e61755. PMID 38975506.</a:t>
+            </a:r>
+          </a:p>
+          <a:p>
+            <a:pPr algn="l">
+              <a:lnSpc>
+                <a:spcPct val="105000"/>
+              </a:lnSpc>
+              <a:spcAft>
+                <a:spcPts val="700"/>
+              </a:spcAft>
+            </a:pPr>
+            <a:r>
+              <a:rPr sz="1000" b="0" i="0">
+                <a:solidFill>
+                  <a:srgbClr val="1A202C"/>
+                </a:solidFill>
+                <a:latin typeface="NanumGothic"/>
+                <a:ea typeface="NanumGothic"/>
+              </a:rPr>
+              <a:t>Barreto Junior EPS, et al. Neurolytic block of the lumbar sympathetic chain in critical lower limb ischemia. Braz J Anesthesiol. 2018;68(1):100-3. PMC9391669.</a:t>
+            </a:r>
+          </a:p>
+          <a:p>
+            <a:pPr algn="l">
+              <a:lnSpc>
+                <a:spcPct val="105000"/>
+              </a:lnSpc>
+              <a:spcAft>
+                <a:spcPts val="700"/>
+              </a:spcAft>
+            </a:pPr>
+            <a:r>
+              <a:rPr sz="1000" b="0" i="0">
+                <a:solidFill>
+                  <a:srgbClr val="1A202C"/>
+                </a:solidFill>
+                <a:latin typeface="NanumGothic"/>
+                <a:ea typeface="NanumGothic"/>
+              </a:rPr>
+              <a:t>Choi EJ, et al. Effect duration of lumbar sympathetic ganglion neurolysis in CRPS. Sci Rep. 2024;14(1):12693. PMID 38830944.</a:t>
+            </a:r>
+          </a:p>
+        </p:txBody>
+      </p:sp>
+      <p:sp>
+        <p:nvSpPr>
+          <p:cNvPr id="9" name="TextBox 8"/>
+          <p:cNvSpPr txBox="1"/>
+          <p:nvPr/>
+        </p:nvSpPr>
+        <p:spPr>
+          <a:xfrm>
+            <a:off x="6217920" y="1371600"/>
+            <a:ext cx="5257800" cy="4846320"/>
+          </a:xfrm>
+          <a:prstGeom prst="rect">
+            <a:avLst/>
+          </a:prstGeom>
+          <a:noFill/>
+        </p:spPr>
+        <p:txBody>
+          <a:bodyPr wrap="square" anchor="t" lIns="0" rIns="0" tIns="0" bIns="0">
+            <a:spAutoFit/>
+          </a:bodyPr>
+          <a:lstStyle/>
+          <a:p>
+            <a:pPr algn="l">
+              <a:lnSpc>
+                <a:spcPct val="105000"/>
+              </a:lnSpc>
+              <a:spcAft>
+                <a:spcPts val="700"/>
+              </a:spcAft>
+            </a:pPr>
+            <a:r>
+              <a:rPr sz="1000" b="0" i="0">
+                <a:solidFill>
+                  <a:srgbClr val="1A202C"/>
+                </a:solidFill>
+                <a:latin typeface="NanumGothic"/>
+                <a:ea typeface="NanumGothic"/>
+              </a:rPr>
               <a:t>Gungor S, et al. Sympathetic blocks for CRPS: a case series. Medicine (Baltimore). 2018;97(19):e0705. PMID 29742728.</a:t>
             </a:r>
           </a:p>
@@ -5510,7 +6622,7 @@
                 <a:latin typeface="NanumGothic"/>
                 <a:ea typeface="NanumGothic"/>
               </a:rPr>
-              <a:t>12</a:t>
+              <a:t>14</a:t>
             </a:r>
           </a:p>
         </p:txBody>
@@ -5615,7 +6727,7 @@
                 <a:latin typeface="NanumGothic"/>
                 <a:ea typeface="NanumGothic"/>
               </a:rPr>
-              <a:t>개요 · 해부 · 원리</a:t>
+              <a:t>밤·하지 증상 감별 — LSB는 어디에 쓰나</a:t>
             </a:r>
           </a:p>
         </p:txBody>
@@ -5658,7 +6770,7 @@
                 <a:latin typeface="NanumGothic"/>
                 <a:ea typeface="NanumGothic"/>
               </a:rPr>
-              <a:t>개요</a:t>
+              <a:t>가장 먼저</a:t>
             </a:r>
           </a:p>
         </p:txBody>
@@ -5724,7 +6836,7 @@
             </a:avLst>
           </a:prstGeom>
           <a:solidFill>
-            <a:srgbClr val="2C898A"/>
+            <a:srgbClr val="1A202C"/>
           </a:solidFill>
           <a:ln>
             <a:noFill/>
@@ -5791,21 +6903,566 @@
                 <a:latin typeface="NanumGothic"/>
                 <a:ea typeface="NanumGothic"/>
               </a:rPr>
-              <a:t>배경</a:t>
-            </a:r>
-          </a:p>
-        </p:txBody>
-      </p:sp>
-      <p:sp>
-        <p:nvSpPr>
-          <p:cNvPr id="8" name="TextBox 7"/>
+              <a:t>감별</a:t>
+            </a:r>
+          </a:p>
+        </p:txBody>
+      </p:sp>
+      <p:graphicFrame>
+        <p:nvGraphicFramePr>
+          <p:cNvPr id="8" name="Table 7"/>
+          <p:cNvGraphicFramePr>
+            <a:graphicFrameLocks noGrp="1"/>
+          </p:cNvGraphicFramePr>
+          <p:nvPr/>
+        </p:nvGraphicFramePr>
+        <p:xfrm>
+          <a:off x="731520" y="1371600"/>
+          <a:ext cx="10835640" cy="3749040"/>
+        </p:xfrm>
+        <a:graphic>
+          <a:graphicData uri="http://schemas.openxmlformats.org/drawingml/2006/table">
+            <a:tbl>
+              <a:tblPr>
+                <a:tableStyleId>{5C22544A-7EE6-4342-B048-85BDC9FD1C3A}</a:tableStyleId>
+              </a:tblPr>
+              <a:tblGrid>
+                <a:gridCol w="2651760"/>
+                <a:gridCol w="6537960"/>
+                <a:gridCol w="1645920"/>
+              </a:tblGrid>
+              <a:tr h="457200">
+                <a:tc>
+                  <a:txBody>
+                    <a:bodyPr wrap="square"/>
+                    <a:lstStyle/>
+                    <a:p>
+                      <a:pPr algn="l"/>
+                      <a:r>
+                        <a:rPr sz="1250" b="1" i="0">
+                          <a:solidFill>
+                            <a:srgbClr val="FFFFFF"/>
+                          </a:solidFill>
+                          <a:latin typeface="NanumGothic"/>
+                          <a:ea typeface="NanumGothic"/>
+                        </a:rPr>
+                        <a:t>질환</a:t>
+                      </a:r>
+                    </a:p>
+                  </a:txBody>
+                  <a:tcPr marL="73152" marR="54864" marT="18288" marB="18288" anchor="ctr">
+                    <a:solidFill>
+                      <a:srgbClr val="1B355E"/>
+                    </a:solidFill>
+                  </a:tcPr>
+                </a:tc>
+                <a:tc>
+                  <a:txBody>
+                    <a:bodyPr wrap="square"/>
+                    <a:lstStyle/>
+                    <a:p>
+                      <a:pPr algn="ctr"/>
+                      <a:r>
+                        <a:rPr sz="1250" b="1" i="0">
+                          <a:solidFill>
+                            <a:srgbClr val="FFFFFF"/>
+                          </a:solidFill>
+                          <a:latin typeface="NanumGothic"/>
+                          <a:ea typeface="NanumGothic"/>
+                        </a:rPr>
+                        <a:t>핵심 소견</a:t>
+                      </a:r>
+                    </a:p>
+                  </a:txBody>
+                  <a:tcPr marL="73152" marR="54864" marT="18288" marB="18288" anchor="ctr">
+                    <a:solidFill>
+                      <a:srgbClr val="1B355E"/>
+                    </a:solidFill>
+                  </a:tcPr>
+                </a:tc>
+                <a:tc>
+                  <a:txBody>
+                    <a:bodyPr wrap="square"/>
+                    <a:lstStyle/>
+                    <a:p>
+                      <a:pPr algn="ctr"/>
+                      <a:r>
+                        <a:rPr sz="1250" b="1" i="0">
+                          <a:solidFill>
+                            <a:srgbClr val="FFFFFF"/>
+                          </a:solidFill>
+                          <a:latin typeface="NanumGothic"/>
+                          <a:ea typeface="NanumGothic"/>
+                        </a:rPr>
+                        <a:t>LSB 적응</a:t>
+                      </a:r>
+                    </a:p>
+                  </a:txBody>
+                  <a:tcPr marL="73152" marR="54864" marT="18288" marB="18288" anchor="ctr">
+                    <a:solidFill>
+                      <a:srgbClr val="1B355E"/>
+                    </a:solidFill>
+                  </a:tcPr>
+                </a:tc>
+              </a:tr>
+              <a:tr h="548640">
+                <a:tc>
+                  <a:txBody>
+                    <a:bodyPr wrap="square"/>
+                    <a:lstStyle/>
+                    <a:p>
+                      <a:pPr algn="l"/>
+                      <a:r>
+                        <a:rPr sz="1200" b="0" i="0">
+                          <a:solidFill>
+                            <a:srgbClr val="1A202C"/>
+                          </a:solidFill>
+                          <a:latin typeface="NanumGothic"/>
+                          <a:ea typeface="NanumGothic"/>
+                        </a:rPr>
+                        <a:t>허혈성 안정통 (PAD·CLI)</a:t>
+                      </a:r>
+                    </a:p>
+                  </a:txBody>
+                  <a:tcPr marL="73152" marR="54864" marT="18288" marB="18288" anchor="ctr">
+                    <a:solidFill>
+                      <a:srgbClr val="FFFFFF"/>
+                    </a:solidFill>
+                  </a:tcPr>
+                </a:tc>
+                <a:tc>
+                  <a:txBody>
+                    <a:bodyPr wrap="square"/>
+                    <a:lstStyle/>
+                    <a:p>
+                      <a:pPr algn="ctr"/>
+                      <a:r>
+                        <a:rPr sz="1200" b="0" i="0">
+                          <a:solidFill>
+                            <a:srgbClr val="1A202C"/>
+                          </a:solidFill>
+                          <a:latin typeface="NanumGothic"/>
+                          <a:ea typeface="NanumGothic"/>
+                        </a:rPr>
+                        <a:t>파행 → 야간 안정통·차고 창백한 발·ABI↓ (동맥성)</a:t>
+                      </a:r>
+                    </a:p>
+                  </a:txBody>
+                  <a:tcPr marL="73152" marR="54864" marT="18288" marB="18288" anchor="ctr">
+                    <a:solidFill>
+                      <a:srgbClr val="FFFFFF"/>
+                    </a:solidFill>
+                  </a:tcPr>
+                </a:tc>
+                <a:tc>
+                  <a:txBody>
+                    <a:bodyPr wrap="square"/>
+                    <a:lstStyle/>
+                    <a:p>
+                      <a:pPr algn="ctr"/>
+                      <a:r>
+                        <a:rPr sz="1200" b="0" i="0">
+                          <a:solidFill>
+                            <a:srgbClr val="1A202C"/>
+                          </a:solidFill>
+                          <a:latin typeface="NanumGothic"/>
+                          <a:ea typeface="NanumGothic"/>
+                        </a:rPr>
+                        <a:t>○</a:t>
+                      </a:r>
+                    </a:p>
+                  </a:txBody>
+                  <a:tcPr marL="73152" marR="54864" marT="18288" marB="18288" anchor="ctr">
+                    <a:solidFill>
+                      <a:srgbClr val="FFFFFF"/>
+                    </a:solidFill>
+                  </a:tcPr>
+                </a:tc>
+              </a:tr>
+              <a:tr h="548640">
+                <a:tc>
+                  <a:txBody>
+                    <a:bodyPr wrap="square"/>
+                    <a:lstStyle/>
+                    <a:p>
+                      <a:pPr algn="l"/>
+                      <a:r>
+                        <a:rPr sz="1200" b="0" i="0">
+                          <a:solidFill>
+                            <a:srgbClr val="1A202C"/>
+                          </a:solidFill>
+                          <a:latin typeface="NanumGothic"/>
+                          <a:ea typeface="NanumGothic"/>
+                        </a:rPr>
+                        <a:t>하지 CRPS</a:t>
+                      </a:r>
+                    </a:p>
+                  </a:txBody>
+                  <a:tcPr marL="73152" marR="54864" marT="18288" marB="18288" anchor="ctr">
+                    <a:solidFill>
+                      <a:srgbClr val="EEF2F6"/>
+                    </a:solidFill>
+                  </a:tcPr>
+                </a:tc>
+                <a:tc>
+                  <a:txBody>
+                    <a:bodyPr wrap="square"/>
+                    <a:lstStyle/>
+                    <a:p>
+                      <a:pPr algn="ctr"/>
+                      <a:r>
+                        <a:rPr sz="1200" b="0" i="0">
+                          <a:solidFill>
+                            <a:srgbClr val="1A202C"/>
+                          </a:solidFill>
+                          <a:latin typeface="NanumGothic"/>
+                          <a:ea typeface="NanumGothic"/>
+                        </a:rPr>
+                        <a:t>작열통·이질통·부종·피부색/온도 좌우차 (교감매개통)</a:t>
+                      </a:r>
+                    </a:p>
+                  </a:txBody>
+                  <a:tcPr marL="73152" marR="54864" marT="18288" marB="18288" anchor="ctr">
+                    <a:solidFill>
+                      <a:srgbClr val="EEF2F6"/>
+                    </a:solidFill>
+                  </a:tcPr>
+                </a:tc>
+                <a:tc>
+                  <a:txBody>
+                    <a:bodyPr wrap="square"/>
+                    <a:lstStyle/>
+                    <a:p>
+                      <a:pPr algn="ctr"/>
+                      <a:r>
+                        <a:rPr sz="1200" b="0" i="0">
+                          <a:solidFill>
+                            <a:srgbClr val="1A202C"/>
+                          </a:solidFill>
+                          <a:latin typeface="NanumGothic"/>
+                          <a:ea typeface="NanumGothic"/>
+                        </a:rPr>
+                        <a:t>○</a:t>
+                      </a:r>
+                    </a:p>
+                  </a:txBody>
+                  <a:tcPr marL="73152" marR="54864" marT="18288" marB="18288" anchor="ctr">
+                    <a:solidFill>
+                      <a:srgbClr val="EEF2F6"/>
+                    </a:solidFill>
+                  </a:tcPr>
+                </a:tc>
+              </a:tr>
+              <a:tr h="548640">
+                <a:tc>
+                  <a:txBody>
+                    <a:bodyPr wrap="square"/>
+                    <a:lstStyle/>
+                    <a:p>
+                      <a:pPr algn="l"/>
+                      <a:r>
+                        <a:rPr sz="1200" b="0" i="0">
+                          <a:solidFill>
+                            <a:srgbClr val="1A202C"/>
+                          </a:solidFill>
+                          <a:latin typeface="NanumGothic"/>
+                          <a:ea typeface="NanumGothic"/>
+                        </a:rPr>
+                        <a:t>당뇨병성 신경병증</a:t>
+                      </a:r>
+                    </a:p>
+                  </a:txBody>
+                  <a:tcPr marL="73152" marR="54864" marT="18288" marB="18288" anchor="ctr">
+                    <a:solidFill>
+                      <a:srgbClr val="FFFFFF"/>
+                    </a:solidFill>
+                  </a:tcPr>
+                </a:tc>
+                <a:tc>
+                  <a:txBody>
+                    <a:bodyPr wrap="square"/>
+                    <a:lstStyle/>
+                    <a:p>
+                      <a:pPr algn="ctr"/>
+                      <a:r>
+                        <a:rPr sz="1200" b="0" i="0">
+                          <a:solidFill>
+                            <a:srgbClr val="1A202C"/>
+                          </a:solidFill>
+                          <a:latin typeface="NanumGothic"/>
+                          <a:ea typeface="NanumGothic"/>
+                        </a:rPr>
+                        <a:t>저림·화끈거림·감각이상·야간 악화</a:t>
+                      </a:r>
+                    </a:p>
+                  </a:txBody>
+                  <a:tcPr marL="73152" marR="54864" marT="18288" marB="18288" anchor="ctr">
+                    <a:solidFill>
+                      <a:srgbClr val="FFFFFF"/>
+                    </a:solidFill>
+                  </a:tcPr>
+                </a:tc>
+                <a:tc>
+                  <a:txBody>
+                    <a:bodyPr wrap="square"/>
+                    <a:lstStyle/>
+                    <a:p>
+                      <a:pPr algn="ctr"/>
+                      <a:r>
+                        <a:rPr sz="1200" b="0" i="0">
+                          <a:solidFill>
+                            <a:srgbClr val="1A202C"/>
+                          </a:solidFill>
+                          <a:latin typeface="NanumGothic"/>
+                          <a:ea typeface="NanumGothic"/>
+                        </a:rPr>
+                        <a:t>△ 난치성</a:t>
+                      </a:r>
+                    </a:p>
+                  </a:txBody>
+                  <a:tcPr marL="73152" marR="54864" marT="18288" marB="18288" anchor="ctr">
+                    <a:solidFill>
+                      <a:srgbClr val="FFFFFF"/>
+                    </a:solidFill>
+                  </a:tcPr>
+                </a:tc>
+              </a:tr>
+              <a:tr h="548640">
+                <a:tc>
+                  <a:txBody>
+                    <a:bodyPr wrap="square"/>
+                    <a:lstStyle/>
+                    <a:p>
+                      <a:pPr algn="l"/>
+                      <a:r>
+                        <a:rPr sz="1200" b="0" i="0">
+                          <a:solidFill>
+                            <a:srgbClr val="1A202C"/>
+                          </a:solidFill>
+                          <a:latin typeface="NanumGothic"/>
+                          <a:ea typeface="NanumGothic"/>
+                        </a:rPr>
+                        <a:t>특발성 NLC (야간경련)</a:t>
+                      </a:r>
+                    </a:p>
+                  </a:txBody>
+                  <a:tcPr marL="73152" marR="54864" marT="18288" marB="18288" anchor="ctr">
+                    <a:solidFill>
+                      <a:srgbClr val="EEF2F6"/>
+                    </a:solidFill>
+                  </a:tcPr>
+                </a:tc>
+                <a:tc>
+                  <a:txBody>
+                    <a:bodyPr wrap="square"/>
+                    <a:lstStyle/>
+                    <a:p>
+                      <a:pPr algn="ctr"/>
+                      <a:r>
+                        <a:rPr sz="1200" b="0" i="0">
+                          <a:solidFill>
+                            <a:srgbClr val="1A202C"/>
+                          </a:solidFill>
+                          <a:latin typeface="NanumGothic"/>
+                          <a:ea typeface="NanumGothic"/>
+                        </a:rPr>
+                        <a:t>통증성 근수축·촉지 근경직·족배굴곡 완화</a:t>
+                      </a:r>
+                    </a:p>
+                  </a:txBody>
+                  <a:tcPr marL="73152" marR="54864" marT="18288" marB="18288" anchor="ctr">
+                    <a:solidFill>
+                      <a:srgbClr val="EEF2F6"/>
+                    </a:solidFill>
+                  </a:tcPr>
+                </a:tc>
+                <a:tc>
+                  <a:txBody>
+                    <a:bodyPr wrap="square"/>
+                    <a:lstStyle/>
+                    <a:p>
+                      <a:pPr algn="ctr"/>
+                      <a:r>
+                        <a:rPr sz="1200" b="0" i="0">
+                          <a:solidFill>
+                            <a:srgbClr val="1A202C"/>
+                          </a:solidFill>
+                          <a:latin typeface="NanumGothic"/>
+                          <a:ea typeface="NanumGothic"/>
+                        </a:rPr>
+                        <a:t>✕</a:t>
+                      </a:r>
+                    </a:p>
+                  </a:txBody>
+                  <a:tcPr marL="73152" marR="54864" marT="18288" marB="18288" anchor="ctr">
+                    <a:solidFill>
+                      <a:srgbClr val="EEF2F6"/>
+                    </a:solidFill>
+                  </a:tcPr>
+                </a:tc>
+              </a:tr>
+              <a:tr h="548640">
+                <a:tc>
+                  <a:txBody>
+                    <a:bodyPr wrap="square"/>
+                    <a:lstStyle/>
+                    <a:p>
+                      <a:pPr algn="l"/>
+                      <a:r>
+                        <a:rPr sz="1200" b="0" i="0">
+                          <a:solidFill>
+                            <a:srgbClr val="1A202C"/>
+                          </a:solidFill>
+                          <a:latin typeface="NanumGothic"/>
+                          <a:ea typeface="NanumGothic"/>
+                        </a:rPr>
+                        <a:t>RLS (하지불안)</a:t>
+                      </a:r>
+                    </a:p>
+                  </a:txBody>
+                  <a:tcPr marL="73152" marR="54864" marT="18288" marB="18288" anchor="ctr">
+                    <a:solidFill>
+                      <a:srgbClr val="FFFFFF"/>
+                    </a:solidFill>
+                  </a:tcPr>
+                </a:tc>
+                <a:tc>
+                  <a:txBody>
+                    <a:bodyPr wrap="square"/>
+                    <a:lstStyle/>
+                    <a:p>
+                      <a:pPr algn="ctr"/>
+                      <a:r>
+                        <a:rPr sz="1200" b="0" i="0">
+                          <a:solidFill>
+                            <a:srgbClr val="1A202C"/>
+                          </a:solidFill>
+                          <a:latin typeface="NanumGothic"/>
+                          <a:ea typeface="NanumGothic"/>
+                        </a:rPr>
+                        <a:t>움직임 충동·움직이면 완화·근경직 없음</a:t>
+                      </a:r>
+                    </a:p>
+                  </a:txBody>
+                  <a:tcPr marL="73152" marR="54864" marT="18288" marB="18288" anchor="ctr">
+                    <a:solidFill>
+                      <a:srgbClr val="FFFFFF"/>
+                    </a:solidFill>
+                  </a:tcPr>
+                </a:tc>
+                <a:tc>
+                  <a:txBody>
+                    <a:bodyPr wrap="square"/>
+                    <a:lstStyle/>
+                    <a:p>
+                      <a:pPr algn="ctr"/>
+                      <a:r>
+                        <a:rPr sz="1200" b="0" i="0">
+                          <a:solidFill>
+                            <a:srgbClr val="1A202C"/>
+                          </a:solidFill>
+                          <a:latin typeface="NanumGothic"/>
+                          <a:ea typeface="NanumGothic"/>
+                        </a:rPr>
+                        <a:t>✕</a:t>
+                      </a:r>
+                    </a:p>
+                  </a:txBody>
+                  <a:tcPr marL="73152" marR="54864" marT="18288" marB="18288" anchor="ctr">
+                    <a:solidFill>
+                      <a:srgbClr val="FFFFFF"/>
+                    </a:solidFill>
+                  </a:tcPr>
+                </a:tc>
+              </a:tr>
+              <a:tr h="548640">
+                <a:tc>
+                  <a:txBody>
+                    <a:bodyPr wrap="square"/>
+                    <a:lstStyle/>
+                    <a:p>
+                      <a:pPr algn="l"/>
+                      <a:r>
+                        <a:rPr sz="1200" b="0" i="0">
+                          <a:solidFill>
+                            <a:srgbClr val="1A202C"/>
+                          </a:solidFill>
+                          <a:latin typeface="NanumGothic"/>
+                          <a:ea typeface="NanumGothic"/>
+                        </a:rPr>
+                        <a:t>정맥부전·정맥류</a:t>
+                      </a:r>
+                    </a:p>
+                  </a:txBody>
+                  <a:tcPr marL="73152" marR="54864" marT="18288" marB="18288" anchor="ctr">
+                    <a:solidFill>
+                      <a:srgbClr val="EEF2F6"/>
+                    </a:solidFill>
+                  </a:tcPr>
+                </a:tc>
+                <a:tc>
+                  <a:txBody>
+                    <a:bodyPr wrap="square"/>
+                    <a:lstStyle/>
+                    <a:p>
+                      <a:pPr algn="ctr"/>
+                      <a:r>
+                        <a:rPr sz="1200" b="0" i="0">
+                          <a:solidFill>
+                            <a:srgbClr val="1A202C"/>
+                          </a:solidFill>
+                          <a:latin typeface="NanumGothic"/>
+                          <a:ea typeface="NanumGothic"/>
+                        </a:rPr>
+                        <a:t>부종·무거움·저녁 악화 (정맥 역류)</a:t>
+                      </a:r>
+                    </a:p>
+                  </a:txBody>
+                  <a:tcPr marL="73152" marR="54864" marT="18288" marB="18288" anchor="ctr">
+                    <a:solidFill>
+                      <a:srgbClr val="EEF2F6"/>
+                    </a:solidFill>
+                  </a:tcPr>
+                </a:tc>
+                <a:tc>
+                  <a:txBody>
+                    <a:bodyPr wrap="square"/>
+                    <a:lstStyle/>
+                    <a:p>
+                      <a:pPr algn="ctr"/>
+                      <a:r>
+                        <a:rPr sz="1200" b="0" i="0">
+                          <a:solidFill>
+                            <a:srgbClr val="1A202C"/>
+                          </a:solidFill>
+                          <a:latin typeface="NanumGothic"/>
+                          <a:ea typeface="NanumGothic"/>
+                        </a:rPr>
+                        <a:t>✕</a:t>
+                      </a:r>
+                    </a:p>
+                  </a:txBody>
+                  <a:tcPr marL="73152" marR="54864" marT="18288" marB="18288" anchor="ctr">
+                    <a:solidFill>
+                      <a:srgbClr val="EEF2F6"/>
+                    </a:solidFill>
+                  </a:tcPr>
+                </a:tc>
+              </a:tr>
+            </a:tbl>
+          </a:graphicData>
+        </a:graphic>
+      </p:graphicFrame>
+      <p:sp>
+        <p:nvSpPr>
+          <p:cNvPr id="9" name="TextBox 8"/>
           <p:cNvSpPr txBox="1"/>
           <p:nvPr/>
         </p:nvSpPr>
         <p:spPr>
           <a:xfrm>
-            <a:off x="731520" y="1371600"/>
-            <a:ext cx="10835640" cy="4754880"/>
+            <a:off x="731520" y="5989320"/>
+            <a:ext cx="10789920" cy="365760"/>
           </a:xfrm>
           <a:prstGeom prst="rect">
             <a:avLst/>
@@ -5813,7 +7470,7 @@
           <a:noFill/>
         </p:spPr>
         <p:txBody>
-          <a:bodyPr wrap="square" lIns="0" rIns="0" tIns="0" bIns="0">
+          <a:bodyPr wrap="square" anchor="t" lIns="0" rIns="0" tIns="0" bIns="0">
             <a:spAutoFit/>
           </a:bodyPr>
           <a:lstStyle/>
@@ -5823,155 +7480,25 @@
                 <a:spcPct val="108000"/>
               </a:lnSpc>
               <a:spcAft>
-                <a:spcPts val="900"/>
-              </a:spcAft>
-            </a:pPr>
-            <a:r>
-              <a:rPr sz="1050" b="1" i="0">
-                <a:solidFill>
-                  <a:srgbClr val="2C898A"/>
-                </a:solidFill>
-                <a:latin typeface="NanumGothic"/>
-                <a:ea typeface="NanumGothic"/>
-              </a:rPr>
-              <a:t>●  </a:t>
-            </a:r>
-            <a:r>
-              <a:rPr sz="1500" b="1" i="0">
-                <a:solidFill>
-                  <a:srgbClr val="1A202C"/>
-                </a:solidFill>
-                <a:latin typeface="NanumGothic"/>
-                <a:ea typeface="NanumGothic"/>
-              </a:rPr>
-              <a:t>LSB와 교감신경 신경파괴(sympatholysis)는 70년 이상 다양한 하지 통증·허혈 질환에 사용.</a:t>
-            </a:r>
-          </a:p>
-          <a:p>
-            <a:pPr algn="l">
-              <a:lnSpc>
-                <a:spcPct val="108000"/>
-              </a:lnSpc>
-              <a:spcAft>
-                <a:spcPts val="900"/>
-              </a:spcAft>
-            </a:pPr>
-            <a:r>
-              <a:rPr sz="1050" b="1" i="0">
-                <a:solidFill>
-                  <a:srgbClr val="2C898A"/>
-                </a:solidFill>
-                <a:latin typeface="NanumGothic"/>
-                <a:ea typeface="NanumGothic"/>
-              </a:rPr>
-              <a:t>●  </a:t>
-            </a:r>
-            <a:r>
-              <a:rPr sz="1500" b="0" i="0">
-                <a:solidFill>
-                  <a:srgbClr val="1A202C"/>
-                </a:solidFill>
-                <a:latin typeface="NanumGothic"/>
-                <a:ea typeface="NanumGothic"/>
-              </a:rPr>
-              <a:t>표적: 신경절 밀도가 가장 높은 L2–L3(보통 'L2 하 1/3 ~ L3 상 1/3'), 척추체 전외측. 일부 L2/L3/L4 다분절.</a:t>
-            </a:r>
-          </a:p>
-          <a:p>
-            <a:pPr algn="l">
-              <a:lnSpc>
-                <a:spcPct val="108000"/>
-              </a:lnSpc>
-              <a:spcAft>
-                <a:spcPts val="900"/>
-              </a:spcAft>
-            </a:pPr>
-            <a:r>
-              <a:rPr sz="1050" b="1" i="0">
-                <a:solidFill>
-                  <a:srgbClr val="2C898A"/>
-                </a:solidFill>
-                <a:latin typeface="NanumGothic"/>
-                <a:ea typeface="NanumGothic"/>
-              </a:rPr>
-              <a:t>●  </a:t>
-            </a:r>
-            <a:r>
-              <a:rPr sz="1500" b="0" i="0">
-                <a:solidFill>
-                  <a:srgbClr val="1A202C"/>
-                </a:solidFill>
-                <a:latin typeface="NanumGothic"/>
-                <a:ea typeface="NanumGothic"/>
-              </a:rPr>
-              <a:t>원리 ①: 교감신경 차단 → 혈관 확장·측부순환 증가 → 조직 산소화 개선.</a:t>
-            </a:r>
-          </a:p>
-          <a:p>
-            <a:pPr algn="l">
-              <a:lnSpc>
-                <a:spcPct val="108000"/>
-              </a:lnSpc>
-              <a:spcAft>
-                <a:spcPts val="900"/>
-              </a:spcAft>
-            </a:pPr>
-            <a:r>
-              <a:rPr sz="1050" b="1" i="0">
-                <a:solidFill>
-                  <a:srgbClr val="2C898A"/>
-                </a:solidFill>
-                <a:latin typeface="NanumGothic"/>
-                <a:ea typeface="NanumGothic"/>
-              </a:rPr>
-              <a:t>●  </a:t>
-            </a:r>
-            <a:r>
-              <a:rPr sz="1500" b="0" i="0">
-                <a:solidFill>
-                  <a:srgbClr val="1A202C"/>
-                </a:solidFill>
-                <a:latin typeface="NanumGothic"/>
-                <a:ea typeface="NanumGothic"/>
-              </a:rPr>
-              <a:t>원리 ②: 교감신경 매개 통증(sympathetically-maintained pain) 경로 및 자율신경 동반 침해 구심로 차단.</a:t>
-            </a:r>
-          </a:p>
-          <a:p>
-            <a:pPr algn="l">
-              <a:lnSpc>
-                <a:spcPct val="108000"/>
-              </a:lnSpc>
-              <a:spcAft>
-                <a:spcPts val="900"/>
-              </a:spcAft>
-            </a:pPr>
-            <a:r>
-              <a:rPr sz="1500" b="1" i="0">
-                <a:solidFill>
-                  <a:srgbClr val="5A6B7B"/>
-                </a:solidFill>
-                <a:latin typeface="NanumGothic"/>
-                <a:ea typeface="NanumGothic"/>
-              </a:rPr>
-              <a:t/>
-            </a:r>
-            <a:r>
-              <a:rPr sz="1500" b="1" i="0">
+                <a:spcPts val="400"/>
+              </a:spcAft>
+            </a:pPr>
+            <a:r>
+              <a:rPr sz="1150" b="1" i="0">
                 <a:solidFill>
                   <a:srgbClr val="1F6E70"/>
                 </a:solidFill>
                 <a:latin typeface="NanumGothic"/>
                 <a:ea typeface="NanumGothic"/>
               </a:rPr>
-              <a:t>국소마취제 차단(진단적/치료적)과 화학적/열적 신경파괴로 나뉜다.</a:t>
-            </a:r>
-          </a:p>
-        </p:txBody>
-      </p:sp>
-      <p:sp>
-        <p:nvSpPr>
-          <p:cNvPr id="9" name="TextBox 8"/>
+              <a:t>핵심: ABI·도플러로 동맥성 여부 감별이 출발점 — 정맥류·특발경련·RLS는 LSB 적응 아님.</a:t>
+            </a:r>
+          </a:p>
+        </p:txBody>
+      </p:sp>
+      <p:sp>
+        <p:nvSpPr>
+          <p:cNvPr id="10" name="TextBox 9"/>
           <p:cNvSpPr txBox="1"/>
           <p:nvPr/>
         </p:nvSpPr>
@@ -6007,14 +7534,14 @@
                 <a:latin typeface="NanumGothic"/>
                 <a:ea typeface="NanumGothic"/>
               </a:rPr>
-              <a:t>근거: StatPearls NBK431107; Zhang 2022(Ibrain)</a:t>
-            </a:r>
-          </a:p>
-        </p:txBody>
-      </p:sp>
-      <p:sp>
-        <p:nvSpPr>
-          <p:cNvPr id="10" name="TextBox 9"/>
+              <a:t>근거: 감별이 치료의 출발점 · ABI·도플러 선행</a:t>
+            </a:r>
+          </a:p>
+        </p:txBody>
+      </p:sp>
+      <p:sp>
+        <p:nvSpPr>
+          <p:cNvPr id="11" name="TextBox 10"/>
           <p:cNvSpPr txBox="1"/>
           <p:nvPr/>
         </p:nvSpPr>
@@ -6155,6 +7682,546 @@
                 <a:latin typeface="NanumGothic"/>
                 <a:ea typeface="NanumGothic"/>
               </a:rPr>
+              <a:t>개요 · 해부 · 원리</a:t>
+            </a:r>
+          </a:p>
+        </p:txBody>
+      </p:sp>
+      <p:sp>
+        <p:nvSpPr>
+          <p:cNvPr id="4" name="TextBox 3"/>
+          <p:cNvSpPr txBox="1"/>
+          <p:nvPr/>
+        </p:nvSpPr>
+        <p:spPr>
+          <a:xfrm>
+            <a:off x="749808" y="109728"/>
+            <a:ext cx="7315200" cy="219456"/>
+          </a:xfrm>
+          <a:prstGeom prst="rect">
+            <a:avLst/>
+          </a:prstGeom>
+          <a:noFill/>
+        </p:spPr>
+        <p:txBody>
+          <a:bodyPr wrap="square" anchor="t" lIns="0" rIns="0" tIns="0" bIns="0">
+            <a:spAutoFit/>
+          </a:bodyPr>
+          <a:lstStyle/>
+          <a:p>
+            <a:pPr algn="l">
+              <a:lnSpc>
+                <a:spcPct val="108000"/>
+              </a:lnSpc>
+              <a:spcAft>
+                <a:spcPts val="400"/>
+              </a:spcAft>
+            </a:pPr>
+            <a:r>
+              <a:rPr sz="1100" b="1" i="0">
+                <a:solidFill>
+                  <a:srgbClr val="1F6E70"/>
+                </a:solidFill>
+                <a:latin typeface="NanumGothic"/>
+                <a:ea typeface="NanumGothic"/>
+              </a:rPr>
+              <a:t>개요</a:t>
+            </a:r>
+          </a:p>
+        </p:txBody>
+      </p:sp>
+      <p:sp>
+        <p:nvSpPr>
+          <p:cNvPr id="5" name="Rectangle 4"/>
+          <p:cNvSpPr/>
+          <p:nvPr/>
+        </p:nvSpPr>
+        <p:spPr>
+          <a:xfrm>
+            <a:off x="731520" y="969264"/>
+            <a:ext cx="10881360" cy="17780"/>
+          </a:xfrm>
+          <a:prstGeom prst="rect">
+            <a:avLst/>
+          </a:prstGeom>
+          <a:solidFill>
+            <a:srgbClr val="D5DEE7"/>
+          </a:solidFill>
+          <a:ln>
+            <a:noFill/>
+          </a:ln>
+          <a:effectLst/>
+        </p:spPr>
+        <p:style>
+          <a:lnRef idx="1">
+            <a:schemeClr val="accent1"/>
+          </a:lnRef>
+          <a:fillRef idx="3">
+            <a:schemeClr val="accent1"/>
+          </a:fillRef>
+          <a:effectRef idx="2">
+            <a:schemeClr val="accent1"/>
+          </a:effectRef>
+          <a:fontRef idx="minor">
+            <a:schemeClr val="lt1"/>
+          </a:fontRef>
+        </p:style>
+        <p:txBody>
+          <a:bodyPr rtlCol="0" anchor="ctr"/>
+          <a:lstStyle/>
+          <a:p>
+            <a:pPr algn="ctr"/>
+          </a:p>
+        </p:txBody>
+      </p:sp>
+      <p:sp>
+        <p:nvSpPr>
+          <p:cNvPr id="6" name="Rounded Rectangle 5"/>
+          <p:cNvSpPr/>
+          <p:nvPr/>
+        </p:nvSpPr>
+        <p:spPr>
+          <a:xfrm>
+            <a:off x="11194999" y="365760"/>
+            <a:ext cx="493776" cy="347472"/>
+          </a:xfrm>
+          <a:prstGeom prst="roundRect">
+            <a:avLst>
+              <a:gd name="adj" fmla="val 8000"/>
+            </a:avLst>
+          </a:prstGeom>
+          <a:solidFill>
+            <a:srgbClr val="2C898A"/>
+          </a:solidFill>
+          <a:ln>
+            <a:noFill/>
+          </a:ln>
+          <a:effectLst/>
+        </p:spPr>
+        <p:style>
+          <a:lnRef idx="1">
+            <a:schemeClr val="accent1"/>
+          </a:lnRef>
+          <a:fillRef idx="3">
+            <a:schemeClr val="accent1"/>
+          </a:fillRef>
+          <a:effectRef idx="2">
+            <a:schemeClr val="accent1"/>
+          </a:effectRef>
+          <a:fontRef idx="minor">
+            <a:schemeClr val="lt1"/>
+          </a:fontRef>
+        </p:style>
+        <p:txBody>
+          <a:bodyPr rtlCol="0" anchor="ctr"/>
+          <a:lstStyle/>
+          <a:p>
+            <a:pPr algn="ctr"/>
+          </a:p>
+        </p:txBody>
+      </p:sp>
+      <p:sp>
+        <p:nvSpPr>
+          <p:cNvPr id="7" name="TextBox 6"/>
+          <p:cNvSpPr txBox="1"/>
+          <p:nvPr/>
+        </p:nvSpPr>
+        <p:spPr>
+          <a:xfrm>
+            <a:off x="11194999" y="365760"/>
+            <a:ext cx="493776" cy="347472"/>
+          </a:xfrm>
+          <a:prstGeom prst="rect">
+            <a:avLst/>
+          </a:prstGeom>
+          <a:noFill/>
+        </p:spPr>
+        <p:txBody>
+          <a:bodyPr wrap="square" anchor="ctr" lIns="0" rIns="0" tIns="0" bIns="0">
+            <a:spAutoFit/>
+          </a:bodyPr>
+          <a:lstStyle/>
+          <a:p>
+            <a:pPr algn="ctr">
+              <a:lnSpc>
+                <a:spcPct val="108000"/>
+              </a:lnSpc>
+              <a:spcAft>
+                <a:spcPts val="400"/>
+              </a:spcAft>
+            </a:pPr>
+            <a:r>
+              <a:rPr sz="1150" b="1" i="0">
+                <a:solidFill>
+                  <a:srgbClr val="FFFFFF"/>
+                </a:solidFill>
+                <a:latin typeface="NanumGothic"/>
+                <a:ea typeface="NanumGothic"/>
+              </a:rPr>
+              <a:t>배경</a:t>
+            </a:r>
+          </a:p>
+        </p:txBody>
+      </p:sp>
+      <p:sp>
+        <p:nvSpPr>
+          <p:cNvPr id="8" name="TextBox 7"/>
+          <p:cNvSpPr txBox="1"/>
+          <p:nvPr/>
+        </p:nvSpPr>
+        <p:spPr>
+          <a:xfrm>
+            <a:off x="731520" y="1371600"/>
+            <a:ext cx="10835640" cy="4754880"/>
+          </a:xfrm>
+          <a:prstGeom prst="rect">
+            <a:avLst/>
+          </a:prstGeom>
+          <a:noFill/>
+        </p:spPr>
+        <p:txBody>
+          <a:bodyPr wrap="square" lIns="0" rIns="0" tIns="0" bIns="0">
+            <a:spAutoFit/>
+          </a:bodyPr>
+          <a:lstStyle/>
+          <a:p>
+            <a:pPr algn="l">
+              <a:lnSpc>
+                <a:spcPct val="108000"/>
+              </a:lnSpc>
+              <a:spcAft>
+                <a:spcPts val="900"/>
+              </a:spcAft>
+            </a:pPr>
+            <a:r>
+              <a:rPr sz="1050" b="1" i="0">
+                <a:solidFill>
+                  <a:srgbClr val="2C898A"/>
+                </a:solidFill>
+                <a:latin typeface="NanumGothic"/>
+                <a:ea typeface="NanumGothic"/>
+              </a:rPr>
+              <a:t>●  </a:t>
+            </a:r>
+            <a:r>
+              <a:rPr sz="1500" b="1" i="0">
+                <a:solidFill>
+                  <a:srgbClr val="1A202C"/>
+                </a:solidFill>
+                <a:latin typeface="NanumGothic"/>
+                <a:ea typeface="NanumGothic"/>
+              </a:rPr>
+              <a:t>LSB와 교감신경 신경파괴(sympatholysis)는 70년 이상 다양한 하지 통증·허혈 질환에 사용.</a:t>
+            </a:r>
+          </a:p>
+          <a:p>
+            <a:pPr algn="l">
+              <a:lnSpc>
+                <a:spcPct val="108000"/>
+              </a:lnSpc>
+              <a:spcAft>
+                <a:spcPts val="900"/>
+              </a:spcAft>
+            </a:pPr>
+            <a:r>
+              <a:rPr sz="1050" b="1" i="0">
+                <a:solidFill>
+                  <a:srgbClr val="2C898A"/>
+                </a:solidFill>
+                <a:latin typeface="NanumGothic"/>
+                <a:ea typeface="NanumGothic"/>
+              </a:rPr>
+              <a:t>●  </a:t>
+            </a:r>
+            <a:r>
+              <a:rPr sz="1500" b="0" i="0">
+                <a:solidFill>
+                  <a:srgbClr val="1A202C"/>
+                </a:solidFill>
+                <a:latin typeface="NanumGothic"/>
+                <a:ea typeface="NanumGothic"/>
+              </a:rPr>
+              <a:t>표적: 신경절 밀도가 가장 높은 L2–L3(보통 'L2 하 1/3 ~ L3 상 1/3'), 척추체 전외측. 일부 L2/L3/L4 다분절.</a:t>
+            </a:r>
+          </a:p>
+          <a:p>
+            <a:pPr algn="l">
+              <a:lnSpc>
+                <a:spcPct val="108000"/>
+              </a:lnSpc>
+              <a:spcAft>
+                <a:spcPts val="900"/>
+              </a:spcAft>
+            </a:pPr>
+            <a:r>
+              <a:rPr sz="1050" b="1" i="0">
+                <a:solidFill>
+                  <a:srgbClr val="2C898A"/>
+                </a:solidFill>
+                <a:latin typeface="NanumGothic"/>
+                <a:ea typeface="NanumGothic"/>
+              </a:rPr>
+              <a:t>●  </a:t>
+            </a:r>
+            <a:r>
+              <a:rPr sz="1500" b="0" i="0">
+                <a:solidFill>
+                  <a:srgbClr val="1A202C"/>
+                </a:solidFill>
+                <a:latin typeface="NanumGothic"/>
+                <a:ea typeface="NanumGothic"/>
+              </a:rPr>
+              <a:t>원리 ①: 교감신경 차단 → 혈관 확장·측부순환 증가 → 조직 산소화 개선.</a:t>
+            </a:r>
+          </a:p>
+          <a:p>
+            <a:pPr algn="l">
+              <a:lnSpc>
+                <a:spcPct val="108000"/>
+              </a:lnSpc>
+              <a:spcAft>
+                <a:spcPts val="900"/>
+              </a:spcAft>
+            </a:pPr>
+            <a:r>
+              <a:rPr sz="1050" b="1" i="0">
+                <a:solidFill>
+                  <a:srgbClr val="2C898A"/>
+                </a:solidFill>
+                <a:latin typeface="NanumGothic"/>
+                <a:ea typeface="NanumGothic"/>
+              </a:rPr>
+              <a:t>●  </a:t>
+            </a:r>
+            <a:r>
+              <a:rPr sz="1500" b="0" i="0">
+                <a:solidFill>
+                  <a:srgbClr val="1A202C"/>
+                </a:solidFill>
+                <a:latin typeface="NanumGothic"/>
+                <a:ea typeface="NanumGothic"/>
+              </a:rPr>
+              <a:t>원리 ②: 교감신경 매개 통증(sympathetically-maintained pain) 경로 및 자율신경 동반 침해 구심로 차단.</a:t>
+            </a:r>
+          </a:p>
+          <a:p>
+            <a:pPr algn="l">
+              <a:lnSpc>
+                <a:spcPct val="108000"/>
+              </a:lnSpc>
+              <a:spcAft>
+                <a:spcPts val="900"/>
+              </a:spcAft>
+            </a:pPr>
+            <a:r>
+              <a:rPr sz="1500" b="1" i="0">
+                <a:solidFill>
+                  <a:srgbClr val="5A6B7B"/>
+                </a:solidFill>
+                <a:latin typeface="NanumGothic"/>
+                <a:ea typeface="NanumGothic"/>
+              </a:rPr>
+              <a:t/>
+            </a:r>
+            <a:r>
+              <a:rPr sz="1500" b="1" i="0">
+                <a:solidFill>
+                  <a:srgbClr val="1F6E70"/>
+                </a:solidFill>
+                <a:latin typeface="NanumGothic"/>
+                <a:ea typeface="NanumGothic"/>
+              </a:rPr>
+              <a:t>국소마취제 차단(진단적/치료적)과 화학적/열적 신경파괴로 나뉜다.</a:t>
+            </a:r>
+          </a:p>
+        </p:txBody>
+      </p:sp>
+      <p:sp>
+        <p:nvSpPr>
+          <p:cNvPr id="9" name="TextBox 8"/>
+          <p:cNvSpPr txBox="1"/>
+          <p:nvPr/>
+        </p:nvSpPr>
+        <p:spPr>
+          <a:xfrm>
+            <a:off x="731520" y="6455664"/>
+            <a:ext cx="9875520" cy="292608"/>
+          </a:xfrm>
+          <a:prstGeom prst="rect">
+            <a:avLst/>
+          </a:prstGeom>
+          <a:noFill/>
+        </p:spPr>
+        <p:txBody>
+          <a:bodyPr wrap="square" anchor="ctr" lIns="0" rIns="0" tIns="0" bIns="0">
+            <a:spAutoFit/>
+          </a:bodyPr>
+          <a:lstStyle/>
+          <a:p>
+            <a:pPr algn="l">
+              <a:lnSpc>
+                <a:spcPct val="108000"/>
+              </a:lnSpc>
+              <a:spcAft>
+                <a:spcPts val="400"/>
+              </a:spcAft>
+            </a:pPr>
+            <a:r>
+              <a:rPr sz="900" b="0" i="0">
+                <a:solidFill>
+                  <a:srgbClr val="5A6B7B"/>
+                </a:solidFill>
+                <a:latin typeface="NanumGothic"/>
+                <a:ea typeface="NanumGothic"/>
+              </a:rPr>
+              <a:t>근거: StatPearls NBK431107; Zhang 2022(Ibrain)</a:t>
+            </a:r>
+          </a:p>
+        </p:txBody>
+      </p:sp>
+      <p:sp>
+        <p:nvSpPr>
+          <p:cNvPr id="10" name="TextBox 9"/>
+          <p:cNvSpPr txBox="1"/>
+          <p:nvPr/>
+        </p:nvSpPr>
+        <p:spPr>
+          <a:xfrm>
+            <a:off x="11064240" y="6455664"/>
+            <a:ext cx="822960" cy="292608"/>
+          </a:xfrm>
+          <a:prstGeom prst="rect">
+            <a:avLst/>
+          </a:prstGeom>
+          <a:noFill/>
+        </p:spPr>
+        <p:txBody>
+          <a:bodyPr wrap="square" anchor="ctr" lIns="0" rIns="0" tIns="0" bIns="0">
+            <a:spAutoFit/>
+          </a:bodyPr>
+          <a:lstStyle/>
+          <a:p>
+            <a:pPr algn="r">
+              <a:lnSpc>
+                <a:spcPct val="108000"/>
+              </a:lnSpc>
+              <a:spcAft>
+                <a:spcPts val="400"/>
+              </a:spcAft>
+            </a:pPr>
+            <a:r>
+              <a:rPr sz="1000" b="1" i="0">
+                <a:solidFill>
+                  <a:srgbClr val="5A6B7B"/>
+                </a:solidFill>
+                <a:latin typeface="NanumGothic"/>
+                <a:ea typeface="NanumGothic"/>
+              </a:rPr>
+              <a:t>3</a:t>
+            </a:r>
+          </a:p>
+        </p:txBody>
+      </p:sp>
+    </p:spTree>
+  </p:cSld>
+  <p:clrMapOvr>
+    <a:masterClrMapping/>
+  </p:clrMapOvr>
+</p:sld>
+</file>
+
+<file path=ppt/slides/slide4.xml><?xml version="1.0" encoding="utf-8"?>
+<p:sld xmlns:a="http://schemas.openxmlformats.org/drawingml/2006/main" xmlns:p="http://schemas.openxmlformats.org/presentationml/2006/main" xmlns:r="http://schemas.openxmlformats.org/officeDocument/2006/relationships">
+  <p:cSld>
+    <p:spTree>
+      <p:nvGrpSpPr>
+        <p:cNvPr id="1" name=""/>
+        <p:cNvGrpSpPr/>
+        <p:nvPr/>
+      </p:nvGrpSpPr>
+      <p:grpSpPr/>
+      <p:sp>
+        <p:nvSpPr>
+          <p:cNvPr id="2" name="Rectangle 1"/>
+          <p:cNvSpPr/>
+          <p:nvPr/>
+        </p:nvSpPr>
+        <p:spPr>
+          <a:xfrm>
+            <a:off x="502920" y="310896"/>
+            <a:ext cx="109728" cy="457200"/>
+          </a:xfrm>
+          <a:prstGeom prst="rect">
+            <a:avLst/>
+          </a:prstGeom>
+          <a:solidFill>
+            <a:srgbClr val="2C898A"/>
+          </a:solidFill>
+          <a:ln>
+            <a:noFill/>
+          </a:ln>
+          <a:effectLst/>
+        </p:spPr>
+        <p:style>
+          <a:lnRef idx="1">
+            <a:schemeClr val="accent1"/>
+          </a:lnRef>
+          <a:fillRef idx="3">
+            <a:schemeClr val="accent1"/>
+          </a:fillRef>
+          <a:effectRef idx="2">
+            <a:schemeClr val="accent1"/>
+          </a:effectRef>
+          <a:fontRef idx="minor">
+            <a:schemeClr val="lt1"/>
+          </a:fontRef>
+        </p:style>
+        <p:txBody>
+          <a:bodyPr rtlCol="0" anchor="ctr"/>
+          <a:lstStyle/>
+          <a:p>
+            <a:pPr algn="ctr"/>
+          </a:p>
+        </p:txBody>
+      </p:sp>
+      <p:sp>
+        <p:nvSpPr>
+          <p:cNvPr id="3" name="TextBox 2"/>
+          <p:cNvSpPr txBox="1"/>
+          <p:nvPr/>
+        </p:nvSpPr>
+        <p:spPr>
+          <a:xfrm>
+            <a:off x="731520" y="237744"/>
+            <a:ext cx="9509760" cy="685800"/>
+          </a:xfrm>
+          <a:prstGeom prst="rect">
+            <a:avLst/>
+          </a:prstGeom>
+          <a:noFill/>
+        </p:spPr>
+        <p:txBody>
+          <a:bodyPr wrap="square" anchor="ctr" lIns="0" rIns="0" tIns="0" bIns="0">
+            <a:spAutoFit/>
+          </a:bodyPr>
+          <a:lstStyle/>
+          <a:p>
+            <a:pPr algn="l">
+              <a:lnSpc>
+                <a:spcPct val="108000"/>
+              </a:lnSpc>
+              <a:spcAft>
+                <a:spcPts val="400"/>
+              </a:spcAft>
+            </a:pPr>
+            <a:r>
+              <a:rPr sz="2400" b="1" i="0">
+                <a:solidFill>
+                  <a:srgbClr val="1B355E"/>
+                </a:solidFill>
+                <a:latin typeface="NanumGothic"/>
+                <a:ea typeface="NanumGothic"/>
+              </a:rPr>
               <a:t>방법 (Technique)</a:t>
             </a:r>
           </a:p>
@@ -6794,7 +8861,7 @@
                 <a:latin typeface="NanumGothic"/>
                 <a:ea typeface="NanumGothic"/>
               </a:rPr>
-              <a:t>3</a:t>
+              <a:t>4</a:t>
             </a:r>
           </a:p>
         </p:txBody>
@@ -6807,7 +8874,7 @@
 </p:sld>
 </file>
 
-<file path=ppt/slides/slide4.xml><?xml version="1.0" encoding="utf-8"?>
+<file path=ppt/slides/slide5.xml><?xml version="1.0" encoding="utf-8"?>
 <p:sld xmlns:a="http://schemas.openxmlformats.org/drawingml/2006/main" xmlns:p="http://schemas.openxmlformats.org/presentationml/2006/main" xmlns:r="http://schemas.openxmlformats.org/officeDocument/2006/relationships">
   <p:cSld>
     <p:spTree>
@@ -7480,606 +9547,6 @@
                 <a:latin typeface="NanumGothic"/>
                 <a:ea typeface="NanumGothic"/>
               </a:rPr>
-              <a:t>4</a:t>
-            </a:r>
-          </a:p>
-        </p:txBody>
-      </p:sp>
-    </p:spTree>
-  </p:cSld>
-  <p:clrMapOvr>
-    <a:masterClrMapping/>
-  </p:clrMapOvr>
-</p:sld>
-</file>
-
-<file path=ppt/slides/slide5.xml><?xml version="1.0" encoding="utf-8"?>
-<p:sld xmlns:a="http://schemas.openxmlformats.org/drawingml/2006/main" xmlns:p="http://schemas.openxmlformats.org/presentationml/2006/main" xmlns:r="http://schemas.openxmlformats.org/officeDocument/2006/relationships">
-  <p:cSld>
-    <p:spTree>
-      <p:nvGrpSpPr>
-        <p:cNvPr id="1" name=""/>
-        <p:cNvGrpSpPr/>
-        <p:nvPr/>
-      </p:nvGrpSpPr>
-      <p:grpSpPr/>
-      <p:sp>
-        <p:nvSpPr>
-          <p:cNvPr id="2" name="Rectangle 1"/>
-          <p:cNvSpPr/>
-          <p:nvPr/>
-        </p:nvSpPr>
-        <p:spPr>
-          <a:xfrm>
-            <a:off x="502920" y="310896"/>
-            <a:ext cx="109728" cy="457200"/>
-          </a:xfrm>
-          <a:prstGeom prst="rect">
-            <a:avLst/>
-          </a:prstGeom>
-          <a:solidFill>
-            <a:srgbClr val="2C898A"/>
-          </a:solidFill>
-          <a:ln>
-            <a:noFill/>
-          </a:ln>
-          <a:effectLst/>
-        </p:spPr>
-        <p:style>
-          <a:lnRef idx="1">
-            <a:schemeClr val="accent1"/>
-          </a:lnRef>
-          <a:fillRef idx="3">
-            <a:schemeClr val="accent1"/>
-          </a:fillRef>
-          <a:effectRef idx="2">
-            <a:schemeClr val="accent1"/>
-          </a:effectRef>
-          <a:fontRef idx="minor">
-            <a:schemeClr val="lt1"/>
-          </a:fontRef>
-        </p:style>
-        <p:txBody>
-          <a:bodyPr rtlCol="0" anchor="ctr"/>
-          <a:lstStyle/>
-          <a:p>
-            <a:pPr algn="ctr"/>
-          </a:p>
-        </p:txBody>
-      </p:sp>
-      <p:sp>
-        <p:nvSpPr>
-          <p:cNvPr id="3" name="TextBox 2"/>
-          <p:cNvSpPr txBox="1"/>
-          <p:nvPr/>
-        </p:nvSpPr>
-        <p:spPr>
-          <a:xfrm>
-            <a:off x="731520" y="237744"/>
-            <a:ext cx="9509760" cy="685800"/>
-          </a:xfrm>
-          <a:prstGeom prst="rect">
-            <a:avLst/>
-          </a:prstGeom>
-          <a:noFill/>
-        </p:spPr>
-        <p:txBody>
-          <a:bodyPr wrap="square" anchor="ctr" lIns="0" rIns="0" tIns="0" bIns="0">
-            <a:spAutoFit/>
-          </a:bodyPr>
-          <a:lstStyle/>
-          <a:p>
-            <a:pPr algn="l">
-              <a:lnSpc>
-                <a:spcPct val="108000"/>
-              </a:lnSpc>
-              <a:spcAft>
-                <a:spcPts val="400"/>
-              </a:spcAft>
-            </a:pPr>
-            <a:r>
-              <a:rPr sz="2400" b="1" i="0">
-                <a:solidFill>
-                  <a:srgbClr val="1B355E"/>
-                </a:solidFill>
-                <a:latin typeface="NanumGothic"/>
-                <a:ea typeface="NanumGothic"/>
-              </a:rPr>
-              <a:t>적응증별 환자 증상·호소 ① — 통증증후군·허혈</a:t>
-            </a:r>
-          </a:p>
-        </p:txBody>
-      </p:sp>
-      <p:sp>
-        <p:nvSpPr>
-          <p:cNvPr id="4" name="TextBox 3"/>
-          <p:cNvSpPr txBox="1"/>
-          <p:nvPr/>
-        </p:nvSpPr>
-        <p:spPr>
-          <a:xfrm>
-            <a:off x="749808" y="109728"/>
-            <a:ext cx="7315200" cy="219456"/>
-          </a:xfrm>
-          <a:prstGeom prst="rect">
-            <a:avLst/>
-          </a:prstGeom>
-          <a:noFill/>
-        </p:spPr>
-        <p:txBody>
-          <a:bodyPr wrap="square" anchor="t" lIns="0" rIns="0" tIns="0" bIns="0">
-            <a:spAutoFit/>
-          </a:bodyPr>
-          <a:lstStyle/>
-          <a:p>
-            <a:pPr algn="l">
-              <a:lnSpc>
-                <a:spcPct val="108000"/>
-              </a:lnSpc>
-              <a:spcAft>
-                <a:spcPts val="400"/>
-              </a:spcAft>
-            </a:pPr>
-            <a:r>
-              <a:rPr sz="1100" b="1" i="0">
-                <a:solidFill>
-                  <a:srgbClr val="1F6E70"/>
-                </a:solidFill>
-                <a:latin typeface="NanumGothic"/>
-                <a:ea typeface="NanumGothic"/>
-              </a:rPr>
-              <a:t>적응증 · 증상</a:t>
-            </a:r>
-          </a:p>
-        </p:txBody>
-      </p:sp>
-      <p:sp>
-        <p:nvSpPr>
-          <p:cNvPr id="5" name="Rectangle 4"/>
-          <p:cNvSpPr/>
-          <p:nvPr/>
-        </p:nvSpPr>
-        <p:spPr>
-          <a:xfrm>
-            <a:off x="731520" y="969264"/>
-            <a:ext cx="10881360" cy="17780"/>
-          </a:xfrm>
-          <a:prstGeom prst="rect">
-            <a:avLst/>
-          </a:prstGeom>
-          <a:solidFill>
-            <a:srgbClr val="D5DEE7"/>
-          </a:solidFill>
-          <a:ln>
-            <a:noFill/>
-          </a:ln>
-          <a:effectLst/>
-        </p:spPr>
-        <p:style>
-          <a:lnRef idx="1">
-            <a:schemeClr val="accent1"/>
-          </a:lnRef>
-          <a:fillRef idx="3">
-            <a:schemeClr val="accent1"/>
-          </a:fillRef>
-          <a:effectRef idx="2">
-            <a:schemeClr val="accent1"/>
-          </a:effectRef>
-          <a:fontRef idx="minor">
-            <a:schemeClr val="lt1"/>
-          </a:fontRef>
-        </p:style>
-        <p:txBody>
-          <a:bodyPr rtlCol="0" anchor="ctr"/>
-          <a:lstStyle/>
-          <a:p>
-            <a:pPr algn="ctr"/>
-          </a:p>
-        </p:txBody>
-      </p:sp>
-      <p:sp>
-        <p:nvSpPr>
-          <p:cNvPr id="6" name="Rounded Rectangle 5"/>
-          <p:cNvSpPr/>
-          <p:nvPr/>
-        </p:nvSpPr>
-        <p:spPr>
-          <a:xfrm>
-            <a:off x="10865816" y="365760"/>
-            <a:ext cx="822959" cy="347472"/>
-          </a:xfrm>
-          <a:prstGeom prst="roundRect">
-            <a:avLst>
-              <a:gd name="adj" fmla="val 8000"/>
-            </a:avLst>
-          </a:prstGeom>
-          <a:solidFill>
-            <a:srgbClr val="2C898A"/>
-          </a:solidFill>
-          <a:ln>
-            <a:noFill/>
-          </a:ln>
-          <a:effectLst/>
-        </p:spPr>
-        <p:style>
-          <a:lnRef idx="1">
-            <a:schemeClr val="accent1"/>
-          </a:lnRef>
-          <a:fillRef idx="3">
-            <a:schemeClr val="accent1"/>
-          </a:fillRef>
-          <a:effectRef idx="2">
-            <a:schemeClr val="accent1"/>
-          </a:effectRef>
-          <a:fontRef idx="minor">
-            <a:schemeClr val="lt1"/>
-          </a:fontRef>
-        </p:style>
-        <p:txBody>
-          <a:bodyPr rtlCol="0" anchor="ctr"/>
-          <a:lstStyle/>
-          <a:p>
-            <a:pPr algn="ctr"/>
-          </a:p>
-        </p:txBody>
-      </p:sp>
-      <p:sp>
-        <p:nvSpPr>
-          <p:cNvPr id="7" name="TextBox 6"/>
-          <p:cNvSpPr txBox="1"/>
-          <p:nvPr/>
-        </p:nvSpPr>
-        <p:spPr>
-          <a:xfrm>
-            <a:off x="10865816" y="365760"/>
-            <a:ext cx="822959" cy="347472"/>
-          </a:xfrm>
-          <a:prstGeom prst="rect">
-            <a:avLst/>
-          </a:prstGeom>
-          <a:noFill/>
-        </p:spPr>
-        <p:txBody>
-          <a:bodyPr wrap="square" anchor="ctr" lIns="0" rIns="0" tIns="0" bIns="0">
-            <a:spAutoFit/>
-          </a:bodyPr>
-          <a:lstStyle/>
-          <a:p>
-            <a:pPr algn="ctr">
-              <a:lnSpc>
-                <a:spcPct val="108000"/>
-              </a:lnSpc>
-              <a:spcAft>
-                <a:spcPts val="400"/>
-              </a:spcAft>
-            </a:pPr>
-            <a:r>
-              <a:rPr sz="1150" b="1" i="0">
-                <a:solidFill>
-                  <a:srgbClr val="FFFFFF"/>
-                </a:solidFill>
-                <a:latin typeface="NanumGothic"/>
-                <a:ea typeface="NanumGothic"/>
-              </a:rPr>
-              <a:t>환자 증상</a:t>
-            </a:r>
-          </a:p>
-        </p:txBody>
-      </p:sp>
-      <p:sp>
-        <p:nvSpPr>
-          <p:cNvPr id="8" name="TextBox 7"/>
-          <p:cNvSpPr txBox="1"/>
-          <p:nvPr/>
-        </p:nvSpPr>
-        <p:spPr>
-          <a:xfrm>
-            <a:off x="731520" y="1371600"/>
-            <a:ext cx="10835640" cy="4754880"/>
-          </a:xfrm>
-          <a:prstGeom prst="rect">
-            <a:avLst/>
-          </a:prstGeom>
-          <a:noFill/>
-        </p:spPr>
-        <p:txBody>
-          <a:bodyPr wrap="square" lIns="0" rIns="0" tIns="0" bIns="0">
-            <a:spAutoFit/>
-          </a:bodyPr>
-          <a:lstStyle/>
-          <a:p>
-            <a:pPr algn="l">
-              <a:lnSpc>
-                <a:spcPct val="108000"/>
-              </a:lnSpc>
-              <a:spcAft>
-                <a:spcPts val="600"/>
-              </a:spcAft>
-            </a:pPr>
-            <a:r>
-              <a:rPr sz="979" b="1" i="0">
-                <a:solidFill>
-                  <a:srgbClr val="2C898A"/>
-                </a:solidFill>
-                <a:latin typeface="NanumGothic"/>
-                <a:ea typeface="NanumGothic"/>
-              </a:rPr>
-              <a:t>●  </a:t>
-            </a:r>
-            <a:r>
-              <a:rPr sz="1400" b="1" i="0">
-                <a:solidFill>
-                  <a:srgbClr val="1A202C"/>
-                </a:solidFill>
-                <a:latin typeface="NanumGothic"/>
-                <a:ea typeface="NanumGothic"/>
-              </a:rPr>
-              <a:t>하지 CRPS I/II (복합부위통증증후군) — 교감신경 매개 통증의 전형</a:t>
-            </a:r>
-          </a:p>
-          <a:p>
-            <a:pPr algn="l">
-              <a:lnSpc>
-                <a:spcPct val="108000"/>
-              </a:lnSpc>
-              <a:spcAft>
-                <a:spcPts val="600"/>
-              </a:spcAft>
-            </a:pPr>
-            <a:r>
-              <a:rPr sz="1400" b="1" i="0">
-                <a:solidFill>
-                  <a:srgbClr val="5A6B7B"/>
-                </a:solidFill>
-                <a:latin typeface="NanumGothic"/>
-                <a:ea typeface="NanumGothic"/>
-              </a:rPr>
-              <a:t>      –  </a:t>
-            </a:r>
-            <a:r>
-              <a:rPr sz="1400" b="0" i="0">
-                <a:solidFill>
-                  <a:srgbClr val="1A202C"/>
-                </a:solidFill>
-                <a:latin typeface="NanumGothic"/>
-                <a:ea typeface="NanumGothic"/>
-              </a:rPr>
-              <a:t>작열통·이질통(옷·바람 스침에도 통증)·통각과민 · 부종 · 피부색(발적↔창백)·좌우 온도차 · 발한 이상</a:t>
-            </a:r>
-          </a:p>
-          <a:p>
-            <a:pPr algn="l">
-              <a:lnSpc>
-                <a:spcPct val="108000"/>
-              </a:lnSpc>
-              <a:spcAft>
-                <a:spcPts val="600"/>
-              </a:spcAft>
-            </a:pPr>
-            <a:r>
-              <a:rPr sz="1400" b="1" i="0">
-                <a:solidFill>
-                  <a:srgbClr val="5A6B7B"/>
-                </a:solidFill>
-                <a:latin typeface="NanumGothic"/>
-                <a:ea typeface="NanumGothic"/>
-              </a:rPr>
-              <a:t>      –  </a:t>
-            </a:r>
-            <a:r>
-              <a:rPr sz="1400" b="0" i="0">
-                <a:solidFill>
-                  <a:srgbClr val="5A6B7B"/>
-                </a:solidFill>
-                <a:latin typeface="NanumGothic"/>
-                <a:ea typeface="NanumGothic"/>
-              </a:rPr>
-              <a:t>호소: “발이 타는 듯 화끈거려요” · “이불만 스쳐도 아파요” · “붓고 색이 자꾸 변해요”</a:t>
-            </a:r>
-          </a:p>
-          <a:p>
-            <a:pPr algn="l">
-              <a:lnSpc>
-                <a:spcPct val="108000"/>
-              </a:lnSpc>
-              <a:spcAft>
-                <a:spcPts val="600"/>
-              </a:spcAft>
-            </a:pPr>
-            <a:r>
-              <a:rPr sz="979" b="1" i="0">
-                <a:solidFill>
-                  <a:srgbClr val="2C898A"/>
-                </a:solidFill>
-                <a:latin typeface="NanumGothic"/>
-                <a:ea typeface="NanumGothic"/>
-              </a:rPr>
-              <a:t>●  </a:t>
-            </a:r>
-            <a:r>
-              <a:rPr sz="1400" b="1" i="0">
-                <a:solidFill>
-                  <a:srgbClr val="2E7D32"/>
-                </a:solidFill>
-                <a:latin typeface="NanumGothic"/>
-                <a:ea typeface="NanumGothic"/>
-              </a:rPr>
-              <a:t>허혈질환 — PAD·중증 하지허혈(CLI)·버거병 (동맥성 허혈)</a:t>
-            </a:r>
-          </a:p>
-          <a:p>
-            <a:pPr algn="l">
-              <a:lnSpc>
-                <a:spcPct val="108000"/>
-              </a:lnSpc>
-              <a:spcAft>
-                <a:spcPts val="600"/>
-              </a:spcAft>
-            </a:pPr>
-            <a:r>
-              <a:rPr sz="1400" b="1" i="0">
-                <a:solidFill>
-                  <a:srgbClr val="5A6B7B"/>
-                </a:solidFill>
-                <a:latin typeface="NanumGothic"/>
-                <a:ea typeface="NanumGothic"/>
-              </a:rPr>
-              <a:t>      –  </a:t>
-            </a:r>
-            <a:r>
-              <a:rPr sz="1400" b="0" i="0">
-                <a:solidFill>
-                  <a:srgbClr val="1A202C"/>
-                </a:solidFill>
-                <a:latin typeface="NanumGothic"/>
-                <a:ea typeface="NanumGothic"/>
-              </a:rPr>
-              <a:t>간헐적 파행(걷다 종아리 통증→쉬면 완화) → 진행 시 야간 안정통(다리 내리면 완화) · 차고 창백한 발 · 비치유 궤양·괴저</a:t>
-            </a:r>
-          </a:p>
-          <a:p>
-            <a:pPr algn="l">
-              <a:lnSpc>
-                <a:spcPct val="108000"/>
-              </a:lnSpc>
-              <a:spcAft>
-                <a:spcPts val="600"/>
-              </a:spcAft>
-            </a:pPr>
-            <a:r>
-              <a:rPr sz="1400" b="1" i="0">
-                <a:solidFill>
-                  <a:srgbClr val="5A6B7B"/>
-                </a:solidFill>
-                <a:latin typeface="NanumGothic"/>
-                <a:ea typeface="NanumGothic"/>
-              </a:rPr>
-              <a:t>      –  </a:t>
-            </a:r>
-            <a:r>
-              <a:rPr sz="1400" b="0" i="0">
-                <a:solidFill>
-                  <a:srgbClr val="5A6B7B"/>
-                </a:solidFill>
-                <a:latin typeface="NanumGothic"/>
-                <a:ea typeface="NanumGothic"/>
-              </a:rPr>
-              <a:t>호소: “걸으면 종아리가 터질 듯 아파요” · “밤에 발이 시려 잠을 못 자요” · “상처가 안 아물어요”</a:t>
-            </a:r>
-          </a:p>
-          <a:p>
-            <a:pPr algn="l">
-              <a:lnSpc>
-                <a:spcPct val="108000"/>
-              </a:lnSpc>
-              <a:spcAft>
-                <a:spcPts val="600"/>
-              </a:spcAft>
-            </a:pPr>
-            <a:r>
-              <a:rPr sz="1400" b="1" i="0">
-                <a:solidFill>
-                  <a:srgbClr val="5A6B7B"/>
-                </a:solidFill>
-                <a:latin typeface="NanumGothic"/>
-                <a:ea typeface="NanumGothic"/>
-              </a:rPr>
-              <a:t/>
-            </a:r>
-            <a:r>
-              <a:rPr sz="1400" b="1" i="0">
-                <a:solidFill>
-                  <a:srgbClr val="1F6E70"/>
-                </a:solidFill>
-                <a:latin typeface="NanumGothic"/>
-                <a:ea typeface="NanumGothic"/>
-              </a:rPr>
-              <a:t>‘허혈’은 동맥성 부족을 의미 — 하지정맥류 등 정맥질환은 LSB 적응증 아님(압박·정맥폐색술이 표준).</a:t>
-            </a:r>
-          </a:p>
-        </p:txBody>
-      </p:sp>
-      <p:sp>
-        <p:nvSpPr>
-          <p:cNvPr id="9" name="TextBox 8"/>
-          <p:cNvSpPr txBox="1"/>
-          <p:nvPr/>
-        </p:nvSpPr>
-        <p:spPr>
-          <a:xfrm>
-            <a:off x="731520" y="6455664"/>
-            <a:ext cx="9875520" cy="292608"/>
-          </a:xfrm>
-          <a:prstGeom prst="rect">
-            <a:avLst/>
-          </a:prstGeom>
-          <a:noFill/>
-        </p:spPr>
-        <p:txBody>
-          <a:bodyPr wrap="square" anchor="ctr" lIns="0" rIns="0" tIns="0" bIns="0">
-            <a:spAutoFit/>
-          </a:bodyPr>
-          <a:lstStyle/>
-          <a:p>
-            <a:pPr algn="l">
-              <a:lnSpc>
-                <a:spcPct val="108000"/>
-              </a:lnSpc>
-              <a:spcAft>
-                <a:spcPts val="400"/>
-              </a:spcAft>
-            </a:pPr>
-            <a:r>
-              <a:rPr sz="900" b="0" i="0">
-                <a:solidFill>
-                  <a:srgbClr val="5A6B7B"/>
-                </a:solidFill>
-                <a:latin typeface="NanumGothic"/>
-                <a:ea typeface="NanumGothic"/>
-              </a:rPr>
-              <a:t>근거: StatPearls; 문헌고찰 종합</a:t>
-            </a:r>
-          </a:p>
-        </p:txBody>
-      </p:sp>
-      <p:sp>
-        <p:nvSpPr>
-          <p:cNvPr id="10" name="TextBox 9"/>
-          <p:cNvSpPr txBox="1"/>
-          <p:nvPr/>
-        </p:nvSpPr>
-        <p:spPr>
-          <a:xfrm>
-            <a:off x="11064240" y="6455664"/>
-            <a:ext cx="822960" cy="292608"/>
-          </a:xfrm>
-          <a:prstGeom prst="rect">
-            <a:avLst/>
-          </a:prstGeom>
-          <a:noFill/>
-        </p:spPr>
-        <p:txBody>
-          <a:bodyPr wrap="square" anchor="ctr" lIns="0" rIns="0" tIns="0" bIns="0">
-            <a:spAutoFit/>
-          </a:bodyPr>
-          <a:lstStyle/>
-          <a:p>
-            <a:pPr algn="r">
-              <a:lnSpc>
-                <a:spcPct val="108000"/>
-              </a:lnSpc>
-              <a:spcAft>
-                <a:spcPts val="400"/>
-              </a:spcAft>
-            </a:pPr>
-            <a:r>
-              <a:rPr sz="1000" b="1" i="0">
-                <a:solidFill>
-                  <a:srgbClr val="5A6B7B"/>
-                </a:solidFill>
-                <a:latin typeface="NanumGothic"/>
-                <a:ea typeface="NanumGothic"/>
-              </a:rPr>
               <a:t>5</a:t>
             </a:r>
           </a:p>
@@ -8185,7 +9652,7 @@
                 <a:latin typeface="NanumGothic"/>
                 <a:ea typeface="NanumGothic"/>
               </a:rPr>
-              <a:t>적응증별 환자 증상·호소 ② — 신경병증·기타</a:t>
+              <a:t>적응증별 환자 증상·호소 ① — 통증증후군·허혈</a:t>
             </a:r>
           </a:p>
         </p:txBody>
@@ -8414,7 +9881,7 @@
                 <a:latin typeface="NanumGothic"/>
                 <a:ea typeface="NanumGothic"/>
               </a:rPr>
-              <a:t>신경병증 — 당뇨병성 신경병증/당뇨발·대상포진후신경통·환상지통</a:t>
+              <a:t>하지 CRPS I/II (복합부위통증증후군) — 교감신경 매개 통증의 전형</a:t>
             </a:r>
           </a:p>
           <a:p>
@@ -8444,7 +9911,7 @@
                 <a:latin typeface="NanumGothic"/>
                 <a:ea typeface="NanumGothic"/>
               </a:rPr>
-              <a:t>저림·화끈거림·전기 오듯 찌름 · 이질통 · 감각저하(양말 신은 느낌) · 야간 악화 · 당뇨발 궤양·관류저하</a:t>
+              <a:t>작열통·이질통(옷·바람 스침에도 통증)·통각과민 · 부종 · 피부색(발적↔창백)·좌우 온도차 · 발한 이상</a:t>
             </a:r>
           </a:p>
           <a:p>
@@ -8474,7 +9941,7 @@
                 <a:latin typeface="NanumGothic"/>
                 <a:ea typeface="NanumGothic"/>
               </a:rPr>
-              <a:t>호소: “발이 저리고 화끈거려요” · “밤에 더 심해요” · “전기가 찌릿 오는 것 같아요”</a:t>
+              <a:t>호소: “발이 타는 듯 화끈거려요” · “이불만 스쳐도 아파요” · “붓고 색이 자꾸 변해요”</a:t>
             </a:r>
           </a:p>
           <a:p>
@@ -8499,12 +9966,42 @@
             <a:r>
               <a:rPr sz="1400" b="1" i="0">
                 <a:solidFill>
+                  <a:srgbClr val="2E7D32"/>
+                </a:solidFill>
+                <a:latin typeface="NanumGothic"/>
+                <a:ea typeface="NanumGothic"/>
+              </a:rPr>
+              <a:t>허혈질환 — PAD·중증 하지허혈(CLI)·버거병 (동맥성 허혈)</a:t>
+            </a:r>
+          </a:p>
+          <a:p>
+            <a:pPr algn="l">
+              <a:lnSpc>
+                <a:spcPct val="108000"/>
+              </a:lnSpc>
+              <a:spcAft>
+                <a:spcPts val="600"/>
+              </a:spcAft>
+            </a:pPr>
+            <a:r>
+              <a:rPr sz="1400" b="1" i="0">
+                <a:solidFill>
+                  <a:srgbClr val="5A6B7B"/>
+                </a:solidFill>
+                <a:latin typeface="NanumGothic"/>
+                <a:ea typeface="NanumGothic"/>
+              </a:rPr>
+              <a:t>      –  </a:t>
+            </a:r>
+            <a:r>
+              <a:rPr sz="1400" b="0" i="0">
+                <a:solidFill>
                   <a:srgbClr val="1A202C"/>
                 </a:solidFill>
                 <a:latin typeface="NanumGothic"/>
                 <a:ea typeface="NanumGothic"/>
               </a:rPr>
-              <a:t>기타 — 족부 다한증·레이노(하지)·홍색사지통증·암성 하지통</a:t>
+              <a:t>간헐적 파행(걷다 종아리 통증→쉬면 완화) → 진행 시 야간 안정통(다리 내리면 완화) · 차고 창백한 발 · 비치유 궤양·괴저</a:t>
             </a:r>
           </a:p>
           <a:p>
@@ -8529,12 +10026,12 @@
             <a:r>
               <a:rPr sz="1400" b="0" i="0">
                 <a:solidFill>
-                  <a:srgbClr val="1A202C"/>
-                </a:solidFill>
-                <a:latin typeface="NanumGothic"/>
-                <a:ea typeface="NanumGothic"/>
-              </a:rPr>
-              <a:t>다한증(과한 발땀·축축·악취) · 레이노(추위·스트레스에 창백→청색→발적 삼색변화·저림) · 홍색사지통증(발작적 발적·작열·열감, 열에 악화)</a:t>
+                  <a:srgbClr val="5A6B7B"/>
+                </a:solidFill>
+                <a:latin typeface="NanumGothic"/>
+                <a:ea typeface="NanumGothic"/>
+              </a:rPr>
+              <a:t>호소: “걸으면 종아리가 터질 듯 아파요” · “밤에 발이 시려 잠을 못 자요” · “상처가 안 아물어요”</a:t>
             </a:r>
           </a:p>
           <a:p>
@@ -8554,17 +10051,17 @@
                 <a:latin typeface="NanumGothic"/>
                 <a:ea typeface="NanumGothic"/>
               </a:rPr>
-              <a:t>      –  </a:t>
-            </a:r>
-            <a:r>
-              <a:rPr sz="1400" b="0" i="0">
-                <a:solidFill>
-                  <a:srgbClr val="5A6B7B"/>
-                </a:solidFill>
-                <a:latin typeface="NanumGothic"/>
-                <a:ea typeface="NanumGothic"/>
-              </a:rPr>
-              <a:t>호소: “발에 땀이 너무 많아요” · “추우면 발이 하얘졌다 파래져요” · “발이 화끈 달아올라요”</a:t>
+              <a:t/>
+            </a:r>
+            <a:r>
+              <a:rPr sz="1400" b="1" i="0">
+                <a:solidFill>
+                  <a:srgbClr val="1F6E70"/>
+                </a:solidFill>
+                <a:latin typeface="NanumGothic"/>
+                <a:ea typeface="NanumGothic"/>
+              </a:rPr>
+              <a:t>‘허혈’은 동맥성 부족을 의미 — 하지정맥류 등 정맥질환은 LSB 적응증 아님(압박·정맥폐색술이 표준).</a:t>
             </a:r>
           </a:p>
         </p:txBody>
@@ -8755,7 +10252,7 @@
                 <a:latin typeface="NanumGothic"/>
                 <a:ea typeface="NanumGothic"/>
               </a:rPr>
-              <a:t>밤에 저리고 화끈거리는 다리 — 당뇨병성 신경병증과 LSB</a:t>
+              <a:t>적응증별 환자 증상·호소 ② — 신경병증·기타</a:t>
             </a:r>
           </a:p>
         </p:txBody>
@@ -8798,7 +10295,7 @@
                 <a:latin typeface="NanumGothic"/>
                 <a:ea typeface="NanumGothic"/>
               </a:rPr>
-              <a:t>적응증 · 심화</a:t>
+              <a:t>적응증 · 증상</a:t>
             </a:r>
           </a:p>
         </p:txBody>
@@ -8855,8 +10352,8 @@
         </p:nvSpPr>
         <p:spPr>
           <a:xfrm>
-            <a:off x="10536631" y="365760"/>
-            <a:ext cx="1152144" cy="347472"/>
+            <a:off x="10865816" y="365760"/>
+            <a:ext cx="822959" cy="347472"/>
           </a:xfrm>
           <a:prstGeom prst="roundRect">
             <a:avLst>
@@ -8901,8 +10398,8 @@
         </p:nvSpPr>
         <p:spPr>
           <a:xfrm>
-            <a:off x="10536631" y="365760"/>
-            <a:ext cx="1152144" cy="347472"/>
+            <a:off x="10865816" y="365760"/>
+            <a:ext cx="822959" cy="347472"/>
           </a:xfrm>
           <a:prstGeom prst="rect">
             <a:avLst/>
@@ -8931,7 +10428,7 @@
                 <a:latin typeface="NanumGothic"/>
                 <a:ea typeface="NanumGothic"/>
               </a:rPr>
-              <a:t>야간 신경병증통</a:t>
+              <a:t>환자 증상</a:t>
             </a:r>
           </a:p>
         </p:txBody>
@@ -8945,7 +10442,7 @@
         <p:spPr>
           <a:xfrm>
             <a:off x="731520" y="1371600"/>
-            <a:ext cx="6400800" cy="4663440"/>
+            <a:ext cx="10835640" cy="4754880"/>
           </a:xfrm>
           <a:prstGeom prst="rect">
             <a:avLst/>
@@ -8963,7 +10460,7 @@
                 <a:spcPct val="108000"/>
               </a:lnSpc>
               <a:spcAft>
-                <a:spcPts val="800"/>
+                <a:spcPts val="600"/>
               </a:spcAft>
             </a:pPr>
             <a:r>
@@ -8984,16 +10481,76 @@
                 <a:latin typeface="NanumGothic"/>
                 <a:ea typeface="NanumGothic"/>
               </a:rPr>
-              <a:t>임상상: 당뇨병성 말초신경병증 — 발·종아리 저림·화끈거림·전기 찌름, 양측 ‘양말’ 분포.</a:t>
-            </a:r>
-          </a:p>
-          <a:p>
-            <a:pPr algn="l">
-              <a:lnSpc>
-                <a:spcPct val="108000"/>
-              </a:lnSpc>
-              <a:spcAft>
-                <a:spcPts val="800"/>
+              <a:t>신경병증 — 당뇨병성 신경병증/당뇨발·대상포진후신경통·환상지통</a:t>
+            </a:r>
+          </a:p>
+          <a:p>
+            <a:pPr algn="l">
+              <a:lnSpc>
+                <a:spcPct val="108000"/>
+              </a:lnSpc>
+              <a:spcAft>
+                <a:spcPts val="600"/>
+              </a:spcAft>
+            </a:pPr>
+            <a:r>
+              <a:rPr sz="1400" b="1" i="0">
+                <a:solidFill>
+                  <a:srgbClr val="5A6B7B"/>
+                </a:solidFill>
+                <a:latin typeface="NanumGothic"/>
+                <a:ea typeface="NanumGothic"/>
+              </a:rPr>
+              <a:t>      –  </a:t>
+            </a:r>
+            <a:r>
+              <a:rPr sz="1400" b="0" i="0">
+                <a:solidFill>
+                  <a:srgbClr val="1A202C"/>
+                </a:solidFill>
+                <a:latin typeface="NanumGothic"/>
+                <a:ea typeface="NanumGothic"/>
+              </a:rPr>
+              <a:t>저림·화끈거림·전기 오듯 찌름 · 이질통 · 감각저하(양말 신은 느낌) · 야간 악화 · 당뇨발 궤양·관류저하</a:t>
+            </a:r>
+          </a:p>
+          <a:p>
+            <a:pPr algn="l">
+              <a:lnSpc>
+                <a:spcPct val="108000"/>
+              </a:lnSpc>
+              <a:spcAft>
+                <a:spcPts val="600"/>
+              </a:spcAft>
+            </a:pPr>
+            <a:r>
+              <a:rPr sz="1400" b="1" i="0">
+                <a:solidFill>
+                  <a:srgbClr val="5A6B7B"/>
+                </a:solidFill>
+                <a:latin typeface="NanumGothic"/>
+                <a:ea typeface="NanumGothic"/>
+              </a:rPr>
+              <a:t>      –  </a:t>
+            </a:r>
+            <a:r>
+              <a:rPr sz="1400" b="0" i="0">
+                <a:solidFill>
+                  <a:srgbClr val="5A6B7B"/>
+                </a:solidFill>
+                <a:latin typeface="NanumGothic"/>
+                <a:ea typeface="NanumGothic"/>
+              </a:rPr>
+              <a:t>호소: “발이 저리고 화끈거려요” · “밤에 더 심해요” · “전기가 찌릿 오는 것 같아요”</a:t>
+            </a:r>
+          </a:p>
+          <a:p>
+            <a:pPr algn="l">
+              <a:lnSpc>
+                <a:spcPct val="108000"/>
+              </a:lnSpc>
+              <a:spcAft>
+                <a:spcPts val="600"/>
               </a:spcAft>
             </a:pPr>
             <a:r>
@@ -9007,6 +10564,36 @@
               <a:t>●  </a:t>
             </a:r>
             <a:r>
+              <a:rPr sz="1400" b="1" i="0">
+                <a:solidFill>
+                  <a:srgbClr val="1A202C"/>
+                </a:solidFill>
+                <a:latin typeface="NanumGothic"/>
+                <a:ea typeface="NanumGothic"/>
+              </a:rPr>
+              <a:t>기타 — 족부 다한증·레이노(하지)·홍색사지통증·암성 하지통</a:t>
+            </a:r>
+          </a:p>
+          <a:p>
+            <a:pPr algn="l">
+              <a:lnSpc>
+                <a:spcPct val="108000"/>
+              </a:lnSpc>
+              <a:spcAft>
+                <a:spcPts val="600"/>
+              </a:spcAft>
+            </a:pPr>
+            <a:r>
+              <a:rPr sz="1400" b="1" i="0">
+                <a:solidFill>
+                  <a:srgbClr val="5A6B7B"/>
+                </a:solidFill>
+                <a:latin typeface="NanumGothic"/>
+                <a:ea typeface="NanumGothic"/>
+              </a:rPr>
+              <a:t>      –  </a:t>
+            </a:r>
+            <a:r>
               <a:rPr sz="1400" b="0" i="0">
                 <a:solidFill>
                   <a:srgbClr val="1A202C"/>
@@ -9014,306 +10601,44 @@
                 <a:latin typeface="NanumGothic"/>
                 <a:ea typeface="NanumGothic"/>
               </a:rPr>
-              <a:t>야간통: 이불 온기·야간 순환·주의분산 소실 → 밤에 증폭·수면 방해.</a:t>
-            </a:r>
-          </a:p>
-          <a:p>
-            <a:pPr algn="l">
-              <a:lnSpc>
-                <a:spcPct val="108000"/>
-              </a:lnSpc>
-              <a:spcAft>
-                <a:spcPts val="800"/>
-              </a:spcAft>
-            </a:pPr>
-            <a:r>
-              <a:rPr sz="979" b="1" i="0">
-                <a:solidFill>
-                  <a:srgbClr val="2C898A"/>
-                </a:solidFill>
-                <a:latin typeface="NanumGothic"/>
-                <a:ea typeface="NanumGothic"/>
-              </a:rPr>
-              <a:t>●  </a:t>
+              <a:t>다한증(과한 발땀·축축·악취) · 레이노(추위·스트레스에 창백→청색→발적 삼색변화·저림) · 홍색사지통증(발작적 발적·작열·열감, 열에 악화)</a:t>
+            </a:r>
+          </a:p>
+          <a:p>
+            <a:pPr algn="l">
+              <a:lnSpc>
+                <a:spcPct val="108000"/>
+              </a:lnSpc>
+              <a:spcAft>
+                <a:spcPts val="600"/>
+              </a:spcAft>
+            </a:pPr>
+            <a:r>
+              <a:rPr sz="1400" b="1" i="0">
+                <a:solidFill>
+                  <a:srgbClr val="5A6B7B"/>
+                </a:solidFill>
+                <a:latin typeface="NanumGothic"/>
+                <a:ea typeface="NanumGothic"/>
+              </a:rPr>
+              <a:t>      –  </a:t>
             </a:r>
             <a:r>
               <a:rPr sz="1400" b="0" i="0">
                 <a:solidFill>
-                  <a:srgbClr val="1A202C"/>
-                </a:solidFill>
-                <a:latin typeface="NanumGothic"/>
-                <a:ea typeface="NanumGothic"/>
-              </a:rPr>
-              <a:t>먼저 감별: RLS(움직이면 완화)·NLC(경련)·허혈성 안정통과 구분.</a:t>
-            </a:r>
-          </a:p>
-          <a:p>
-            <a:pPr algn="l">
-              <a:lnSpc>
-                <a:spcPct val="108000"/>
-              </a:lnSpc>
-              <a:spcAft>
-                <a:spcPts val="800"/>
-              </a:spcAft>
-            </a:pPr>
-            <a:r>
-              <a:rPr sz="1400" b="1" i="0">
-                <a:solidFill>
                   <a:srgbClr val="5A6B7B"/>
                 </a:solidFill>
                 <a:latin typeface="NanumGothic"/>
                 <a:ea typeface="NanumGothic"/>
               </a:rPr>
-              <a:t/>
-            </a:r>
-            <a:r>
-              <a:rPr sz="1400" b="1" i="0">
-                <a:solidFill>
-                  <a:srgbClr val="1F6E70"/>
-                </a:solidFill>
-                <a:latin typeface="NanumGothic"/>
-                <a:ea typeface="NanumGothic"/>
-              </a:rPr>
-              <a:t>1차: 혈당조절+약물(가바펜틴·듀록세틴) → 난치성이면 LSB 고려</a:t>
-            </a:r>
-          </a:p>
-        </p:txBody>
-      </p:sp>
-      <p:sp>
-        <p:nvSpPr>
-          <p:cNvPr id="9" name="Rounded Rectangle 8"/>
-          <p:cNvSpPr/>
-          <p:nvPr/>
-        </p:nvSpPr>
-        <p:spPr>
-          <a:xfrm>
-            <a:off x="7406640" y="1463040"/>
-            <a:ext cx="4114800" cy="4480560"/>
-          </a:xfrm>
-          <a:prstGeom prst="roundRect">
-            <a:avLst>
-              <a:gd name="adj" fmla="val 8000"/>
-            </a:avLst>
-          </a:prstGeom>
-          <a:solidFill>
-            <a:srgbClr val="1B355E"/>
-          </a:solidFill>
-          <a:ln>
-            <a:noFill/>
-          </a:ln>
-          <a:effectLst/>
-        </p:spPr>
-        <p:style>
-          <a:lnRef idx="1">
-            <a:schemeClr val="accent1"/>
-          </a:lnRef>
-          <a:fillRef idx="3">
-            <a:schemeClr val="accent1"/>
-          </a:fillRef>
-          <a:effectRef idx="2">
-            <a:schemeClr val="accent1"/>
-          </a:effectRef>
-          <a:fontRef idx="minor">
-            <a:schemeClr val="lt1"/>
-          </a:fontRef>
-        </p:style>
-        <p:txBody>
-          <a:bodyPr rtlCol="0" anchor="ctr"/>
-          <a:lstStyle/>
-          <a:p>
-            <a:pPr algn="ctr"/>
-          </a:p>
-        </p:txBody>
-      </p:sp>
-      <p:sp>
-        <p:nvSpPr>
-          <p:cNvPr id="10" name="TextBox 9"/>
-          <p:cNvSpPr txBox="1"/>
-          <p:nvPr/>
-        </p:nvSpPr>
-        <p:spPr>
-          <a:xfrm>
-            <a:off x="7680960" y="1691640"/>
-            <a:ext cx="3657600" cy="365760"/>
-          </a:xfrm>
-          <a:prstGeom prst="rect">
-            <a:avLst/>
-          </a:prstGeom>
-          <a:noFill/>
-        </p:spPr>
-        <p:txBody>
-          <a:bodyPr wrap="square" anchor="t" lIns="0" rIns="0" tIns="0" bIns="0">
-            <a:spAutoFit/>
-          </a:bodyPr>
-          <a:lstStyle/>
-          <a:p>
-            <a:pPr algn="l">
-              <a:lnSpc>
-                <a:spcPct val="108000"/>
-              </a:lnSpc>
-              <a:spcAft>
-                <a:spcPts val="400"/>
-              </a:spcAft>
-            </a:pPr>
-            <a:r>
-              <a:rPr sz="1300" b="1" i="0">
-                <a:solidFill>
-                  <a:srgbClr val="BFD3E6"/>
-                </a:solidFill>
-                <a:latin typeface="NanumGothic"/>
-                <a:ea typeface="NanumGothic"/>
-              </a:rPr>
-              <a:t>LSB — 치료 삽입</a:t>
-            </a:r>
-          </a:p>
-        </p:txBody>
-      </p:sp>
-      <p:sp>
-        <p:nvSpPr>
-          <p:cNvPr id="11" name="TextBox 10"/>
-          <p:cNvSpPr txBox="1"/>
-          <p:nvPr/>
-        </p:nvSpPr>
-        <p:spPr>
-          <a:xfrm>
-            <a:off x="7680960" y="2194560"/>
-            <a:ext cx="3611880" cy="3657600"/>
-          </a:xfrm>
-          <a:prstGeom prst="rect">
-            <a:avLst/>
-          </a:prstGeom>
-          <a:noFill/>
-        </p:spPr>
-        <p:txBody>
-          <a:bodyPr wrap="square" lIns="0" rIns="0" tIns="0" bIns="0">
-            <a:spAutoFit/>
-          </a:bodyPr>
-          <a:lstStyle/>
-          <a:p>
-            <a:pPr algn="l">
-              <a:lnSpc>
-                <a:spcPct val="108000"/>
-              </a:lnSpc>
-              <a:spcAft>
-                <a:spcPts val="800"/>
-              </a:spcAft>
-            </a:pPr>
-            <a:r>
-              <a:rPr sz="875" b="1" i="0">
-                <a:solidFill>
-                  <a:srgbClr val="2C898A"/>
-                </a:solidFill>
-                <a:latin typeface="NanumGothic"/>
-                <a:ea typeface="NanumGothic"/>
-              </a:rPr>
-              <a:t>●  </a:t>
-            </a:r>
-            <a:r>
-              <a:rPr sz="1250" b="0" i="0">
-                <a:solidFill>
-                  <a:srgbClr val="FFFFFF"/>
-                </a:solidFill>
-                <a:latin typeface="NanumGothic"/>
-                <a:ea typeface="NanumGothic"/>
-              </a:rPr>
-              <a:t>기전: 교감차단 → 미세순환↑ + 교감매개통 차단</a:t>
-            </a:r>
-          </a:p>
-          <a:p>
-            <a:pPr algn="l">
-              <a:lnSpc>
-                <a:spcPct val="108000"/>
-              </a:lnSpc>
-              <a:spcAft>
-                <a:spcPts val="800"/>
-              </a:spcAft>
-            </a:pPr>
-            <a:r>
-              <a:rPr sz="875" b="1" i="0">
-                <a:solidFill>
-                  <a:srgbClr val="2C898A"/>
-                </a:solidFill>
-                <a:latin typeface="NanumGothic"/>
-                <a:ea typeface="NanumGothic"/>
-              </a:rPr>
-              <a:t>●  </a:t>
-            </a:r>
-            <a:r>
-              <a:rPr sz="1250" b="0" i="0">
-                <a:solidFill>
-                  <a:srgbClr val="FFFFFF"/>
-                </a:solidFill>
-                <a:latin typeface="NanumGothic"/>
-                <a:ea typeface="NanumGothic"/>
-              </a:rPr>
-              <a:t>근거: 난치성 DPN에 LSB+신경파괴 RCT·증례</a:t>
-            </a:r>
-          </a:p>
-          <a:p>
-            <a:pPr algn="l">
-              <a:lnSpc>
-                <a:spcPct val="108000"/>
-              </a:lnSpc>
-              <a:spcAft>
-                <a:spcPts val="800"/>
-              </a:spcAft>
-            </a:pPr>
-            <a:r>
-              <a:rPr sz="875" b="1" i="0">
-                <a:solidFill>
-                  <a:srgbClr val="2C898A"/>
-                </a:solidFill>
-                <a:latin typeface="NanumGothic"/>
-                <a:ea typeface="NanumGothic"/>
-              </a:rPr>
-              <a:t>●  </a:t>
-            </a:r>
-            <a:r>
-              <a:rPr sz="1250" b="0" i="0">
-                <a:solidFill>
-                  <a:srgbClr val="FFFFFF"/>
-                </a:solidFill>
-                <a:latin typeface="NanumGothic"/>
-                <a:ea typeface="NanumGothic"/>
-              </a:rPr>
-              <a:t>적용: 약물 불응·진단차단 양성 시 선택적 시행</a:t>
-            </a:r>
-          </a:p>
-          <a:p>
-            <a:pPr algn="l">
-              <a:lnSpc>
-                <a:spcPct val="108000"/>
-              </a:lnSpc>
-              <a:spcAft>
-                <a:spcPts val="800"/>
-              </a:spcAft>
-            </a:pPr>
-            <a:r>
-              <a:rPr sz="875" b="1" i="0">
-                <a:solidFill>
-                  <a:srgbClr val="2C898A"/>
-                </a:solidFill>
-                <a:latin typeface="NanumGothic"/>
-                <a:ea typeface="NanumGothic"/>
-              </a:rPr>
-              <a:t>●  </a:t>
-            </a:r>
-            <a:r>
-              <a:rPr sz="1250" b="0" i="0">
-                <a:solidFill>
-                  <a:srgbClr val="FFFFFF"/>
-                </a:solidFill>
-                <a:latin typeface="NanumGothic"/>
-                <a:ea typeface="NanumGothic"/>
-              </a:rPr>
-              <a:t>성공지표: 피부온도 ≥2°C↑ (근거 제한적)</a:t>
-            </a:r>
-          </a:p>
-        </p:txBody>
-      </p:sp>
-      <p:sp>
-        <p:nvSpPr>
-          <p:cNvPr id="12" name="TextBox 11"/>
+              <a:t>호소: “발에 땀이 너무 많아요” · “추우면 발이 하얘졌다 파래져요” · “발이 화끈 달아올라요”</a:t>
+            </a:r>
+          </a:p>
+        </p:txBody>
+      </p:sp>
+      <p:sp>
+        <p:nvSpPr>
+          <p:cNvPr id="9" name="TextBox 8"/>
           <p:cNvSpPr txBox="1"/>
           <p:nvPr/>
         </p:nvSpPr>
@@ -9349,14 +10674,14 @@
                 <a:latin typeface="NanumGothic"/>
                 <a:ea typeface="NanumGothic"/>
               </a:rPr>
-              <a:t>근거: Zhang 2020(RCT) PMID 32915421; 증례 PMID 22606406; StatPearls NBK442009</a:t>
-            </a:r>
-          </a:p>
-        </p:txBody>
-      </p:sp>
-      <p:sp>
-        <p:nvSpPr>
-          <p:cNvPr id="13" name="TextBox 12"/>
+              <a:t>근거: StatPearls; 문헌고찰 종합</a:t>
+            </a:r>
+          </a:p>
+        </p:txBody>
+      </p:sp>
+      <p:sp>
+        <p:nvSpPr>
+          <p:cNvPr id="10" name="TextBox 9"/>
           <p:cNvSpPr txBox="1"/>
           <p:nvPr/>
         </p:nvSpPr>
@@ -9497,7 +10822,7 @@
                 <a:latin typeface="NanumGothic"/>
                 <a:ea typeface="NanumGothic"/>
               </a:rPr>
-              <a:t>효과 (1) 관류 개선 · 허혈성 통증</a:t>
+              <a:t>밤에 저리고 화끈거리는 다리 — 당뇨병성 신경병증과 LSB</a:t>
             </a:r>
           </a:p>
         </p:txBody>
@@ -9540,7 +10865,7 @@
                 <a:latin typeface="NanumGothic"/>
                 <a:ea typeface="NanumGothic"/>
               </a:rPr>
-              <a:t>효과</a:t>
+              <a:t>적응증 · 심화</a:t>
             </a:r>
           </a:p>
         </p:txBody>
@@ -9597,8 +10922,8 @@
         </p:nvSpPr>
         <p:spPr>
           <a:xfrm>
-            <a:off x="11194999" y="365760"/>
-            <a:ext cx="493776" cy="347472"/>
+            <a:off x="10536631" y="365760"/>
+            <a:ext cx="1152144" cy="347472"/>
           </a:xfrm>
           <a:prstGeom prst="roundRect">
             <a:avLst>
@@ -9606,7 +10931,7 @@
             </a:avLst>
           </a:prstGeom>
           <a:solidFill>
-            <a:srgbClr val="2E7D32"/>
+            <a:srgbClr val="2C898A"/>
           </a:solidFill>
           <a:ln>
             <a:noFill/>
@@ -9643,8 +10968,8 @@
         </p:nvSpPr>
         <p:spPr>
           <a:xfrm>
-            <a:off x="11194999" y="365760"/>
-            <a:ext cx="493776" cy="347472"/>
+            <a:off x="10536631" y="365760"/>
+            <a:ext cx="1152144" cy="347472"/>
           </a:xfrm>
           <a:prstGeom prst="rect">
             <a:avLst/>
@@ -9673,7 +10998,7 @@
                 <a:latin typeface="NanumGothic"/>
                 <a:ea typeface="NanumGothic"/>
               </a:rPr>
-              <a:t>효과</a:t>
+              <a:t>야간 신경병증통</a:t>
             </a:r>
           </a:p>
         </p:txBody>
@@ -9726,7 +11051,7 @@
                 <a:latin typeface="NanumGothic"/>
                 <a:ea typeface="NanumGothic"/>
               </a:rPr>
-              <a:t>관류 실측(Dickey 2024): LSB 후 후경골동맥 직경 0.17→0.27 cm(+58.8%), 모세혈관 재충혈 3.92→1.30초, 족부온도 +2.8°C.</a:t>
+              <a:t>임상상: 당뇨병성 말초신경병증 — 발·종아리 저림·화끈거림·전기 찌름, 양측 ‘양말’ 분포.</a:t>
             </a:r>
           </a:p>
           <a:p>
@@ -9751,12 +11076,12 @@
             <a:r>
               <a:rPr sz="1400" b="0" i="0">
                 <a:solidFill>
-                  <a:srgbClr val="2E7D32"/>
-                </a:solidFill>
-                <a:latin typeface="NanumGothic"/>
-                <a:ea typeface="NanumGothic"/>
-              </a:rPr>
-              <a:t>허혈성 통증(PAD): 하지 통증 최대 75%↓, Fontaine 분류·측부관류 개선(Medicina 2024).</a:t>
+                  <a:srgbClr val="1A202C"/>
+                </a:solidFill>
+                <a:latin typeface="NanumGothic"/>
+                <a:ea typeface="NanumGothic"/>
+              </a:rPr>
+              <a:t>야간통: 이불 온기·야간 순환·주의분산 소실 → 밤에 증폭·수면 방해.</a:t>
             </a:r>
           </a:p>
           <a:p>
@@ -9786,7 +11111,37 @@
                 <a:latin typeface="NanumGothic"/>
                 <a:ea typeface="NanumGothic"/>
               </a:rPr>
-              <a:t>비재건성 CLI: 교감신경 신경파괴가 절단 외 대안이 없는 환자의 통증조절에 효과적·안전(Barreto 2018).</a:t>
+              <a:t>먼저 감별: RLS(움직이면 완화)·NLC(경련)·허혈성 안정통과 구분.</a:t>
+            </a:r>
+          </a:p>
+          <a:p>
+            <a:pPr algn="l">
+              <a:lnSpc>
+                <a:spcPct val="108000"/>
+              </a:lnSpc>
+              <a:spcAft>
+                <a:spcPts val="800"/>
+              </a:spcAft>
+            </a:pPr>
+            <a:r>
+              <a:rPr sz="1400" b="1" i="0">
+                <a:solidFill>
+                  <a:srgbClr val="5A6B7B"/>
+                </a:solidFill>
+                <a:latin typeface="NanumGothic"/>
+                <a:ea typeface="NanumGothic"/>
+              </a:rPr>
+              <a:t/>
+            </a:r>
+            <a:r>
+              <a:rPr sz="1400" b="1" i="0">
+                <a:solidFill>
+                  <a:srgbClr val="1F6E70"/>
+                </a:solidFill>
+                <a:latin typeface="NanumGothic"/>
+                <a:ea typeface="NanumGothic"/>
+              </a:rPr>
+              <a:t>1차: 혈당조절+약물(가바펜틴·듀록세틴) → 난치성이면 LSB 고려</a:t>
             </a:r>
           </a:p>
         </p:txBody>
@@ -9875,7 +11230,7 @@
                 <a:latin typeface="NanumGothic"/>
                 <a:ea typeface="NanumGothic"/>
               </a:rPr>
-              <a:t>실측 수치(Dickey 2024)</a:t>
+              <a:t>LSB — 치료 삽입</a:t>
             </a:r>
           </a:p>
         </p:txBody>
@@ -9921,14 +11276,14 @@
               <a:t>●  </a:t>
             </a:r>
             <a:r>
-              <a:rPr sz="1250" b="1" i="0">
-                <a:solidFill>
-                  <a:srgbClr val="9FE0D8"/>
-                </a:solidFill>
-                <a:latin typeface="NanumGothic"/>
-                <a:ea typeface="NanumGothic"/>
-              </a:rPr>
-              <a:t>후경골동맥 +58.8%</a:t>
+              <a:rPr sz="1250" b="0" i="0">
+                <a:solidFill>
+                  <a:srgbClr val="FFFFFF"/>
+                </a:solidFill>
+                <a:latin typeface="NanumGothic"/>
+                <a:ea typeface="NanumGothic"/>
+              </a:rPr>
+              <a:t>기전: 교감차단 → 미세순환↑ + 교감매개통 차단</a:t>
             </a:r>
           </a:p>
           <a:p>
@@ -9958,7 +11313,7 @@
                 <a:latin typeface="NanumGothic"/>
                 <a:ea typeface="NanumGothic"/>
               </a:rPr>
-              <a:t>모세혈관 재충혈 3.92→1.30초</a:t>
+              <a:t>근거: 난치성 DPN에 LSB+신경파괴 RCT·증례</a:t>
             </a:r>
           </a:p>
           <a:p>
@@ -9988,7 +11343,7 @@
                 <a:latin typeface="NanumGothic"/>
                 <a:ea typeface="NanumGothic"/>
               </a:rPr>
-              <a:t>족부온도 +2.8°C</a:t>
+              <a:t>적용: 약물 불응·진단차단 양성 시 선택적 시행</a:t>
             </a:r>
           </a:p>
           <a:p>
@@ -10011,14 +11366,14 @@
               <a:t>●  </a:t>
             </a:r>
             <a:r>
-              <a:rPr sz="1250" b="1" i="0">
-                <a:solidFill>
-                  <a:srgbClr val="9FE0D8"/>
-                </a:solidFill>
-                <a:latin typeface="NanumGothic"/>
-                <a:ea typeface="NanumGothic"/>
-              </a:rPr>
-              <a:t>→ 관류 개선의 객관 근거</a:t>
+              <a:rPr sz="1250" b="0" i="0">
+                <a:solidFill>
+                  <a:srgbClr val="FFFFFF"/>
+                </a:solidFill>
+                <a:latin typeface="NanumGothic"/>
+                <a:ea typeface="NanumGothic"/>
+              </a:rPr>
+              <a:t>성공지표: 피부온도 ≥2°C↑ (근거 제한적)</a:t>
             </a:r>
           </a:p>
         </p:txBody>
@@ -10061,7 +11416,7 @@
                 <a:latin typeface="NanumGothic"/>
                 <a:ea typeface="NanumGothic"/>
               </a:rPr>
-              <a:t>근거: Dickey 2024(Cureus); Medicina 2024; Barreto 2018</a:t>
+              <a:t>근거: Zhang 2020(RCT) PMID 32915421; 증례 PMID 22606406; StatPearls NBK442009</a:t>
             </a:r>
           </a:p>
         </p:txBody>
@@ -10209,7 +11564,7 @@
                 <a:latin typeface="NanumGothic"/>
                 <a:ea typeface="NanumGothic"/>
               </a:rPr>
-              <a:t>효과 (2) CRPS · 기전</a:t>
+              <a:t>효과 (1) 관류 개선 · 허혈성 통증</a:t>
             </a:r>
           </a:p>
         </p:txBody>
@@ -10309,8 +11664,8 @@
         </p:nvSpPr>
         <p:spPr>
           <a:xfrm>
-            <a:off x="11194999" y="365760"/>
-            <a:ext cx="493776" cy="347472"/>
+            <a:off x="10426903" y="365760"/>
+            <a:ext cx="1261872" cy="347472"/>
           </a:xfrm>
           <a:prstGeom prst="roundRect">
             <a:avLst>
@@ -10318,7 +11673,7 @@
             </a:avLst>
           </a:prstGeom>
           <a:solidFill>
-            <a:srgbClr val="2C898A"/>
+            <a:srgbClr val="B97A0C"/>
           </a:solidFill>
           <a:ln>
             <a:noFill/>
@@ -10355,8 +11710,8 @@
         </p:nvSpPr>
         <p:spPr>
           <a:xfrm>
-            <a:off x="11194999" y="365760"/>
-            <a:ext cx="493776" cy="347472"/>
+            <a:off x="10426903" y="365760"/>
+            <a:ext cx="1261872" cy="347472"/>
           </a:xfrm>
           <a:prstGeom prst="rect">
             <a:avLst/>
@@ -10385,7 +11740,7 @@
                 <a:latin typeface="NanumGothic"/>
                 <a:ea typeface="NanumGothic"/>
               </a:rPr>
-              <a:t>효과</a:t>
+              <a:t>Lv III–IV</a:t>
             </a:r>
           </a:p>
         </p:txBody>
@@ -10399,7 +11754,7 @@
         <p:spPr>
           <a:xfrm>
             <a:off x="731520" y="1371600"/>
-            <a:ext cx="10835640" cy="4754880"/>
+            <a:ext cx="6400800" cy="4663440"/>
           </a:xfrm>
           <a:prstGeom prst="rect">
             <a:avLst/>
@@ -10417,11 +11772,11 @@
                 <a:spcPct val="108000"/>
               </a:lnSpc>
               <a:spcAft>
-                <a:spcPts val="900"/>
-              </a:spcAft>
-            </a:pPr>
-            <a:r>
-              <a:rPr sz="1050" b="1" i="0">
+                <a:spcPts val="800"/>
+              </a:spcAft>
+            </a:pPr>
+            <a:r>
+              <a:rPr sz="979" b="1" i="0">
                 <a:solidFill>
                   <a:srgbClr val="2C898A"/>
                 </a:solidFill>
@@ -10431,27 +11786,27 @@
               <a:t>●  </a:t>
             </a:r>
             <a:r>
-              <a:rPr sz="1500" b="1" i="0">
+              <a:rPr sz="1400" b="1" i="0">
                 <a:solidFill>
                   <a:srgbClr val="1A202C"/>
                 </a:solidFill>
                 <a:latin typeface="NanumGothic"/>
                 <a:ea typeface="NanumGothic"/>
               </a:rPr>
-              <a:t>CRPS는 교감신경 매개 통증의 전형 → LSB 후 유의한 통증완화가 축적된 근거. 최적 환자 선택·조기 시행이 성공률↑.</a:t>
-            </a:r>
-          </a:p>
-          <a:p>
-            <a:pPr algn="l">
-              <a:lnSpc>
-                <a:spcPct val="108000"/>
-              </a:lnSpc>
-              <a:spcAft>
-                <a:spcPts val="900"/>
-              </a:spcAft>
-            </a:pPr>
-            <a:r>
-              <a:rPr sz="1050" b="1" i="0">
+              <a:t>관류 실측(Dickey 2024): LSB 후 후경골동맥 직경 0.17→0.27 cm(+58.8%), 모세혈관 재충혈 3.92→1.30초, 족부온도 +2.8°C.</a:t>
+            </a:r>
+          </a:p>
+          <a:p>
+            <a:pPr algn="l">
+              <a:lnSpc>
+                <a:spcPct val="108000"/>
+              </a:lnSpc>
+              <a:spcAft>
+                <a:spcPts val="800"/>
+              </a:spcAft>
+            </a:pPr>
+            <a:r>
+              <a:rPr sz="979" b="1" i="0">
                 <a:solidFill>
                   <a:srgbClr val="2C898A"/>
                 </a:solidFill>
@@ -10461,27 +11816,169 @@
               <a:t>●  </a:t>
             </a:r>
             <a:r>
-              <a:rPr sz="1500" b="0" i="0">
+              <a:rPr sz="1400" b="0" i="0">
+                <a:solidFill>
+                  <a:srgbClr val="2E7D32"/>
+                </a:solidFill>
+                <a:latin typeface="NanumGothic"/>
+                <a:ea typeface="NanumGothic"/>
+              </a:rPr>
+              <a:t>허혈성 통증(PAD): 하지 통증 최대 75%↓, Fontaine 분류·측부관류 개선(Medicina 2024).</a:t>
+            </a:r>
+          </a:p>
+          <a:p>
+            <a:pPr algn="l">
+              <a:lnSpc>
+                <a:spcPct val="108000"/>
+              </a:lnSpc>
+              <a:spcAft>
+                <a:spcPts val="800"/>
+              </a:spcAft>
+            </a:pPr>
+            <a:r>
+              <a:rPr sz="979" b="1" i="0">
+                <a:solidFill>
+                  <a:srgbClr val="2C898A"/>
+                </a:solidFill>
+                <a:latin typeface="NanumGothic"/>
+                <a:ea typeface="NanumGothic"/>
+              </a:rPr>
+              <a:t>●  </a:t>
+            </a:r>
+            <a:r>
+              <a:rPr sz="1400" b="0" i="0">
                 <a:solidFill>
                   <a:srgbClr val="1A202C"/>
                 </a:solidFill>
                 <a:latin typeface="NanumGothic"/>
                 <a:ea typeface="NanumGothic"/>
               </a:rPr>
-              <a:t>Choi 2024(Sci Rep): 교감신경 신경파괴의 효과 지속기간을 전향 관찰로 제시.</a:t>
-            </a:r>
-          </a:p>
-          <a:p>
-            <a:pPr algn="l">
-              <a:lnSpc>
-                <a:spcPct val="108000"/>
-              </a:lnSpc>
-              <a:spcAft>
-                <a:spcPts val="900"/>
-              </a:spcAft>
-            </a:pPr>
-            <a:r>
-              <a:rPr sz="1050" b="1" i="0">
+              <a:t>비재건성 CLI: 교감신경 신경파괴가 절단 외 대안이 없는 환자의 통증조절에 효과적·안전(Barreto 2018).</a:t>
+            </a:r>
+          </a:p>
+        </p:txBody>
+      </p:sp>
+      <p:sp>
+        <p:nvSpPr>
+          <p:cNvPr id="9" name="Rounded Rectangle 8"/>
+          <p:cNvSpPr/>
+          <p:nvPr/>
+        </p:nvSpPr>
+        <p:spPr>
+          <a:xfrm>
+            <a:off x="7406640" y="1463040"/>
+            <a:ext cx="4114800" cy="4480560"/>
+          </a:xfrm>
+          <a:prstGeom prst="roundRect">
+            <a:avLst>
+              <a:gd name="adj" fmla="val 8000"/>
+            </a:avLst>
+          </a:prstGeom>
+          <a:solidFill>
+            <a:srgbClr val="1B355E"/>
+          </a:solidFill>
+          <a:ln>
+            <a:noFill/>
+          </a:ln>
+          <a:effectLst/>
+        </p:spPr>
+        <p:style>
+          <a:lnRef idx="1">
+            <a:schemeClr val="accent1"/>
+          </a:lnRef>
+          <a:fillRef idx="3">
+            <a:schemeClr val="accent1"/>
+          </a:fillRef>
+          <a:effectRef idx="2">
+            <a:schemeClr val="accent1"/>
+          </a:effectRef>
+          <a:fontRef idx="minor">
+            <a:schemeClr val="lt1"/>
+          </a:fontRef>
+        </p:style>
+        <p:txBody>
+          <a:bodyPr rtlCol="0" anchor="ctr"/>
+          <a:lstStyle/>
+          <a:p>
+            <a:pPr algn="ctr"/>
+          </a:p>
+        </p:txBody>
+      </p:sp>
+      <p:sp>
+        <p:nvSpPr>
+          <p:cNvPr id="10" name="TextBox 9"/>
+          <p:cNvSpPr txBox="1"/>
+          <p:nvPr/>
+        </p:nvSpPr>
+        <p:spPr>
+          <a:xfrm>
+            <a:off x="7680960" y="1691640"/>
+            <a:ext cx="3657600" cy="365760"/>
+          </a:xfrm>
+          <a:prstGeom prst="rect">
+            <a:avLst/>
+          </a:prstGeom>
+          <a:noFill/>
+        </p:spPr>
+        <p:txBody>
+          <a:bodyPr wrap="square" anchor="t" lIns="0" rIns="0" tIns="0" bIns="0">
+            <a:spAutoFit/>
+          </a:bodyPr>
+          <a:lstStyle/>
+          <a:p>
+            <a:pPr algn="l">
+              <a:lnSpc>
+                <a:spcPct val="108000"/>
+              </a:lnSpc>
+              <a:spcAft>
+                <a:spcPts val="400"/>
+              </a:spcAft>
+            </a:pPr>
+            <a:r>
+              <a:rPr sz="1300" b="1" i="0">
+                <a:solidFill>
+                  <a:srgbClr val="BFD3E6"/>
+                </a:solidFill>
+                <a:latin typeface="NanumGothic"/>
+                <a:ea typeface="NanumGothic"/>
+              </a:rPr>
+              <a:t>실측 수치(Dickey 2024)</a:t>
+            </a:r>
+          </a:p>
+        </p:txBody>
+      </p:sp>
+      <p:sp>
+        <p:nvSpPr>
+          <p:cNvPr id="11" name="TextBox 10"/>
+          <p:cNvSpPr txBox="1"/>
+          <p:nvPr/>
+        </p:nvSpPr>
+        <p:spPr>
+          <a:xfrm>
+            <a:off x="7680960" y="2194560"/>
+            <a:ext cx="3611880" cy="3657600"/>
+          </a:xfrm>
+          <a:prstGeom prst="rect">
+            <a:avLst/>
+          </a:prstGeom>
+          <a:noFill/>
+        </p:spPr>
+        <p:txBody>
+          <a:bodyPr wrap="square" lIns="0" rIns="0" tIns="0" bIns="0">
+            <a:spAutoFit/>
+          </a:bodyPr>
+          <a:lstStyle/>
+          <a:p>
+            <a:pPr algn="l">
+              <a:lnSpc>
+                <a:spcPct val="108000"/>
+              </a:lnSpc>
+              <a:spcAft>
+                <a:spcPts val="800"/>
+              </a:spcAft>
+            </a:pPr>
+            <a:r>
+              <a:rPr sz="875" b="1" i="0">
                 <a:solidFill>
                   <a:srgbClr val="2C898A"/>
                 </a:solidFill>
@@ -10491,27 +11988,27 @@
               <a:t>●  </a:t>
             </a:r>
             <a:r>
-              <a:rPr sz="1500" b="0" i="0">
-                <a:solidFill>
-                  <a:srgbClr val="1A202C"/>
-                </a:solidFill>
-                <a:latin typeface="NanumGothic"/>
-                <a:ea typeface="NanumGothic"/>
-              </a:rPr>
-              <a:t>반응 예측: 교감신경 피부반응(sympathetic skin response)이 LSB 반응 예측에 유용(Pain Ther 2023).</a:t>
-            </a:r>
-          </a:p>
-          <a:p>
-            <a:pPr algn="l">
-              <a:lnSpc>
-                <a:spcPct val="108000"/>
-              </a:lnSpc>
-              <a:spcAft>
-                <a:spcPts val="900"/>
-              </a:spcAft>
-            </a:pPr>
-            <a:r>
-              <a:rPr sz="1050" b="1" i="0">
+              <a:rPr sz="1250" b="1" i="0">
+                <a:solidFill>
+                  <a:srgbClr val="9FE0D8"/>
+                </a:solidFill>
+                <a:latin typeface="NanumGothic"/>
+                <a:ea typeface="NanumGothic"/>
+              </a:rPr>
+              <a:t>후경골동맥 +58.8%</a:t>
+            </a:r>
+          </a:p>
+          <a:p>
+            <a:pPr algn="l">
+              <a:lnSpc>
+                <a:spcPct val="108000"/>
+              </a:lnSpc>
+              <a:spcAft>
+                <a:spcPts val="800"/>
+              </a:spcAft>
+            </a:pPr>
+            <a:r>
+              <a:rPr sz="875" b="1" i="0">
                 <a:solidFill>
                   <a:srgbClr val="2C898A"/>
                 </a:solidFill>
@@ -10521,51 +12018,81 @@
               <a:t>●  </a:t>
             </a:r>
             <a:r>
-              <a:rPr sz="1500" b="0" i="0">
-                <a:solidFill>
-                  <a:srgbClr val="5A6B7B"/>
-                </a:solidFill>
-                <a:latin typeface="NanumGothic"/>
-                <a:ea typeface="NanumGothic"/>
-              </a:rPr>
-              <a:t>한계: 중추 감작이 진행되면 시간이 지날수록 효과 감소 가능.</a:t>
-            </a:r>
-          </a:p>
-          <a:p>
-            <a:pPr algn="l">
-              <a:lnSpc>
-                <a:spcPct val="108000"/>
-              </a:lnSpc>
-              <a:spcAft>
-                <a:spcPts val="900"/>
-              </a:spcAft>
-            </a:pPr>
-            <a:r>
-              <a:rPr sz="1500" b="1" i="0">
-                <a:solidFill>
-                  <a:srgbClr val="5A6B7B"/>
-                </a:solidFill>
-                <a:latin typeface="NanumGothic"/>
-                <a:ea typeface="NanumGothic"/>
-              </a:rPr>
-              <a:t/>
-            </a:r>
-            <a:r>
-              <a:rPr sz="1500" b="1" i="0">
-                <a:solidFill>
-                  <a:srgbClr val="1F6E70"/>
-                </a:solidFill>
-                <a:latin typeface="NanumGothic"/>
-                <a:ea typeface="NanumGothic"/>
-              </a:rPr>
-              <a:t>기전 요약: 교감차단 → 측부순환 혈관확장 → 조직 산소화↑ → 통증↓ + 교감매개통 차단 + 신경파괴 직접효과.</a:t>
-            </a:r>
-          </a:p>
-        </p:txBody>
-      </p:sp>
-      <p:sp>
-        <p:nvSpPr>
-          <p:cNvPr id="9" name="TextBox 8"/>
+              <a:rPr sz="1250" b="0" i="0">
+                <a:solidFill>
+                  <a:srgbClr val="FFFFFF"/>
+                </a:solidFill>
+                <a:latin typeface="NanumGothic"/>
+                <a:ea typeface="NanumGothic"/>
+              </a:rPr>
+              <a:t>모세혈관 재충혈 3.92→1.30초</a:t>
+            </a:r>
+          </a:p>
+          <a:p>
+            <a:pPr algn="l">
+              <a:lnSpc>
+                <a:spcPct val="108000"/>
+              </a:lnSpc>
+              <a:spcAft>
+                <a:spcPts val="800"/>
+              </a:spcAft>
+            </a:pPr>
+            <a:r>
+              <a:rPr sz="875" b="1" i="0">
+                <a:solidFill>
+                  <a:srgbClr val="2C898A"/>
+                </a:solidFill>
+                <a:latin typeface="NanumGothic"/>
+                <a:ea typeface="NanumGothic"/>
+              </a:rPr>
+              <a:t>●  </a:t>
+            </a:r>
+            <a:r>
+              <a:rPr sz="1250" b="0" i="0">
+                <a:solidFill>
+                  <a:srgbClr val="FFFFFF"/>
+                </a:solidFill>
+                <a:latin typeface="NanumGothic"/>
+                <a:ea typeface="NanumGothic"/>
+              </a:rPr>
+              <a:t>족부온도 +2.8°C</a:t>
+            </a:r>
+          </a:p>
+          <a:p>
+            <a:pPr algn="l">
+              <a:lnSpc>
+                <a:spcPct val="108000"/>
+              </a:lnSpc>
+              <a:spcAft>
+                <a:spcPts val="800"/>
+              </a:spcAft>
+            </a:pPr>
+            <a:r>
+              <a:rPr sz="875" b="1" i="0">
+                <a:solidFill>
+                  <a:srgbClr val="2C898A"/>
+                </a:solidFill>
+                <a:latin typeface="NanumGothic"/>
+                <a:ea typeface="NanumGothic"/>
+              </a:rPr>
+              <a:t>●  </a:t>
+            </a:r>
+            <a:r>
+              <a:rPr sz="1250" b="1" i="0">
+                <a:solidFill>
+                  <a:srgbClr val="9FE0D8"/>
+                </a:solidFill>
+                <a:latin typeface="NanumGothic"/>
+                <a:ea typeface="NanumGothic"/>
+              </a:rPr>
+              <a:t>→ 관류 개선의 객관 근거</a:t>
+            </a:r>
+          </a:p>
+        </p:txBody>
+      </p:sp>
+      <p:sp>
+        <p:nvSpPr>
+          <p:cNvPr id="12" name="TextBox 11"/>
           <p:cNvSpPr txBox="1"/>
           <p:nvPr/>
         </p:nvSpPr>
@@ -10601,14 +12128,14 @@
                 <a:latin typeface="NanumGothic"/>
                 <a:ea typeface="NanumGothic"/>
               </a:rPr>
-              <a:t>근거: Choi 2024(Sci Rep); Pain Ther 2023</a:t>
-            </a:r>
-          </a:p>
-        </p:txBody>
-      </p:sp>
-      <p:sp>
-        <p:nvSpPr>
-          <p:cNvPr id="10" name="TextBox 9"/>
+              <a:t>근거: Dickey 2024(Cureus); Medicina 2024; Barreto 2018</a:t>
+            </a:r>
+          </a:p>
+        </p:txBody>
+      </p:sp>
+      <p:sp>
+        <p:nvSpPr>
+          <p:cNvPr id="13" name="TextBox 12"/>
           <p:cNvSpPr txBox="1"/>
           <p:nvPr/>
         </p:nvSpPr>

--- a/문헌고찰_NLC_RLS_LSB/03_LSB/LSB_발표.pptx
+++ b/문헌고찰_NLC_RLS_LSB/03_LSB/LSB_발표.pptx
@@ -19,6 +19,9 @@
     <p:sldId id="267" r:id="rId18"/>
     <p:sldId id="268" r:id="rId19"/>
     <p:sldId id="269" r:id="rId20"/>
+    <p:sldId id="270" r:id="rId21"/>
+    <p:sldId id="271" r:id="rId22"/>
+    <p:sldId id="272" r:id="rId23"/>
   </p:sldIdLst>
   <p:sldSz cx="12191695" cy="6858000" type="screen4x3"/>
   <p:notesSz cx="6858000" cy="9144000"/>
@@ -3612,7 +3615,7 @@
                 <a:latin typeface="NanumGothic"/>
                 <a:ea typeface="NanumGothic"/>
               </a:rPr>
-              <a:t>효과 (2) CRPS · 기전</a:t>
+              <a:t>적응증별 환자 증상·호소 ② — 신경병증·기타</a:t>
             </a:r>
           </a:p>
         </p:txBody>
@@ -3655,7 +3658,7 @@
                 <a:latin typeface="NanumGothic"/>
                 <a:ea typeface="NanumGothic"/>
               </a:rPr>
-              <a:t>효과</a:t>
+              <a:t>적응증 · 증상</a:t>
             </a:r>
           </a:p>
         </p:txBody>
@@ -3712,8 +3715,8 @@
         </p:nvSpPr>
         <p:spPr>
           <a:xfrm>
-            <a:off x="10426903" y="365760"/>
-            <a:ext cx="1261872" cy="347472"/>
+            <a:off x="10865816" y="365760"/>
+            <a:ext cx="822959" cy="347472"/>
           </a:xfrm>
           <a:prstGeom prst="roundRect">
             <a:avLst>
@@ -3721,7 +3724,7 @@
             </a:avLst>
           </a:prstGeom>
           <a:solidFill>
-            <a:srgbClr val="B97A0C"/>
+            <a:srgbClr val="2C898A"/>
           </a:solidFill>
           <a:ln>
             <a:noFill/>
@@ -3758,8 +3761,8 @@
         </p:nvSpPr>
         <p:spPr>
           <a:xfrm>
-            <a:off x="10426903" y="365760"/>
-            <a:ext cx="1261872" cy="347472"/>
+            <a:off x="10865816" y="365760"/>
+            <a:ext cx="822959" cy="347472"/>
           </a:xfrm>
           <a:prstGeom prst="rect">
             <a:avLst/>
@@ -3788,7 +3791,7 @@
                 <a:latin typeface="NanumGothic"/>
                 <a:ea typeface="NanumGothic"/>
               </a:rPr>
-              <a:t>Lv III–IV</a:t>
+              <a:t>환자 증상</a:t>
             </a:r>
           </a:p>
         </p:txBody>
@@ -3820,11 +3823,11 @@
                 <a:spcPct val="108000"/>
               </a:lnSpc>
               <a:spcAft>
-                <a:spcPts val="900"/>
-              </a:spcAft>
-            </a:pPr>
-            <a:r>
-              <a:rPr sz="1050" b="1" i="0">
+                <a:spcPts val="600"/>
+              </a:spcAft>
+            </a:pPr>
+            <a:r>
+              <a:rPr sz="979" b="1" i="0">
                 <a:solidFill>
                   <a:srgbClr val="2C898A"/>
                 </a:solidFill>
@@ -3834,14 +3837,14 @@
               <a:t>●  </a:t>
             </a:r>
             <a:r>
-              <a:rPr sz="1500" b="1" i="0">
+              <a:rPr sz="1400" b="1" i="0">
                 <a:solidFill>
                   <a:srgbClr val="1A202C"/>
                 </a:solidFill>
                 <a:latin typeface="NanumGothic"/>
                 <a:ea typeface="NanumGothic"/>
               </a:rPr>
-              <a:t>CRPS는 교감신경 매개 통증의 전형 → LSB 후 유의한 통증완화가 축적된 근거. 최적 환자 선택·조기 시행이 성공률↑.</a:t>
+              <a:t>신경병증 — 당뇨병성 신경병증/당뇨발·대상포진후신경통·환상지통</a:t>
             </a:r>
           </a:p>
           <a:p>
@@ -3850,11 +3853,71 @@
                 <a:spcPct val="108000"/>
               </a:lnSpc>
               <a:spcAft>
-                <a:spcPts val="900"/>
-              </a:spcAft>
-            </a:pPr>
-            <a:r>
-              <a:rPr sz="1050" b="1" i="0">
+                <a:spcPts val="600"/>
+              </a:spcAft>
+            </a:pPr>
+            <a:r>
+              <a:rPr sz="1400" b="1" i="0">
+                <a:solidFill>
+                  <a:srgbClr val="5A6B7B"/>
+                </a:solidFill>
+                <a:latin typeface="NanumGothic"/>
+                <a:ea typeface="NanumGothic"/>
+              </a:rPr>
+              <a:t>      –  </a:t>
+            </a:r>
+            <a:r>
+              <a:rPr sz="1400" b="0" i="0">
+                <a:solidFill>
+                  <a:srgbClr val="1A202C"/>
+                </a:solidFill>
+                <a:latin typeface="NanumGothic"/>
+                <a:ea typeface="NanumGothic"/>
+              </a:rPr>
+              <a:t>저림·화끈거림·전기 오듯 찌름 · 이질통 · 감각저하(양말 신은 느낌) · 야간 악화 · 당뇨발 궤양·관류저하</a:t>
+            </a:r>
+          </a:p>
+          <a:p>
+            <a:pPr algn="l">
+              <a:lnSpc>
+                <a:spcPct val="108000"/>
+              </a:lnSpc>
+              <a:spcAft>
+                <a:spcPts val="600"/>
+              </a:spcAft>
+            </a:pPr>
+            <a:r>
+              <a:rPr sz="1400" b="1" i="0">
+                <a:solidFill>
+                  <a:srgbClr val="5A6B7B"/>
+                </a:solidFill>
+                <a:latin typeface="NanumGothic"/>
+                <a:ea typeface="NanumGothic"/>
+              </a:rPr>
+              <a:t>      –  </a:t>
+            </a:r>
+            <a:r>
+              <a:rPr sz="1400" b="0" i="0">
+                <a:solidFill>
+                  <a:srgbClr val="5A6B7B"/>
+                </a:solidFill>
+                <a:latin typeface="NanumGothic"/>
+                <a:ea typeface="NanumGothic"/>
+              </a:rPr>
+              <a:t>호소: “발이 저리고 화끈거려요” · “밤에 더 심해요” · “전기가 찌릿 오는 것 같아요”</a:t>
+            </a:r>
+          </a:p>
+          <a:p>
+            <a:pPr algn="l">
+              <a:lnSpc>
+                <a:spcPct val="108000"/>
+              </a:lnSpc>
+              <a:spcAft>
+                <a:spcPts val="600"/>
+              </a:spcAft>
+            </a:pPr>
+            <a:r>
+              <a:rPr sz="979" b="1" i="0">
                 <a:solidFill>
                   <a:srgbClr val="2C898A"/>
                 </a:solidFill>
@@ -3864,14 +3927,14 @@
               <a:t>●  </a:t>
             </a:r>
             <a:r>
-              <a:rPr sz="1500" b="0" i="0">
+              <a:rPr sz="1400" b="1" i="0">
                 <a:solidFill>
                   <a:srgbClr val="1A202C"/>
                 </a:solidFill>
                 <a:latin typeface="NanumGothic"/>
                 <a:ea typeface="NanumGothic"/>
               </a:rPr>
-              <a:t>Choi 2024(Sci Rep): 교감신경 신경파괴의 효과 지속기간을 전향 관찰로 제시.</a:t>
+              <a:t>기타 — 족부 다한증·레이노(하지)·홍색사지통증·암성 하지통</a:t>
             </a:r>
           </a:p>
           <a:p>
@@ -3880,28 +3943,28 @@
                 <a:spcPct val="108000"/>
               </a:lnSpc>
               <a:spcAft>
-                <a:spcPts val="900"/>
-              </a:spcAft>
-            </a:pPr>
-            <a:r>
-              <a:rPr sz="1050" b="1" i="0">
-                <a:solidFill>
-                  <a:srgbClr val="2C898A"/>
-                </a:solidFill>
-                <a:latin typeface="NanumGothic"/>
-                <a:ea typeface="NanumGothic"/>
-              </a:rPr>
-              <a:t>●  </a:t>
-            </a:r>
-            <a:r>
-              <a:rPr sz="1500" b="0" i="0">
+                <a:spcPts val="600"/>
+              </a:spcAft>
+            </a:pPr>
+            <a:r>
+              <a:rPr sz="1400" b="1" i="0">
+                <a:solidFill>
+                  <a:srgbClr val="5A6B7B"/>
+                </a:solidFill>
+                <a:latin typeface="NanumGothic"/>
+                <a:ea typeface="NanumGothic"/>
+              </a:rPr>
+              <a:t>      –  </a:t>
+            </a:r>
+            <a:r>
+              <a:rPr sz="1400" b="0" i="0">
                 <a:solidFill>
                   <a:srgbClr val="1A202C"/>
                 </a:solidFill>
                 <a:latin typeface="NanumGothic"/>
                 <a:ea typeface="NanumGothic"/>
               </a:rPr>
-              <a:t>반응 예측: 교감신경 피부반응(sympathetic skin response)이 LSB 반응 예측에 유용(Pain Ther 2023).</a:t>
+              <a:t>다한증(과한 발땀·축축·악취) · 레이노(추위·스트레스에 창백→청색→발적 삼색변화·저림) · 홍색사지통증(발작적 발적·작열·열감, 열에 악화)</a:t>
             </a:r>
           </a:p>
           <a:p>
@@ -3910,58 +3973,28 @@
                 <a:spcPct val="108000"/>
               </a:lnSpc>
               <a:spcAft>
-                <a:spcPts val="900"/>
-              </a:spcAft>
-            </a:pPr>
-            <a:r>
-              <a:rPr sz="1050" b="1" i="0">
-                <a:solidFill>
-                  <a:srgbClr val="2C898A"/>
-                </a:solidFill>
-                <a:latin typeface="NanumGothic"/>
-                <a:ea typeface="NanumGothic"/>
-              </a:rPr>
-              <a:t>●  </a:t>
-            </a:r>
-            <a:r>
-              <a:rPr sz="1500" b="0" i="0">
+                <a:spcPts val="600"/>
+              </a:spcAft>
+            </a:pPr>
+            <a:r>
+              <a:rPr sz="1400" b="1" i="0">
                 <a:solidFill>
                   <a:srgbClr val="5A6B7B"/>
                 </a:solidFill>
                 <a:latin typeface="NanumGothic"/>
                 <a:ea typeface="NanumGothic"/>
               </a:rPr>
-              <a:t>한계: 중추 감작이 진행되면 시간이 지날수록 효과 감소 가능.</a:t>
-            </a:r>
-          </a:p>
-          <a:p>
-            <a:pPr algn="l">
-              <a:lnSpc>
-                <a:spcPct val="108000"/>
-              </a:lnSpc>
-              <a:spcAft>
-                <a:spcPts val="900"/>
-              </a:spcAft>
-            </a:pPr>
-            <a:r>
-              <a:rPr sz="1500" b="1" i="0">
+              <a:t>      –  </a:t>
+            </a:r>
+            <a:r>
+              <a:rPr sz="1400" b="0" i="0">
                 <a:solidFill>
                   <a:srgbClr val="5A6B7B"/>
                 </a:solidFill>
                 <a:latin typeface="NanumGothic"/>
                 <a:ea typeface="NanumGothic"/>
               </a:rPr>
-              <a:t/>
-            </a:r>
-            <a:r>
-              <a:rPr sz="1500" b="1" i="0">
-                <a:solidFill>
-                  <a:srgbClr val="1F6E70"/>
-                </a:solidFill>
-                <a:latin typeface="NanumGothic"/>
-                <a:ea typeface="NanumGothic"/>
-              </a:rPr>
-              <a:t>기전 요약: 교감차단 → 측부순환 혈관확장 → 조직 산소화↑ → 통증↓ + 교감매개통 차단 + 신경파괴 직접효과.</a:t>
+              <a:t>호소: “발에 땀이 너무 많아요” · “추우면 발이 하얘졌다 파래져요” · “발이 화끈 달아올라요”</a:t>
             </a:r>
           </a:p>
         </p:txBody>
@@ -4004,7 +4037,7 @@
                 <a:latin typeface="NanumGothic"/>
                 <a:ea typeface="NanumGothic"/>
               </a:rPr>
-              <a:t>근거: Choi 2024(Sci Rep); Pain Ther 2023</a:t>
+              <a:t>근거: StatPearls; 문헌고찰 종합</a:t>
             </a:r>
           </a:p>
         </p:txBody>
@@ -4152,7 +4185,7 @@
                 <a:latin typeface="NanumGothic"/>
                 <a:ea typeface="NanumGothic"/>
               </a:rPr>
-              <a:t>합병증 · 안전성 · 근거수준</a:t>
+              <a:t>밤에 저리고 화끈거리는 다리 — 당뇨병성 신경병증과 LSB</a:t>
             </a:r>
           </a:p>
         </p:txBody>
@@ -4195,7 +4228,7 @@
                 <a:latin typeface="NanumGothic"/>
                 <a:ea typeface="NanumGothic"/>
               </a:rPr>
-              <a:t>안전성 · 결론</a:t>
+              <a:t>적응증 · 심화</a:t>
             </a:r>
           </a:p>
         </p:txBody>
@@ -4252,8 +4285,8 @@
         </p:nvSpPr>
         <p:spPr>
           <a:xfrm>
-            <a:off x="11085272" y="365760"/>
-            <a:ext cx="603503" cy="347472"/>
+            <a:off x="10536631" y="365760"/>
+            <a:ext cx="1152144" cy="347472"/>
           </a:xfrm>
           <a:prstGeom prst="roundRect">
             <a:avLst>
@@ -4261,7 +4294,7 @@
             </a:avLst>
           </a:prstGeom>
           <a:solidFill>
-            <a:srgbClr val="B03A2E"/>
+            <a:srgbClr val="2C898A"/>
           </a:solidFill>
           <a:ln>
             <a:noFill/>
@@ -4298,8 +4331,8 @@
         </p:nvSpPr>
         <p:spPr>
           <a:xfrm>
-            <a:off x="11085272" y="365760"/>
-            <a:ext cx="603503" cy="347472"/>
+            <a:off x="10536631" y="365760"/>
+            <a:ext cx="1152144" cy="347472"/>
           </a:xfrm>
           <a:prstGeom prst="rect">
             <a:avLst/>
@@ -4328,7 +4361,7 @@
                 <a:latin typeface="NanumGothic"/>
                 <a:ea typeface="NanumGothic"/>
               </a:rPr>
-              <a:t>안전성</a:t>
+              <a:t>야간 신경병증통</a:t>
             </a:r>
           </a:p>
         </p:txBody>
@@ -4342,7 +4375,7 @@
         <p:spPr>
           <a:xfrm>
             <a:off x="731520" y="1371600"/>
-            <a:ext cx="10835640" cy="4754880"/>
+            <a:ext cx="6400800" cy="4663440"/>
           </a:xfrm>
           <a:prstGeom prst="rect">
             <a:avLst/>
@@ -4360,11 +4393,11 @@
                 <a:spcPct val="108000"/>
               </a:lnSpc>
               <a:spcAft>
-                <a:spcPts val="900"/>
-              </a:spcAft>
-            </a:pPr>
-            <a:r>
-              <a:rPr sz="1050" b="1" i="0">
+                <a:spcPts val="800"/>
+              </a:spcAft>
+            </a:pPr>
+            <a:r>
+              <a:rPr sz="979" b="1" i="0">
                 <a:solidFill>
                   <a:srgbClr val="2C898A"/>
                 </a:solidFill>
@@ -4374,14 +4407,14 @@
               <a:t>●  </a:t>
             </a:r>
             <a:r>
-              <a:rPr sz="1500" b="1" i="0">
-                <a:solidFill>
-                  <a:srgbClr val="B03A2E"/>
-                </a:solidFill>
-                <a:latin typeface="NanumGothic"/>
-                <a:ea typeface="NanumGothic"/>
-              </a:rPr>
-              <a:t>합병증: 생식대퇴신경통(신경파괴 시 5–10%), 외측대퇴피신경 손상, 기립성 저혈압.</a:t>
+              <a:rPr sz="1400" b="1" i="0">
+                <a:solidFill>
+                  <a:srgbClr val="1A202C"/>
+                </a:solidFill>
+                <a:latin typeface="NanumGothic"/>
+                <a:ea typeface="NanumGothic"/>
+              </a:rPr>
+              <a:t>임상상: 당뇨병성 말초신경병증 — 발·종아리 저림·화끈거림·전기 찌름, 양측 ‘양말’ 분포.</a:t>
             </a:r>
           </a:p>
           <a:p>
@@ -4390,11 +4423,11 @@
                 <a:spcPct val="108000"/>
               </a:lnSpc>
               <a:spcAft>
-                <a:spcPts val="900"/>
-              </a:spcAft>
-            </a:pPr>
-            <a:r>
-              <a:rPr sz="1050" b="1" i="0">
+                <a:spcPts val="800"/>
+              </a:spcAft>
+            </a:pPr>
+            <a:r>
+              <a:rPr sz="979" b="1" i="0">
                 <a:solidFill>
                   <a:srgbClr val="2C898A"/>
                 </a:solidFill>
@@ -4404,14 +4437,14 @@
               <a:t>●  </a:t>
             </a:r>
             <a:r>
-              <a:rPr sz="1500" b="0" i="0">
+              <a:rPr sz="1400" b="0" i="0">
                 <a:solidFill>
                   <a:srgbClr val="1A202C"/>
                 </a:solidFill>
                 <a:latin typeface="NanumGothic"/>
                 <a:ea typeface="NanumGothic"/>
               </a:rPr>
-              <a:t>혈관·요관·신장 등 내장 구조 천공, 출혈, 신경축(neuraxial) 확산, 신경파괴 후 통증성 신경염(dysesthesia).</a:t>
+              <a:t>야간통: 이불 온기·야간 순환·주의분산 소실 → 밤에 증폭·수면 방해.</a:t>
             </a:r>
           </a:p>
           <a:p>
@@ -4420,11 +4453,11 @@
                 <a:spcPct val="108000"/>
               </a:lnSpc>
               <a:spcAft>
-                <a:spcPts val="900"/>
-              </a:spcAft>
-            </a:pPr>
-            <a:r>
-              <a:rPr sz="1050" b="1" i="0">
+                <a:spcPts val="800"/>
+              </a:spcAft>
+            </a:pPr>
+            <a:r>
+              <a:rPr sz="979" b="1" i="0">
                 <a:solidFill>
                   <a:srgbClr val="2C898A"/>
                 </a:solidFill>
@@ -4434,14 +4467,14 @@
               <a:t>●  </a:t>
             </a:r>
             <a:r>
-              <a:rPr sz="1500" b="0" i="0">
+              <a:rPr sz="1400" b="0" i="0">
                 <a:solidFill>
                   <a:srgbClr val="1A202C"/>
                 </a:solidFill>
                 <a:latin typeface="NanumGothic"/>
                 <a:ea typeface="NanumGothic"/>
               </a:rPr>
-              <a:t>근거수준: 대부분 관찰·증례군·소규모 전향연구, 대규모 RCT는 부족(허혈질환·CRPS Level III~IV).</a:t>
+              <a:t>먼저 감별: RLS(움직이면 완화)·NLC(경련)·허혈성 안정통과 구분.</a:t>
             </a:r>
           </a:p>
           <a:p>
@@ -4450,11 +4483,11 @@
                 <a:spcPct val="108000"/>
               </a:lnSpc>
               <a:spcAft>
-                <a:spcPts val="900"/>
-              </a:spcAft>
-            </a:pPr>
-            <a:r>
-              <a:rPr sz="1500" b="1" i="0">
+                <a:spcPts val="800"/>
+              </a:spcAft>
+            </a:pPr>
+            <a:r>
+              <a:rPr sz="1400" b="1" i="0">
                 <a:solidFill>
                   <a:srgbClr val="5A6B7B"/>
                 </a:solidFill>
@@ -4464,21 +4497,253 @@
               <a:t/>
             </a:r>
             <a:r>
-              <a:rPr sz="1500" b="1" i="0">
+              <a:rPr sz="1400" b="1" i="0">
                 <a:solidFill>
                   <a:srgbClr val="1F6E70"/>
                 </a:solidFill>
                 <a:latin typeface="NanumGothic"/>
                 <a:ea typeface="NanumGothic"/>
               </a:rPr>
-              <a:t>그럼에도 조기 CRPS·재건 불가능한 중증 하지허혈(안정통)에서 임상적으로 유용.</a:t>
-            </a:r>
-          </a:p>
-        </p:txBody>
-      </p:sp>
-      <p:sp>
-        <p:nvSpPr>
-          <p:cNvPr id="9" name="TextBox 8"/>
+              <a:t>1차: 혈당조절+약물(가바펜틴·듀록세틴) → 난치성이면 LSB 고려</a:t>
+            </a:r>
+          </a:p>
+        </p:txBody>
+      </p:sp>
+      <p:sp>
+        <p:nvSpPr>
+          <p:cNvPr id="9" name="Rounded Rectangle 8"/>
+          <p:cNvSpPr/>
+          <p:nvPr/>
+        </p:nvSpPr>
+        <p:spPr>
+          <a:xfrm>
+            <a:off x="7406640" y="1463040"/>
+            <a:ext cx="4114800" cy="4480560"/>
+          </a:xfrm>
+          <a:prstGeom prst="roundRect">
+            <a:avLst>
+              <a:gd name="adj" fmla="val 8000"/>
+            </a:avLst>
+          </a:prstGeom>
+          <a:solidFill>
+            <a:srgbClr val="1B355E"/>
+          </a:solidFill>
+          <a:ln>
+            <a:noFill/>
+          </a:ln>
+          <a:effectLst/>
+        </p:spPr>
+        <p:style>
+          <a:lnRef idx="1">
+            <a:schemeClr val="accent1"/>
+          </a:lnRef>
+          <a:fillRef idx="3">
+            <a:schemeClr val="accent1"/>
+          </a:fillRef>
+          <a:effectRef idx="2">
+            <a:schemeClr val="accent1"/>
+          </a:effectRef>
+          <a:fontRef idx="minor">
+            <a:schemeClr val="lt1"/>
+          </a:fontRef>
+        </p:style>
+        <p:txBody>
+          <a:bodyPr rtlCol="0" anchor="ctr"/>
+          <a:lstStyle/>
+          <a:p>
+            <a:pPr algn="ctr"/>
+          </a:p>
+        </p:txBody>
+      </p:sp>
+      <p:sp>
+        <p:nvSpPr>
+          <p:cNvPr id="10" name="TextBox 9"/>
+          <p:cNvSpPr txBox="1"/>
+          <p:nvPr/>
+        </p:nvSpPr>
+        <p:spPr>
+          <a:xfrm>
+            <a:off x="7680960" y="1691640"/>
+            <a:ext cx="3657600" cy="365760"/>
+          </a:xfrm>
+          <a:prstGeom prst="rect">
+            <a:avLst/>
+          </a:prstGeom>
+          <a:noFill/>
+        </p:spPr>
+        <p:txBody>
+          <a:bodyPr wrap="square" anchor="t" lIns="0" rIns="0" tIns="0" bIns="0">
+            <a:spAutoFit/>
+          </a:bodyPr>
+          <a:lstStyle/>
+          <a:p>
+            <a:pPr algn="l">
+              <a:lnSpc>
+                <a:spcPct val="108000"/>
+              </a:lnSpc>
+              <a:spcAft>
+                <a:spcPts val="400"/>
+              </a:spcAft>
+            </a:pPr>
+            <a:r>
+              <a:rPr sz="1300" b="1" i="0">
+                <a:solidFill>
+                  <a:srgbClr val="BFD3E6"/>
+                </a:solidFill>
+                <a:latin typeface="NanumGothic"/>
+                <a:ea typeface="NanumGothic"/>
+              </a:rPr>
+              <a:t>LSB — 치료 삽입</a:t>
+            </a:r>
+          </a:p>
+        </p:txBody>
+      </p:sp>
+      <p:sp>
+        <p:nvSpPr>
+          <p:cNvPr id="11" name="TextBox 10"/>
+          <p:cNvSpPr txBox="1"/>
+          <p:nvPr/>
+        </p:nvSpPr>
+        <p:spPr>
+          <a:xfrm>
+            <a:off x="7680960" y="2194560"/>
+            <a:ext cx="3611880" cy="3657600"/>
+          </a:xfrm>
+          <a:prstGeom prst="rect">
+            <a:avLst/>
+          </a:prstGeom>
+          <a:noFill/>
+        </p:spPr>
+        <p:txBody>
+          <a:bodyPr wrap="square" lIns="0" rIns="0" tIns="0" bIns="0">
+            <a:spAutoFit/>
+          </a:bodyPr>
+          <a:lstStyle/>
+          <a:p>
+            <a:pPr algn="l">
+              <a:lnSpc>
+                <a:spcPct val="108000"/>
+              </a:lnSpc>
+              <a:spcAft>
+                <a:spcPts val="800"/>
+              </a:spcAft>
+            </a:pPr>
+            <a:r>
+              <a:rPr sz="875" b="1" i="0">
+                <a:solidFill>
+                  <a:srgbClr val="2C898A"/>
+                </a:solidFill>
+                <a:latin typeface="NanumGothic"/>
+                <a:ea typeface="NanumGothic"/>
+              </a:rPr>
+              <a:t>●  </a:t>
+            </a:r>
+            <a:r>
+              <a:rPr sz="1250" b="0" i="0">
+                <a:solidFill>
+                  <a:srgbClr val="FFFFFF"/>
+                </a:solidFill>
+                <a:latin typeface="NanumGothic"/>
+                <a:ea typeface="NanumGothic"/>
+              </a:rPr>
+              <a:t>기전: 교감차단 → 미세순환↑ + 교감매개통 차단</a:t>
+            </a:r>
+          </a:p>
+          <a:p>
+            <a:pPr algn="l">
+              <a:lnSpc>
+                <a:spcPct val="108000"/>
+              </a:lnSpc>
+              <a:spcAft>
+                <a:spcPts val="800"/>
+              </a:spcAft>
+            </a:pPr>
+            <a:r>
+              <a:rPr sz="875" b="1" i="0">
+                <a:solidFill>
+                  <a:srgbClr val="2C898A"/>
+                </a:solidFill>
+                <a:latin typeface="NanumGothic"/>
+                <a:ea typeface="NanumGothic"/>
+              </a:rPr>
+              <a:t>●  </a:t>
+            </a:r>
+            <a:r>
+              <a:rPr sz="1250" b="0" i="0">
+                <a:solidFill>
+                  <a:srgbClr val="FFFFFF"/>
+                </a:solidFill>
+                <a:latin typeface="NanumGothic"/>
+                <a:ea typeface="NanumGothic"/>
+              </a:rPr>
+              <a:t>근거: 난치성 DPN에 LSB+신경파괴 RCT·증례</a:t>
+            </a:r>
+          </a:p>
+          <a:p>
+            <a:pPr algn="l">
+              <a:lnSpc>
+                <a:spcPct val="108000"/>
+              </a:lnSpc>
+              <a:spcAft>
+                <a:spcPts val="800"/>
+              </a:spcAft>
+            </a:pPr>
+            <a:r>
+              <a:rPr sz="875" b="1" i="0">
+                <a:solidFill>
+                  <a:srgbClr val="2C898A"/>
+                </a:solidFill>
+                <a:latin typeface="NanumGothic"/>
+                <a:ea typeface="NanumGothic"/>
+              </a:rPr>
+              <a:t>●  </a:t>
+            </a:r>
+            <a:r>
+              <a:rPr sz="1250" b="0" i="0">
+                <a:solidFill>
+                  <a:srgbClr val="FFFFFF"/>
+                </a:solidFill>
+                <a:latin typeface="NanumGothic"/>
+                <a:ea typeface="NanumGothic"/>
+              </a:rPr>
+              <a:t>적용: 약물 불응·진단차단 양성 시 선택적 시행</a:t>
+            </a:r>
+          </a:p>
+          <a:p>
+            <a:pPr algn="l">
+              <a:lnSpc>
+                <a:spcPct val="108000"/>
+              </a:lnSpc>
+              <a:spcAft>
+                <a:spcPts val="800"/>
+              </a:spcAft>
+            </a:pPr>
+            <a:r>
+              <a:rPr sz="875" b="1" i="0">
+                <a:solidFill>
+                  <a:srgbClr val="2C898A"/>
+                </a:solidFill>
+                <a:latin typeface="NanumGothic"/>
+                <a:ea typeface="NanumGothic"/>
+              </a:rPr>
+              <a:t>●  </a:t>
+            </a:r>
+            <a:r>
+              <a:rPr sz="1250" b="0" i="0">
+                <a:solidFill>
+                  <a:srgbClr val="FFFFFF"/>
+                </a:solidFill>
+                <a:latin typeface="NanumGothic"/>
+                <a:ea typeface="NanumGothic"/>
+              </a:rPr>
+              <a:t>성공지표: 피부온도 ≥2°C↑ (근거 제한적)</a:t>
+            </a:r>
+          </a:p>
+        </p:txBody>
+      </p:sp>
+      <p:sp>
+        <p:nvSpPr>
+          <p:cNvPr id="12" name="TextBox 11"/>
           <p:cNvSpPr txBox="1"/>
           <p:nvPr/>
         </p:nvSpPr>
@@ -4514,14 +4779,14 @@
                 <a:latin typeface="NanumGothic"/>
                 <a:ea typeface="NanumGothic"/>
               </a:rPr>
-              <a:t>근거: StatPearls; 문헌고찰 종합</a:t>
-            </a:r>
-          </a:p>
-        </p:txBody>
-      </p:sp>
-      <p:sp>
-        <p:nvSpPr>
-          <p:cNvPr id="10" name="TextBox 9"/>
+              <a:t>근거: Zhang 2020(RCT) PMID 32915421; 증례 PMID 22606406; StatPearls NBK442009</a:t>
+            </a:r>
+          </a:p>
+        </p:txBody>
+      </p:sp>
+      <p:sp>
+        <p:nvSpPr>
+          <p:cNvPr id="13" name="TextBox 12"/>
           <p:cNvSpPr txBox="1"/>
           <p:nvPr/>
         </p:nvSpPr>
@@ -4662,7 +4927,7 @@
                 <a:latin typeface="NanumGothic"/>
                 <a:ea typeface="NanumGothic"/>
               </a:rPr>
-              <a:t>실제 진료 순서 — 교감신경 축을 겨냥한 단계적 접근</a:t>
+              <a:t>효과 (1) 관류 개선 · 허혈성 통증</a:t>
             </a:r>
           </a:p>
         </p:txBody>
@@ -4705,7 +4970,7 @@
                 <a:latin typeface="NanumGothic"/>
                 <a:ea typeface="NanumGothic"/>
               </a:rPr>
-              <a:t>나의 프로토콜 · 실제 적용</a:t>
+              <a:t>효과</a:t>
             </a:r>
           </a:p>
         </p:txBody>
@@ -4762,8 +5027,8 @@
         </p:nvSpPr>
         <p:spPr>
           <a:xfrm>
-            <a:off x="10865816" y="365760"/>
-            <a:ext cx="822959" cy="347472"/>
+            <a:off x="10426903" y="365760"/>
+            <a:ext cx="1261872" cy="347472"/>
           </a:xfrm>
           <a:prstGeom prst="roundRect">
             <a:avLst>
@@ -4771,7 +5036,7 @@
             </a:avLst>
           </a:prstGeom>
           <a:solidFill>
-            <a:srgbClr val="1A202C"/>
+            <a:srgbClr val="B97A0C"/>
           </a:solidFill>
           <a:ln>
             <a:noFill/>
@@ -4808,8 +5073,8 @@
         </p:nvSpPr>
         <p:spPr>
           <a:xfrm>
-            <a:off x="10865816" y="365760"/>
-            <a:ext cx="822959" cy="347472"/>
+            <a:off x="10426903" y="365760"/>
+            <a:ext cx="1261872" cy="347472"/>
           </a:xfrm>
           <a:prstGeom prst="rect">
             <a:avLst/>
@@ -4838,7 +5103,7 @@
                 <a:latin typeface="NanumGothic"/>
                 <a:ea typeface="NanumGothic"/>
               </a:rPr>
-              <a:t>실전 순서</a:t>
+              <a:t>Lv III–IV</a:t>
             </a:r>
           </a:p>
         </p:txBody>
@@ -4852,7 +5117,7 @@
         <p:spPr>
           <a:xfrm>
             <a:off x="731520" y="1371600"/>
-            <a:ext cx="10835640" cy="4754880"/>
+            <a:ext cx="6400800" cy="4663440"/>
           </a:xfrm>
           <a:prstGeom prst="rect">
             <a:avLst/>
@@ -4884,27 +5149,199 @@
               <a:t>●  </a:t>
             </a:r>
             <a:r>
+              <a:rPr sz="1400" b="1" i="0">
+                <a:solidFill>
+                  <a:srgbClr val="1A202C"/>
+                </a:solidFill>
+                <a:latin typeface="NanumGothic"/>
+                <a:ea typeface="NanumGothic"/>
+              </a:rPr>
+              <a:t>관류 실측(Dickey 2024): LSB 후 후경골동맥 직경 0.17→0.27 cm(+58.8%), 모세혈관 재충혈 3.92→1.30초, 족부온도 +2.8°C.</a:t>
+            </a:r>
+          </a:p>
+          <a:p>
+            <a:pPr algn="l">
+              <a:lnSpc>
+                <a:spcPct val="108000"/>
+              </a:lnSpc>
+              <a:spcAft>
+                <a:spcPts val="800"/>
+              </a:spcAft>
+            </a:pPr>
+            <a:r>
+              <a:rPr sz="979" b="1" i="0">
+                <a:solidFill>
+                  <a:srgbClr val="2C898A"/>
+                </a:solidFill>
+                <a:latin typeface="NanumGothic"/>
+                <a:ea typeface="NanumGothic"/>
+              </a:rPr>
+              <a:t>●  </a:t>
+            </a:r>
+            <a:r>
               <a:rPr sz="1400" b="0" i="0">
                 <a:solidFill>
+                  <a:srgbClr val="2E7D32"/>
+                </a:solidFill>
+                <a:latin typeface="NanumGothic"/>
+                <a:ea typeface="NanumGothic"/>
+              </a:rPr>
+              <a:t>허혈성 통증(PAD): 하지 통증 최대 75%↓, Fontaine 분류·측부관류 개선(Medicina 2024).</a:t>
+            </a:r>
+          </a:p>
+          <a:p>
+            <a:pPr algn="l">
+              <a:lnSpc>
+                <a:spcPct val="108000"/>
+              </a:lnSpc>
+              <a:spcAft>
+                <a:spcPts val="800"/>
+              </a:spcAft>
+            </a:pPr>
+            <a:r>
+              <a:rPr sz="979" b="1" i="0">
+                <a:solidFill>
+                  <a:srgbClr val="2C898A"/>
+                </a:solidFill>
+                <a:latin typeface="NanumGothic"/>
+                <a:ea typeface="NanumGothic"/>
+              </a:rPr>
+              <a:t>●  </a:t>
+            </a:r>
+            <a:r>
+              <a:rPr sz="1400" b="0" i="0">
+                <a:solidFill>
                   <a:srgbClr val="1A202C"/>
                 </a:solidFill>
                 <a:latin typeface="NanumGothic"/>
                 <a:ea typeface="NanumGothic"/>
               </a:rPr>
-              <a:t>① 감별·검사: '밤/하지 증상'이 동맥성 허혈(ABI·도플러)·CRPS·신경병증인지 확인. 특발 경련·RLS·정맥류 배제.</a:t>
-            </a:r>
-          </a:p>
+              <a:t>비재건성 CLI: 교감신경 신경파괴가 절단 외 대안이 없는 환자의 통증조절에 효과적·안전(Barreto 2018).</a:t>
+            </a:r>
+          </a:p>
+        </p:txBody>
+      </p:sp>
+      <p:sp>
+        <p:nvSpPr>
+          <p:cNvPr id="9" name="Rounded Rectangle 8"/>
+          <p:cNvSpPr/>
+          <p:nvPr/>
+        </p:nvSpPr>
+        <p:spPr>
+          <a:xfrm>
+            <a:off x="7406640" y="1463040"/>
+            <a:ext cx="4114800" cy="4480560"/>
+          </a:xfrm>
+          <a:prstGeom prst="roundRect">
+            <a:avLst>
+              <a:gd name="adj" fmla="val 8000"/>
+            </a:avLst>
+          </a:prstGeom>
+          <a:solidFill>
+            <a:srgbClr val="1B355E"/>
+          </a:solidFill>
+          <a:ln>
+            <a:noFill/>
+          </a:ln>
+          <a:effectLst/>
+        </p:spPr>
+        <p:style>
+          <a:lnRef idx="1">
+            <a:schemeClr val="accent1"/>
+          </a:lnRef>
+          <a:fillRef idx="3">
+            <a:schemeClr val="accent1"/>
+          </a:fillRef>
+          <a:effectRef idx="2">
+            <a:schemeClr val="accent1"/>
+          </a:effectRef>
+          <a:fontRef idx="minor">
+            <a:schemeClr val="lt1"/>
+          </a:fontRef>
+        </p:style>
+        <p:txBody>
+          <a:bodyPr rtlCol="0" anchor="ctr"/>
+          <a:lstStyle/>
+          <a:p>
+            <a:pPr algn="ctr"/>
+          </a:p>
+        </p:txBody>
+      </p:sp>
+      <p:sp>
+        <p:nvSpPr>
+          <p:cNvPr id="10" name="TextBox 9"/>
+          <p:cNvSpPr txBox="1"/>
+          <p:nvPr/>
+        </p:nvSpPr>
+        <p:spPr>
+          <a:xfrm>
+            <a:off x="7680960" y="1691640"/>
+            <a:ext cx="3657600" cy="365760"/>
+          </a:xfrm>
+          <a:prstGeom prst="rect">
+            <a:avLst/>
+          </a:prstGeom>
+          <a:noFill/>
+        </p:spPr>
+        <p:txBody>
+          <a:bodyPr wrap="square" anchor="t" lIns="0" rIns="0" tIns="0" bIns="0">
+            <a:spAutoFit/>
+          </a:bodyPr>
+          <a:lstStyle/>
           <a:p>
             <a:pPr algn="l">
               <a:lnSpc>
                 <a:spcPct val="108000"/>
               </a:lnSpc>
               <a:spcAft>
+                <a:spcPts val="400"/>
+              </a:spcAft>
+            </a:pPr>
+            <a:r>
+              <a:rPr sz="1300" b="1" i="0">
+                <a:solidFill>
+                  <a:srgbClr val="BFD3E6"/>
+                </a:solidFill>
+                <a:latin typeface="NanumGothic"/>
+                <a:ea typeface="NanumGothic"/>
+              </a:rPr>
+              <a:t>실측 수치(Dickey 2024)</a:t>
+            </a:r>
+          </a:p>
+        </p:txBody>
+      </p:sp>
+      <p:sp>
+        <p:nvSpPr>
+          <p:cNvPr id="11" name="TextBox 10"/>
+          <p:cNvSpPr txBox="1"/>
+          <p:nvPr/>
+        </p:nvSpPr>
+        <p:spPr>
+          <a:xfrm>
+            <a:off x="7680960" y="2194560"/>
+            <a:ext cx="3611880" cy="3657600"/>
+          </a:xfrm>
+          <a:prstGeom prst="rect">
+            <a:avLst/>
+          </a:prstGeom>
+          <a:noFill/>
+        </p:spPr>
+        <p:txBody>
+          <a:bodyPr wrap="square" lIns="0" rIns="0" tIns="0" bIns="0">
+            <a:spAutoFit/>
+          </a:bodyPr>
+          <a:lstStyle/>
+          <a:p>
+            <a:pPr algn="l">
+              <a:lnSpc>
+                <a:spcPct val="108000"/>
+              </a:lnSpc>
+              <a:spcAft>
                 <a:spcPts val="800"/>
               </a:spcAft>
             </a:pPr>
             <a:r>
-              <a:rPr sz="979" b="1" i="0">
+              <a:rPr sz="875" b="1" i="0">
                 <a:solidFill>
                   <a:srgbClr val="2C898A"/>
                 </a:solidFill>
@@ -4914,14 +5351,14 @@
               <a:t>●  </a:t>
             </a:r>
             <a:r>
-              <a:rPr sz="1400" b="0" i="0">
-                <a:solidFill>
-                  <a:srgbClr val="1A202C"/>
-                </a:solidFill>
-                <a:latin typeface="NanumGothic"/>
-                <a:ea typeface="NanumGothic"/>
-              </a:rPr>
-              <a:t>② 방향 설정: 교감매개통·허혈로 판단되면 교감신경 축(L2–L3)을 겨냥.</a:t>
+              <a:rPr sz="1250" b="1" i="0">
+                <a:solidFill>
+                  <a:srgbClr val="9FE0D8"/>
+                </a:solidFill>
+                <a:latin typeface="NanumGothic"/>
+                <a:ea typeface="NanumGothic"/>
+              </a:rPr>
+              <a:t>후경골동맥 +58.8%</a:t>
             </a:r>
           </a:p>
           <a:p>
@@ -4934,7 +5371,7 @@
               </a:spcAft>
             </a:pPr>
             <a:r>
-              <a:rPr sz="979" b="1" i="0">
+              <a:rPr sz="875" b="1" i="0">
                 <a:solidFill>
                   <a:srgbClr val="2C898A"/>
                 </a:solidFill>
@@ -4944,14 +5381,14 @@
               <a:t>●  </a:t>
             </a:r>
             <a:r>
-              <a:rPr sz="1400" b="1" i="0">
-                <a:solidFill>
-                  <a:srgbClr val="2E7D32"/>
-                </a:solidFill>
-                <a:latin typeface="NanumGothic"/>
-                <a:ea typeface="NanumGothic"/>
-              </a:rPr>
-              <a:t>③ 진단적 차단: 투시 유도 국소마취제 LSB → 피부온도 ≥2°C 상승·통증 반응 확인.</a:t>
+              <a:rPr sz="1250" b="0" i="0">
+                <a:solidFill>
+                  <a:srgbClr val="FFFFFF"/>
+                </a:solidFill>
+                <a:latin typeface="NanumGothic"/>
+                <a:ea typeface="NanumGothic"/>
+              </a:rPr>
+              <a:t>모세혈관 재충혈 3.92→1.30초</a:t>
             </a:r>
           </a:p>
           <a:p>
@@ -4964,7 +5401,7 @@
               </a:spcAft>
             </a:pPr>
             <a:r>
-              <a:rPr sz="979" b="1" i="0">
+              <a:rPr sz="875" b="1" i="0">
                 <a:solidFill>
                   <a:srgbClr val="2C898A"/>
                 </a:solidFill>
@@ -4974,14 +5411,14 @@
               <a:t>●  </a:t>
             </a:r>
             <a:r>
-              <a:rPr sz="1400" b="1" i="0">
-                <a:solidFill>
-                  <a:srgbClr val="2E7D32"/>
-                </a:solidFill>
-                <a:latin typeface="NanumGothic"/>
-                <a:ea typeface="NanumGothic"/>
-              </a:rPr>
-              <a:t>④ 반응 양호 시: 치료적 반복 차단, 또는 신경파괴(무수알코올/phenol)·RFA로 장기 완화.</a:t>
+              <a:rPr sz="1250" b="0" i="0">
+                <a:solidFill>
+                  <a:srgbClr val="FFFFFF"/>
+                </a:solidFill>
+                <a:latin typeface="NanumGothic"/>
+                <a:ea typeface="NanumGothic"/>
+              </a:rPr>
+              <a:t>족부온도 +2.8°C</a:t>
             </a:r>
           </a:p>
           <a:p>
@@ -4994,7 +5431,7 @@
               </a:spcAft>
             </a:pPr>
             <a:r>
-              <a:rPr sz="979" b="1" i="0">
+              <a:rPr sz="875" b="1" i="0">
                 <a:solidFill>
                   <a:srgbClr val="2C898A"/>
                 </a:solidFill>
@@ -5004,51 +5441,21 @@
               <a:t>●  </a:t>
             </a:r>
             <a:r>
-              <a:rPr sz="1400" b="0" i="0">
-                <a:solidFill>
-                  <a:srgbClr val="1A202C"/>
-                </a:solidFill>
-                <a:latin typeface="NanumGothic"/>
-                <a:ea typeface="NanumGothic"/>
-              </a:rPr>
-              <a:t>⑤ 대상별: CRPS는 조기(≤12개월) 유리 · 난치성 당뇨병성 신경병증은 지속 LSB+신경파괴(RCT).</a:t>
-            </a:r>
-          </a:p>
-          <a:p>
-            <a:pPr algn="l">
-              <a:lnSpc>
-                <a:spcPct val="108000"/>
-              </a:lnSpc>
-              <a:spcAft>
-                <a:spcPts val="800"/>
-              </a:spcAft>
-            </a:pPr>
-            <a:r>
-              <a:rPr sz="1400" b="1" i="0">
-                <a:solidFill>
-                  <a:srgbClr val="5A6B7B"/>
-                </a:solidFill>
-                <a:latin typeface="NanumGothic"/>
-                <a:ea typeface="NanumGothic"/>
-              </a:rPr>
-              <a:t/>
-            </a:r>
-            <a:r>
-              <a:rPr sz="1400" b="1" i="0">
-                <a:solidFill>
-                  <a:srgbClr val="1F6E70"/>
-                </a:solidFill>
-                <a:latin typeface="NanumGothic"/>
-                <a:ea typeface="NanumGothic"/>
-              </a:rPr>
-              <a:t>⑥ 주의: 특발성 NLC·정맥질환은 적응 아님 · 합병증(생식대퇴신경통 5–10% 등) 사전 고지.</a:t>
-            </a:r>
-          </a:p>
-        </p:txBody>
-      </p:sp>
-      <p:sp>
-        <p:nvSpPr>
-          <p:cNvPr id="9" name="TextBox 8"/>
+              <a:rPr sz="1250" b="1" i="0">
+                <a:solidFill>
+                  <a:srgbClr val="9FE0D8"/>
+                </a:solidFill>
+                <a:latin typeface="NanumGothic"/>
+                <a:ea typeface="NanumGothic"/>
+              </a:rPr>
+              <a:t>→ 관류 개선의 객관 근거</a:t>
+            </a:r>
+          </a:p>
+        </p:txBody>
+      </p:sp>
+      <p:sp>
+        <p:nvSpPr>
+          <p:cNvPr id="12" name="TextBox 11"/>
           <p:cNvSpPr txBox="1"/>
           <p:nvPr/>
         </p:nvSpPr>
@@ -5084,14 +5491,14 @@
                 <a:latin typeface="NanumGothic"/>
                 <a:ea typeface="NanumGothic"/>
               </a:rPr>
-              <a:t>근거: 교육용 제안 · 개별 적용은 임상 판단 · 신경파괴는 진단차단 양성 시에만</a:t>
-            </a:r>
-          </a:p>
-        </p:txBody>
-      </p:sp>
-      <p:sp>
-        <p:nvSpPr>
-          <p:cNvPr id="10" name="TextBox 9"/>
+              <a:t>근거: Dickey 2024(Cureus); Medicina 2024; Barreto 2018</a:t>
+            </a:r>
+          </a:p>
+        </p:txBody>
+      </p:sp>
+      <p:sp>
+        <p:nvSpPr>
+          <p:cNvPr id="13" name="TextBox 12"/>
           <p:cNvSpPr txBox="1"/>
           <p:nvPr/>
         </p:nvSpPr>
@@ -5158,52 +5565,8 @@
         </p:nvSpPr>
         <p:spPr>
           <a:xfrm>
-            <a:off x="0" y="0"/>
-            <a:ext cx="12191695" cy="6858000"/>
-          </a:xfrm>
-          <a:prstGeom prst="rect">
-            <a:avLst/>
-          </a:prstGeom>
-          <a:solidFill>
-            <a:srgbClr val="1B355E"/>
-          </a:solidFill>
-          <a:ln>
-            <a:noFill/>
-          </a:ln>
-          <a:effectLst/>
-        </p:spPr>
-        <p:style>
-          <a:lnRef idx="1">
-            <a:schemeClr val="accent1"/>
-          </a:lnRef>
-          <a:fillRef idx="3">
-            <a:schemeClr val="accent1"/>
-          </a:fillRef>
-          <a:effectRef idx="2">
-            <a:schemeClr val="accent1"/>
-          </a:effectRef>
-          <a:fontRef idx="minor">
-            <a:schemeClr val="lt1"/>
-          </a:fontRef>
-        </p:style>
-        <p:txBody>
-          <a:bodyPr rtlCol="0" anchor="ctr"/>
-          <a:lstStyle/>
-          <a:p>
-            <a:pPr algn="ctr"/>
-          </a:p>
-        </p:txBody>
-      </p:sp>
-      <p:sp>
-        <p:nvSpPr>
-          <p:cNvPr id="3" name="Rectangle 2"/>
-          <p:cNvSpPr/>
-          <p:nvPr/>
-        </p:nvSpPr>
-        <p:spPr>
-          <a:xfrm>
-            <a:off x="0" y="0"/>
-            <a:ext cx="201168" cy="6858000"/>
+            <a:off x="502920" y="310896"/>
+            <a:ext cx="109728" cy="457200"/>
           </a:xfrm>
           <a:prstGeom prst="rect">
             <a:avLst/>
@@ -5240,14 +5603,57 @@
       </p:sp>
       <p:sp>
         <p:nvSpPr>
+          <p:cNvPr id="3" name="TextBox 2"/>
+          <p:cNvSpPr txBox="1"/>
+          <p:nvPr/>
+        </p:nvSpPr>
+        <p:spPr>
+          <a:xfrm>
+            <a:off x="731520" y="237744"/>
+            <a:ext cx="9509760" cy="685800"/>
+          </a:xfrm>
+          <a:prstGeom prst="rect">
+            <a:avLst/>
+          </a:prstGeom>
+          <a:noFill/>
+        </p:spPr>
+        <p:txBody>
+          <a:bodyPr wrap="square" anchor="ctr" lIns="0" rIns="0" tIns="0" bIns="0">
+            <a:spAutoFit/>
+          </a:bodyPr>
+          <a:lstStyle/>
+          <a:p>
+            <a:pPr algn="l">
+              <a:lnSpc>
+                <a:spcPct val="108000"/>
+              </a:lnSpc>
+              <a:spcAft>
+                <a:spcPts val="400"/>
+              </a:spcAft>
+            </a:pPr>
+            <a:r>
+              <a:rPr sz="2400" b="1" i="0">
+                <a:solidFill>
+                  <a:srgbClr val="1B355E"/>
+                </a:solidFill>
+                <a:latin typeface="NanumGothic"/>
+                <a:ea typeface="NanumGothic"/>
+              </a:rPr>
+              <a:t>효과 (2) CRPS · 기전</a:t>
+            </a:r>
+          </a:p>
+        </p:txBody>
+      </p:sp>
+      <p:sp>
+        <p:nvSpPr>
           <p:cNvPr id="4" name="TextBox 3"/>
           <p:cNvSpPr txBox="1"/>
           <p:nvPr/>
         </p:nvSpPr>
         <p:spPr>
           <a:xfrm>
-            <a:off x="822960" y="640080"/>
-            <a:ext cx="10515600" cy="457200"/>
+            <a:off x="749808" y="109728"/>
+            <a:ext cx="7315200" cy="219456"/>
           </a:xfrm>
           <a:prstGeom prst="rect">
             <a:avLst/>
@@ -5269,77 +5675,34 @@
               </a:spcAft>
             </a:pPr>
             <a:r>
-              <a:rPr sz="1300" b="1" i="0">
-                <a:solidFill>
-                  <a:srgbClr val="9FE0D8"/>
-                </a:solidFill>
-                <a:latin typeface="NanumGothic"/>
-                <a:ea typeface="NanumGothic"/>
-              </a:rPr>
-              <a:t>핵심 메시지 — LSB</a:t>
-            </a:r>
-          </a:p>
-        </p:txBody>
-      </p:sp>
-      <p:sp>
-        <p:nvSpPr>
-          <p:cNvPr id="5" name="TextBox 4"/>
-          <p:cNvSpPr txBox="1"/>
-          <p:nvPr/>
-        </p:nvSpPr>
-        <p:spPr>
-          <a:xfrm>
-            <a:off x="822960" y="1097280"/>
-            <a:ext cx="10515600" cy="914400"/>
-          </a:xfrm>
-          <a:prstGeom prst="rect">
-            <a:avLst/>
-          </a:prstGeom>
-          <a:noFill/>
-        </p:spPr>
-        <p:txBody>
-          <a:bodyPr wrap="square" anchor="t" lIns="0" rIns="0" tIns="0" bIns="0">
-            <a:spAutoFit/>
-          </a:bodyPr>
-          <a:lstStyle/>
-          <a:p>
-            <a:pPr algn="l">
-              <a:lnSpc>
-                <a:spcPct val="110000"/>
-              </a:lnSpc>
-              <a:spcAft>
-                <a:spcPts val="400"/>
-              </a:spcAft>
-            </a:pPr>
-            <a:r>
-              <a:rPr sz="2200" b="1" i="0">
-                <a:solidFill>
-                  <a:srgbClr val="FFFFFF"/>
-                </a:solidFill>
-                <a:latin typeface="NanumGothic"/>
-                <a:ea typeface="NanumGothic"/>
-              </a:rPr>
-              <a:t>표준은 투시 유도 방척추 접근, 성공은 온도 ≥2°C</a:t>
-            </a:r>
-          </a:p>
-        </p:txBody>
-      </p:sp>
-      <p:sp>
-        <p:nvSpPr>
-          <p:cNvPr id="6" name="Rectangle 5"/>
+              <a:rPr sz="1100" b="1" i="0">
+                <a:solidFill>
+                  <a:srgbClr val="1F6E70"/>
+                </a:solidFill>
+                <a:latin typeface="NanumGothic"/>
+                <a:ea typeface="NanumGothic"/>
+              </a:rPr>
+              <a:t>효과</a:t>
+            </a:r>
+          </a:p>
+        </p:txBody>
+      </p:sp>
+      <p:sp>
+        <p:nvSpPr>
+          <p:cNvPr id="5" name="Rectangle 4"/>
           <p:cNvSpPr/>
           <p:nvPr/>
         </p:nvSpPr>
         <p:spPr>
           <a:xfrm>
-            <a:off x="822960" y="2322576"/>
-            <a:ext cx="146304" cy="445385"/>
+            <a:off x="731520" y="969264"/>
+            <a:ext cx="10881360" cy="17780"/>
           </a:xfrm>
           <a:prstGeom prst="rect">
             <a:avLst/>
           </a:prstGeom>
           <a:solidFill>
-            <a:srgbClr val="2C898A"/>
+            <a:srgbClr val="D5DEE7"/>
           </a:solidFill>
           <a:ln>
             <a:noFill/>
@@ -5370,106 +5733,22 @@
       </p:sp>
       <p:sp>
         <p:nvSpPr>
-          <p:cNvPr id="7" name="TextBox 6"/>
-          <p:cNvSpPr txBox="1"/>
-          <p:nvPr/>
-        </p:nvSpPr>
-        <p:spPr>
-          <a:xfrm>
-            <a:off x="1143000" y="2286000"/>
-            <a:ext cx="2926080" cy="674827"/>
-          </a:xfrm>
-          <a:prstGeom prst="rect">
-            <a:avLst/>
-          </a:prstGeom>
-          <a:noFill/>
-        </p:spPr>
-        <p:txBody>
-          <a:bodyPr wrap="square" anchor="ctr" lIns="0" rIns="0" tIns="0" bIns="0">
-            <a:spAutoFit/>
-          </a:bodyPr>
-          <a:lstStyle/>
-          <a:p>
-            <a:pPr algn="l">
-              <a:lnSpc>
-                <a:spcPct val="108000"/>
-              </a:lnSpc>
-              <a:spcAft>
-                <a:spcPts val="400"/>
-              </a:spcAft>
-            </a:pPr>
-            <a:r>
-              <a:rPr sz="1400" b="1" i="0">
-                <a:solidFill>
-                  <a:srgbClr val="9FE0D8"/>
-                </a:solidFill>
-                <a:latin typeface="NanumGothic"/>
-                <a:ea typeface="NanumGothic"/>
-              </a:rPr>
-              <a:t>방법</a:t>
-            </a:r>
-          </a:p>
-        </p:txBody>
-      </p:sp>
-      <p:sp>
-        <p:nvSpPr>
-          <p:cNvPr id="8" name="TextBox 7"/>
-          <p:cNvSpPr txBox="1"/>
-          <p:nvPr/>
-        </p:nvSpPr>
-        <p:spPr>
-          <a:xfrm>
-            <a:off x="4114800" y="2286000"/>
-            <a:ext cx="7406640" cy="674827"/>
-          </a:xfrm>
-          <a:prstGeom prst="rect">
-            <a:avLst/>
-          </a:prstGeom>
-          <a:noFill/>
-        </p:spPr>
-        <p:txBody>
-          <a:bodyPr wrap="square" anchor="ctr" lIns="0" rIns="0" tIns="0" bIns="0">
-            <a:spAutoFit/>
-          </a:bodyPr>
-          <a:lstStyle/>
-          <a:p>
-            <a:pPr algn="l">
-              <a:lnSpc>
-                <a:spcPct val="105000"/>
-              </a:lnSpc>
-              <a:spcAft>
-                <a:spcPts val="400"/>
-              </a:spcAft>
-            </a:pPr>
-            <a:r>
-              <a:rPr sz="1250" b="0" i="0">
-                <a:solidFill>
-                  <a:srgbClr val="FFFFFF"/>
-                </a:solidFill>
-                <a:latin typeface="NanumGothic"/>
-                <a:ea typeface="NanumGothic"/>
-              </a:rPr>
-              <a:t>L2–L3 방척추 접근·투시, 정중선 7 cm 외측, 조영제 두미측 확산, 성공지표 온도 ≥2°C.</a:t>
-            </a:r>
-          </a:p>
-        </p:txBody>
-      </p:sp>
-      <p:sp>
-        <p:nvSpPr>
-          <p:cNvPr id="9" name="Rectangle 8"/>
+          <p:cNvPr id="6" name="Rounded Rectangle 5"/>
           <p:cNvSpPr/>
           <p:nvPr/>
         </p:nvSpPr>
         <p:spPr>
           <a:xfrm>
-            <a:off x="822960" y="3072384"/>
-            <a:ext cx="146304" cy="445385"/>
-          </a:xfrm>
-          <a:prstGeom prst="rect">
-            <a:avLst/>
+            <a:off x="10426903" y="365760"/>
+            <a:ext cx="1261872" cy="347472"/>
+          </a:xfrm>
+          <a:prstGeom prst="roundRect">
+            <a:avLst>
+              <a:gd name="adj" fmla="val 8000"/>
+            </a:avLst>
           </a:prstGeom>
           <a:solidFill>
-            <a:srgbClr val="2C898A"/>
+            <a:srgbClr val="B97A0C"/>
           </a:solidFill>
           <a:ln>
             <a:noFill/>
@@ -5500,14 +5779,14 @@
       </p:sp>
       <p:sp>
         <p:nvSpPr>
-          <p:cNvPr id="10" name="TextBox 9"/>
+          <p:cNvPr id="7" name="TextBox 6"/>
           <p:cNvSpPr txBox="1"/>
           <p:nvPr/>
         </p:nvSpPr>
         <p:spPr>
           <a:xfrm>
-            <a:off x="1143000" y="3035808"/>
-            <a:ext cx="2926080" cy="674827"/>
+            <a:off x="10426903" y="365760"/>
+            <a:ext cx="1261872" cy="347472"/>
           </a:xfrm>
           <a:prstGeom prst="rect">
             <a:avLst/>
@@ -5520,37 +5799,210 @@
           </a:bodyPr>
           <a:lstStyle/>
           <a:p>
+            <a:pPr algn="ctr">
+              <a:lnSpc>
+                <a:spcPct val="108000"/>
+              </a:lnSpc>
+              <a:spcAft>
+                <a:spcPts val="400"/>
+              </a:spcAft>
+            </a:pPr>
+            <a:r>
+              <a:rPr sz="1150" b="1" i="0">
+                <a:solidFill>
+                  <a:srgbClr val="FFFFFF"/>
+                </a:solidFill>
+                <a:latin typeface="NanumGothic"/>
+                <a:ea typeface="NanumGothic"/>
+              </a:rPr>
+              <a:t>Lv III–IV</a:t>
+            </a:r>
+          </a:p>
+        </p:txBody>
+      </p:sp>
+      <p:sp>
+        <p:nvSpPr>
+          <p:cNvPr id="8" name="TextBox 7"/>
+          <p:cNvSpPr txBox="1"/>
+          <p:nvPr/>
+        </p:nvSpPr>
+        <p:spPr>
+          <a:xfrm>
+            <a:off x="731520" y="1371600"/>
+            <a:ext cx="10835640" cy="4754880"/>
+          </a:xfrm>
+          <a:prstGeom prst="rect">
+            <a:avLst/>
+          </a:prstGeom>
+          <a:noFill/>
+        </p:spPr>
+        <p:txBody>
+          <a:bodyPr wrap="square" lIns="0" rIns="0" tIns="0" bIns="0">
+            <a:spAutoFit/>
+          </a:bodyPr>
+          <a:lstStyle/>
+          <a:p>
             <a:pPr algn="l">
               <a:lnSpc>
                 <a:spcPct val="108000"/>
               </a:lnSpc>
               <a:spcAft>
-                <a:spcPts val="400"/>
-              </a:spcAft>
-            </a:pPr>
-            <a:r>
-              <a:rPr sz="1400" b="1" i="0">
-                <a:solidFill>
-                  <a:srgbClr val="9FE0D8"/>
-                </a:solidFill>
-                <a:latin typeface="NanumGothic"/>
-                <a:ea typeface="NanumGothic"/>
-              </a:rPr>
-              <a:t>약제</a:t>
-            </a:r>
-          </a:p>
-        </p:txBody>
-      </p:sp>
-      <p:sp>
-        <p:nvSpPr>
-          <p:cNvPr id="11" name="TextBox 10"/>
+                <a:spcPts val="900"/>
+              </a:spcAft>
+            </a:pPr>
+            <a:r>
+              <a:rPr sz="1050" b="1" i="0">
+                <a:solidFill>
+                  <a:srgbClr val="2C898A"/>
+                </a:solidFill>
+                <a:latin typeface="NanumGothic"/>
+                <a:ea typeface="NanumGothic"/>
+              </a:rPr>
+              <a:t>●  </a:t>
+            </a:r>
+            <a:r>
+              <a:rPr sz="1500" b="1" i="0">
+                <a:solidFill>
+                  <a:srgbClr val="1A202C"/>
+                </a:solidFill>
+                <a:latin typeface="NanumGothic"/>
+                <a:ea typeface="NanumGothic"/>
+              </a:rPr>
+              <a:t>CRPS는 교감신경 매개 통증의 전형 → LSB 후 유의한 통증완화가 축적된 근거. 최적 환자 선택·조기 시행이 성공률↑.</a:t>
+            </a:r>
+          </a:p>
+          <a:p>
+            <a:pPr algn="l">
+              <a:lnSpc>
+                <a:spcPct val="108000"/>
+              </a:lnSpc>
+              <a:spcAft>
+                <a:spcPts val="900"/>
+              </a:spcAft>
+            </a:pPr>
+            <a:r>
+              <a:rPr sz="1050" b="1" i="0">
+                <a:solidFill>
+                  <a:srgbClr val="2C898A"/>
+                </a:solidFill>
+                <a:latin typeface="NanumGothic"/>
+                <a:ea typeface="NanumGothic"/>
+              </a:rPr>
+              <a:t>●  </a:t>
+            </a:r>
+            <a:r>
+              <a:rPr sz="1500" b="0" i="0">
+                <a:solidFill>
+                  <a:srgbClr val="1A202C"/>
+                </a:solidFill>
+                <a:latin typeface="NanumGothic"/>
+                <a:ea typeface="NanumGothic"/>
+              </a:rPr>
+              <a:t>Choi 2024(Sci Rep): 교감신경 신경파괴의 효과 지속기간을 전향 관찰로 제시.</a:t>
+            </a:r>
+          </a:p>
+          <a:p>
+            <a:pPr algn="l">
+              <a:lnSpc>
+                <a:spcPct val="108000"/>
+              </a:lnSpc>
+              <a:spcAft>
+                <a:spcPts val="900"/>
+              </a:spcAft>
+            </a:pPr>
+            <a:r>
+              <a:rPr sz="1050" b="1" i="0">
+                <a:solidFill>
+                  <a:srgbClr val="2C898A"/>
+                </a:solidFill>
+                <a:latin typeface="NanumGothic"/>
+                <a:ea typeface="NanumGothic"/>
+              </a:rPr>
+              <a:t>●  </a:t>
+            </a:r>
+            <a:r>
+              <a:rPr sz="1500" b="0" i="0">
+                <a:solidFill>
+                  <a:srgbClr val="1A202C"/>
+                </a:solidFill>
+                <a:latin typeface="NanumGothic"/>
+                <a:ea typeface="NanumGothic"/>
+              </a:rPr>
+              <a:t>반응 예측: 교감신경 피부반응(sympathetic skin response)이 LSB 반응 예측에 유용(Pain Ther 2023).</a:t>
+            </a:r>
+          </a:p>
+          <a:p>
+            <a:pPr algn="l">
+              <a:lnSpc>
+                <a:spcPct val="108000"/>
+              </a:lnSpc>
+              <a:spcAft>
+                <a:spcPts val="900"/>
+              </a:spcAft>
+            </a:pPr>
+            <a:r>
+              <a:rPr sz="1050" b="1" i="0">
+                <a:solidFill>
+                  <a:srgbClr val="2C898A"/>
+                </a:solidFill>
+                <a:latin typeface="NanumGothic"/>
+                <a:ea typeface="NanumGothic"/>
+              </a:rPr>
+              <a:t>●  </a:t>
+            </a:r>
+            <a:r>
+              <a:rPr sz="1500" b="0" i="0">
+                <a:solidFill>
+                  <a:srgbClr val="5A6B7B"/>
+                </a:solidFill>
+                <a:latin typeface="NanumGothic"/>
+                <a:ea typeface="NanumGothic"/>
+              </a:rPr>
+              <a:t>한계: 중추 감작이 진행되면 시간이 지날수록 효과 감소 가능.</a:t>
+            </a:r>
+          </a:p>
+          <a:p>
+            <a:pPr algn="l">
+              <a:lnSpc>
+                <a:spcPct val="108000"/>
+              </a:lnSpc>
+              <a:spcAft>
+                <a:spcPts val="900"/>
+              </a:spcAft>
+            </a:pPr>
+            <a:r>
+              <a:rPr sz="1500" b="1" i="0">
+                <a:solidFill>
+                  <a:srgbClr val="5A6B7B"/>
+                </a:solidFill>
+                <a:latin typeface="NanumGothic"/>
+                <a:ea typeface="NanumGothic"/>
+              </a:rPr>
+              <a:t/>
+            </a:r>
+            <a:r>
+              <a:rPr sz="1500" b="1" i="0">
+                <a:solidFill>
+                  <a:srgbClr val="1F6E70"/>
+                </a:solidFill>
+                <a:latin typeface="NanumGothic"/>
+                <a:ea typeface="NanumGothic"/>
+              </a:rPr>
+              <a:t>기전 요약: 교감차단 → 측부순환 혈관확장 → 조직 산소화↑ → 통증↓ + 교감매개통 차단 + 신경파괴 직접효과.</a:t>
+            </a:r>
+          </a:p>
+        </p:txBody>
+      </p:sp>
+      <p:sp>
+        <p:nvSpPr>
+          <p:cNvPr id="9" name="TextBox 8"/>
           <p:cNvSpPr txBox="1"/>
           <p:nvPr/>
         </p:nvSpPr>
         <p:spPr>
           <a:xfrm>
-            <a:off x="4114800" y="3035808"/>
-            <a:ext cx="7406640" cy="674827"/>
+            <a:off x="731520" y="6455664"/>
+            <a:ext cx="9875520" cy="292608"/>
           </a:xfrm>
           <a:prstGeom prst="rect">
             <a:avLst/>
@@ -5565,79 +6017,35 @@
           <a:p>
             <a:pPr algn="l">
               <a:lnSpc>
-                <a:spcPct val="105000"/>
+                <a:spcPct val="108000"/>
               </a:lnSpc>
               <a:spcAft>
                 <a:spcPts val="400"/>
               </a:spcAft>
             </a:pPr>
             <a:r>
-              <a:rPr sz="1250" b="0" i="0">
-                <a:solidFill>
-                  <a:srgbClr val="FFFFFF"/>
-                </a:solidFill>
-                <a:latin typeface="NanumGothic"/>
-                <a:ea typeface="NanumGothic"/>
-              </a:rPr>
-              <a:t>진단/치료는 국소마취제, 신경파괴는 무수알코올/phenol·RFA — 진단차단 양성 시에만.</a:t>
-            </a:r>
-          </a:p>
-        </p:txBody>
-      </p:sp>
-      <p:sp>
-        <p:nvSpPr>
-          <p:cNvPr id="12" name="Rectangle 11"/>
-          <p:cNvSpPr/>
-          <p:nvPr/>
-        </p:nvSpPr>
-        <p:spPr>
-          <a:xfrm>
-            <a:off x="822960" y="3822191"/>
-            <a:ext cx="146304" cy="445385"/>
-          </a:xfrm>
-          <a:prstGeom prst="rect">
-            <a:avLst/>
-          </a:prstGeom>
-          <a:solidFill>
-            <a:srgbClr val="2C898A"/>
-          </a:solidFill>
-          <a:ln>
-            <a:noFill/>
-          </a:ln>
-          <a:effectLst/>
-        </p:spPr>
-        <p:style>
-          <a:lnRef idx="1">
-            <a:schemeClr val="accent1"/>
-          </a:lnRef>
-          <a:fillRef idx="3">
-            <a:schemeClr val="accent1"/>
-          </a:fillRef>
-          <a:effectRef idx="2">
-            <a:schemeClr val="accent1"/>
-          </a:effectRef>
-          <a:fontRef idx="minor">
-            <a:schemeClr val="lt1"/>
-          </a:fontRef>
-        </p:style>
-        <p:txBody>
-          <a:bodyPr rtlCol="0" anchor="ctr"/>
-          <a:lstStyle/>
-          <a:p>
-            <a:pPr algn="ctr"/>
-          </a:p>
-        </p:txBody>
-      </p:sp>
-      <p:sp>
-        <p:nvSpPr>
-          <p:cNvPr id="13" name="TextBox 12"/>
+              <a:rPr sz="900" b="0" i="0">
+                <a:solidFill>
+                  <a:srgbClr val="5A6B7B"/>
+                </a:solidFill>
+                <a:latin typeface="NanumGothic"/>
+                <a:ea typeface="NanumGothic"/>
+              </a:rPr>
+              <a:t>근거: Choi 2024(Sci Rep); Pain Ther 2023</a:t>
+            </a:r>
+          </a:p>
+        </p:txBody>
+      </p:sp>
+      <p:sp>
+        <p:nvSpPr>
+          <p:cNvPr id="10" name="TextBox 9"/>
           <p:cNvSpPr txBox="1"/>
           <p:nvPr/>
         </p:nvSpPr>
         <p:spPr>
           <a:xfrm>
-            <a:off x="1143000" y="3785615"/>
-            <a:ext cx="2926080" cy="674827"/>
+            <a:off x="11064240" y="6455664"/>
+            <a:ext cx="822960" cy="292608"/>
           </a:xfrm>
           <a:prstGeom prst="rect">
             <a:avLst/>
@@ -5650,7 +6058,7 @@
           </a:bodyPr>
           <a:lstStyle/>
           <a:p>
-            <a:pPr algn="l">
+            <a:pPr algn="r">
               <a:lnSpc>
                 <a:spcPct val="108000"/>
               </a:lnSpc>
@@ -5659,317 +6067,14 @@
               </a:spcAft>
             </a:pPr>
             <a:r>
-              <a:rPr sz="1400" b="1" i="0">
-                <a:solidFill>
-                  <a:srgbClr val="9FE0D8"/>
-                </a:solidFill>
-                <a:latin typeface="NanumGothic"/>
-                <a:ea typeface="NanumGothic"/>
-              </a:rPr>
-              <a:t>적응증</a:t>
-            </a:r>
-          </a:p>
-        </p:txBody>
-      </p:sp>
-      <p:sp>
-        <p:nvSpPr>
-          <p:cNvPr id="14" name="TextBox 13"/>
-          <p:cNvSpPr txBox="1"/>
-          <p:nvPr/>
-        </p:nvSpPr>
-        <p:spPr>
-          <a:xfrm>
-            <a:off x="4114800" y="3785615"/>
-            <a:ext cx="7406640" cy="674827"/>
-          </a:xfrm>
-          <a:prstGeom prst="rect">
-            <a:avLst/>
-          </a:prstGeom>
-          <a:noFill/>
-        </p:spPr>
-        <p:txBody>
-          <a:bodyPr wrap="square" anchor="ctr" lIns="0" rIns="0" tIns="0" bIns="0">
-            <a:spAutoFit/>
-          </a:bodyPr>
-          <a:lstStyle/>
-          <a:p>
-            <a:pPr algn="l">
-              <a:lnSpc>
-                <a:spcPct val="105000"/>
-              </a:lnSpc>
-              <a:spcAft>
-                <a:spcPts val="400"/>
-              </a:spcAft>
-            </a:pPr>
-            <a:r>
-              <a:rPr sz="1250" b="0" i="0">
-                <a:solidFill>
-                  <a:srgbClr val="FFFFFF"/>
-                </a:solidFill>
-                <a:latin typeface="NanumGothic"/>
-                <a:ea typeface="NanumGothic"/>
-              </a:rPr>
-              <a:t>조기 CRPS·PAD/CLI 안정통·신경병증·다한증 등. 특발성 NLC·정맥질환(정맥류)은 적응 아님.</a:t>
-            </a:r>
-          </a:p>
-        </p:txBody>
-      </p:sp>
-      <p:sp>
-        <p:nvSpPr>
-          <p:cNvPr id="15" name="Rectangle 14"/>
-          <p:cNvSpPr/>
-          <p:nvPr/>
-        </p:nvSpPr>
-        <p:spPr>
-          <a:xfrm>
-            <a:off x="822960" y="4572000"/>
-            <a:ext cx="146304" cy="445385"/>
-          </a:xfrm>
-          <a:prstGeom prst="rect">
-            <a:avLst/>
-          </a:prstGeom>
-          <a:solidFill>
-            <a:srgbClr val="2C898A"/>
-          </a:solidFill>
-          <a:ln>
-            <a:noFill/>
-          </a:ln>
-          <a:effectLst/>
-        </p:spPr>
-        <p:style>
-          <a:lnRef idx="1">
-            <a:schemeClr val="accent1"/>
-          </a:lnRef>
-          <a:fillRef idx="3">
-            <a:schemeClr val="accent1"/>
-          </a:fillRef>
-          <a:effectRef idx="2">
-            <a:schemeClr val="accent1"/>
-          </a:effectRef>
-          <a:fontRef idx="minor">
-            <a:schemeClr val="lt1"/>
-          </a:fontRef>
-        </p:style>
-        <p:txBody>
-          <a:bodyPr rtlCol="0" anchor="ctr"/>
-          <a:lstStyle/>
-          <a:p>
-            <a:pPr algn="ctr"/>
-          </a:p>
-        </p:txBody>
-      </p:sp>
-      <p:sp>
-        <p:nvSpPr>
-          <p:cNvPr id="16" name="TextBox 15"/>
-          <p:cNvSpPr txBox="1"/>
-          <p:nvPr/>
-        </p:nvSpPr>
-        <p:spPr>
-          <a:xfrm>
-            <a:off x="1143000" y="4535424"/>
-            <a:ext cx="2926080" cy="674827"/>
-          </a:xfrm>
-          <a:prstGeom prst="rect">
-            <a:avLst/>
-          </a:prstGeom>
-          <a:noFill/>
-        </p:spPr>
-        <p:txBody>
-          <a:bodyPr wrap="square" anchor="ctr" lIns="0" rIns="0" tIns="0" bIns="0">
-            <a:spAutoFit/>
-          </a:bodyPr>
-          <a:lstStyle/>
-          <a:p>
-            <a:pPr algn="l">
-              <a:lnSpc>
-                <a:spcPct val="108000"/>
-              </a:lnSpc>
-              <a:spcAft>
-                <a:spcPts val="400"/>
-              </a:spcAft>
-            </a:pPr>
-            <a:r>
-              <a:rPr sz="1400" b="1" i="0">
-                <a:solidFill>
-                  <a:srgbClr val="9FE0D8"/>
-                </a:solidFill>
-                <a:latin typeface="NanumGothic"/>
-                <a:ea typeface="NanumGothic"/>
-              </a:rPr>
-              <a:t>효과</a:t>
-            </a:r>
-          </a:p>
-        </p:txBody>
-      </p:sp>
-      <p:sp>
-        <p:nvSpPr>
-          <p:cNvPr id="17" name="TextBox 16"/>
-          <p:cNvSpPr txBox="1"/>
-          <p:nvPr/>
-        </p:nvSpPr>
-        <p:spPr>
-          <a:xfrm>
-            <a:off x="4114800" y="4535424"/>
-            <a:ext cx="7406640" cy="674827"/>
-          </a:xfrm>
-          <a:prstGeom prst="rect">
-            <a:avLst/>
-          </a:prstGeom>
-          <a:noFill/>
-        </p:spPr>
-        <p:txBody>
-          <a:bodyPr wrap="square" anchor="ctr" lIns="0" rIns="0" tIns="0" bIns="0">
-            <a:spAutoFit/>
-          </a:bodyPr>
-          <a:lstStyle/>
-          <a:p>
-            <a:pPr algn="l">
-              <a:lnSpc>
-                <a:spcPct val="105000"/>
-              </a:lnSpc>
-              <a:spcAft>
-                <a:spcPts val="400"/>
-              </a:spcAft>
-            </a:pPr>
-            <a:r>
-              <a:rPr sz="1250" b="0" i="0">
-                <a:solidFill>
-                  <a:srgbClr val="FFFFFF"/>
-                </a:solidFill>
-                <a:latin typeface="NanumGothic"/>
-                <a:ea typeface="NanumGothic"/>
-              </a:rPr>
-              <a:t>관류 실측 개선(Dickey), 허혈통 최대 75%↓, CRPS 통증완화(교감피부반응으로 예측).</a:t>
-            </a:r>
-          </a:p>
-        </p:txBody>
-      </p:sp>
-      <p:sp>
-        <p:nvSpPr>
-          <p:cNvPr id="18" name="Rectangle 17"/>
-          <p:cNvSpPr/>
-          <p:nvPr/>
-        </p:nvSpPr>
-        <p:spPr>
-          <a:xfrm>
-            <a:off x="822960" y="5321807"/>
-            <a:ext cx="146304" cy="445385"/>
-          </a:xfrm>
-          <a:prstGeom prst="rect">
-            <a:avLst/>
-          </a:prstGeom>
-          <a:solidFill>
-            <a:srgbClr val="2C898A"/>
-          </a:solidFill>
-          <a:ln>
-            <a:noFill/>
-          </a:ln>
-          <a:effectLst/>
-        </p:spPr>
-        <p:style>
-          <a:lnRef idx="1">
-            <a:schemeClr val="accent1"/>
-          </a:lnRef>
-          <a:fillRef idx="3">
-            <a:schemeClr val="accent1"/>
-          </a:fillRef>
-          <a:effectRef idx="2">
-            <a:schemeClr val="accent1"/>
-          </a:effectRef>
-          <a:fontRef idx="minor">
-            <a:schemeClr val="lt1"/>
-          </a:fontRef>
-        </p:style>
-        <p:txBody>
-          <a:bodyPr rtlCol="0" anchor="ctr"/>
-          <a:lstStyle/>
-          <a:p>
-            <a:pPr algn="ctr"/>
-          </a:p>
-        </p:txBody>
-      </p:sp>
-      <p:sp>
-        <p:nvSpPr>
-          <p:cNvPr id="19" name="TextBox 18"/>
-          <p:cNvSpPr txBox="1"/>
-          <p:nvPr/>
-        </p:nvSpPr>
-        <p:spPr>
-          <a:xfrm>
-            <a:off x="1143000" y="5285231"/>
-            <a:ext cx="2926080" cy="674827"/>
-          </a:xfrm>
-          <a:prstGeom prst="rect">
-            <a:avLst/>
-          </a:prstGeom>
-          <a:noFill/>
-        </p:spPr>
-        <p:txBody>
-          <a:bodyPr wrap="square" anchor="ctr" lIns="0" rIns="0" tIns="0" bIns="0">
-            <a:spAutoFit/>
-          </a:bodyPr>
-          <a:lstStyle/>
-          <a:p>
-            <a:pPr algn="l">
-              <a:lnSpc>
-                <a:spcPct val="108000"/>
-              </a:lnSpc>
-              <a:spcAft>
-                <a:spcPts val="400"/>
-              </a:spcAft>
-            </a:pPr>
-            <a:r>
-              <a:rPr sz="1400" b="1" i="0">
-                <a:solidFill>
-                  <a:srgbClr val="9FE0D8"/>
-                </a:solidFill>
-                <a:latin typeface="NanumGothic"/>
-                <a:ea typeface="NanumGothic"/>
-              </a:rPr>
-              <a:t>근거</a:t>
-            </a:r>
-          </a:p>
-        </p:txBody>
-      </p:sp>
-      <p:sp>
-        <p:nvSpPr>
-          <p:cNvPr id="20" name="TextBox 19"/>
-          <p:cNvSpPr txBox="1"/>
-          <p:nvPr/>
-        </p:nvSpPr>
-        <p:spPr>
-          <a:xfrm>
-            <a:off x="4114800" y="5285231"/>
-            <a:ext cx="7406640" cy="674827"/>
-          </a:xfrm>
-          <a:prstGeom prst="rect">
-            <a:avLst/>
-          </a:prstGeom>
-          <a:noFill/>
-        </p:spPr>
-        <p:txBody>
-          <a:bodyPr wrap="square" anchor="ctr" lIns="0" rIns="0" tIns="0" bIns="0">
-            <a:spAutoFit/>
-          </a:bodyPr>
-          <a:lstStyle/>
-          <a:p>
-            <a:pPr algn="l">
-              <a:lnSpc>
-                <a:spcPct val="105000"/>
-              </a:lnSpc>
-              <a:spcAft>
-                <a:spcPts val="400"/>
-              </a:spcAft>
-            </a:pPr>
-            <a:r>
-              <a:rPr sz="1250" b="0" i="0">
-                <a:solidFill>
-                  <a:srgbClr val="FFFFFF"/>
-                </a:solidFill>
-                <a:latin typeface="NanumGothic"/>
-                <a:ea typeface="NanumGothic"/>
-              </a:rPr>
-              <a:t>대규모 RCT 부족(관찰·증례 중심). 조기 CRPS·비재건성 CLI에서 유용.</a:t>
+              <a:rPr sz="1000" b="1" i="0">
+                <a:solidFill>
+                  <a:srgbClr val="5A6B7B"/>
+                </a:solidFill>
+                <a:latin typeface="NanumGothic"/>
+                <a:ea typeface="NanumGothic"/>
+              </a:rPr>
+              <a:t>13</a:t>
             </a:r>
           </a:p>
         </p:txBody>
@@ -6074,7 +6179,7 @@
                 <a:latin typeface="NanumGothic"/>
                 <a:ea typeface="NanumGothic"/>
               </a:rPr>
-              <a:t>참고문헌 — LSB</a:t>
+              <a:t>근거수준 · 결론</a:t>
             </a:r>
           </a:p>
         </p:txBody>
@@ -6117,7 +6222,7 @@
                 <a:latin typeface="NanumGothic"/>
                 <a:ea typeface="NanumGothic"/>
               </a:rPr>
-              <a:t>참고문헌</a:t>
+              <a:t>안전성 · 결론</a:t>
             </a:r>
           </a:p>
         </p:txBody>
@@ -6174,13 +6279,347 @@
         </p:nvSpPr>
         <p:spPr>
           <a:xfrm>
-            <a:off x="10317175" y="365760"/>
-            <a:ext cx="1371600" cy="347472"/>
+            <a:off x="11194999" y="365760"/>
+            <a:ext cx="493776" cy="347472"/>
           </a:xfrm>
           <a:prstGeom prst="roundRect">
             <a:avLst>
               <a:gd name="adj" fmla="val 8000"/>
             </a:avLst>
+          </a:prstGeom>
+          <a:solidFill>
+            <a:srgbClr val="B03A2E"/>
+          </a:solidFill>
+          <a:ln>
+            <a:noFill/>
+          </a:ln>
+          <a:effectLst/>
+        </p:spPr>
+        <p:style>
+          <a:lnRef idx="1">
+            <a:schemeClr val="accent1"/>
+          </a:lnRef>
+          <a:fillRef idx="3">
+            <a:schemeClr val="accent1"/>
+          </a:fillRef>
+          <a:effectRef idx="2">
+            <a:schemeClr val="accent1"/>
+          </a:effectRef>
+          <a:fontRef idx="minor">
+            <a:schemeClr val="lt1"/>
+          </a:fontRef>
+        </p:style>
+        <p:txBody>
+          <a:bodyPr rtlCol="0" anchor="ctr"/>
+          <a:lstStyle/>
+          <a:p>
+            <a:pPr algn="ctr"/>
+          </a:p>
+        </p:txBody>
+      </p:sp>
+      <p:sp>
+        <p:nvSpPr>
+          <p:cNvPr id="7" name="TextBox 6"/>
+          <p:cNvSpPr txBox="1"/>
+          <p:nvPr/>
+        </p:nvSpPr>
+        <p:spPr>
+          <a:xfrm>
+            <a:off x="11194999" y="365760"/>
+            <a:ext cx="493776" cy="347472"/>
+          </a:xfrm>
+          <a:prstGeom prst="rect">
+            <a:avLst/>
+          </a:prstGeom>
+          <a:noFill/>
+        </p:spPr>
+        <p:txBody>
+          <a:bodyPr wrap="square" anchor="ctr" lIns="0" rIns="0" tIns="0" bIns="0">
+            <a:spAutoFit/>
+          </a:bodyPr>
+          <a:lstStyle/>
+          <a:p>
+            <a:pPr algn="ctr">
+              <a:lnSpc>
+                <a:spcPct val="108000"/>
+              </a:lnSpc>
+              <a:spcAft>
+                <a:spcPts val="400"/>
+              </a:spcAft>
+            </a:pPr>
+            <a:r>
+              <a:rPr sz="1150" b="1" i="0">
+                <a:solidFill>
+                  <a:srgbClr val="FFFFFF"/>
+                </a:solidFill>
+                <a:latin typeface="NanumGothic"/>
+                <a:ea typeface="NanumGothic"/>
+              </a:rPr>
+              <a:t>결론</a:t>
+            </a:r>
+          </a:p>
+        </p:txBody>
+      </p:sp>
+      <p:sp>
+        <p:nvSpPr>
+          <p:cNvPr id="8" name="TextBox 7"/>
+          <p:cNvSpPr txBox="1"/>
+          <p:nvPr/>
+        </p:nvSpPr>
+        <p:spPr>
+          <a:xfrm>
+            <a:off x="731520" y="1371600"/>
+            <a:ext cx="10835640" cy="4754880"/>
+          </a:xfrm>
+          <a:prstGeom prst="rect">
+            <a:avLst/>
+          </a:prstGeom>
+          <a:noFill/>
+        </p:spPr>
+        <p:txBody>
+          <a:bodyPr wrap="square" lIns="0" rIns="0" tIns="0" bIns="0">
+            <a:spAutoFit/>
+          </a:bodyPr>
+          <a:lstStyle/>
+          <a:p>
+            <a:pPr algn="l">
+              <a:lnSpc>
+                <a:spcPct val="108000"/>
+              </a:lnSpc>
+              <a:spcAft>
+                <a:spcPts val="900"/>
+              </a:spcAft>
+            </a:pPr>
+            <a:r>
+              <a:rPr sz="1050" b="1" i="0">
+                <a:solidFill>
+                  <a:srgbClr val="2C898A"/>
+                </a:solidFill>
+                <a:latin typeface="NanumGothic"/>
+                <a:ea typeface="NanumGothic"/>
+              </a:rPr>
+              <a:t>●  </a:t>
+            </a:r>
+            <a:r>
+              <a:rPr sz="1500" b="1" i="0">
+                <a:solidFill>
+                  <a:srgbClr val="B03A2E"/>
+                </a:solidFill>
+                <a:latin typeface="NanumGothic"/>
+                <a:ea typeface="NanumGothic"/>
+              </a:rPr>
+              <a:t>합병증·회피는 앞의 조감도·회피표 참고 — 대부분 영상유도·정확한 바늘 위치로 예방 가능.</a:t>
+            </a:r>
+          </a:p>
+          <a:p>
+            <a:pPr algn="l">
+              <a:lnSpc>
+                <a:spcPct val="108000"/>
+              </a:lnSpc>
+              <a:spcAft>
+                <a:spcPts val="900"/>
+              </a:spcAft>
+            </a:pPr>
+            <a:r>
+              <a:rPr sz="1050" b="1" i="0">
+                <a:solidFill>
+                  <a:srgbClr val="2C898A"/>
+                </a:solidFill>
+                <a:latin typeface="NanumGothic"/>
+                <a:ea typeface="NanumGothic"/>
+              </a:rPr>
+              <a:t>●  </a:t>
+            </a:r>
+            <a:r>
+              <a:rPr sz="1500" b="0" i="0">
+                <a:solidFill>
+                  <a:srgbClr val="1A202C"/>
+                </a:solidFill>
+                <a:latin typeface="NanumGothic"/>
+                <a:ea typeface="NanumGothic"/>
+              </a:rPr>
+              <a:t>근거수준: 대부분 관찰·증례군·소규모 전향연구로 대규모 RCT는 부족(허혈·CRPS Level III~IV). 단, 난치성 당뇨병성 신경병증엔 RCT 존재.</a:t>
+            </a:r>
+          </a:p>
+          <a:p>
+            <a:pPr algn="l">
+              <a:lnSpc>
+                <a:spcPct val="108000"/>
+              </a:lnSpc>
+              <a:spcAft>
+                <a:spcPts val="900"/>
+              </a:spcAft>
+            </a:pPr>
+            <a:r>
+              <a:rPr sz="1050" b="1" i="0">
+                <a:solidFill>
+                  <a:srgbClr val="2C898A"/>
+                </a:solidFill>
+                <a:latin typeface="NanumGothic"/>
+                <a:ea typeface="NanumGothic"/>
+              </a:rPr>
+              <a:t>●  </a:t>
+            </a:r>
+            <a:r>
+              <a:rPr sz="1500" b="0" i="0">
+                <a:solidFill>
+                  <a:srgbClr val="1A202C"/>
+                </a:solidFill>
+                <a:latin typeface="NanumGothic"/>
+                <a:ea typeface="NanumGothic"/>
+              </a:rPr>
+              <a:t>시행 원칙: 원인 감별 → 진단적 국소마취제 차단(온도 ≥2°C 확인) → 반응 양호 시 신경파괴/RFA.</a:t>
+            </a:r>
+          </a:p>
+          <a:p>
+            <a:pPr algn="l">
+              <a:lnSpc>
+                <a:spcPct val="108000"/>
+              </a:lnSpc>
+              <a:spcAft>
+                <a:spcPts val="900"/>
+              </a:spcAft>
+            </a:pPr>
+            <a:r>
+              <a:rPr sz="1500" b="1" i="0">
+                <a:solidFill>
+                  <a:srgbClr val="5A6B7B"/>
+                </a:solidFill>
+                <a:latin typeface="NanumGothic"/>
+                <a:ea typeface="NanumGothic"/>
+              </a:rPr>
+              <a:t/>
+            </a:r>
+            <a:r>
+              <a:rPr sz="1500" b="1" i="0">
+                <a:solidFill>
+                  <a:srgbClr val="1F6E70"/>
+                </a:solidFill>
+                <a:latin typeface="NanumGothic"/>
+                <a:ea typeface="NanumGothic"/>
+              </a:rPr>
+              <a:t>그럼에도 조기 CRPS·재건 불가능한 중증 하지허혈(안정통)·난치성 신경병증에서 임상적으로 유용.</a:t>
+            </a:r>
+          </a:p>
+        </p:txBody>
+      </p:sp>
+      <p:sp>
+        <p:nvSpPr>
+          <p:cNvPr id="9" name="TextBox 8"/>
+          <p:cNvSpPr txBox="1"/>
+          <p:nvPr/>
+        </p:nvSpPr>
+        <p:spPr>
+          <a:xfrm>
+            <a:off x="731520" y="6455664"/>
+            <a:ext cx="9875520" cy="292608"/>
+          </a:xfrm>
+          <a:prstGeom prst="rect">
+            <a:avLst/>
+          </a:prstGeom>
+          <a:noFill/>
+        </p:spPr>
+        <p:txBody>
+          <a:bodyPr wrap="square" anchor="ctr" lIns="0" rIns="0" tIns="0" bIns="0">
+            <a:spAutoFit/>
+          </a:bodyPr>
+          <a:lstStyle/>
+          <a:p>
+            <a:pPr algn="l">
+              <a:lnSpc>
+                <a:spcPct val="108000"/>
+              </a:lnSpc>
+              <a:spcAft>
+                <a:spcPts val="400"/>
+              </a:spcAft>
+            </a:pPr>
+            <a:r>
+              <a:rPr sz="900" b="0" i="0">
+                <a:solidFill>
+                  <a:srgbClr val="5A6B7B"/>
+                </a:solidFill>
+                <a:latin typeface="NanumGothic"/>
+                <a:ea typeface="NanumGothic"/>
+              </a:rPr>
+              <a:t>근거: StatPearls; 문헌고찰 종합</a:t>
+            </a:r>
+          </a:p>
+        </p:txBody>
+      </p:sp>
+      <p:sp>
+        <p:nvSpPr>
+          <p:cNvPr id="10" name="TextBox 9"/>
+          <p:cNvSpPr txBox="1"/>
+          <p:nvPr/>
+        </p:nvSpPr>
+        <p:spPr>
+          <a:xfrm>
+            <a:off x="11064240" y="6455664"/>
+            <a:ext cx="822960" cy="292608"/>
+          </a:xfrm>
+          <a:prstGeom prst="rect">
+            <a:avLst/>
+          </a:prstGeom>
+          <a:noFill/>
+        </p:spPr>
+        <p:txBody>
+          <a:bodyPr wrap="square" anchor="ctr" lIns="0" rIns="0" tIns="0" bIns="0">
+            <a:spAutoFit/>
+          </a:bodyPr>
+          <a:lstStyle/>
+          <a:p>
+            <a:pPr algn="r">
+              <a:lnSpc>
+                <a:spcPct val="108000"/>
+              </a:lnSpc>
+              <a:spcAft>
+                <a:spcPts val="400"/>
+              </a:spcAft>
+            </a:pPr>
+            <a:r>
+              <a:rPr sz="1000" b="1" i="0">
+                <a:solidFill>
+                  <a:srgbClr val="5A6B7B"/>
+                </a:solidFill>
+                <a:latin typeface="NanumGothic"/>
+                <a:ea typeface="NanumGothic"/>
+              </a:rPr>
+              <a:t>14</a:t>
+            </a:r>
+          </a:p>
+        </p:txBody>
+      </p:sp>
+    </p:spTree>
+  </p:cSld>
+  <p:clrMapOvr>
+    <a:masterClrMapping/>
+  </p:clrMapOvr>
+</p:sld>
+</file>
+
+<file path=ppt/slides/slide15.xml><?xml version="1.0" encoding="utf-8"?>
+<p:sld xmlns:a="http://schemas.openxmlformats.org/drawingml/2006/main" xmlns:p="http://schemas.openxmlformats.org/presentationml/2006/main" xmlns:r="http://schemas.openxmlformats.org/officeDocument/2006/relationships">
+  <p:cSld>
+    <p:spTree>
+      <p:nvGrpSpPr>
+        <p:cNvPr id="1" name=""/>
+        <p:cNvGrpSpPr/>
+        <p:nvPr/>
+      </p:nvGrpSpPr>
+      <p:grpSpPr/>
+      <p:sp>
+        <p:nvSpPr>
+          <p:cNvPr id="2" name="Rectangle 1"/>
+          <p:cNvSpPr/>
+          <p:nvPr/>
+        </p:nvSpPr>
+        <p:spPr>
+          <a:xfrm>
+            <a:off x="502920" y="310896"/>
+            <a:ext cx="109728" cy="457200"/>
+          </a:xfrm>
+          <a:prstGeom prst="rect">
+            <a:avLst/>
           </a:prstGeom>
           <a:solidFill>
             <a:srgbClr val="2C898A"/>
@@ -6214,14 +6653,14 @@
       </p:sp>
       <p:sp>
         <p:nvSpPr>
-          <p:cNvPr id="7" name="TextBox 6"/>
+          <p:cNvPr id="3" name="TextBox 2"/>
           <p:cNvSpPr txBox="1"/>
           <p:nvPr/>
         </p:nvSpPr>
         <p:spPr>
           <a:xfrm>
-            <a:off x="10317175" y="365760"/>
-            <a:ext cx="1371600" cy="347472"/>
+            <a:off x="731520" y="237744"/>
+            <a:ext cx="9509760" cy="685800"/>
           </a:xfrm>
           <a:prstGeom prst="rect">
             <a:avLst/>
@@ -6234,7 +6673,7 @@
           </a:bodyPr>
           <a:lstStyle/>
           <a:p>
-            <a:pPr algn="ctr">
+            <a:pPr algn="l">
               <a:lnSpc>
                 <a:spcPct val="108000"/>
               </a:lnSpc>
@@ -6243,28 +6682,28 @@
               </a:spcAft>
             </a:pPr>
             <a:r>
-              <a:rPr sz="1150" b="1" i="0">
-                <a:solidFill>
-                  <a:srgbClr val="FFFFFF"/>
-                </a:solidFill>
-                <a:latin typeface="NanumGothic"/>
-                <a:ea typeface="NanumGothic"/>
-              </a:rPr>
-              <a:t>References</a:t>
-            </a:r>
-          </a:p>
-        </p:txBody>
-      </p:sp>
-      <p:sp>
-        <p:nvSpPr>
-          <p:cNvPr id="8" name="TextBox 7"/>
+              <a:rPr sz="2400" b="1" i="0">
+                <a:solidFill>
+                  <a:srgbClr val="1B355E"/>
+                </a:solidFill>
+                <a:latin typeface="NanumGothic"/>
+                <a:ea typeface="NanumGothic"/>
+              </a:rPr>
+              <a:t>실제 진료 순서 — 교감신경 축을 겨냥한 단계적 접근</a:t>
+            </a:r>
+          </a:p>
+        </p:txBody>
+      </p:sp>
+      <p:sp>
+        <p:nvSpPr>
+          <p:cNvPr id="4" name="TextBox 3"/>
           <p:cNvSpPr txBox="1"/>
           <p:nvPr/>
         </p:nvSpPr>
         <p:spPr>
           <a:xfrm>
-            <a:off x="731520" y="1371600"/>
-            <a:ext cx="5257800" cy="4846320"/>
+            <a:off x="749808" y="109728"/>
+            <a:ext cx="7315200" cy="219456"/>
           </a:xfrm>
           <a:prstGeom prst="rect">
             <a:avLst/>
@@ -6279,121 +6718,357 @@
           <a:p>
             <a:pPr algn="l">
               <a:lnSpc>
-                <a:spcPct val="105000"/>
-              </a:lnSpc>
-              <a:spcAft>
-                <a:spcPts val="700"/>
-              </a:spcAft>
-            </a:pPr>
-            <a:r>
-              <a:rPr sz="1000" b="0" i="0">
+                <a:spcPct val="108000"/>
+              </a:lnSpc>
+              <a:spcAft>
+                <a:spcPts val="400"/>
+              </a:spcAft>
+            </a:pPr>
+            <a:r>
+              <a:rPr sz="1100" b="1" i="0">
+                <a:solidFill>
+                  <a:srgbClr val="1F6E70"/>
+                </a:solidFill>
+                <a:latin typeface="NanumGothic"/>
+                <a:ea typeface="NanumGothic"/>
+              </a:rPr>
+              <a:t>나의 프로토콜 · 실제 적용</a:t>
+            </a:r>
+          </a:p>
+        </p:txBody>
+      </p:sp>
+      <p:sp>
+        <p:nvSpPr>
+          <p:cNvPr id="5" name="Rectangle 4"/>
+          <p:cNvSpPr/>
+          <p:nvPr/>
+        </p:nvSpPr>
+        <p:spPr>
+          <a:xfrm>
+            <a:off x="731520" y="969264"/>
+            <a:ext cx="10881360" cy="17780"/>
+          </a:xfrm>
+          <a:prstGeom prst="rect">
+            <a:avLst/>
+          </a:prstGeom>
+          <a:solidFill>
+            <a:srgbClr val="D5DEE7"/>
+          </a:solidFill>
+          <a:ln>
+            <a:noFill/>
+          </a:ln>
+          <a:effectLst/>
+        </p:spPr>
+        <p:style>
+          <a:lnRef idx="1">
+            <a:schemeClr val="accent1"/>
+          </a:lnRef>
+          <a:fillRef idx="3">
+            <a:schemeClr val="accent1"/>
+          </a:fillRef>
+          <a:effectRef idx="2">
+            <a:schemeClr val="accent1"/>
+          </a:effectRef>
+          <a:fontRef idx="minor">
+            <a:schemeClr val="lt1"/>
+          </a:fontRef>
+        </p:style>
+        <p:txBody>
+          <a:bodyPr rtlCol="0" anchor="ctr"/>
+          <a:lstStyle/>
+          <a:p>
+            <a:pPr algn="ctr"/>
+          </a:p>
+        </p:txBody>
+      </p:sp>
+      <p:sp>
+        <p:nvSpPr>
+          <p:cNvPr id="6" name="Rounded Rectangle 5"/>
+          <p:cNvSpPr/>
+          <p:nvPr/>
+        </p:nvSpPr>
+        <p:spPr>
+          <a:xfrm>
+            <a:off x="10865816" y="365760"/>
+            <a:ext cx="822959" cy="347472"/>
+          </a:xfrm>
+          <a:prstGeom prst="roundRect">
+            <a:avLst>
+              <a:gd name="adj" fmla="val 8000"/>
+            </a:avLst>
+          </a:prstGeom>
+          <a:solidFill>
+            <a:srgbClr val="1A202C"/>
+          </a:solidFill>
+          <a:ln>
+            <a:noFill/>
+          </a:ln>
+          <a:effectLst/>
+        </p:spPr>
+        <p:style>
+          <a:lnRef idx="1">
+            <a:schemeClr val="accent1"/>
+          </a:lnRef>
+          <a:fillRef idx="3">
+            <a:schemeClr val="accent1"/>
+          </a:fillRef>
+          <a:effectRef idx="2">
+            <a:schemeClr val="accent1"/>
+          </a:effectRef>
+          <a:fontRef idx="minor">
+            <a:schemeClr val="lt1"/>
+          </a:fontRef>
+        </p:style>
+        <p:txBody>
+          <a:bodyPr rtlCol="0" anchor="ctr"/>
+          <a:lstStyle/>
+          <a:p>
+            <a:pPr algn="ctr"/>
+          </a:p>
+        </p:txBody>
+      </p:sp>
+      <p:sp>
+        <p:nvSpPr>
+          <p:cNvPr id="7" name="TextBox 6"/>
+          <p:cNvSpPr txBox="1"/>
+          <p:nvPr/>
+        </p:nvSpPr>
+        <p:spPr>
+          <a:xfrm>
+            <a:off x="10865816" y="365760"/>
+            <a:ext cx="822959" cy="347472"/>
+          </a:xfrm>
+          <a:prstGeom prst="rect">
+            <a:avLst/>
+          </a:prstGeom>
+          <a:noFill/>
+        </p:spPr>
+        <p:txBody>
+          <a:bodyPr wrap="square" anchor="ctr" lIns="0" rIns="0" tIns="0" bIns="0">
+            <a:spAutoFit/>
+          </a:bodyPr>
+          <a:lstStyle/>
+          <a:p>
+            <a:pPr algn="ctr">
+              <a:lnSpc>
+                <a:spcPct val="108000"/>
+              </a:lnSpc>
+              <a:spcAft>
+                <a:spcPts val="400"/>
+              </a:spcAft>
+            </a:pPr>
+            <a:r>
+              <a:rPr sz="1150" b="1" i="0">
+                <a:solidFill>
+                  <a:srgbClr val="FFFFFF"/>
+                </a:solidFill>
+                <a:latin typeface="NanumGothic"/>
+                <a:ea typeface="NanumGothic"/>
+              </a:rPr>
+              <a:t>실전 순서</a:t>
+            </a:r>
+          </a:p>
+        </p:txBody>
+      </p:sp>
+      <p:sp>
+        <p:nvSpPr>
+          <p:cNvPr id="8" name="TextBox 7"/>
+          <p:cNvSpPr txBox="1"/>
+          <p:nvPr/>
+        </p:nvSpPr>
+        <p:spPr>
+          <a:xfrm>
+            <a:off x="731520" y="1371600"/>
+            <a:ext cx="10835640" cy="4754880"/>
+          </a:xfrm>
+          <a:prstGeom prst="rect">
+            <a:avLst/>
+          </a:prstGeom>
+          <a:noFill/>
+        </p:spPr>
+        <p:txBody>
+          <a:bodyPr wrap="square" lIns="0" rIns="0" tIns="0" bIns="0">
+            <a:spAutoFit/>
+          </a:bodyPr>
+          <a:lstStyle/>
+          <a:p>
+            <a:pPr algn="l">
+              <a:lnSpc>
+                <a:spcPct val="108000"/>
+              </a:lnSpc>
+              <a:spcAft>
+                <a:spcPts val="800"/>
+              </a:spcAft>
+            </a:pPr>
+            <a:r>
+              <a:rPr sz="979" b="1" i="0">
+                <a:solidFill>
+                  <a:srgbClr val="2C898A"/>
+                </a:solidFill>
+                <a:latin typeface="NanumGothic"/>
+                <a:ea typeface="NanumGothic"/>
+              </a:rPr>
+              <a:t>●  </a:t>
+            </a:r>
+            <a:r>
+              <a:rPr sz="1400" b="0" i="0">
                 <a:solidFill>
                   <a:srgbClr val="1A202C"/>
                 </a:solidFill>
                 <a:latin typeface="NanumGothic"/>
                 <a:ea typeface="NanumGothic"/>
               </a:rPr>
-              <a:t>Dua A, Varacallo MA. Lumbar sympathetic block. StatPearls. 2026. NBK431107.</a:t>
+              <a:t>① 감별·검사: '밤/하지 증상'이 동맥성 허혈(ABI·도플러)·CRPS·신경병증인지 확인. 특발 경련·RLS·정맥류 배제.</a:t>
             </a:r>
           </a:p>
           <a:p>
             <a:pPr algn="l">
               <a:lnSpc>
-                <a:spcPct val="105000"/>
-              </a:lnSpc>
-              <a:spcAft>
-                <a:spcPts val="700"/>
-              </a:spcAft>
-            </a:pPr>
-            <a:r>
-              <a:rPr sz="1000" b="0" i="0">
+                <a:spcPct val="108000"/>
+              </a:lnSpc>
+              <a:spcAft>
+                <a:spcPts val="800"/>
+              </a:spcAft>
+            </a:pPr>
+            <a:r>
+              <a:rPr sz="979" b="1" i="0">
+                <a:solidFill>
+                  <a:srgbClr val="2C898A"/>
+                </a:solidFill>
+                <a:latin typeface="NanumGothic"/>
+                <a:ea typeface="NanumGothic"/>
+              </a:rPr>
+              <a:t>●  </a:t>
+            </a:r>
+            <a:r>
+              <a:rPr sz="1400" b="0" i="0">
                 <a:solidFill>
                   <a:srgbClr val="1A202C"/>
                 </a:solidFill>
                 <a:latin typeface="NanumGothic"/>
                 <a:ea typeface="NanumGothic"/>
               </a:rPr>
-              <a:t>Lumbar sympatholysis. StatPearls. NBK560514.</a:t>
+              <a:t>② 방향 설정: 교감매개통·허혈로 판단되면 교감신경 축(L2–L3)을 겨냥.</a:t>
             </a:r>
           </a:p>
           <a:p>
             <a:pPr algn="l">
               <a:lnSpc>
-                <a:spcPct val="105000"/>
-              </a:lnSpc>
-              <a:spcAft>
-                <a:spcPts val="700"/>
-              </a:spcAft>
-            </a:pPr>
-            <a:r>
-              <a:rPr sz="1000" b="0" i="0">
+                <a:spcPct val="108000"/>
+              </a:lnSpc>
+              <a:spcAft>
+                <a:spcPts val="800"/>
+              </a:spcAft>
+            </a:pPr>
+            <a:r>
+              <a:rPr sz="979" b="1" i="0">
+                <a:solidFill>
+                  <a:srgbClr val="2C898A"/>
+                </a:solidFill>
+                <a:latin typeface="NanumGothic"/>
+                <a:ea typeface="NanumGothic"/>
+              </a:rPr>
+              <a:t>●  </a:t>
+            </a:r>
+            <a:r>
+              <a:rPr sz="1400" b="1" i="0">
+                <a:solidFill>
+                  <a:srgbClr val="2E7D32"/>
+                </a:solidFill>
+                <a:latin typeface="NanumGothic"/>
+                <a:ea typeface="NanumGothic"/>
+              </a:rPr>
+              <a:t>③ 진단적 차단: 투시 유도 국소마취제 LSB → 피부온도 ≥2°C 상승·통증 반응 확인.</a:t>
+            </a:r>
+          </a:p>
+          <a:p>
+            <a:pPr algn="l">
+              <a:lnSpc>
+                <a:spcPct val="108000"/>
+              </a:lnSpc>
+              <a:spcAft>
+                <a:spcPts val="800"/>
+              </a:spcAft>
+            </a:pPr>
+            <a:r>
+              <a:rPr sz="979" b="1" i="0">
+                <a:solidFill>
+                  <a:srgbClr val="2C898A"/>
+                </a:solidFill>
+                <a:latin typeface="NanumGothic"/>
+                <a:ea typeface="NanumGothic"/>
+              </a:rPr>
+              <a:t>●  </a:t>
+            </a:r>
+            <a:r>
+              <a:rPr sz="1400" b="1" i="0">
+                <a:solidFill>
+                  <a:srgbClr val="2E7D32"/>
+                </a:solidFill>
+                <a:latin typeface="NanumGothic"/>
+                <a:ea typeface="NanumGothic"/>
+              </a:rPr>
+              <a:t>④ 반응 양호 시: 치료적 반복 차단, 또는 신경파괴(무수알코올/phenol)·RFA로 장기 완화.</a:t>
+            </a:r>
+          </a:p>
+          <a:p>
+            <a:pPr algn="l">
+              <a:lnSpc>
+                <a:spcPct val="108000"/>
+              </a:lnSpc>
+              <a:spcAft>
+                <a:spcPts val="800"/>
+              </a:spcAft>
+            </a:pPr>
+            <a:r>
+              <a:rPr sz="979" b="1" i="0">
+                <a:solidFill>
+                  <a:srgbClr val="2C898A"/>
+                </a:solidFill>
+                <a:latin typeface="NanumGothic"/>
+                <a:ea typeface="NanumGothic"/>
+              </a:rPr>
+              <a:t>●  </a:t>
+            </a:r>
+            <a:r>
+              <a:rPr sz="1400" b="0" i="0">
                 <a:solidFill>
                   <a:srgbClr val="1A202C"/>
                 </a:solidFill>
                 <a:latin typeface="NanumGothic"/>
                 <a:ea typeface="NanumGothic"/>
               </a:rPr>
-              <a:t>Zhang JH, Deng YP, Geng MJ. Efficacy of the lumbar sympathetic ganglion block in lower limb pain. Ibrain. 2022;8(4):442-52. PMID 37786587.</a:t>
+              <a:t>⑤ 대상별: CRPS는 조기(≤12개월) 유리 · 난치성 당뇨병성 신경병증은 지속 LSB+신경파괴(RCT).</a:t>
             </a:r>
           </a:p>
           <a:p>
             <a:pPr algn="l">
               <a:lnSpc>
-                <a:spcPct val="105000"/>
-              </a:lnSpc>
-              <a:spcAft>
-                <a:spcPts val="700"/>
-              </a:spcAft>
-            </a:pPr>
-            <a:r>
-              <a:rPr sz="1000" b="0" i="0">
-                <a:solidFill>
-                  <a:srgbClr val="1A202C"/>
-                </a:solidFill>
-                <a:latin typeface="NanumGothic"/>
-                <a:ea typeface="NanumGothic"/>
-              </a:rPr>
-              <a:t>Dickey Z, Sharma N. Lumbar sympathetic block leading to increased arterial diameter and blood flow. Cureus. 2024;16(6):e61755. PMID 38975506.</a:t>
-            </a:r>
-          </a:p>
-          <a:p>
-            <a:pPr algn="l">
-              <a:lnSpc>
-                <a:spcPct val="105000"/>
-              </a:lnSpc>
-              <a:spcAft>
-                <a:spcPts val="700"/>
-              </a:spcAft>
-            </a:pPr>
-            <a:r>
-              <a:rPr sz="1000" b="0" i="0">
-                <a:solidFill>
-                  <a:srgbClr val="1A202C"/>
-                </a:solidFill>
-                <a:latin typeface="NanumGothic"/>
-                <a:ea typeface="NanumGothic"/>
-              </a:rPr>
-              <a:t>Barreto Junior EPS, et al. Neurolytic block of the lumbar sympathetic chain in critical lower limb ischemia. Braz J Anesthesiol. 2018;68(1):100-3. PMC9391669.</a:t>
-            </a:r>
-          </a:p>
-          <a:p>
-            <a:pPr algn="l">
-              <a:lnSpc>
-                <a:spcPct val="105000"/>
-              </a:lnSpc>
-              <a:spcAft>
-                <a:spcPts val="700"/>
-              </a:spcAft>
-            </a:pPr>
-            <a:r>
-              <a:rPr sz="1000" b="0" i="0">
-                <a:solidFill>
-                  <a:srgbClr val="1A202C"/>
-                </a:solidFill>
-                <a:latin typeface="NanumGothic"/>
-                <a:ea typeface="NanumGothic"/>
-              </a:rPr>
-              <a:t>Choi EJ, et al. Effect duration of lumbar sympathetic ganglion neurolysis in CRPS. Sci Rep. 2024;14(1):12693. PMID 38830944.</a:t>
+                <a:spcPct val="108000"/>
+              </a:lnSpc>
+              <a:spcAft>
+                <a:spcPts val="800"/>
+              </a:spcAft>
+            </a:pPr>
+            <a:r>
+              <a:rPr sz="1400" b="1" i="0">
+                <a:solidFill>
+                  <a:srgbClr val="5A6B7B"/>
+                </a:solidFill>
+                <a:latin typeface="NanumGothic"/>
+                <a:ea typeface="NanumGothic"/>
+              </a:rPr>
+              <a:t/>
+            </a:r>
+            <a:r>
+              <a:rPr sz="1400" b="1" i="0">
+                <a:solidFill>
+                  <a:srgbClr val="1F6E70"/>
+                </a:solidFill>
+                <a:latin typeface="NanumGothic"/>
+                <a:ea typeface="NanumGothic"/>
+              </a:rPr>
+              <a:t>⑥ 주의: 특발성 NLC·정맥질환은 적응 아님 · 합병증(생식대퇴신경통 5–10% 등) 사전 고지.</a:t>
             </a:r>
           </a:p>
         </p:txBody>
@@ -6406,8 +7081,200 @@
         </p:nvSpPr>
         <p:spPr>
           <a:xfrm>
-            <a:off x="6217920" y="1371600"/>
-            <a:ext cx="5257800" cy="4846320"/>
+            <a:off x="731520" y="6455664"/>
+            <a:ext cx="9875520" cy="292608"/>
+          </a:xfrm>
+          <a:prstGeom prst="rect">
+            <a:avLst/>
+          </a:prstGeom>
+          <a:noFill/>
+        </p:spPr>
+        <p:txBody>
+          <a:bodyPr wrap="square" anchor="ctr" lIns="0" rIns="0" tIns="0" bIns="0">
+            <a:spAutoFit/>
+          </a:bodyPr>
+          <a:lstStyle/>
+          <a:p>
+            <a:pPr algn="l">
+              <a:lnSpc>
+                <a:spcPct val="108000"/>
+              </a:lnSpc>
+              <a:spcAft>
+                <a:spcPts val="400"/>
+              </a:spcAft>
+            </a:pPr>
+            <a:r>
+              <a:rPr sz="900" b="0" i="0">
+                <a:solidFill>
+                  <a:srgbClr val="5A6B7B"/>
+                </a:solidFill>
+                <a:latin typeface="NanumGothic"/>
+                <a:ea typeface="NanumGothic"/>
+              </a:rPr>
+              <a:t>근거: 교육용 제안 · 개별 적용은 임상 판단 · 신경파괴는 진단차단 양성 시에만</a:t>
+            </a:r>
+          </a:p>
+        </p:txBody>
+      </p:sp>
+      <p:sp>
+        <p:nvSpPr>
+          <p:cNvPr id="10" name="TextBox 9"/>
+          <p:cNvSpPr txBox="1"/>
+          <p:nvPr/>
+        </p:nvSpPr>
+        <p:spPr>
+          <a:xfrm>
+            <a:off x="11064240" y="6455664"/>
+            <a:ext cx="822960" cy="292608"/>
+          </a:xfrm>
+          <a:prstGeom prst="rect">
+            <a:avLst/>
+          </a:prstGeom>
+          <a:noFill/>
+        </p:spPr>
+        <p:txBody>
+          <a:bodyPr wrap="square" anchor="ctr" lIns="0" rIns="0" tIns="0" bIns="0">
+            <a:spAutoFit/>
+          </a:bodyPr>
+          <a:lstStyle/>
+          <a:p>
+            <a:pPr algn="r">
+              <a:lnSpc>
+                <a:spcPct val="108000"/>
+              </a:lnSpc>
+              <a:spcAft>
+                <a:spcPts val="400"/>
+              </a:spcAft>
+            </a:pPr>
+            <a:r>
+              <a:rPr sz="1000" b="1" i="0">
+                <a:solidFill>
+                  <a:srgbClr val="5A6B7B"/>
+                </a:solidFill>
+                <a:latin typeface="NanumGothic"/>
+                <a:ea typeface="NanumGothic"/>
+              </a:rPr>
+              <a:t>15</a:t>
+            </a:r>
+          </a:p>
+        </p:txBody>
+      </p:sp>
+    </p:spTree>
+  </p:cSld>
+  <p:clrMapOvr>
+    <a:masterClrMapping/>
+  </p:clrMapOvr>
+</p:sld>
+</file>
+
+<file path=ppt/slides/slide16.xml><?xml version="1.0" encoding="utf-8"?>
+<p:sld xmlns:a="http://schemas.openxmlformats.org/drawingml/2006/main" xmlns:p="http://schemas.openxmlformats.org/presentationml/2006/main" xmlns:r="http://schemas.openxmlformats.org/officeDocument/2006/relationships">
+  <p:cSld>
+    <p:spTree>
+      <p:nvGrpSpPr>
+        <p:cNvPr id="1" name=""/>
+        <p:cNvGrpSpPr/>
+        <p:nvPr/>
+      </p:nvGrpSpPr>
+      <p:grpSpPr/>
+      <p:sp>
+        <p:nvSpPr>
+          <p:cNvPr id="2" name="Rectangle 1"/>
+          <p:cNvSpPr/>
+          <p:nvPr/>
+        </p:nvSpPr>
+        <p:spPr>
+          <a:xfrm>
+            <a:off x="0" y="0"/>
+            <a:ext cx="12191695" cy="6858000"/>
+          </a:xfrm>
+          <a:prstGeom prst="rect">
+            <a:avLst/>
+          </a:prstGeom>
+          <a:solidFill>
+            <a:srgbClr val="1B355E"/>
+          </a:solidFill>
+          <a:ln>
+            <a:noFill/>
+          </a:ln>
+          <a:effectLst/>
+        </p:spPr>
+        <p:style>
+          <a:lnRef idx="1">
+            <a:schemeClr val="accent1"/>
+          </a:lnRef>
+          <a:fillRef idx="3">
+            <a:schemeClr val="accent1"/>
+          </a:fillRef>
+          <a:effectRef idx="2">
+            <a:schemeClr val="accent1"/>
+          </a:effectRef>
+          <a:fontRef idx="minor">
+            <a:schemeClr val="lt1"/>
+          </a:fontRef>
+        </p:style>
+        <p:txBody>
+          <a:bodyPr rtlCol="0" anchor="ctr"/>
+          <a:lstStyle/>
+          <a:p>
+            <a:pPr algn="ctr"/>
+          </a:p>
+        </p:txBody>
+      </p:sp>
+      <p:sp>
+        <p:nvSpPr>
+          <p:cNvPr id="3" name="Rectangle 2"/>
+          <p:cNvSpPr/>
+          <p:nvPr/>
+        </p:nvSpPr>
+        <p:spPr>
+          <a:xfrm>
+            <a:off x="0" y="0"/>
+            <a:ext cx="201168" cy="6858000"/>
+          </a:xfrm>
+          <a:prstGeom prst="rect">
+            <a:avLst/>
+          </a:prstGeom>
+          <a:solidFill>
+            <a:srgbClr val="2C898A"/>
+          </a:solidFill>
+          <a:ln>
+            <a:noFill/>
+          </a:ln>
+          <a:effectLst/>
+        </p:spPr>
+        <p:style>
+          <a:lnRef idx="1">
+            <a:schemeClr val="accent1"/>
+          </a:lnRef>
+          <a:fillRef idx="3">
+            <a:schemeClr val="accent1"/>
+          </a:fillRef>
+          <a:effectRef idx="2">
+            <a:schemeClr val="accent1"/>
+          </a:effectRef>
+          <a:fontRef idx="minor">
+            <a:schemeClr val="lt1"/>
+          </a:fontRef>
+        </p:style>
+        <p:txBody>
+          <a:bodyPr rtlCol="0" anchor="ctr"/>
+          <a:lstStyle/>
+          <a:p>
+            <a:pPr algn="ctr"/>
+          </a:p>
+        </p:txBody>
+      </p:sp>
+      <p:sp>
+        <p:nvSpPr>
+          <p:cNvPr id="4" name="TextBox 3"/>
+          <p:cNvSpPr txBox="1"/>
+          <p:nvPr/>
+        </p:nvSpPr>
+        <p:spPr>
+          <a:xfrm>
+            <a:off x="822960" y="640080"/>
+            <a:ext cx="10515600" cy="457200"/>
           </a:xfrm>
           <a:prstGeom prst="rect">
             <a:avLst/>
@@ -6422,135 +7289,122 @@
           <a:p>
             <a:pPr algn="l">
               <a:lnSpc>
-                <a:spcPct val="105000"/>
-              </a:lnSpc>
-              <a:spcAft>
-                <a:spcPts val="700"/>
-              </a:spcAft>
-            </a:pPr>
-            <a:r>
-              <a:rPr sz="1000" b="0" i="0">
-                <a:solidFill>
-                  <a:srgbClr val="1A202C"/>
-                </a:solidFill>
-                <a:latin typeface="NanumGothic"/>
-                <a:ea typeface="NanumGothic"/>
-              </a:rPr>
-              <a:t>Gungor S, et al. Sympathetic blocks for CRPS: a case series. Medicine (Baltimore). 2018;97(19):e0705. PMID 29742728.</a:t>
-            </a:r>
-          </a:p>
+                <a:spcPct val="108000"/>
+              </a:lnSpc>
+              <a:spcAft>
+                <a:spcPts val="400"/>
+              </a:spcAft>
+            </a:pPr>
+            <a:r>
+              <a:rPr sz="1300" b="1" i="0">
+                <a:solidFill>
+                  <a:srgbClr val="9FE0D8"/>
+                </a:solidFill>
+                <a:latin typeface="NanumGothic"/>
+                <a:ea typeface="NanumGothic"/>
+              </a:rPr>
+              <a:t>핵심 메시지 — LSB</a:t>
+            </a:r>
+          </a:p>
+        </p:txBody>
+      </p:sp>
+      <p:sp>
+        <p:nvSpPr>
+          <p:cNvPr id="5" name="TextBox 4"/>
+          <p:cNvSpPr txBox="1"/>
+          <p:nvPr/>
+        </p:nvSpPr>
+        <p:spPr>
+          <a:xfrm>
+            <a:off x="822960" y="1097280"/>
+            <a:ext cx="10515600" cy="914400"/>
+          </a:xfrm>
+          <a:prstGeom prst="rect">
+            <a:avLst/>
+          </a:prstGeom>
+          <a:noFill/>
+        </p:spPr>
+        <p:txBody>
+          <a:bodyPr wrap="square" anchor="t" lIns="0" rIns="0" tIns="0" bIns="0">
+            <a:spAutoFit/>
+          </a:bodyPr>
+          <a:lstStyle/>
           <a:p>
             <a:pPr algn="l">
               <a:lnSpc>
-                <a:spcPct val="105000"/>
-              </a:lnSpc>
-              <a:spcAft>
-                <a:spcPts val="700"/>
-              </a:spcAft>
-            </a:pPr>
-            <a:r>
-              <a:rPr sz="1000" b="0" i="0">
-                <a:solidFill>
-                  <a:srgbClr val="1A202C"/>
-                </a:solidFill>
-                <a:latin typeface="NanumGothic"/>
-                <a:ea typeface="NanumGothic"/>
-              </a:rPr>
-              <a:t>Effect of lumbar sympathetic blockade on pain, Fontaine classification, collateral perfusion in PAD. Medicina (Kaunas). 2024;60(5):682.</a:t>
-            </a:r>
-          </a:p>
-          <a:p>
-            <a:pPr algn="l">
-              <a:lnSpc>
-                <a:spcPct val="105000"/>
-              </a:lnSpc>
-              <a:spcAft>
-                <a:spcPts val="700"/>
-              </a:spcAft>
-            </a:pPr>
-            <a:r>
-              <a:rPr sz="1000" b="0" i="0">
-                <a:solidFill>
-                  <a:srgbClr val="1A202C"/>
-                </a:solidFill>
-                <a:latin typeface="NanumGothic"/>
-                <a:ea typeface="NanumGothic"/>
-              </a:rPr>
-              <a:t>Prediction of LSB efficacy in CRPS type 1 by sympathetic skin response. Pain Ther. 2023;12(3):809-22. PMC10199976.</a:t>
-            </a:r>
-          </a:p>
-          <a:p>
-            <a:pPr algn="l">
-              <a:lnSpc>
-                <a:spcPct val="105000"/>
-              </a:lnSpc>
-              <a:spcAft>
-                <a:spcPts val="700"/>
-              </a:spcAft>
-            </a:pPr>
-            <a:r>
-              <a:rPr sz="1000" b="0" i="0">
-                <a:solidFill>
-                  <a:srgbClr val="1A202C"/>
-                </a:solidFill>
-                <a:latin typeface="NanumGothic"/>
-                <a:ea typeface="NanumGothic"/>
-              </a:rPr>
-              <a:t>Continuous LSB + sympatholysis for refractory painful diabetic neuropathy — RCT. 2020. PMID 32915421.</a:t>
-            </a:r>
-          </a:p>
-          <a:p>
-            <a:pPr algn="l">
-              <a:lnSpc>
-                <a:spcPct val="105000"/>
-              </a:lnSpc>
-              <a:spcAft>
-                <a:spcPts val="700"/>
-              </a:spcAft>
-            </a:pPr>
-            <a:r>
-              <a:rPr sz="1000" b="0" i="0">
-                <a:solidFill>
-                  <a:srgbClr val="1A202C"/>
-                </a:solidFill>
-                <a:latin typeface="NanumGothic"/>
-                <a:ea typeface="NanumGothic"/>
-              </a:rPr>
-              <a:t>Sympathetic blocks: sustained relief in refractory painful diabetic neuropathy (case). 2012. PMID 22606406.</a:t>
-            </a:r>
-          </a:p>
-          <a:p>
-            <a:pPr algn="l">
-              <a:lnSpc>
-                <a:spcPct val="105000"/>
-              </a:lnSpc>
-              <a:spcAft>
-                <a:spcPts val="700"/>
-              </a:spcAft>
-            </a:pPr>
-            <a:r>
-              <a:rPr sz="1000" b="0" i="0">
-                <a:solidFill>
-                  <a:srgbClr val="1A202C"/>
-                </a:solidFill>
-                <a:latin typeface="NanumGothic"/>
-                <a:ea typeface="NanumGothic"/>
-              </a:rPr>
-              <a:t>Lumbar sympathectomy for ischaemia·vasculitis·diabetic neuropathy·hyperhidrosis — series. 2018. PMID 29516399.</a:t>
-            </a:r>
-          </a:p>
-        </p:txBody>
-      </p:sp>
-      <p:sp>
-        <p:nvSpPr>
-          <p:cNvPr id="10" name="TextBox 9"/>
+                <a:spcPct val="110000"/>
+              </a:lnSpc>
+              <a:spcAft>
+                <a:spcPts val="400"/>
+              </a:spcAft>
+            </a:pPr>
+            <a:r>
+              <a:rPr sz="2200" b="1" i="0">
+                <a:solidFill>
+                  <a:srgbClr val="FFFFFF"/>
+                </a:solidFill>
+                <a:latin typeface="NanumGothic"/>
+                <a:ea typeface="NanumGothic"/>
+              </a:rPr>
+              <a:t>표준은 투시 유도 방척추 접근, 성공은 온도 ≥2°C</a:t>
+            </a:r>
+          </a:p>
+        </p:txBody>
+      </p:sp>
+      <p:sp>
+        <p:nvSpPr>
+          <p:cNvPr id="6" name="Rectangle 5"/>
+          <p:cNvSpPr/>
+          <p:nvPr/>
+        </p:nvSpPr>
+        <p:spPr>
+          <a:xfrm>
+            <a:off x="822960" y="2322576"/>
+            <a:ext cx="146304" cy="445385"/>
+          </a:xfrm>
+          <a:prstGeom prst="rect">
+            <a:avLst/>
+          </a:prstGeom>
+          <a:solidFill>
+            <a:srgbClr val="2C898A"/>
+          </a:solidFill>
+          <a:ln>
+            <a:noFill/>
+          </a:ln>
+          <a:effectLst/>
+        </p:spPr>
+        <p:style>
+          <a:lnRef idx="1">
+            <a:schemeClr val="accent1"/>
+          </a:lnRef>
+          <a:fillRef idx="3">
+            <a:schemeClr val="accent1"/>
+          </a:fillRef>
+          <a:effectRef idx="2">
+            <a:schemeClr val="accent1"/>
+          </a:effectRef>
+          <a:fontRef idx="minor">
+            <a:schemeClr val="lt1"/>
+          </a:fontRef>
+        </p:style>
+        <p:txBody>
+          <a:bodyPr rtlCol="0" anchor="ctr"/>
+          <a:lstStyle/>
+          <a:p>
+            <a:pPr algn="ctr"/>
+          </a:p>
+        </p:txBody>
+      </p:sp>
+      <p:sp>
+        <p:nvSpPr>
+          <p:cNvPr id="7" name="TextBox 6"/>
           <p:cNvSpPr txBox="1"/>
           <p:nvPr/>
         </p:nvSpPr>
         <p:spPr>
           <a:xfrm>
-            <a:off x="731520" y="6455664"/>
-            <a:ext cx="9875520" cy="292608"/>
+            <a:off x="1143000" y="2286000"/>
+            <a:ext cx="2926080" cy="674827"/>
           </a:xfrm>
           <a:prstGeom prst="rect">
             <a:avLst/>
@@ -6572,28 +7426,28 @@
               </a:spcAft>
             </a:pPr>
             <a:r>
-              <a:rPr sz="900" b="0" i="0">
-                <a:solidFill>
-                  <a:srgbClr val="5A6B7B"/>
-                </a:solidFill>
-                <a:latin typeface="NanumGothic"/>
-                <a:ea typeface="NanumGothic"/>
-              </a:rPr>
-              <a:t>근거: PubMed/저널 목록 대조 — 조작 인용 없음</a:t>
-            </a:r>
-          </a:p>
-        </p:txBody>
-      </p:sp>
-      <p:sp>
-        <p:nvSpPr>
-          <p:cNvPr id="11" name="TextBox 10"/>
+              <a:rPr sz="1400" b="1" i="0">
+                <a:solidFill>
+                  <a:srgbClr val="9FE0D8"/>
+                </a:solidFill>
+                <a:latin typeface="NanumGothic"/>
+                <a:ea typeface="NanumGothic"/>
+              </a:rPr>
+              <a:t>방법</a:t>
+            </a:r>
+          </a:p>
+        </p:txBody>
+      </p:sp>
+      <p:sp>
+        <p:nvSpPr>
+          <p:cNvPr id="8" name="TextBox 7"/>
           <p:cNvSpPr txBox="1"/>
           <p:nvPr/>
         </p:nvSpPr>
         <p:spPr>
           <a:xfrm>
-            <a:off x="11064240" y="6455664"/>
-            <a:ext cx="822960" cy="292608"/>
+            <a:off x="4114800" y="2286000"/>
+            <a:ext cx="7406640" cy="674827"/>
           </a:xfrm>
           <a:prstGeom prst="rect">
             <a:avLst/>
@@ -6606,6 +7460,1179 @@
           </a:bodyPr>
           <a:lstStyle/>
           <a:p>
+            <a:pPr algn="l">
+              <a:lnSpc>
+                <a:spcPct val="105000"/>
+              </a:lnSpc>
+              <a:spcAft>
+                <a:spcPts val="400"/>
+              </a:spcAft>
+            </a:pPr>
+            <a:r>
+              <a:rPr sz="1250" b="0" i="0">
+                <a:solidFill>
+                  <a:srgbClr val="FFFFFF"/>
+                </a:solidFill>
+                <a:latin typeface="NanumGothic"/>
+                <a:ea typeface="NanumGothic"/>
+              </a:rPr>
+              <a:t>L2–L3 방척추 접근·투시, 정중선 7 cm 외측, 조영제 두미측 확산, 성공지표 온도 ≥2°C.</a:t>
+            </a:r>
+          </a:p>
+        </p:txBody>
+      </p:sp>
+      <p:sp>
+        <p:nvSpPr>
+          <p:cNvPr id="9" name="Rectangle 8"/>
+          <p:cNvSpPr/>
+          <p:nvPr/>
+        </p:nvSpPr>
+        <p:spPr>
+          <a:xfrm>
+            <a:off x="822960" y="3072384"/>
+            <a:ext cx="146304" cy="445385"/>
+          </a:xfrm>
+          <a:prstGeom prst="rect">
+            <a:avLst/>
+          </a:prstGeom>
+          <a:solidFill>
+            <a:srgbClr val="2C898A"/>
+          </a:solidFill>
+          <a:ln>
+            <a:noFill/>
+          </a:ln>
+          <a:effectLst/>
+        </p:spPr>
+        <p:style>
+          <a:lnRef idx="1">
+            <a:schemeClr val="accent1"/>
+          </a:lnRef>
+          <a:fillRef idx="3">
+            <a:schemeClr val="accent1"/>
+          </a:fillRef>
+          <a:effectRef idx="2">
+            <a:schemeClr val="accent1"/>
+          </a:effectRef>
+          <a:fontRef idx="minor">
+            <a:schemeClr val="lt1"/>
+          </a:fontRef>
+        </p:style>
+        <p:txBody>
+          <a:bodyPr rtlCol="0" anchor="ctr"/>
+          <a:lstStyle/>
+          <a:p>
+            <a:pPr algn="ctr"/>
+          </a:p>
+        </p:txBody>
+      </p:sp>
+      <p:sp>
+        <p:nvSpPr>
+          <p:cNvPr id="10" name="TextBox 9"/>
+          <p:cNvSpPr txBox="1"/>
+          <p:nvPr/>
+        </p:nvSpPr>
+        <p:spPr>
+          <a:xfrm>
+            <a:off x="1143000" y="3035808"/>
+            <a:ext cx="2926080" cy="674827"/>
+          </a:xfrm>
+          <a:prstGeom prst="rect">
+            <a:avLst/>
+          </a:prstGeom>
+          <a:noFill/>
+        </p:spPr>
+        <p:txBody>
+          <a:bodyPr wrap="square" anchor="ctr" lIns="0" rIns="0" tIns="0" bIns="0">
+            <a:spAutoFit/>
+          </a:bodyPr>
+          <a:lstStyle/>
+          <a:p>
+            <a:pPr algn="l">
+              <a:lnSpc>
+                <a:spcPct val="108000"/>
+              </a:lnSpc>
+              <a:spcAft>
+                <a:spcPts val="400"/>
+              </a:spcAft>
+            </a:pPr>
+            <a:r>
+              <a:rPr sz="1400" b="1" i="0">
+                <a:solidFill>
+                  <a:srgbClr val="9FE0D8"/>
+                </a:solidFill>
+                <a:latin typeface="NanumGothic"/>
+                <a:ea typeface="NanumGothic"/>
+              </a:rPr>
+              <a:t>약제</a:t>
+            </a:r>
+          </a:p>
+        </p:txBody>
+      </p:sp>
+      <p:sp>
+        <p:nvSpPr>
+          <p:cNvPr id="11" name="TextBox 10"/>
+          <p:cNvSpPr txBox="1"/>
+          <p:nvPr/>
+        </p:nvSpPr>
+        <p:spPr>
+          <a:xfrm>
+            <a:off x="4114800" y="3035808"/>
+            <a:ext cx="7406640" cy="674827"/>
+          </a:xfrm>
+          <a:prstGeom prst="rect">
+            <a:avLst/>
+          </a:prstGeom>
+          <a:noFill/>
+        </p:spPr>
+        <p:txBody>
+          <a:bodyPr wrap="square" anchor="ctr" lIns="0" rIns="0" tIns="0" bIns="0">
+            <a:spAutoFit/>
+          </a:bodyPr>
+          <a:lstStyle/>
+          <a:p>
+            <a:pPr algn="l">
+              <a:lnSpc>
+                <a:spcPct val="105000"/>
+              </a:lnSpc>
+              <a:spcAft>
+                <a:spcPts val="400"/>
+              </a:spcAft>
+            </a:pPr>
+            <a:r>
+              <a:rPr sz="1250" b="0" i="0">
+                <a:solidFill>
+                  <a:srgbClr val="FFFFFF"/>
+                </a:solidFill>
+                <a:latin typeface="NanumGothic"/>
+                <a:ea typeface="NanumGothic"/>
+              </a:rPr>
+              <a:t>진단/치료는 국소마취제, 신경파괴는 무수알코올/phenol·RFA — 진단차단 양성 시에만.</a:t>
+            </a:r>
+          </a:p>
+        </p:txBody>
+      </p:sp>
+      <p:sp>
+        <p:nvSpPr>
+          <p:cNvPr id="12" name="Rectangle 11"/>
+          <p:cNvSpPr/>
+          <p:nvPr/>
+        </p:nvSpPr>
+        <p:spPr>
+          <a:xfrm>
+            <a:off x="822960" y="3822191"/>
+            <a:ext cx="146304" cy="445385"/>
+          </a:xfrm>
+          <a:prstGeom prst="rect">
+            <a:avLst/>
+          </a:prstGeom>
+          <a:solidFill>
+            <a:srgbClr val="2C898A"/>
+          </a:solidFill>
+          <a:ln>
+            <a:noFill/>
+          </a:ln>
+          <a:effectLst/>
+        </p:spPr>
+        <p:style>
+          <a:lnRef idx="1">
+            <a:schemeClr val="accent1"/>
+          </a:lnRef>
+          <a:fillRef idx="3">
+            <a:schemeClr val="accent1"/>
+          </a:fillRef>
+          <a:effectRef idx="2">
+            <a:schemeClr val="accent1"/>
+          </a:effectRef>
+          <a:fontRef idx="minor">
+            <a:schemeClr val="lt1"/>
+          </a:fontRef>
+        </p:style>
+        <p:txBody>
+          <a:bodyPr rtlCol="0" anchor="ctr"/>
+          <a:lstStyle/>
+          <a:p>
+            <a:pPr algn="ctr"/>
+          </a:p>
+        </p:txBody>
+      </p:sp>
+      <p:sp>
+        <p:nvSpPr>
+          <p:cNvPr id="13" name="TextBox 12"/>
+          <p:cNvSpPr txBox="1"/>
+          <p:nvPr/>
+        </p:nvSpPr>
+        <p:spPr>
+          <a:xfrm>
+            <a:off x="1143000" y="3785615"/>
+            <a:ext cx="2926080" cy="674827"/>
+          </a:xfrm>
+          <a:prstGeom prst="rect">
+            <a:avLst/>
+          </a:prstGeom>
+          <a:noFill/>
+        </p:spPr>
+        <p:txBody>
+          <a:bodyPr wrap="square" anchor="ctr" lIns="0" rIns="0" tIns="0" bIns="0">
+            <a:spAutoFit/>
+          </a:bodyPr>
+          <a:lstStyle/>
+          <a:p>
+            <a:pPr algn="l">
+              <a:lnSpc>
+                <a:spcPct val="108000"/>
+              </a:lnSpc>
+              <a:spcAft>
+                <a:spcPts val="400"/>
+              </a:spcAft>
+            </a:pPr>
+            <a:r>
+              <a:rPr sz="1400" b="1" i="0">
+                <a:solidFill>
+                  <a:srgbClr val="9FE0D8"/>
+                </a:solidFill>
+                <a:latin typeface="NanumGothic"/>
+                <a:ea typeface="NanumGothic"/>
+              </a:rPr>
+              <a:t>적응증</a:t>
+            </a:r>
+          </a:p>
+        </p:txBody>
+      </p:sp>
+      <p:sp>
+        <p:nvSpPr>
+          <p:cNvPr id="14" name="TextBox 13"/>
+          <p:cNvSpPr txBox="1"/>
+          <p:nvPr/>
+        </p:nvSpPr>
+        <p:spPr>
+          <a:xfrm>
+            <a:off x="4114800" y="3785615"/>
+            <a:ext cx="7406640" cy="674827"/>
+          </a:xfrm>
+          <a:prstGeom prst="rect">
+            <a:avLst/>
+          </a:prstGeom>
+          <a:noFill/>
+        </p:spPr>
+        <p:txBody>
+          <a:bodyPr wrap="square" anchor="ctr" lIns="0" rIns="0" tIns="0" bIns="0">
+            <a:spAutoFit/>
+          </a:bodyPr>
+          <a:lstStyle/>
+          <a:p>
+            <a:pPr algn="l">
+              <a:lnSpc>
+                <a:spcPct val="105000"/>
+              </a:lnSpc>
+              <a:spcAft>
+                <a:spcPts val="400"/>
+              </a:spcAft>
+            </a:pPr>
+            <a:r>
+              <a:rPr sz="1250" b="0" i="0">
+                <a:solidFill>
+                  <a:srgbClr val="FFFFFF"/>
+                </a:solidFill>
+                <a:latin typeface="NanumGothic"/>
+                <a:ea typeface="NanumGothic"/>
+              </a:rPr>
+              <a:t>조기 CRPS·PAD/CLI 안정통·신경병증·다한증 등. 특발성 NLC·정맥질환(정맥류)은 적응 아님.</a:t>
+            </a:r>
+          </a:p>
+        </p:txBody>
+      </p:sp>
+      <p:sp>
+        <p:nvSpPr>
+          <p:cNvPr id="15" name="Rectangle 14"/>
+          <p:cNvSpPr/>
+          <p:nvPr/>
+        </p:nvSpPr>
+        <p:spPr>
+          <a:xfrm>
+            <a:off x="822960" y="4572000"/>
+            <a:ext cx="146304" cy="445385"/>
+          </a:xfrm>
+          <a:prstGeom prst="rect">
+            <a:avLst/>
+          </a:prstGeom>
+          <a:solidFill>
+            <a:srgbClr val="2C898A"/>
+          </a:solidFill>
+          <a:ln>
+            <a:noFill/>
+          </a:ln>
+          <a:effectLst/>
+        </p:spPr>
+        <p:style>
+          <a:lnRef idx="1">
+            <a:schemeClr val="accent1"/>
+          </a:lnRef>
+          <a:fillRef idx="3">
+            <a:schemeClr val="accent1"/>
+          </a:fillRef>
+          <a:effectRef idx="2">
+            <a:schemeClr val="accent1"/>
+          </a:effectRef>
+          <a:fontRef idx="minor">
+            <a:schemeClr val="lt1"/>
+          </a:fontRef>
+        </p:style>
+        <p:txBody>
+          <a:bodyPr rtlCol="0" anchor="ctr"/>
+          <a:lstStyle/>
+          <a:p>
+            <a:pPr algn="ctr"/>
+          </a:p>
+        </p:txBody>
+      </p:sp>
+      <p:sp>
+        <p:nvSpPr>
+          <p:cNvPr id="16" name="TextBox 15"/>
+          <p:cNvSpPr txBox="1"/>
+          <p:nvPr/>
+        </p:nvSpPr>
+        <p:spPr>
+          <a:xfrm>
+            <a:off x="1143000" y="4535424"/>
+            <a:ext cx="2926080" cy="674827"/>
+          </a:xfrm>
+          <a:prstGeom prst="rect">
+            <a:avLst/>
+          </a:prstGeom>
+          <a:noFill/>
+        </p:spPr>
+        <p:txBody>
+          <a:bodyPr wrap="square" anchor="ctr" lIns="0" rIns="0" tIns="0" bIns="0">
+            <a:spAutoFit/>
+          </a:bodyPr>
+          <a:lstStyle/>
+          <a:p>
+            <a:pPr algn="l">
+              <a:lnSpc>
+                <a:spcPct val="108000"/>
+              </a:lnSpc>
+              <a:spcAft>
+                <a:spcPts val="400"/>
+              </a:spcAft>
+            </a:pPr>
+            <a:r>
+              <a:rPr sz="1400" b="1" i="0">
+                <a:solidFill>
+                  <a:srgbClr val="9FE0D8"/>
+                </a:solidFill>
+                <a:latin typeface="NanumGothic"/>
+                <a:ea typeface="NanumGothic"/>
+              </a:rPr>
+              <a:t>효과</a:t>
+            </a:r>
+          </a:p>
+        </p:txBody>
+      </p:sp>
+      <p:sp>
+        <p:nvSpPr>
+          <p:cNvPr id="17" name="TextBox 16"/>
+          <p:cNvSpPr txBox="1"/>
+          <p:nvPr/>
+        </p:nvSpPr>
+        <p:spPr>
+          <a:xfrm>
+            <a:off x="4114800" y="4535424"/>
+            <a:ext cx="7406640" cy="674827"/>
+          </a:xfrm>
+          <a:prstGeom prst="rect">
+            <a:avLst/>
+          </a:prstGeom>
+          <a:noFill/>
+        </p:spPr>
+        <p:txBody>
+          <a:bodyPr wrap="square" anchor="ctr" lIns="0" rIns="0" tIns="0" bIns="0">
+            <a:spAutoFit/>
+          </a:bodyPr>
+          <a:lstStyle/>
+          <a:p>
+            <a:pPr algn="l">
+              <a:lnSpc>
+                <a:spcPct val="105000"/>
+              </a:lnSpc>
+              <a:spcAft>
+                <a:spcPts val="400"/>
+              </a:spcAft>
+            </a:pPr>
+            <a:r>
+              <a:rPr sz="1250" b="0" i="0">
+                <a:solidFill>
+                  <a:srgbClr val="FFFFFF"/>
+                </a:solidFill>
+                <a:latin typeface="NanumGothic"/>
+                <a:ea typeface="NanumGothic"/>
+              </a:rPr>
+              <a:t>관류 실측 개선(Dickey), 허혈통 최대 75%↓, CRPS 통증완화(교감피부반응으로 예측).</a:t>
+            </a:r>
+          </a:p>
+        </p:txBody>
+      </p:sp>
+      <p:sp>
+        <p:nvSpPr>
+          <p:cNvPr id="18" name="Rectangle 17"/>
+          <p:cNvSpPr/>
+          <p:nvPr/>
+        </p:nvSpPr>
+        <p:spPr>
+          <a:xfrm>
+            <a:off x="822960" y="5321807"/>
+            <a:ext cx="146304" cy="445385"/>
+          </a:xfrm>
+          <a:prstGeom prst="rect">
+            <a:avLst/>
+          </a:prstGeom>
+          <a:solidFill>
+            <a:srgbClr val="2C898A"/>
+          </a:solidFill>
+          <a:ln>
+            <a:noFill/>
+          </a:ln>
+          <a:effectLst/>
+        </p:spPr>
+        <p:style>
+          <a:lnRef idx="1">
+            <a:schemeClr val="accent1"/>
+          </a:lnRef>
+          <a:fillRef idx="3">
+            <a:schemeClr val="accent1"/>
+          </a:fillRef>
+          <a:effectRef idx="2">
+            <a:schemeClr val="accent1"/>
+          </a:effectRef>
+          <a:fontRef idx="minor">
+            <a:schemeClr val="lt1"/>
+          </a:fontRef>
+        </p:style>
+        <p:txBody>
+          <a:bodyPr rtlCol="0" anchor="ctr"/>
+          <a:lstStyle/>
+          <a:p>
+            <a:pPr algn="ctr"/>
+          </a:p>
+        </p:txBody>
+      </p:sp>
+      <p:sp>
+        <p:nvSpPr>
+          <p:cNvPr id="19" name="TextBox 18"/>
+          <p:cNvSpPr txBox="1"/>
+          <p:nvPr/>
+        </p:nvSpPr>
+        <p:spPr>
+          <a:xfrm>
+            <a:off x="1143000" y="5285231"/>
+            <a:ext cx="2926080" cy="674827"/>
+          </a:xfrm>
+          <a:prstGeom prst="rect">
+            <a:avLst/>
+          </a:prstGeom>
+          <a:noFill/>
+        </p:spPr>
+        <p:txBody>
+          <a:bodyPr wrap="square" anchor="ctr" lIns="0" rIns="0" tIns="0" bIns="0">
+            <a:spAutoFit/>
+          </a:bodyPr>
+          <a:lstStyle/>
+          <a:p>
+            <a:pPr algn="l">
+              <a:lnSpc>
+                <a:spcPct val="108000"/>
+              </a:lnSpc>
+              <a:spcAft>
+                <a:spcPts val="400"/>
+              </a:spcAft>
+            </a:pPr>
+            <a:r>
+              <a:rPr sz="1400" b="1" i="0">
+                <a:solidFill>
+                  <a:srgbClr val="9FE0D8"/>
+                </a:solidFill>
+                <a:latin typeface="NanumGothic"/>
+                <a:ea typeface="NanumGothic"/>
+              </a:rPr>
+              <a:t>근거</a:t>
+            </a:r>
+          </a:p>
+        </p:txBody>
+      </p:sp>
+      <p:sp>
+        <p:nvSpPr>
+          <p:cNvPr id="20" name="TextBox 19"/>
+          <p:cNvSpPr txBox="1"/>
+          <p:nvPr/>
+        </p:nvSpPr>
+        <p:spPr>
+          <a:xfrm>
+            <a:off x="4114800" y="5285231"/>
+            <a:ext cx="7406640" cy="674827"/>
+          </a:xfrm>
+          <a:prstGeom prst="rect">
+            <a:avLst/>
+          </a:prstGeom>
+          <a:noFill/>
+        </p:spPr>
+        <p:txBody>
+          <a:bodyPr wrap="square" anchor="ctr" lIns="0" rIns="0" tIns="0" bIns="0">
+            <a:spAutoFit/>
+          </a:bodyPr>
+          <a:lstStyle/>
+          <a:p>
+            <a:pPr algn="l">
+              <a:lnSpc>
+                <a:spcPct val="105000"/>
+              </a:lnSpc>
+              <a:spcAft>
+                <a:spcPts val="400"/>
+              </a:spcAft>
+            </a:pPr>
+            <a:r>
+              <a:rPr sz="1250" b="0" i="0">
+                <a:solidFill>
+                  <a:srgbClr val="FFFFFF"/>
+                </a:solidFill>
+                <a:latin typeface="NanumGothic"/>
+                <a:ea typeface="NanumGothic"/>
+              </a:rPr>
+              <a:t>대규모 RCT 부족(관찰·증례 중심). 조기 CRPS·비재건성 CLI에서 유용.</a:t>
+            </a:r>
+          </a:p>
+        </p:txBody>
+      </p:sp>
+    </p:spTree>
+  </p:cSld>
+  <p:clrMapOvr>
+    <a:masterClrMapping/>
+  </p:clrMapOvr>
+</p:sld>
+</file>
+
+<file path=ppt/slides/slide17.xml><?xml version="1.0" encoding="utf-8"?>
+<p:sld xmlns:a="http://schemas.openxmlformats.org/drawingml/2006/main" xmlns:p="http://schemas.openxmlformats.org/presentationml/2006/main" xmlns:r="http://schemas.openxmlformats.org/officeDocument/2006/relationships">
+  <p:cSld>
+    <p:spTree>
+      <p:nvGrpSpPr>
+        <p:cNvPr id="1" name=""/>
+        <p:cNvGrpSpPr/>
+        <p:nvPr/>
+      </p:nvGrpSpPr>
+      <p:grpSpPr/>
+      <p:sp>
+        <p:nvSpPr>
+          <p:cNvPr id="2" name="Rectangle 1"/>
+          <p:cNvSpPr/>
+          <p:nvPr/>
+        </p:nvSpPr>
+        <p:spPr>
+          <a:xfrm>
+            <a:off x="502920" y="310896"/>
+            <a:ext cx="109728" cy="457200"/>
+          </a:xfrm>
+          <a:prstGeom prst="rect">
+            <a:avLst/>
+          </a:prstGeom>
+          <a:solidFill>
+            <a:srgbClr val="2C898A"/>
+          </a:solidFill>
+          <a:ln>
+            <a:noFill/>
+          </a:ln>
+          <a:effectLst/>
+        </p:spPr>
+        <p:style>
+          <a:lnRef idx="1">
+            <a:schemeClr val="accent1"/>
+          </a:lnRef>
+          <a:fillRef idx="3">
+            <a:schemeClr val="accent1"/>
+          </a:fillRef>
+          <a:effectRef idx="2">
+            <a:schemeClr val="accent1"/>
+          </a:effectRef>
+          <a:fontRef idx="minor">
+            <a:schemeClr val="lt1"/>
+          </a:fontRef>
+        </p:style>
+        <p:txBody>
+          <a:bodyPr rtlCol="0" anchor="ctr"/>
+          <a:lstStyle/>
+          <a:p>
+            <a:pPr algn="ctr"/>
+          </a:p>
+        </p:txBody>
+      </p:sp>
+      <p:sp>
+        <p:nvSpPr>
+          <p:cNvPr id="3" name="TextBox 2"/>
+          <p:cNvSpPr txBox="1"/>
+          <p:nvPr/>
+        </p:nvSpPr>
+        <p:spPr>
+          <a:xfrm>
+            <a:off x="731520" y="237744"/>
+            <a:ext cx="9509760" cy="685800"/>
+          </a:xfrm>
+          <a:prstGeom prst="rect">
+            <a:avLst/>
+          </a:prstGeom>
+          <a:noFill/>
+        </p:spPr>
+        <p:txBody>
+          <a:bodyPr wrap="square" anchor="ctr" lIns="0" rIns="0" tIns="0" bIns="0">
+            <a:spAutoFit/>
+          </a:bodyPr>
+          <a:lstStyle/>
+          <a:p>
+            <a:pPr algn="l">
+              <a:lnSpc>
+                <a:spcPct val="108000"/>
+              </a:lnSpc>
+              <a:spcAft>
+                <a:spcPts val="400"/>
+              </a:spcAft>
+            </a:pPr>
+            <a:r>
+              <a:rPr sz="2400" b="1" i="0">
+                <a:solidFill>
+                  <a:srgbClr val="1B355E"/>
+                </a:solidFill>
+                <a:latin typeface="NanumGothic"/>
+                <a:ea typeface="NanumGothic"/>
+              </a:rPr>
+              <a:t>참고문헌 — LSB</a:t>
+            </a:r>
+          </a:p>
+        </p:txBody>
+      </p:sp>
+      <p:sp>
+        <p:nvSpPr>
+          <p:cNvPr id="4" name="TextBox 3"/>
+          <p:cNvSpPr txBox="1"/>
+          <p:nvPr/>
+        </p:nvSpPr>
+        <p:spPr>
+          <a:xfrm>
+            <a:off x="749808" y="109728"/>
+            <a:ext cx="7315200" cy="219456"/>
+          </a:xfrm>
+          <a:prstGeom prst="rect">
+            <a:avLst/>
+          </a:prstGeom>
+          <a:noFill/>
+        </p:spPr>
+        <p:txBody>
+          <a:bodyPr wrap="square" anchor="t" lIns="0" rIns="0" tIns="0" bIns="0">
+            <a:spAutoFit/>
+          </a:bodyPr>
+          <a:lstStyle/>
+          <a:p>
+            <a:pPr algn="l">
+              <a:lnSpc>
+                <a:spcPct val="108000"/>
+              </a:lnSpc>
+              <a:spcAft>
+                <a:spcPts val="400"/>
+              </a:spcAft>
+            </a:pPr>
+            <a:r>
+              <a:rPr sz="1100" b="1" i="0">
+                <a:solidFill>
+                  <a:srgbClr val="1F6E70"/>
+                </a:solidFill>
+                <a:latin typeface="NanumGothic"/>
+                <a:ea typeface="NanumGothic"/>
+              </a:rPr>
+              <a:t>참고문헌</a:t>
+            </a:r>
+          </a:p>
+        </p:txBody>
+      </p:sp>
+      <p:sp>
+        <p:nvSpPr>
+          <p:cNvPr id="5" name="Rectangle 4"/>
+          <p:cNvSpPr/>
+          <p:nvPr/>
+        </p:nvSpPr>
+        <p:spPr>
+          <a:xfrm>
+            <a:off x="731520" y="969264"/>
+            <a:ext cx="10881360" cy="17780"/>
+          </a:xfrm>
+          <a:prstGeom prst="rect">
+            <a:avLst/>
+          </a:prstGeom>
+          <a:solidFill>
+            <a:srgbClr val="D5DEE7"/>
+          </a:solidFill>
+          <a:ln>
+            <a:noFill/>
+          </a:ln>
+          <a:effectLst/>
+        </p:spPr>
+        <p:style>
+          <a:lnRef idx="1">
+            <a:schemeClr val="accent1"/>
+          </a:lnRef>
+          <a:fillRef idx="3">
+            <a:schemeClr val="accent1"/>
+          </a:fillRef>
+          <a:effectRef idx="2">
+            <a:schemeClr val="accent1"/>
+          </a:effectRef>
+          <a:fontRef idx="minor">
+            <a:schemeClr val="lt1"/>
+          </a:fontRef>
+        </p:style>
+        <p:txBody>
+          <a:bodyPr rtlCol="0" anchor="ctr"/>
+          <a:lstStyle/>
+          <a:p>
+            <a:pPr algn="ctr"/>
+          </a:p>
+        </p:txBody>
+      </p:sp>
+      <p:sp>
+        <p:nvSpPr>
+          <p:cNvPr id="6" name="Rounded Rectangle 5"/>
+          <p:cNvSpPr/>
+          <p:nvPr/>
+        </p:nvSpPr>
+        <p:spPr>
+          <a:xfrm>
+            <a:off x="10317175" y="365760"/>
+            <a:ext cx="1371600" cy="347472"/>
+          </a:xfrm>
+          <a:prstGeom prst="roundRect">
+            <a:avLst>
+              <a:gd name="adj" fmla="val 8000"/>
+            </a:avLst>
+          </a:prstGeom>
+          <a:solidFill>
+            <a:srgbClr val="2C898A"/>
+          </a:solidFill>
+          <a:ln>
+            <a:noFill/>
+          </a:ln>
+          <a:effectLst/>
+        </p:spPr>
+        <p:style>
+          <a:lnRef idx="1">
+            <a:schemeClr val="accent1"/>
+          </a:lnRef>
+          <a:fillRef idx="3">
+            <a:schemeClr val="accent1"/>
+          </a:fillRef>
+          <a:effectRef idx="2">
+            <a:schemeClr val="accent1"/>
+          </a:effectRef>
+          <a:fontRef idx="minor">
+            <a:schemeClr val="lt1"/>
+          </a:fontRef>
+        </p:style>
+        <p:txBody>
+          <a:bodyPr rtlCol="0" anchor="ctr"/>
+          <a:lstStyle/>
+          <a:p>
+            <a:pPr algn="ctr"/>
+          </a:p>
+        </p:txBody>
+      </p:sp>
+      <p:sp>
+        <p:nvSpPr>
+          <p:cNvPr id="7" name="TextBox 6"/>
+          <p:cNvSpPr txBox="1"/>
+          <p:nvPr/>
+        </p:nvSpPr>
+        <p:spPr>
+          <a:xfrm>
+            <a:off x="10317175" y="365760"/>
+            <a:ext cx="1371600" cy="347472"/>
+          </a:xfrm>
+          <a:prstGeom prst="rect">
+            <a:avLst/>
+          </a:prstGeom>
+          <a:noFill/>
+        </p:spPr>
+        <p:txBody>
+          <a:bodyPr wrap="square" anchor="ctr" lIns="0" rIns="0" tIns="0" bIns="0">
+            <a:spAutoFit/>
+          </a:bodyPr>
+          <a:lstStyle/>
+          <a:p>
+            <a:pPr algn="ctr">
+              <a:lnSpc>
+                <a:spcPct val="108000"/>
+              </a:lnSpc>
+              <a:spcAft>
+                <a:spcPts val="400"/>
+              </a:spcAft>
+            </a:pPr>
+            <a:r>
+              <a:rPr sz="1150" b="1" i="0">
+                <a:solidFill>
+                  <a:srgbClr val="FFFFFF"/>
+                </a:solidFill>
+                <a:latin typeface="NanumGothic"/>
+                <a:ea typeface="NanumGothic"/>
+              </a:rPr>
+              <a:t>References</a:t>
+            </a:r>
+          </a:p>
+        </p:txBody>
+      </p:sp>
+      <p:sp>
+        <p:nvSpPr>
+          <p:cNvPr id="8" name="TextBox 7"/>
+          <p:cNvSpPr txBox="1"/>
+          <p:nvPr/>
+        </p:nvSpPr>
+        <p:spPr>
+          <a:xfrm>
+            <a:off x="731520" y="1371600"/>
+            <a:ext cx="5257800" cy="4846320"/>
+          </a:xfrm>
+          <a:prstGeom prst="rect">
+            <a:avLst/>
+          </a:prstGeom>
+          <a:noFill/>
+        </p:spPr>
+        <p:txBody>
+          <a:bodyPr wrap="square" anchor="t" lIns="0" rIns="0" tIns="0" bIns="0">
+            <a:spAutoFit/>
+          </a:bodyPr>
+          <a:lstStyle/>
+          <a:p>
+            <a:pPr algn="l">
+              <a:lnSpc>
+                <a:spcPct val="105000"/>
+              </a:lnSpc>
+              <a:spcAft>
+                <a:spcPts val="700"/>
+              </a:spcAft>
+            </a:pPr>
+            <a:r>
+              <a:rPr sz="1000" b="0" i="0">
+                <a:solidFill>
+                  <a:srgbClr val="1A202C"/>
+                </a:solidFill>
+                <a:latin typeface="NanumGothic"/>
+                <a:ea typeface="NanumGothic"/>
+              </a:rPr>
+              <a:t>Dua A, Varacallo MA. Lumbar sympathetic block. StatPearls. 2026. NBK431107.</a:t>
+            </a:r>
+          </a:p>
+          <a:p>
+            <a:pPr algn="l">
+              <a:lnSpc>
+                <a:spcPct val="105000"/>
+              </a:lnSpc>
+              <a:spcAft>
+                <a:spcPts val="700"/>
+              </a:spcAft>
+            </a:pPr>
+            <a:r>
+              <a:rPr sz="1000" b="0" i="0">
+                <a:solidFill>
+                  <a:srgbClr val="1A202C"/>
+                </a:solidFill>
+                <a:latin typeface="NanumGothic"/>
+                <a:ea typeface="NanumGothic"/>
+              </a:rPr>
+              <a:t>Lumbar sympatholysis. StatPearls. NBK560514.</a:t>
+            </a:r>
+          </a:p>
+          <a:p>
+            <a:pPr algn="l">
+              <a:lnSpc>
+                <a:spcPct val="105000"/>
+              </a:lnSpc>
+              <a:spcAft>
+                <a:spcPts val="700"/>
+              </a:spcAft>
+            </a:pPr>
+            <a:r>
+              <a:rPr sz="1000" b="0" i="0">
+                <a:solidFill>
+                  <a:srgbClr val="1A202C"/>
+                </a:solidFill>
+                <a:latin typeface="NanumGothic"/>
+                <a:ea typeface="NanumGothic"/>
+              </a:rPr>
+              <a:t>Zhang JH, Deng YP, Geng MJ. Efficacy of the lumbar sympathetic ganglion block in lower limb pain. Ibrain. 2022;8(4):442-52. PMID 37786587.</a:t>
+            </a:r>
+          </a:p>
+          <a:p>
+            <a:pPr algn="l">
+              <a:lnSpc>
+                <a:spcPct val="105000"/>
+              </a:lnSpc>
+              <a:spcAft>
+                <a:spcPts val="700"/>
+              </a:spcAft>
+            </a:pPr>
+            <a:r>
+              <a:rPr sz="1000" b="0" i="0">
+                <a:solidFill>
+                  <a:srgbClr val="1A202C"/>
+                </a:solidFill>
+                <a:latin typeface="NanumGothic"/>
+                <a:ea typeface="NanumGothic"/>
+              </a:rPr>
+              <a:t>Dickey Z, Sharma N. Lumbar sympathetic block leading to increased arterial diameter and blood flow. Cureus. 2024;16(6):e61755. PMID 38975506.</a:t>
+            </a:r>
+          </a:p>
+          <a:p>
+            <a:pPr algn="l">
+              <a:lnSpc>
+                <a:spcPct val="105000"/>
+              </a:lnSpc>
+              <a:spcAft>
+                <a:spcPts val="700"/>
+              </a:spcAft>
+            </a:pPr>
+            <a:r>
+              <a:rPr sz="1000" b="0" i="0">
+                <a:solidFill>
+                  <a:srgbClr val="1A202C"/>
+                </a:solidFill>
+                <a:latin typeface="NanumGothic"/>
+                <a:ea typeface="NanumGothic"/>
+              </a:rPr>
+              <a:t>Barreto Junior EPS, et al. Neurolytic block of the lumbar sympathetic chain in critical lower limb ischemia. Braz J Anesthesiol. 2018;68(1):100-3. PMC9391669.</a:t>
+            </a:r>
+          </a:p>
+          <a:p>
+            <a:pPr algn="l">
+              <a:lnSpc>
+                <a:spcPct val="105000"/>
+              </a:lnSpc>
+              <a:spcAft>
+                <a:spcPts val="700"/>
+              </a:spcAft>
+            </a:pPr>
+            <a:r>
+              <a:rPr sz="1000" b="0" i="0">
+                <a:solidFill>
+                  <a:srgbClr val="1A202C"/>
+                </a:solidFill>
+                <a:latin typeface="NanumGothic"/>
+                <a:ea typeface="NanumGothic"/>
+              </a:rPr>
+              <a:t>Choi EJ, et al. Effect duration of lumbar sympathetic ganglion neurolysis in CRPS. Sci Rep. 2024;14(1):12693. PMID 38830944.</a:t>
+            </a:r>
+          </a:p>
+        </p:txBody>
+      </p:sp>
+      <p:sp>
+        <p:nvSpPr>
+          <p:cNvPr id="9" name="TextBox 8"/>
+          <p:cNvSpPr txBox="1"/>
+          <p:nvPr/>
+        </p:nvSpPr>
+        <p:spPr>
+          <a:xfrm>
+            <a:off x="6217920" y="1371600"/>
+            <a:ext cx="5257800" cy="4846320"/>
+          </a:xfrm>
+          <a:prstGeom prst="rect">
+            <a:avLst/>
+          </a:prstGeom>
+          <a:noFill/>
+        </p:spPr>
+        <p:txBody>
+          <a:bodyPr wrap="square" anchor="t" lIns="0" rIns="0" tIns="0" bIns="0">
+            <a:spAutoFit/>
+          </a:bodyPr>
+          <a:lstStyle/>
+          <a:p>
+            <a:pPr algn="l">
+              <a:lnSpc>
+                <a:spcPct val="105000"/>
+              </a:lnSpc>
+              <a:spcAft>
+                <a:spcPts val="700"/>
+              </a:spcAft>
+            </a:pPr>
+            <a:r>
+              <a:rPr sz="1000" b="0" i="0">
+                <a:solidFill>
+                  <a:srgbClr val="1A202C"/>
+                </a:solidFill>
+                <a:latin typeface="NanumGothic"/>
+                <a:ea typeface="NanumGothic"/>
+              </a:rPr>
+              <a:t>Gungor S, et al. Sympathetic blocks for CRPS: a case series. Medicine (Baltimore). 2018;97(19):e0705. PMID 29742728.</a:t>
+            </a:r>
+          </a:p>
+          <a:p>
+            <a:pPr algn="l">
+              <a:lnSpc>
+                <a:spcPct val="105000"/>
+              </a:lnSpc>
+              <a:spcAft>
+                <a:spcPts val="700"/>
+              </a:spcAft>
+            </a:pPr>
+            <a:r>
+              <a:rPr sz="1000" b="0" i="0">
+                <a:solidFill>
+                  <a:srgbClr val="1A202C"/>
+                </a:solidFill>
+                <a:latin typeface="NanumGothic"/>
+                <a:ea typeface="NanumGothic"/>
+              </a:rPr>
+              <a:t>Effect of lumbar sympathetic blockade on pain, Fontaine classification, collateral perfusion in PAD. Medicina (Kaunas). 2024;60(5):682.</a:t>
+            </a:r>
+          </a:p>
+          <a:p>
+            <a:pPr algn="l">
+              <a:lnSpc>
+                <a:spcPct val="105000"/>
+              </a:lnSpc>
+              <a:spcAft>
+                <a:spcPts val="700"/>
+              </a:spcAft>
+            </a:pPr>
+            <a:r>
+              <a:rPr sz="1000" b="0" i="0">
+                <a:solidFill>
+                  <a:srgbClr val="1A202C"/>
+                </a:solidFill>
+                <a:latin typeface="NanumGothic"/>
+                <a:ea typeface="NanumGothic"/>
+              </a:rPr>
+              <a:t>Prediction of LSB efficacy in CRPS type 1 by sympathetic skin response. Pain Ther. 2023;12(3):809-22. PMC10199976.</a:t>
+            </a:r>
+          </a:p>
+          <a:p>
+            <a:pPr algn="l">
+              <a:lnSpc>
+                <a:spcPct val="105000"/>
+              </a:lnSpc>
+              <a:spcAft>
+                <a:spcPts val="700"/>
+              </a:spcAft>
+            </a:pPr>
+            <a:r>
+              <a:rPr sz="1000" b="0" i="0">
+                <a:solidFill>
+                  <a:srgbClr val="1A202C"/>
+                </a:solidFill>
+                <a:latin typeface="NanumGothic"/>
+                <a:ea typeface="NanumGothic"/>
+              </a:rPr>
+              <a:t>Continuous LSB + sympatholysis for refractory painful diabetic neuropathy — RCT. 2020. PMID 32915421.</a:t>
+            </a:r>
+          </a:p>
+          <a:p>
+            <a:pPr algn="l">
+              <a:lnSpc>
+                <a:spcPct val="105000"/>
+              </a:lnSpc>
+              <a:spcAft>
+                <a:spcPts val="700"/>
+              </a:spcAft>
+            </a:pPr>
+            <a:r>
+              <a:rPr sz="1000" b="0" i="0">
+                <a:solidFill>
+                  <a:srgbClr val="1A202C"/>
+                </a:solidFill>
+                <a:latin typeface="NanumGothic"/>
+                <a:ea typeface="NanumGothic"/>
+              </a:rPr>
+              <a:t>Sympathetic blocks: sustained relief in refractory painful diabetic neuropathy (case). 2012. PMID 22606406.</a:t>
+            </a:r>
+          </a:p>
+          <a:p>
+            <a:pPr algn="l">
+              <a:lnSpc>
+                <a:spcPct val="105000"/>
+              </a:lnSpc>
+              <a:spcAft>
+                <a:spcPts val="700"/>
+              </a:spcAft>
+            </a:pPr>
+            <a:r>
+              <a:rPr sz="1000" b="0" i="0">
+                <a:solidFill>
+                  <a:srgbClr val="1A202C"/>
+                </a:solidFill>
+                <a:latin typeface="NanumGothic"/>
+                <a:ea typeface="NanumGothic"/>
+              </a:rPr>
+              <a:t>Lumbar sympathectomy for ischaemia·vasculitis·diabetic neuropathy·hyperhidrosis — series. 2018. PMID 29516399.</a:t>
+            </a:r>
+          </a:p>
+        </p:txBody>
+      </p:sp>
+      <p:sp>
+        <p:nvSpPr>
+          <p:cNvPr id="10" name="TextBox 9"/>
+          <p:cNvSpPr txBox="1"/>
+          <p:nvPr/>
+        </p:nvSpPr>
+        <p:spPr>
+          <a:xfrm>
+            <a:off x="731520" y="6455664"/>
+            <a:ext cx="9875520" cy="292608"/>
+          </a:xfrm>
+          <a:prstGeom prst="rect">
+            <a:avLst/>
+          </a:prstGeom>
+          <a:noFill/>
+        </p:spPr>
+        <p:txBody>
+          <a:bodyPr wrap="square" anchor="ctr" lIns="0" rIns="0" tIns="0" bIns="0">
+            <a:spAutoFit/>
+          </a:bodyPr>
+          <a:lstStyle/>
+          <a:p>
+            <a:pPr algn="l">
+              <a:lnSpc>
+                <a:spcPct val="108000"/>
+              </a:lnSpc>
+              <a:spcAft>
+                <a:spcPts val="400"/>
+              </a:spcAft>
+            </a:pPr>
+            <a:r>
+              <a:rPr sz="900" b="0" i="0">
+                <a:solidFill>
+                  <a:srgbClr val="5A6B7B"/>
+                </a:solidFill>
+                <a:latin typeface="NanumGothic"/>
+                <a:ea typeface="NanumGothic"/>
+              </a:rPr>
+              <a:t>근거: PubMed/저널 목록 대조 — 조작 인용 없음</a:t>
+            </a:r>
+          </a:p>
+        </p:txBody>
+      </p:sp>
+      <p:sp>
+        <p:nvSpPr>
+          <p:cNvPr id="11" name="TextBox 10"/>
+          <p:cNvSpPr txBox="1"/>
+          <p:nvPr/>
+        </p:nvSpPr>
+        <p:spPr>
+          <a:xfrm>
+            <a:off x="11064240" y="6455664"/>
+            <a:ext cx="822960" cy="292608"/>
+          </a:xfrm>
+          <a:prstGeom prst="rect">
+            <a:avLst/>
+          </a:prstGeom>
+          <a:noFill/>
+        </p:spPr>
+        <p:txBody>
+          <a:bodyPr wrap="square" anchor="ctr" lIns="0" rIns="0" tIns="0" bIns="0">
+            <a:spAutoFit/>
+          </a:bodyPr>
+          <a:lstStyle/>
+          <a:p>
             <a:pPr algn="r">
               <a:lnSpc>
                 <a:spcPct val="108000"/>
@@ -6622,7 +8649,7 @@
                 <a:latin typeface="NanumGothic"/>
                 <a:ea typeface="NanumGothic"/>
               </a:rPr>
-              <a:t>14</a:t>
+              <a:t>17</a:t>
             </a:r>
           </a:p>
         </p:txBody>
@@ -8892,6 +10919,2009 @@
         </p:nvSpPr>
         <p:spPr>
           <a:xfrm>
+            <a:off x="0" y="0"/>
+            <a:ext cx="12191695" cy="6858000"/>
+          </a:xfrm>
+          <a:prstGeom prst="rect">
+            <a:avLst/>
+          </a:prstGeom>
+          <a:solidFill>
+            <a:srgbClr val="FFFFFF"/>
+          </a:solidFill>
+          <a:ln>
+            <a:noFill/>
+          </a:ln>
+          <a:effectLst/>
+        </p:spPr>
+        <p:style>
+          <a:lnRef idx="1">
+            <a:schemeClr val="accent1"/>
+          </a:lnRef>
+          <a:fillRef idx="3">
+            <a:schemeClr val="accent1"/>
+          </a:fillRef>
+          <a:effectRef idx="2">
+            <a:schemeClr val="accent1"/>
+          </a:effectRef>
+          <a:fontRef idx="minor">
+            <a:schemeClr val="lt1"/>
+          </a:fontRef>
+        </p:style>
+        <p:txBody>
+          <a:bodyPr rtlCol="0" anchor="ctr"/>
+          <a:lstStyle/>
+          <a:p>
+            <a:pPr algn="ctr"/>
+          </a:p>
+        </p:txBody>
+      </p:sp>
+      <p:sp>
+        <p:nvSpPr>
+          <p:cNvPr id="3" name="Rectangle 2"/>
+          <p:cNvSpPr/>
+          <p:nvPr/>
+        </p:nvSpPr>
+        <p:spPr>
+          <a:xfrm>
+            <a:off x="502920" y="310896"/>
+            <a:ext cx="109728" cy="457200"/>
+          </a:xfrm>
+          <a:prstGeom prst="rect">
+            <a:avLst/>
+          </a:prstGeom>
+          <a:solidFill>
+            <a:srgbClr val="2C898A"/>
+          </a:solidFill>
+          <a:ln>
+            <a:noFill/>
+          </a:ln>
+          <a:effectLst/>
+        </p:spPr>
+        <p:style>
+          <a:lnRef idx="1">
+            <a:schemeClr val="accent1"/>
+          </a:lnRef>
+          <a:fillRef idx="3">
+            <a:schemeClr val="accent1"/>
+          </a:fillRef>
+          <a:effectRef idx="2">
+            <a:schemeClr val="accent1"/>
+          </a:effectRef>
+          <a:fontRef idx="minor">
+            <a:schemeClr val="lt1"/>
+          </a:fontRef>
+        </p:style>
+        <p:txBody>
+          <a:bodyPr rtlCol="0" anchor="ctr"/>
+          <a:lstStyle/>
+          <a:p>
+            <a:pPr algn="ctr"/>
+          </a:p>
+        </p:txBody>
+      </p:sp>
+      <p:sp>
+        <p:nvSpPr>
+          <p:cNvPr id="4" name="TextBox 3"/>
+          <p:cNvSpPr txBox="1"/>
+          <p:nvPr/>
+        </p:nvSpPr>
+        <p:spPr>
+          <a:xfrm>
+            <a:off x="731520" y="237744"/>
+            <a:ext cx="9509760" cy="685800"/>
+          </a:xfrm>
+          <a:prstGeom prst="rect">
+            <a:avLst/>
+          </a:prstGeom>
+          <a:noFill/>
+        </p:spPr>
+        <p:txBody>
+          <a:bodyPr wrap="square" anchor="ctr" lIns="0" rIns="0" tIns="0" bIns="0">
+            <a:spAutoFit/>
+          </a:bodyPr>
+          <a:lstStyle/>
+          <a:p>
+            <a:pPr algn="l">
+              <a:lnSpc>
+                <a:spcPct val="108000"/>
+              </a:lnSpc>
+              <a:spcAft>
+                <a:spcPts val="400"/>
+              </a:spcAft>
+            </a:pPr>
+            <a:r>
+              <a:rPr sz="2400" b="1" i="0">
+                <a:solidFill>
+                  <a:srgbClr val="1B355E"/>
+                </a:solidFill>
+                <a:latin typeface="NanumGothic"/>
+                <a:ea typeface="NanumGothic"/>
+              </a:rPr>
+              <a:t>L2·L3 조감도 — 표적과 위험 구조</a:t>
+            </a:r>
+          </a:p>
+        </p:txBody>
+      </p:sp>
+      <p:sp>
+        <p:nvSpPr>
+          <p:cNvPr id="5" name="TextBox 4"/>
+          <p:cNvSpPr txBox="1"/>
+          <p:nvPr/>
+        </p:nvSpPr>
+        <p:spPr>
+          <a:xfrm>
+            <a:off x="749808" y="109728"/>
+            <a:ext cx="7315200" cy="219456"/>
+          </a:xfrm>
+          <a:prstGeom prst="rect">
+            <a:avLst/>
+          </a:prstGeom>
+          <a:noFill/>
+        </p:spPr>
+        <p:txBody>
+          <a:bodyPr wrap="square" anchor="t" lIns="0" rIns="0" tIns="0" bIns="0">
+            <a:spAutoFit/>
+          </a:bodyPr>
+          <a:lstStyle/>
+          <a:p>
+            <a:pPr algn="l">
+              <a:lnSpc>
+                <a:spcPct val="108000"/>
+              </a:lnSpc>
+              <a:spcAft>
+                <a:spcPts val="400"/>
+              </a:spcAft>
+            </a:pPr>
+            <a:r>
+              <a:rPr sz="1100" b="1" i="0">
+                <a:solidFill>
+                  <a:srgbClr val="1F6E70"/>
+                </a:solidFill>
+                <a:latin typeface="NanumGothic"/>
+                <a:ea typeface="NanumGothic"/>
+              </a:rPr>
+              <a:t>방법 · 그림으로</a:t>
+            </a:r>
+          </a:p>
+        </p:txBody>
+      </p:sp>
+      <p:sp>
+        <p:nvSpPr>
+          <p:cNvPr id="6" name="Rectangle 5"/>
+          <p:cNvSpPr/>
+          <p:nvPr/>
+        </p:nvSpPr>
+        <p:spPr>
+          <a:xfrm>
+            <a:off x="731520" y="969264"/>
+            <a:ext cx="10881360" cy="17780"/>
+          </a:xfrm>
+          <a:prstGeom prst="rect">
+            <a:avLst/>
+          </a:prstGeom>
+          <a:solidFill>
+            <a:srgbClr val="D5DEE7"/>
+          </a:solidFill>
+          <a:ln>
+            <a:noFill/>
+          </a:ln>
+          <a:effectLst/>
+        </p:spPr>
+        <p:style>
+          <a:lnRef idx="1">
+            <a:schemeClr val="accent1"/>
+          </a:lnRef>
+          <a:fillRef idx="3">
+            <a:schemeClr val="accent1"/>
+          </a:fillRef>
+          <a:effectRef idx="2">
+            <a:schemeClr val="accent1"/>
+          </a:effectRef>
+          <a:fontRef idx="minor">
+            <a:schemeClr val="lt1"/>
+          </a:fontRef>
+        </p:style>
+        <p:txBody>
+          <a:bodyPr rtlCol="0" anchor="ctr"/>
+          <a:lstStyle/>
+          <a:p>
+            <a:pPr algn="ctr"/>
+          </a:p>
+        </p:txBody>
+      </p:sp>
+      <p:sp>
+        <p:nvSpPr>
+          <p:cNvPr id="7" name="Rounded Rectangle 6"/>
+          <p:cNvSpPr/>
+          <p:nvPr/>
+        </p:nvSpPr>
+        <p:spPr>
+          <a:xfrm>
+            <a:off x="10426903" y="365760"/>
+            <a:ext cx="1261872" cy="347472"/>
+          </a:xfrm>
+          <a:prstGeom prst="roundRect">
+            <a:avLst>
+              <a:gd name="adj" fmla="val 8000"/>
+            </a:avLst>
+          </a:prstGeom>
+          <a:solidFill>
+            <a:srgbClr val="2C898A"/>
+          </a:solidFill>
+          <a:ln>
+            <a:noFill/>
+          </a:ln>
+          <a:effectLst/>
+        </p:spPr>
+        <p:style>
+          <a:lnRef idx="1">
+            <a:schemeClr val="accent1"/>
+          </a:lnRef>
+          <a:fillRef idx="3">
+            <a:schemeClr val="accent1"/>
+          </a:fillRef>
+          <a:effectRef idx="2">
+            <a:schemeClr val="accent1"/>
+          </a:effectRef>
+          <a:fontRef idx="minor">
+            <a:schemeClr val="lt1"/>
+          </a:fontRef>
+        </p:style>
+        <p:txBody>
+          <a:bodyPr rtlCol="0" anchor="ctr"/>
+          <a:lstStyle/>
+          <a:p>
+            <a:pPr algn="ctr"/>
+          </a:p>
+        </p:txBody>
+      </p:sp>
+      <p:sp>
+        <p:nvSpPr>
+          <p:cNvPr id="8" name="TextBox 7"/>
+          <p:cNvSpPr txBox="1"/>
+          <p:nvPr/>
+        </p:nvSpPr>
+        <p:spPr>
+          <a:xfrm>
+            <a:off x="10426903" y="365760"/>
+            <a:ext cx="1261872" cy="347472"/>
+          </a:xfrm>
+          <a:prstGeom prst="rect">
+            <a:avLst/>
+          </a:prstGeom>
+          <a:noFill/>
+        </p:spPr>
+        <p:txBody>
+          <a:bodyPr wrap="square" anchor="ctr" lIns="0" rIns="0" tIns="0" bIns="0">
+            <a:spAutoFit/>
+          </a:bodyPr>
+          <a:lstStyle/>
+          <a:p>
+            <a:pPr algn="ctr">
+              <a:lnSpc>
+                <a:spcPct val="108000"/>
+              </a:lnSpc>
+              <a:spcAft>
+                <a:spcPts val="400"/>
+              </a:spcAft>
+            </a:pPr>
+            <a:r>
+              <a:rPr sz="1150" b="1" i="0">
+                <a:solidFill>
+                  <a:srgbClr val="FFFFFF"/>
+                </a:solidFill>
+                <a:latin typeface="NanumGothic"/>
+                <a:ea typeface="NanumGothic"/>
+              </a:rPr>
+              <a:t>축상면 axial</a:t>
+            </a:r>
+          </a:p>
+        </p:txBody>
+      </p:sp>
+      <p:pic>
+        <p:nvPicPr>
+          <p:cNvPr id="9" name="Picture 8" descr="lsb_axial.png"/>
+          <p:cNvPicPr>
+            <a:picLocks noChangeAspect="1"/>
+          </p:cNvPicPr>
+          <p:nvPr/>
+        </p:nvPicPr>
+        <p:blipFill>
+          <a:blip r:embed="rId2"/>
+          <a:stretch>
+            <a:fillRect/>
+          </a:stretch>
+        </p:blipFill>
+        <p:spPr>
+          <a:xfrm>
+            <a:off x="2767431" y="1325880"/>
+            <a:ext cx="6656832" cy="4160520"/>
+          </a:xfrm>
+          <a:prstGeom prst="rect">
+            <a:avLst/>
+          </a:prstGeom>
+        </p:spPr>
+      </p:pic>
+      <p:sp>
+        <p:nvSpPr>
+          <p:cNvPr id="10" name="TextBox 9"/>
+          <p:cNvSpPr txBox="1"/>
+          <p:nvPr/>
+        </p:nvSpPr>
+        <p:spPr>
+          <a:xfrm>
+            <a:off x="640080" y="5760720"/>
+            <a:ext cx="10927080" cy="457200"/>
+          </a:xfrm>
+          <a:prstGeom prst="rect">
+            <a:avLst/>
+          </a:prstGeom>
+          <a:noFill/>
+        </p:spPr>
+        <p:txBody>
+          <a:bodyPr wrap="square" anchor="ctr" lIns="0" rIns="0" tIns="0" bIns="0">
+            <a:spAutoFit/>
+          </a:bodyPr>
+          <a:lstStyle/>
+          <a:p>
+            <a:pPr algn="ctr">
+              <a:lnSpc>
+                <a:spcPct val="108000"/>
+              </a:lnSpc>
+              <a:spcAft>
+                <a:spcPts val="400"/>
+              </a:spcAft>
+            </a:pPr>
+            <a:r>
+              <a:rPr sz="1100" b="1" i="0">
+                <a:solidFill>
+                  <a:srgbClr val="1F6E70"/>
+                </a:solidFill>
+                <a:latin typeface="NanumGothic"/>
+                <a:ea typeface="NanumGothic"/>
+              </a:rPr>
+              <a:t>표적=척추체 전외측 교감신경절 · 방척추(정중선 ~7cm) 접근 · 대동맥·IVC·요관·신장·생식대퇴신경·추간공 회피</a:t>
+            </a:r>
+          </a:p>
+        </p:txBody>
+      </p:sp>
+      <p:sp>
+        <p:nvSpPr>
+          <p:cNvPr id="11" name="TextBox 10"/>
+          <p:cNvSpPr txBox="1"/>
+          <p:nvPr/>
+        </p:nvSpPr>
+        <p:spPr>
+          <a:xfrm>
+            <a:off x="731520" y="6455664"/>
+            <a:ext cx="9875520" cy="292608"/>
+          </a:xfrm>
+          <a:prstGeom prst="rect">
+            <a:avLst/>
+          </a:prstGeom>
+          <a:noFill/>
+        </p:spPr>
+        <p:txBody>
+          <a:bodyPr wrap="square" anchor="ctr" lIns="0" rIns="0" tIns="0" bIns="0">
+            <a:spAutoFit/>
+          </a:bodyPr>
+          <a:lstStyle/>
+          <a:p>
+            <a:pPr algn="l">
+              <a:lnSpc>
+                <a:spcPct val="108000"/>
+              </a:lnSpc>
+              <a:spcAft>
+                <a:spcPts val="400"/>
+              </a:spcAft>
+            </a:pPr>
+            <a:r>
+              <a:rPr sz="900" b="0" i="0">
+                <a:solidFill>
+                  <a:srgbClr val="5A6B7B"/>
+                </a:solidFill>
+                <a:latin typeface="NanumGothic"/>
+                <a:ea typeface="NanumGothic"/>
+              </a:rPr>
+              <a:t>근거: 교육용 오리지널 도해 · StatPearls NBK431107</a:t>
+            </a:r>
+          </a:p>
+        </p:txBody>
+      </p:sp>
+      <p:sp>
+        <p:nvSpPr>
+          <p:cNvPr id="12" name="TextBox 11"/>
+          <p:cNvSpPr txBox="1"/>
+          <p:nvPr/>
+        </p:nvSpPr>
+        <p:spPr>
+          <a:xfrm>
+            <a:off x="11064240" y="6455664"/>
+            <a:ext cx="822960" cy="292608"/>
+          </a:xfrm>
+          <a:prstGeom prst="rect">
+            <a:avLst/>
+          </a:prstGeom>
+          <a:noFill/>
+        </p:spPr>
+        <p:txBody>
+          <a:bodyPr wrap="square" anchor="ctr" lIns="0" rIns="0" tIns="0" bIns="0">
+            <a:spAutoFit/>
+          </a:bodyPr>
+          <a:lstStyle/>
+          <a:p>
+            <a:pPr algn="r">
+              <a:lnSpc>
+                <a:spcPct val="108000"/>
+              </a:lnSpc>
+              <a:spcAft>
+                <a:spcPts val="400"/>
+              </a:spcAft>
+            </a:pPr>
+            <a:r>
+              <a:rPr sz="1000" b="1" i="0">
+                <a:solidFill>
+                  <a:srgbClr val="5A6B7B"/>
+                </a:solidFill>
+                <a:latin typeface="NanumGothic"/>
+                <a:ea typeface="NanumGothic"/>
+              </a:rPr>
+              <a:t>5</a:t>
+            </a:r>
+          </a:p>
+        </p:txBody>
+      </p:sp>
+    </p:spTree>
+  </p:cSld>
+  <p:clrMapOvr>
+    <a:masterClrMapping/>
+  </p:clrMapOvr>
+</p:sld>
+</file>
+
+<file path=ppt/slides/slide6.xml><?xml version="1.0" encoding="utf-8"?>
+<p:sld xmlns:a="http://schemas.openxmlformats.org/drawingml/2006/main" xmlns:p="http://schemas.openxmlformats.org/presentationml/2006/main" xmlns:r="http://schemas.openxmlformats.org/officeDocument/2006/relationships">
+  <p:cSld>
+    <p:spTree>
+      <p:nvGrpSpPr>
+        <p:cNvPr id="1" name=""/>
+        <p:cNvGrpSpPr/>
+        <p:nvPr/>
+      </p:nvGrpSpPr>
+      <p:grpSpPr/>
+      <p:sp>
+        <p:nvSpPr>
+          <p:cNvPr id="2" name="Rectangle 1"/>
+          <p:cNvSpPr/>
+          <p:nvPr/>
+        </p:nvSpPr>
+        <p:spPr>
+          <a:xfrm>
+            <a:off x="502920" y="310896"/>
+            <a:ext cx="109728" cy="457200"/>
+          </a:xfrm>
+          <a:prstGeom prst="rect">
+            <a:avLst/>
+          </a:prstGeom>
+          <a:solidFill>
+            <a:srgbClr val="2C898A"/>
+          </a:solidFill>
+          <a:ln>
+            <a:noFill/>
+          </a:ln>
+          <a:effectLst/>
+        </p:spPr>
+        <p:style>
+          <a:lnRef idx="1">
+            <a:schemeClr val="accent1"/>
+          </a:lnRef>
+          <a:fillRef idx="3">
+            <a:schemeClr val="accent1"/>
+          </a:fillRef>
+          <a:effectRef idx="2">
+            <a:schemeClr val="accent1"/>
+          </a:effectRef>
+          <a:fontRef idx="minor">
+            <a:schemeClr val="lt1"/>
+          </a:fontRef>
+        </p:style>
+        <p:txBody>
+          <a:bodyPr rtlCol="0" anchor="ctr"/>
+          <a:lstStyle/>
+          <a:p>
+            <a:pPr algn="ctr"/>
+          </a:p>
+        </p:txBody>
+      </p:sp>
+      <p:sp>
+        <p:nvSpPr>
+          <p:cNvPr id="3" name="TextBox 2"/>
+          <p:cNvSpPr txBox="1"/>
+          <p:nvPr/>
+        </p:nvSpPr>
+        <p:spPr>
+          <a:xfrm>
+            <a:off x="731520" y="237744"/>
+            <a:ext cx="9509760" cy="685800"/>
+          </a:xfrm>
+          <a:prstGeom prst="rect">
+            <a:avLst/>
+          </a:prstGeom>
+          <a:noFill/>
+        </p:spPr>
+        <p:txBody>
+          <a:bodyPr wrap="square" anchor="ctr" lIns="0" rIns="0" tIns="0" bIns="0">
+            <a:spAutoFit/>
+          </a:bodyPr>
+          <a:lstStyle/>
+          <a:p>
+            <a:pPr algn="l">
+              <a:lnSpc>
+                <a:spcPct val="108000"/>
+              </a:lnSpc>
+              <a:spcAft>
+                <a:spcPts val="400"/>
+              </a:spcAft>
+            </a:pPr>
+            <a:r>
+              <a:rPr sz="2400" b="1" i="0">
+                <a:solidFill>
+                  <a:srgbClr val="1B355E"/>
+                </a:solidFill>
+                <a:latin typeface="NanumGothic"/>
+                <a:ea typeface="NanumGothic"/>
+              </a:rPr>
+              <a:t>L2·L3 시술 — 전·중 주의할 점</a:t>
+            </a:r>
+          </a:p>
+        </p:txBody>
+      </p:sp>
+      <p:sp>
+        <p:nvSpPr>
+          <p:cNvPr id="4" name="TextBox 3"/>
+          <p:cNvSpPr txBox="1"/>
+          <p:nvPr/>
+        </p:nvSpPr>
+        <p:spPr>
+          <a:xfrm>
+            <a:off x="749808" y="109728"/>
+            <a:ext cx="7315200" cy="219456"/>
+          </a:xfrm>
+          <a:prstGeom prst="rect">
+            <a:avLst/>
+          </a:prstGeom>
+          <a:noFill/>
+        </p:spPr>
+        <p:txBody>
+          <a:bodyPr wrap="square" anchor="t" lIns="0" rIns="0" tIns="0" bIns="0">
+            <a:spAutoFit/>
+          </a:bodyPr>
+          <a:lstStyle/>
+          <a:p>
+            <a:pPr algn="l">
+              <a:lnSpc>
+                <a:spcPct val="108000"/>
+              </a:lnSpc>
+              <a:spcAft>
+                <a:spcPts val="400"/>
+              </a:spcAft>
+            </a:pPr>
+            <a:r>
+              <a:rPr sz="1100" b="1" i="0">
+                <a:solidFill>
+                  <a:srgbClr val="1F6E70"/>
+                </a:solidFill>
+                <a:latin typeface="NanumGothic"/>
+                <a:ea typeface="NanumGothic"/>
+              </a:rPr>
+              <a:t>방법 · 안전</a:t>
+            </a:r>
+          </a:p>
+        </p:txBody>
+      </p:sp>
+      <p:sp>
+        <p:nvSpPr>
+          <p:cNvPr id="5" name="Rectangle 4"/>
+          <p:cNvSpPr/>
+          <p:nvPr/>
+        </p:nvSpPr>
+        <p:spPr>
+          <a:xfrm>
+            <a:off x="731520" y="969264"/>
+            <a:ext cx="10881360" cy="17780"/>
+          </a:xfrm>
+          <a:prstGeom prst="rect">
+            <a:avLst/>
+          </a:prstGeom>
+          <a:solidFill>
+            <a:srgbClr val="D5DEE7"/>
+          </a:solidFill>
+          <a:ln>
+            <a:noFill/>
+          </a:ln>
+          <a:effectLst/>
+        </p:spPr>
+        <p:style>
+          <a:lnRef idx="1">
+            <a:schemeClr val="accent1"/>
+          </a:lnRef>
+          <a:fillRef idx="3">
+            <a:schemeClr val="accent1"/>
+          </a:fillRef>
+          <a:effectRef idx="2">
+            <a:schemeClr val="accent1"/>
+          </a:effectRef>
+          <a:fontRef idx="minor">
+            <a:schemeClr val="lt1"/>
+          </a:fontRef>
+        </p:style>
+        <p:txBody>
+          <a:bodyPr rtlCol="0" anchor="ctr"/>
+          <a:lstStyle/>
+          <a:p>
+            <a:pPr algn="ctr"/>
+          </a:p>
+        </p:txBody>
+      </p:sp>
+      <p:sp>
+        <p:nvSpPr>
+          <p:cNvPr id="6" name="Rounded Rectangle 5"/>
+          <p:cNvSpPr/>
+          <p:nvPr/>
+        </p:nvSpPr>
+        <p:spPr>
+          <a:xfrm>
+            <a:off x="10865816" y="365760"/>
+            <a:ext cx="822959" cy="347472"/>
+          </a:xfrm>
+          <a:prstGeom prst="roundRect">
+            <a:avLst>
+              <a:gd name="adj" fmla="val 8000"/>
+            </a:avLst>
+          </a:prstGeom>
+          <a:solidFill>
+            <a:srgbClr val="2C898A"/>
+          </a:solidFill>
+          <a:ln>
+            <a:noFill/>
+          </a:ln>
+          <a:effectLst/>
+        </p:spPr>
+        <p:style>
+          <a:lnRef idx="1">
+            <a:schemeClr val="accent1"/>
+          </a:lnRef>
+          <a:fillRef idx="3">
+            <a:schemeClr val="accent1"/>
+          </a:fillRef>
+          <a:effectRef idx="2">
+            <a:schemeClr val="accent1"/>
+          </a:effectRef>
+          <a:fontRef idx="minor">
+            <a:schemeClr val="lt1"/>
+          </a:fontRef>
+        </p:style>
+        <p:txBody>
+          <a:bodyPr rtlCol="0" anchor="ctr"/>
+          <a:lstStyle/>
+          <a:p>
+            <a:pPr algn="ctr"/>
+          </a:p>
+        </p:txBody>
+      </p:sp>
+      <p:sp>
+        <p:nvSpPr>
+          <p:cNvPr id="7" name="TextBox 6"/>
+          <p:cNvSpPr txBox="1"/>
+          <p:nvPr/>
+        </p:nvSpPr>
+        <p:spPr>
+          <a:xfrm>
+            <a:off x="10865816" y="365760"/>
+            <a:ext cx="822959" cy="347472"/>
+          </a:xfrm>
+          <a:prstGeom prst="rect">
+            <a:avLst/>
+          </a:prstGeom>
+          <a:noFill/>
+        </p:spPr>
+        <p:txBody>
+          <a:bodyPr wrap="square" anchor="ctr" lIns="0" rIns="0" tIns="0" bIns="0">
+            <a:spAutoFit/>
+          </a:bodyPr>
+          <a:lstStyle/>
+          <a:p>
+            <a:pPr algn="ctr">
+              <a:lnSpc>
+                <a:spcPct val="108000"/>
+              </a:lnSpc>
+              <a:spcAft>
+                <a:spcPts val="400"/>
+              </a:spcAft>
+            </a:pPr>
+            <a:r>
+              <a:rPr sz="1150" b="1" i="0">
+                <a:solidFill>
+                  <a:srgbClr val="FFFFFF"/>
+                </a:solidFill>
+                <a:latin typeface="NanumGothic"/>
+                <a:ea typeface="NanumGothic"/>
+              </a:rPr>
+              <a:t>시술 주의</a:t>
+            </a:r>
+          </a:p>
+        </p:txBody>
+      </p:sp>
+      <p:sp>
+        <p:nvSpPr>
+          <p:cNvPr id="8" name="TextBox 7"/>
+          <p:cNvSpPr txBox="1"/>
+          <p:nvPr/>
+        </p:nvSpPr>
+        <p:spPr>
+          <a:xfrm>
+            <a:off x="731520" y="1371600"/>
+            <a:ext cx="10835640" cy="4754880"/>
+          </a:xfrm>
+          <a:prstGeom prst="rect">
+            <a:avLst/>
+          </a:prstGeom>
+          <a:noFill/>
+        </p:spPr>
+        <p:txBody>
+          <a:bodyPr wrap="square" lIns="0" rIns="0" tIns="0" bIns="0">
+            <a:spAutoFit/>
+          </a:bodyPr>
+          <a:lstStyle/>
+          <a:p>
+            <a:pPr algn="l">
+              <a:lnSpc>
+                <a:spcPct val="108000"/>
+              </a:lnSpc>
+              <a:spcAft>
+                <a:spcPts val="700"/>
+              </a:spcAft>
+            </a:pPr>
+            <a:r>
+              <a:rPr sz="979" b="1" i="0">
+                <a:solidFill>
+                  <a:srgbClr val="2C898A"/>
+                </a:solidFill>
+                <a:latin typeface="NanumGothic"/>
+                <a:ea typeface="NanumGothic"/>
+              </a:rPr>
+              <a:t>●  </a:t>
+            </a:r>
+            <a:r>
+              <a:rPr sz="1400" b="0" i="0">
+                <a:solidFill>
+                  <a:srgbClr val="1A202C"/>
+                </a:solidFill>
+                <a:latin typeface="NanumGothic"/>
+                <a:ea typeface="NanumGothic"/>
+              </a:rPr>
+              <a:t>영상 유도 필수: 투시(또는 CT). 조영제로 두미측 종방향 확산 확인 — 후방(추간공)·혈관 확산 시 즉시 재위치.</a:t>
+            </a:r>
+          </a:p>
+          <a:p>
+            <a:pPr algn="l">
+              <a:lnSpc>
+                <a:spcPct val="108000"/>
+              </a:lnSpc>
+              <a:spcAft>
+                <a:spcPts val="700"/>
+              </a:spcAft>
+            </a:pPr>
+            <a:r>
+              <a:rPr sz="979" b="1" i="0">
+                <a:solidFill>
+                  <a:srgbClr val="2C898A"/>
+                </a:solidFill>
+                <a:latin typeface="NanumGothic"/>
+                <a:ea typeface="NanumGothic"/>
+              </a:rPr>
+              <a:t>●  </a:t>
+            </a:r>
+            <a:r>
+              <a:rPr sz="1400" b="1" i="0">
+                <a:solidFill>
+                  <a:srgbClr val="1A202C"/>
+                </a:solidFill>
+                <a:latin typeface="NanumGothic"/>
+                <a:ea typeface="NanumGothic"/>
+              </a:rPr>
+              <a:t>바늘 끝은 척추체 전외측에 — psoas·추간공 진입 금지.</a:t>
+            </a:r>
+          </a:p>
+          <a:p>
+            <a:pPr algn="l">
+              <a:lnSpc>
+                <a:spcPct val="108000"/>
+              </a:lnSpc>
+              <a:spcAft>
+                <a:spcPts val="700"/>
+              </a:spcAft>
+            </a:pPr>
+            <a:r>
+              <a:rPr sz="979" b="1" i="0">
+                <a:solidFill>
+                  <a:srgbClr val="2C898A"/>
+                </a:solidFill>
+                <a:latin typeface="NanumGothic"/>
+                <a:ea typeface="NanumGothic"/>
+              </a:rPr>
+              <a:t>●  </a:t>
+            </a:r>
+            <a:r>
+              <a:rPr sz="1400" b="1" i="0">
+                <a:solidFill>
+                  <a:srgbClr val="1A202C"/>
+                </a:solidFill>
+                <a:latin typeface="NanumGothic"/>
+                <a:ea typeface="NanumGothic"/>
+              </a:rPr>
+              <a:t>레벨은 L2 하1/3~L3 상1/3, L4로 내려가지 말 것(생식대퇴신경통 급증).</a:t>
+            </a:r>
+          </a:p>
+          <a:p>
+            <a:pPr algn="l">
+              <a:lnSpc>
+                <a:spcPct val="108000"/>
+              </a:lnSpc>
+              <a:spcAft>
+                <a:spcPts val="700"/>
+              </a:spcAft>
+            </a:pPr>
+            <a:r>
+              <a:rPr sz="979" b="1" i="0">
+                <a:solidFill>
+                  <a:srgbClr val="2C898A"/>
+                </a:solidFill>
+                <a:latin typeface="NanumGothic"/>
+                <a:ea typeface="NanumGothic"/>
+              </a:rPr>
+              <a:t>●  </a:t>
+            </a:r>
+            <a:r>
+              <a:rPr sz="1400" b="0" i="0">
+                <a:solidFill>
+                  <a:srgbClr val="1A202C"/>
+                </a:solidFill>
+                <a:latin typeface="NanumGothic"/>
+                <a:ea typeface="NanumGothic"/>
+              </a:rPr>
+              <a:t>흡인 후 분할·점진 주입(혈관내·경막외 조기 발견) · 소량 시험주입.</a:t>
+            </a:r>
+          </a:p>
+          <a:p>
+            <a:pPr algn="l">
+              <a:lnSpc>
+                <a:spcPct val="108000"/>
+              </a:lnSpc>
+              <a:spcAft>
+                <a:spcPts val="700"/>
+              </a:spcAft>
+            </a:pPr>
+            <a:r>
+              <a:rPr sz="979" b="1" i="0">
+                <a:solidFill>
+                  <a:srgbClr val="2C898A"/>
+                </a:solidFill>
+                <a:latin typeface="NanumGothic"/>
+                <a:ea typeface="NanumGothic"/>
+              </a:rPr>
+              <a:t>●  </a:t>
+            </a:r>
+            <a:r>
+              <a:rPr sz="1400" b="0" i="0">
+                <a:solidFill>
+                  <a:srgbClr val="1A202C"/>
+                </a:solidFill>
+                <a:latin typeface="NanumGothic"/>
+                <a:ea typeface="NanumGothic"/>
+              </a:rPr>
+              <a:t>항응고·항혈소판제 중단(심부·후복막 차단 — 출혈 위험) · 무균술.</a:t>
+            </a:r>
+          </a:p>
+          <a:p>
+            <a:pPr algn="l">
+              <a:lnSpc>
+                <a:spcPct val="108000"/>
+              </a:lnSpc>
+              <a:spcAft>
+                <a:spcPts val="700"/>
+              </a:spcAft>
+            </a:pPr>
+            <a:r>
+              <a:rPr sz="1400" b="1" i="0">
+                <a:solidFill>
+                  <a:srgbClr val="5A6B7B"/>
+                </a:solidFill>
+                <a:latin typeface="NanumGothic"/>
+                <a:ea typeface="NanumGothic"/>
+              </a:rPr>
+              <a:t/>
+            </a:r>
+            <a:r>
+              <a:rPr sz="1400" b="1" i="0">
+                <a:solidFill>
+                  <a:srgbClr val="1F6E70"/>
+                </a:solidFill>
+                <a:latin typeface="NanumGothic"/>
+                <a:ea typeface="NanumGothic"/>
+              </a:rPr>
+              <a:t>성공지표 온도 ≥2°C↑ 확인 · 시술 후 혈압·하지 근력/감각 모니터.</a:t>
+            </a:r>
+          </a:p>
+        </p:txBody>
+      </p:sp>
+      <p:sp>
+        <p:nvSpPr>
+          <p:cNvPr id="9" name="TextBox 8"/>
+          <p:cNvSpPr txBox="1"/>
+          <p:nvPr/>
+        </p:nvSpPr>
+        <p:spPr>
+          <a:xfrm>
+            <a:off x="731520" y="6455664"/>
+            <a:ext cx="9875520" cy="292608"/>
+          </a:xfrm>
+          <a:prstGeom prst="rect">
+            <a:avLst/>
+          </a:prstGeom>
+          <a:noFill/>
+        </p:spPr>
+        <p:txBody>
+          <a:bodyPr wrap="square" anchor="ctr" lIns="0" rIns="0" tIns="0" bIns="0">
+            <a:spAutoFit/>
+          </a:bodyPr>
+          <a:lstStyle/>
+          <a:p>
+            <a:pPr algn="l">
+              <a:lnSpc>
+                <a:spcPct val="108000"/>
+              </a:lnSpc>
+              <a:spcAft>
+                <a:spcPts val="400"/>
+              </a:spcAft>
+            </a:pPr>
+            <a:r>
+              <a:rPr sz="900" b="0" i="0">
+                <a:solidFill>
+                  <a:srgbClr val="5A6B7B"/>
+                </a:solidFill>
+                <a:latin typeface="NanumGothic"/>
+                <a:ea typeface="NanumGothic"/>
+              </a:rPr>
+              <a:t>근거: StatPearls NBK431107 · NBK557637 · Feigl 1998(PMID 9425975)</a:t>
+            </a:r>
+          </a:p>
+        </p:txBody>
+      </p:sp>
+      <p:sp>
+        <p:nvSpPr>
+          <p:cNvPr id="10" name="TextBox 9"/>
+          <p:cNvSpPr txBox="1"/>
+          <p:nvPr/>
+        </p:nvSpPr>
+        <p:spPr>
+          <a:xfrm>
+            <a:off x="11064240" y="6455664"/>
+            <a:ext cx="822960" cy="292608"/>
+          </a:xfrm>
+          <a:prstGeom prst="rect">
+            <a:avLst/>
+          </a:prstGeom>
+          <a:noFill/>
+        </p:spPr>
+        <p:txBody>
+          <a:bodyPr wrap="square" anchor="ctr" lIns="0" rIns="0" tIns="0" bIns="0">
+            <a:spAutoFit/>
+          </a:bodyPr>
+          <a:lstStyle/>
+          <a:p>
+            <a:pPr algn="r">
+              <a:lnSpc>
+                <a:spcPct val="108000"/>
+              </a:lnSpc>
+              <a:spcAft>
+                <a:spcPts val="400"/>
+              </a:spcAft>
+            </a:pPr>
+            <a:r>
+              <a:rPr sz="1000" b="1" i="0">
+                <a:solidFill>
+                  <a:srgbClr val="5A6B7B"/>
+                </a:solidFill>
+                <a:latin typeface="NanumGothic"/>
+                <a:ea typeface="NanumGothic"/>
+              </a:rPr>
+              <a:t>6</a:t>
+            </a:r>
+          </a:p>
+        </p:txBody>
+      </p:sp>
+    </p:spTree>
+  </p:cSld>
+  <p:clrMapOvr>
+    <a:masterClrMapping/>
+  </p:clrMapOvr>
+</p:sld>
+</file>
+
+<file path=ppt/slides/slide7.xml><?xml version="1.0" encoding="utf-8"?>
+<p:sld xmlns:a="http://schemas.openxmlformats.org/drawingml/2006/main" xmlns:p="http://schemas.openxmlformats.org/presentationml/2006/main" xmlns:r="http://schemas.openxmlformats.org/officeDocument/2006/relationships">
+  <p:cSld>
+    <p:spTree>
+      <p:nvGrpSpPr>
+        <p:cNvPr id="1" name=""/>
+        <p:cNvGrpSpPr/>
+        <p:nvPr/>
+      </p:nvGrpSpPr>
+      <p:grpSpPr/>
+      <p:sp>
+        <p:nvSpPr>
+          <p:cNvPr id="2" name="Rectangle 1"/>
+          <p:cNvSpPr/>
+          <p:nvPr/>
+        </p:nvSpPr>
+        <p:spPr>
+          <a:xfrm>
+            <a:off x="502920" y="310896"/>
+            <a:ext cx="109728" cy="457200"/>
+          </a:xfrm>
+          <a:prstGeom prst="rect">
+            <a:avLst/>
+          </a:prstGeom>
+          <a:solidFill>
+            <a:srgbClr val="2C898A"/>
+          </a:solidFill>
+          <a:ln>
+            <a:noFill/>
+          </a:ln>
+          <a:effectLst/>
+        </p:spPr>
+        <p:style>
+          <a:lnRef idx="1">
+            <a:schemeClr val="accent1"/>
+          </a:lnRef>
+          <a:fillRef idx="3">
+            <a:schemeClr val="accent1"/>
+          </a:fillRef>
+          <a:effectRef idx="2">
+            <a:schemeClr val="accent1"/>
+          </a:effectRef>
+          <a:fontRef idx="minor">
+            <a:schemeClr val="lt1"/>
+          </a:fontRef>
+        </p:style>
+        <p:txBody>
+          <a:bodyPr rtlCol="0" anchor="ctr"/>
+          <a:lstStyle/>
+          <a:p>
+            <a:pPr algn="ctr"/>
+          </a:p>
+        </p:txBody>
+      </p:sp>
+      <p:sp>
+        <p:nvSpPr>
+          <p:cNvPr id="3" name="TextBox 2"/>
+          <p:cNvSpPr txBox="1"/>
+          <p:nvPr/>
+        </p:nvSpPr>
+        <p:spPr>
+          <a:xfrm>
+            <a:off x="731520" y="237744"/>
+            <a:ext cx="9509760" cy="685800"/>
+          </a:xfrm>
+          <a:prstGeom prst="rect">
+            <a:avLst/>
+          </a:prstGeom>
+          <a:noFill/>
+        </p:spPr>
+        <p:txBody>
+          <a:bodyPr wrap="square" anchor="ctr" lIns="0" rIns="0" tIns="0" bIns="0">
+            <a:spAutoFit/>
+          </a:bodyPr>
+          <a:lstStyle/>
+          <a:p>
+            <a:pPr algn="l">
+              <a:lnSpc>
+                <a:spcPct val="108000"/>
+              </a:lnSpc>
+              <a:spcAft>
+                <a:spcPts val="400"/>
+              </a:spcAft>
+            </a:pPr>
+            <a:r>
+              <a:rPr sz="2400" b="1" i="0">
+                <a:solidFill>
+                  <a:srgbClr val="1B355E"/>
+                </a:solidFill>
+                <a:latin typeface="NanumGothic"/>
+                <a:ea typeface="NanumGothic"/>
+              </a:rPr>
+              <a:t>합병증 &amp; 회피법</a:t>
+            </a:r>
+          </a:p>
+        </p:txBody>
+      </p:sp>
+      <p:sp>
+        <p:nvSpPr>
+          <p:cNvPr id="4" name="TextBox 3"/>
+          <p:cNvSpPr txBox="1"/>
+          <p:nvPr/>
+        </p:nvSpPr>
+        <p:spPr>
+          <a:xfrm>
+            <a:off x="749808" y="109728"/>
+            <a:ext cx="7315200" cy="219456"/>
+          </a:xfrm>
+          <a:prstGeom prst="rect">
+            <a:avLst/>
+          </a:prstGeom>
+          <a:noFill/>
+        </p:spPr>
+        <p:txBody>
+          <a:bodyPr wrap="square" anchor="t" lIns="0" rIns="0" tIns="0" bIns="0">
+            <a:spAutoFit/>
+          </a:bodyPr>
+          <a:lstStyle/>
+          <a:p>
+            <a:pPr algn="l">
+              <a:lnSpc>
+                <a:spcPct val="108000"/>
+              </a:lnSpc>
+              <a:spcAft>
+                <a:spcPts val="400"/>
+              </a:spcAft>
+            </a:pPr>
+            <a:r>
+              <a:rPr sz="1100" b="1" i="0">
+                <a:solidFill>
+                  <a:srgbClr val="1F6E70"/>
+                </a:solidFill>
+                <a:latin typeface="NanumGothic"/>
+                <a:ea typeface="NanumGothic"/>
+              </a:rPr>
+              <a:t>안전성</a:t>
+            </a:r>
+          </a:p>
+        </p:txBody>
+      </p:sp>
+      <p:sp>
+        <p:nvSpPr>
+          <p:cNvPr id="5" name="Rectangle 4"/>
+          <p:cNvSpPr/>
+          <p:nvPr/>
+        </p:nvSpPr>
+        <p:spPr>
+          <a:xfrm>
+            <a:off x="731520" y="969264"/>
+            <a:ext cx="10881360" cy="17780"/>
+          </a:xfrm>
+          <a:prstGeom prst="rect">
+            <a:avLst/>
+          </a:prstGeom>
+          <a:solidFill>
+            <a:srgbClr val="D5DEE7"/>
+          </a:solidFill>
+          <a:ln>
+            <a:noFill/>
+          </a:ln>
+          <a:effectLst/>
+        </p:spPr>
+        <p:style>
+          <a:lnRef idx="1">
+            <a:schemeClr val="accent1"/>
+          </a:lnRef>
+          <a:fillRef idx="3">
+            <a:schemeClr val="accent1"/>
+          </a:fillRef>
+          <a:effectRef idx="2">
+            <a:schemeClr val="accent1"/>
+          </a:effectRef>
+          <a:fontRef idx="minor">
+            <a:schemeClr val="lt1"/>
+          </a:fontRef>
+        </p:style>
+        <p:txBody>
+          <a:bodyPr rtlCol="0" anchor="ctr"/>
+          <a:lstStyle/>
+          <a:p>
+            <a:pPr algn="ctr"/>
+          </a:p>
+        </p:txBody>
+      </p:sp>
+      <p:sp>
+        <p:nvSpPr>
+          <p:cNvPr id="6" name="Rounded Rectangle 5"/>
+          <p:cNvSpPr/>
+          <p:nvPr/>
+        </p:nvSpPr>
+        <p:spPr>
+          <a:xfrm>
+            <a:off x="10756087" y="365760"/>
+            <a:ext cx="932688" cy="347472"/>
+          </a:xfrm>
+          <a:prstGeom prst="roundRect">
+            <a:avLst>
+              <a:gd name="adj" fmla="val 8000"/>
+            </a:avLst>
+          </a:prstGeom>
+          <a:solidFill>
+            <a:srgbClr val="B03A2E"/>
+          </a:solidFill>
+          <a:ln>
+            <a:noFill/>
+          </a:ln>
+          <a:effectLst/>
+        </p:spPr>
+        <p:style>
+          <a:lnRef idx="1">
+            <a:schemeClr val="accent1"/>
+          </a:lnRef>
+          <a:fillRef idx="3">
+            <a:schemeClr val="accent1"/>
+          </a:fillRef>
+          <a:effectRef idx="2">
+            <a:schemeClr val="accent1"/>
+          </a:effectRef>
+          <a:fontRef idx="minor">
+            <a:schemeClr val="lt1"/>
+          </a:fontRef>
+        </p:style>
+        <p:txBody>
+          <a:bodyPr rtlCol="0" anchor="ctr"/>
+          <a:lstStyle/>
+          <a:p>
+            <a:pPr algn="ctr"/>
+          </a:p>
+        </p:txBody>
+      </p:sp>
+      <p:sp>
+        <p:nvSpPr>
+          <p:cNvPr id="7" name="TextBox 6"/>
+          <p:cNvSpPr txBox="1"/>
+          <p:nvPr/>
+        </p:nvSpPr>
+        <p:spPr>
+          <a:xfrm>
+            <a:off x="10756087" y="365760"/>
+            <a:ext cx="932688" cy="347472"/>
+          </a:xfrm>
+          <a:prstGeom prst="rect">
+            <a:avLst/>
+          </a:prstGeom>
+          <a:noFill/>
+        </p:spPr>
+        <p:txBody>
+          <a:bodyPr wrap="square" anchor="ctr" lIns="0" rIns="0" tIns="0" bIns="0">
+            <a:spAutoFit/>
+          </a:bodyPr>
+          <a:lstStyle/>
+          <a:p>
+            <a:pPr algn="ctr">
+              <a:lnSpc>
+                <a:spcPct val="108000"/>
+              </a:lnSpc>
+              <a:spcAft>
+                <a:spcPts val="400"/>
+              </a:spcAft>
+            </a:pPr>
+            <a:r>
+              <a:rPr sz="1150" b="1" i="0">
+                <a:solidFill>
+                  <a:srgbClr val="FFFFFF"/>
+                </a:solidFill>
+                <a:latin typeface="NanumGothic"/>
+                <a:ea typeface="NanumGothic"/>
+              </a:rPr>
+              <a:t>합병증·회피</a:t>
+            </a:r>
+          </a:p>
+        </p:txBody>
+      </p:sp>
+      <p:graphicFrame>
+        <p:nvGraphicFramePr>
+          <p:cNvPr id="8" name="Table 7"/>
+          <p:cNvGraphicFramePr>
+            <a:graphicFrameLocks noGrp="1"/>
+          </p:cNvGraphicFramePr>
+          <p:nvPr/>
+        </p:nvGraphicFramePr>
+        <p:xfrm>
+          <a:off x="731520" y="1371600"/>
+          <a:ext cx="10835640" cy="3858768"/>
+        </p:xfrm>
+        <a:graphic>
+          <a:graphicData uri="http://schemas.openxmlformats.org/drawingml/2006/table">
+            <a:tbl>
+              <a:tblPr>
+                <a:tableStyleId>{5C22544A-7EE6-4342-B048-85BDC9FD1C3A}</a:tableStyleId>
+              </a:tblPr>
+              <a:tblGrid>
+                <a:gridCol w="2743200"/>
+                <a:gridCol w="4160520"/>
+                <a:gridCol w="3931920"/>
+              </a:tblGrid>
+              <a:tr h="457200">
+                <a:tc>
+                  <a:txBody>
+                    <a:bodyPr wrap="square"/>
+                    <a:lstStyle/>
+                    <a:p>
+                      <a:pPr algn="l"/>
+                      <a:r>
+                        <a:rPr sz="1250" b="1" i="0">
+                          <a:solidFill>
+                            <a:srgbClr val="FFFFFF"/>
+                          </a:solidFill>
+                          <a:latin typeface="NanumGothic"/>
+                          <a:ea typeface="NanumGothic"/>
+                        </a:rPr>
+                        <a:t>합병증</a:t>
+                      </a:r>
+                    </a:p>
+                  </a:txBody>
+                  <a:tcPr marL="73152" marR="54864" marT="18288" marB="18288" anchor="ctr">
+                    <a:solidFill>
+                      <a:srgbClr val="1B355E"/>
+                    </a:solidFill>
+                  </a:tcPr>
+                </a:tc>
+                <a:tc>
+                  <a:txBody>
+                    <a:bodyPr wrap="square"/>
+                    <a:lstStyle/>
+                    <a:p>
+                      <a:pPr algn="ctr"/>
+                      <a:r>
+                        <a:rPr sz="1250" b="1" i="0">
+                          <a:solidFill>
+                            <a:srgbClr val="FFFFFF"/>
+                          </a:solidFill>
+                          <a:latin typeface="NanumGothic"/>
+                          <a:ea typeface="NanumGothic"/>
+                        </a:rPr>
+                        <a:t>원인·기전</a:t>
+                      </a:r>
+                    </a:p>
+                  </a:txBody>
+                  <a:tcPr marL="73152" marR="54864" marT="18288" marB="18288" anchor="ctr">
+                    <a:solidFill>
+                      <a:srgbClr val="1B355E"/>
+                    </a:solidFill>
+                  </a:tcPr>
+                </a:tc>
+                <a:tc>
+                  <a:txBody>
+                    <a:bodyPr wrap="square"/>
+                    <a:lstStyle/>
+                    <a:p>
+                      <a:pPr algn="ctr"/>
+                      <a:r>
+                        <a:rPr sz="1250" b="1" i="0">
+                          <a:solidFill>
+                            <a:srgbClr val="FFFFFF"/>
+                          </a:solidFill>
+                          <a:latin typeface="NanumGothic"/>
+                          <a:ea typeface="NanumGothic"/>
+                        </a:rPr>
+                        <a:t>피하는 법</a:t>
+                      </a:r>
+                    </a:p>
+                  </a:txBody>
+                  <a:tcPr marL="73152" marR="54864" marT="18288" marB="18288" anchor="ctr">
+                    <a:solidFill>
+                      <a:srgbClr val="1B355E"/>
+                    </a:solidFill>
+                  </a:tcPr>
+                </a:tc>
+              </a:tr>
+              <a:tr h="566928">
+                <a:tc>
+                  <a:txBody>
+                    <a:bodyPr wrap="square"/>
+                    <a:lstStyle/>
+                    <a:p>
+                      <a:pPr algn="l"/>
+                      <a:r>
+                        <a:rPr sz="1150" b="0" i="0">
+                          <a:solidFill>
+                            <a:srgbClr val="1A202C"/>
+                          </a:solidFill>
+                          <a:latin typeface="NanumGothic"/>
+                          <a:ea typeface="NanumGothic"/>
+                        </a:rPr>
+                        <a:t>생식대퇴신경통 (5–10%)</a:t>
+                      </a:r>
+                    </a:p>
+                  </a:txBody>
+                  <a:tcPr marL="73152" marR="54864" marT="18288" marB="18288" anchor="ctr">
+                    <a:solidFill>
+                      <a:srgbClr val="FFFFFF"/>
+                    </a:solidFill>
+                  </a:tcPr>
+                </a:tc>
+                <a:tc>
+                  <a:txBody>
+                    <a:bodyPr wrap="square"/>
+                    <a:lstStyle/>
+                    <a:p>
+                      <a:pPr algn="ctr"/>
+                      <a:r>
+                        <a:rPr sz="1150" b="0" i="0">
+                          <a:solidFill>
+                            <a:srgbClr val="1A202C"/>
+                          </a:solidFill>
+                          <a:latin typeface="NanumGothic"/>
+                          <a:ea typeface="NanumGothic"/>
+                        </a:rPr>
+                        <a:t>psoas 역류·자극 (L2 0%·L4 40%)</a:t>
+                      </a:r>
+                    </a:p>
+                  </a:txBody>
+                  <a:tcPr marL="73152" marR="54864" marT="18288" marB="18288" anchor="ctr">
+                    <a:solidFill>
+                      <a:srgbClr val="FFFFFF"/>
+                    </a:solidFill>
+                  </a:tcPr>
+                </a:tc>
+                <a:tc>
+                  <a:txBody>
+                    <a:bodyPr wrap="square"/>
+                    <a:lstStyle/>
+                    <a:p>
+                      <a:pPr algn="ctr"/>
+                      <a:r>
+                        <a:rPr sz="1150" b="0" i="0">
+                          <a:solidFill>
+                            <a:srgbClr val="1A202C"/>
+                          </a:solidFill>
+                          <a:latin typeface="NanumGothic"/>
+                          <a:ea typeface="NanumGothic"/>
+                        </a:rPr>
+                        <a:t>L4 회피·psoas 주입금지·최소용량</a:t>
+                      </a:r>
+                    </a:p>
+                  </a:txBody>
+                  <a:tcPr marL="73152" marR="54864" marT="18288" marB="18288" anchor="ctr">
+                    <a:solidFill>
+                      <a:srgbClr val="FFFFFF"/>
+                    </a:solidFill>
+                  </a:tcPr>
+                </a:tc>
+              </a:tr>
+              <a:tr h="566928">
+                <a:tc>
+                  <a:txBody>
+                    <a:bodyPr wrap="square"/>
+                    <a:lstStyle/>
+                    <a:p>
+                      <a:pPr algn="l"/>
+                      <a:r>
+                        <a:rPr sz="1150" b="0" i="0">
+                          <a:solidFill>
+                            <a:srgbClr val="1A202C"/>
+                          </a:solidFill>
+                          <a:latin typeface="NanumGothic"/>
+                          <a:ea typeface="NanumGothic"/>
+                        </a:rPr>
+                        <a:t>혈관손상·혈관내주입</a:t>
+                      </a:r>
+                    </a:p>
+                  </a:txBody>
+                  <a:tcPr marL="73152" marR="54864" marT="18288" marB="18288" anchor="ctr">
+                    <a:solidFill>
+                      <a:srgbClr val="EEF2F6"/>
+                    </a:solidFill>
+                  </a:tcPr>
+                </a:tc>
+                <a:tc>
+                  <a:txBody>
+                    <a:bodyPr wrap="square"/>
+                    <a:lstStyle/>
+                    <a:p>
+                      <a:pPr algn="ctr"/>
+                      <a:r>
+                        <a:rPr sz="1150" b="0" i="0">
+                          <a:solidFill>
+                            <a:srgbClr val="1A202C"/>
+                          </a:solidFill>
+                          <a:latin typeface="NanumGothic"/>
+                          <a:ea typeface="NanumGothic"/>
+                        </a:rPr>
+                        <a:t>대동맥/IVC·요추혈관 인접</a:t>
+                      </a:r>
+                    </a:p>
+                  </a:txBody>
+                  <a:tcPr marL="73152" marR="54864" marT="18288" marB="18288" anchor="ctr">
+                    <a:solidFill>
+                      <a:srgbClr val="EEF2F6"/>
+                    </a:solidFill>
+                  </a:tcPr>
+                </a:tc>
+                <a:tc>
+                  <a:txBody>
+                    <a:bodyPr wrap="square"/>
+                    <a:lstStyle/>
+                    <a:p>
+                      <a:pPr algn="ctr"/>
+                      <a:r>
+                        <a:rPr sz="1150" b="0" i="0">
+                          <a:solidFill>
+                            <a:srgbClr val="1A202C"/>
+                          </a:solidFill>
+                          <a:latin typeface="NanumGothic"/>
+                          <a:ea typeface="NanumGothic"/>
+                        </a:rPr>
+                        <a:t>투시+흡인+조영제·항응고 중단</a:t>
+                      </a:r>
+                    </a:p>
+                  </a:txBody>
+                  <a:tcPr marL="73152" marR="54864" marT="18288" marB="18288" anchor="ctr">
+                    <a:solidFill>
+                      <a:srgbClr val="EEF2F6"/>
+                    </a:solidFill>
+                  </a:tcPr>
+                </a:tc>
+              </a:tr>
+              <a:tr h="566928">
+                <a:tc>
+                  <a:txBody>
+                    <a:bodyPr wrap="square"/>
+                    <a:lstStyle/>
+                    <a:p>
+                      <a:pPr algn="l"/>
+                      <a:r>
+                        <a:rPr sz="1150" b="0" i="0">
+                          <a:solidFill>
+                            <a:srgbClr val="1A202C"/>
+                          </a:solidFill>
+                          <a:latin typeface="NanumGothic"/>
+                          <a:ea typeface="NanumGothic"/>
+                        </a:rPr>
+                        <a:t>요관·신장 천공</a:t>
+                      </a:r>
+                    </a:p>
+                  </a:txBody>
+                  <a:tcPr marL="73152" marR="54864" marT="18288" marB="18288" anchor="ctr">
+                    <a:solidFill>
+                      <a:srgbClr val="FFFFFF"/>
+                    </a:solidFill>
+                  </a:tcPr>
+                </a:tc>
+                <a:tc>
+                  <a:txBody>
+                    <a:bodyPr wrap="square"/>
+                    <a:lstStyle/>
+                    <a:p>
+                      <a:pPr algn="ctr"/>
+                      <a:r>
+                        <a:rPr sz="1150" b="0" i="0">
+                          <a:solidFill>
+                            <a:srgbClr val="1A202C"/>
+                          </a:solidFill>
+                          <a:latin typeface="NanumGothic"/>
+                          <a:ea typeface="NanumGothic"/>
+                        </a:rPr>
+                        <a:t>후복막 장기 인접</a:t>
+                      </a:r>
+                    </a:p>
+                  </a:txBody>
+                  <a:tcPr marL="73152" marR="54864" marT="18288" marB="18288" anchor="ctr">
+                    <a:solidFill>
+                      <a:srgbClr val="FFFFFF"/>
+                    </a:solidFill>
+                  </a:tcPr>
+                </a:tc>
+                <a:tc>
+                  <a:txBody>
+                    <a:bodyPr wrap="square"/>
+                    <a:lstStyle/>
+                    <a:p>
+                      <a:pPr algn="ctr"/>
+                      <a:r>
+                        <a:rPr sz="1150" b="0" i="0">
+                          <a:solidFill>
+                            <a:srgbClr val="1A202C"/>
+                          </a:solidFill>
+                          <a:latin typeface="NanumGothic"/>
+                          <a:ea typeface="NanumGothic"/>
+                        </a:rPr>
+                        <a:t>조영제로 깊이·궤적 확인</a:t>
+                      </a:r>
+                    </a:p>
+                  </a:txBody>
+                  <a:tcPr marL="73152" marR="54864" marT="18288" marB="18288" anchor="ctr">
+                    <a:solidFill>
+                      <a:srgbClr val="FFFFFF"/>
+                    </a:solidFill>
+                  </a:tcPr>
+                </a:tc>
+              </a:tr>
+              <a:tr h="566928">
+                <a:tc>
+                  <a:txBody>
+                    <a:bodyPr wrap="square"/>
+                    <a:lstStyle/>
+                    <a:p>
+                      <a:pPr algn="l"/>
+                      <a:r>
+                        <a:rPr sz="1150" b="0" i="0">
+                          <a:solidFill>
+                            <a:srgbClr val="1A202C"/>
+                          </a:solidFill>
+                          <a:latin typeface="NanumGothic"/>
+                          <a:ea typeface="NanumGothic"/>
+                        </a:rPr>
+                        <a:t>체성신경·신경축 확산</a:t>
+                      </a:r>
+                    </a:p>
+                  </a:txBody>
+                  <a:tcPr marL="73152" marR="54864" marT="18288" marB="18288" anchor="ctr">
+                    <a:solidFill>
+                      <a:srgbClr val="EEF2F6"/>
+                    </a:solidFill>
+                  </a:tcPr>
+                </a:tc>
+                <a:tc>
+                  <a:txBody>
+                    <a:bodyPr wrap="square"/>
+                    <a:lstStyle/>
+                    <a:p>
+                      <a:pPr algn="ctr"/>
+                      <a:r>
+                        <a:rPr sz="1150" b="0" i="0">
+                          <a:solidFill>
+                            <a:srgbClr val="1A202C"/>
+                          </a:solidFill>
+                          <a:latin typeface="NanumGothic"/>
+                          <a:ea typeface="NanumGothic"/>
+                        </a:rPr>
+                        <a:t>바늘 후방→경막외 tracking</a:t>
+                      </a:r>
+                    </a:p>
+                  </a:txBody>
+                  <a:tcPr marL="73152" marR="54864" marT="18288" marB="18288" anchor="ctr">
+                    <a:solidFill>
+                      <a:srgbClr val="EEF2F6"/>
+                    </a:solidFill>
+                  </a:tcPr>
+                </a:tc>
+                <a:tc>
+                  <a:txBody>
+                    <a:bodyPr wrap="square"/>
+                    <a:lstStyle/>
+                    <a:p>
+                      <a:pPr algn="ctr"/>
+                      <a:r>
+                        <a:rPr sz="1150" b="0" i="0">
+                          <a:solidFill>
+                            <a:srgbClr val="1A202C"/>
+                          </a:solidFill>
+                          <a:latin typeface="NanumGothic"/>
+                          <a:ea typeface="NanumGothic"/>
+                        </a:rPr>
+                        <a:t>바늘 전외측 유지</a:t>
+                      </a:r>
+                    </a:p>
+                  </a:txBody>
+                  <a:tcPr marL="73152" marR="54864" marT="18288" marB="18288" anchor="ctr">
+                    <a:solidFill>
+                      <a:srgbClr val="EEF2F6"/>
+                    </a:solidFill>
+                  </a:tcPr>
+                </a:tc>
+              </a:tr>
+              <a:tr h="566928">
+                <a:tc>
+                  <a:txBody>
+                    <a:bodyPr wrap="square"/>
+                    <a:lstStyle/>
+                    <a:p>
+                      <a:pPr algn="l"/>
+                      <a:r>
+                        <a:rPr sz="1150" b="0" i="0">
+                          <a:solidFill>
+                            <a:srgbClr val="1A202C"/>
+                          </a:solidFill>
+                          <a:latin typeface="NanumGothic"/>
+                          <a:ea typeface="NanumGothic"/>
+                        </a:rPr>
+                        <a:t>기립성 저혈압</a:t>
+                      </a:r>
+                    </a:p>
+                  </a:txBody>
+                  <a:tcPr marL="73152" marR="54864" marT="18288" marB="18288" anchor="ctr">
+                    <a:solidFill>
+                      <a:srgbClr val="FFFFFF"/>
+                    </a:solidFill>
+                  </a:tcPr>
+                </a:tc>
+                <a:tc>
+                  <a:txBody>
+                    <a:bodyPr wrap="square"/>
+                    <a:lstStyle/>
+                    <a:p>
+                      <a:pPr algn="ctr"/>
+                      <a:r>
+                        <a:rPr sz="1150" b="0" i="0">
+                          <a:solidFill>
+                            <a:srgbClr val="1A202C"/>
+                          </a:solidFill>
+                          <a:latin typeface="NanumGothic"/>
+                          <a:ea typeface="NanumGothic"/>
+                        </a:rPr>
+                        <a:t>교감차단 → 혈관확장</a:t>
+                      </a:r>
+                    </a:p>
+                  </a:txBody>
+                  <a:tcPr marL="73152" marR="54864" marT="18288" marB="18288" anchor="ctr">
+                    <a:solidFill>
+                      <a:srgbClr val="FFFFFF"/>
+                    </a:solidFill>
+                  </a:tcPr>
+                </a:tc>
+                <a:tc>
+                  <a:txBody>
+                    <a:bodyPr wrap="square"/>
+                    <a:lstStyle/>
+                    <a:p>
+                      <a:pPr algn="ctr"/>
+                      <a:r>
+                        <a:rPr sz="1150" b="0" i="0">
+                          <a:solidFill>
+                            <a:srgbClr val="1A202C"/>
+                          </a:solidFill>
+                          <a:latin typeface="NanumGothic"/>
+                          <a:ea typeface="NanumGothic"/>
+                        </a:rPr>
+                        <a:t>수액·서서히 기립·양측 신중</a:t>
+                      </a:r>
+                    </a:p>
+                  </a:txBody>
+                  <a:tcPr marL="73152" marR="54864" marT="18288" marB="18288" anchor="ctr">
+                    <a:solidFill>
+                      <a:srgbClr val="FFFFFF"/>
+                    </a:solidFill>
+                  </a:tcPr>
+                </a:tc>
+              </a:tr>
+              <a:tr h="566928">
+                <a:tc>
+                  <a:txBody>
+                    <a:bodyPr wrap="square"/>
+                    <a:lstStyle/>
+                    <a:p>
+                      <a:pPr algn="l"/>
+                      <a:r>
+                        <a:rPr sz="1150" b="0" i="0">
+                          <a:solidFill>
+                            <a:srgbClr val="1A202C"/>
+                          </a:solidFill>
+                          <a:latin typeface="NanumGothic"/>
+                          <a:ea typeface="NanumGothic"/>
+                        </a:rPr>
+                        <a:t>신경염·사정장애</a:t>
+                      </a:r>
+                    </a:p>
+                  </a:txBody>
+                  <a:tcPr marL="73152" marR="54864" marT="18288" marB="18288" anchor="ctr">
+                    <a:solidFill>
+                      <a:srgbClr val="EEF2F6"/>
+                    </a:solidFill>
+                  </a:tcPr>
+                </a:tc>
+                <a:tc>
+                  <a:txBody>
+                    <a:bodyPr wrap="square"/>
+                    <a:lstStyle/>
+                    <a:p>
+                      <a:pPr algn="ctr"/>
+                      <a:r>
+                        <a:rPr sz="1150" b="0" i="0">
+                          <a:solidFill>
+                            <a:srgbClr val="1A202C"/>
+                          </a:solidFill>
+                          <a:latin typeface="NanumGothic"/>
+                          <a:ea typeface="NanumGothic"/>
+                        </a:rPr>
+                        <a:t>알코올/phenol·양측 L1–L2</a:t>
+                      </a:r>
+                    </a:p>
+                  </a:txBody>
+                  <a:tcPr marL="73152" marR="54864" marT="18288" marB="18288" anchor="ctr">
+                    <a:solidFill>
+                      <a:srgbClr val="EEF2F6"/>
+                    </a:solidFill>
+                  </a:tcPr>
+                </a:tc>
+                <a:tc>
+                  <a:txBody>
+                    <a:bodyPr wrap="square"/>
+                    <a:lstStyle/>
+                    <a:p>
+                      <a:pPr algn="ctr"/>
+                      <a:r>
+                        <a:rPr sz="1150" b="0" i="0">
+                          <a:solidFill>
+                            <a:srgbClr val="1A202C"/>
+                          </a:solidFill>
+                          <a:latin typeface="NanumGothic"/>
+                          <a:ea typeface="NanumGothic"/>
+                        </a:rPr>
+                        <a:t>진단차단 양성 시만·L1–L2 회피</a:t>
+                      </a:r>
+                    </a:p>
+                  </a:txBody>
+                  <a:tcPr marL="73152" marR="54864" marT="18288" marB="18288" anchor="ctr">
+                    <a:solidFill>
+                      <a:srgbClr val="EEF2F6"/>
+                    </a:solidFill>
+                  </a:tcPr>
+                </a:tc>
+              </a:tr>
+            </a:tbl>
+          </a:graphicData>
+        </a:graphic>
+      </p:graphicFrame>
+      <p:sp>
+        <p:nvSpPr>
+          <p:cNvPr id="9" name="TextBox 8"/>
+          <p:cNvSpPr txBox="1"/>
+          <p:nvPr/>
+        </p:nvSpPr>
+        <p:spPr>
+          <a:xfrm>
+            <a:off x="731520" y="5989320"/>
+            <a:ext cx="10789920" cy="365760"/>
+          </a:xfrm>
+          <a:prstGeom prst="rect">
+            <a:avLst/>
+          </a:prstGeom>
+          <a:noFill/>
+        </p:spPr>
+        <p:txBody>
+          <a:bodyPr wrap="square" anchor="t" lIns="0" rIns="0" tIns="0" bIns="0">
+            <a:spAutoFit/>
+          </a:bodyPr>
+          <a:lstStyle/>
+          <a:p>
+            <a:pPr algn="l">
+              <a:lnSpc>
+                <a:spcPct val="108000"/>
+              </a:lnSpc>
+              <a:spcAft>
+                <a:spcPts val="400"/>
+              </a:spcAft>
+            </a:pPr>
+            <a:r>
+              <a:rPr sz="1150" b="1" i="0">
+                <a:solidFill>
+                  <a:srgbClr val="1F6E70"/>
+                </a:solidFill>
+                <a:latin typeface="NanumGothic"/>
+                <a:ea typeface="NanumGothic"/>
+              </a:rPr>
+              <a:t>핵심: 투시+조영제로 확산 확인 · 바늘 전외측 유지 · L2~L3 표적 · 신경파괴는 진단차단 양성 시.</a:t>
+            </a:r>
+          </a:p>
+        </p:txBody>
+      </p:sp>
+      <p:sp>
+        <p:nvSpPr>
+          <p:cNvPr id="10" name="TextBox 9"/>
+          <p:cNvSpPr txBox="1"/>
+          <p:nvPr/>
+        </p:nvSpPr>
+        <p:spPr>
+          <a:xfrm>
+            <a:off x="731520" y="6455664"/>
+            <a:ext cx="9875520" cy="292608"/>
+          </a:xfrm>
+          <a:prstGeom prst="rect">
+            <a:avLst/>
+          </a:prstGeom>
+          <a:noFill/>
+        </p:spPr>
+        <p:txBody>
+          <a:bodyPr wrap="square" anchor="ctr" lIns="0" rIns="0" tIns="0" bIns="0">
+            <a:spAutoFit/>
+          </a:bodyPr>
+          <a:lstStyle/>
+          <a:p>
+            <a:pPr algn="l">
+              <a:lnSpc>
+                <a:spcPct val="108000"/>
+              </a:lnSpc>
+              <a:spcAft>
+                <a:spcPts val="400"/>
+              </a:spcAft>
+            </a:pPr>
+            <a:r>
+              <a:rPr sz="900" b="0" i="0">
+                <a:solidFill>
+                  <a:srgbClr val="5A6B7B"/>
+                </a:solidFill>
+                <a:latin typeface="NanumGothic"/>
+                <a:ea typeface="NanumGothic"/>
+              </a:rPr>
+              <a:t>근거: StatPearls NBK431107·NBK557637 · Feigl 1998(PMID 9425975)</a:t>
+            </a:r>
+          </a:p>
+        </p:txBody>
+      </p:sp>
+      <p:sp>
+        <p:nvSpPr>
+          <p:cNvPr id="11" name="TextBox 10"/>
+          <p:cNvSpPr txBox="1"/>
+          <p:nvPr/>
+        </p:nvSpPr>
+        <p:spPr>
+          <a:xfrm>
+            <a:off x="11064240" y="6455664"/>
+            <a:ext cx="822960" cy="292608"/>
+          </a:xfrm>
+          <a:prstGeom prst="rect">
+            <a:avLst/>
+          </a:prstGeom>
+          <a:noFill/>
+        </p:spPr>
+        <p:txBody>
+          <a:bodyPr wrap="square" anchor="ctr" lIns="0" rIns="0" tIns="0" bIns="0">
+            <a:spAutoFit/>
+          </a:bodyPr>
+          <a:lstStyle/>
+          <a:p>
+            <a:pPr algn="r">
+              <a:lnSpc>
+                <a:spcPct val="108000"/>
+              </a:lnSpc>
+              <a:spcAft>
+                <a:spcPts val="400"/>
+              </a:spcAft>
+            </a:pPr>
+            <a:r>
+              <a:rPr sz="1000" b="1" i="0">
+                <a:solidFill>
+                  <a:srgbClr val="5A6B7B"/>
+                </a:solidFill>
+                <a:latin typeface="NanumGothic"/>
+                <a:ea typeface="NanumGothic"/>
+              </a:rPr>
+              <a:t>7</a:t>
+            </a:r>
+          </a:p>
+        </p:txBody>
+      </p:sp>
+    </p:spTree>
+  </p:cSld>
+  <p:clrMapOvr>
+    <a:masterClrMapping/>
+  </p:clrMapOvr>
+</p:sld>
+</file>
+
+<file path=ppt/slides/slide8.xml><?xml version="1.0" encoding="utf-8"?>
+<p:sld xmlns:a="http://schemas.openxmlformats.org/drawingml/2006/main" xmlns:p="http://schemas.openxmlformats.org/presentationml/2006/main" xmlns:r="http://schemas.openxmlformats.org/officeDocument/2006/relationships">
+  <p:cSld>
+    <p:spTree>
+      <p:nvGrpSpPr>
+        <p:cNvPr id="1" name=""/>
+        <p:cNvGrpSpPr/>
+        <p:nvPr/>
+      </p:nvGrpSpPr>
+      <p:grpSpPr/>
+      <p:sp>
+        <p:nvSpPr>
+          <p:cNvPr id="2" name="Rectangle 1"/>
+          <p:cNvSpPr/>
+          <p:nvPr/>
+        </p:nvSpPr>
+        <p:spPr>
+          <a:xfrm>
             <a:off x="502920" y="310896"/>
             <a:ext cx="109728" cy="457200"/>
           </a:xfrm>
@@ -9547,1918 +13577,6 @@
                 <a:latin typeface="NanumGothic"/>
                 <a:ea typeface="NanumGothic"/>
               </a:rPr>
-              <a:t>5</a:t>
-            </a:r>
-          </a:p>
-        </p:txBody>
-      </p:sp>
-    </p:spTree>
-  </p:cSld>
-  <p:clrMapOvr>
-    <a:masterClrMapping/>
-  </p:clrMapOvr>
-</p:sld>
-</file>
-
-<file path=ppt/slides/slide6.xml><?xml version="1.0" encoding="utf-8"?>
-<p:sld xmlns:a="http://schemas.openxmlformats.org/drawingml/2006/main" xmlns:p="http://schemas.openxmlformats.org/presentationml/2006/main" xmlns:r="http://schemas.openxmlformats.org/officeDocument/2006/relationships">
-  <p:cSld>
-    <p:spTree>
-      <p:nvGrpSpPr>
-        <p:cNvPr id="1" name=""/>
-        <p:cNvGrpSpPr/>
-        <p:nvPr/>
-      </p:nvGrpSpPr>
-      <p:grpSpPr/>
-      <p:sp>
-        <p:nvSpPr>
-          <p:cNvPr id="2" name="Rectangle 1"/>
-          <p:cNvSpPr/>
-          <p:nvPr/>
-        </p:nvSpPr>
-        <p:spPr>
-          <a:xfrm>
-            <a:off x="502920" y="310896"/>
-            <a:ext cx="109728" cy="457200"/>
-          </a:xfrm>
-          <a:prstGeom prst="rect">
-            <a:avLst/>
-          </a:prstGeom>
-          <a:solidFill>
-            <a:srgbClr val="2C898A"/>
-          </a:solidFill>
-          <a:ln>
-            <a:noFill/>
-          </a:ln>
-          <a:effectLst/>
-        </p:spPr>
-        <p:style>
-          <a:lnRef idx="1">
-            <a:schemeClr val="accent1"/>
-          </a:lnRef>
-          <a:fillRef idx="3">
-            <a:schemeClr val="accent1"/>
-          </a:fillRef>
-          <a:effectRef idx="2">
-            <a:schemeClr val="accent1"/>
-          </a:effectRef>
-          <a:fontRef idx="minor">
-            <a:schemeClr val="lt1"/>
-          </a:fontRef>
-        </p:style>
-        <p:txBody>
-          <a:bodyPr rtlCol="0" anchor="ctr"/>
-          <a:lstStyle/>
-          <a:p>
-            <a:pPr algn="ctr"/>
-          </a:p>
-        </p:txBody>
-      </p:sp>
-      <p:sp>
-        <p:nvSpPr>
-          <p:cNvPr id="3" name="TextBox 2"/>
-          <p:cNvSpPr txBox="1"/>
-          <p:nvPr/>
-        </p:nvSpPr>
-        <p:spPr>
-          <a:xfrm>
-            <a:off x="731520" y="237744"/>
-            <a:ext cx="9509760" cy="685800"/>
-          </a:xfrm>
-          <a:prstGeom prst="rect">
-            <a:avLst/>
-          </a:prstGeom>
-          <a:noFill/>
-        </p:spPr>
-        <p:txBody>
-          <a:bodyPr wrap="square" anchor="ctr" lIns="0" rIns="0" tIns="0" bIns="0">
-            <a:spAutoFit/>
-          </a:bodyPr>
-          <a:lstStyle/>
-          <a:p>
-            <a:pPr algn="l">
-              <a:lnSpc>
-                <a:spcPct val="108000"/>
-              </a:lnSpc>
-              <a:spcAft>
-                <a:spcPts val="400"/>
-              </a:spcAft>
-            </a:pPr>
-            <a:r>
-              <a:rPr sz="2400" b="1" i="0">
-                <a:solidFill>
-                  <a:srgbClr val="1B355E"/>
-                </a:solidFill>
-                <a:latin typeface="NanumGothic"/>
-                <a:ea typeface="NanumGothic"/>
-              </a:rPr>
-              <a:t>적응증별 환자 증상·호소 ① — 통증증후군·허혈</a:t>
-            </a:r>
-          </a:p>
-        </p:txBody>
-      </p:sp>
-      <p:sp>
-        <p:nvSpPr>
-          <p:cNvPr id="4" name="TextBox 3"/>
-          <p:cNvSpPr txBox="1"/>
-          <p:nvPr/>
-        </p:nvSpPr>
-        <p:spPr>
-          <a:xfrm>
-            <a:off x="749808" y="109728"/>
-            <a:ext cx="7315200" cy="219456"/>
-          </a:xfrm>
-          <a:prstGeom prst="rect">
-            <a:avLst/>
-          </a:prstGeom>
-          <a:noFill/>
-        </p:spPr>
-        <p:txBody>
-          <a:bodyPr wrap="square" anchor="t" lIns="0" rIns="0" tIns="0" bIns="0">
-            <a:spAutoFit/>
-          </a:bodyPr>
-          <a:lstStyle/>
-          <a:p>
-            <a:pPr algn="l">
-              <a:lnSpc>
-                <a:spcPct val="108000"/>
-              </a:lnSpc>
-              <a:spcAft>
-                <a:spcPts val="400"/>
-              </a:spcAft>
-            </a:pPr>
-            <a:r>
-              <a:rPr sz="1100" b="1" i="0">
-                <a:solidFill>
-                  <a:srgbClr val="1F6E70"/>
-                </a:solidFill>
-                <a:latin typeface="NanumGothic"/>
-                <a:ea typeface="NanumGothic"/>
-              </a:rPr>
-              <a:t>적응증 · 증상</a:t>
-            </a:r>
-          </a:p>
-        </p:txBody>
-      </p:sp>
-      <p:sp>
-        <p:nvSpPr>
-          <p:cNvPr id="5" name="Rectangle 4"/>
-          <p:cNvSpPr/>
-          <p:nvPr/>
-        </p:nvSpPr>
-        <p:spPr>
-          <a:xfrm>
-            <a:off x="731520" y="969264"/>
-            <a:ext cx="10881360" cy="17780"/>
-          </a:xfrm>
-          <a:prstGeom prst="rect">
-            <a:avLst/>
-          </a:prstGeom>
-          <a:solidFill>
-            <a:srgbClr val="D5DEE7"/>
-          </a:solidFill>
-          <a:ln>
-            <a:noFill/>
-          </a:ln>
-          <a:effectLst/>
-        </p:spPr>
-        <p:style>
-          <a:lnRef idx="1">
-            <a:schemeClr val="accent1"/>
-          </a:lnRef>
-          <a:fillRef idx="3">
-            <a:schemeClr val="accent1"/>
-          </a:fillRef>
-          <a:effectRef idx="2">
-            <a:schemeClr val="accent1"/>
-          </a:effectRef>
-          <a:fontRef idx="minor">
-            <a:schemeClr val="lt1"/>
-          </a:fontRef>
-        </p:style>
-        <p:txBody>
-          <a:bodyPr rtlCol="0" anchor="ctr"/>
-          <a:lstStyle/>
-          <a:p>
-            <a:pPr algn="ctr"/>
-          </a:p>
-        </p:txBody>
-      </p:sp>
-      <p:sp>
-        <p:nvSpPr>
-          <p:cNvPr id="6" name="Rounded Rectangle 5"/>
-          <p:cNvSpPr/>
-          <p:nvPr/>
-        </p:nvSpPr>
-        <p:spPr>
-          <a:xfrm>
-            <a:off x="10865816" y="365760"/>
-            <a:ext cx="822959" cy="347472"/>
-          </a:xfrm>
-          <a:prstGeom prst="roundRect">
-            <a:avLst>
-              <a:gd name="adj" fmla="val 8000"/>
-            </a:avLst>
-          </a:prstGeom>
-          <a:solidFill>
-            <a:srgbClr val="2C898A"/>
-          </a:solidFill>
-          <a:ln>
-            <a:noFill/>
-          </a:ln>
-          <a:effectLst/>
-        </p:spPr>
-        <p:style>
-          <a:lnRef idx="1">
-            <a:schemeClr val="accent1"/>
-          </a:lnRef>
-          <a:fillRef idx="3">
-            <a:schemeClr val="accent1"/>
-          </a:fillRef>
-          <a:effectRef idx="2">
-            <a:schemeClr val="accent1"/>
-          </a:effectRef>
-          <a:fontRef idx="minor">
-            <a:schemeClr val="lt1"/>
-          </a:fontRef>
-        </p:style>
-        <p:txBody>
-          <a:bodyPr rtlCol="0" anchor="ctr"/>
-          <a:lstStyle/>
-          <a:p>
-            <a:pPr algn="ctr"/>
-          </a:p>
-        </p:txBody>
-      </p:sp>
-      <p:sp>
-        <p:nvSpPr>
-          <p:cNvPr id="7" name="TextBox 6"/>
-          <p:cNvSpPr txBox="1"/>
-          <p:nvPr/>
-        </p:nvSpPr>
-        <p:spPr>
-          <a:xfrm>
-            <a:off x="10865816" y="365760"/>
-            <a:ext cx="822959" cy="347472"/>
-          </a:xfrm>
-          <a:prstGeom prst="rect">
-            <a:avLst/>
-          </a:prstGeom>
-          <a:noFill/>
-        </p:spPr>
-        <p:txBody>
-          <a:bodyPr wrap="square" anchor="ctr" lIns="0" rIns="0" tIns="0" bIns="0">
-            <a:spAutoFit/>
-          </a:bodyPr>
-          <a:lstStyle/>
-          <a:p>
-            <a:pPr algn="ctr">
-              <a:lnSpc>
-                <a:spcPct val="108000"/>
-              </a:lnSpc>
-              <a:spcAft>
-                <a:spcPts val="400"/>
-              </a:spcAft>
-            </a:pPr>
-            <a:r>
-              <a:rPr sz="1150" b="1" i="0">
-                <a:solidFill>
-                  <a:srgbClr val="FFFFFF"/>
-                </a:solidFill>
-                <a:latin typeface="NanumGothic"/>
-                <a:ea typeface="NanumGothic"/>
-              </a:rPr>
-              <a:t>환자 증상</a:t>
-            </a:r>
-          </a:p>
-        </p:txBody>
-      </p:sp>
-      <p:sp>
-        <p:nvSpPr>
-          <p:cNvPr id="8" name="TextBox 7"/>
-          <p:cNvSpPr txBox="1"/>
-          <p:nvPr/>
-        </p:nvSpPr>
-        <p:spPr>
-          <a:xfrm>
-            <a:off x="731520" y="1371600"/>
-            <a:ext cx="10835640" cy="4754880"/>
-          </a:xfrm>
-          <a:prstGeom prst="rect">
-            <a:avLst/>
-          </a:prstGeom>
-          <a:noFill/>
-        </p:spPr>
-        <p:txBody>
-          <a:bodyPr wrap="square" lIns="0" rIns="0" tIns="0" bIns="0">
-            <a:spAutoFit/>
-          </a:bodyPr>
-          <a:lstStyle/>
-          <a:p>
-            <a:pPr algn="l">
-              <a:lnSpc>
-                <a:spcPct val="108000"/>
-              </a:lnSpc>
-              <a:spcAft>
-                <a:spcPts val="600"/>
-              </a:spcAft>
-            </a:pPr>
-            <a:r>
-              <a:rPr sz="979" b="1" i="0">
-                <a:solidFill>
-                  <a:srgbClr val="2C898A"/>
-                </a:solidFill>
-                <a:latin typeface="NanumGothic"/>
-                <a:ea typeface="NanumGothic"/>
-              </a:rPr>
-              <a:t>●  </a:t>
-            </a:r>
-            <a:r>
-              <a:rPr sz="1400" b="1" i="0">
-                <a:solidFill>
-                  <a:srgbClr val="1A202C"/>
-                </a:solidFill>
-                <a:latin typeface="NanumGothic"/>
-                <a:ea typeface="NanumGothic"/>
-              </a:rPr>
-              <a:t>하지 CRPS I/II (복합부위통증증후군) — 교감신경 매개 통증의 전형</a:t>
-            </a:r>
-          </a:p>
-          <a:p>
-            <a:pPr algn="l">
-              <a:lnSpc>
-                <a:spcPct val="108000"/>
-              </a:lnSpc>
-              <a:spcAft>
-                <a:spcPts val="600"/>
-              </a:spcAft>
-            </a:pPr>
-            <a:r>
-              <a:rPr sz="1400" b="1" i="0">
-                <a:solidFill>
-                  <a:srgbClr val="5A6B7B"/>
-                </a:solidFill>
-                <a:latin typeface="NanumGothic"/>
-                <a:ea typeface="NanumGothic"/>
-              </a:rPr>
-              <a:t>      –  </a:t>
-            </a:r>
-            <a:r>
-              <a:rPr sz="1400" b="0" i="0">
-                <a:solidFill>
-                  <a:srgbClr val="1A202C"/>
-                </a:solidFill>
-                <a:latin typeface="NanumGothic"/>
-                <a:ea typeface="NanumGothic"/>
-              </a:rPr>
-              <a:t>작열통·이질통(옷·바람 스침에도 통증)·통각과민 · 부종 · 피부색(발적↔창백)·좌우 온도차 · 발한 이상</a:t>
-            </a:r>
-          </a:p>
-          <a:p>
-            <a:pPr algn="l">
-              <a:lnSpc>
-                <a:spcPct val="108000"/>
-              </a:lnSpc>
-              <a:spcAft>
-                <a:spcPts val="600"/>
-              </a:spcAft>
-            </a:pPr>
-            <a:r>
-              <a:rPr sz="1400" b="1" i="0">
-                <a:solidFill>
-                  <a:srgbClr val="5A6B7B"/>
-                </a:solidFill>
-                <a:latin typeface="NanumGothic"/>
-                <a:ea typeface="NanumGothic"/>
-              </a:rPr>
-              <a:t>      –  </a:t>
-            </a:r>
-            <a:r>
-              <a:rPr sz="1400" b="0" i="0">
-                <a:solidFill>
-                  <a:srgbClr val="5A6B7B"/>
-                </a:solidFill>
-                <a:latin typeface="NanumGothic"/>
-                <a:ea typeface="NanumGothic"/>
-              </a:rPr>
-              <a:t>호소: “발이 타는 듯 화끈거려요” · “이불만 스쳐도 아파요” · “붓고 색이 자꾸 변해요”</a:t>
-            </a:r>
-          </a:p>
-          <a:p>
-            <a:pPr algn="l">
-              <a:lnSpc>
-                <a:spcPct val="108000"/>
-              </a:lnSpc>
-              <a:spcAft>
-                <a:spcPts val="600"/>
-              </a:spcAft>
-            </a:pPr>
-            <a:r>
-              <a:rPr sz="979" b="1" i="0">
-                <a:solidFill>
-                  <a:srgbClr val="2C898A"/>
-                </a:solidFill>
-                <a:latin typeface="NanumGothic"/>
-                <a:ea typeface="NanumGothic"/>
-              </a:rPr>
-              <a:t>●  </a:t>
-            </a:r>
-            <a:r>
-              <a:rPr sz="1400" b="1" i="0">
-                <a:solidFill>
-                  <a:srgbClr val="2E7D32"/>
-                </a:solidFill>
-                <a:latin typeface="NanumGothic"/>
-                <a:ea typeface="NanumGothic"/>
-              </a:rPr>
-              <a:t>허혈질환 — PAD·중증 하지허혈(CLI)·버거병 (동맥성 허혈)</a:t>
-            </a:r>
-          </a:p>
-          <a:p>
-            <a:pPr algn="l">
-              <a:lnSpc>
-                <a:spcPct val="108000"/>
-              </a:lnSpc>
-              <a:spcAft>
-                <a:spcPts val="600"/>
-              </a:spcAft>
-            </a:pPr>
-            <a:r>
-              <a:rPr sz="1400" b="1" i="0">
-                <a:solidFill>
-                  <a:srgbClr val="5A6B7B"/>
-                </a:solidFill>
-                <a:latin typeface="NanumGothic"/>
-                <a:ea typeface="NanumGothic"/>
-              </a:rPr>
-              <a:t>      –  </a:t>
-            </a:r>
-            <a:r>
-              <a:rPr sz="1400" b="0" i="0">
-                <a:solidFill>
-                  <a:srgbClr val="1A202C"/>
-                </a:solidFill>
-                <a:latin typeface="NanumGothic"/>
-                <a:ea typeface="NanumGothic"/>
-              </a:rPr>
-              <a:t>간헐적 파행(걷다 종아리 통증→쉬면 완화) → 진행 시 야간 안정통(다리 내리면 완화) · 차고 창백한 발 · 비치유 궤양·괴저</a:t>
-            </a:r>
-          </a:p>
-          <a:p>
-            <a:pPr algn="l">
-              <a:lnSpc>
-                <a:spcPct val="108000"/>
-              </a:lnSpc>
-              <a:spcAft>
-                <a:spcPts val="600"/>
-              </a:spcAft>
-            </a:pPr>
-            <a:r>
-              <a:rPr sz="1400" b="1" i="0">
-                <a:solidFill>
-                  <a:srgbClr val="5A6B7B"/>
-                </a:solidFill>
-                <a:latin typeface="NanumGothic"/>
-                <a:ea typeface="NanumGothic"/>
-              </a:rPr>
-              <a:t>      –  </a:t>
-            </a:r>
-            <a:r>
-              <a:rPr sz="1400" b="0" i="0">
-                <a:solidFill>
-                  <a:srgbClr val="5A6B7B"/>
-                </a:solidFill>
-                <a:latin typeface="NanumGothic"/>
-                <a:ea typeface="NanumGothic"/>
-              </a:rPr>
-              <a:t>호소: “걸으면 종아리가 터질 듯 아파요” · “밤에 발이 시려 잠을 못 자요” · “상처가 안 아물어요”</a:t>
-            </a:r>
-          </a:p>
-          <a:p>
-            <a:pPr algn="l">
-              <a:lnSpc>
-                <a:spcPct val="108000"/>
-              </a:lnSpc>
-              <a:spcAft>
-                <a:spcPts val="600"/>
-              </a:spcAft>
-            </a:pPr>
-            <a:r>
-              <a:rPr sz="1400" b="1" i="0">
-                <a:solidFill>
-                  <a:srgbClr val="5A6B7B"/>
-                </a:solidFill>
-                <a:latin typeface="NanumGothic"/>
-                <a:ea typeface="NanumGothic"/>
-              </a:rPr>
-              <a:t/>
-            </a:r>
-            <a:r>
-              <a:rPr sz="1400" b="1" i="0">
-                <a:solidFill>
-                  <a:srgbClr val="1F6E70"/>
-                </a:solidFill>
-                <a:latin typeface="NanumGothic"/>
-                <a:ea typeface="NanumGothic"/>
-              </a:rPr>
-              <a:t>‘허혈’은 동맥성 부족을 의미 — 하지정맥류 등 정맥질환은 LSB 적응증 아님(압박·정맥폐색술이 표준).</a:t>
-            </a:r>
-          </a:p>
-        </p:txBody>
-      </p:sp>
-      <p:sp>
-        <p:nvSpPr>
-          <p:cNvPr id="9" name="TextBox 8"/>
-          <p:cNvSpPr txBox="1"/>
-          <p:nvPr/>
-        </p:nvSpPr>
-        <p:spPr>
-          <a:xfrm>
-            <a:off x="731520" y="6455664"/>
-            <a:ext cx="9875520" cy="292608"/>
-          </a:xfrm>
-          <a:prstGeom prst="rect">
-            <a:avLst/>
-          </a:prstGeom>
-          <a:noFill/>
-        </p:spPr>
-        <p:txBody>
-          <a:bodyPr wrap="square" anchor="ctr" lIns="0" rIns="0" tIns="0" bIns="0">
-            <a:spAutoFit/>
-          </a:bodyPr>
-          <a:lstStyle/>
-          <a:p>
-            <a:pPr algn="l">
-              <a:lnSpc>
-                <a:spcPct val="108000"/>
-              </a:lnSpc>
-              <a:spcAft>
-                <a:spcPts val="400"/>
-              </a:spcAft>
-            </a:pPr>
-            <a:r>
-              <a:rPr sz="900" b="0" i="0">
-                <a:solidFill>
-                  <a:srgbClr val="5A6B7B"/>
-                </a:solidFill>
-                <a:latin typeface="NanumGothic"/>
-                <a:ea typeface="NanumGothic"/>
-              </a:rPr>
-              <a:t>근거: StatPearls; 문헌고찰 종합</a:t>
-            </a:r>
-          </a:p>
-        </p:txBody>
-      </p:sp>
-      <p:sp>
-        <p:nvSpPr>
-          <p:cNvPr id="10" name="TextBox 9"/>
-          <p:cNvSpPr txBox="1"/>
-          <p:nvPr/>
-        </p:nvSpPr>
-        <p:spPr>
-          <a:xfrm>
-            <a:off x="11064240" y="6455664"/>
-            <a:ext cx="822960" cy="292608"/>
-          </a:xfrm>
-          <a:prstGeom prst="rect">
-            <a:avLst/>
-          </a:prstGeom>
-          <a:noFill/>
-        </p:spPr>
-        <p:txBody>
-          <a:bodyPr wrap="square" anchor="ctr" lIns="0" rIns="0" tIns="0" bIns="0">
-            <a:spAutoFit/>
-          </a:bodyPr>
-          <a:lstStyle/>
-          <a:p>
-            <a:pPr algn="r">
-              <a:lnSpc>
-                <a:spcPct val="108000"/>
-              </a:lnSpc>
-              <a:spcAft>
-                <a:spcPts val="400"/>
-              </a:spcAft>
-            </a:pPr>
-            <a:r>
-              <a:rPr sz="1000" b="1" i="0">
-                <a:solidFill>
-                  <a:srgbClr val="5A6B7B"/>
-                </a:solidFill>
-                <a:latin typeface="NanumGothic"/>
-                <a:ea typeface="NanumGothic"/>
-              </a:rPr>
-              <a:t>6</a:t>
-            </a:r>
-          </a:p>
-        </p:txBody>
-      </p:sp>
-    </p:spTree>
-  </p:cSld>
-  <p:clrMapOvr>
-    <a:masterClrMapping/>
-  </p:clrMapOvr>
-</p:sld>
-</file>
-
-<file path=ppt/slides/slide7.xml><?xml version="1.0" encoding="utf-8"?>
-<p:sld xmlns:a="http://schemas.openxmlformats.org/drawingml/2006/main" xmlns:p="http://schemas.openxmlformats.org/presentationml/2006/main" xmlns:r="http://schemas.openxmlformats.org/officeDocument/2006/relationships">
-  <p:cSld>
-    <p:spTree>
-      <p:nvGrpSpPr>
-        <p:cNvPr id="1" name=""/>
-        <p:cNvGrpSpPr/>
-        <p:nvPr/>
-      </p:nvGrpSpPr>
-      <p:grpSpPr/>
-      <p:sp>
-        <p:nvSpPr>
-          <p:cNvPr id="2" name="Rectangle 1"/>
-          <p:cNvSpPr/>
-          <p:nvPr/>
-        </p:nvSpPr>
-        <p:spPr>
-          <a:xfrm>
-            <a:off x="502920" y="310896"/>
-            <a:ext cx="109728" cy="457200"/>
-          </a:xfrm>
-          <a:prstGeom prst="rect">
-            <a:avLst/>
-          </a:prstGeom>
-          <a:solidFill>
-            <a:srgbClr val="2C898A"/>
-          </a:solidFill>
-          <a:ln>
-            <a:noFill/>
-          </a:ln>
-          <a:effectLst/>
-        </p:spPr>
-        <p:style>
-          <a:lnRef idx="1">
-            <a:schemeClr val="accent1"/>
-          </a:lnRef>
-          <a:fillRef idx="3">
-            <a:schemeClr val="accent1"/>
-          </a:fillRef>
-          <a:effectRef idx="2">
-            <a:schemeClr val="accent1"/>
-          </a:effectRef>
-          <a:fontRef idx="minor">
-            <a:schemeClr val="lt1"/>
-          </a:fontRef>
-        </p:style>
-        <p:txBody>
-          <a:bodyPr rtlCol="0" anchor="ctr"/>
-          <a:lstStyle/>
-          <a:p>
-            <a:pPr algn="ctr"/>
-          </a:p>
-        </p:txBody>
-      </p:sp>
-      <p:sp>
-        <p:nvSpPr>
-          <p:cNvPr id="3" name="TextBox 2"/>
-          <p:cNvSpPr txBox="1"/>
-          <p:nvPr/>
-        </p:nvSpPr>
-        <p:spPr>
-          <a:xfrm>
-            <a:off x="731520" y="237744"/>
-            <a:ext cx="9509760" cy="685800"/>
-          </a:xfrm>
-          <a:prstGeom prst="rect">
-            <a:avLst/>
-          </a:prstGeom>
-          <a:noFill/>
-        </p:spPr>
-        <p:txBody>
-          <a:bodyPr wrap="square" anchor="ctr" lIns="0" rIns="0" tIns="0" bIns="0">
-            <a:spAutoFit/>
-          </a:bodyPr>
-          <a:lstStyle/>
-          <a:p>
-            <a:pPr algn="l">
-              <a:lnSpc>
-                <a:spcPct val="108000"/>
-              </a:lnSpc>
-              <a:spcAft>
-                <a:spcPts val="400"/>
-              </a:spcAft>
-            </a:pPr>
-            <a:r>
-              <a:rPr sz="2400" b="1" i="0">
-                <a:solidFill>
-                  <a:srgbClr val="1B355E"/>
-                </a:solidFill>
-                <a:latin typeface="NanumGothic"/>
-                <a:ea typeface="NanumGothic"/>
-              </a:rPr>
-              <a:t>적응증별 환자 증상·호소 ② — 신경병증·기타</a:t>
-            </a:r>
-          </a:p>
-        </p:txBody>
-      </p:sp>
-      <p:sp>
-        <p:nvSpPr>
-          <p:cNvPr id="4" name="TextBox 3"/>
-          <p:cNvSpPr txBox="1"/>
-          <p:nvPr/>
-        </p:nvSpPr>
-        <p:spPr>
-          <a:xfrm>
-            <a:off x="749808" y="109728"/>
-            <a:ext cx="7315200" cy="219456"/>
-          </a:xfrm>
-          <a:prstGeom prst="rect">
-            <a:avLst/>
-          </a:prstGeom>
-          <a:noFill/>
-        </p:spPr>
-        <p:txBody>
-          <a:bodyPr wrap="square" anchor="t" lIns="0" rIns="0" tIns="0" bIns="0">
-            <a:spAutoFit/>
-          </a:bodyPr>
-          <a:lstStyle/>
-          <a:p>
-            <a:pPr algn="l">
-              <a:lnSpc>
-                <a:spcPct val="108000"/>
-              </a:lnSpc>
-              <a:spcAft>
-                <a:spcPts val="400"/>
-              </a:spcAft>
-            </a:pPr>
-            <a:r>
-              <a:rPr sz="1100" b="1" i="0">
-                <a:solidFill>
-                  <a:srgbClr val="1F6E70"/>
-                </a:solidFill>
-                <a:latin typeface="NanumGothic"/>
-                <a:ea typeface="NanumGothic"/>
-              </a:rPr>
-              <a:t>적응증 · 증상</a:t>
-            </a:r>
-          </a:p>
-        </p:txBody>
-      </p:sp>
-      <p:sp>
-        <p:nvSpPr>
-          <p:cNvPr id="5" name="Rectangle 4"/>
-          <p:cNvSpPr/>
-          <p:nvPr/>
-        </p:nvSpPr>
-        <p:spPr>
-          <a:xfrm>
-            <a:off x="731520" y="969264"/>
-            <a:ext cx="10881360" cy="17780"/>
-          </a:xfrm>
-          <a:prstGeom prst="rect">
-            <a:avLst/>
-          </a:prstGeom>
-          <a:solidFill>
-            <a:srgbClr val="D5DEE7"/>
-          </a:solidFill>
-          <a:ln>
-            <a:noFill/>
-          </a:ln>
-          <a:effectLst/>
-        </p:spPr>
-        <p:style>
-          <a:lnRef idx="1">
-            <a:schemeClr val="accent1"/>
-          </a:lnRef>
-          <a:fillRef idx="3">
-            <a:schemeClr val="accent1"/>
-          </a:fillRef>
-          <a:effectRef idx="2">
-            <a:schemeClr val="accent1"/>
-          </a:effectRef>
-          <a:fontRef idx="minor">
-            <a:schemeClr val="lt1"/>
-          </a:fontRef>
-        </p:style>
-        <p:txBody>
-          <a:bodyPr rtlCol="0" anchor="ctr"/>
-          <a:lstStyle/>
-          <a:p>
-            <a:pPr algn="ctr"/>
-          </a:p>
-        </p:txBody>
-      </p:sp>
-      <p:sp>
-        <p:nvSpPr>
-          <p:cNvPr id="6" name="Rounded Rectangle 5"/>
-          <p:cNvSpPr/>
-          <p:nvPr/>
-        </p:nvSpPr>
-        <p:spPr>
-          <a:xfrm>
-            <a:off x="10865816" y="365760"/>
-            <a:ext cx="822959" cy="347472"/>
-          </a:xfrm>
-          <a:prstGeom prst="roundRect">
-            <a:avLst>
-              <a:gd name="adj" fmla="val 8000"/>
-            </a:avLst>
-          </a:prstGeom>
-          <a:solidFill>
-            <a:srgbClr val="2C898A"/>
-          </a:solidFill>
-          <a:ln>
-            <a:noFill/>
-          </a:ln>
-          <a:effectLst/>
-        </p:spPr>
-        <p:style>
-          <a:lnRef idx="1">
-            <a:schemeClr val="accent1"/>
-          </a:lnRef>
-          <a:fillRef idx="3">
-            <a:schemeClr val="accent1"/>
-          </a:fillRef>
-          <a:effectRef idx="2">
-            <a:schemeClr val="accent1"/>
-          </a:effectRef>
-          <a:fontRef idx="minor">
-            <a:schemeClr val="lt1"/>
-          </a:fontRef>
-        </p:style>
-        <p:txBody>
-          <a:bodyPr rtlCol="0" anchor="ctr"/>
-          <a:lstStyle/>
-          <a:p>
-            <a:pPr algn="ctr"/>
-          </a:p>
-        </p:txBody>
-      </p:sp>
-      <p:sp>
-        <p:nvSpPr>
-          <p:cNvPr id="7" name="TextBox 6"/>
-          <p:cNvSpPr txBox="1"/>
-          <p:nvPr/>
-        </p:nvSpPr>
-        <p:spPr>
-          <a:xfrm>
-            <a:off x="10865816" y="365760"/>
-            <a:ext cx="822959" cy="347472"/>
-          </a:xfrm>
-          <a:prstGeom prst="rect">
-            <a:avLst/>
-          </a:prstGeom>
-          <a:noFill/>
-        </p:spPr>
-        <p:txBody>
-          <a:bodyPr wrap="square" anchor="ctr" lIns="0" rIns="0" tIns="0" bIns="0">
-            <a:spAutoFit/>
-          </a:bodyPr>
-          <a:lstStyle/>
-          <a:p>
-            <a:pPr algn="ctr">
-              <a:lnSpc>
-                <a:spcPct val="108000"/>
-              </a:lnSpc>
-              <a:spcAft>
-                <a:spcPts val="400"/>
-              </a:spcAft>
-            </a:pPr>
-            <a:r>
-              <a:rPr sz="1150" b="1" i="0">
-                <a:solidFill>
-                  <a:srgbClr val="FFFFFF"/>
-                </a:solidFill>
-                <a:latin typeface="NanumGothic"/>
-                <a:ea typeface="NanumGothic"/>
-              </a:rPr>
-              <a:t>환자 증상</a:t>
-            </a:r>
-          </a:p>
-        </p:txBody>
-      </p:sp>
-      <p:sp>
-        <p:nvSpPr>
-          <p:cNvPr id="8" name="TextBox 7"/>
-          <p:cNvSpPr txBox="1"/>
-          <p:nvPr/>
-        </p:nvSpPr>
-        <p:spPr>
-          <a:xfrm>
-            <a:off x="731520" y="1371600"/>
-            <a:ext cx="10835640" cy="4754880"/>
-          </a:xfrm>
-          <a:prstGeom prst="rect">
-            <a:avLst/>
-          </a:prstGeom>
-          <a:noFill/>
-        </p:spPr>
-        <p:txBody>
-          <a:bodyPr wrap="square" lIns="0" rIns="0" tIns="0" bIns="0">
-            <a:spAutoFit/>
-          </a:bodyPr>
-          <a:lstStyle/>
-          <a:p>
-            <a:pPr algn="l">
-              <a:lnSpc>
-                <a:spcPct val="108000"/>
-              </a:lnSpc>
-              <a:spcAft>
-                <a:spcPts val="600"/>
-              </a:spcAft>
-            </a:pPr>
-            <a:r>
-              <a:rPr sz="979" b="1" i="0">
-                <a:solidFill>
-                  <a:srgbClr val="2C898A"/>
-                </a:solidFill>
-                <a:latin typeface="NanumGothic"/>
-                <a:ea typeface="NanumGothic"/>
-              </a:rPr>
-              <a:t>●  </a:t>
-            </a:r>
-            <a:r>
-              <a:rPr sz="1400" b="1" i="0">
-                <a:solidFill>
-                  <a:srgbClr val="1A202C"/>
-                </a:solidFill>
-                <a:latin typeface="NanumGothic"/>
-                <a:ea typeface="NanumGothic"/>
-              </a:rPr>
-              <a:t>신경병증 — 당뇨병성 신경병증/당뇨발·대상포진후신경통·환상지통</a:t>
-            </a:r>
-          </a:p>
-          <a:p>
-            <a:pPr algn="l">
-              <a:lnSpc>
-                <a:spcPct val="108000"/>
-              </a:lnSpc>
-              <a:spcAft>
-                <a:spcPts val="600"/>
-              </a:spcAft>
-            </a:pPr>
-            <a:r>
-              <a:rPr sz="1400" b="1" i="0">
-                <a:solidFill>
-                  <a:srgbClr val="5A6B7B"/>
-                </a:solidFill>
-                <a:latin typeface="NanumGothic"/>
-                <a:ea typeface="NanumGothic"/>
-              </a:rPr>
-              <a:t>      –  </a:t>
-            </a:r>
-            <a:r>
-              <a:rPr sz="1400" b="0" i="0">
-                <a:solidFill>
-                  <a:srgbClr val="1A202C"/>
-                </a:solidFill>
-                <a:latin typeface="NanumGothic"/>
-                <a:ea typeface="NanumGothic"/>
-              </a:rPr>
-              <a:t>저림·화끈거림·전기 오듯 찌름 · 이질통 · 감각저하(양말 신은 느낌) · 야간 악화 · 당뇨발 궤양·관류저하</a:t>
-            </a:r>
-          </a:p>
-          <a:p>
-            <a:pPr algn="l">
-              <a:lnSpc>
-                <a:spcPct val="108000"/>
-              </a:lnSpc>
-              <a:spcAft>
-                <a:spcPts val="600"/>
-              </a:spcAft>
-            </a:pPr>
-            <a:r>
-              <a:rPr sz="1400" b="1" i="0">
-                <a:solidFill>
-                  <a:srgbClr val="5A6B7B"/>
-                </a:solidFill>
-                <a:latin typeface="NanumGothic"/>
-                <a:ea typeface="NanumGothic"/>
-              </a:rPr>
-              <a:t>      –  </a:t>
-            </a:r>
-            <a:r>
-              <a:rPr sz="1400" b="0" i="0">
-                <a:solidFill>
-                  <a:srgbClr val="5A6B7B"/>
-                </a:solidFill>
-                <a:latin typeface="NanumGothic"/>
-                <a:ea typeface="NanumGothic"/>
-              </a:rPr>
-              <a:t>호소: “발이 저리고 화끈거려요” · “밤에 더 심해요” · “전기가 찌릿 오는 것 같아요”</a:t>
-            </a:r>
-          </a:p>
-          <a:p>
-            <a:pPr algn="l">
-              <a:lnSpc>
-                <a:spcPct val="108000"/>
-              </a:lnSpc>
-              <a:spcAft>
-                <a:spcPts val="600"/>
-              </a:spcAft>
-            </a:pPr>
-            <a:r>
-              <a:rPr sz="979" b="1" i="0">
-                <a:solidFill>
-                  <a:srgbClr val="2C898A"/>
-                </a:solidFill>
-                <a:latin typeface="NanumGothic"/>
-                <a:ea typeface="NanumGothic"/>
-              </a:rPr>
-              <a:t>●  </a:t>
-            </a:r>
-            <a:r>
-              <a:rPr sz="1400" b="1" i="0">
-                <a:solidFill>
-                  <a:srgbClr val="1A202C"/>
-                </a:solidFill>
-                <a:latin typeface="NanumGothic"/>
-                <a:ea typeface="NanumGothic"/>
-              </a:rPr>
-              <a:t>기타 — 족부 다한증·레이노(하지)·홍색사지통증·암성 하지통</a:t>
-            </a:r>
-          </a:p>
-          <a:p>
-            <a:pPr algn="l">
-              <a:lnSpc>
-                <a:spcPct val="108000"/>
-              </a:lnSpc>
-              <a:spcAft>
-                <a:spcPts val="600"/>
-              </a:spcAft>
-            </a:pPr>
-            <a:r>
-              <a:rPr sz="1400" b="1" i="0">
-                <a:solidFill>
-                  <a:srgbClr val="5A6B7B"/>
-                </a:solidFill>
-                <a:latin typeface="NanumGothic"/>
-                <a:ea typeface="NanumGothic"/>
-              </a:rPr>
-              <a:t>      –  </a:t>
-            </a:r>
-            <a:r>
-              <a:rPr sz="1400" b="0" i="0">
-                <a:solidFill>
-                  <a:srgbClr val="1A202C"/>
-                </a:solidFill>
-                <a:latin typeface="NanumGothic"/>
-                <a:ea typeface="NanumGothic"/>
-              </a:rPr>
-              <a:t>다한증(과한 발땀·축축·악취) · 레이노(추위·스트레스에 창백→청색→발적 삼색변화·저림) · 홍색사지통증(발작적 발적·작열·열감, 열에 악화)</a:t>
-            </a:r>
-          </a:p>
-          <a:p>
-            <a:pPr algn="l">
-              <a:lnSpc>
-                <a:spcPct val="108000"/>
-              </a:lnSpc>
-              <a:spcAft>
-                <a:spcPts val="600"/>
-              </a:spcAft>
-            </a:pPr>
-            <a:r>
-              <a:rPr sz="1400" b="1" i="0">
-                <a:solidFill>
-                  <a:srgbClr val="5A6B7B"/>
-                </a:solidFill>
-                <a:latin typeface="NanumGothic"/>
-                <a:ea typeface="NanumGothic"/>
-              </a:rPr>
-              <a:t>      –  </a:t>
-            </a:r>
-            <a:r>
-              <a:rPr sz="1400" b="0" i="0">
-                <a:solidFill>
-                  <a:srgbClr val="5A6B7B"/>
-                </a:solidFill>
-                <a:latin typeface="NanumGothic"/>
-                <a:ea typeface="NanumGothic"/>
-              </a:rPr>
-              <a:t>호소: “발에 땀이 너무 많아요” · “추우면 발이 하얘졌다 파래져요” · “발이 화끈 달아올라요”</a:t>
-            </a:r>
-          </a:p>
-        </p:txBody>
-      </p:sp>
-      <p:sp>
-        <p:nvSpPr>
-          <p:cNvPr id="9" name="TextBox 8"/>
-          <p:cNvSpPr txBox="1"/>
-          <p:nvPr/>
-        </p:nvSpPr>
-        <p:spPr>
-          <a:xfrm>
-            <a:off x="731520" y="6455664"/>
-            <a:ext cx="9875520" cy="292608"/>
-          </a:xfrm>
-          <a:prstGeom prst="rect">
-            <a:avLst/>
-          </a:prstGeom>
-          <a:noFill/>
-        </p:spPr>
-        <p:txBody>
-          <a:bodyPr wrap="square" anchor="ctr" lIns="0" rIns="0" tIns="0" bIns="0">
-            <a:spAutoFit/>
-          </a:bodyPr>
-          <a:lstStyle/>
-          <a:p>
-            <a:pPr algn="l">
-              <a:lnSpc>
-                <a:spcPct val="108000"/>
-              </a:lnSpc>
-              <a:spcAft>
-                <a:spcPts val="400"/>
-              </a:spcAft>
-            </a:pPr>
-            <a:r>
-              <a:rPr sz="900" b="0" i="0">
-                <a:solidFill>
-                  <a:srgbClr val="5A6B7B"/>
-                </a:solidFill>
-                <a:latin typeface="NanumGothic"/>
-                <a:ea typeface="NanumGothic"/>
-              </a:rPr>
-              <a:t>근거: StatPearls; 문헌고찰 종합</a:t>
-            </a:r>
-          </a:p>
-        </p:txBody>
-      </p:sp>
-      <p:sp>
-        <p:nvSpPr>
-          <p:cNvPr id="10" name="TextBox 9"/>
-          <p:cNvSpPr txBox="1"/>
-          <p:nvPr/>
-        </p:nvSpPr>
-        <p:spPr>
-          <a:xfrm>
-            <a:off x="11064240" y="6455664"/>
-            <a:ext cx="822960" cy="292608"/>
-          </a:xfrm>
-          <a:prstGeom prst="rect">
-            <a:avLst/>
-          </a:prstGeom>
-          <a:noFill/>
-        </p:spPr>
-        <p:txBody>
-          <a:bodyPr wrap="square" anchor="ctr" lIns="0" rIns="0" tIns="0" bIns="0">
-            <a:spAutoFit/>
-          </a:bodyPr>
-          <a:lstStyle/>
-          <a:p>
-            <a:pPr algn="r">
-              <a:lnSpc>
-                <a:spcPct val="108000"/>
-              </a:lnSpc>
-              <a:spcAft>
-                <a:spcPts val="400"/>
-              </a:spcAft>
-            </a:pPr>
-            <a:r>
-              <a:rPr sz="1000" b="1" i="0">
-                <a:solidFill>
-                  <a:srgbClr val="5A6B7B"/>
-                </a:solidFill>
-                <a:latin typeface="NanumGothic"/>
-                <a:ea typeface="NanumGothic"/>
-              </a:rPr>
-              <a:t>7</a:t>
-            </a:r>
-          </a:p>
-        </p:txBody>
-      </p:sp>
-    </p:spTree>
-  </p:cSld>
-  <p:clrMapOvr>
-    <a:masterClrMapping/>
-  </p:clrMapOvr>
-</p:sld>
-</file>
-
-<file path=ppt/slides/slide8.xml><?xml version="1.0" encoding="utf-8"?>
-<p:sld xmlns:a="http://schemas.openxmlformats.org/drawingml/2006/main" xmlns:p="http://schemas.openxmlformats.org/presentationml/2006/main" xmlns:r="http://schemas.openxmlformats.org/officeDocument/2006/relationships">
-  <p:cSld>
-    <p:spTree>
-      <p:nvGrpSpPr>
-        <p:cNvPr id="1" name=""/>
-        <p:cNvGrpSpPr/>
-        <p:nvPr/>
-      </p:nvGrpSpPr>
-      <p:grpSpPr/>
-      <p:sp>
-        <p:nvSpPr>
-          <p:cNvPr id="2" name="Rectangle 1"/>
-          <p:cNvSpPr/>
-          <p:nvPr/>
-        </p:nvSpPr>
-        <p:spPr>
-          <a:xfrm>
-            <a:off x="502920" y="310896"/>
-            <a:ext cx="109728" cy="457200"/>
-          </a:xfrm>
-          <a:prstGeom prst="rect">
-            <a:avLst/>
-          </a:prstGeom>
-          <a:solidFill>
-            <a:srgbClr val="2C898A"/>
-          </a:solidFill>
-          <a:ln>
-            <a:noFill/>
-          </a:ln>
-          <a:effectLst/>
-        </p:spPr>
-        <p:style>
-          <a:lnRef idx="1">
-            <a:schemeClr val="accent1"/>
-          </a:lnRef>
-          <a:fillRef idx="3">
-            <a:schemeClr val="accent1"/>
-          </a:fillRef>
-          <a:effectRef idx="2">
-            <a:schemeClr val="accent1"/>
-          </a:effectRef>
-          <a:fontRef idx="minor">
-            <a:schemeClr val="lt1"/>
-          </a:fontRef>
-        </p:style>
-        <p:txBody>
-          <a:bodyPr rtlCol="0" anchor="ctr"/>
-          <a:lstStyle/>
-          <a:p>
-            <a:pPr algn="ctr"/>
-          </a:p>
-        </p:txBody>
-      </p:sp>
-      <p:sp>
-        <p:nvSpPr>
-          <p:cNvPr id="3" name="TextBox 2"/>
-          <p:cNvSpPr txBox="1"/>
-          <p:nvPr/>
-        </p:nvSpPr>
-        <p:spPr>
-          <a:xfrm>
-            <a:off x="731520" y="237744"/>
-            <a:ext cx="9509760" cy="685800"/>
-          </a:xfrm>
-          <a:prstGeom prst="rect">
-            <a:avLst/>
-          </a:prstGeom>
-          <a:noFill/>
-        </p:spPr>
-        <p:txBody>
-          <a:bodyPr wrap="square" anchor="ctr" lIns="0" rIns="0" tIns="0" bIns="0">
-            <a:spAutoFit/>
-          </a:bodyPr>
-          <a:lstStyle/>
-          <a:p>
-            <a:pPr algn="l">
-              <a:lnSpc>
-                <a:spcPct val="108000"/>
-              </a:lnSpc>
-              <a:spcAft>
-                <a:spcPts val="400"/>
-              </a:spcAft>
-            </a:pPr>
-            <a:r>
-              <a:rPr sz="2400" b="1" i="0">
-                <a:solidFill>
-                  <a:srgbClr val="1B355E"/>
-                </a:solidFill>
-                <a:latin typeface="NanumGothic"/>
-                <a:ea typeface="NanumGothic"/>
-              </a:rPr>
-              <a:t>밤에 저리고 화끈거리는 다리 — 당뇨병성 신경병증과 LSB</a:t>
-            </a:r>
-          </a:p>
-        </p:txBody>
-      </p:sp>
-      <p:sp>
-        <p:nvSpPr>
-          <p:cNvPr id="4" name="TextBox 3"/>
-          <p:cNvSpPr txBox="1"/>
-          <p:nvPr/>
-        </p:nvSpPr>
-        <p:spPr>
-          <a:xfrm>
-            <a:off x="749808" y="109728"/>
-            <a:ext cx="7315200" cy="219456"/>
-          </a:xfrm>
-          <a:prstGeom prst="rect">
-            <a:avLst/>
-          </a:prstGeom>
-          <a:noFill/>
-        </p:spPr>
-        <p:txBody>
-          <a:bodyPr wrap="square" anchor="t" lIns="0" rIns="0" tIns="0" bIns="0">
-            <a:spAutoFit/>
-          </a:bodyPr>
-          <a:lstStyle/>
-          <a:p>
-            <a:pPr algn="l">
-              <a:lnSpc>
-                <a:spcPct val="108000"/>
-              </a:lnSpc>
-              <a:spcAft>
-                <a:spcPts val="400"/>
-              </a:spcAft>
-            </a:pPr>
-            <a:r>
-              <a:rPr sz="1100" b="1" i="0">
-                <a:solidFill>
-                  <a:srgbClr val="1F6E70"/>
-                </a:solidFill>
-                <a:latin typeface="NanumGothic"/>
-                <a:ea typeface="NanumGothic"/>
-              </a:rPr>
-              <a:t>적응증 · 심화</a:t>
-            </a:r>
-          </a:p>
-        </p:txBody>
-      </p:sp>
-      <p:sp>
-        <p:nvSpPr>
-          <p:cNvPr id="5" name="Rectangle 4"/>
-          <p:cNvSpPr/>
-          <p:nvPr/>
-        </p:nvSpPr>
-        <p:spPr>
-          <a:xfrm>
-            <a:off x="731520" y="969264"/>
-            <a:ext cx="10881360" cy="17780"/>
-          </a:xfrm>
-          <a:prstGeom prst="rect">
-            <a:avLst/>
-          </a:prstGeom>
-          <a:solidFill>
-            <a:srgbClr val="D5DEE7"/>
-          </a:solidFill>
-          <a:ln>
-            <a:noFill/>
-          </a:ln>
-          <a:effectLst/>
-        </p:spPr>
-        <p:style>
-          <a:lnRef idx="1">
-            <a:schemeClr val="accent1"/>
-          </a:lnRef>
-          <a:fillRef idx="3">
-            <a:schemeClr val="accent1"/>
-          </a:fillRef>
-          <a:effectRef idx="2">
-            <a:schemeClr val="accent1"/>
-          </a:effectRef>
-          <a:fontRef idx="minor">
-            <a:schemeClr val="lt1"/>
-          </a:fontRef>
-        </p:style>
-        <p:txBody>
-          <a:bodyPr rtlCol="0" anchor="ctr"/>
-          <a:lstStyle/>
-          <a:p>
-            <a:pPr algn="ctr"/>
-          </a:p>
-        </p:txBody>
-      </p:sp>
-      <p:sp>
-        <p:nvSpPr>
-          <p:cNvPr id="6" name="Rounded Rectangle 5"/>
-          <p:cNvSpPr/>
-          <p:nvPr/>
-        </p:nvSpPr>
-        <p:spPr>
-          <a:xfrm>
-            <a:off x="10536631" y="365760"/>
-            <a:ext cx="1152144" cy="347472"/>
-          </a:xfrm>
-          <a:prstGeom prst="roundRect">
-            <a:avLst>
-              <a:gd name="adj" fmla="val 8000"/>
-            </a:avLst>
-          </a:prstGeom>
-          <a:solidFill>
-            <a:srgbClr val="2C898A"/>
-          </a:solidFill>
-          <a:ln>
-            <a:noFill/>
-          </a:ln>
-          <a:effectLst/>
-        </p:spPr>
-        <p:style>
-          <a:lnRef idx="1">
-            <a:schemeClr val="accent1"/>
-          </a:lnRef>
-          <a:fillRef idx="3">
-            <a:schemeClr val="accent1"/>
-          </a:fillRef>
-          <a:effectRef idx="2">
-            <a:schemeClr val="accent1"/>
-          </a:effectRef>
-          <a:fontRef idx="minor">
-            <a:schemeClr val="lt1"/>
-          </a:fontRef>
-        </p:style>
-        <p:txBody>
-          <a:bodyPr rtlCol="0" anchor="ctr"/>
-          <a:lstStyle/>
-          <a:p>
-            <a:pPr algn="ctr"/>
-          </a:p>
-        </p:txBody>
-      </p:sp>
-      <p:sp>
-        <p:nvSpPr>
-          <p:cNvPr id="7" name="TextBox 6"/>
-          <p:cNvSpPr txBox="1"/>
-          <p:nvPr/>
-        </p:nvSpPr>
-        <p:spPr>
-          <a:xfrm>
-            <a:off x="10536631" y="365760"/>
-            <a:ext cx="1152144" cy="347472"/>
-          </a:xfrm>
-          <a:prstGeom prst="rect">
-            <a:avLst/>
-          </a:prstGeom>
-          <a:noFill/>
-        </p:spPr>
-        <p:txBody>
-          <a:bodyPr wrap="square" anchor="ctr" lIns="0" rIns="0" tIns="0" bIns="0">
-            <a:spAutoFit/>
-          </a:bodyPr>
-          <a:lstStyle/>
-          <a:p>
-            <a:pPr algn="ctr">
-              <a:lnSpc>
-                <a:spcPct val="108000"/>
-              </a:lnSpc>
-              <a:spcAft>
-                <a:spcPts val="400"/>
-              </a:spcAft>
-            </a:pPr>
-            <a:r>
-              <a:rPr sz="1150" b="1" i="0">
-                <a:solidFill>
-                  <a:srgbClr val="FFFFFF"/>
-                </a:solidFill>
-                <a:latin typeface="NanumGothic"/>
-                <a:ea typeface="NanumGothic"/>
-              </a:rPr>
-              <a:t>야간 신경병증통</a:t>
-            </a:r>
-          </a:p>
-        </p:txBody>
-      </p:sp>
-      <p:sp>
-        <p:nvSpPr>
-          <p:cNvPr id="8" name="TextBox 7"/>
-          <p:cNvSpPr txBox="1"/>
-          <p:nvPr/>
-        </p:nvSpPr>
-        <p:spPr>
-          <a:xfrm>
-            <a:off x="731520" y="1371600"/>
-            <a:ext cx="6400800" cy="4663440"/>
-          </a:xfrm>
-          <a:prstGeom prst="rect">
-            <a:avLst/>
-          </a:prstGeom>
-          <a:noFill/>
-        </p:spPr>
-        <p:txBody>
-          <a:bodyPr wrap="square" lIns="0" rIns="0" tIns="0" bIns="0">
-            <a:spAutoFit/>
-          </a:bodyPr>
-          <a:lstStyle/>
-          <a:p>
-            <a:pPr algn="l">
-              <a:lnSpc>
-                <a:spcPct val="108000"/>
-              </a:lnSpc>
-              <a:spcAft>
-                <a:spcPts val="800"/>
-              </a:spcAft>
-            </a:pPr>
-            <a:r>
-              <a:rPr sz="979" b="1" i="0">
-                <a:solidFill>
-                  <a:srgbClr val="2C898A"/>
-                </a:solidFill>
-                <a:latin typeface="NanumGothic"/>
-                <a:ea typeface="NanumGothic"/>
-              </a:rPr>
-              <a:t>●  </a:t>
-            </a:r>
-            <a:r>
-              <a:rPr sz="1400" b="1" i="0">
-                <a:solidFill>
-                  <a:srgbClr val="1A202C"/>
-                </a:solidFill>
-                <a:latin typeface="NanumGothic"/>
-                <a:ea typeface="NanumGothic"/>
-              </a:rPr>
-              <a:t>임상상: 당뇨병성 말초신경병증 — 발·종아리 저림·화끈거림·전기 찌름, 양측 ‘양말’ 분포.</a:t>
-            </a:r>
-          </a:p>
-          <a:p>
-            <a:pPr algn="l">
-              <a:lnSpc>
-                <a:spcPct val="108000"/>
-              </a:lnSpc>
-              <a:spcAft>
-                <a:spcPts val="800"/>
-              </a:spcAft>
-            </a:pPr>
-            <a:r>
-              <a:rPr sz="979" b="1" i="0">
-                <a:solidFill>
-                  <a:srgbClr val="2C898A"/>
-                </a:solidFill>
-                <a:latin typeface="NanumGothic"/>
-                <a:ea typeface="NanumGothic"/>
-              </a:rPr>
-              <a:t>●  </a:t>
-            </a:r>
-            <a:r>
-              <a:rPr sz="1400" b="0" i="0">
-                <a:solidFill>
-                  <a:srgbClr val="1A202C"/>
-                </a:solidFill>
-                <a:latin typeface="NanumGothic"/>
-                <a:ea typeface="NanumGothic"/>
-              </a:rPr>
-              <a:t>야간통: 이불 온기·야간 순환·주의분산 소실 → 밤에 증폭·수면 방해.</a:t>
-            </a:r>
-          </a:p>
-          <a:p>
-            <a:pPr algn="l">
-              <a:lnSpc>
-                <a:spcPct val="108000"/>
-              </a:lnSpc>
-              <a:spcAft>
-                <a:spcPts val="800"/>
-              </a:spcAft>
-            </a:pPr>
-            <a:r>
-              <a:rPr sz="979" b="1" i="0">
-                <a:solidFill>
-                  <a:srgbClr val="2C898A"/>
-                </a:solidFill>
-                <a:latin typeface="NanumGothic"/>
-                <a:ea typeface="NanumGothic"/>
-              </a:rPr>
-              <a:t>●  </a:t>
-            </a:r>
-            <a:r>
-              <a:rPr sz="1400" b="0" i="0">
-                <a:solidFill>
-                  <a:srgbClr val="1A202C"/>
-                </a:solidFill>
-                <a:latin typeface="NanumGothic"/>
-                <a:ea typeface="NanumGothic"/>
-              </a:rPr>
-              <a:t>먼저 감별: RLS(움직이면 완화)·NLC(경련)·허혈성 안정통과 구분.</a:t>
-            </a:r>
-          </a:p>
-          <a:p>
-            <a:pPr algn="l">
-              <a:lnSpc>
-                <a:spcPct val="108000"/>
-              </a:lnSpc>
-              <a:spcAft>
-                <a:spcPts val="800"/>
-              </a:spcAft>
-            </a:pPr>
-            <a:r>
-              <a:rPr sz="1400" b="1" i="0">
-                <a:solidFill>
-                  <a:srgbClr val="5A6B7B"/>
-                </a:solidFill>
-                <a:latin typeface="NanumGothic"/>
-                <a:ea typeface="NanumGothic"/>
-              </a:rPr>
-              <a:t/>
-            </a:r>
-            <a:r>
-              <a:rPr sz="1400" b="1" i="0">
-                <a:solidFill>
-                  <a:srgbClr val="1F6E70"/>
-                </a:solidFill>
-                <a:latin typeface="NanumGothic"/>
-                <a:ea typeface="NanumGothic"/>
-              </a:rPr>
-              <a:t>1차: 혈당조절+약물(가바펜틴·듀록세틴) → 난치성이면 LSB 고려</a:t>
-            </a:r>
-          </a:p>
-        </p:txBody>
-      </p:sp>
-      <p:sp>
-        <p:nvSpPr>
-          <p:cNvPr id="9" name="Rounded Rectangle 8"/>
-          <p:cNvSpPr/>
-          <p:nvPr/>
-        </p:nvSpPr>
-        <p:spPr>
-          <a:xfrm>
-            <a:off x="7406640" y="1463040"/>
-            <a:ext cx="4114800" cy="4480560"/>
-          </a:xfrm>
-          <a:prstGeom prst="roundRect">
-            <a:avLst>
-              <a:gd name="adj" fmla="val 8000"/>
-            </a:avLst>
-          </a:prstGeom>
-          <a:solidFill>
-            <a:srgbClr val="1B355E"/>
-          </a:solidFill>
-          <a:ln>
-            <a:noFill/>
-          </a:ln>
-          <a:effectLst/>
-        </p:spPr>
-        <p:style>
-          <a:lnRef idx="1">
-            <a:schemeClr val="accent1"/>
-          </a:lnRef>
-          <a:fillRef idx="3">
-            <a:schemeClr val="accent1"/>
-          </a:fillRef>
-          <a:effectRef idx="2">
-            <a:schemeClr val="accent1"/>
-          </a:effectRef>
-          <a:fontRef idx="minor">
-            <a:schemeClr val="lt1"/>
-          </a:fontRef>
-        </p:style>
-        <p:txBody>
-          <a:bodyPr rtlCol="0" anchor="ctr"/>
-          <a:lstStyle/>
-          <a:p>
-            <a:pPr algn="ctr"/>
-          </a:p>
-        </p:txBody>
-      </p:sp>
-      <p:sp>
-        <p:nvSpPr>
-          <p:cNvPr id="10" name="TextBox 9"/>
-          <p:cNvSpPr txBox="1"/>
-          <p:nvPr/>
-        </p:nvSpPr>
-        <p:spPr>
-          <a:xfrm>
-            <a:off x="7680960" y="1691640"/>
-            <a:ext cx="3657600" cy="365760"/>
-          </a:xfrm>
-          <a:prstGeom prst="rect">
-            <a:avLst/>
-          </a:prstGeom>
-          <a:noFill/>
-        </p:spPr>
-        <p:txBody>
-          <a:bodyPr wrap="square" anchor="t" lIns="0" rIns="0" tIns="0" bIns="0">
-            <a:spAutoFit/>
-          </a:bodyPr>
-          <a:lstStyle/>
-          <a:p>
-            <a:pPr algn="l">
-              <a:lnSpc>
-                <a:spcPct val="108000"/>
-              </a:lnSpc>
-              <a:spcAft>
-                <a:spcPts val="400"/>
-              </a:spcAft>
-            </a:pPr>
-            <a:r>
-              <a:rPr sz="1300" b="1" i="0">
-                <a:solidFill>
-                  <a:srgbClr val="BFD3E6"/>
-                </a:solidFill>
-                <a:latin typeface="NanumGothic"/>
-                <a:ea typeface="NanumGothic"/>
-              </a:rPr>
-              <a:t>LSB — 치료 삽입</a:t>
-            </a:r>
-          </a:p>
-        </p:txBody>
-      </p:sp>
-      <p:sp>
-        <p:nvSpPr>
-          <p:cNvPr id="11" name="TextBox 10"/>
-          <p:cNvSpPr txBox="1"/>
-          <p:nvPr/>
-        </p:nvSpPr>
-        <p:spPr>
-          <a:xfrm>
-            <a:off x="7680960" y="2194560"/>
-            <a:ext cx="3611880" cy="3657600"/>
-          </a:xfrm>
-          <a:prstGeom prst="rect">
-            <a:avLst/>
-          </a:prstGeom>
-          <a:noFill/>
-        </p:spPr>
-        <p:txBody>
-          <a:bodyPr wrap="square" lIns="0" rIns="0" tIns="0" bIns="0">
-            <a:spAutoFit/>
-          </a:bodyPr>
-          <a:lstStyle/>
-          <a:p>
-            <a:pPr algn="l">
-              <a:lnSpc>
-                <a:spcPct val="108000"/>
-              </a:lnSpc>
-              <a:spcAft>
-                <a:spcPts val="800"/>
-              </a:spcAft>
-            </a:pPr>
-            <a:r>
-              <a:rPr sz="875" b="1" i="0">
-                <a:solidFill>
-                  <a:srgbClr val="2C898A"/>
-                </a:solidFill>
-                <a:latin typeface="NanumGothic"/>
-                <a:ea typeface="NanumGothic"/>
-              </a:rPr>
-              <a:t>●  </a:t>
-            </a:r>
-            <a:r>
-              <a:rPr sz="1250" b="0" i="0">
-                <a:solidFill>
-                  <a:srgbClr val="FFFFFF"/>
-                </a:solidFill>
-                <a:latin typeface="NanumGothic"/>
-                <a:ea typeface="NanumGothic"/>
-              </a:rPr>
-              <a:t>기전: 교감차단 → 미세순환↑ + 교감매개통 차단</a:t>
-            </a:r>
-          </a:p>
-          <a:p>
-            <a:pPr algn="l">
-              <a:lnSpc>
-                <a:spcPct val="108000"/>
-              </a:lnSpc>
-              <a:spcAft>
-                <a:spcPts val="800"/>
-              </a:spcAft>
-            </a:pPr>
-            <a:r>
-              <a:rPr sz="875" b="1" i="0">
-                <a:solidFill>
-                  <a:srgbClr val="2C898A"/>
-                </a:solidFill>
-                <a:latin typeface="NanumGothic"/>
-                <a:ea typeface="NanumGothic"/>
-              </a:rPr>
-              <a:t>●  </a:t>
-            </a:r>
-            <a:r>
-              <a:rPr sz="1250" b="0" i="0">
-                <a:solidFill>
-                  <a:srgbClr val="FFFFFF"/>
-                </a:solidFill>
-                <a:latin typeface="NanumGothic"/>
-                <a:ea typeface="NanumGothic"/>
-              </a:rPr>
-              <a:t>근거: 난치성 DPN에 LSB+신경파괴 RCT·증례</a:t>
-            </a:r>
-          </a:p>
-          <a:p>
-            <a:pPr algn="l">
-              <a:lnSpc>
-                <a:spcPct val="108000"/>
-              </a:lnSpc>
-              <a:spcAft>
-                <a:spcPts val="800"/>
-              </a:spcAft>
-            </a:pPr>
-            <a:r>
-              <a:rPr sz="875" b="1" i="0">
-                <a:solidFill>
-                  <a:srgbClr val="2C898A"/>
-                </a:solidFill>
-                <a:latin typeface="NanumGothic"/>
-                <a:ea typeface="NanumGothic"/>
-              </a:rPr>
-              <a:t>●  </a:t>
-            </a:r>
-            <a:r>
-              <a:rPr sz="1250" b="0" i="0">
-                <a:solidFill>
-                  <a:srgbClr val="FFFFFF"/>
-                </a:solidFill>
-                <a:latin typeface="NanumGothic"/>
-                <a:ea typeface="NanumGothic"/>
-              </a:rPr>
-              <a:t>적용: 약물 불응·진단차단 양성 시 선택적 시행</a:t>
-            </a:r>
-          </a:p>
-          <a:p>
-            <a:pPr algn="l">
-              <a:lnSpc>
-                <a:spcPct val="108000"/>
-              </a:lnSpc>
-              <a:spcAft>
-                <a:spcPts val="800"/>
-              </a:spcAft>
-            </a:pPr>
-            <a:r>
-              <a:rPr sz="875" b="1" i="0">
-                <a:solidFill>
-                  <a:srgbClr val="2C898A"/>
-                </a:solidFill>
-                <a:latin typeface="NanumGothic"/>
-                <a:ea typeface="NanumGothic"/>
-              </a:rPr>
-              <a:t>●  </a:t>
-            </a:r>
-            <a:r>
-              <a:rPr sz="1250" b="0" i="0">
-                <a:solidFill>
-                  <a:srgbClr val="FFFFFF"/>
-                </a:solidFill>
-                <a:latin typeface="NanumGothic"/>
-                <a:ea typeface="NanumGothic"/>
-              </a:rPr>
-              <a:t>성공지표: 피부온도 ≥2°C↑ (근거 제한적)</a:t>
-            </a:r>
-          </a:p>
-        </p:txBody>
-      </p:sp>
-      <p:sp>
-        <p:nvSpPr>
-          <p:cNvPr id="12" name="TextBox 11"/>
-          <p:cNvSpPr txBox="1"/>
-          <p:nvPr/>
-        </p:nvSpPr>
-        <p:spPr>
-          <a:xfrm>
-            <a:off x="731520" y="6455664"/>
-            <a:ext cx="9875520" cy="292608"/>
-          </a:xfrm>
-          <a:prstGeom prst="rect">
-            <a:avLst/>
-          </a:prstGeom>
-          <a:noFill/>
-        </p:spPr>
-        <p:txBody>
-          <a:bodyPr wrap="square" anchor="ctr" lIns="0" rIns="0" tIns="0" bIns="0">
-            <a:spAutoFit/>
-          </a:bodyPr>
-          <a:lstStyle/>
-          <a:p>
-            <a:pPr algn="l">
-              <a:lnSpc>
-                <a:spcPct val="108000"/>
-              </a:lnSpc>
-              <a:spcAft>
-                <a:spcPts val="400"/>
-              </a:spcAft>
-            </a:pPr>
-            <a:r>
-              <a:rPr sz="900" b="0" i="0">
-                <a:solidFill>
-                  <a:srgbClr val="5A6B7B"/>
-                </a:solidFill>
-                <a:latin typeface="NanumGothic"/>
-                <a:ea typeface="NanumGothic"/>
-              </a:rPr>
-              <a:t>근거: Zhang 2020(RCT) PMID 32915421; 증례 PMID 22606406; StatPearls NBK442009</a:t>
-            </a:r>
-          </a:p>
-        </p:txBody>
-      </p:sp>
-      <p:sp>
-        <p:nvSpPr>
-          <p:cNvPr id="13" name="TextBox 12"/>
-          <p:cNvSpPr txBox="1"/>
-          <p:nvPr/>
-        </p:nvSpPr>
-        <p:spPr>
-          <a:xfrm>
-            <a:off x="11064240" y="6455664"/>
-            <a:ext cx="822960" cy="292608"/>
-          </a:xfrm>
-          <a:prstGeom prst="rect">
-            <a:avLst/>
-          </a:prstGeom>
-          <a:noFill/>
-        </p:spPr>
-        <p:txBody>
-          <a:bodyPr wrap="square" anchor="ctr" lIns="0" rIns="0" tIns="0" bIns="0">
-            <a:spAutoFit/>
-          </a:bodyPr>
-          <a:lstStyle/>
-          <a:p>
-            <a:pPr algn="r">
-              <a:lnSpc>
-                <a:spcPct val="108000"/>
-              </a:lnSpc>
-              <a:spcAft>
-                <a:spcPts val="400"/>
-              </a:spcAft>
-            </a:pPr>
-            <a:r>
-              <a:rPr sz="1000" b="1" i="0">
-                <a:solidFill>
-                  <a:srgbClr val="5A6B7B"/>
-                </a:solidFill>
-                <a:latin typeface="NanumGothic"/>
-                <a:ea typeface="NanumGothic"/>
-              </a:rPr>
               <a:t>8</a:t>
             </a:r>
           </a:p>
@@ -11564,7 +13682,7 @@
                 <a:latin typeface="NanumGothic"/>
                 <a:ea typeface="NanumGothic"/>
               </a:rPr>
-              <a:t>효과 (1) 관류 개선 · 허혈성 통증</a:t>
+              <a:t>적응증별 환자 증상·호소 ① — 통증증후군·허혈</a:t>
             </a:r>
           </a:p>
         </p:txBody>
@@ -11607,7 +13725,7 @@
                 <a:latin typeface="NanumGothic"/>
                 <a:ea typeface="NanumGothic"/>
               </a:rPr>
-              <a:t>효과</a:t>
+              <a:t>적응증 · 증상</a:t>
             </a:r>
           </a:p>
         </p:txBody>
@@ -11664,8 +13782,8 @@
         </p:nvSpPr>
         <p:spPr>
           <a:xfrm>
-            <a:off x="10426903" y="365760"/>
-            <a:ext cx="1261872" cy="347472"/>
+            <a:off x="10865816" y="365760"/>
+            <a:ext cx="822959" cy="347472"/>
           </a:xfrm>
           <a:prstGeom prst="roundRect">
             <a:avLst>
@@ -11673,7 +13791,7 @@
             </a:avLst>
           </a:prstGeom>
           <a:solidFill>
-            <a:srgbClr val="B97A0C"/>
+            <a:srgbClr val="2C898A"/>
           </a:solidFill>
           <a:ln>
             <a:noFill/>
@@ -11710,8 +13828,8 @@
         </p:nvSpPr>
         <p:spPr>
           <a:xfrm>
-            <a:off x="10426903" y="365760"/>
-            <a:ext cx="1261872" cy="347472"/>
+            <a:off x="10865816" y="365760"/>
+            <a:ext cx="822959" cy="347472"/>
           </a:xfrm>
           <a:prstGeom prst="rect">
             <a:avLst/>
@@ -11740,7 +13858,7 @@
                 <a:latin typeface="NanumGothic"/>
                 <a:ea typeface="NanumGothic"/>
               </a:rPr>
-              <a:t>Lv III–IV</a:t>
+              <a:t>환자 증상</a:t>
             </a:r>
           </a:p>
         </p:txBody>
@@ -11754,7 +13872,7 @@
         <p:spPr>
           <a:xfrm>
             <a:off x="731520" y="1371600"/>
-            <a:ext cx="6400800" cy="4663440"/>
+            <a:ext cx="10835640" cy="4754880"/>
           </a:xfrm>
           <a:prstGeom prst="rect">
             <a:avLst/>
@@ -11772,7 +13890,7 @@
                 <a:spcPct val="108000"/>
               </a:lnSpc>
               <a:spcAft>
-                <a:spcPts val="800"/>
+                <a:spcPts val="600"/>
               </a:spcAft>
             </a:pPr>
             <a:r>
@@ -11793,7 +13911,7 @@
                 <a:latin typeface="NanumGothic"/>
                 <a:ea typeface="NanumGothic"/>
               </a:rPr>
-              <a:t>관류 실측(Dickey 2024): LSB 후 후경골동맥 직경 0.17→0.27 cm(+58.8%), 모세혈관 재충혈 3.92→1.30초, 족부온도 +2.8°C.</a:t>
+              <a:t>하지 CRPS I/II (복합부위통증증후군) — 교감신경 매개 통증의 전형</a:t>
             </a:r>
           </a:p>
           <a:p>
@@ -11802,7 +13920,67 @@
                 <a:spcPct val="108000"/>
               </a:lnSpc>
               <a:spcAft>
-                <a:spcPts val="800"/>
+                <a:spcPts val="600"/>
+              </a:spcAft>
+            </a:pPr>
+            <a:r>
+              <a:rPr sz="1400" b="1" i="0">
+                <a:solidFill>
+                  <a:srgbClr val="5A6B7B"/>
+                </a:solidFill>
+                <a:latin typeface="NanumGothic"/>
+                <a:ea typeface="NanumGothic"/>
+              </a:rPr>
+              <a:t>      –  </a:t>
+            </a:r>
+            <a:r>
+              <a:rPr sz="1400" b="0" i="0">
+                <a:solidFill>
+                  <a:srgbClr val="1A202C"/>
+                </a:solidFill>
+                <a:latin typeface="NanumGothic"/>
+                <a:ea typeface="NanumGothic"/>
+              </a:rPr>
+              <a:t>작열통·이질통(옷·바람 스침에도 통증)·통각과민 · 부종 · 피부색(발적↔창백)·좌우 온도차 · 발한 이상</a:t>
+            </a:r>
+          </a:p>
+          <a:p>
+            <a:pPr algn="l">
+              <a:lnSpc>
+                <a:spcPct val="108000"/>
+              </a:lnSpc>
+              <a:spcAft>
+                <a:spcPts val="600"/>
+              </a:spcAft>
+            </a:pPr>
+            <a:r>
+              <a:rPr sz="1400" b="1" i="0">
+                <a:solidFill>
+                  <a:srgbClr val="5A6B7B"/>
+                </a:solidFill>
+                <a:latin typeface="NanumGothic"/>
+                <a:ea typeface="NanumGothic"/>
+              </a:rPr>
+              <a:t>      –  </a:t>
+            </a:r>
+            <a:r>
+              <a:rPr sz="1400" b="0" i="0">
+                <a:solidFill>
+                  <a:srgbClr val="5A6B7B"/>
+                </a:solidFill>
+                <a:latin typeface="NanumGothic"/>
+                <a:ea typeface="NanumGothic"/>
+              </a:rPr>
+              <a:t>호소: “발이 타는 듯 화끈거려요” · “이불만 스쳐도 아파요” · “붓고 색이 자꾸 변해요”</a:t>
+            </a:r>
+          </a:p>
+          <a:p>
+            <a:pPr algn="l">
+              <a:lnSpc>
+                <a:spcPct val="108000"/>
+              </a:lnSpc>
+              <a:spcAft>
+                <a:spcPts val="600"/>
               </a:spcAft>
             </a:pPr>
             <a:r>
@@ -11816,14 +13994,44 @@
               <a:t>●  </a:t>
             </a:r>
             <a:r>
+              <a:rPr sz="1400" b="1" i="0">
+                <a:solidFill>
+                  <a:srgbClr val="2E7D32"/>
+                </a:solidFill>
+                <a:latin typeface="NanumGothic"/>
+                <a:ea typeface="NanumGothic"/>
+              </a:rPr>
+              <a:t>허혈질환 — PAD·중증 하지허혈(CLI)·버거병 (동맥성 허혈)</a:t>
+            </a:r>
+          </a:p>
+          <a:p>
+            <a:pPr algn="l">
+              <a:lnSpc>
+                <a:spcPct val="108000"/>
+              </a:lnSpc>
+              <a:spcAft>
+                <a:spcPts val="600"/>
+              </a:spcAft>
+            </a:pPr>
+            <a:r>
+              <a:rPr sz="1400" b="1" i="0">
+                <a:solidFill>
+                  <a:srgbClr val="5A6B7B"/>
+                </a:solidFill>
+                <a:latin typeface="NanumGothic"/>
+                <a:ea typeface="NanumGothic"/>
+              </a:rPr>
+              <a:t>      –  </a:t>
+            </a:r>
+            <a:r>
               <a:rPr sz="1400" b="0" i="0">
                 <a:solidFill>
-                  <a:srgbClr val="2E7D32"/>
-                </a:solidFill>
-                <a:latin typeface="NanumGothic"/>
-                <a:ea typeface="NanumGothic"/>
-              </a:rPr>
-              <a:t>허혈성 통증(PAD): 하지 통증 최대 75%↓, Fontaine 분류·측부관류 개선(Medicina 2024).</a:t>
+                  <a:srgbClr val="1A202C"/>
+                </a:solidFill>
+                <a:latin typeface="NanumGothic"/>
+                <a:ea typeface="NanumGothic"/>
+              </a:rPr>
+              <a:t>간헐적 파행(걷다 종아리 통증→쉬면 완화) → 진행 시 야간 안정통(다리 내리면 완화) · 차고 창백한 발 · 비치유 궤양·괴저</a:t>
             </a:r>
           </a:p>
           <a:p>
@@ -11832,267 +14040,65 @@
                 <a:spcPct val="108000"/>
               </a:lnSpc>
               <a:spcAft>
-                <a:spcPts val="800"/>
-              </a:spcAft>
-            </a:pPr>
-            <a:r>
-              <a:rPr sz="979" b="1" i="0">
-                <a:solidFill>
-                  <a:srgbClr val="2C898A"/>
-                </a:solidFill>
-                <a:latin typeface="NanumGothic"/>
-                <a:ea typeface="NanumGothic"/>
-              </a:rPr>
-              <a:t>●  </a:t>
+                <a:spcPts val="600"/>
+              </a:spcAft>
+            </a:pPr>
+            <a:r>
+              <a:rPr sz="1400" b="1" i="0">
+                <a:solidFill>
+                  <a:srgbClr val="5A6B7B"/>
+                </a:solidFill>
+                <a:latin typeface="NanumGothic"/>
+                <a:ea typeface="NanumGothic"/>
+              </a:rPr>
+              <a:t>      –  </a:t>
             </a:r>
             <a:r>
               <a:rPr sz="1400" b="0" i="0">
                 <a:solidFill>
-                  <a:srgbClr val="1A202C"/>
-                </a:solidFill>
-                <a:latin typeface="NanumGothic"/>
-                <a:ea typeface="NanumGothic"/>
-              </a:rPr>
-              <a:t>비재건성 CLI: 교감신경 신경파괴가 절단 외 대안이 없는 환자의 통증조절에 효과적·안전(Barreto 2018).</a:t>
-            </a:r>
-          </a:p>
-        </p:txBody>
-      </p:sp>
-      <p:sp>
-        <p:nvSpPr>
-          <p:cNvPr id="9" name="Rounded Rectangle 8"/>
-          <p:cNvSpPr/>
-          <p:nvPr/>
-        </p:nvSpPr>
-        <p:spPr>
-          <a:xfrm>
-            <a:off x="7406640" y="1463040"/>
-            <a:ext cx="4114800" cy="4480560"/>
-          </a:xfrm>
-          <a:prstGeom prst="roundRect">
-            <a:avLst>
-              <a:gd name="adj" fmla="val 8000"/>
-            </a:avLst>
-          </a:prstGeom>
-          <a:solidFill>
-            <a:srgbClr val="1B355E"/>
-          </a:solidFill>
-          <a:ln>
-            <a:noFill/>
-          </a:ln>
-          <a:effectLst/>
-        </p:spPr>
-        <p:style>
-          <a:lnRef idx="1">
-            <a:schemeClr val="accent1"/>
-          </a:lnRef>
-          <a:fillRef idx="3">
-            <a:schemeClr val="accent1"/>
-          </a:fillRef>
-          <a:effectRef idx="2">
-            <a:schemeClr val="accent1"/>
-          </a:effectRef>
-          <a:fontRef idx="minor">
-            <a:schemeClr val="lt1"/>
-          </a:fontRef>
-        </p:style>
-        <p:txBody>
-          <a:bodyPr rtlCol="0" anchor="ctr"/>
-          <a:lstStyle/>
-          <a:p>
-            <a:pPr algn="ctr"/>
-          </a:p>
-        </p:txBody>
-      </p:sp>
-      <p:sp>
-        <p:nvSpPr>
-          <p:cNvPr id="10" name="TextBox 9"/>
-          <p:cNvSpPr txBox="1"/>
-          <p:nvPr/>
-        </p:nvSpPr>
-        <p:spPr>
-          <a:xfrm>
-            <a:off x="7680960" y="1691640"/>
-            <a:ext cx="3657600" cy="365760"/>
-          </a:xfrm>
-          <a:prstGeom prst="rect">
-            <a:avLst/>
-          </a:prstGeom>
-          <a:noFill/>
-        </p:spPr>
-        <p:txBody>
-          <a:bodyPr wrap="square" anchor="t" lIns="0" rIns="0" tIns="0" bIns="0">
-            <a:spAutoFit/>
-          </a:bodyPr>
-          <a:lstStyle/>
+                  <a:srgbClr val="5A6B7B"/>
+                </a:solidFill>
+                <a:latin typeface="NanumGothic"/>
+                <a:ea typeface="NanumGothic"/>
+              </a:rPr>
+              <a:t>호소: “걸으면 종아리가 터질 듯 아파요” · “밤에 발이 시려 잠을 못 자요” · “상처가 안 아물어요”</a:t>
+            </a:r>
+          </a:p>
           <a:p>
             <a:pPr algn="l">
               <a:lnSpc>
                 <a:spcPct val="108000"/>
               </a:lnSpc>
               <a:spcAft>
-                <a:spcPts val="400"/>
-              </a:spcAft>
-            </a:pPr>
-            <a:r>
-              <a:rPr sz="1300" b="1" i="0">
-                <a:solidFill>
-                  <a:srgbClr val="BFD3E6"/>
-                </a:solidFill>
-                <a:latin typeface="NanumGothic"/>
-                <a:ea typeface="NanumGothic"/>
-              </a:rPr>
-              <a:t>실측 수치(Dickey 2024)</a:t>
-            </a:r>
-          </a:p>
-        </p:txBody>
-      </p:sp>
-      <p:sp>
-        <p:nvSpPr>
-          <p:cNvPr id="11" name="TextBox 10"/>
-          <p:cNvSpPr txBox="1"/>
-          <p:nvPr/>
-        </p:nvSpPr>
-        <p:spPr>
-          <a:xfrm>
-            <a:off x="7680960" y="2194560"/>
-            <a:ext cx="3611880" cy="3657600"/>
-          </a:xfrm>
-          <a:prstGeom prst="rect">
-            <a:avLst/>
-          </a:prstGeom>
-          <a:noFill/>
-        </p:spPr>
-        <p:txBody>
-          <a:bodyPr wrap="square" lIns="0" rIns="0" tIns="0" bIns="0">
-            <a:spAutoFit/>
-          </a:bodyPr>
-          <a:lstStyle/>
-          <a:p>
-            <a:pPr algn="l">
-              <a:lnSpc>
-                <a:spcPct val="108000"/>
-              </a:lnSpc>
-              <a:spcAft>
-                <a:spcPts val="800"/>
-              </a:spcAft>
-            </a:pPr>
-            <a:r>
-              <a:rPr sz="875" b="1" i="0">
-                <a:solidFill>
-                  <a:srgbClr val="2C898A"/>
-                </a:solidFill>
-                <a:latin typeface="NanumGothic"/>
-                <a:ea typeface="NanumGothic"/>
-              </a:rPr>
-              <a:t>●  </a:t>
-            </a:r>
-            <a:r>
-              <a:rPr sz="1250" b="1" i="0">
-                <a:solidFill>
-                  <a:srgbClr val="9FE0D8"/>
-                </a:solidFill>
-                <a:latin typeface="NanumGothic"/>
-                <a:ea typeface="NanumGothic"/>
-              </a:rPr>
-              <a:t>후경골동맥 +58.8%</a:t>
-            </a:r>
-          </a:p>
-          <a:p>
-            <a:pPr algn="l">
-              <a:lnSpc>
-                <a:spcPct val="108000"/>
-              </a:lnSpc>
-              <a:spcAft>
-                <a:spcPts val="800"/>
-              </a:spcAft>
-            </a:pPr>
-            <a:r>
-              <a:rPr sz="875" b="1" i="0">
-                <a:solidFill>
-                  <a:srgbClr val="2C898A"/>
-                </a:solidFill>
-                <a:latin typeface="NanumGothic"/>
-                <a:ea typeface="NanumGothic"/>
-              </a:rPr>
-              <a:t>●  </a:t>
-            </a:r>
-            <a:r>
-              <a:rPr sz="1250" b="0" i="0">
-                <a:solidFill>
-                  <a:srgbClr val="FFFFFF"/>
-                </a:solidFill>
-                <a:latin typeface="NanumGothic"/>
-                <a:ea typeface="NanumGothic"/>
-              </a:rPr>
-              <a:t>모세혈관 재충혈 3.92→1.30초</a:t>
-            </a:r>
-          </a:p>
-          <a:p>
-            <a:pPr algn="l">
-              <a:lnSpc>
-                <a:spcPct val="108000"/>
-              </a:lnSpc>
-              <a:spcAft>
-                <a:spcPts val="800"/>
-              </a:spcAft>
-            </a:pPr>
-            <a:r>
-              <a:rPr sz="875" b="1" i="0">
-                <a:solidFill>
-                  <a:srgbClr val="2C898A"/>
-                </a:solidFill>
-                <a:latin typeface="NanumGothic"/>
-                <a:ea typeface="NanumGothic"/>
-              </a:rPr>
-              <a:t>●  </a:t>
-            </a:r>
-            <a:r>
-              <a:rPr sz="1250" b="0" i="0">
-                <a:solidFill>
-                  <a:srgbClr val="FFFFFF"/>
-                </a:solidFill>
-                <a:latin typeface="NanumGothic"/>
-                <a:ea typeface="NanumGothic"/>
-              </a:rPr>
-              <a:t>족부온도 +2.8°C</a:t>
-            </a:r>
-          </a:p>
-          <a:p>
-            <a:pPr algn="l">
-              <a:lnSpc>
-                <a:spcPct val="108000"/>
-              </a:lnSpc>
-              <a:spcAft>
-                <a:spcPts val="800"/>
-              </a:spcAft>
-            </a:pPr>
-            <a:r>
-              <a:rPr sz="875" b="1" i="0">
-                <a:solidFill>
-                  <a:srgbClr val="2C898A"/>
-                </a:solidFill>
-                <a:latin typeface="NanumGothic"/>
-                <a:ea typeface="NanumGothic"/>
-              </a:rPr>
-              <a:t>●  </a:t>
-            </a:r>
-            <a:r>
-              <a:rPr sz="1250" b="1" i="0">
-                <a:solidFill>
-                  <a:srgbClr val="9FE0D8"/>
-                </a:solidFill>
-                <a:latin typeface="NanumGothic"/>
-                <a:ea typeface="NanumGothic"/>
-              </a:rPr>
-              <a:t>→ 관류 개선의 객관 근거</a:t>
-            </a:r>
-          </a:p>
-        </p:txBody>
-      </p:sp>
-      <p:sp>
-        <p:nvSpPr>
-          <p:cNvPr id="12" name="TextBox 11"/>
+                <a:spcPts val="600"/>
+              </a:spcAft>
+            </a:pPr>
+            <a:r>
+              <a:rPr sz="1400" b="1" i="0">
+                <a:solidFill>
+                  <a:srgbClr val="5A6B7B"/>
+                </a:solidFill>
+                <a:latin typeface="NanumGothic"/>
+                <a:ea typeface="NanumGothic"/>
+              </a:rPr>
+              <a:t/>
+            </a:r>
+            <a:r>
+              <a:rPr sz="1400" b="1" i="0">
+                <a:solidFill>
+                  <a:srgbClr val="1F6E70"/>
+                </a:solidFill>
+                <a:latin typeface="NanumGothic"/>
+                <a:ea typeface="NanumGothic"/>
+              </a:rPr>
+              <a:t>‘허혈’은 동맥성 부족을 의미 — 하지정맥류 등 정맥질환은 LSB 적응증 아님(압박·정맥폐색술이 표준).</a:t>
+            </a:r>
+          </a:p>
+        </p:txBody>
+      </p:sp>
+      <p:sp>
+        <p:nvSpPr>
+          <p:cNvPr id="9" name="TextBox 8"/>
           <p:cNvSpPr txBox="1"/>
           <p:nvPr/>
         </p:nvSpPr>
@@ -12128,14 +14134,14 @@
                 <a:latin typeface="NanumGothic"/>
                 <a:ea typeface="NanumGothic"/>
               </a:rPr>
-              <a:t>근거: Dickey 2024(Cureus); Medicina 2024; Barreto 2018</a:t>
-            </a:r>
-          </a:p>
-        </p:txBody>
-      </p:sp>
-      <p:sp>
-        <p:nvSpPr>
-          <p:cNvPr id="13" name="TextBox 12"/>
+              <a:t>근거: StatPearls; 문헌고찰 종합</a:t>
+            </a:r>
+          </a:p>
+        </p:txBody>
+      </p:sp>
+      <p:sp>
+        <p:nvSpPr>
+          <p:cNvPr id="10" name="TextBox 9"/>
           <p:cNvSpPr txBox="1"/>
           <p:nvPr/>
         </p:nvSpPr>

--- a/문헌고찰_NLC_RLS_LSB/03_LSB/LSB_발표.pptx
+++ b/문헌고찰_NLC_RLS_LSB/03_LSB/LSB_발표.pptx
@@ -22,6 +22,10 @@
     <p:sldId id="270" r:id="rId21"/>
     <p:sldId id="271" r:id="rId22"/>
     <p:sldId id="272" r:id="rId23"/>
+    <p:sldId id="273" r:id="rId24"/>
+    <p:sldId id="274" r:id="rId25"/>
+    <p:sldId id="275" r:id="rId26"/>
+    <p:sldId id="276" r:id="rId27"/>
   </p:sldIdLst>
   <p:sldSz cx="12191695" cy="6858000" type="screen4x3"/>
   <p:notesSz cx="6858000" cy="9144000"/>
@@ -3615,7 +3619,7 @@
                 <a:latin typeface="NanumGothic"/>
                 <a:ea typeface="NanumGothic"/>
               </a:rPr>
-              <a:t>적응증별 환자 증상·호소 ② — 신경병증·기타</a:t>
+              <a:t>혈관·LAST·신경 손상 — 조기 인지와 대응</a:t>
             </a:r>
           </a:p>
         </p:txBody>
@@ -3658,7 +3662,7 @@
                 <a:latin typeface="NanumGothic"/>
                 <a:ea typeface="NanumGothic"/>
               </a:rPr>
-              <a:t>적응증 · 증상</a:t>
+              <a:t>합병증 · 대응</a:t>
             </a:r>
           </a:p>
         </p:txBody>
@@ -3724,7 +3728,7 @@
             </a:avLst>
           </a:prstGeom>
           <a:solidFill>
-            <a:srgbClr val="2C898A"/>
+            <a:srgbClr val="B03A2E"/>
           </a:solidFill>
           <a:ln>
             <a:noFill/>
@@ -3791,7 +3795,7 @@
                 <a:latin typeface="NanumGothic"/>
                 <a:ea typeface="NanumGothic"/>
               </a:rPr>
-              <a:t>환자 증상</a:t>
+              <a:t>인지·구조</a:t>
             </a:r>
           </a:p>
         </p:txBody>
@@ -3823,7 +3827,7 @@
                 <a:spcPct val="108000"/>
               </a:lnSpc>
               <a:spcAft>
-                <a:spcPts val="600"/>
+                <a:spcPts val="800"/>
               </a:spcAft>
             </a:pPr>
             <a:r>
@@ -3839,12 +3843,42 @@
             <a:r>
               <a:rPr sz="1400" b="1" i="0">
                 <a:solidFill>
+                  <a:srgbClr val="B03A2E"/>
+                </a:solidFill>
+                <a:latin typeface="NanumGothic"/>
+                <a:ea typeface="NanumGothic"/>
+              </a:rPr>
+              <a:t>LAST(국소마취제 전신독성): 입 주변 저림·이명·금속맛·어지럼 → 경련·부정맥.</a:t>
+            </a:r>
+          </a:p>
+          <a:p>
+            <a:pPr algn="l">
+              <a:lnSpc>
+                <a:spcPct val="108000"/>
+              </a:lnSpc>
+              <a:spcAft>
+                <a:spcPts val="800"/>
+              </a:spcAft>
+            </a:pPr>
+            <a:r>
+              <a:rPr sz="979" b="1" i="0">
+                <a:solidFill>
+                  <a:srgbClr val="2C898A"/>
+                </a:solidFill>
+                <a:latin typeface="NanumGothic"/>
+                <a:ea typeface="NanumGothic"/>
+              </a:rPr>
+              <a:t>●  </a:t>
+            </a:r>
+            <a:r>
+              <a:rPr sz="1400" b="0" i="0">
+                <a:solidFill>
                   <a:srgbClr val="1A202C"/>
                 </a:solidFill>
                 <a:latin typeface="NanumGothic"/>
                 <a:ea typeface="NanumGothic"/>
               </a:rPr>
-              <a:t>신경병증 — 당뇨병성 신경병증/당뇨발·대상포진후신경통·환상지통</a:t>
+              <a:t>대응 — 즉시 중단·산소/기도·경련조절·20% 지질유탁액 정주·소생술. 예방 — 흡인+조영제+분할주입+용량제한.</a:t>
             </a:r>
           </a:p>
           <a:p>
@@ -3853,7 +3887,67 @@
                 <a:spcPct val="108000"/>
               </a:lnSpc>
               <a:spcAft>
-                <a:spcPts val="600"/>
+                <a:spcPts val="800"/>
+              </a:spcAft>
+            </a:pPr>
+            <a:r>
+              <a:rPr sz="979" b="1" i="0">
+                <a:solidFill>
+                  <a:srgbClr val="2C898A"/>
+                </a:solidFill>
+                <a:latin typeface="NanumGothic"/>
+                <a:ea typeface="NanumGothic"/>
+              </a:rPr>
+              <a:t>●  </a:t>
+            </a:r>
+            <a:r>
+              <a:rPr sz="1400" b="0" i="0">
+                <a:solidFill>
+                  <a:srgbClr val="1A202C"/>
+                </a:solidFill>
+                <a:latin typeface="NanumGothic"/>
+                <a:ea typeface="NanumGothic"/>
+              </a:rPr>
+              <a:t>신경·신경축: 주입 중 방사통·하지 위약 → 즉시 중단·재위치. 시술 후 근력·감각 확인.</a:t>
+            </a:r>
+          </a:p>
+          <a:p>
+            <a:pPr algn="l">
+              <a:lnSpc>
+                <a:spcPct val="108000"/>
+              </a:lnSpc>
+              <a:spcAft>
+                <a:spcPts val="800"/>
+              </a:spcAft>
+            </a:pPr>
+            <a:r>
+              <a:rPr sz="979" b="1" i="0">
+                <a:solidFill>
+                  <a:srgbClr val="2C898A"/>
+                </a:solidFill>
+                <a:latin typeface="NanumGothic"/>
+                <a:ea typeface="NanumGothic"/>
+              </a:rPr>
+              <a:t>●  </a:t>
+            </a:r>
+            <a:r>
+              <a:rPr sz="1400" b="0" i="0">
+                <a:solidFill>
+                  <a:srgbClr val="1A202C"/>
+                </a:solidFill>
+                <a:latin typeface="NanumGothic"/>
+                <a:ea typeface="NanumGothic"/>
+              </a:rPr>
+              <a:t>출혈·감염: 항응고 중단·무균술 · 심한 통증·발열·팽창 시 즉시 평가.</a:t>
+            </a:r>
+          </a:p>
+          <a:p>
+            <a:pPr algn="l">
+              <a:lnSpc>
+                <a:spcPct val="108000"/>
+              </a:lnSpc>
+              <a:spcAft>
+                <a:spcPts val="800"/>
               </a:spcAft>
             </a:pPr>
             <a:r>
@@ -3864,137 +3958,17 @@
                 <a:latin typeface="NanumGothic"/>
                 <a:ea typeface="NanumGothic"/>
               </a:rPr>
-              <a:t>      –  </a:t>
-            </a:r>
-            <a:r>
-              <a:rPr sz="1400" b="0" i="0">
-                <a:solidFill>
-                  <a:srgbClr val="1A202C"/>
-                </a:solidFill>
-                <a:latin typeface="NanumGothic"/>
-                <a:ea typeface="NanumGothic"/>
-              </a:rPr>
-              <a:t>저림·화끈거림·전기 오듯 찌름 · 이질통 · 감각저하(양말 신은 느낌) · 야간 악화 · 당뇨발 궤양·관류저하</a:t>
-            </a:r>
-          </a:p>
-          <a:p>
-            <a:pPr algn="l">
-              <a:lnSpc>
-                <a:spcPct val="108000"/>
-              </a:lnSpc>
-              <a:spcAft>
-                <a:spcPts val="600"/>
-              </a:spcAft>
-            </a:pPr>
+              <a:t/>
+            </a:r>
             <a:r>
               <a:rPr sz="1400" b="1" i="0">
                 <a:solidFill>
-                  <a:srgbClr val="5A6B7B"/>
-                </a:solidFill>
-                <a:latin typeface="NanumGothic"/>
-                <a:ea typeface="NanumGothic"/>
-              </a:rPr>
-              <a:t>      –  </a:t>
-            </a:r>
-            <a:r>
-              <a:rPr sz="1400" b="0" i="0">
-                <a:solidFill>
-                  <a:srgbClr val="5A6B7B"/>
-                </a:solidFill>
-                <a:latin typeface="NanumGothic"/>
-                <a:ea typeface="NanumGothic"/>
-              </a:rPr>
-              <a:t>호소: “발이 저리고 화끈거려요” · “밤에 더 심해요” · “전기가 찌릿 오는 것 같아요”</a:t>
-            </a:r>
-          </a:p>
-          <a:p>
-            <a:pPr algn="l">
-              <a:lnSpc>
-                <a:spcPct val="108000"/>
-              </a:lnSpc>
-              <a:spcAft>
-                <a:spcPts val="600"/>
-              </a:spcAft>
-            </a:pPr>
-            <a:r>
-              <a:rPr sz="979" b="1" i="0">
-                <a:solidFill>
-                  <a:srgbClr val="2C898A"/>
-                </a:solidFill>
-                <a:latin typeface="NanumGothic"/>
-                <a:ea typeface="NanumGothic"/>
-              </a:rPr>
-              <a:t>●  </a:t>
-            </a:r>
-            <a:r>
-              <a:rPr sz="1400" b="1" i="0">
-                <a:solidFill>
-                  <a:srgbClr val="1A202C"/>
-                </a:solidFill>
-                <a:latin typeface="NanumGothic"/>
-                <a:ea typeface="NanumGothic"/>
-              </a:rPr>
-              <a:t>기타 — 족부 다한증·레이노(하지)·홍색사지통증·암성 하지통</a:t>
-            </a:r>
-          </a:p>
-          <a:p>
-            <a:pPr algn="l">
-              <a:lnSpc>
-                <a:spcPct val="108000"/>
-              </a:lnSpc>
-              <a:spcAft>
-                <a:spcPts val="600"/>
-              </a:spcAft>
-            </a:pPr>
-            <a:r>
-              <a:rPr sz="1400" b="1" i="0">
-                <a:solidFill>
-                  <a:srgbClr val="5A6B7B"/>
-                </a:solidFill>
-                <a:latin typeface="NanumGothic"/>
-                <a:ea typeface="NanumGothic"/>
-              </a:rPr>
-              <a:t>      –  </a:t>
-            </a:r>
-            <a:r>
-              <a:rPr sz="1400" b="0" i="0">
-                <a:solidFill>
-                  <a:srgbClr val="1A202C"/>
-                </a:solidFill>
-                <a:latin typeface="NanumGothic"/>
-                <a:ea typeface="NanumGothic"/>
-              </a:rPr>
-              <a:t>다한증(과한 발땀·축축·악취) · 레이노(추위·스트레스에 창백→청색→발적 삼색변화·저림) · 홍색사지통증(발작적 발적·작열·열감, 열에 악화)</a:t>
-            </a:r>
-          </a:p>
-          <a:p>
-            <a:pPr algn="l">
-              <a:lnSpc>
-                <a:spcPct val="108000"/>
-              </a:lnSpc>
-              <a:spcAft>
-                <a:spcPts val="600"/>
-              </a:spcAft>
-            </a:pPr>
-            <a:r>
-              <a:rPr sz="1400" b="1" i="0">
-                <a:solidFill>
-                  <a:srgbClr val="5A6B7B"/>
-                </a:solidFill>
-                <a:latin typeface="NanumGothic"/>
-                <a:ea typeface="NanumGothic"/>
-              </a:rPr>
-              <a:t>      –  </a:t>
-            </a:r>
-            <a:r>
-              <a:rPr sz="1400" b="0" i="0">
-                <a:solidFill>
-                  <a:srgbClr val="5A6B7B"/>
-                </a:solidFill>
-                <a:latin typeface="NanumGothic"/>
-                <a:ea typeface="NanumGothic"/>
-              </a:rPr>
-              <a:t>호소: “발에 땀이 너무 많아요” · “추우면 발이 하얘졌다 파래져요” · “발이 화끈 달아올라요”</a:t>
+                  <a:srgbClr val="1F6E70"/>
+                </a:solidFill>
+                <a:latin typeface="NanumGothic"/>
+                <a:ea typeface="NanumGothic"/>
+              </a:rPr>
+              <a:t>준비된 상태(모니터·정맥로·지질유탁액)면 대부분 안전하게 관리된다.</a:t>
             </a:r>
           </a:p>
         </p:txBody>
@@ -4037,7 +4011,7 @@
                 <a:latin typeface="NanumGothic"/>
                 <a:ea typeface="NanumGothic"/>
               </a:rPr>
-              <a:t>근거: StatPearls; 문헌고찰 종합</a:t>
+              <a:t>근거: ASRA LAST 지침 · StatPearls NBK431107</a:t>
             </a:r>
           </a:p>
         </p:txBody>
@@ -4185,7 +4159,7 @@
                 <a:latin typeface="NanumGothic"/>
                 <a:ea typeface="NanumGothic"/>
               </a:rPr>
-              <a:t>밤에 저리고 화끈거리는 다리 — 당뇨병성 신경병증과 LSB</a:t>
+              <a:t>합병증 대비 — 준비·조기인지·환자설명</a:t>
             </a:r>
           </a:p>
         </p:txBody>
@@ -4228,7 +4202,7 @@
                 <a:latin typeface="NanumGothic"/>
                 <a:ea typeface="NanumGothic"/>
               </a:rPr>
-              <a:t>적응증 · 심화</a:t>
+              <a:t>합병증 · 대비</a:t>
             </a:r>
           </a:p>
         </p:txBody>
@@ -4285,8 +4259,8 @@
         </p:nvSpPr>
         <p:spPr>
           <a:xfrm>
-            <a:off x="10536631" y="365760"/>
-            <a:ext cx="1152144" cy="347472"/>
+            <a:off x="10865816" y="365760"/>
+            <a:ext cx="822959" cy="347472"/>
           </a:xfrm>
           <a:prstGeom prst="roundRect">
             <a:avLst>
@@ -4294,7 +4268,7 @@
             </a:avLst>
           </a:prstGeom>
           <a:solidFill>
-            <a:srgbClr val="2C898A"/>
+            <a:srgbClr val="1A202C"/>
           </a:solidFill>
           <a:ln>
             <a:noFill/>
@@ -4331,8 +4305,8 @@
         </p:nvSpPr>
         <p:spPr>
           <a:xfrm>
-            <a:off x="10536631" y="365760"/>
-            <a:ext cx="1152144" cy="347472"/>
+            <a:off x="10865816" y="365760"/>
+            <a:ext cx="822959" cy="347472"/>
           </a:xfrm>
           <a:prstGeom prst="rect">
             <a:avLst/>
@@ -4361,7 +4335,7 @@
                 <a:latin typeface="NanumGothic"/>
                 <a:ea typeface="NanumGothic"/>
               </a:rPr>
-              <a:t>야간 신경병증통</a:t>
+              <a:t>환자 안심</a:t>
             </a:r>
           </a:p>
         </p:txBody>
@@ -4375,7 +4349,7 @@
         <p:spPr>
           <a:xfrm>
             <a:off x="731520" y="1371600"/>
-            <a:ext cx="6400800" cy="4663440"/>
+            <a:ext cx="10835640" cy="4754880"/>
           </a:xfrm>
           <a:prstGeom prst="rect">
             <a:avLst/>
@@ -4414,7 +4388,7 @@
                 <a:latin typeface="NanumGothic"/>
                 <a:ea typeface="NanumGothic"/>
               </a:rPr>
-              <a:t>임상상: 당뇨병성 말초신경병증 — 발·종아리 저림·화끈거림·전기 찌름, 양측 ‘양말’ 분포.</a:t>
+              <a:t>대부분 경미·자가회복 — 심각 합병증은 영상유도·정확한 술기로 드묾.</a:t>
             </a:r>
           </a:p>
           <a:p>
@@ -4444,7 +4418,7 @@
                 <a:latin typeface="NanumGothic"/>
                 <a:ea typeface="NanumGothic"/>
               </a:rPr>
-              <a:t>야간통: 이불 온기·야간 순환·주의분산 소실 → 밤에 증폭·수면 방해.</a:t>
+              <a:t>준비: 모니터·정맥로·응급장비·20% 지질유탁액 구비, 소생 프로토콜 숙지.</a:t>
             </a:r>
           </a:p>
           <a:p>
@@ -4474,7 +4448,7 @@
                 <a:latin typeface="NanumGothic"/>
                 <a:ea typeface="NanumGothic"/>
               </a:rPr>
-              <a:t>먼저 감별: RLS(움직이면 완화)·NLC(경련)·허혈성 안정통과 구분.</a:t>
+              <a:t>조기 인지: 조영제 패턴 + 환자 증상(통증·저림·어지럼)을 실시간 관찰.</a:t>
             </a:r>
           </a:p>
           <a:p>
@@ -4487,6 +4461,36 @@
               </a:spcAft>
             </a:pPr>
             <a:r>
+              <a:rPr sz="979" b="1" i="0">
+                <a:solidFill>
+                  <a:srgbClr val="2C898A"/>
+                </a:solidFill>
+                <a:latin typeface="NanumGothic"/>
+                <a:ea typeface="NanumGothic"/>
+              </a:rPr>
+              <a:t>●  </a:t>
+            </a:r>
+            <a:r>
+              <a:rPr sz="1400" b="0" i="0">
+                <a:solidFill>
+                  <a:srgbClr val="1A202C"/>
+                </a:solidFill>
+                <a:latin typeface="NanumGothic"/>
+                <a:ea typeface="NanumGothic"/>
+              </a:rPr>
+              <a:t>환자 설명(동의): 흔한 것(일시적 저림·주사부위통·저혈압) vs 드문 것(신경통·출혈)을 사전 고지 → 신뢰·불안↓.</a:t>
+            </a:r>
+          </a:p>
+          <a:p>
+            <a:pPr algn="l">
+              <a:lnSpc>
+                <a:spcPct val="108000"/>
+              </a:lnSpc>
+              <a:spcAft>
+                <a:spcPts val="800"/>
+              </a:spcAft>
+            </a:pPr>
+            <a:r>
               <a:rPr sz="1400" b="1" i="0">
                 <a:solidFill>
                   <a:srgbClr val="5A6B7B"/>
@@ -4504,246 +4508,14 @@
                 <a:latin typeface="NanumGothic"/>
                 <a:ea typeface="NanumGothic"/>
               </a:rPr>
-              <a:t>1차: 혈당조절+약물(가바펜틴·듀록세틴) → 난치성이면 LSB 고려</a:t>
-            </a:r>
-          </a:p>
-        </p:txBody>
-      </p:sp>
-      <p:sp>
-        <p:nvSpPr>
-          <p:cNvPr id="9" name="Rounded Rectangle 8"/>
-          <p:cNvSpPr/>
-          <p:nvPr/>
-        </p:nvSpPr>
-        <p:spPr>
-          <a:xfrm>
-            <a:off x="7406640" y="1463040"/>
-            <a:ext cx="4114800" cy="4480560"/>
-          </a:xfrm>
-          <a:prstGeom prst="roundRect">
-            <a:avLst>
-              <a:gd name="adj" fmla="val 8000"/>
-            </a:avLst>
-          </a:prstGeom>
-          <a:solidFill>
-            <a:srgbClr val="1B355E"/>
-          </a:solidFill>
-          <a:ln>
-            <a:noFill/>
-          </a:ln>
-          <a:effectLst/>
-        </p:spPr>
-        <p:style>
-          <a:lnRef idx="1">
-            <a:schemeClr val="accent1"/>
-          </a:lnRef>
-          <a:fillRef idx="3">
-            <a:schemeClr val="accent1"/>
-          </a:fillRef>
-          <a:effectRef idx="2">
-            <a:schemeClr val="accent1"/>
-          </a:effectRef>
-          <a:fontRef idx="minor">
-            <a:schemeClr val="lt1"/>
-          </a:fontRef>
-        </p:style>
-        <p:txBody>
-          <a:bodyPr rtlCol="0" anchor="ctr"/>
-          <a:lstStyle/>
-          <a:p>
-            <a:pPr algn="ctr"/>
-          </a:p>
-        </p:txBody>
-      </p:sp>
-      <p:sp>
-        <p:nvSpPr>
-          <p:cNvPr id="10" name="TextBox 9"/>
-          <p:cNvSpPr txBox="1"/>
-          <p:nvPr/>
-        </p:nvSpPr>
-        <p:spPr>
-          <a:xfrm>
-            <a:off x="7680960" y="1691640"/>
-            <a:ext cx="3657600" cy="365760"/>
-          </a:xfrm>
-          <a:prstGeom prst="rect">
-            <a:avLst/>
-          </a:prstGeom>
-          <a:noFill/>
-        </p:spPr>
-        <p:txBody>
-          <a:bodyPr wrap="square" anchor="t" lIns="0" rIns="0" tIns="0" bIns="0">
-            <a:spAutoFit/>
-          </a:bodyPr>
-          <a:lstStyle/>
-          <a:p>
-            <a:pPr algn="l">
-              <a:lnSpc>
-                <a:spcPct val="108000"/>
-              </a:lnSpc>
-              <a:spcAft>
-                <a:spcPts val="400"/>
-              </a:spcAft>
-            </a:pPr>
-            <a:r>
-              <a:rPr sz="1300" b="1" i="0">
-                <a:solidFill>
-                  <a:srgbClr val="BFD3E6"/>
-                </a:solidFill>
-                <a:latin typeface="NanumGothic"/>
-                <a:ea typeface="NanumGothic"/>
-              </a:rPr>
-              <a:t>LSB — 치료 삽입</a:t>
-            </a:r>
-          </a:p>
-        </p:txBody>
-      </p:sp>
-      <p:sp>
-        <p:nvSpPr>
-          <p:cNvPr id="11" name="TextBox 10"/>
-          <p:cNvSpPr txBox="1"/>
-          <p:nvPr/>
-        </p:nvSpPr>
-        <p:spPr>
-          <a:xfrm>
-            <a:off x="7680960" y="2194560"/>
-            <a:ext cx="3611880" cy="3657600"/>
-          </a:xfrm>
-          <a:prstGeom prst="rect">
-            <a:avLst/>
-          </a:prstGeom>
-          <a:noFill/>
-        </p:spPr>
-        <p:txBody>
-          <a:bodyPr wrap="square" lIns="0" rIns="0" tIns="0" bIns="0">
-            <a:spAutoFit/>
-          </a:bodyPr>
-          <a:lstStyle/>
-          <a:p>
-            <a:pPr algn="l">
-              <a:lnSpc>
-                <a:spcPct val="108000"/>
-              </a:lnSpc>
-              <a:spcAft>
-                <a:spcPts val="800"/>
-              </a:spcAft>
-            </a:pPr>
-            <a:r>
-              <a:rPr sz="875" b="1" i="0">
-                <a:solidFill>
-                  <a:srgbClr val="2C898A"/>
-                </a:solidFill>
-                <a:latin typeface="NanumGothic"/>
-                <a:ea typeface="NanumGothic"/>
-              </a:rPr>
-              <a:t>●  </a:t>
-            </a:r>
-            <a:r>
-              <a:rPr sz="1250" b="0" i="0">
-                <a:solidFill>
-                  <a:srgbClr val="FFFFFF"/>
-                </a:solidFill>
-                <a:latin typeface="NanumGothic"/>
-                <a:ea typeface="NanumGothic"/>
-              </a:rPr>
-              <a:t>기전: 교감차단 → 미세순환↑ + 교감매개통 차단</a:t>
-            </a:r>
-          </a:p>
-          <a:p>
-            <a:pPr algn="l">
-              <a:lnSpc>
-                <a:spcPct val="108000"/>
-              </a:lnSpc>
-              <a:spcAft>
-                <a:spcPts val="800"/>
-              </a:spcAft>
-            </a:pPr>
-            <a:r>
-              <a:rPr sz="875" b="1" i="0">
-                <a:solidFill>
-                  <a:srgbClr val="2C898A"/>
-                </a:solidFill>
-                <a:latin typeface="NanumGothic"/>
-                <a:ea typeface="NanumGothic"/>
-              </a:rPr>
-              <a:t>●  </a:t>
-            </a:r>
-            <a:r>
-              <a:rPr sz="1250" b="0" i="0">
-                <a:solidFill>
-                  <a:srgbClr val="FFFFFF"/>
-                </a:solidFill>
-                <a:latin typeface="NanumGothic"/>
-                <a:ea typeface="NanumGothic"/>
-              </a:rPr>
-              <a:t>근거: 난치성 DPN에 LSB+신경파괴 RCT·증례</a:t>
-            </a:r>
-          </a:p>
-          <a:p>
-            <a:pPr algn="l">
-              <a:lnSpc>
-                <a:spcPct val="108000"/>
-              </a:lnSpc>
-              <a:spcAft>
-                <a:spcPts val="800"/>
-              </a:spcAft>
-            </a:pPr>
-            <a:r>
-              <a:rPr sz="875" b="1" i="0">
-                <a:solidFill>
-                  <a:srgbClr val="2C898A"/>
-                </a:solidFill>
-                <a:latin typeface="NanumGothic"/>
-                <a:ea typeface="NanumGothic"/>
-              </a:rPr>
-              <a:t>●  </a:t>
-            </a:r>
-            <a:r>
-              <a:rPr sz="1250" b="0" i="0">
-                <a:solidFill>
-                  <a:srgbClr val="FFFFFF"/>
-                </a:solidFill>
-                <a:latin typeface="NanumGothic"/>
-                <a:ea typeface="NanumGothic"/>
-              </a:rPr>
-              <a:t>적용: 약물 불응·진단차단 양성 시 선택적 시행</a:t>
-            </a:r>
-          </a:p>
-          <a:p>
-            <a:pPr algn="l">
-              <a:lnSpc>
-                <a:spcPct val="108000"/>
-              </a:lnSpc>
-              <a:spcAft>
-                <a:spcPts val="800"/>
-              </a:spcAft>
-            </a:pPr>
-            <a:r>
-              <a:rPr sz="875" b="1" i="0">
-                <a:solidFill>
-                  <a:srgbClr val="2C898A"/>
-                </a:solidFill>
-                <a:latin typeface="NanumGothic"/>
-                <a:ea typeface="NanumGothic"/>
-              </a:rPr>
-              <a:t>●  </a:t>
-            </a:r>
-            <a:r>
-              <a:rPr sz="1250" b="0" i="0">
-                <a:solidFill>
-                  <a:srgbClr val="FFFFFF"/>
-                </a:solidFill>
-                <a:latin typeface="NanumGothic"/>
-                <a:ea typeface="NanumGothic"/>
-              </a:rPr>
-              <a:t>성공지표: 피부온도 ≥2°C↑ (근거 제한적)</a:t>
-            </a:r>
-          </a:p>
-        </p:txBody>
-      </p:sp>
-      <p:sp>
-        <p:nvSpPr>
-          <p:cNvPr id="12" name="TextBox 11"/>
+              <a:t>신경파괴는 진단차단 양성 시에만·소량 — 위해를 최소화.</a:t>
+            </a:r>
+          </a:p>
+        </p:txBody>
+      </p:sp>
+      <p:sp>
+        <p:nvSpPr>
+          <p:cNvPr id="9" name="TextBox 8"/>
           <p:cNvSpPr txBox="1"/>
           <p:nvPr/>
         </p:nvSpPr>
@@ -4779,14 +4551,14 @@
                 <a:latin typeface="NanumGothic"/>
                 <a:ea typeface="NanumGothic"/>
               </a:rPr>
-              <a:t>근거: Zhang 2020(RCT) PMID 32915421; 증례 PMID 22606406; StatPearls NBK442009</a:t>
-            </a:r>
-          </a:p>
-        </p:txBody>
-      </p:sp>
-      <p:sp>
-        <p:nvSpPr>
-          <p:cNvPr id="13" name="TextBox 12"/>
+              <a:t>근거: 교육용 정리</a:t>
+            </a:r>
+          </a:p>
+        </p:txBody>
+      </p:sp>
+      <p:sp>
+        <p:nvSpPr>
+          <p:cNvPr id="10" name="TextBox 9"/>
           <p:cNvSpPr txBox="1"/>
           <p:nvPr/>
         </p:nvSpPr>
@@ -4927,7 +4699,7 @@
                 <a:latin typeface="NanumGothic"/>
                 <a:ea typeface="NanumGothic"/>
               </a:rPr>
-              <a:t>효과 (1) 관류 개선 · 허혈성 통증</a:t>
+              <a:t>적응증 (Indications)</a:t>
             </a:r>
           </a:p>
         </p:txBody>
@@ -4970,7 +4742,7 @@
                 <a:latin typeface="NanumGothic"/>
                 <a:ea typeface="NanumGothic"/>
               </a:rPr>
-              <a:t>효과</a:t>
+              <a:t>적응증</a:t>
             </a:r>
           </a:p>
         </p:txBody>
@@ -5027,8 +4799,8 @@
         </p:nvSpPr>
         <p:spPr>
           <a:xfrm>
-            <a:off x="10426903" y="365760"/>
-            <a:ext cx="1261872" cy="347472"/>
+            <a:off x="11194999" y="365760"/>
+            <a:ext cx="493776" cy="347472"/>
           </a:xfrm>
           <a:prstGeom prst="roundRect">
             <a:avLst>
@@ -5036,7 +4808,7 @@
             </a:avLst>
           </a:prstGeom>
           <a:solidFill>
-            <a:srgbClr val="B97A0C"/>
+            <a:srgbClr val="2C898A"/>
           </a:solidFill>
           <a:ln>
             <a:noFill/>
@@ -5073,8 +4845,8 @@
         </p:nvSpPr>
         <p:spPr>
           <a:xfrm>
-            <a:off x="10426903" y="365760"/>
-            <a:ext cx="1261872" cy="347472"/>
+            <a:off x="11194999" y="365760"/>
+            <a:ext cx="493776" cy="347472"/>
           </a:xfrm>
           <a:prstGeom prst="rect">
             <a:avLst/>
@@ -5103,180 +4875,297 @@
                 <a:latin typeface="NanumGothic"/>
                 <a:ea typeface="NanumGothic"/>
               </a:rPr>
-              <a:t>Lv III–IV</a:t>
-            </a:r>
-          </a:p>
-        </p:txBody>
-      </p:sp>
-      <p:sp>
-        <p:nvSpPr>
-          <p:cNvPr id="8" name="TextBox 7"/>
+              <a:t>적응</a:t>
+            </a:r>
+          </a:p>
+        </p:txBody>
+      </p:sp>
+      <p:graphicFrame>
+        <p:nvGraphicFramePr>
+          <p:cNvPr id="8" name="Table 7"/>
+          <p:cNvGraphicFramePr>
+            <a:graphicFrameLocks noGrp="1"/>
+          </p:cNvGraphicFramePr>
+          <p:nvPr/>
+        </p:nvGraphicFramePr>
+        <p:xfrm>
+          <a:off x="731520" y="1371600"/>
+          <a:ext cx="10835640" cy="3017520"/>
+        </p:xfrm>
+        <a:graphic>
+          <a:graphicData uri="http://schemas.openxmlformats.org/drawingml/2006/table">
+            <a:tbl>
+              <a:tblPr>
+                <a:tableStyleId>{5C22544A-7EE6-4342-B048-85BDC9FD1C3A}</a:tableStyleId>
+              </a:tblPr>
+              <a:tblGrid>
+                <a:gridCol w="2194560"/>
+                <a:gridCol w="8641080"/>
+              </a:tblGrid>
+              <a:tr h="457200">
+                <a:tc>
+                  <a:txBody>
+                    <a:bodyPr wrap="square"/>
+                    <a:lstStyle/>
+                    <a:p>
+                      <a:pPr algn="l"/>
+                      <a:r>
+                        <a:rPr sz="1250" b="1" i="0">
+                          <a:solidFill>
+                            <a:srgbClr val="FFFFFF"/>
+                          </a:solidFill>
+                          <a:latin typeface="NanumGothic"/>
+                          <a:ea typeface="NanumGothic"/>
+                        </a:rPr>
+                        <a:t>범주</a:t>
+                      </a:r>
+                    </a:p>
+                  </a:txBody>
+                  <a:tcPr marL="73152" marR="54864" marT="18288" marB="18288" anchor="ctr">
+                    <a:solidFill>
+                      <a:srgbClr val="1B355E"/>
+                    </a:solidFill>
+                  </a:tcPr>
+                </a:tc>
+                <a:tc>
+                  <a:txBody>
+                    <a:bodyPr wrap="square"/>
+                    <a:lstStyle/>
+                    <a:p>
+                      <a:pPr algn="ctr"/>
+                      <a:r>
+                        <a:rPr sz="1250" b="1" i="0">
+                          <a:solidFill>
+                            <a:srgbClr val="FFFFFF"/>
+                          </a:solidFill>
+                          <a:latin typeface="NanumGothic"/>
+                          <a:ea typeface="NanumGothic"/>
+                        </a:rPr>
+                        <a:t>대표 적응증</a:t>
+                      </a:r>
+                    </a:p>
+                  </a:txBody>
+                  <a:tcPr marL="73152" marR="54864" marT="18288" marB="18288" anchor="ctr">
+                    <a:solidFill>
+                      <a:srgbClr val="1B355E"/>
+                    </a:solidFill>
+                  </a:tcPr>
+                </a:tc>
+              </a:tr>
+              <a:tr h="640080">
+                <a:tc>
+                  <a:txBody>
+                    <a:bodyPr wrap="square"/>
+                    <a:lstStyle/>
+                    <a:p>
+                      <a:pPr algn="l"/>
+                      <a:r>
+                        <a:rPr sz="1200" b="0" i="0">
+                          <a:solidFill>
+                            <a:srgbClr val="1A202C"/>
+                          </a:solidFill>
+                          <a:latin typeface="NanumGothic"/>
+                          <a:ea typeface="NanumGothic"/>
+                        </a:rPr>
+                        <a:t>통증증후군</a:t>
+                      </a:r>
+                    </a:p>
+                  </a:txBody>
+                  <a:tcPr marL="73152" marR="54864" marT="18288" marB="18288" anchor="ctr">
+                    <a:solidFill>
+                      <a:srgbClr val="FFFFFF"/>
+                    </a:solidFill>
+                  </a:tcPr>
+                </a:tc>
+                <a:tc>
+                  <a:txBody>
+                    <a:bodyPr wrap="square"/>
+                    <a:lstStyle/>
+                    <a:p>
+                      <a:pPr algn="ctr"/>
+                      <a:r>
+                        <a:rPr sz="1200" b="0" i="0">
+                          <a:solidFill>
+                            <a:srgbClr val="1A202C"/>
+                          </a:solidFill>
+                          <a:latin typeface="NanumGothic"/>
+                          <a:ea typeface="NanumGothic"/>
+                        </a:rPr>
+                        <a:t>하지 복합부위통증증후군(CRPS I/II) — 조기(≤12개월) 시행이 유리</a:t>
+                      </a:r>
+                    </a:p>
+                  </a:txBody>
+                  <a:tcPr marL="73152" marR="54864" marT="18288" marB="18288" anchor="ctr">
+                    <a:solidFill>
+                      <a:srgbClr val="FFFFFF"/>
+                    </a:solidFill>
+                  </a:tcPr>
+                </a:tc>
+              </a:tr>
+              <a:tr h="640080">
+                <a:tc>
+                  <a:txBody>
+                    <a:bodyPr wrap="square"/>
+                    <a:lstStyle/>
+                    <a:p>
+                      <a:pPr algn="l"/>
+                      <a:r>
+                        <a:rPr sz="1200" b="0" i="0">
+                          <a:solidFill>
+                            <a:srgbClr val="1A202C"/>
+                          </a:solidFill>
+                          <a:latin typeface="NanumGothic"/>
+                          <a:ea typeface="NanumGothic"/>
+                        </a:rPr>
+                        <a:t>허혈질환</a:t>
+                      </a:r>
+                    </a:p>
+                  </a:txBody>
+                  <a:tcPr marL="73152" marR="54864" marT="18288" marB="18288" anchor="ctr">
+                    <a:solidFill>
+                      <a:srgbClr val="EEF2F6"/>
+                    </a:solidFill>
+                  </a:tcPr>
+                </a:tc>
+                <a:tc>
+                  <a:txBody>
+                    <a:bodyPr wrap="square"/>
+                    <a:lstStyle/>
+                    <a:p>
+                      <a:pPr algn="ctr"/>
+                      <a:r>
+                        <a:rPr sz="1200" b="0" i="0">
+                          <a:solidFill>
+                            <a:srgbClr val="1A202C"/>
+                          </a:solidFill>
+                          <a:latin typeface="NanumGothic"/>
+                          <a:ea typeface="NanumGothic"/>
+                        </a:rPr>
+                        <a:t>PAD·중증 하지허혈(CLI) 안정통·비재건성, 버거병, 색전, 동상, 혈관연축</a:t>
+                      </a:r>
+                    </a:p>
+                  </a:txBody>
+                  <a:tcPr marL="73152" marR="54864" marT="18288" marB="18288" anchor="ctr">
+                    <a:solidFill>
+                      <a:srgbClr val="EEF2F6"/>
+                    </a:solidFill>
+                  </a:tcPr>
+                </a:tc>
+              </a:tr>
+              <a:tr h="640080">
+                <a:tc>
+                  <a:txBody>
+                    <a:bodyPr wrap="square"/>
+                    <a:lstStyle/>
+                    <a:p>
+                      <a:pPr algn="l"/>
+                      <a:r>
+                        <a:rPr sz="1200" b="0" i="0">
+                          <a:solidFill>
+                            <a:srgbClr val="1A202C"/>
+                          </a:solidFill>
+                          <a:latin typeface="NanumGothic"/>
+                          <a:ea typeface="NanumGothic"/>
+                        </a:rPr>
+                        <a:t>신경병증</a:t>
+                      </a:r>
+                    </a:p>
+                  </a:txBody>
+                  <a:tcPr marL="73152" marR="54864" marT="18288" marB="18288" anchor="ctr">
+                    <a:solidFill>
+                      <a:srgbClr val="FFFFFF"/>
+                    </a:solidFill>
+                  </a:tcPr>
+                </a:tc>
+                <a:tc>
+                  <a:txBody>
+                    <a:bodyPr wrap="square"/>
+                    <a:lstStyle/>
+                    <a:p>
+                      <a:pPr algn="ctr"/>
+                      <a:r>
+                        <a:rPr sz="1200" b="0" i="0">
+                          <a:solidFill>
+                            <a:srgbClr val="1A202C"/>
+                          </a:solidFill>
+                          <a:latin typeface="NanumGothic"/>
+                          <a:ea typeface="NanumGothic"/>
+                        </a:rPr>
+                        <a:t>당뇨병성 신경병증/당뇨발, 대상포진후신경통, 환상지통·단단통</a:t>
+                      </a:r>
+                    </a:p>
+                  </a:txBody>
+                  <a:tcPr marL="73152" marR="54864" marT="18288" marB="18288" anchor="ctr">
+                    <a:solidFill>
+                      <a:srgbClr val="FFFFFF"/>
+                    </a:solidFill>
+                  </a:tcPr>
+                </a:tc>
+              </a:tr>
+              <a:tr h="640080">
+                <a:tc>
+                  <a:txBody>
+                    <a:bodyPr wrap="square"/>
+                    <a:lstStyle/>
+                    <a:p>
+                      <a:pPr algn="l"/>
+                      <a:r>
+                        <a:rPr sz="1200" b="0" i="0">
+                          <a:solidFill>
+                            <a:srgbClr val="1A202C"/>
+                          </a:solidFill>
+                          <a:latin typeface="NanumGothic"/>
+                          <a:ea typeface="NanumGothic"/>
+                        </a:rPr>
+                        <a:t>기타</a:t>
+                      </a:r>
+                    </a:p>
+                  </a:txBody>
+                  <a:tcPr marL="73152" marR="54864" marT="18288" marB="18288" anchor="ctr">
+                    <a:solidFill>
+                      <a:srgbClr val="EEF2F6"/>
+                    </a:solidFill>
+                  </a:tcPr>
+                </a:tc>
+                <a:tc>
+                  <a:txBody>
+                    <a:bodyPr wrap="square"/>
+                    <a:lstStyle/>
+                    <a:p>
+                      <a:pPr algn="ctr"/>
+                      <a:r>
+                        <a:rPr sz="1200" b="0" i="0">
+                          <a:solidFill>
+                            <a:srgbClr val="1A202C"/>
+                          </a:solidFill>
+                          <a:latin typeface="NanumGothic"/>
+                          <a:ea typeface="NanumGothic"/>
+                        </a:rPr>
+                        <a:t>족부 다한증, 레이노 증후군(하지)·홍색사지통증, 암성 골반/하지통</a:t>
+                      </a:r>
+                    </a:p>
+                  </a:txBody>
+                  <a:tcPr marL="73152" marR="54864" marT="18288" marB="18288" anchor="ctr">
+                    <a:solidFill>
+                      <a:srgbClr val="EEF2F6"/>
+                    </a:solidFill>
+                  </a:tcPr>
+                </a:tc>
+              </a:tr>
+            </a:tbl>
+          </a:graphicData>
+        </a:graphic>
+      </p:graphicFrame>
+      <p:sp>
+        <p:nvSpPr>
+          <p:cNvPr id="9" name="TextBox 8"/>
           <p:cNvSpPr txBox="1"/>
           <p:nvPr/>
         </p:nvSpPr>
         <p:spPr>
           <a:xfrm>
-            <a:off x="731520" y="1371600"/>
-            <a:ext cx="6400800" cy="4663440"/>
-          </a:xfrm>
-          <a:prstGeom prst="rect">
-            <a:avLst/>
-          </a:prstGeom>
-          <a:noFill/>
-        </p:spPr>
-        <p:txBody>
-          <a:bodyPr wrap="square" lIns="0" rIns="0" tIns="0" bIns="0">
-            <a:spAutoFit/>
-          </a:bodyPr>
-          <a:lstStyle/>
-          <a:p>
-            <a:pPr algn="l">
-              <a:lnSpc>
-                <a:spcPct val="108000"/>
-              </a:lnSpc>
-              <a:spcAft>
-                <a:spcPts val="800"/>
-              </a:spcAft>
-            </a:pPr>
-            <a:r>
-              <a:rPr sz="979" b="1" i="0">
-                <a:solidFill>
-                  <a:srgbClr val="2C898A"/>
-                </a:solidFill>
-                <a:latin typeface="NanumGothic"/>
-                <a:ea typeface="NanumGothic"/>
-              </a:rPr>
-              <a:t>●  </a:t>
-            </a:r>
-            <a:r>
-              <a:rPr sz="1400" b="1" i="0">
-                <a:solidFill>
-                  <a:srgbClr val="1A202C"/>
-                </a:solidFill>
-                <a:latin typeface="NanumGothic"/>
-                <a:ea typeface="NanumGothic"/>
-              </a:rPr>
-              <a:t>관류 실측(Dickey 2024): LSB 후 후경골동맥 직경 0.17→0.27 cm(+58.8%), 모세혈관 재충혈 3.92→1.30초, 족부온도 +2.8°C.</a:t>
-            </a:r>
-          </a:p>
-          <a:p>
-            <a:pPr algn="l">
-              <a:lnSpc>
-                <a:spcPct val="108000"/>
-              </a:lnSpc>
-              <a:spcAft>
-                <a:spcPts val="800"/>
-              </a:spcAft>
-            </a:pPr>
-            <a:r>
-              <a:rPr sz="979" b="1" i="0">
-                <a:solidFill>
-                  <a:srgbClr val="2C898A"/>
-                </a:solidFill>
-                <a:latin typeface="NanumGothic"/>
-                <a:ea typeface="NanumGothic"/>
-              </a:rPr>
-              <a:t>●  </a:t>
-            </a:r>
-            <a:r>
-              <a:rPr sz="1400" b="0" i="0">
-                <a:solidFill>
-                  <a:srgbClr val="2E7D32"/>
-                </a:solidFill>
-                <a:latin typeface="NanumGothic"/>
-                <a:ea typeface="NanumGothic"/>
-              </a:rPr>
-              <a:t>허혈성 통증(PAD): 하지 통증 최대 75%↓, Fontaine 분류·측부관류 개선(Medicina 2024).</a:t>
-            </a:r>
-          </a:p>
-          <a:p>
-            <a:pPr algn="l">
-              <a:lnSpc>
-                <a:spcPct val="108000"/>
-              </a:lnSpc>
-              <a:spcAft>
-                <a:spcPts val="800"/>
-              </a:spcAft>
-            </a:pPr>
-            <a:r>
-              <a:rPr sz="979" b="1" i="0">
-                <a:solidFill>
-                  <a:srgbClr val="2C898A"/>
-                </a:solidFill>
-                <a:latin typeface="NanumGothic"/>
-                <a:ea typeface="NanumGothic"/>
-              </a:rPr>
-              <a:t>●  </a:t>
-            </a:r>
-            <a:r>
-              <a:rPr sz="1400" b="0" i="0">
-                <a:solidFill>
-                  <a:srgbClr val="1A202C"/>
-                </a:solidFill>
-                <a:latin typeface="NanumGothic"/>
-                <a:ea typeface="NanumGothic"/>
-              </a:rPr>
-              <a:t>비재건성 CLI: 교감신경 신경파괴가 절단 외 대안이 없는 환자의 통증조절에 효과적·안전(Barreto 2018).</a:t>
-            </a:r>
-          </a:p>
-        </p:txBody>
-      </p:sp>
-      <p:sp>
-        <p:nvSpPr>
-          <p:cNvPr id="9" name="Rounded Rectangle 8"/>
-          <p:cNvSpPr/>
-          <p:nvPr/>
-        </p:nvSpPr>
-        <p:spPr>
-          <a:xfrm>
-            <a:off x="7406640" y="1463040"/>
-            <a:ext cx="4114800" cy="4480560"/>
-          </a:xfrm>
-          <a:prstGeom prst="roundRect">
-            <a:avLst>
-              <a:gd name="adj" fmla="val 8000"/>
-            </a:avLst>
-          </a:prstGeom>
-          <a:solidFill>
-            <a:srgbClr val="1B355E"/>
-          </a:solidFill>
-          <a:ln>
-            <a:noFill/>
-          </a:ln>
-          <a:effectLst/>
-        </p:spPr>
-        <p:style>
-          <a:lnRef idx="1">
-            <a:schemeClr val="accent1"/>
-          </a:lnRef>
-          <a:fillRef idx="3">
-            <a:schemeClr val="accent1"/>
-          </a:fillRef>
-          <a:effectRef idx="2">
-            <a:schemeClr val="accent1"/>
-          </a:effectRef>
-          <a:fontRef idx="minor">
-            <a:schemeClr val="lt1"/>
-          </a:fontRef>
-        </p:style>
-        <p:txBody>
-          <a:bodyPr rtlCol="0" anchor="ctr"/>
-          <a:lstStyle/>
-          <a:p>
-            <a:pPr algn="ctr"/>
-          </a:p>
-        </p:txBody>
-      </p:sp>
-      <p:sp>
-        <p:nvSpPr>
-          <p:cNvPr id="10" name="TextBox 9"/>
-          <p:cNvSpPr txBox="1"/>
-          <p:nvPr/>
-        </p:nvSpPr>
-        <p:spPr>
-          <a:xfrm>
-            <a:off x="7680960" y="1691640"/>
-            <a:ext cx="3657600" cy="365760"/>
+            <a:off x="731520" y="5989320"/>
+            <a:ext cx="10789920" cy="365760"/>
           </a:xfrm>
           <a:prstGeom prst="rect">
             <a:avLst/>
@@ -5298,164 +5187,21 @@
               </a:spcAft>
             </a:pPr>
             <a:r>
-              <a:rPr sz="1300" b="1" i="0">
-                <a:solidFill>
-                  <a:srgbClr val="BFD3E6"/>
-                </a:solidFill>
-                <a:latin typeface="NanumGothic"/>
-                <a:ea typeface="NanumGothic"/>
-              </a:rPr>
-              <a:t>실측 수치(Dickey 2024)</a:t>
-            </a:r>
-          </a:p>
-        </p:txBody>
-      </p:sp>
-      <p:sp>
-        <p:nvSpPr>
-          <p:cNvPr id="11" name="TextBox 10"/>
-          <p:cNvSpPr txBox="1"/>
-          <p:nvPr/>
-        </p:nvSpPr>
-        <p:spPr>
-          <a:xfrm>
-            <a:off x="7680960" y="2194560"/>
-            <a:ext cx="3611880" cy="3657600"/>
-          </a:xfrm>
-          <a:prstGeom prst="rect">
-            <a:avLst/>
-          </a:prstGeom>
-          <a:noFill/>
-        </p:spPr>
-        <p:txBody>
-          <a:bodyPr wrap="square" lIns="0" rIns="0" tIns="0" bIns="0">
-            <a:spAutoFit/>
-          </a:bodyPr>
-          <a:lstStyle/>
-          <a:p>
-            <a:pPr algn="l">
-              <a:lnSpc>
-                <a:spcPct val="108000"/>
-              </a:lnSpc>
-              <a:spcAft>
-                <a:spcPts val="800"/>
-              </a:spcAft>
-            </a:pPr>
-            <a:r>
-              <a:rPr sz="875" b="1" i="0">
-                <a:solidFill>
-                  <a:srgbClr val="2C898A"/>
-                </a:solidFill>
-                <a:latin typeface="NanumGothic"/>
-                <a:ea typeface="NanumGothic"/>
-              </a:rPr>
-              <a:t>●  </a:t>
-            </a:r>
-            <a:r>
-              <a:rPr sz="1250" b="1" i="0">
-                <a:solidFill>
-                  <a:srgbClr val="9FE0D8"/>
-                </a:solidFill>
-                <a:latin typeface="NanumGothic"/>
-                <a:ea typeface="NanumGothic"/>
-              </a:rPr>
-              <a:t>후경골동맥 +58.8%</a:t>
-            </a:r>
-          </a:p>
-          <a:p>
-            <a:pPr algn="l">
-              <a:lnSpc>
-                <a:spcPct val="108000"/>
-              </a:lnSpc>
-              <a:spcAft>
-                <a:spcPts val="800"/>
-              </a:spcAft>
-            </a:pPr>
-            <a:r>
-              <a:rPr sz="875" b="1" i="0">
-                <a:solidFill>
-                  <a:srgbClr val="2C898A"/>
-                </a:solidFill>
-                <a:latin typeface="NanumGothic"/>
-                <a:ea typeface="NanumGothic"/>
-              </a:rPr>
-              <a:t>●  </a:t>
-            </a:r>
-            <a:r>
-              <a:rPr sz="1250" b="0" i="0">
-                <a:solidFill>
-                  <a:srgbClr val="FFFFFF"/>
-                </a:solidFill>
-                <a:latin typeface="NanumGothic"/>
-                <a:ea typeface="NanumGothic"/>
-              </a:rPr>
-              <a:t>모세혈관 재충혈 3.92→1.30초</a:t>
-            </a:r>
-          </a:p>
-          <a:p>
-            <a:pPr algn="l">
-              <a:lnSpc>
-                <a:spcPct val="108000"/>
-              </a:lnSpc>
-              <a:spcAft>
-                <a:spcPts val="800"/>
-              </a:spcAft>
-            </a:pPr>
-            <a:r>
-              <a:rPr sz="875" b="1" i="0">
-                <a:solidFill>
-                  <a:srgbClr val="2C898A"/>
-                </a:solidFill>
-                <a:latin typeface="NanumGothic"/>
-                <a:ea typeface="NanumGothic"/>
-              </a:rPr>
-              <a:t>●  </a:t>
-            </a:r>
-            <a:r>
-              <a:rPr sz="1250" b="0" i="0">
-                <a:solidFill>
-                  <a:srgbClr val="FFFFFF"/>
-                </a:solidFill>
-                <a:latin typeface="NanumGothic"/>
-                <a:ea typeface="NanumGothic"/>
-              </a:rPr>
-              <a:t>족부온도 +2.8°C</a:t>
-            </a:r>
-          </a:p>
-          <a:p>
-            <a:pPr algn="l">
-              <a:lnSpc>
-                <a:spcPct val="108000"/>
-              </a:lnSpc>
-              <a:spcAft>
-                <a:spcPts val="800"/>
-              </a:spcAft>
-            </a:pPr>
-            <a:r>
-              <a:rPr sz="875" b="1" i="0">
-                <a:solidFill>
-                  <a:srgbClr val="2C898A"/>
-                </a:solidFill>
-                <a:latin typeface="NanumGothic"/>
-                <a:ea typeface="NanumGothic"/>
-              </a:rPr>
-              <a:t>●  </a:t>
-            </a:r>
-            <a:r>
-              <a:rPr sz="1250" b="1" i="0">
-                <a:solidFill>
-                  <a:srgbClr val="9FE0D8"/>
-                </a:solidFill>
-                <a:latin typeface="NanumGothic"/>
-                <a:ea typeface="NanumGothic"/>
-              </a:rPr>
-              <a:t>→ 관류 개선의 객관 근거</a:t>
-            </a:r>
-          </a:p>
-        </p:txBody>
-      </p:sp>
-      <p:sp>
-        <p:nvSpPr>
-          <p:cNvPr id="12" name="TextBox 11"/>
+              <a:rPr sz="1150" b="1" i="0">
+                <a:solidFill>
+                  <a:srgbClr val="1F6E70"/>
+                </a:solidFill>
+                <a:latin typeface="NanumGothic"/>
+                <a:ea typeface="NanumGothic"/>
+              </a:rPr>
+              <a:t>특발성 야간 하지경련(NLC)은 적응증 아님 — '밤 다리증상'이 허혈성 안정통(PAD/CLI)이면 적응. 원인 감별(ABI·도플러) 선행.</a:t>
+            </a:r>
+          </a:p>
+        </p:txBody>
+      </p:sp>
+      <p:sp>
+        <p:nvSpPr>
+          <p:cNvPr id="10" name="TextBox 9"/>
           <p:cNvSpPr txBox="1"/>
           <p:nvPr/>
         </p:nvSpPr>
@@ -5491,14 +5237,14 @@
                 <a:latin typeface="NanumGothic"/>
                 <a:ea typeface="NanumGothic"/>
               </a:rPr>
-              <a:t>근거: Dickey 2024(Cureus); Medicina 2024; Barreto 2018</a:t>
-            </a:r>
-          </a:p>
-        </p:txBody>
-      </p:sp>
-      <p:sp>
-        <p:nvSpPr>
-          <p:cNvPr id="13" name="TextBox 12"/>
+              <a:t>근거: StatPearls; 문헌고찰 종합</a:t>
+            </a:r>
+          </a:p>
+        </p:txBody>
+      </p:sp>
+      <p:sp>
+        <p:nvSpPr>
+          <p:cNvPr id="11" name="TextBox 10"/>
           <p:cNvSpPr txBox="1"/>
           <p:nvPr/>
         </p:nvSpPr>
@@ -5639,7 +5385,7 @@
                 <a:latin typeface="NanumGothic"/>
                 <a:ea typeface="NanumGothic"/>
               </a:rPr>
-              <a:t>효과 (2) CRPS · 기전</a:t>
+              <a:t>적응증별 환자 증상·호소 ① — 통증증후군·허혈</a:t>
             </a:r>
           </a:p>
         </p:txBody>
@@ -5682,7 +5428,7 @@
                 <a:latin typeface="NanumGothic"/>
                 <a:ea typeface="NanumGothic"/>
               </a:rPr>
-              <a:t>효과</a:t>
+              <a:t>적응증 · 증상</a:t>
             </a:r>
           </a:p>
         </p:txBody>
@@ -5739,8 +5485,8 @@
         </p:nvSpPr>
         <p:spPr>
           <a:xfrm>
-            <a:off x="10426903" y="365760"/>
-            <a:ext cx="1261872" cy="347472"/>
+            <a:off x="10865816" y="365760"/>
+            <a:ext cx="822959" cy="347472"/>
           </a:xfrm>
           <a:prstGeom prst="roundRect">
             <a:avLst>
@@ -5748,7 +5494,7 @@
             </a:avLst>
           </a:prstGeom>
           <a:solidFill>
-            <a:srgbClr val="B97A0C"/>
+            <a:srgbClr val="2C898A"/>
           </a:solidFill>
           <a:ln>
             <a:noFill/>
@@ -5785,8 +5531,8 @@
         </p:nvSpPr>
         <p:spPr>
           <a:xfrm>
-            <a:off x="10426903" y="365760"/>
-            <a:ext cx="1261872" cy="347472"/>
+            <a:off x="10865816" y="365760"/>
+            <a:ext cx="822959" cy="347472"/>
           </a:xfrm>
           <a:prstGeom prst="rect">
             <a:avLst/>
@@ -5815,7 +5561,7 @@
                 <a:latin typeface="NanumGothic"/>
                 <a:ea typeface="NanumGothic"/>
               </a:rPr>
-              <a:t>Lv III–IV</a:t>
+              <a:t>환자 증상</a:t>
             </a:r>
           </a:p>
         </p:txBody>
@@ -5847,11 +5593,11 @@
                 <a:spcPct val="108000"/>
               </a:lnSpc>
               <a:spcAft>
-                <a:spcPts val="900"/>
-              </a:spcAft>
-            </a:pPr>
-            <a:r>
-              <a:rPr sz="1050" b="1" i="0">
+                <a:spcPts val="600"/>
+              </a:spcAft>
+            </a:pPr>
+            <a:r>
+              <a:rPr sz="979" b="1" i="0">
                 <a:solidFill>
                   <a:srgbClr val="2C898A"/>
                 </a:solidFill>
@@ -5861,14 +5607,14 @@
               <a:t>●  </a:t>
             </a:r>
             <a:r>
-              <a:rPr sz="1500" b="1" i="0">
+              <a:rPr sz="1400" b="1" i="0">
                 <a:solidFill>
                   <a:srgbClr val="1A202C"/>
                 </a:solidFill>
                 <a:latin typeface="NanumGothic"/>
                 <a:ea typeface="NanumGothic"/>
               </a:rPr>
-              <a:t>CRPS는 교감신경 매개 통증의 전형 → LSB 후 유의한 통증완화가 축적된 근거. 최적 환자 선택·조기 시행이 성공률↑.</a:t>
+              <a:t>하지 CRPS I/II (복합부위통증증후군) — 교감신경 매개 통증의 전형</a:t>
             </a:r>
           </a:p>
           <a:p>
@@ -5877,11 +5623,71 @@
                 <a:spcPct val="108000"/>
               </a:lnSpc>
               <a:spcAft>
-                <a:spcPts val="900"/>
-              </a:spcAft>
-            </a:pPr>
-            <a:r>
-              <a:rPr sz="1050" b="1" i="0">
+                <a:spcPts val="600"/>
+              </a:spcAft>
+            </a:pPr>
+            <a:r>
+              <a:rPr sz="1400" b="1" i="0">
+                <a:solidFill>
+                  <a:srgbClr val="5A6B7B"/>
+                </a:solidFill>
+                <a:latin typeface="NanumGothic"/>
+                <a:ea typeface="NanumGothic"/>
+              </a:rPr>
+              <a:t>      –  </a:t>
+            </a:r>
+            <a:r>
+              <a:rPr sz="1400" b="0" i="0">
+                <a:solidFill>
+                  <a:srgbClr val="1A202C"/>
+                </a:solidFill>
+                <a:latin typeface="NanumGothic"/>
+                <a:ea typeface="NanumGothic"/>
+              </a:rPr>
+              <a:t>작열통·이질통(옷·바람 스침에도 통증)·통각과민 · 부종 · 피부색(발적↔창백)·좌우 온도차 · 발한 이상</a:t>
+            </a:r>
+          </a:p>
+          <a:p>
+            <a:pPr algn="l">
+              <a:lnSpc>
+                <a:spcPct val="108000"/>
+              </a:lnSpc>
+              <a:spcAft>
+                <a:spcPts val="600"/>
+              </a:spcAft>
+            </a:pPr>
+            <a:r>
+              <a:rPr sz="1400" b="1" i="0">
+                <a:solidFill>
+                  <a:srgbClr val="5A6B7B"/>
+                </a:solidFill>
+                <a:latin typeface="NanumGothic"/>
+                <a:ea typeface="NanumGothic"/>
+              </a:rPr>
+              <a:t>      –  </a:t>
+            </a:r>
+            <a:r>
+              <a:rPr sz="1400" b="0" i="0">
+                <a:solidFill>
+                  <a:srgbClr val="5A6B7B"/>
+                </a:solidFill>
+                <a:latin typeface="NanumGothic"/>
+                <a:ea typeface="NanumGothic"/>
+              </a:rPr>
+              <a:t>호소: “발이 타는 듯 화끈거려요” · “이불만 스쳐도 아파요” · “붓고 색이 자꾸 변해요”</a:t>
+            </a:r>
+          </a:p>
+          <a:p>
+            <a:pPr algn="l">
+              <a:lnSpc>
+                <a:spcPct val="108000"/>
+              </a:lnSpc>
+              <a:spcAft>
+                <a:spcPts val="600"/>
+              </a:spcAft>
+            </a:pPr>
+            <a:r>
+              <a:rPr sz="979" b="1" i="0">
                 <a:solidFill>
                   <a:srgbClr val="2C898A"/>
                 </a:solidFill>
@@ -5891,14 +5697,44 @@
               <a:t>●  </a:t>
             </a:r>
             <a:r>
-              <a:rPr sz="1500" b="0" i="0">
+              <a:rPr sz="1400" b="1" i="0">
+                <a:solidFill>
+                  <a:srgbClr val="2E7D32"/>
+                </a:solidFill>
+                <a:latin typeface="NanumGothic"/>
+                <a:ea typeface="NanumGothic"/>
+              </a:rPr>
+              <a:t>허혈질환 — PAD·중증 하지허혈(CLI)·버거병 (동맥성 허혈)</a:t>
+            </a:r>
+          </a:p>
+          <a:p>
+            <a:pPr algn="l">
+              <a:lnSpc>
+                <a:spcPct val="108000"/>
+              </a:lnSpc>
+              <a:spcAft>
+                <a:spcPts val="600"/>
+              </a:spcAft>
+            </a:pPr>
+            <a:r>
+              <a:rPr sz="1400" b="1" i="0">
+                <a:solidFill>
+                  <a:srgbClr val="5A6B7B"/>
+                </a:solidFill>
+                <a:latin typeface="NanumGothic"/>
+                <a:ea typeface="NanumGothic"/>
+              </a:rPr>
+              <a:t>      –  </a:t>
+            </a:r>
+            <a:r>
+              <a:rPr sz="1400" b="0" i="0">
                 <a:solidFill>
                   <a:srgbClr val="1A202C"/>
                 </a:solidFill>
                 <a:latin typeface="NanumGothic"/>
                 <a:ea typeface="NanumGothic"/>
               </a:rPr>
-              <a:t>Choi 2024(Sci Rep): 교감신경 신경파괴의 효과 지속기간을 전향 관찰로 제시.</a:t>
+              <a:t>간헐적 파행(걷다 종아리 통증→쉬면 완화) → 진행 시 야간 안정통(다리 내리면 완화) · 차고 창백한 발 · 비치유 궤양·괴저</a:t>
             </a:r>
           </a:p>
           <a:p>
@@ -5907,28 +5743,28 @@
                 <a:spcPct val="108000"/>
               </a:lnSpc>
               <a:spcAft>
-                <a:spcPts val="900"/>
-              </a:spcAft>
-            </a:pPr>
-            <a:r>
-              <a:rPr sz="1050" b="1" i="0">
-                <a:solidFill>
-                  <a:srgbClr val="2C898A"/>
-                </a:solidFill>
-                <a:latin typeface="NanumGothic"/>
-                <a:ea typeface="NanumGothic"/>
-              </a:rPr>
-              <a:t>●  </a:t>
-            </a:r>
-            <a:r>
-              <a:rPr sz="1500" b="0" i="0">
-                <a:solidFill>
-                  <a:srgbClr val="1A202C"/>
-                </a:solidFill>
-                <a:latin typeface="NanumGothic"/>
-                <a:ea typeface="NanumGothic"/>
-              </a:rPr>
-              <a:t>반응 예측: 교감신경 피부반응(sympathetic skin response)이 LSB 반응 예측에 유용(Pain Ther 2023).</a:t>
+                <a:spcPts val="600"/>
+              </a:spcAft>
+            </a:pPr>
+            <a:r>
+              <a:rPr sz="1400" b="1" i="0">
+                <a:solidFill>
+                  <a:srgbClr val="5A6B7B"/>
+                </a:solidFill>
+                <a:latin typeface="NanumGothic"/>
+                <a:ea typeface="NanumGothic"/>
+              </a:rPr>
+              <a:t>      –  </a:t>
+            </a:r>
+            <a:r>
+              <a:rPr sz="1400" b="0" i="0">
+                <a:solidFill>
+                  <a:srgbClr val="5A6B7B"/>
+                </a:solidFill>
+                <a:latin typeface="NanumGothic"/>
+                <a:ea typeface="NanumGothic"/>
+              </a:rPr>
+              <a:t>호소: “걸으면 종아리가 터질 듯 아파요” · “밤에 발이 시려 잠을 못 자요” · “상처가 안 아물어요”</a:t>
             </a:r>
           </a:p>
           <a:p>
@@ -5937,58 +5773,28 @@
                 <a:spcPct val="108000"/>
               </a:lnSpc>
               <a:spcAft>
-                <a:spcPts val="900"/>
-              </a:spcAft>
-            </a:pPr>
-            <a:r>
-              <a:rPr sz="1050" b="1" i="0">
-                <a:solidFill>
-                  <a:srgbClr val="2C898A"/>
-                </a:solidFill>
-                <a:latin typeface="NanumGothic"/>
-                <a:ea typeface="NanumGothic"/>
-              </a:rPr>
-              <a:t>●  </a:t>
-            </a:r>
-            <a:r>
-              <a:rPr sz="1500" b="0" i="0">
+                <a:spcPts val="600"/>
+              </a:spcAft>
+            </a:pPr>
+            <a:r>
+              <a:rPr sz="1400" b="1" i="0">
                 <a:solidFill>
                   <a:srgbClr val="5A6B7B"/>
                 </a:solidFill>
                 <a:latin typeface="NanumGothic"/>
                 <a:ea typeface="NanumGothic"/>
               </a:rPr>
-              <a:t>한계: 중추 감작이 진행되면 시간이 지날수록 효과 감소 가능.</a:t>
-            </a:r>
-          </a:p>
-          <a:p>
-            <a:pPr algn="l">
-              <a:lnSpc>
-                <a:spcPct val="108000"/>
-              </a:lnSpc>
-              <a:spcAft>
-                <a:spcPts val="900"/>
-              </a:spcAft>
-            </a:pPr>
-            <a:r>
-              <a:rPr sz="1500" b="1" i="0">
-                <a:solidFill>
-                  <a:srgbClr val="5A6B7B"/>
-                </a:solidFill>
-                <a:latin typeface="NanumGothic"/>
-                <a:ea typeface="NanumGothic"/>
-              </a:rPr>
               <a:t/>
             </a:r>
             <a:r>
-              <a:rPr sz="1500" b="1" i="0">
+              <a:rPr sz="1400" b="1" i="0">
                 <a:solidFill>
                   <a:srgbClr val="1F6E70"/>
                 </a:solidFill>
                 <a:latin typeface="NanumGothic"/>
                 <a:ea typeface="NanumGothic"/>
               </a:rPr>
-              <a:t>기전 요약: 교감차단 → 측부순환 혈관확장 → 조직 산소화↑ → 통증↓ + 교감매개통 차단 + 신경파괴 직접효과.</a:t>
+              <a:t>‘허혈’은 동맥성 부족을 의미 — 하지정맥류 등 정맥질환은 LSB 적응증 아님(압박·정맥폐색술이 표준).</a:t>
             </a:r>
           </a:p>
         </p:txBody>
@@ -6031,7 +5837,7 @@
                 <a:latin typeface="NanumGothic"/>
                 <a:ea typeface="NanumGothic"/>
               </a:rPr>
-              <a:t>근거: Choi 2024(Sci Rep); Pain Ther 2023</a:t>
+              <a:t>근거: StatPearls; 문헌고찰 종합</a:t>
             </a:r>
           </a:p>
         </p:txBody>
@@ -6179,7 +5985,7 @@
                 <a:latin typeface="NanumGothic"/>
                 <a:ea typeface="NanumGothic"/>
               </a:rPr>
-              <a:t>근거수준 · 결론</a:t>
+              <a:t>적응증별 환자 증상·호소 ② — 신경병증·기타</a:t>
             </a:r>
           </a:p>
         </p:txBody>
@@ -6222,7 +6028,7 @@
                 <a:latin typeface="NanumGothic"/>
                 <a:ea typeface="NanumGothic"/>
               </a:rPr>
-              <a:t>안전성 · 결론</a:t>
+              <a:t>적응증 · 증상</a:t>
             </a:r>
           </a:p>
         </p:txBody>
@@ -6279,8 +6085,8 @@
         </p:nvSpPr>
         <p:spPr>
           <a:xfrm>
-            <a:off x="11194999" y="365760"/>
-            <a:ext cx="493776" cy="347472"/>
+            <a:off x="10865816" y="365760"/>
+            <a:ext cx="822959" cy="347472"/>
           </a:xfrm>
           <a:prstGeom prst="roundRect">
             <a:avLst>
@@ -6288,7 +6094,7 @@
             </a:avLst>
           </a:prstGeom>
           <a:solidFill>
-            <a:srgbClr val="B03A2E"/>
+            <a:srgbClr val="2C898A"/>
           </a:solidFill>
           <a:ln>
             <a:noFill/>
@@ -6325,8 +6131,8 @@
         </p:nvSpPr>
         <p:spPr>
           <a:xfrm>
-            <a:off x="11194999" y="365760"/>
-            <a:ext cx="493776" cy="347472"/>
+            <a:off x="10865816" y="365760"/>
+            <a:ext cx="822959" cy="347472"/>
           </a:xfrm>
           <a:prstGeom prst="rect">
             <a:avLst/>
@@ -6355,7 +6161,7 @@
                 <a:latin typeface="NanumGothic"/>
                 <a:ea typeface="NanumGothic"/>
               </a:rPr>
-              <a:t>결론</a:t>
+              <a:t>환자 증상</a:t>
             </a:r>
           </a:p>
         </p:txBody>
@@ -6387,11 +6193,11 @@
                 <a:spcPct val="108000"/>
               </a:lnSpc>
               <a:spcAft>
-                <a:spcPts val="900"/>
-              </a:spcAft>
-            </a:pPr>
-            <a:r>
-              <a:rPr sz="1050" b="1" i="0">
+                <a:spcPts val="600"/>
+              </a:spcAft>
+            </a:pPr>
+            <a:r>
+              <a:rPr sz="979" b="1" i="0">
                 <a:solidFill>
                   <a:srgbClr val="2C898A"/>
                 </a:solidFill>
@@ -6401,14 +6207,14 @@
               <a:t>●  </a:t>
             </a:r>
             <a:r>
-              <a:rPr sz="1500" b="1" i="0">
-                <a:solidFill>
-                  <a:srgbClr val="B03A2E"/>
-                </a:solidFill>
-                <a:latin typeface="NanumGothic"/>
-                <a:ea typeface="NanumGothic"/>
-              </a:rPr>
-              <a:t>합병증·회피는 앞의 조감도·회피표 참고 — 대부분 영상유도·정확한 바늘 위치로 예방 가능.</a:t>
+              <a:rPr sz="1400" b="1" i="0">
+                <a:solidFill>
+                  <a:srgbClr val="1A202C"/>
+                </a:solidFill>
+                <a:latin typeface="NanumGothic"/>
+                <a:ea typeface="NanumGothic"/>
+              </a:rPr>
+              <a:t>신경병증 — 당뇨병성 신경병증/당뇨발·대상포진후신경통·환상지통</a:t>
             </a:r>
           </a:p>
           <a:p>
@@ -6417,11 +6223,71 @@
                 <a:spcPct val="108000"/>
               </a:lnSpc>
               <a:spcAft>
-                <a:spcPts val="900"/>
-              </a:spcAft>
-            </a:pPr>
-            <a:r>
-              <a:rPr sz="1050" b="1" i="0">
+                <a:spcPts val="600"/>
+              </a:spcAft>
+            </a:pPr>
+            <a:r>
+              <a:rPr sz="1400" b="1" i="0">
+                <a:solidFill>
+                  <a:srgbClr val="5A6B7B"/>
+                </a:solidFill>
+                <a:latin typeface="NanumGothic"/>
+                <a:ea typeface="NanumGothic"/>
+              </a:rPr>
+              <a:t>      –  </a:t>
+            </a:r>
+            <a:r>
+              <a:rPr sz="1400" b="0" i="0">
+                <a:solidFill>
+                  <a:srgbClr val="1A202C"/>
+                </a:solidFill>
+                <a:latin typeface="NanumGothic"/>
+                <a:ea typeface="NanumGothic"/>
+              </a:rPr>
+              <a:t>저림·화끈거림·전기 오듯 찌름 · 이질통 · 감각저하(양말 신은 느낌) · 야간 악화 · 당뇨발 궤양·관류저하</a:t>
+            </a:r>
+          </a:p>
+          <a:p>
+            <a:pPr algn="l">
+              <a:lnSpc>
+                <a:spcPct val="108000"/>
+              </a:lnSpc>
+              <a:spcAft>
+                <a:spcPts val="600"/>
+              </a:spcAft>
+            </a:pPr>
+            <a:r>
+              <a:rPr sz="1400" b="1" i="0">
+                <a:solidFill>
+                  <a:srgbClr val="5A6B7B"/>
+                </a:solidFill>
+                <a:latin typeface="NanumGothic"/>
+                <a:ea typeface="NanumGothic"/>
+              </a:rPr>
+              <a:t>      –  </a:t>
+            </a:r>
+            <a:r>
+              <a:rPr sz="1400" b="0" i="0">
+                <a:solidFill>
+                  <a:srgbClr val="5A6B7B"/>
+                </a:solidFill>
+                <a:latin typeface="NanumGothic"/>
+                <a:ea typeface="NanumGothic"/>
+              </a:rPr>
+              <a:t>호소: “발이 저리고 화끈거려요” · “밤에 더 심해요” · “전기가 찌릿 오는 것 같아요”</a:t>
+            </a:r>
+          </a:p>
+          <a:p>
+            <a:pPr algn="l">
+              <a:lnSpc>
+                <a:spcPct val="108000"/>
+              </a:lnSpc>
+              <a:spcAft>
+                <a:spcPts val="600"/>
+              </a:spcAft>
+            </a:pPr>
+            <a:r>
+              <a:rPr sz="979" b="1" i="0">
                 <a:solidFill>
                   <a:srgbClr val="2C898A"/>
                 </a:solidFill>
@@ -6431,14 +6297,14 @@
               <a:t>●  </a:t>
             </a:r>
             <a:r>
-              <a:rPr sz="1500" b="0" i="0">
+              <a:rPr sz="1400" b="1" i="0">
                 <a:solidFill>
                   <a:srgbClr val="1A202C"/>
                 </a:solidFill>
                 <a:latin typeface="NanumGothic"/>
                 <a:ea typeface="NanumGothic"/>
               </a:rPr>
-              <a:t>근거수준: 대부분 관찰·증례군·소규모 전향연구로 대규모 RCT는 부족(허혈·CRPS Level III~IV). 단, 난치성 당뇨병성 신경병증엔 RCT 존재.</a:t>
+              <a:t>기타 — 족부 다한증·레이노(하지)·홍색사지통증·암성 하지통</a:t>
             </a:r>
           </a:p>
           <a:p>
@@ -6447,28 +6313,28 @@
                 <a:spcPct val="108000"/>
               </a:lnSpc>
               <a:spcAft>
-                <a:spcPts val="900"/>
-              </a:spcAft>
-            </a:pPr>
-            <a:r>
-              <a:rPr sz="1050" b="1" i="0">
-                <a:solidFill>
-                  <a:srgbClr val="2C898A"/>
-                </a:solidFill>
-                <a:latin typeface="NanumGothic"/>
-                <a:ea typeface="NanumGothic"/>
-              </a:rPr>
-              <a:t>●  </a:t>
-            </a:r>
-            <a:r>
-              <a:rPr sz="1500" b="0" i="0">
+                <a:spcPts val="600"/>
+              </a:spcAft>
+            </a:pPr>
+            <a:r>
+              <a:rPr sz="1400" b="1" i="0">
+                <a:solidFill>
+                  <a:srgbClr val="5A6B7B"/>
+                </a:solidFill>
+                <a:latin typeface="NanumGothic"/>
+                <a:ea typeface="NanumGothic"/>
+              </a:rPr>
+              <a:t>      –  </a:t>
+            </a:r>
+            <a:r>
+              <a:rPr sz="1400" b="0" i="0">
                 <a:solidFill>
                   <a:srgbClr val="1A202C"/>
                 </a:solidFill>
                 <a:latin typeface="NanumGothic"/>
                 <a:ea typeface="NanumGothic"/>
               </a:rPr>
-              <a:t>시행 원칙: 원인 감별 → 진단적 국소마취제 차단(온도 ≥2°C 확인) → 반응 양호 시 신경파괴/RFA.</a:t>
+              <a:t>다한증(과한 발땀·축축·악취) · 레이노(추위·스트레스에 창백→청색→발적 삼색변화·저림) · 홍색사지통증(발작적 발적·작열·열감, 열에 악화)</a:t>
             </a:r>
           </a:p>
           <a:p>
@@ -6477,28 +6343,28 @@
                 <a:spcPct val="108000"/>
               </a:lnSpc>
               <a:spcAft>
-                <a:spcPts val="900"/>
-              </a:spcAft>
-            </a:pPr>
-            <a:r>
-              <a:rPr sz="1500" b="1" i="0">
+                <a:spcPts val="600"/>
+              </a:spcAft>
+            </a:pPr>
+            <a:r>
+              <a:rPr sz="1400" b="1" i="0">
                 <a:solidFill>
                   <a:srgbClr val="5A6B7B"/>
                 </a:solidFill>
                 <a:latin typeface="NanumGothic"/>
                 <a:ea typeface="NanumGothic"/>
               </a:rPr>
-              <a:t/>
-            </a:r>
-            <a:r>
-              <a:rPr sz="1500" b="1" i="0">
-                <a:solidFill>
-                  <a:srgbClr val="1F6E70"/>
-                </a:solidFill>
-                <a:latin typeface="NanumGothic"/>
-                <a:ea typeface="NanumGothic"/>
-              </a:rPr>
-              <a:t>그럼에도 조기 CRPS·재건 불가능한 중증 하지허혈(안정통)·난치성 신경병증에서 임상적으로 유용.</a:t>
+              <a:t>      –  </a:t>
+            </a:r>
+            <a:r>
+              <a:rPr sz="1400" b="0" i="0">
+                <a:solidFill>
+                  <a:srgbClr val="5A6B7B"/>
+                </a:solidFill>
+                <a:latin typeface="NanumGothic"/>
+                <a:ea typeface="NanumGothic"/>
+              </a:rPr>
+              <a:t>호소: “발에 땀이 너무 많아요” · “추우면 발이 하얘졌다 파래져요” · “발이 화끈 달아올라요”</a:t>
             </a:r>
           </a:p>
         </p:txBody>
@@ -6689,7 +6555,7 @@
                 <a:latin typeface="NanumGothic"/>
                 <a:ea typeface="NanumGothic"/>
               </a:rPr>
-              <a:t>실제 진료 순서 — 교감신경 축을 겨냥한 단계적 접근</a:t>
+              <a:t>밤에 저리고 화끈거리는 다리 — 당뇨병성 신경병증과 LSB</a:t>
             </a:r>
           </a:p>
         </p:txBody>
@@ -6732,7 +6598,7 @@
                 <a:latin typeface="NanumGothic"/>
                 <a:ea typeface="NanumGothic"/>
               </a:rPr>
-              <a:t>나의 프로토콜 · 실제 적용</a:t>
+              <a:t>적응증 · 심화</a:t>
             </a:r>
           </a:p>
         </p:txBody>
@@ -6789,8 +6655,8 @@
         </p:nvSpPr>
         <p:spPr>
           <a:xfrm>
-            <a:off x="10865816" y="365760"/>
-            <a:ext cx="822959" cy="347472"/>
+            <a:off x="10536631" y="365760"/>
+            <a:ext cx="1152144" cy="347472"/>
           </a:xfrm>
           <a:prstGeom prst="roundRect">
             <a:avLst>
@@ -6798,7 +6664,7 @@
             </a:avLst>
           </a:prstGeom>
           <a:solidFill>
-            <a:srgbClr val="1A202C"/>
+            <a:srgbClr val="2C898A"/>
           </a:solidFill>
           <a:ln>
             <a:noFill/>
@@ -6835,8 +6701,8 @@
         </p:nvSpPr>
         <p:spPr>
           <a:xfrm>
-            <a:off x="10865816" y="365760"/>
-            <a:ext cx="822959" cy="347472"/>
+            <a:off x="10536631" y="365760"/>
+            <a:ext cx="1152144" cy="347472"/>
           </a:xfrm>
           <a:prstGeom prst="rect">
             <a:avLst/>
@@ -6865,7 +6731,7 @@
                 <a:latin typeface="NanumGothic"/>
                 <a:ea typeface="NanumGothic"/>
               </a:rPr>
-              <a:t>실전 순서</a:t>
+              <a:t>야간 신경병증통</a:t>
             </a:r>
           </a:p>
         </p:txBody>
@@ -6879,7 +6745,7 @@
         <p:spPr>
           <a:xfrm>
             <a:off x="731520" y="1371600"/>
-            <a:ext cx="10835640" cy="4754880"/>
+            <a:ext cx="6400800" cy="4663440"/>
           </a:xfrm>
           <a:prstGeom prst="rect">
             <a:avLst/>
@@ -6911,6 +6777,36 @@
               <a:t>●  </a:t>
             </a:r>
             <a:r>
+              <a:rPr sz="1400" b="1" i="0">
+                <a:solidFill>
+                  <a:srgbClr val="1A202C"/>
+                </a:solidFill>
+                <a:latin typeface="NanumGothic"/>
+                <a:ea typeface="NanumGothic"/>
+              </a:rPr>
+              <a:t>임상상: 당뇨병성 말초신경병증 — 발·종아리 저림·화끈거림·전기 찌름, 양측 ‘양말’ 분포.</a:t>
+            </a:r>
+          </a:p>
+          <a:p>
+            <a:pPr algn="l">
+              <a:lnSpc>
+                <a:spcPct val="108000"/>
+              </a:lnSpc>
+              <a:spcAft>
+                <a:spcPts val="800"/>
+              </a:spcAft>
+            </a:pPr>
+            <a:r>
+              <a:rPr sz="979" b="1" i="0">
+                <a:solidFill>
+                  <a:srgbClr val="2C898A"/>
+                </a:solidFill>
+                <a:latin typeface="NanumGothic"/>
+                <a:ea typeface="NanumGothic"/>
+              </a:rPr>
+              <a:t>●  </a:t>
+            </a:r>
+            <a:r>
               <a:rPr sz="1400" b="0" i="0">
                 <a:solidFill>
                   <a:srgbClr val="1A202C"/>
@@ -6918,7 +6814,7 @@
                 <a:latin typeface="NanumGothic"/>
                 <a:ea typeface="NanumGothic"/>
               </a:rPr>
-              <a:t>① 감별·검사: '밤/하지 증상'이 동맥성 허혈(ABI·도플러)·CRPS·신경병증인지 확인. 특발 경련·RLS·정맥류 배제.</a:t>
+              <a:t>야간통: 이불 온기·야간 순환·주의분산 소실 → 밤에 증폭·수면 방해.</a:t>
             </a:r>
           </a:p>
           <a:p>
@@ -6948,7 +6844,7 @@
                 <a:latin typeface="NanumGothic"/>
                 <a:ea typeface="NanumGothic"/>
               </a:rPr>
-              <a:t>② 방향 설정: 교감매개통·허혈로 판단되면 교감신경 축(L2–L3)을 겨냥.</a:t>
+              <a:t>먼저 감별: RLS(움직이면 완화)·NLC(경련)·허혈성 안정통과 구분.</a:t>
             </a:r>
           </a:p>
           <a:p>
@@ -6961,7 +6857,149 @@
               </a:spcAft>
             </a:pPr>
             <a:r>
-              <a:rPr sz="979" b="1" i="0">
+              <a:rPr sz="1400" b="1" i="0">
+                <a:solidFill>
+                  <a:srgbClr val="5A6B7B"/>
+                </a:solidFill>
+                <a:latin typeface="NanumGothic"/>
+                <a:ea typeface="NanumGothic"/>
+              </a:rPr>
+              <a:t/>
+            </a:r>
+            <a:r>
+              <a:rPr sz="1400" b="1" i="0">
+                <a:solidFill>
+                  <a:srgbClr val="1F6E70"/>
+                </a:solidFill>
+                <a:latin typeface="NanumGothic"/>
+                <a:ea typeface="NanumGothic"/>
+              </a:rPr>
+              <a:t>1차: 혈당조절+약물(가바펜틴·듀록세틴) → 난치성이면 LSB 고려</a:t>
+            </a:r>
+          </a:p>
+        </p:txBody>
+      </p:sp>
+      <p:sp>
+        <p:nvSpPr>
+          <p:cNvPr id="9" name="Rounded Rectangle 8"/>
+          <p:cNvSpPr/>
+          <p:nvPr/>
+        </p:nvSpPr>
+        <p:spPr>
+          <a:xfrm>
+            <a:off x="7406640" y="1463040"/>
+            <a:ext cx="4114800" cy="4480560"/>
+          </a:xfrm>
+          <a:prstGeom prst="roundRect">
+            <a:avLst>
+              <a:gd name="adj" fmla="val 8000"/>
+            </a:avLst>
+          </a:prstGeom>
+          <a:solidFill>
+            <a:srgbClr val="1B355E"/>
+          </a:solidFill>
+          <a:ln>
+            <a:noFill/>
+          </a:ln>
+          <a:effectLst/>
+        </p:spPr>
+        <p:style>
+          <a:lnRef idx="1">
+            <a:schemeClr val="accent1"/>
+          </a:lnRef>
+          <a:fillRef idx="3">
+            <a:schemeClr val="accent1"/>
+          </a:fillRef>
+          <a:effectRef idx="2">
+            <a:schemeClr val="accent1"/>
+          </a:effectRef>
+          <a:fontRef idx="minor">
+            <a:schemeClr val="lt1"/>
+          </a:fontRef>
+        </p:style>
+        <p:txBody>
+          <a:bodyPr rtlCol="0" anchor="ctr"/>
+          <a:lstStyle/>
+          <a:p>
+            <a:pPr algn="ctr"/>
+          </a:p>
+        </p:txBody>
+      </p:sp>
+      <p:sp>
+        <p:nvSpPr>
+          <p:cNvPr id="10" name="TextBox 9"/>
+          <p:cNvSpPr txBox="1"/>
+          <p:nvPr/>
+        </p:nvSpPr>
+        <p:spPr>
+          <a:xfrm>
+            <a:off x="7680960" y="1691640"/>
+            <a:ext cx="3657600" cy="365760"/>
+          </a:xfrm>
+          <a:prstGeom prst="rect">
+            <a:avLst/>
+          </a:prstGeom>
+          <a:noFill/>
+        </p:spPr>
+        <p:txBody>
+          <a:bodyPr wrap="square" anchor="t" lIns="0" rIns="0" tIns="0" bIns="0">
+            <a:spAutoFit/>
+          </a:bodyPr>
+          <a:lstStyle/>
+          <a:p>
+            <a:pPr algn="l">
+              <a:lnSpc>
+                <a:spcPct val="108000"/>
+              </a:lnSpc>
+              <a:spcAft>
+                <a:spcPts val="400"/>
+              </a:spcAft>
+            </a:pPr>
+            <a:r>
+              <a:rPr sz="1300" b="1" i="0">
+                <a:solidFill>
+                  <a:srgbClr val="BFD3E6"/>
+                </a:solidFill>
+                <a:latin typeface="NanumGothic"/>
+                <a:ea typeface="NanumGothic"/>
+              </a:rPr>
+              <a:t>LSB — 치료 삽입</a:t>
+            </a:r>
+          </a:p>
+        </p:txBody>
+      </p:sp>
+      <p:sp>
+        <p:nvSpPr>
+          <p:cNvPr id="11" name="TextBox 10"/>
+          <p:cNvSpPr txBox="1"/>
+          <p:nvPr/>
+        </p:nvSpPr>
+        <p:spPr>
+          <a:xfrm>
+            <a:off x="7680960" y="2194560"/>
+            <a:ext cx="3611880" cy="3657600"/>
+          </a:xfrm>
+          <a:prstGeom prst="rect">
+            <a:avLst/>
+          </a:prstGeom>
+          <a:noFill/>
+        </p:spPr>
+        <p:txBody>
+          <a:bodyPr wrap="square" lIns="0" rIns="0" tIns="0" bIns="0">
+            <a:spAutoFit/>
+          </a:bodyPr>
+          <a:lstStyle/>
+          <a:p>
+            <a:pPr algn="l">
+              <a:lnSpc>
+                <a:spcPct val="108000"/>
+              </a:lnSpc>
+              <a:spcAft>
+                <a:spcPts val="800"/>
+              </a:spcAft>
+            </a:pPr>
+            <a:r>
+              <a:rPr sz="875" b="1" i="0">
                 <a:solidFill>
                   <a:srgbClr val="2C898A"/>
                 </a:solidFill>
@@ -6971,14 +7009,14 @@
               <a:t>●  </a:t>
             </a:r>
             <a:r>
-              <a:rPr sz="1400" b="1" i="0">
-                <a:solidFill>
-                  <a:srgbClr val="2E7D32"/>
-                </a:solidFill>
-                <a:latin typeface="NanumGothic"/>
-                <a:ea typeface="NanumGothic"/>
-              </a:rPr>
-              <a:t>③ 진단적 차단: 투시 유도 국소마취제 LSB → 피부온도 ≥2°C 상승·통증 반응 확인.</a:t>
+              <a:rPr sz="1250" b="0" i="0">
+                <a:solidFill>
+                  <a:srgbClr val="FFFFFF"/>
+                </a:solidFill>
+                <a:latin typeface="NanumGothic"/>
+                <a:ea typeface="NanumGothic"/>
+              </a:rPr>
+              <a:t>기전: 교감차단 → 미세순환↑ + 교감매개통 차단</a:t>
             </a:r>
           </a:p>
           <a:p>
@@ -6991,7 +7029,7 @@
               </a:spcAft>
             </a:pPr>
             <a:r>
-              <a:rPr sz="979" b="1" i="0">
+              <a:rPr sz="875" b="1" i="0">
                 <a:solidFill>
                   <a:srgbClr val="2C898A"/>
                 </a:solidFill>
@@ -7001,14 +7039,14 @@
               <a:t>●  </a:t>
             </a:r>
             <a:r>
-              <a:rPr sz="1400" b="1" i="0">
-                <a:solidFill>
-                  <a:srgbClr val="2E7D32"/>
-                </a:solidFill>
-                <a:latin typeface="NanumGothic"/>
-                <a:ea typeface="NanumGothic"/>
-              </a:rPr>
-              <a:t>④ 반응 양호 시: 치료적 반복 차단, 또는 신경파괴(무수알코올/phenol)·RFA로 장기 완화.</a:t>
+              <a:rPr sz="1250" b="0" i="0">
+                <a:solidFill>
+                  <a:srgbClr val="FFFFFF"/>
+                </a:solidFill>
+                <a:latin typeface="NanumGothic"/>
+                <a:ea typeface="NanumGothic"/>
+              </a:rPr>
+              <a:t>근거: 난치성 DPN에 LSB+신경파괴 RCT·증례</a:t>
             </a:r>
           </a:p>
           <a:p>
@@ -7021,7 +7059,7 @@
               </a:spcAft>
             </a:pPr>
             <a:r>
-              <a:rPr sz="979" b="1" i="0">
+              <a:rPr sz="875" b="1" i="0">
                 <a:solidFill>
                   <a:srgbClr val="2C898A"/>
                 </a:solidFill>
@@ -7031,14 +7069,14 @@
               <a:t>●  </a:t>
             </a:r>
             <a:r>
-              <a:rPr sz="1400" b="0" i="0">
-                <a:solidFill>
-                  <a:srgbClr val="1A202C"/>
-                </a:solidFill>
-                <a:latin typeface="NanumGothic"/>
-                <a:ea typeface="NanumGothic"/>
-              </a:rPr>
-              <a:t>⑤ 대상별: CRPS는 조기(≤12개월) 유리 · 난치성 당뇨병성 신경병증은 지속 LSB+신경파괴(RCT).</a:t>
+              <a:rPr sz="1250" b="0" i="0">
+                <a:solidFill>
+                  <a:srgbClr val="FFFFFF"/>
+                </a:solidFill>
+                <a:latin typeface="NanumGothic"/>
+                <a:ea typeface="NanumGothic"/>
+              </a:rPr>
+              <a:t>적용: 약물 불응·진단차단 양성 시 선택적 시행</a:t>
             </a:r>
           </a:p>
           <a:p>
@@ -7051,31 +7089,31 @@
               </a:spcAft>
             </a:pPr>
             <a:r>
-              <a:rPr sz="1400" b="1" i="0">
-                <a:solidFill>
-                  <a:srgbClr val="5A6B7B"/>
-                </a:solidFill>
-                <a:latin typeface="NanumGothic"/>
-                <a:ea typeface="NanumGothic"/>
-              </a:rPr>
-              <a:t/>
-            </a:r>
-            <a:r>
-              <a:rPr sz="1400" b="1" i="0">
-                <a:solidFill>
-                  <a:srgbClr val="1F6E70"/>
-                </a:solidFill>
-                <a:latin typeface="NanumGothic"/>
-                <a:ea typeface="NanumGothic"/>
-              </a:rPr>
-              <a:t>⑥ 주의: 특발성 NLC·정맥질환은 적응 아님 · 합병증(생식대퇴신경통 5–10% 등) 사전 고지.</a:t>
-            </a:r>
-          </a:p>
-        </p:txBody>
-      </p:sp>
-      <p:sp>
-        <p:nvSpPr>
-          <p:cNvPr id="9" name="TextBox 8"/>
+              <a:rPr sz="875" b="1" i="0">
+                <a:solidFill>
+                  <a:srgbClr val="2C898A"/>
+                </a:solidFill>
+                <a:latin typeface="NanumGothic"/>
+                <a:ea typeface="NanumGothic"/>
+              </a:rPr>
+              <a:t>●  </a:t>
+            </a:r>
+            <a:r>
+              <a:rPr sz="1250" b="0" i="0">
+                <a:solidFill>
+                  <a:srgbClr val="FFFFFF"/>
+                </a:solidFill>
+                <a:latin typeface="NanumGothic"/>
+                <a:ea typeface="NanumGothic"/>
+              </a:rPr>
+              <a:t>성공지표: 피부온도 ≥2°C↑ (근거 제한적)</a:t>
+            </a:r>
+          </a:p>
+        </p:txBody>
+      </p:sp>
+      <p:sp>
+        <p:nvSpPr>
+          <p:cNvPr id="12" name="TextBox 11"/>
           <p:cNvSpPr txBox="1"/>
           <p:nvPr/>
         </p:nvSpPr>
@@ -7111,14 +7149,14 @@
                 <a:latin typeface="NanumGothic"/>
                 <a:ea typeface="NanumGothic"/>
               </a:rPr>
-              <a:t>근거: 교육용 제안 · 개별 적용은 임상 판단 · 신경파괴는 진단차단 양성 시에만</a:t>
-            </a:r>
-          </a:p>
-        </p:txBody>
-      </p:sp>
-      <p:sp>
-        <p:nvSpPr>
-          <p:cNvPr id="10" name="TextBox 9"/>
+              <a:t>근거: Zhang 2020(RCT) PMID 32915421; 증례 PMID 22606406; StatPearls NBK442009</a:t>
+            </a:r>
+          </a:p>
+        </p:txBody>
+      </p:sp>
+      <p:sp>
+        <p:nvSpPr>
+          <p:cNvPr id="13" name="TextBox 12"/>
           <p:cNvSpPr txBox="1"/>
           <p:nvPr/>
         </p:nvSpPr>
@@ -7185,11 +7223,389 @@
         </p:nvSpPr>
         <p:spPr>
           <a:xfrm>
-            <a:off x="0" y="0"/>
-            <a:ext cx="12191695" cy="6858000"/>
-          </a:xfrm>
-          <a:prstGeom prst="rect">
-            <a:avLst/>
+            <a:off x="502920" y="310896"/>
+            <a:ext cx="109728" cy="457200"/>
+          </a:xfrm>
+          <a:prstGeom prst="rect">
+            <a:avLst/>
+          </a:prstGeom>
+          <a:solidFill>
+            <a:srgbClr val="2C898A"/>
+          </a:solidFill>
+          <a:ln>
+            <a:noFill/>
+          </a:ln>
+          <a:effectLst/>
+        </p:spPr>
+        <p:style>
+          <a:lnRef idx="1">
+            <a:schemeClr val="accent1"/>
+          </a:lnRef>
+          <a:fillRef idx="3">
+            <a:schemeClr val="accent1"/>
+          </a:fillRef>
+          <a:effectRef idx="2">
+            <a:schemeClr val="accent1"/>
+          </a:effectRef>
+          <a:fontRef idx="minor">
+            <a:schemeClr val="lt1"/>
+          </a:fontRef>
+        </p:style>
+        <p:txBody>
+          <a:bodyPr rtlCol="0" anchor="ctr"/>
+          <a:lstStyle/>
+          <a:p>
+            <a:pPr algn="ctr"/>
+          </a:p>
+        </p:txBody>
+      </p:sp>
+      <p:sp>
+        <p:nvSpPr>
+          <p:cNvPr id="3" name="TextBox 2"/>
+          <p:cNvSpPr txBox="1"/>
+          <p:nvPr/>
+        </p:nvSpPr>
+        <p:spPr>
+          <a:xfrm>
+            <a:off x="731520" y="237744"/>
+            <a:ext cx="9509760" cy="685800"/>
+          </a:xfrm>
+          <a:prstGeom prst="rect">
+            <a:avLst/>
+          </a:prstGeom>
+          <a:noFill/>
+        </p:spPr>
+        <p:txBody>
+          <a:bodyPr wrap="square" anchor="ctr" lIns="0" rIns="0" tIns="0" bIns="0">
+            <a:spAutoFit/>
+          </a:bodyPr>
+          <a:lstStyle/>
+          <a:p>
+            <a:pPr algn="l">
+              <a:lnSpc>
+                <a:spcPct val="108000"/>
+              </a:lnSpc>
+              <a:spcAft>
+                <a:spcPts val="400"/>
+              </a:spcAft>
+            </a:pPr>
+            <a:r>
+              <a:rPr sz="2400" b="1" i="0">
+                <a:solidFill>
+                  <a:srgbClr val="1B355E"/>
+                </a:solidFill>
+                <a:latin typeface="NanumGothic"/>
+                <a:ea typeface="NanumGothic"/>
+              </a:rPr>
+              <a:t>효과 (1) 관류 개선 · 허혈성 통증</a:t>
+            </a:r>
+          </a:p>
+        </p:txBody>
+      </p:sp>
+      <p:sp>
+        <p:nvSpPr>
+          <p:cNvPr id="4" name="TextBox 3"/>
+          <p:cNvSpPr txBox="1"/>
+          <p:nvPr/>
+        </p:nvSpPr>
+        <p:spPr>
+          <a:xfrm>
+            <a:off x="749808" y="109728"/>
+            <a:ext cx="7315200" cy="219456"/>
+          </a:xfrm>
+          <a:prstGeom prst="rect">
+            <a:avLst/>
+          </a:prstGeom>
+          <a:noFill/>
+        </p:spPr>
+        <p:txBody>
+          <a:bodyPr wrap="square" anchor="t" lIns="0" rIns="0" tIns="0" bIns="0">
+            <a:spAutoFit/>
+          </a:bodyPr>
+          <a:lstStyle/>
+          <a:p>
+            <a:pPr algn="l">
+              <a:lnSpc>
+                <a:spcPct val="108000"/>
+              </a:lnSpc>
+              <a:spcAft>
+                <a:spcPts val="400"/>
+              </a:spcAft>
+            </a:pPr>
+            <a:r>
+              <a:rPr sz="1100" b="1" i="0">
+                <a:solidFill>
+                  <a:srgbClr val="1F6E70"/>
+                </a:solidFill>
+                <a:latin typeface="NanumGothic"/>
+                <a:ea typeface="NanumGothic"/>
+              </a:rPr>
+              <a:t>효과</a:t>
+            </a:r>
+          </a:p>
+        </p:txBody>
+      </p:sp>
+      <p:sp>
+        <p:nvSpPr>
+          <p:cNvPr id="5" name="Rectangle 4"/>
+          <p:cNvSpPr/>
+          <p:nvPr/>
+        </p:nvSpPr>
+        <p:spPr>
+          <a:xfrm>
+            <a:off x="731520" y="969264"/>
+            <a:ext cx="10881360" cy="17780"/>
+          </a:xfrm>
+          <a:prstGeom prst="rect">
+            <a:avLst/>
+          </a:prstGeom>
+          <a:solidFill>
+            <a:srgbClr val="D5DEE7"/>
+          </a:solidFill>
+          <a:ln>
+            <a:noFill/>
+          </a:ln>
+          <a:effectLst/>
+        </p:spPr>
+        <p:style>
+          <a:lnRef idx="1">
+            <a:schemeClr val="accent1"/>
+          </a:lnRef>
+          <a:fillRef idx="3">
+            <a:schemeClr val="accent1"/>
+          </a:fillRef>
+          <a:effectRef idx="2">
+            <a:schemeClr val="accent1"/>
+          </a:effectRef>
+          <a:fontRef idx="minor">
+            <a:schemeClr val="lt1"/>
+          </a:fontRef>
+        </p:style>
+        <p:txBody>
+          <a:bodyPr rtlCol="0" anchor="ctr"/>
+          <a:lstStyle/>
+          <a:p>
+            <a:pPr algn="ctr"/>
+          </a:p>
+        </p:txBody>
+      </p:sp>
+      <p:sp>
+        <p:nvSpPr>
+          <p:cNvPr id="6" name="Rounded Rectangle 5"/>
+          <p:cNvSpPr/>
+          <p:nvPr/>
+        </p:nvSpPr>
+        <p:spPr>
+          <a:xfrm>
+            <a:off x="10426903" y="365760"/>
+            <a:ext cx="1261872" cy="347472"/>
+          </a:xfrm>
+          <a:prstGeom prst="roundRect">
+            <a:avLst>
+              <a:gd name="adj" fmla="val 8000"/>
+            </a:avLst>
+          </a:prstGeom>
+          <a:solidFill>
+            <a:srgbClr val="B97A0C"/>
+          </a:solidFill>
+          <a:ln>
+            <a:noFill/>
+          </a:ln>
+          <a:effectLst/>
+        </p:spPr>
+        <p:style>
+          <a:lnRef idx="1">
+            <a:schemeClr val="accent1"/>
+          </a:lnRef>
+          <a:fillRef idx="3">
+            <a:schemeClr val="accent1"/>
+          </a:fillRef>
+          <a:effectRef idx="2">
+            <a:schemeClr val="accent1"/>
+          </a:effectRef>
+          <a:fontRef idx="minor">
+            <a:schemeClr val="lt1"/>
+          </a:fontRef>
+        </p:style>
+        <p:txBody>
+          <a:bodyPr rtlCol="0" anchor="ctr"/>
+          <a:lstStyle/>
+          <a:p>
+            <a:pPr algn="ctr"/>
+          </a:p>
+        </p:txBody>
+      </p:sp>
+      <p:sp>
+        <p:nvSpPr>
+          <p:cNvPr id="7" name="TextBox 6"/>
+          <p:cNvSpPr txBox="1"/>
+          <p:nvPr/>
+        </p:nvSpPr>
+        <p:spPr>
+          <a:xfrm>
+            <a:off x="10426903" y="365760"/>
+            <a:ext cx="1261872" cy="347472"/>
+          </a:xfrm>
+          <a:prstGeom prst="rect">
+            <a:avLst/>
+          </a:prstGeom>
+          <a:noFill/>
+        </p:spPr>
+        <p:txBody>
+          <a:bodyPr wrap="square" anchor="ctr" lIns="0" rIns="0" tIns="0" bIns="0">
+            <a:spAutoFit/>
+          </a:bodyPr>
+          <a:lstStyle/>
+          <a:p>
+            <a:pPr algn="ctr">
+              <a:lnSpc>
+                <a:spcPct val="108000"/>
+              </a:lnSpc>
+              <a:spcAft>
+                <a:spcPts val="400"/>
+              </a:spcAft>
+            </a:pPr>
+            <a:r>
+              <a:rPr sz="1150" b="1" i="0">
+                <a:solidFill>
+                  <a:srgbClr val="FFFFFF"/>
+                </a:solidFill>
+                <a:latin typeface="NanumGothic"/>
+                <a:ea typeface="NanumGothic"/>
+              </a:rPr>
+              <a:t>Lv III–IV</a:t>
+            </a:r>
+          </a:p>
+        </p:txBody>
+      </p:sp>
+      <p:sp>
+        <p:nvSpPr>
+          <p:cNvPr id="8" name="TextBox 7"/>
+          <p:cNvSpPr txBox="1"/>
+          <p:nvPr/>
+        </p:nvSpPr>
+        <p:spPr>
+          <a:xfrm>
+            <a:off x="731520" y="1371600"/>
+            <a:ext cx="6400800" cy="4663440"/>
+          </a:xfrm>
+          <a:prstGeom prst="rect">
+            <a:avLst/>
+          </a:prstGeom>
+          <a:noFill/>
+        </p:spPr>
+        <p:txBody>
+          <a:bodyPr wrap="square" lIns="0" rIns="0" tIns="0" bIns="0">
+            <a:spAutoFit/>
+          </a:bodyPr>
+          <a:lstStyle/>
+          <a:p>
+            <a:pPr algn="l">
+              <a:lnSpc>
+                <a:spcPct val="108000"/>
+              </a:lnSpc>
+              <a:spcAft>
+                <a:spcPts val="800"/>
+              </a:spcAft>
+            </a:pPr>
+            <a:r>
+              <a:rPr sz="979" b="1" i="0">
+                <a:solidFill>
+                  <a:srgbClr val="2C898A"/>
+                </a:solidFill>
+                <a:latin typeface="NanumGothic"/>
+                <a:ea typeface="NanumGothic"/>
+              </a:rPr>
+              <a:t>●  </a:t>
+            </a:r>
+            <a:r>
+              <a:rPr sz="1400" b="1" i="0">
+                <a:solidFill>
+                  <a:srgbClr val="1A202C"/>
+                </a:solidFill>
+                <a:latin typeface="NanumGothic"/>
+                <a:ea typeface="NanumGothic"/>
+              </a:rPr>
+              <a:t>관류 실측(Dickey 2024): LSB 후 후경골동맥 직경 0.17→0.27 cm(+58.8%), 모세혈관 재충혈 3.92→1.30초, 족부온도 +2.8°C.</a:t>
+            </a:r>
+          </a:p>
+          <a:p>
+            <a:pPr algn="l">
+              <a:lnSpc>
+                <a:spcPct val="108000"/>
+              </a:lnSpc>
+              <a:spcAft>
+                <a:spcPts val="800"/>
+              </a:spcAft>
+            </a:pPr>
+            <a:r>
+              <a:rPr sz="979" b="1" i="0">
+                <a:solidFill>
+                  <a:srgbClr val="2C898A"/>
+                </a:solidFill>
+                <a:latin typeface="NanumGothic"/>
+                <a:ea typeface="NanumGothic"/>
+              </a:rPr>
+              <a:t>●  </a:t>
+            </a:r>
+            <a:r>
+              <a:rPr sz="1400" b="0" i="0">
+                <a:solidFill>
+                  <a:srgbClr val="2E7D32"/>
+                </a:solidFill>
+                <a:latin typeface="NanumGothic"/>
+                <a:ea typeface="NanumGothic"/>
+              </a:rPr>
+              <a:t>허혈성 통증(PAD): 하지 통증 최대 75%↓, Fontaine 분류·측부관류 개선(Medicina 2024).</a:t>
+            </a:r>
+          </a:p>
+          <a:p>
+            <a:pPr algn="l">
+              <a:lnSpc>
+                <a:spcPct val="108000"/>
+              </a:lnSpc>
+              <a:spcAft>
+                <a:spcPts val="800"/>
+              </a:spcAft>
+            </a:pPr>
+            <a:r>
+              <a:rPr sz="979" b="1" i="0">
+                <a:solidFill>
+                  <a:srgbClr val="2C898A"/>
+                </a:solidFill>
+                <a:latin typeface="NanumGothic"/>
+                <a:ea typeface="NanumGothic"/>
+              </a:rPr>
+              <a:t>●  </a:t>
+            </a:r>
+            <a:r>
+              <a:rPr sz="1400" b="0" i="0">
+                <a:solidFill>
+                  <a:srgbClr val="1A202C"/>
+                </a:solidFill>
+                <a:latin typeface="NanumGothic"/>
+                <a:ea typeface="NanumGothic"/>
+              </a:rPr>
+              <a:t>비재건성 CLI: 교감신경 신경파괴가 절단 외 대안이 없는 환자의 통증조절에 효과적·안전(Barreto 2018).</a:t>
+            </a:r>
+          </a:p>
+        </p:txBody>
+      </p:sp>
+      <p:sp>
+        <p:nvSpPr>
+          <p:cNvPr id="9" name="Rounded Rectangle 8"/>
+          <p:cNvSpPr/>
+          <p:nvPr/>
+        </p:nvSpPr>
+        <p:spPr>
+          <a:xfrm>
+            <a:off x="7406640" y="1463040"/>
+            <a:ext cx="4114800" cy="4480560"/>
+          </a:xfrm>
+          <a:prstGeom prst="roundRect">
+            <a:avLst>
+              <a:gd name="adj" fmla="val 8000"/>
+            </a:avLst>
           </a:prstGeom>
           <a:solidFill>
             <a:srgbClr val="1B355E"/>
@@ -7223,58 +7639,14 @@
       </p:sp>
       <p:sp>
         <p:nvSpPr>
-          <p:cNvPr id="3" name="Rectangle 2"/>
-          <p:cNvSpPr/>
-          <p:nvPr/>
-        </p:nvSpPr>
-        <p:spPr>
-          <a:xfrm>
-            <a:off x="0" y="0"/>
-            <a:ext cx="201168" cy="6858000"/>
-          </a:xfrm>
-          <a:prstGeom prst="rect">
-            <a:avLst/>
-          </a:prstGeom>
-          <a:solidFill>
-            <a:srgbClr val="2C898A"/>
-          </a:solidFill>
-          <a:ln>
-            <a:noFill/>
-          </a:ln>
-          <a:effectLst/>
-        </p:spPr>
-        <p:style>
-          <a:lnRef idx="1">
-            <a:schemeClr val="accent1"/>
-          </a:lnRef>
-          <a:fillRef idx="3">
-            <a:schemeClr val="accent1"/>
-          </a:fillRef>
-          <a:effectRef idx="2">
-            <a:schemeClr val="accent1"/>
-          </a:effectRef>
-          <a:fontRef idx="minor">
-            <a:schemeClr val="lt1"/>
-          </a:fontRef>
-        </p:style>
-        <p:txBody>
-          <a:bodyPr rtlCol="0" anchor="ctr"/>
-          <a:lstStyle/>
-          <a:p>
-            <a:pPr algn="ctr"/>
-          </a:p>
-        </p:txBody>
-      </p:sp>
-      <p:sp>
-        <p:nvSpPr>
-          <p:cNvPr id="4" name="TextBox 3"/>
+          <p:cNvPr id="10" name="TextBox 9"/>
           <p:cNvSpPr txBox="1"/>
           <p:nvPr/>
         </p:nvSpPr>
         <p:spPr>
           <a:xfrm>
-            <a:off x="822960" y="640080"/>
-            <a:ext cx="10515600" cy="457200"/>
+            <a:off x="7680960" y="1691640"/>
+            <a:ext cx="3657600" cy="365760"/>
           </a:xfrm>
           <a:prstGeom prst="rect">
             <a:avLst/>
@@ -7298,26 +7670,26 @@
             <a:r>
               <a:rPr sz="1300" b="1" i="0">
                 <a:solidFill>
-                  <a:srgbClr val="9FE0D8"/>
-                </a:solidFill>
-                <a:latin typeface="NanumGothic"/>
-                <a:ea typeface="NanumGothic"/>
-              </a:rPr>
-              <a:t>핵심 메시지 — LSB</a:t>
-            </a:r>
-          </a:p>
-        </p:txBody>
-      </p:sp>
-      <p:sp>
-        <p:nvSpPr>
-          <p:cNvPr id="5" name="TextBox 4"/>
+                  <a:srgbClr val="BFD3E6"/>
+                </a:solidFill>
+                <a:latin typeface="NanumGothic"/>
+                <a:ea typeface="NanumGothic"/>
+              </a:rPr>
+              <a:t>실측 수치(Dickey 2024)</a:t>
+            </a:r>
+          </a:p>
+        </p:txBody>
+      </p:sp>
+      <p:sp>
+        <p:nvSpPr>
+          <p:cNvPr id="11" name="TextBox 10"/>
           <p:cNvSpPr txBox="1"/>
           <p:nvPr/>
         </p:nvSpPr>
         <p:spPr>
           <a:xfrm>
-            <a:off x="822960" y="1097280"/>
-            <a:ext cx="10515600" cy="914400"/>
+            <a:off x="7680960" y="2194560"/>
+            <a:ext cx="3611880" cy="3657600"/>
           </a:xfrm>
           <a:prstGeom prst="rect">
             <a:avLst/>
@@ -7325,86 +7697,142 @@
           <a:noFill/>
         </p:spPr>
         <p:txBody>
-          <a:bodyPr wrap="square" anchor="t" lIns="0" rIns="0" tIns="0" bIns="0">
+          <a:bodyPr wrap="square" lIns="0" rIns="0" tIns="0" bIns="0">
             <a:spAutoFit/>
           </a:bodyPr>
           <a:lstStyle/>
           <a:p>
             <a:pPr algn="l">
               <a:lnSpc>
-                <a:spcPct val="110000"/>
-              </a:lnSpc>
-              <a:spcAft>
-                <a:spcPts val="400"/>
-              </a:spcAft>
-            </a:pPr>
-            <a:r>
-              <a:rPr sz="2200" b="1" i="0">
+                <a:spcPct val="108000"/>
+              </a:lnSpc>
+              <a:spcAft>
+                <a:spcPts val="800"/>
+              </a:spcAft>
+            </a:pPr>
+            <a:r>
+              <a:rPr sz="875" b="1" i="0">
+                <a:solidFill>
+                  <a:srgbClr val="2C898A"/>
+                </a:solidFill>
+                <a:latin typeface="NanumGothic"/>
+                <a:ea typeface="NanumGothic"/>
+              </a:rPr>
+              <a:t>●  </a:t>
+            </a:r>
+            <a:r>
+              <a:rPr sz="1250" b="1" i="0">
+                <a:solidFill>
+                  <a:srgbClr val="9FE0D8"/>
+                </a:solidFill>
+                <a:latin typeface="NanumGothic"/>
+                <a:ea typeface="NanumGothic"/>
+              </a:rPr>
+              <a:t>후경골동맥 +58.8%</a:t>
+            </a:r>
+          </a:p>
+          <a:p>
+            <a:pPr algn="l">
+              <a:lnSpc>
+                <a:spcPct val="108000"/>
+              </a:lnSpc>
+              <a:spcAft>
+                <a:spcPts val="800"/>
+              </a:spcAft>
+            </a:pPr>
+            <a:r>
+              <a:rPr sz="875" b="1" i="0">
+                <a:solidFill>
+                  <a:srgbClr val="2C898A"/>
+                </a:solidFill>
+                <a:latin typeface="NanumGothic"/>
+                <a:ea typeface="NanumGothic"/>
+              </a:rPr>
+              <a:t>●  </a:t>
+            </a:r>
+            <a:r>
+              <a:rPr sz="1250" b="0" i="0">
                 <a:solidFill>
                   <a:srgbClr val="FFFFFF"/>
                 </a:solidFill>
                 <a:latin typeface="NanumGothic"/>
                 <a:ea typeface="NanumGothic"/>
               </a:rPr>
-              <a:t>표준은 투시 유도 방척추 접근, 성공은 온도 ≥2°C</a:t>
-            </a:r>
-          </a:p>
-        </p:txBody>
-      </p:sp>
-      <p:sp>
-        <p:nvSpPr>
-          <p:cNvPr id="6" name="Rectangle 5"/>
-          <p:cNvSpPr/>
-          <p:nvPr/>
-        </p:nvSpPr>
-        <p:spPr>
-          <a:xfrm>
-            <a:off x="822960" y="2322576"/>
-            <a:ext cx="146304" cy="445385"/>
-          </a:xfrm>
-          <a:prstGeom prst="rect">
-            <a:avLst/>
-          </a:prstGeom>
-          <a:solidFill>
-            <a:srgbClr val="2C898A"/>
-          </a:solidFill>
-          <a:ln>
-            <a:noFill/>
-          </a:ln>
-          <a:effectLst/>
-        </p:spPr>
-        <p:style>
-          <a:lnRef idx="1">
-            <a:schemeClr val="accent1"/>
-          </a:lnRef>
-          <a:fillRef idx="3">
-            <a:schemeClr val="accent1"/>
-          </a:fillRef>
-          <a:effectRef idx="2">
-            <a:schemeClr val="accent1"/>
-          </a:effectRef>
-          <a:fontRef idx="minor">
-            <a:schemeClr val="lt1"/>
-          </a:fontRef>
-        </p:style>
-        <p:txBody>
-          <a:bodyPr rtlCol="0" anchor="ctr"/>
-          <a:lstStyle/>
-          <a:p>
-            <a:pPr algn="ctr"/>
-          </a:p>
-        </p:txBody>
-      </p:sp>
-      <p:sp>
-        <p:nvSpPr>
-          <p:cNvPr id="7" name="TextBox 6"/>
+              <a:t>모세혈관 재충혈 3.92→1.30초</a:t>
+            </a:r>
+          </a:p>
+          <a:p>
+            <a:pPr algn="l">
+              <a:lnSpc>
+                <a:spcPct val="108000"/>
+              </a:lnSpc>
+              <a:spcAft>
+                <a:spcPts val="800"/>
+              </a:spcAft>
+            </a:pPr>
+            <a:r>
+              <a:rPr sz="875" b="1" i="0">
+                <a:solidFill>
+                  <a:srgbClr val="2C898A"/>
+                </a:solidFill>
+                <a:latin typeface="NanumGothic"/>
+                <a:ea typeface="NanumGothic"/>
+              </a:rPr>
+              <a:t>●  </a:t>
+            </a:r>
+            <a:r>
+              <a:rPr sz="1250" b="0" i="0">
+                <a:solidFill>
+                  <a:srgbClr val="FFFFFF"/>
+                </a:solidFill>
+                <a:latin typeface="NanumGothic"/>
+                <a:ea typeface="NanumGothic"/>
+              </a:rPr>
+              <a:t>족부온도 +2.8°C</a:t>
+            </a:r>
+          </a:p>
+          <a:p>
+            <a:pPr algn="l">
+              <a:lnSpc>
+                <a:spcPct val="108000"/>
+              </a:lnSpc>
+              <a:spcAft>
+                <a:spcPts val="800"/>
+              </a:spcAft>
+            </a:pPr>
+            <a:r>
+              <a:rPr sz="875" b="1" i="0">
+                <a:solidFill>
+                  <a:srgbClr val="2C898A"/>
+                </a:solidFill>
+                <a:latin typeface="NanumGothic"/>
+                <a:ea typeface="NanumGothic"/>
+              </a:rPr>
+              <a:t>●  </a:t>
+            </a:r>
+            <a:r>
+              <a:rPr sz="1250" b="1" i="0">
+                <a:solidFill>
+                  <a:srgbClr val="9FE0D8"/>
+                </a:solidFill>
+                <a:latin typeface="NanumGothic"/>
+                <a:ea typeface="NanumGothic"/>
+              </a:rPr>
+              <a:t>→ 관류 개선의 객관 근거</a:t>
+            </a:r>
+          </a:p>
+        </p:txBody>
+      </p:sp>
+      <p:sp>
+        <p:nvSpPr>
+          <p:cNvPr id="12" name="TextBox 11"/>
           <p:cNvSpPr txBox="1"/>
           <p:nvPr/>
         </p:nvSpPr>
         <p:spPr>
           <a:xfrm>
-            <a:off x="1143000" y="2286000"/>
-            <a:ext cx="2926080" cy="674827"/>
+            <a:off x="731520" y="6455664"/>
+            <a:ext cx="9875520" cy="292608"/>
           </a:xfrm>
           <a:prstGeom prst="rect">
             <a:avLst/>
@@ -7426,28 +7854,28 @@
               </a:spcAft>
             </a:pPr>
             <a:r>
-              <a:rPr sz="1400" b="1" i="0">
-                <a:solidFill>
-                  <a:srgbClr val="9FE0D8"/>
-                </a:solidFill>
-                <a:latin typeface="NanumGothic"/>
-                <a:ea typeface="NanumGothic"/>
-              </a:rPr>
-              <a:t>방법</a:t>
-            </a:r>
-          </a:p>
-        </p:txBody>
-      </p:sp>
-      <p:sp>
-        <p:nvSpPr>
-          <p:cNvPr id="8" name="TextBox 7"/>
+              <a:rPr sz="900" b="0" i="0">
+                <a:solidFill>
+                  <a:srgbClr val="5A6B7B"/>
+                </a:solidFill>
+                <a:latin typeface="NanumGothic"/>
+                <a:ea typeface="NanumGothic"/>
+              </a:rPr>
+              <a:t>근거: Dickey 2024(Cureus); Medicina 2024; Barreto 2018</a:t>
+            </a:r>
+          </a:p>
+        </p:txBody>
+      </p:sp>
+      <p:sp>
+        <p:nvSpPr>
+          <p:cNvPr id="13" name="TextBox 12"/>
           <p:cNvSpPr txBox="1"/>
           <p:nvPr/>
         </p:nvSpPr>
         <p:spPr>
           <a:xfrm>
-            <a:off x="4114800" y="2286000"/>
-            <a:ext cx="7406640" cy="674827"/>
+            <a:off x="11064240" y="6455664"/>
+            <a:ext cx="822960" cy="292608"/>
           </a:xfrm>
           <a:prstGeom prst="rect">
             <a:avLst/>
@@ -7460,543 +7888,23 @@
           </a:bodyPr>
           <a:lstStyle/>
           <a:p>
-            <a:pPr algn="l">
-              <a:lnSpc>
-                <a:spcPct val="105000"/>
+            <a:pPr algn="r">
+              <a:lnSpc>
+                <a:spcPct val="108000"/>
               </a:lnSpc>
               <a:spcAft>
                 <a:spcPts val="400"/>
               </a:spcAft>
             </a:pPr>
             <a:r>
-              <a:rPr sz="1250" b="0" i="0">
-                <a:solidFill>
-                  <a:srgbClr val="FFFFFF"/>
-                </a:solidFill>
-                <a:latin typeface="NanumGothic"/>
-                <a:ea typeface="NanumGothic"/>
-              </a:rPr>
-              <a:t>L2–L3 방척추 접근·투시, 정중선 7 cm 외측, 조영제 두미측 확산, 성공지표 온도 ≥2°C.</a:t>
-            </a:r>
-          </a:p>
-        </p:txBody>
-      </p:sp>
-      <p:sp>
-        <p:nvSpPr>
-          <p:cNvPr id="9" name="Rectangle 8"/>
-          <p:cNvSpPr/>
-          <p:nvPr/>
-        </p:nvSpPr>
-        <p:spPr>
-          <a:xfrm>
-            <a:off x="822960" y="3072384"/>
-            <a:ext cx="146304" cy="445385"/>
-          </a:xfrm>
-          <a:prstGeom prst="rect">
-            <a:avLst/>
-          </a:prstGeom>
-          <a:solidFill>
-            <a:srgbClr val="2C898A"/>
-          </a:solidFill>
-          <a:ln>
-            <a:noFill/>
-          </a:ln>
-          <a:effectLst/>
-        </p:spPr>
-        <p:style>
-          <a:lnRef idx="1">
-            <a:schemeClr val="accent1"/>
-          </a:lnRef>
-          <a:fillRef idx="3">
-            <a:schemeClr val="accent1"/>
-          </a:fillRef>
-          <a:effectRef idx="2">
-            <a:schemeClr val="accent1"/>
-          </a:effectRef>
-          <a:fontRef idx="minor">
-            <a:schemeClr val="lt1"/>
-          </a:fontRef>
-        </p:style>
-        <p:txBody>
-          <a:bodyPr rtlCol="0" anchor="ctr"/>
-          <a:lstStyle/>
-          <a:p>
-            <a:pPr algn="ctr"/>
-          </a:p>
-        </p:txBody>
-      </p:sp>
-      <p:sp>
-        <p:nvSpPr>
-          <p:cNvPr id="10" name="TextBox 9"/>
-          <p:cNvSpPr txBox="1"/>
-          <p:nvPr/>
-        </p:nvSpPr>
-        <p:spPr>
-          <a:xfrm>
-            <a:off x="1143000" y="3035808"/>
-            <a:ext cx="2926080" cy="674827"/>
-          </a:xfrm>
-          <a:prstGeom prst="rect">
-            <a:avLst/>
-          </a:prstGeom>
-          <a:noFill/>
-        </p:spPr>
-        <p:txBody>
-          <a:bodyPr wrap="square" anchor="ctr" lIns="0" rIns="0" tIns="0" bIns="0">
-            <a:spAutoFit/>
-          </a:bodyPr>
-          <a:lstStyle/>
-          <a:p>
-            <a:pPr algn="l">
-              <a:lnSpc>
-                <a:spcPct val="108000"/>
-              </a:lnSpc>
-              <a:spcAft>
-                <a:spcPts val="400"/>
-              </a:spcAft>
-            </a:pPr>
-            <a:r>
-              <a:rPr sz="1400" b="1" i="0">
-                <a:solidFill>
-                  <a:srgbClr val="9FE0D8"/>
-                </a:solidFill>
-                <a:latin typeface="NanumGothic"/>
-                <a:ea typeface="NanumGothic"/>
-              </a:rPr>
-              <a:t>약제</a:t>
-            </a:r>
-          </a:p>
-        </p:txBody>
-      </p:sp>
-      <p:sp>
-        <p:nvSpPr>
-          <p:cNvPr id="11" name="TextBox 10"/>
-          <p:cNvSpPr txBox="1"/>
-          <p:nvPr/>
-        </p:nvSpPr>
-        <p:spPr>
-          <a:xfrm>
-            <a:off x="4114800" y="3035808"/>
-            <a:ext cx="7406640" cy="674827"/>
-          </a:xfrm>
-          <a:prstGeom prst="rect">
-            <a:avLst/>
-          </a:prstGeom>
-          <a:noFill/>
-        </p:spPr>
-        <p:txBody>
-          <a:bodyPr wrap="square" anchor="ctr" lIns="0" rIns="0" tIns="0" bIns="0">
-            <a:spAutoFit/>
-          </a:bodyPr>
-          <a:lstStyle/>
-          <a:p>
-            <a:pPr algn="l">
-              <a:lnSpc>
-                <a:spcPct val="105000"/>
-              </a:lnSpc>
-              <a:spcAft>
-                <a:spcPts val="400"/>
-              </a:spcAft>
-            </a:pPr>
-            <a:r>
-              <a:rPr sz="1250" b="0" i="0">
-                <a:solidFill>
-                  <a:srgbClr val="FFFFFF"/>
-                </a:solidFill>
-                <a:latin typeface="NanumGothic"/>
-                <a:ea typeface="NanumGothic"/>
-              </a:rPr>
-              <a:t>진단/치료는 국소마취제, 신경파괴는 무수알코올/phenol·RFA — 진단차단 양성 시에만.</a:t>
-            </a:r>
-          </a:p>
-        </p:txBody>
-      </p:sp>
-      <p:sp>
-        <p:nvSpPr>
-          <p:cNvPr id="12" name="Rectangle 11"/>
-          <p:cNvSpPr/>
-          <p:nvPr/>
-        </p:nvSpPr>
-        <p:spPr>
-          <a:xfrm>
-            <a:off x="822960" y="3822191"/>
-            <a:ext cx="146304" cy="445385"/>
-          </a:xfrm>
-          <a:prstGeom prst="rect">
-            <a:avLst/>
-          </a:prstGeom>
-          <a:solidFill>
-            <a:srgbClr val="2C898A"/>
-          </a:solidFill>
-          <a:ln>
-            <a:noFill/>
-          </a:ln>
-          <a:effectLst/>
-        </p:spPr>
-        <p:style>
-          <a:lnRef idx="1">
-            <a:schemeClr val="accent1"/>
-          </a:lnRef>
-          <a:fillRef idx="3">
-            <a:schemeClr val="accent1"/>
-          </a:fillRef>
-          <a:effectRef idx="2">
-            <a:schemeClr val="accent1"/>
-          </a:effectRef>
-          <a:fontRef idx="minor">
-            <a:schemeClr val="lt1"/>
-          </a:fontRef>
-        </p:style>
-        <p:txBody>
-          <a:bodyPr rtlCol="0" anchor="ctr"/>
-          <a:lstStyle/>
-          <a:p>
-            <a:pPr algn="ctr"/>
-          </a:p>
-        </p:txBody>
-      </p:sp>
-      <p:sp>
-        <p:nvSpPr>
-          <p:cNvPr id="13" name="TextBox 12"/>
-          <p:cNvSpPr txBox="1"/>
-          <p:nvPr/>
-        </p:nvSpPr>
-        <p:spPr>
-          <a:xfrm>
-            <a:off x="1143000" y="3785615"/>
-            <a:ext cx="2926080" cy="674827"/>
-          </a:xfrm>
-          <a:prstGeom prst="rect">
-            <a:avLst/>
-          </a:prstGeom>
-          <a:noFill/>
-        </p:spPr>
-        <p:txBody>
-          <a:bodyPr wrap="square" anchor="ctr" lIns="0" rIns="0" tIns="0" bIns="0">
-            <a:spAutoFit/>
-          </a:bodyPr>
-          <a:lstStyle/>
-          <a:p>
-            <a:pPr algn="l">
-              <a:lnSpc>
-                <a:spcPct val="108000"/>
-              </a:lnSpc>
-              <a:spcAft>
-                <a:spcPts val="400"/>
-              </a:spcAft>
-            </a:pPr>
-            <a:r>
-              <a:rPr sz="1400" b="1" i="0">
-                <a:solidFill>
-                  <a:srgbClr val="9FE0D8"/>
-                </a:solidFill>
-                <a:latin typeface="NanumGothic"/>
-                <a:ea typeface="NanumGothic"/>
-              </a:rPr>
-              <a:t>적응증</a:t>
-            </a:r>
-          </a:p>
-        </p:txBody>
-      </p:sp>
-      <p:sp>
-        <p:nvSpPr>
-          <p:cNvPr id="14" name="TextBox 13"/>
-          <p:cNvSpPr txBox="1"/>
-          <p:nvPr/>
-        </p:nvSpPr>
-        <p:spPr>
-          <a:xfrm>
-            <a:off x="4114800" y="3785615"/>
-            <a:ext cx="7406640" cy="674827"/>
-          </a:xfrm>
-          <a:prstGeom prst="rect">
-            <a:avLst/>
-          </a:prstGeom>
-          <a:noFill/>
-        </p:spPr>
-        <p:txBody>
-          <a:bodyPr wrap="square" anchor="ctr" lIns="0" rIns="0" tIns="0" bIns="0">
-            <a:spAutoFit/>
-          </a:bodyPr>
-          <a:lstStyle/>
-          <a:p>
-            <a:pPr algn="l">
-              <a:lnSpc>
-                <a:spcPct val="105000"/>
-              </a:lnSpc>
-              <a:spcAft>
-                <a:spcPts val="400"/>
-              </a:spcAft>
-            </a:pPr>
-            <a:r>
-              <a:rPr sz="1250" b="0" i="0">
-                <a:solidFill>
-                  <a:srgbClr val="FFFFFF"/>
-                </a:solidFill>
-                <a:latin typeface="NanumGothic"/>
-                <a:ea typeface="NanumGothic"/>
-              </a:rPr>
-              <a:t>조기 CRPS·PAD/CLI 안정통·신경병증·다한증 등. 특발성 NLC·정맥질환(정맥류)은 적응 아님.</a:t>
-            </a:r>
-          </a:p>
-        </p:txBody>
-      </p:sp>
-      <p:sp>
-        <p:nvSpPr>
-          <p:cNvPr id="15" name="Rectangle 14"/>
-          <p:cNvSpPr/>
-          <p:nvPr/>
-        </p:nvSpPr>
-        <p:spPr>
-          <a:xfrm>
-            <a:off x="822960" y="4572000"/>
-            <a:ext cx="146304" cy="445385"/>
-          </a:xfrm>
-          <a:prstGeom prst="rect">
-            <a:avLst/>
-          </a:prstGeom>
-          <a:solidFill>
-            <a:srgbClr val="2C898A"/>
-          </a:solidFill>
-          <a:ln>
-            <a:noFill/>
-          </a:ln>
-          <a:effectLst/>
-        </p:spPr>
-        <p:style>
-          <a:lnRef idx="1">
-            <a:schemeClr val="accent1"/>
-          </a:lnRef>
-          <a:fillRef idx="3">
-            <a:schemeClr val="accent1"/>
-          </a:fillRef>
-          <a:effectRef idx="2">
-            <a:schemeClr val="accent1"/>
-          </a:effectRef>
-          <a:fontRef idx="minor">
-            <a:schemeClr val="lt1"/>
-          </a:fontRef>
-        </p:style>
-        <p:txBody>
-          <a:bodyPr rtlCol="0" anchor="ctr"/>
-          <a:lstStyle/>
-          <a:p>
-            <a:pPr algn="ctr"/>
-          </a:p>
-        </p:txBody>
-      </p:sp>
-      <p:sp>
-        <p:nvSpPr>
-          <p:cNvPr id="16" name="TextBox 15"/>
-          <p:cNvSpPr txBox="1"/>
-          <p:nvPr/>
-        </p:nvSpPr>
-        <p:spPr>
-          <a:xfrm>
-            <a:off x="1143000" y="4535424"/>
-            <a:ext cx="2926080" cy="674827"/>
-          </a:xfrm>
-          <a:prstGeom prst="rect">
-            <a:avLst/>
-          </a:prstGeom>
-          <a:noFill/>
-        </p:spPr>
-        <p:txBody>
-          <a:bodyPr wrap="square" anchor="ctr" lIns="0" rIns="0" tIns="0" bIns="0">
-            <a:spAutoFit/>
-          </a:bodyPr>
-          <a:lstStyle/>
-          <a:p>
-            <a:pPr algn="l">
-              <a:lnSpc>
-                <a:spcPct val="108000"/>
-              </a:lnSpc>
-              <a:spcAft>
-                <a:spcPts val="400"/>
-              </a:spcAft>
-            </a:pPr>
-            <a:r>
-              <a:rPr sz="1400" b="1" i="0">
-                <a:solidFill>
-                  <a:srgbClr val="9FE0D8"/>
-                </a:solidFill>
-                <a:latin typeface="NanumGothic"/>
-                <a:ea typeface="NanumGothic"/>
-              </a:rPr>
-              <a:t>효과</a:t>
-            </a:r>
-          </a:p>
-        </p:txBody>
-      </p:sp>
-      <p:sp>
-        <p:nvSpPr>
-          <p:cNvPr id="17" name="TextBox 16"/>
-          <p:cNvSpPr txBox="1"/>
-          <p:nvPr/>
-        </p:nvSpPr>
-        <p:spPr>
-          <a:xfrm>
-            <a:off x="4114800" y="4535424"/>
-            <a:ext cx="7406640" cy="674827"/>
-          </a:xfrm>
-          <a:prstGeom prst="rect">
-            <a:avLst/>
-          </a:prstGeom>
-          <a:noFill/>
-        </p:spPr>
-        <p:txBody>
-          <a:bodyPr wrap="square" anchor="ctr" lIns="0" rIns="0" tIns="0" bIns="0">
-            <a:spAutoFit/>
-          </a:bodyPr>
-          <a:lstStyle/>
-          <a:p>
-            <a:pPr algn="l">
-              <a:lnSpc>
-                <a:spcPct val="105000"/>
-              </a:lnSpc>
-              <a:spcAft>
-                <a:spcPts val="400"/>
-              </a:spcAft>
-            </a:pPr>
-            <a:r>
-              <a:rPr sz="1250" b="0" i="0">
-                <a:solidFill>
-                  <a:srgbClr val="FFFFFF"/>
-                </a:solidFill>
-                <a:latin typeface="NanumGothic"/>
-                <a:ea typeface="NanumGothic"/>
-              </a:rPr>
-              <a:t>관류 실측 개선(Dickey), 허혈통 최대 75%↓, CRPS 통증완화(교감피부반응으로 예측).</a:t>
-            </a:r>
-          </a:p>
-        </p:txBody>
-      </p:sp>
-      <p:sp>
-        <p:nvSpPr>
-          <p:cNvPr id="18" name="Rectangle 17"/>
-          <p:cNvSpPr/>
-          <p:nvPr/>
-        </p:nvSpPr>
-        <p:spPr>
-          <a:xfrm>
-            <a:off x="822960" y="5321807"/>
-            <a:ext cx="146304" cy="445385"/>
-          </a:xfrm>
-          <a:prstGeom prst="rect">
-            <a:avLst/>
-          </a:prstGeom>
-          <a:solidFill>
-            <a:srgbClr val="2C898A"/>
-          </a:solidFill>
-          <a:ln>
-            <a:noFill/>
-          </a:ln>
-          <a:effectLst/>
-        </p:spPr>
-        <p:style>
-          <a:lnRef idx="1">
-            <a:schemeClr val="accent1"/>
-          </a:lnRef>
-          <a:fillRef idx="3">
-            <a:schemeClr val="accent1"/>
-          </a:fillRef>
-          <a:effectRef idx="2">
-            <a:schemeClr val="accent1"/>
-          </a:effectRef>
-          <a:fontRef idx="minor">
-            <a:schemeClr val="lt1"/>
-          </a:fontRef>
-        </p:style>
-        <p:txBody>
-          <a:bodyPr rtlCol="0" anchor="ctr"/>
-          <a:lstStyle/>
-          <a:p>
-            <a:pPr algn="ctr"/>
-          </a:p>
-        </p:txBody>
-      </p:sp>
-      <p:sp>
-        <p:nvSpPr>
-          <p:cNvPr id="19" name="TextBox 18"/>
-          <p:cNvSpPr txBox="1"/>
-          <p:nvPr/>
-        </p:nvSpPr>
-        <p:spPr>
-          <a:xfrm>
-            <a:off x="1143000" y="5285231"/>
-            <a:ext cx="2926080" cy="674827"/>
-          </a:xfrm>
-          <a:prstGeom prst="rect">
-            <a:avLst/>
-          </a:prstGeom>
-          <a:noFill/>
-        </p:spPr>
-        <p:txBody>
-          <a:bodyPr wrap="square" anchor="ctr" lIns="0" rIns="0" tIns="0" bIns="0">
-            <a:spAutoFit/>
-          </a:bodyPr>
-          <a:lstStyle/>
-          <a:p>
-            <a:pPr algn="l">
-              <a:lnSpc>
-                <a:spcPct val="108000"/>
-              </a:lnSpc>
-              <a:spcAft>
-                <a:spcPts val="400"/>
-              </a:spcAft>
-            </a:pPr>
-            <a:r>
-              <a:rPr sz="1400" b="1" i="0">
-                <a:solidFill>
-                  <a:srgbClr val="9FE0D8"/>
-                </a:solidFill>
-                <a:latin typeface="NanumGothic"/>
-                <a:ea typeface="NanumGothic"/>
-              </a:rPr>
-              <a:t>근거</a:t>
-            </a:r>
-          </a:p>
-        </p:txBody>
-      </p:sp>
-      <p:sp>
-        <p:nvSpPr>
-          <p:cNvPr id="20" name="TextBox 19"/>
-          <p:cNvSpPr txBox="1"/>
-          <p:nvPr/>
-        </p:nvSpPr>
-        <p:spPr>
-          <a:xfrm>
-            <a:off x="4114800" y="5285231"/>
-            <a:ext cx="7406640" cy="674827"/>
-          </a:xfrm>
-          <a:prstGeom prst="rect">
-            <a:avLst/>
-          </a:prstGeom>
-          <a:noFill/>
-        </p:spPr>
-        <p:txBody>
-          <a:bodyPr wrap="square" anchor="ctr" lIns="0" rIns="0" tIns="0" bIns="0">
-            <a:spAutoFit/>
-          </a:bodyPr>
-          <a:lstStyle/>
-          <a:p>
-            <a:pPr algn="l">
-              <a:lnSpc>
-                <a:spcPct val="105000"/>
-              </a:lnSpc>
-              <a:spcAft>
-                <a:spcPts val="400"/>
-              </a:spcAft>
-            </a:pPr>
-            <a:r>
-              <a:rPr sz="1250" b="0" i="0">
-                <a:solidFill>
-                  <a:srgbClr val="FFFFFF"/>
-                </a:solidFill>
-                <a:latin typeface="NanumGothic"/>
-                <a:ea typeface="NanumGothic"/>
-              </a:rPr>
-              <a:t>대규모 RCT 부족(관찰·증례 중심). 조기 CRPS·비재건성 CLI에서 유용.</a:t>
+              <a:rPr sz="1000" b="1" i="0">
+                <a:solidFill>
+                  <a:srgbClr val="5A6B7B"/>
+                </a:solidFill>
+                <a:latin typeface="NanumGothic"/>
+                <a:ea typeface="NanumGothic"/>
+              </a:rPr>
+              <a:t>16</a:t>
             </a:r>
           </a:p>
         </p:txBody>
@@ -8101,7 +8009,7 @@
                 <a:latin typeface="NanumGothic"/>
                 <a:ea typeface="NanumGothic"/>
               </a:rPr>
-              <a:t>참고문헌 — LSB</a:t>
+              <a:t>효과 (2) CRPS · 기전</a:t>
             </a:r>
           </a:p>
         </p:txBody>
@@ -8144,7 +8052,7 @@
                 <a:latin typeface="NanumGothic"/>
                 <a:ea typeface="NanumGothic"/>
               </a:rPr>
-              <a:t>참고문헌</a:t>
+              <a:t>효과</a:t>
             </a:r>
           </a:p>
         </p:txBody>
@@ -8201,13 +8109,377 @@
         </p:nvSpPr>
         <p:spPr>
           <a:xfrm>
-            <a:off x="10317175" y="365760"/>
-            <a:ext cx="1371600" cy="347472"/>
+            <a:off x="10426903" y="365760"/>
+            <a:ext cx="1261872" cy="347472"/>
           </a:xfrm>
           <a:prstGeom prst="roundRect">
             <a:avLst>
               <a:gd name="adj" fmla="val 8000"/>
             </a:avLst>
+          </a:prstGeom>
+          <a:solidFill>
+            <a:srgbClr val="B97A0C"/>
+          </a:solidFill>
+          <a:ln>
+            <a:noFill/>
+          </a:ln>
+          <a:effectLst/>
+        </p:spPr>
+        <p:style>
+          <a:lnRef idx="1">
+            <a:schemeClr val="accent1"/>
+          </a:lnRef>
+          <a:fillRef idx="3">
+            <a:schemeClr val="accent1"/>
+          </a:fillRef>
+          <a:effectRef idx="2">
+            <a:schemeClr val="accent1"/>
+          </a:effectRef>
+          <a:fontRef idx="minor">
+            <a:schemeClr val="lt1"/>
+          </a:fontRef>
+        </p:style>
+        <p:txBody>
+          <a:bodyPr rtlCol="0" anchor="ctr"/>
+          <a:lstStyle/>
+          <a:p>
+            <a:pPr algn="ctr"/>
+          </a:p>
+        </p:txBody>
+      </p:sp>
+      <p:sp>
+        <p:nvSpPr>
+          <p:cNvPr id="7" name="TextBox 6"/>
+          <p:cNvSpPr txBox="1"/>
+          <p:nvPr/>
+        </p:nvSpPr>
+        <p:spPr>
+          <a:xfrm>
+            <a:off x="10426903" y="365760"/>
+            <a:ext cx="1261872" cy="347472"/>
+          </a:xfrm>
+          <a:prstGeom prst="rect">
+            <a:avLst/>
+          </a:prstGeom>
+          <a:noFill/>
+        </p:spPr>
+        <p:txBody>
+          <a:bodyPr wrap="square" anchor="ctr" lIns="0" rIns="0" tIns="0" bIns="0">
+            <a:spAutoFit/>
+          </a:bodyPr>
+          <a:lstStyle/>
+          <a:p>
+            <a:pPr algn="ctr">
+              <a:lnSpc>
+                <a:spcPct val="108000"/>
+              </a:lnSpc>
+              <a:spcAft>
+                <a:spcPts val="400"/>
+              </a:spcAft>
+            </a:pPr>
+            <a:r>
+              <a:rPr sz="1150" b="1" i="0">
+                <a:solidFill>
+                  <a:srgbClr val="FFFFFF"/>
+                </a:solidFill>
+                <a:latin typeface="NanumGothic"/>
+                <a:ea typeface="NanumGothic"/>
+              </a:rPr>
+              <a:t>Lv III–IV</a:t>
+            </a:r>
+          </a:p>
+        </p:txBody>
+      </p:sp>
+      <p:sp>
+        <p:nvSpPr>
+          <p:cNvPr id="8" name="TextBox 7"/>
+          <p:cNvSpPr txBox="1"/>
+          <p:nvPr/>
+        </p:nvSpPr>
+        <p:spPr>
+          <a:xfrm>
+            <a:off x="731520" y="1371600"/>
+            <a:ext cx="10835640" cy="4754880"/>
+          </a:xfrm>
+          <a:prstGeom prst="rect">
+            <a:avLst/>
+          </a:prstGeom>
+          <a:noFill/>
+        </p:spPr>
+        <p:txBody>
+          <a:bodyPr wrap="square" lIns="0" rIns="0" tIns="0" bIns="0">
+            <a:spAutoFit/>
+          </a:bodyPr>
+          <a:lstStyle/>
+          <a:p>
+            <a:pPr algn="l">
+              <a:lnSpc>
+                <a:spcPct val="108000"/>
+              </a:lnSpc>
+              <a:spcAft>
+                <a:spcPts val="900"/>
+              </a:spcAft>
+            </a:pPr>
+            <a:r>
+              <a:rPr sz="1050" b="1" i="0">
+                <a:solidFill>
+                  <a:srgbClr val="2C898A"/>
+                </a:solidFill>
+                <a:latin typeface="NanumGothic"/>
+                <a:ea typeface="NanumGothic"/>
+              </a:rPr>
+              <a:t>●  </a:t>
+            </a:r>
+            <a:r>
+              <a:rPr sz="1500" b="1" i="0">
+                <a:solidFill>
+                  <a:srgbClr val="1A202C"/>
+                </a:solidFill>
+                <a:latin typeface="NanumGothic"/>
+                <a:ea typeface="NanumGothic"/>
+              </a:rPr>
+              <a:t>CRPS는 교감신경 매개 통증의 전형 → LSB 후 유의한 통증완화가 축적된 근거. 최적 환자 선택·조기 시행이 성공률↑.</a:t>
+            </a:r>
+          </a:p>
+          <a:p>
+            <a:pPr algn="l">
+              <a:lnSpc>
+                <a:spcPct val="108000"/>
+              </a:lnSpc>
+              <a:spcAft>
+                <a:spcPts val="900"/>
+              </a:spcAft>
+            </a:pPr>
+            <a:r>
+              <a:rPr sz="1050" b="1" i="0">
+                <a:solidFill>
+                  <a:srgbClr val="2C898A"/>
+                </a:solidFill>
+                <a:latin typeface="NanumGothic"/>
+                <a:ea typeface="NanumGothic"/>
+              </a:rPr>
+              <a:t>●  </a:t>
+            </a:r>
+            <a:r>
+              <a:rPr sz="1500" b="0" i="0">
+                <a:solidFill>
+                  <a:srgbClr val="1A202C"/>
+                </a:solidFill>
+                <a:latin typeface="NanumGothic"/>
+                <a:ea typeface="NanumGothic"/>
+              </a:rPr>
+              <a:t>Choi 2024(Sci Rep): 교감신경 신경파괴의 효과 지속기간을 전향 관찰로 제시.</a:t>
+            </a:r>
+          </a:p>
+          <a:p>
+            <a:pPr algn="l">
+              <a:lnSpc>
+                <a:spcPct val="108000"/>
+              </a:lnSpc>
+              <a:spcAft>
+                <a:spcPts val="900"/>
+              </a:spcAft>
+            </a:pPr>
+            <a:r>
+              <a:rPr sz="1050" b="1" i="0">
+                <a:solidFill>
+                  <a:srgbClr val="2C898A"/>
+                </a:solidFill>
+                <a:latin typeface="NanumGothic"/>
+                <a:ea typeface="NanumGothic"/>
+              </a:rPr>
+              <a:t>●  </a:t>
+            </a:r>
+            <a:r>
+              <a:rPr sz="1500" b="0" i="0">
+                <a:solidFill>
+                  <a:srgbClr val="1A202C"/>
+                </a:solidFill>
+                <a:latin typeface="NanumGothic"/>
+                <a:ea typeface="NanumGothic"/>
+              </a:rPr>
+              <a:t>반응 예측: 교감신경 피부반응(sympathetic skin response)이 LSB 반응 예측에 유용(Pain Ther 2023).</a:t>
+            </a:r>
+          </a:p>
+          <a:p>
+            <a:pPr algn="l">
+              <a:lnSpc>
+                <a:spcPct val="108000"/>
+              </a:lnSpc>
+              <a:spcAft>
+                <a:spcPts val="900"/>
+              </a:spcAft>
+            </a:pPr>
+            <a:r>
+              <a:rPr sz="1050" b="1" i="0">
+                <a:solidFill>
+                  <a:srgbClr val="2C898A"/>
+                </a:solidFill>
+                <a:latin typeface="NanumGothic"/>
+                <a:ea typeface="NanumGothic"/>
+              </a:rPr>
+              <a:t>●  </a:t>
+            </a:r>
+            <a:r>
+              <a:rPr sz="1500" b="0" i="0">
+                <a:solidFill>
+                  <a:srgbClr val="5A6B7B"/>
+                </a:solidFill>
+                <a:latin typeface="NanumGothic"/>
+                <a:ea typeface="NanumGothic"/>
+              </a:rPr>
+              <a:t>한계: 중추 감작이 진행되면 시간이 지날수록 효과 감소 가능.</a:t>
+            </a:r>
+          </a:p>
+          <a:p>
+            <a:pPr algn="l">
+              <a:lnSpc>
+                <a:spcPct val="108000"/>
+              </a:lnSpc>
+              <a:spcAft>
+                <a:spcPts val="900"/>
+              </a:spcAft>
+            </a:pPr>
+            <a:r>
+              <a:rPr sz="1500" b="1" i="0">
+                <a:solidFill>
+                  <a:srgbClr val="5A6B7B"/>
+                </a:solidFill>
+                <a:latin typeface="NanumGothic"/>
+                <a:ea typeface="NanumGothic"/>
+              </a:rPr>
+              <a:t/>
+            </a:r>
+            <a:r>
+              <a:rPr sz="1500" b="1" i="0">
+                <a:solidFill>
+                  <a:srgbClr val="1F6E70"/>
+                </a:solidFill>
+                <a:latin typeface="NanumGothic"/>
+                <a:ea typeface="NanumGothic"/>
+              </a:rPr>
+              <a:t>기전 요약: 교감차단 → 측부순환 혈관확장 → 조직 산소화↑ → 통증↓ + 교감매개통 차단 + 신경파괴 직접효과.</a:t>
+            </a:r>
+          </a:p>
+        </p:txBody>
+      </p:sp>
+      <p:sp>
+        <p:nvSpPr>
+          <p:cNvPr id="9" name="TextBox 8"/>
+          <p:cNvSpPr txBox="1"/>
+          <p:nvPr/>
+        </p:nvSpPr>
+        <p:spPr>
+          <a:xfrm>
+            <a:off x="731520" y="6455664"/>
+            <a:ext cx="9875520" cy="292608"/>
+          </a:xfrm>
+          <a:prstGeom prst="rect">
+            <a:avLst/>
+          </a:prstGeom>
+          <a:noFill/>
+        </p:spPr>
+        <p:txBody>
+          <a:bodyPr wrap="square" anchor="ctr" lIns="0" rIns="0" tIns="0" bIns="0">
+            <a:spAutoFit/>
+          </a:bodyPr>
+          <a:lstStyle/>
+          <a:p>
+            <a:pPr algn="l">
+              <a:lnSpc>
+                <a:spcPct val="108000"/>
+              </a:lnSpc>
+              <a:spcAft>
+                <a:spcPts val="400"/>
+              </a:spcAft>
+            </a:pPr>
+            <a:r>
+              <a:rPr sz="900" b="0" i="0">
+                <a:solidFill>
+                  <a:srgbClr val="5A6B7B"/>
+                </a:solidFill>
+                <a:latin typeface="NanumGothic"/>
+                <a:ea typeface="NanumGothic"/>
+              </a:rPr>
+              <a:t>근거: Choi 2024(Sci Rep); Pain Ther 2023</a:t>
+            </a:r>
+          </a:p>
+        </p:txBody>
+      </p:sp>
+      <p:sp>
+        <p:nvSpPr>
+          <p:cNvPr id="10" name="TextBox 9"/>
+          <p:cNvSpPr txBox="1"/>
+          <p:nvPr/>
+        </p:nvSpPr>
+        <p:spPr>
+          <a:xfrm>
+            <a:off x="11064240" y="6455664"/>
+            <a:ext cx="822960" cy="292608"/>
+          </a:xfrm>
+          <a:prstGeom prst="rect">
+            <a:avLst/>
+          </a:prstGeom>
+          <a:noFill/>
+        </p:spPr>
+        <p:txBody>
+          <a:bodyPr wrap="square" anchor="ctr" lIns="0" rIns="0" tIns="0" bIns="0">
+            <a:spAutoFit/>
+          </a:bodyPr>
+          <a:lstStyle/>
+          <a:p>
+            <a:pPr algn="r">
+              <a:lnSpc>
+                <a:spcPct val="108000"/>
+              </a:lnSpc>
+              <a:spcAft>
+                <a:spcPts val="400"/>
+              </a:spcAft>
+            </a:pPr>
+            <a:r>
+              <a:rPr sz="1000" b="1" i="0">
+                <a:solidFill>
+                  <a:srgbClr val="5A6B7B"/>
+                </a:solidFill>
+                <a:latin typeface="NanumGothic"/>
+                <a:ea typeface="NanumGothic"/>
+              </a:rPr>
+              <a:t>17</a:t>
+            </a:r>
+          </a:p>
+        </p:txBody>
+      </p:sp>
+    </p:spTree>
+  </p:cSld>
+  <p:clrMapOvr>
+    <a:masterClrMapping/>
+  </p:clrMapOvr>
+</p:sld>
+</file>
+
+<file path=ppt/slides/slide18.xml><?xml version="1.0" encoding="utf-8"?>
+<p:sld xmlns:a="http://schemas.openxmlformats.org/drawingml/2006/main" xmlns:p="http://schemas.openxmlformats.org/presentationml/2006/main" xmlns:r="http://schemas.openxmlformats.org/officeDocument/2006/relationships">
+  <p:cSld>
+    <p:spTree>
+      <p:nvGrpSpPr>
+        <p:cNvPr id="1" name=""/>
+        <p:cNvGrpSpPr/>
+        <p:nvPr/>
+      </p:nvGrpSpPr>
+      <p:grpSpPr/>
+      <p:sp>
+        <p:nvSpPr>
+          <p:cNvPr id="2" name="Rectangle 1"/>
+          <p:cNvSpPr/>
+          <p:nvPr/>
+        </p:nvSpPr>
+        <p:spPr>
+          <a:xfrm>
+            <a:off x="502920" y="310896"/>
+            <a:ext cx="109728" cy="457200"/>
+          </a:xfrm>
+          <a:prstGeom prst="rect">
+            <a:avLst/>
           </a:prstGeom>
           <a:solidFill>
             <a:srgbClr val="2C898A"/>
@@ -8241,14 +8513,14 @@
       </p:sp>
       <p:sp>
         <p:nvSpPr>
-          <p:cNvPr id="7" name="TextBox 6"/>
+          <p:cNvPr id="3" name="TextBox 2"/>
           <p:cNvSpPr txBox="1"/>
           <p:nvPr/>
         </p:nvSpPr>
         <p:spPr>
           <a:xfrm>
-            <a:off x="10317175" y="365760"/>
-            <a:ext cx="1371600" cy="347472"/>
+            <a:off x="731520" y="237744"/>
+            <a:ext cx="9509760" cy="685800"/>
           </a:xfrm>
           <a:prstGeom prst="rect">
             <a:avLst/>
@@ -8261,7 +8533,7 @@
           </a:bodyPr>
           <a:lstStyle/>
           <a:p>
-            <a:pPr algn="ctr">
+            <a:pPr algn="l">
               <a:lnSpc>
                 <a:spcPct val="108000"/>
               </a:lnSpc>
@@ -8270,28 +8542,28 @@
               </a:spcAft>
             </a:pPr>
             <a:r>
-              <a:rPr sz="1150" b="1" i="0">
-                <a:solidFill>
-                  <a:srgbClr val="FFFFFF"/>
-                </a:solidFill>
-                <a:latin typeface="NanumGothic"/>
-                <a:ea typeface="NanumGothic"/>
-              </a:rPr>
-              <a:t>References</a:t>
-            </a:r>
-          </a:p>
-        </p:txBody>
-      </p:sp>
-      <p:sp>
-        <p:nvSpPr>
-          <p:cNvPr id="8" name="TextBox 7"/>
+              <a:rPr sz="2400" b="1" i="0">
+                <a:solidFill>
+                  <a:srgbClr val="1B355E"/>
+                </a:solidFill>
+                <a:latin typeface="NanumGothic"/>
+                <a:ea typeface="NanumGothic"/>
+              </a:rPr>
+              <a:t>근거수준 · 결론</a:t>
+            </a:r>
+          </a:p>
+        </p:txBody>
+      </p:sp>
+      <p:sp>
+        <p:nvSpPr>
+          <p:cNvPr id="4" name="TextBox 3"/>
           <p:cNvSpPr txBox="1"/>
           <p:nvPr/>
         </p:nvSpPr>
         <p:spPr>
           <a:xfrm>
-            <a:off x="731520" y="1371600"/>
-            <a:ext cx="5257800" cy="4846320"/>
+            <a:off x="749808" y="109728"/>
+            <a:ext cx="7315200" cy="219456"/>
           </a:xfrm>
           <a:prstGeom prst="rect">
             <a:avLst/>
@@ -8306,121 +8578,297 @@
           <a:p>
             <a:pPr algn="l">
               <a:lnSpc>
-                <a:spcPct val="105000"/>
-              </a:lnSpc>
-              <a:spcAft>
-                <a:spcPts val="700"/>
-              </a:spcAft>
-            </a:pPr>
-            <a:r>
-              <a:rPr sz="1000" b="0" i="0">
+                <a:spcPct val="108000"/>
+              </a:lnSpc>
+              <a:spcAft>
+                <a:spcPts val="400"/>
+              </a:spcAft>
+            </a:pPr>
+            <a:r>
+              <a:rPr sz="1100" b="1" i="0">
+                <a:solidFill>
+                  <a:srgbClr val="1F6E70"/>
+                </a:solidFill>
+                <a:latin typeface="NanumGothic"/>
+                <a:ea typeface="NanumGothic"/>
+              </a:rPr>
+              <a:t>안전성 · 결론</a:t>
+            </a:r>
+          </a:p>
+        </p:txBody>
+      </p:sp>
+      <p:sp>
+        <p:nvSpPr>
+          <p:cNvPr id="5" name="Rectangle 4"/>
+          <p:cNvSpPr/>
+          <p:nvPr/>
+        </p:nvSpPr>
+        <p:spPr>
+          <a:xfrm>
+            <a:off x="731520" y="969264"/>
+            <a:ext cx="10881360" cy="17780"/>
+          </a:xfrm>
+          <a:prstGeom prst="rect">
+            <a:avLst/>
+          </a:prstGeom>
+          <a:solidFill>
+            <a:srgbClr val="D5DEE7"/>
+          </a:solidFill>
+          <a:ln>
+            <a:noFill/>
+          </a:ln>
+          <a:effectLst/>
+        </p:spPr>
+        <p:style>
+          <a:lnRef idx="1">
+            <a:schemeClr val="accent1"/>
+          </a:lnRef>
+          <a:fillRef idx="3">
+            <a:schemeClr val="accent1"/>
+          </a:fillRef>
+          <a:effectRef idx="2">
+            <a:schemeClr val="accent1"/>
+          </a:effectRef>
+          <a:fontRef idx="minor">
+            <a:schemeClr val="lt1"/>
+          </a:fontRef>
+        </p:style>
+        <p:txBody>
+          <a:bodyPr rtlCol="0" anchor="ctr"/>
+          <a:lstStyle/>
+          <a:p>
+            <a:pPr algn="ctr"/>
+          </a:p>
+        </p:txBody>
+      </p:sp>
+      <p:sp>
+        <p:nvSpPr>
+          <p:cNvPr id="6" name="Rounded Rectangle 5"/>
+          <p:cNvSpPr/>
+          <p:nvPr/>
+        </p:nvSpPr>
+        <p:spPr>
+          <a:xfrm>
+            <a:off x="11194999" y="365760"/>
+            <a:ext cx="493776" cy="347472"/>
+          </a:xfrm>
+          <a:prstGeom prst="roundRect">
+            <a:avLst>
+              <a:gd name="adj" fmla="val 8000"/>
+            </a:avLst>
+          </a:prstGeom>
+          <a:solidFill>
+            <a:srgbClr val="B03A2E"/>
+          </a:solidFill>
+          <a:ln>
+            <a:noFill/>
+          </a:ln>
+          <a:effectLst/>
+        </p:spPr>
+        <p:style>
+          <a:lnRef idx="1">
+            <a:schemeClr val="accent1"/>
+          </a:lnRef>
+          <a:fillRef idx="3">
+            <a:schemeClr val="accent1"/>
+          </a:fillRef>
+          <a:effectRef idx="2">
+            <a:schemeClr val="accent1"/>
+          </a:effectRef>
+          <a:fontRef idx="minor">
+            <a:schemeClr val="lt1"/>
+          </a:fontRef>
+        </p:style>
+        <p:txBody>
+          <a:bodyPr rtlCol="0" anchor="ctr"/>
+          <a:lstStyle/>
+          <a:p>
+            <a:pPr algn="ctr"/>
+          </a:p>
+        </p:txBody>
+      </p:sp>
+      <p:sp>
+        <p:nvSpPr>
+          <p:cNvPr id="7" name="TextBox 6"/>
+          <p:cNvSpPr txBox="1"/>
+          <p:nvPr/>
+        </p:nvSpPr>
+        <p:spPr>
+          <a:xfrm>
+            <a:off x="11194999" y="365760"/>
+            <a:ext cx="493776" cy="347472"/>
+          </a:xfrm>
+          <a:prstGeom prst="rect">
+            <a:avLst/>
+          </a:prstGeom>
+          <a:noFill/>
+        </p:spPr>
+        <p:txBody>
+          <a:bodyPr wrap="square" anchor="ctr" lIns="0" rIns="0" tIns="0" bIns="0">
+            <a:spAutoFit/>
+          </a:bodyPr>
+          <a:lstStyle/>
+          <a:p>
+            <a:pPr algn="ctr">
+              <a:lnSpc>
+                <a:spcPct val="108000"/>
+              </a:lnSpc>
+              <a:spcAft>
+                <a:spcPts val="400"/>
+              </a:spcAft>
+            </a:pPr>
+            <a:r>
+              <a:rPr sz="1150" b="1" i="0">
+                <a:solidFill>
+                  <a:srgbClr val="FFFFFF"/>
+                </a:solidFill>
+                <a:latin typeface="NanumGothic"/>
+                <a:ea typeface="NanumGothic"/>
+              </a:rPr>
+              <a:t>결론</a:t>
+            </a:r>
+          </a:p>
+        </p:txBody>
+      </p:sp>
+      <p:sp>
+        <p:nvSpPr>
+          <p:cNvPr id="8" name="TextBox 7"/>
+          <p:cNvSpPr txBox="1"/>
+          <p:nvPr/>
+        </p:nvSpPr>
+        <p:spPr>
+          <a:xfrm>
+            <a:off x="731520" y="1371600"/>
+            <a:ext cx="10835640" cy="4754880"/>
+          </a:xfrm>
+          <a:prstGeom prst="rect">
+            <a:avLst/>
+          </a:prstGeom>
+          <a:noFill/>
+        </p:spPr>
+        <p:txBody>
+          <a:bodyPr wrap="square" lIns="0" rIns="0" tIns="0" bIns="0">
+            <a:spAutoFit/>
+          </a:bodyPr>
+          <a:lstStyle/>
+          <a:p>
+            <a:pPr algn="l">
+              <a:lnSpc>
+                <a:spcPct val="108000"/>
+              </a:lnSpc>
+              <a:spcAft>
+                <a:spcPts val="900"/>
+              </a:spcAft>
+            </a:pPr>
+            <a:r>
+              <a:rPr sz="1050" b="1" i="0">
+                <a:solidFill>
+                  <a:srgbClr val="2C898A"/>
+                </a:solidFill>
+                <a:latin typeface="NanumGothic"/>
+                <a:ea typeface="NanumGothic"/>
+              </a:rPr>
+              <a:t>●  </a:t>
+            </a:r>
+            <a:r>
+              <a:rPr sz="1500" b="1" i="0">
+                <a:solidFill>
+                  <a:srgbClr val="B03A2E"/>
+                </a:solidFill>
+                <a:latin typeface="NanumGothic"/>
+                <a:ea typeface="NanumGothic"/>
+              </a:rPr>
+              <a:t>합병증·회피는 앞의 조감도·회피표 참고 — 대부분 영상유도·정확한 바늘 위치로 예방 가능.</a:t>
+            </a:r>
+          </a:p>
+          <a:p>
+            <a:pPr algn="l">
+              <a:lnSpc>
+                <a:spcPct val="108000"/>
+              </a:lnSpc>
+              <a:spcAft>
+                <a:spcPts val="900"/>
+              </a:spcAft>
+            </a:pPr>
+            <a:r>
+              <a:rPr sz="1050" b="1" i="0">
+                <a:solidFill>
+                  <a:srgbClr val="2C898A"/>
+                </a:solidFill>
+                <a:latin typeface="NanumGothic"/>
+                <a:ea typeface="NanumGothic"/>
+              </a:rPr>
+              <a:t>●  </a:t>
+            </a:r>
+            <a:r>
+              <a:rPr sz="1500" b="0" i="0">
                 <a:solidFill>
                   <a:srgbClr val="1A202C"/>
                 </a:solidFill>
                 <a:latin typeface="NanumGothic"/>
                 <a:ea typeface="NanumGothic"/>
               </a:rPr>
-              <a:t>Dua A, Varacallo MA. Lumbar sympathetic block. StatPearls. 2026. NBK431107.</a:t>
+              <a:t>근거수준: 대부분 관찰·증례군·소규모 전향연구로 대규모 RCT는 부족(허혈·CRPS Level III~IV). 단, 난치성 당뇨병성 신경병증엔 RCT 존재.</a:t>
             </a:r>
           </a:p>
           <a:p>
             <a:pPr algn="l">
               <a:lnSpc>
-                <a:spcPct val="105000"/>
-              </a:lnSpc>
-              <a:spcAft>
-                <a:spcPts val="700"/>
-              </a:spcAft>
-            </a:pPr>
-            <a:r>
-              <a:rPr sz="1000" b="0" i="0">
+                <a:spcPct val="108000"/>
+              </a:lnSpc>
+              <a:spcAft>
+                <a:spcPts val="900"/>
+              </a:spcAft>
+            </a:pPr>
+            <a:r>
+              <a:rPr sz="1050" b="1" i="0">
+                <a:solidFill>
+                  <a:srgbClr val="2C898A"/>
+                </a:solidFill>
+                <a:latin typeface="NanumGothic"/>
+                <a:ea typeface="NanumGothic"/>
+              </a:rPr>
+              <a:t>●  </a:t>
+            </a:r>
+            <a:r>
+              <a:rPr sz="1500" b="0" i="0">
                 <a:solidFill>
                   <a:srgbClr val="1A202C"/>
                 </a:solidFill>
                 <a:latin typeface="NanumGothic"/>
                 <a:ea typeface="NanumGothic"/>
               </a:rPr>
-              <a:t>Lumbar sympatholysis. StatPearls. NBK560514.</a:t>
+              <a:t>시행 원칙: 원인 감별 → 진단적 국소마취제 차단(온도 ≥2°C 확인) → 반응 양호 시 신경파괴/RFA.</a:t>
             </a:r>
           </a:p>
           <a:p>
             <a:pPr algn="l">
               <a:lnSpc>
-                <a:spcPct val="105000"/>
-              </a:lnSpc>
-              <a:spcAft>
-                <a:spcPts val="700"/>
-              </a:spcAft>
-            </a:pPr>
-            <a:r>
-              <a:rPr sz="1000" b="0" i="0">
-                <a:solidFill>
-                  <a:srgbClr val="1A202C"/>
-                </a:solidFill>
-                <a:latin typeface="NanumGothic"/>
-                <a:ea typeface="NanumGothic"/>
-              </a:rPr>
-              <a:t>Zhang JH, Deng YP, Geng MJ. Efficacy of the lumbar sympathetic ganglion block in lower limb pain. Ibrain. 2022;8(4):442-52. PMID 37786587.</a:t>
-            </a:r>
-          </a:p>
-          <a:p>
-            <a:pPr algn="l">
-              <a:lnSpc>
-                <a:spcPct val="105000"/>
-              </a:lnSpc>
-              <a:spcAft>
-                <a:spcPts val="700"/>
-              </a:spcAft>
-            </a:pPr>
-            <a:r>
-              <a:rPr sz="1000" b="0" i="0">
-                <a:solidFill>
-                  <a:srgbClr val="1A202C"/>
-                </a:solidFill>
-                <a:latin typeface="NanumGothic"/>
-                <a:ea typeface="NanumGothic"/>
-              </a:rPr>
-              <a:t>Dickey Z, Sharma N. Lumbar sympathetic block leading to increased arterial diameter and blood flow. Cureus. 2024;16(6):e61755. PMID 38975506.</a:t>
-            </a:r>
-          </a:p>
-          <a:p>
-            <a:pPr algn="l">
-              <a:lnSpc>
-                <a:spcPct val="105000"/>
-              </a:lnSpc>
-              <a:spcAft>
-                <a:spcPts val="700"/>
-              </a:spcAft>
-            </a:pPr>
-            <a:r>
-              <a:rPr sz="1000" b="0" i="0">
-                <a:solidFill>
-                  <a:srgbClr val="1A202C"/>
-                </a:solidFill>
-                <a:latin typeface="NanumGothic"/>
-                <a:ea typeface="NanumGothic"/>
-              </a:rPr>
-              <a:t>Barreto Junior EPS, et al. Neurolytic block of the lumbar sympathetic chain in critical lower limb ischemia. Braz J Anesthesiol. 2018;68(1):100-3. PMC9391669.</a:t>
-            </a:r>
-          </a:p>
-          <a:p>
-            <a:pPr algn="l">
-              <a:lnSpc>
-                <a:spcPct val="105000"/>
-              </a:lnSpc>
-              <a:spcAft>
-                <a:spcPts val="700"/>
-              </a:spcAft>
-            </a:pPr>
-            <a:r>
-              <a:rPr sz="1000" b="0" i="0">
-                <a:solidFill>
-                  <a:srgbClr val="1A202C"/>
-                </a:solidFill>
-                <a:latin typeface="NanumGothic"/>
-                <a:ea typeface="NanumGothic"/>
-              </a:rPr>
-              <a:t>Choi EJ, et al. Effect duration of lumbar sympathetic ganglion neurolysis in CRPS. Sci Rep. 2024;14(1):12693. PMID 38830944.</a:t>
+                <a:spcPct val="108000"/>
+              </a:lnSpc>
+              <a:spcAft>
+                <a:spcPts val="900"/>
+              </a:spcAft>
+            </a:pPr>
+            <a:r>
+              <a:rPr sz="1500" b="1" i="0">
+                <a:solidFill>
+                  <a:srgbClr val="5A6B7B"/>
+                </a:solidFill>
+                <a:latin typeface="NanumGothic"/>
+                <a:ea typeface="NanumGothic"/>
+              </a:rPr>
+              <a:t/>
+            </a:r>
+            <a:r>
+              <a:rPr sz="1500" b="1" i="0">
+                <a:solidFill>
+                  <a:srgbClr val="1F6E70"/>
+                </a:solidFill>
+                <a:latin typeface="NanumGothic"/>
+                <a:ea typeface="NanumGothic"/>
+              </a:rPr>
+              <a:t>그럼에도 조기 CRPS·재건 불가능한 중증 하지허혈(안정통)·난치성 신경병증에서 임상적으로 유용.</a:t>
             </a:r>
           </a:p>
         </p:txBody>
@@ -8433,8 +8881,199 @@
         </p:nvSpPr>
         <p:spPr>
           <a:xfrm>
-            <a:off x="6217920" y="1371600"/>
-            <a:ext cx="5257800" cy="4846320"/>
+            <a:off x="731520" y="6455664"/>
+            <a:ext cx="9875520" cy="292608"/>
+          </a:xfrm>
+          <a:prstGeom prst="rect">
+            <a:avLst/>
+          </a:prstGeom>
+          <a:noFill/>
+        </p:spPr>
+        <p:txBody>
+          <a:bodyPr wrap="square" anchor="ctr" lIns="0" rIns="0" tIns="0" bIns="0">
+            <a:spAutoFit/>
+          </a:bodyPr>
+          <a:lstStyle/>
+          <a:p>
+            <a:pPr algn="l">
+              <a:lnSpc>
+                <a:spcPct val="108000"/>
+              </a:lnSpc>
+              <a:spcAft>
+                <a:spcPts val="400"/>
+              </a:spcAft>
+            </a:pPr>
+            <a:r>
+              <a:rPr sz="900" b="0" i="0">
+                <a:solidFill>
+                  <a:srgbClr val="5A6B7B"/>
+                </a:solidFill>
+                <a:latin typeface="NanumGothic"/>
+                <a:ea typeface="NanumGothic"/>
+              </a:rPr>
+              <a:t>근거: StatPearls; 문헌고찰 종합</a:t>
+            </a:r>
+          </a:p>
+        </p:txBody>
+      </p:sp>
+      <p:sp>
+        <p:nvSpPr>
+          <p:cNvPr id="10" name="TextBox 9"/>
+          <p:cNvSpPr txBox="1"/>
+          <p:nvPr/>
+        </p:nvSpPr>
+        <p:spPr>
+          <a:xfrm>
+            <a:off x="11064240" y="6455664"/>
+            <a:ext cx="822960" cy="292608"/>
+          </a:xfrm>
+          <a:prstGeom prst="rect">
+            <a:avLst/>
+          </a:prstGeom>
+          <a:noFill/>
+        </p:spPr>
+        <p:txBody>
+          <a:bodyPr wrap="square" anchor="ctr" lIns="0" rIns="0" tIns="0" bIns="0">
+            <a:spAutoFit/>
+          </a:bodyPr>
+          <a:lstStyle/>
+          <a:p>
+            <a:pPr algn="r">
+              <a:lnSpc>
+                <a:spcPct val="108000"/>
+              </a:lnSpc>
+              <a:spcAft>
+                <a:spcPts val="400"/>
+              </a:spcAft>
+            </a:pPr>
+            <a:r>
+              <a:rPr sz="1000" b="1" i="0">
+                <a:solidFill>
+                  <a:srgbClr val="5A6B7B"/>
+                </a:solidFill>
+                <a:latin typeface="NanumGothic"/>
+                <a:ea typeface="NanumGothic"/>
+              </a:rPr>
+              <a:t>18</a:t>
+            </a:r>
+          </a:p>
+        </p:txBody>
+      </p:sp>
+    </p:spTree>
+  </p:cSld>
+  <p:clrMapOvr>
+    <a:masterClrMapping/>
+  </p:clrMapOvr>
+</p:sld>
+</file>
+
+<file path=ppt/slides/slide19.xml><?xml version="1.0" encoding="utf-8"?>
+<p:sld xmlns:a="http://schemas.openxmlformats.org/drawingml/2006/main" xmlns:p="http://schemas.openxmlformats.org/presentationml/2006/main" xmlns:r="http://schemas.openxmlformats.org/officeDocument/2006/relationships">
+  <p:cSld>
+    <p:spTree>
+      <p:nvGrpSpPr>
+        <p:cNvPr id="1" name=""/>
+        <p:cNvGrpSpPr/>
+        <p:nvPr/>
+      </p:nvGrpSpPr>
+      <p:grpSpPr/>
+      <p:sp>
+        <p:nvSpPr>
+          <p:cNvPr id="2" name="Rectangle 1"/>
+          <p:cNvSpPr/>
+          <p:nvPr/>
+        </p:nvSpPr>
+        <p:spPr>
+          <a:xfrm>
+            <a:off x="502920" y="310896"/>
+            <a:ext cx="109728" cy="457200"/>
+          </a:xfrm>
+          <a:prstGeom prst="rect">
+            <a:avLst/>
+          </a:prstGeom>
+          <a:solidFill>
+            <a:srgbClr val="2C898A"/>
+          </a:solidFill>
+          <a:ln>
+            <a:noFill/>
+          </a:ln>
+          <a:effectLst/>
+        </p:spPr>
+        <p:style>
+          <a:lnRef idx="1">
+            <a:schemeClr val="accent1"/>
+          </a:lnRef>
+          <a:fillRef idx="3">
+            <a:schemeClr val="accent1"/>
+          </a:fillRef>
+          <a:effectRef idx="2">
+            <a:schemeClr val="accent1"/>
+          </a:effectRef>
+          <a:fontRef idx="minor">
+            <a:schemeClr val="lt1"/>
+          </a:fontRef>
+        </p:style>
+        <p:txBody>
+          <a:bodyPr rtlCol="0" anchor="ctr"/>
+          <a:lstStyle/>
+          <a:p>
+            <a:pPr algn="ctr"/>
+          </a:p>
+        </p:txBody>
+      </p:sp>
+      <p:sp>
+        <p:nvSpPr>
+          <p:cNvPr id="3" name="TextBox 2"/>
+          <p:cNvSpPr txBox="1"/>
+          <p:nvPr/>
+        </p:nvSpPr>
+        <p:spPr>
+          <a:xfrm>
+            <a:off x="731520" y="237744"/>
+            <a:ext cx="9509760" cy="685800"/>
+          </a:xfrm>
+          <a:prstGeom prst="rect">
+            <a:avLst/>
+          </a:prstGeom>
+          <a:noFill/>
+        </p:spPr>
+        <p:txBody>
+          <a:bodyPr wrap="square" anchor="ctr" lIns="0" rIns="0" tIns="0" bIns="0">
+            <a:spAutoFit/>
+          </a:bodyPr>
+          <a:lstStyle/>
+          <a:p>
+            <a:pPr algn="l">
+              <a:lnSpc>
+                <a:spcPct val="108000"/>
+              </a:lnSpc>
+              <a:spcAft>
+                <a:spcPts val="400"/>
+              </a:spcAft>
+            </a:pPr>
+            <a:r>
+              <a:rPr sz="2400" b="1" i="0">
+                <a:solidFill>
+                  <a:srgbClr val="1B355E"/>
+                </a:solidFill>
+                <a:latin typeface="NanumGothic"/>
+                <a:ea typeface="NanumGothic"/>
+              </a:rPr>
+              <a:t>실제 진료 순서 — 교감신경 축을 겨냥한 단계적 접근</a:t>
+            </a:r>
+          </a:p>
+        </p:txBody>
+      </p:sp>
+      <p:sp>
+        <p:nvSpPr>
+          <p:cNvPr id="4" name="TextBox 3"/>
+          <p:cNvSpPr txBox="1"/>
+          <p:nvPr/>
+        </p:nvSpPr>
+        <p:spPr>
+          <a:xfrm>
+            <a:off x="749808" y="109728"/>
+            <a:ext cx="7315200" cy="219456"/>
           </a:xfrm>
           <a:prstGeom prst="rect">
             <a:avLst/>
@@ -8449,135 +9088,125 @@
           <a:p>
             <a:pPr algn="l">
               <a:lnSpc>
-                <a:spcPct val="105000"/>
-              </a:lnSpc>
-              <a:spcAft>
-                <a:spcPts val="700"/>
-              </a:spcAft>
-            </a:pPr>
-            <a:r>
-              <a:rPr sz="1000" b="0" i="0">
-                <a:solidFill>
-                  <a:srgbClr val="1A202C"/>
-                </a:solidFill>
-                <a:latin typeface="NanumGothic"/>
-                <a:ea typeface="NanumGothic"/>
-              </a:rPr>
-              <a:t>Gungor S, et al. Sympathetic blocks for CRPS: a case series. Medicine (Baltimore). 2018;97(19):e0705. PMID 29742728.</a:t>
-            </a:r>
-          </a:p>
-          <a:p>
-            <a:pPr algn="l">
-              <a:lnSpc>
-                <a:spcPct val="105000"/>
-              </a:lnSpc>
-              <a:spcAft>
-                <a:spcPts val="700"/>
-              </a:spcAft>
-            </a:pPr>
-            <a:r>
-              <a:rPr sz="1000" b="0" i="0">
-                <a:solidFill>
-                  <a:srgbClr val="1A202C"/>
-                </a:solidFill>
-                <a:latin typeface="NanumGothic"/>
-                <a:ea typeface="NanumGothic"/>
-              </a:rPr>
-              <a:t>Effect of lumbar sympathetic blockade on pain, Fontaine classification, collateral perfusion in PAD. Medicina (Kaunas). 2024;60(5):682.</a:t>
-            </a:r>
-          </a:p>
-          <a:p>
-            <a:pPr algn="l">
-              <a:lnSpc>
-                <a:spcPct val="105000"/>
-              </a:lnSpc>
-              <a:spcAft>
-                <a:spcPts val="700"/>
-              </a:spcAft>
-            </a:pPr>
-            <a:r>
-              <a:rPr sz="1000" b="0" i="0">
-                <a:solidFill>
-                  <a:srgbClr val="1A202C"/>
-                </a:solidFill>
-                <a:latin typeface="NanumGothic"/>
-                <a:ea typeface="NanumGothic"/>
-              </a:rPr>
-              <a:t>Prediction of LSB efficacy in CRPS type 1 by sympathetic skin response. Pain Ther. 2023;12(3):809-22. PMC10199976.</a:t>
-            </a:r>
-          </a:p>
-          <a:p>
-            <a:pPr algn="l">
-              <a:lnSpc>
-                <a:spcPct val="105000"/>
-              </a:lnSpc>
-              <a:spcAft>
-                <a:spcPts val="700"/>
-              </a:spcAft>
-            </a:pPr>
-            <a:r>
-              <a:rPr sz="1000" b="0" i="0">
-                <a:solidFill>
-                  <a:srgbClr val="1A202C"/>
-                </a:solidFill>
-                <a:latin typeface="NanumGothic"/>
-                <a:ea typeface="NanumGothic"/>
-              </a:rPr>
-              <a:t>Continuous LSB + sympatholysis for refractory painful diabetic neuropathy — RCT. 2020. PMID 32915421.</a:t>
-            </a:r>
-          </a:p>
-          <a:p>
-            <a:pPr algn="l">
-              <a:lnSpc>
-                <a:spcPct val="105000"/>
-              </a:lnSpc>
-              <a:spcAft>
-                <a:spcPts val="700"/>
-              </a:spcAft>
-            </a:pPr>
-            <a:r>
-              <a:rPr sz="1000" b="0" i="0">
-                <a:solidFill>
-                  <a:srgbClr val="1A202C"/>
-                </a:solidFill>
-                <a:latin typeface="NanumGothic"/>
-                <a:ea typeface="NanumGothic"/>
-              </a:rPr>
-              <a:t>Sympathetic blocks: sustained relief in refractory painful diabetic neuropathy (case). 2012. PMID 22606406.</a:t>
-            </a:r>
-          </a:p>
-          <a:p>
-            <a:pPr algn="l">
-              <a:lnSpc>
-                <a:spcPct val="105000"/>
-              </a:lnSpc>
-              <a:spcAft>
-                <a:spcPts val="700"/>
-              </a:spcAft>
-            </a:pPr>
-            <a:r>
-              <a:rPr sz="1000" b="0" i="0">
-                <a:solidFill>
-                  <a:srgbClr val="1A202C"/>
-                </a:solidFill>
-                <a:latin typeface="NanumGothic"/>
-                <a:ea typeface="NanumGothic"/>
-              </a:rPr>
-              <a:t>Lumbar sympathectomy for ischaemia·vasculitis·diabetic neuropathy·hyperhidrosis — series. 2018. PMID 29516399.</a:t>
-            </a:r>
-          </a:p>
-        </p:txBody>
-      </p:sp>
-      <p:sp>
-        <p:nvSpPr>
-          <p:cNvPr id="10" name="TextBox 9"/>
+                <a:spcPct val="108000"/>
+              </a:lnSpc>
+              <a:spcAft>
+                <a:spcPts val="400"/>
+              </a:spcAft>
+            </a:pPr>
+            <a:r>
+              <a:rPr sz="1100" b="1" i="0">
+                <a:solidFill>
+                  <a:srgbClr val="1F6E70"/>
+                </a:solidFill>
+                <a:latin typeface="NanumGothic"/>
+                <a:ea typeface="NanumGothic"/>
+              </a:rPr>
+              <a:t>나의 프로토콜 · 실제 적용</a:t>
+            </a:r>
+          </a:p>
+        </p:txBody>
+      </p:sp>
+      <p:sp>
+        <p:nvSpPr>
+          <p:cNvPr id="5" name="Rectangle 4"/>
+          <p:cNvSpPr/>
+          <p:nvPr/>
+        </p:nvSpPr>
+        <p:spPr>
+          <a:xfrm>
+            <a:off x="731520" y="969264"/>
+            <a:ext cx="10881360" cy="17780"/>
+          </a:xfrm>
+          <a:prstGeom prst="rect">
+            <a:avLst/>
+          </a:prstGeom>
+          <a:solidFill>
+            <a:srgbClr val="D5DEE7"/>
+          </a:solidFill>
+          <a:ln>
+            <a:noFill/>
+          </a:ln>
+          <a:effectLst/>
+        </p:spPr>
+        <p:style>
+          <a:lnRef idx="1">
+            <a:schemeClr val="accent1"/>
+          </a:lnRef>
+          <a:fillRef idx="3">
+            <a:schemeClr val="accent1"/>
+          </a:fillRef>
+          <a:effectRef idx="2">
+            <a:schemeClr val="accent1"/>
+          </a:effectRef>
+          <a:fontRef idx="minor">
+            <a:schemeClr val="lt1"/>
+          </a:fontRef>
+        </p:style>
+        <p:txBody>
+          <a:bodyPr rtlCol="0" anchor="ctr"/>
+          <a:lstStyle/>
+          <a:p>
+            <a:pPr algn="ctr"/>
+          </a:p>
+        </p:txBody>
+      </p:sp>
+      <p:sp>
+        <p:nvSpPr>
+          <p:cNvPr id="6" name="Rounded Rectangle 5"/>
+          <p:cNvSpPr/>
+          <p:nvPr/>
+        </p:nvSpPr>
+        <p:spPr>
+          <a:xfrm>
+            <a:off x="10865816" y="365760"/>
+            <a:ext cx="822959" cy="347472"/>
+          </a:xfrm>
+          <a:prstGeom prst="roundRect">
+            <a:avLst>
+              <a:gd name="adj" fmla="val 8000"/>
+            </a:avLst>
+          </a:prstGeom>
+          <a:solidFill>
+            <a:srgbClr val="1A202C"/>
+          </a:solidFill>
+          <a:ln>
+            <a:noFill/>
+          </a:ln>
+          <a:effectLst/>
+        </p:spPr>
+        <p:style>
+          <a:lnRef idx="1">
+            <a:schemeClr val="accent1"/>
+          </a:lnRef>
+          <a:fillRef idx="3">
+            <a:schemeClr val="accent1"/>
+          </a:fillRef>
+          <a:effectRef idx="2">
+            <a:schemeClr val="accent1"/>
+          </a:effectRef>
+          <a:fontRef idx="minor">
+            <a:schemeClr val="lt1"/>
+          </a:fontRef>
+        </p:style>
+        <p:txBody>
+          <a:bodyPr rtlCol="0" anchor="ctr"/>
+          <a:lstStyle/>
+          <a:p>
+            <a:pPr algn="ctr"/>
+          </a:p>
+        </p:txBody>
+      </p:sp>
+      <p:sp>
+        <p:nvSpPr>
+          <p:cNvPr id="7" name="TextBox 6"/>
           <p:cNvSpPr txBox="1"/>
           <p:nvPr/>
         </p:nvSpPr>
         <p:spPr>
           <a:xfrm>
-            <a:off x="731520" y="6455664"/>
-            <a:ext cx="9875520" cy="292608"/>
+            <a:off x="10865816" y="365760"/>
+            <a:ext cx="822959" cy="347472"/>
           </a:xfrm>
           <a:prstGeom prst="rect">
             <a:avLst/>
@@ -8590,37 +9219,240 @@
           </a:bodyPr>
           <a:lstStyle/>
           <a:p>
+            <a:pPr algn="ctr">
+              <a:lnSpc>
+                <a:spcPct val="108000"/>
+              </a:lnSpc>
+              <a:spcAft>
+                <a:spcPts val="400"/>
+              </a:spcAft>
+            </a:pPr>
+            <a:r>
+              <a:rPr sz="1150" b="1" i="0">
+                <a:solidFill>
+                  <a:srgbClr val="FFFFFF"/>
+                </a:solidFill>
+                <a:latin typeface="NanumGothic"/>
+                <a:ea typeface="NanumGothic"/>
+              </a:rPr>
+              <a:t>실전 순서</a:t>
+            </a:r>
+          </a:p>
+        </p:txBody>
+      </p:sp>
+      <p:sp>
+        <p:nvSpPr>
+          <p:cNvPr id="8" name="TextBox 7"/>
+          <p:cNvSpPr txBox="1"/>
+          <p:nvPr/>
+        </p:nvSpPr>
+        <p:spPr>
+          <a:xfrm>
+            <a:off x="731520" y="1371600"/>
+            <a:ext cx="10835640" cy="4754880"/>
+          </a:xfrm>
+          <a:prstGeom prst="rect">
+            <a:avLst/>
+          </a:prstGeom>
+          <a:noFill/>
+        </p:spPr>
+        <p:txBody>
+          <a:bodyPr wrap="square" lIns="0" rIns="0" tIns="0" bIns="0">
+            <a:spAutoFit/>
+          </a:bodyPr>
+          <a:lstStyle/>
+          <a:p>
             <a:pPr algn="l">
               <a:lnSpc>
                 <a:spcPct val="108000"/>
               </a:lnSpc>
               <a:spcAft>
-                <a:spcPts val="400"/>
-              </a:spcAft>
-            </a:pPr>
-            <a:r>
-              <a:rPr sz="900" b="0" i="0">
+                <a:spcPts val="800"/>
+              </a:spcAft>
+            </a:pPr>
+            <a:r>
+              <a:rPr sz="979" b="1" i="0">
+                <a:solidFill>
+                  <a:srgbClr val="2C898A"/>
+                </a:solidFill>
+                <a:latin typeface="NanumGothic"/>
+                <a:ea typeface="NanumGothic"/>
+              </a:rPr>
+              <a:t>●  </a:t>
+            </a:r>
+            <a:r>
+              <a:rPr sz="1400" b="0" i="0">
+                <a:solidFill>
+                  <a:srgbClr val="1A202C"/>
+                </a:solidFill>
+                <a:latin typeface="NanumGothic"/>
+                <a:ea typeface="NanumGothic"/>
+              </a:rPr>
+              <a:t>① 감별·검사: '밤/하지 증상'이 동맥성 허혈(ABI·도플러)·CRPS·신경병증인지 확인. 특발 경련·RLS·정맥류 배제.</a:t>
+            </a:r>
+          </a:p>
+          <a:p>
+            <a:pPr algn="l">
+              <a:lnSpc>
+                <a:spcPct val="108000"/>
+              </a:lnSpc>
+              <a:spcAft>
+                <a:spcPts val="800"/>
+              </a:spcAft>
+            </a:pPr>
+            <a:r>
+              <a:rPr sz="979" b="1" i="0">
+                <a:solidFill>
+                  <a:srgbClr val="2C898A"/>
+                </a:solidFill>
+                <a:latin typeface="NanumGothic"/>
+                <a:ea typeface="NanumGothic"/>
+              </a:rPr>
+              <a:t>●  </a:t>
+            </a:r>
+            <a:r>
+              <a:rPr sz="1400" b="0" i="0">
+                <a:solidFill>
+                  <a:srgbClr val="1A202C"/>
+                </a:solidFill>
+                <a:latin typeface="NanumGothic"/>
+                <a:ea typeface="NanumGothic"/>
+              </a:rPr>
+              <a:t>② 방향 설정: 교감매개통·허혈로 판단되면 교감신경 축(L2–L3)을 겨냥.</a:t>
+            </a:r>
+          </a:p>
+          <a:p>
+            <a:pPr algn="l">
+              <a:lnSpc>
+                <a:spcPct val="108000"/>
+              </a:lnSpc>
+              <a:spcAft>
+                <a:spcPts val="800"/>
+              </a:spcAft>
+            </a:pPr>
+            <a:r>
+              <a:rPr sz="979" b="1" i="0">
+                <a:solidFill>
+                  <a:srgbClr val="2C898A"/>
+                </a:solidFill>
+                <a:latin typeface="NanumGothic"/>
+                <a:ea typeface="NanumGothic"/>
+              </a:rPr>
+              <a:t>●  </a:t>
+            </a:r>
+            <a:r>
+              <a:rPr sz="1400" b="1" i="0">
+                <a:solidFill>
+                  <a:srgbClr val="2E7D32"/>
+                </a:solidFill>
+                <a:latin typeface="NanumGothic"/>
+                <a:ea typeface="NanumGothic"/>
+              </a:rPr>
+              <a:t>③ 진단적 차단: 투시 유도 국소마취제 LSB → 피부온도 ≥2°C 상승·통증 반응 확인.</a:t>
+            </a:r>
+          </a:p>
+          <a:p>
+            <a:pPr algn="l">
+              <a:lnSpc>
+                <a:spcPct val="108000"/>
+              </a:lnSpc>
+              <a:spcAft>
+                <a:spcPts val="800"/>
+              </a:spcAft>
+            </a:pPr>
+            <a:r>
+              <a:rPr sz="979" b="1" i="0">
+                <a:solidFill>
+                  <a:srgbClr val="2C898A"/>
+                </a:solidFill>
+                <a:latin typeface="NanumGothic"/>
+                <a:ea typeface="NanumGothic"/>
+              </a:rPr>
+              <a:t>●  </a:t>
+            </a:r>
+            <a:r>
+              <a:rPr sz="1400" b="1" i="0">
+                <a:solidFill>
+                  <a:srgbClr val="2E7D32"/>
+                </a:solidFill>
+                <a:latin typeface="NanumGothic"/>
+                <a:ea typeface="NanumGothic"/>
+              </a:rPr>
+              <a:t>④ 반응 양호 시: 치료적 반복 차단, 또는 신경파괴(무수알코올/phenol)·RFA로 장기 완화.</a:t>
+            </a:r>
+          </a:p>
+          <a:p>
+            <a:pPr algn="l">
+              <a:lnSpc>
+                <a:spcPct val="108000"/>
+              </a:lnSpc>
+              <a:spcAft>
+                <a:spcPts val="800"/>
+              </a:spcAft>
+            </a:pPr>
+            <a:r>
+              <a:rPr sz="979" b="1" i="0">
+                <a:solidFill>
+                  <a:srgbClr val="2C898A"/>
+                </a:solidFill>
+                <a:latin typeface="NanumGothic"/>
+                <a:ea typeface="NanumGothic"/>
+              </a:rPr>
+              <a:t>●  </a:t>
+            </a:r>
+            <a:r>
+              <a:rPr sz="1400" b="0" i="0">
+                <a:solidFill>
+                  <a:srgbClr val="1A202C"/>
+                </a:solidFill>
+                <a:latin typeface="NanumGothic"/>
+                <a:ea typeface="NanumGothic"/>
+              </a:rPr>
+              <a:t>⑤ 대상별: CRPS는 조기(≤12개월) 유리 · 난치성 당뇨병성 신경병증은 지속 LSB+신경파괴(RCT).</a:t>
+            </a:r>
+          </a:p>
+          <a:p>
+            <a:pPr algn="l">
+              <a:lnSpc>
+                <a:spcPct val="108000"/>
+              </a:lnSpc>
+              <a:spcAft>
+                <a:spcPts val="800"/>
+              </a:spcAft>
+            </a:pPr>
+            <a:r>
+              <a:rPr sz="1400" b="1" i="0">
                 <a:solidFill>
                   <a:srgbClr val="5A6B7B"/>
                 </a:solidFill>
                 <a:latin typeface="NanumGothic"/>
                 <a:ea typeface="NanumGothic"/>
               </a:rPr>
-              <a:t>근거: PubMed/저널 목록 대조 — 조작 인용 없음</a:t>
-            </a:r>
-          </a:p>
-        </p:txBody>
-      </p:sp>
-      <p:sp>
-        <p:nvSpPr>
-          <p:cNvPr id="11" name="TextBox 10"/>
+              <a:t/>
+            </a:r>
+            <a:r>
+              <a:rPr sz="1400" b="1" i="0">
+                <a:solidFill>
+                  <a:srgbClr val="1F6E70"/>
+                </a:solidFill>
+                <a:latin typeface="NanumGothic"/>
+                <a:ea typeface="NanumGothic"/>
+              </a:rPr>
+              <a:t>⑥ 주의: 특발성 NLC·정맥질환은 적응 아님 · 합병증(생식대퇴신경통 5–10% 등) 사전 고지.</a:t>
+            </a:r>
+          </a:p>
+        </p:txBody>
+      </p:sp>
+      <p:sp>
+        <p:nvSpPr>
+          <p:cNvPr id="9" name="TextBox 8"/>
           <p:cNvSpPr txBox="1"/>
           <p:nvPr/>
         </p:nvSpPr>
         <p:spPr>
           <a:xfrm>
-            <a:off x="11064240" y="6455664"/>
-            <a:ext cx="822960" cy="292608"/>
+            <a:off x="731520" y="6455664"/>
+            <a:ext cx="9875520" cy="292608"/>
           </a:xfrm>
           <a:prstGeom prst="rect">
             <a:avLst/>
@@ -8633,6 +9465,49 @@
           </a:bodyPr>
           <a:lstStyle/>
           <a:p>
+            <a:pPr algn="l">
+              <a:lnSpc>
+                <a:spcPct val="108000"/>
+              </a:lnSpc>
+              <a:spcAft>
+                <a:spcPts val="400"/>
+              </a:spcAft>
+            </a:pPr>
+            <a:r>
+              <a:rPr sz="900" b="0" i="0">
+                <a:solidFill>
+                  <a:srgbClr val="5A6B7B"/>
+                </a:solidFill>
+                <a:latin typeface="NanumGothic"/>
+                <a:ea typeface="NanumGothic"/>
+              </a:rPr>
+              <a:t>근거: 교육용 제안 · 개별 적용은 임상 판단 · 신경파괴는 진단차단 양성 시에만</a:t>
+            </a:r>
+          </a:p>
+        </p:txBody>
+      </p:sp>
+      <p:sp>
+        <p:nvSpPr>
+          <p:cNvPr id="10" name="TextBox 9"/>
+          <p:cNvSpPr txBox="1"/>
+          <p:nvPr/>
+        </p:nvSpPr>
+        <p:spPr>
+          <a:xfrm>
+            <a:off x="11064240" y="6455664"/>
+            <a:ext cx="822960" cy="292608"/>
+          </a:xfrm>
+          <a:prstGeom prst="rect">
+            <a:avLst/>
+          </a:prstGeom>
+          <a:noFill/>
+        </p:spPr>
+        <p:txBody>
+          <a:bodyPr wrap="square" anchor="ctr" lIns="0" rIns="0" tIns="0" bIns="0">
+            <a:spAutoFit/>
+          </a:bodyPr>
+          <a:lstStyle/>
+          <a:p>
             <a:pPr algn="r">
               <a:lnSpc>
                 <a:spcPct val="108000"/>
@@ -8649,7 +9524,7 @@
                 <a:latin typeface="NanumGothic"/>
                 <a:ea typeface="NanumGothic"/>
               </a:rPr>
-              <a:t>17</a:t>
+              <a:t>19</a:t>
             </a:r>
           </a:p>
         </p:txBody>
@@ -9617,6 +10492,1501 @@
 </p:sld>
 </file>
 
+<file path=ppt/slides/slide20.xml><?xml version="1.0" encoding="utf-8"?>
+<p:sld xmlns:a="http://schemas.openxmlformats.org/drawingml/2006/main" xmlns:p="http://schemas.openxmlformats.org/presentationml/2006/main" xmlns:r="http://schemas.openxmlformats.org/officeDocument/2006/relationships">
+  <p:cSld>
+    <p:spTree>
+      <p:nvGrpSpPr>
+        <p:cNvPr id="1" name=""/>
+        <p:cNvGrpSpPr/>
+        <p:nvPr/>
+      </p:nvGrpSpPr>
+      <p:grpSpPr/>
+      <p:sp>
+        <p:nvSpPr>
+          <p:cNvPr id="2" name="Rectangle 1"/>
+          <p:cNvSpPr/>
+          <p:nvPr/>
+        </p:nvSpPr>
+        <p:spPr>
+          <a:xfrm>
+            <a:off x="0" y="0"/>
+            <a:ext cx="12191695" cy="6858000"/>
+          </a:xfrm>
+          <a:prstGeom prst="rect">
+            <a:avLst/>
+          </a:prstGeom>
+          <a:solidFill>
+            <a:srgbClr val="1B355E"/>
+          </a:solidFill>
+          <a:ln>
+            <a:noFill/>
+          </a:ln>
+          <a:effectLst/>
+        </p:spPr>
+        <p:style>
+          <a:lnRef idx="1">
+            <a:schemeClr val="accent1"/>
+          </a:lnRef>
+          <a:fillRef idx="3">
+            <a:schemeClr val="accent1"/>
+          </a:fillRef>
+          <a:effectRef idx="2">
+            <a:schemeClr val="accent1"/>
+          </a:effectRef>
+          <a:fontRef idx="minor">
+            <a:schemeClr val="lt1"/>
+          </a:fontRef>
+        </p:style>
+        <p:txBody>
+          <a:bodyPr rtlCol="0" anchor="ctr"/>
+          <a:lstStyle/>
+          <a:p>
+            <a:pPr algn="ctr"/>
+          </a:p>
+        </p:txBody>
+      </p:sp>
+      <p:sp>
+        <p:nvSpPr>
+          <p:cNvPr id="3" name="Rectangle 2"/>
+          <p:cNvSpPr/>
+          <p:nvPr/>
+        </p:nvSpPr>
+        <p:spPr>
+          <a:xfrm>
+            <a:off x="0" y="0"/>
+            <a:ext cx="201168" cy="6858000"/>
+          </a:xfrm>
+          <a:prstGeom prst="rect">
+            <a:avLst/>
+          </a:prstGeom>
+          <a:solidFill>
+            <a:srgbClr val="2C898A"/>
+          </a:solidFill>
+          <a:ln>
+            <a:noFill/>
+          </a:ln>
+          <a:effectLst/>
+        </p:spPr>
+        <p:style>
+          <a:lnRef idx="1">
+            <a:schemeClr val="accent1"/>
+          </a:lnRef>
+          <a:fillRef idx="3">
+            <a:schemeClr val="accent1"/>
+          </a:fillRef>
+          <a:effectRef idx="2">
+            <a:schemeClr val="accent1"/>
+          </a:effectRef>
+          <a:fontRef idx="minor">
+            <a:schemeClr val="lt1"/>
+          </a:fontRef>
+        </p:style>
+        <p:txBody>
+          <a:bodyPr rtlCol="0" anchor="ctr"/>
+          <a:lstStyle/>
+          <a:p>
+            <a:pPr algn="ctr"/>
+          </a:p>
+        </p:txBody>
+      </p:sp>
+      <p:sp>
+        <p:nvSpPr>
+          <p:cNvPr id="4" name="TextBox 3"/>
+          <p:cNvSpPr txBox="1"/>
+          <p:nvPr/>
+        </p:nvSpPr>
+        <p:spPr>
+          <a:xfrm>
+            <a:off x="822960" y="640080"/>
+            <a:ext cx="10515600" cy="457200"/>
+          </a:xfrm>
+          <a:prstGeom prst="rect">
+            <a:avLst/>
+          </a:prstGeom>
+          <a:noFill/>
+        </p:spPr>
+        <p:txBody>
+          <a:bodyPr wrap="square" anchor="t" lIns="0" rIns="0" tIns="0" bIns="0">
+            <a:spAutoFit/>
+          </a:bodyPr>
+          <a:lstStyle/>
+          <a:p>
+            <a:pPr algn="l">
+              <a:lnSpc>
+                <a:spcPct val="108000"/>
+              </a:lnSpc>
+              <a:spcAft>
+                <a:spcPts val="400"/>
+              </a:spcAft>
+            </a:pPr>
+            <a:r>
+              <a:rPr sz="1300" b="1" i="0">
+                <a:solidFill>
+                  <a:srgbClr val="9FE0D8"/>
+                </a:solidFill>
+                <a:latin typeface="NanumGothic"/>
+                <a:ea typeface="NanumGothic"/>
+              </a:rPr>
+              <a:t>핵심 메시지 — LSB</a:t>
+            </a:r>
+          </a:p>
+        </p:txBody>
+      </p:sp>
+      <p:sp>
+        <p:nvSpPr>
+          <p:cNvPr id="5" name="TextBox 4"/>
+          <p:cNvSpPr txBox="1"/>
+          <p:nvPr/>
+        </p:nvSpPr>
+        <p:spPr>
+          <a:xfrm>
+            <a:off x="822960" y="1097280"/>
+            <a:ext cx="10515600" cy="914400"/>
+          </a:xfrm>
+          <a:prstGeom prst="rect">
+            <a:avLst/>
+          </a:prstGeom>
+          <a:noFill/>
+        </p:spPr>
+        <p:txBody>
+          <a:bodyPr wrap="square" anchor="t" lIns="0" rIns="0" tIns="0" bIns="0">
+            <a:spAutoFit/>
+          </a:bodyPr>
+          <a:lstStyle/>
+          <a:p>
+            <a:pPr algn="l">
+              <a:lnSpc>
+                <a:spcPct val="110000"/>
+              </a:lnSpc>
+              <a:spcAft>
+                <a:spcPts val="400"/>
+              </a:spcAft>
+            </a:pPr>
+            <a:r>
+              <a:rPr sz="2200" b="1" i="0">
+                <a:solidFill>
+                  <a:srgbClr val="FFFFFF"/>
+                </a:solidFill>
+                <a:latin typeface="NanumGothic"/>
+                <a:ea typeface="NanumGothic"/>
+              </a:rPr>
+              <a:t>표준은 투시 유도 방척추 접근, 성공은 온도 ≥2°C</a:t>
+            </a:r>
+          </a:p>
+        </p:txBody>
+      </p:sp>
+      <p:sp>
+        <p:nvSpPr>
+          <p:cNvPr id="6" name="Rectangle 5"/>
+          <p:cNvSpPr/>
+          <p:nvPr/>
+        </p:nvSpPr>
+        <p:spPr>
+          <a:xfrm>
+            <a:off x="822960" y="2322576"/>
+            <a:ext cx="146304" cy="445385"/>
+          </a:xfrm>
+          <a:prstGeom prst="rect">
+            <a:avLst/>
+          </a:prstGeom>
+          <a:solidFill>
+            <a:srgbClr val="2C898A"/>
+          </a:solidFill>
+          <a:ln>
+            <a:noFill/>
+          </a:ln>
+          <a:effectLst/>
+        </p:spPr>
+        <p:style>
+          <a:lnRef idx="1">
+            <a:schemeClr val="accent1"/>
+          </a:lnRef>
+          <a:fillRef idx="3">
+            <a:schemeClr val="accent1"/>
+          </a:fillRef>
+          <a:effectRef idx="2">
+            <a:schemeClr val="accent1"/>
+          </a:effectRef>
+          <a:fontRef idx="minor">
+            <a:schemeClr val="lt1"/>
+          </a:fontRef>
+        </p:style>
+        <p:txBody>
+          <a:bodyPr rtlCol="0" anchor="ctr"/>
+          <a:lstStyle/>
+          <a:p>
+            <a:pPr algn="ctr"/>
+          </a:p>
+        </p:txBody>
+      </p:sp>
+      <p:sp>
+        <p:nvSpPr>
+          <p:cNvPr id="7" name="TextBox 6"/>
+          <p:cNvSpPr txBox="1"/>
+          <p:nvPr/>
+        </p:nvSpPr>
+        <p:spPr>
+          <a:xfrm>
+            <a:off x="1143000" y="2286000"/>
+            <a:ext cx="2926080" cy="674827"/>
+          </a:xfrm>
+          <a:prstGeom prst="rect">
+            <a:avLst/>
+          </a:prstGeom>
+          <a:noFill/>
+        </p:spPr>
+        <p:txBody>
+          <a:bodyPr wrap="square" anchor="ctr" lIns="0" rIns="0" tIns="0" bIns="0">
+            <a:spAutoFit/>
+          </a:bodyPr>
+          <a:lstStyle/>
+          <a:p>
+            <a:pPr algn="l">
+              <a:lnSpc>
+                <a:spcPct val="108000"/>
+              </a:lnSpc>
+              <a:spcAft>
+                <a:spcPts val="400"/>
+              </a:spcAft>
+            </a:pPr>
+            <a:r>
+              <a:rPr sz="1400" b="1" i="0">
+                <a:solidFill>
+                  <a:srgbClr val="9FE0D8"/>
+                </a:solidFill>
+                <a:latin typeface="NanumGothic"/>
+                <a:ea typeface="NanumGothic"/>
+              </a:rPr>
+              <a:t>방법</a:t>
+            </a:r>
+          </a:p>
+        </p:txBody>
+      </p:sp>
+      <p:sp>
+        <p:nvSpPr>
+          <p:cNvPr id="8" name="TextBox 7"/>
+          <p:cNvSpPr txBox="1"/>
+          <p:nvPr/>
+        </p:nvSpPr>
+        <p:spPr>
+          <a:xfrm>
+            <a:off x="4114800" y="2286000"/>
+            <a:ext cx="7406640" cy="674827"/>
+          </a:xfrm>
+          <a:prstGeom prst="rect">
+            <a:avLst/>
+          </a:prstGeom>
+          <a:noFill/>
+        </p:spPr>
+        <p:txBody>
+          <a:bodyPr wrap="square" anchor="ctr" lIns="0" rIns="0" tIns="0" bIns="0">
+            <a:spAutoFit/>
+          </a:bodyPr>
+          <a:lstStyle/>
+          <a:p>
+            <a:pPr algn="l">
+              <a:lnSpc>
+                <a:spcPct val="105000"/>
+              </a:lnSpc>
+              <a:spcAft>
+                <a:spcPts val="400"/>
+              </a:spcAft>
+            </a:pPr>
+            <a:r>
+              <a:rPr sz="1250" b="0" i="0">
+                <a:solidFill>
+                  <a:srgbClr val="FFFFFF"/>
+                </a:solidFill>
+                <a:latin typeface="NanumGothic"/>
+                <a:ea typeface="NanumGothic"/>
+              </a:rPr>
+              <a:t>L2–L3 방척추 접근·투시, 정중선 7 cm 외측, 조영제 두미측 확산, 성공지표 온도 ≥2°C.</a:t>
+            </a:r>
+          </a:p>
+        </p:txBody>
+      </p:sp>
+      <p:sp>
+        <p:nvSpPr>
+          <p:cNvPr id="9" name="Rectangle 8"/>
+          <p:cNvSpPr/>
+          <p:nvPr/>
+        </p:nvSpPr>
+        <p:spPr>
+          <a:xfrm>
+            <a:off x="822960" y="3072384"/>
+            <a:ext cx="146304" cy="445385"/>
+          </a:xfrm>
+          <a:prstGeom prst="rect">
+            <a:avLst/>
+          </a:prstGeom>
+          <a:solidFill>
+            <a:srgbClr val="2C898A"/>
+          </a:solidFill>
+          <a:ln>
+            <a:noFill/>
+          </a:ln>
+          <a:effectLst/>
+        </p:spPr>
+        <p:style>
+          <a:lnRef idx="1">
+            <a:schemeClr val="accent1"/>
+          </a:lnRef>
+          <a:fillRef idx="3">
+            <a:schemeClr val="accent1"/>
+          </a:fillRef>
+          <a:effectRef idx="2">
+            <a:schemeClr val="accent1"/>
+          </a:effectRef>
+          <a:fontRef idx="minor">
+            <a:schemeClr val="lt1"/>
+          </a:fontRef>
+        </p:style>
+        <p:txBody>
+          <a:bodyPr rtlCol="0" anchor="ctr"/>
+          <a:lstStyle/>
+          <a:p>
+            <a:pPr algn="ctr"/>
+          </a:p>
+        </p:txBody>
+      </p:sp>
+      <p:sp>
+        <p:nvSpPr>
+          <p:cNvPr id="10" name="TextBox 9"/>
+          <p:cNvSpPr txBox="1"/>
+          <p:nvPr/>
+        </p:nvSpPr>
+        <p:spPr>
+          <a:xfrm>
+            <a:off x="1143000" y="3035808"/>
+            <a:ext cx="2926080" cy="674827"/>
+          </a:xfrm>
+          <a:prstGeom prst="rect">
+            <a:avLst/>
+          </a:prstGeom>
+          <a:noFill/>
+        </p:spPr>
+        <p:txBody>
+          <a:bodyPr wrap="square" anchor="ctr" lIns="0" rIns="0" tIns="0" bIns="0">
+            <a:spAutoFit/>
+          </a:bodyPr>
+          <a:lstStyle/>
+          <a:p>
+            <a:pPr algn="l">
+              <a:lnSpc>
+                <a:spcPct val="108000"/>
+              </a:lnSpc>
+              <a:spcAft>
+                <a:spcPts val="400"/>
+              </a:spcAft>
+            </a:pPr>
+            <a:r>
+              <a:rPr sz="1400" b="1" i="0">
+                <a:solidFill>
+                  <a:srgbClr val="9FE0D8"/>
+                </a:solidFill>
+                <a:latin typeface="NanumGothic"/>
+                <a:ea typeface="NanumGothic"/>
+              </a:rPr>
+              <a:t>약제</a:t>
+            </a:r>
+          </a:p>
+        </p:txBody>
+      </p:sp>
+      <p:sp>
+        <p:nvSpPr>
+          <p:cNvPr id="11" name="TextBox 10"/>
+          <p:cNvSpPr txBox="1"/>
+          <p:nvPr/>
+        </p:nvSpPr>
+        <p:spPr>
+          <a:xfrm>
+            <a:off x="4114800" y="3035808"/>
+            <a:ext cx="7406640" cy="674827"/>
+          </a:xfrm>
+          <a:prstGeom prst="rect">
+            <a:avLst/>
+          </a:prstGeom>
+          <a:noFill/>
+        </p:spPr>
+        <p:txBody>
+          <a:bodyPr wrap="square" anchor="ctr" lIns="0" rIns="0" tIns="0" bIns="0">
+            <a:spAutoFit/>
+          </a:bodyPr>
+          <a:lstStyle/>
+          <a:p>
+            <a:pPr algn="l">
+              <a:lnSpc>
+                <a:spcPct val="105000"/>
+              </a:lnSpc>
+              <a:spcAft>
+                <a:spcPts val="400"/>
+              </a:spcAft>
+            </a:pPr>
+            <a:r>
+              <a:rPr sz="1250" b="0" i="0">
+                <a:solidFill>
+                  <a:srgbClr val="FFFFFF"/>
+                </a:solidFill>
+                <a:latin typeface="NanumGothic"/>
+                <a:ea typeface="NanumGothic"/>
+              </a:rPr>
+              <a:t>진단/치료는 국소마취제, 신경파괴는 무수알코올/phenol·RFA — 진단차단 양성 시에만.</a:t>
+            </a:r>
+          </a:p>
+        </p:txBody>
+      </p:sp>
+      <p:sp>
+        <p:nvSpPr>
+          <p:cNvPr id="12" name="Rectangle 11"/>
+          <p:cNvSpPr/>
+          <p:nvPr/>
+        </p:nvSpPr>
+        <p:spPr>
+          <a:xfrm>
+            <a:off x="822960" y="3822191"/>
+            <a:ext cx="146304" cy="445385"/>
+          </a:xfrm>
+          <a:prstGeom prst="rect">
+            <a:avLst/>
+          </a:prstGeom>
+          <a:solidFill>
+            <a:srgbClr val="2C898A"/>
+          </a:solidFill>
+          <a:ln>
+            <a:noFill/>
+          </a:ln>
+          <a:effectLst/>
+        </p:spPr>
+        <p:style>
+          <a:lnRef idx="1">
+            <a:schemeClr val="accent1"/>
+          </a:lnRef>
+          <a:fillRef idx="3">
+            <a:schemeClr val="accent1"/>
+          </a:fillRef>
+          <a:effectRef idx="2">
+            <a:schemeClr val="accent1"/>
+          </a:effectRef>
+          <a:fontRef idx="minor">
+            <a:schemeClr val="lt1"/>
+          </a:fontRef>
+        </p:style>
+        <p:txBody>
+          <a:bodyPr rtlCol="0" anchor="ctr"/>
+          <a:lstStyle/>
+          <a:p>
+            <a:pPr algn="ctr"/>
+          </a:p>
+        </p:txBody>
+      </p:sp>
+      <p:sp>
+        <p:nvSpPr>
+          <p:cNvPr id="13" name="TextBox 12"/>
+          <p:cNvSpPr txBox="1"/>
+          <p:nvPr/>
+        </p:nvSpPr>
+        <p:spPr>
+          <a:xfrm>
+            <a:off x="1143000" y="3785615"/>
+            <a:ext cx="2926080" cy="674827"/>
+          </a:xfrm>
+          <a:prstGeom prst="rect">
+            <a:avLst/>
+          </a:prstGeom>
+          <a:noFill/>
+        </p:spPr>
+        <p:txBody>
+          <a:bodyPr wrap="square" anchor="ctr" lIns="0" rIns="0" tIns="0" bIns="0">
+            <a:spAutoFit/>
+          </a:bodyPr>
+          <a:lstStyle/>
+          <a:p>
+            <a:pPr algn="l">
+              <a:lnSpc>
+                <a:spcPct val="108000"/>
+              </a:lnSpc>
+              <a:spcAft>
+                <a:spcPts val="400"/>
+              </a:spcAft>
+            </a:pPr>
+            <a:r>
+              <a:rPr sz="1400" b="1" i="0">
+                <a:solidFill>
+                  <a:srgbClr val="9FE0D8"/>
+                </a:solidFill>
+                <a:latin typeface="NanumGothic"/>
+                <a:ea typeface="NanumGothic"/>
+              </a:rPr>
+              <a:t>적응증</a:t>
+            </a:r>
+          </a:p>
+        </p:txBody>
+      </p:sp>
+      <p:sp>
+        <p:nvSpPr>
+          <p:cNvPr id="14" name="TextBox 13"/>
+          <p:cNvSpPr txBox="1"/>
+          <p:nvPr/>
+        </p:nvSpPr>
+        <p:spPr>
+          <a:xfrm>
+            <a:off x="4114800" y="3785615"/>
+            <a:ext cx="7406640" cy="674827"/>
+          </a:xfrm>
+          <a:prstGeom prst="rect">
+            <a:avLst/>
+          </a:prstGeom>
+          <a:noFill/>
+        </p:spPr>
+        <p:txBody>
+          <a:bodyPr wrap="square" anchor="ctr" lIns="0" rIns="0" tIns="0" bIns="0">
+            <a:spAutoFit/>
+          </a:bodyPr>
+          <a:lstStyle/>
+          <a:p>
+            <a:pPr algn="l">
+              <a:lnSpc>
+                <a:spcPct val="105000"/>
+              </a:lnSpc>
+              <a:spcAft>
+                <a:spcPts val="400"/>
+              </a:spcAft>
+            </a:pPr>
+            <a:r>
+              <a:rPr sz="1250" b="0" i="0">
+                <a:solidFill>
+                  <a:srgbClr val="FFFFFF"/>
+                </a:solidFill>
+                <a:latin typeface="NanumGothic"/>
+                <a:ea typeface="NanumGothic"/>
+              </a:rPr>
+              <a:t>조기 CRPS·PAD/CLI 안정통·신경병증·다한증 등. 특발성 NLC·정맥질환(정맥류)은 적응 아님.</a:t>
+            </a:r>
+          </a:p>
+        </p:txBody>
+      </p:sp>
+      <p:sp>
+        <p:nvSpPr>
+          <p:cNvPr id="15" name="Rectangle 14"/>
+          <p:cNvSpPr/>
+          <p:nvPr/>
+        </p:nvSpPr>
+        <p:spPr>
+          <a:xfrm>
+            <a:off x="822960" y="4572000"/>
+            <a:ext cx="146304" cy="445385"/>
+          </a:xfrm>
+          <a:prstGeom prst="rect">
+            <a:avLst/>
+          </a:prstGeom>
+          <a:solidFill>
+            <a:srgbClr val="2C898A"/>
+          </a:solidFill>
+          <a:ln>
+            <a:noFill/>
+          </a:ln>
+          <a:effectLst/>
+        </p:spPr>
+        <p:style>
+          <a:lnRef idx="1">
+            <a:schemeClr val="accent1"/>
+          </a:lnRef>
+          <a:fillRef idx="3">
+            <a:schemeClr val="accent1"/>
+          </a:fillRef>
+          <a:effectRef idx="2">
+            <a:schemeClr val="accent1"/>
+          </a:effectRef>
+          <a:fontRef idx="minor">
+            <a:schemeClr val="lt1"/>
+          </a:fontRef>
+        </p:style>
+        <p:txBody>
+          <a:bodyPr rtlCol="0" anchor="ctr"/>
+          <a:lstStyle/>
+          <a:p>
+            <a:pPr algn="ctr"/>
+          </a:p>
+        </p:txBody>
+      </p:sp>
+      <p:sp>
+        <p:nvSpPr>
+          <p:cNvPr id="16" name="TextBox 15"/>
+          <p:cNvSpPr txBox="1"/>
+          <p:nvPr/>
+        </p:nvSpPr>
+        <p:spPr>
+          <a:xfrm>
+            <a:off x="1143000" y="4535424"/>
+            <a:ext cx="2926080" cy="674827"/>
+          </a:xfrm>
+          <a:prstGeom prst="rect">
+            <a:avLst/>
+          </a:prstGeom>
+          <a:noFill/>
+        </p:spPr>
+        <p:txBody>
+          <a:bodyPr wrap="square" anchor="ctr" lIns="0" rIns="0" tIns="0" bIns="0">
+            <a:spAutoFit/>
+          </a:bodyPr>
+          <a:lstStyle/>
+          <a:p>
+            <a:pPr algn="l">
+              <a:lnSpc>
+                <a:spcPct val="108000"/>
+              </a:lnSpc>
+              <a:spcAft>
+                <a:spcPts val="400"/>
+              </a:spcAft>
+            </a:pPr>
+            <a:r>
+              <a:rPr sz="1400" b="1" i="0">
+                <a:solidFill>
+                  <a:srgbClr val="9FE0D8"/>
+                </a:solidFill>
+                <a:latin typeface="NanumGothic"/>
+                <a:ea typeface="NanumGothic"/>
+              </a:rPr>
+              <a:t>효과</a:t>
+            </a:r>
+          </a:p>
+        </p:txBody>
+      </p:sp>
+      <p:sp>
+        <p:nvSpPr>
+          <p:cNvPr id="17" name="TextBox 16"/>
+          <p:cNvSpPr txBox="1"/>
+          <p:nvPr/>
+        </p:nvSpPr>
+        <p:spPr>
+          <a:xfrm>
+            <a:off x="4114800" y="4535424"/>
+            <a:ext cx="7406640" cy="674827"/>
+          </a:xfrm>
+          <a:prstGeom prst="rect">
+            <a:avLst/>
+          </a:prstGeom>
+          <a:noFill/>
+        </p:spPr>
+        <p:txBody>
+          <a:bodyPr wrap="square" anchor="ctr" lIns="0" rIns="0" tIns="0" bIns="0">
+            <a:spAutoFit/>
+          </a:bodyPr>
+          <a:lstStyle/>
+          <a:p>
+            <a:pPr algn="l">
+              <a:lnSpc>
+                <a:spcPct val="105000"/>
+              </a:lnSpc>
+              <a:spcAft>
+                <a:spcPts val="400"/>
+              </a:spcAft>
+            </a:pPr>
+            <a:r>
+              <a:rPr sz="1250" b="0" i="0">
+                <a:solidFill>
+                  <a:srgbClr val="FFFFFF"/>
+                </a:solidFill>
+                <a:latin typeface="NanumGothic"/>
+                <a:ea typeface="NanumGothic"/>
+              </a:rPr>
+              <a:t>관류 실측 개선(Dickey), 허혈통 최대 75%↓, CRPS 통증완화(교감피부반응으로 예측).</a:t>
+            </a:r>
+          </a:p>
+        </p:txBody>
+      </p:sp>
+      <p:sp>
+        <p:nvSpPr>
+          <p:cNvPr id="18" name="Rectangle 17"/>
+          <p:cNvSpPr/>
+          <p:nvPr/>
+        </p:nvSpPr>
+        <p:spPr>
+          <a:xfrm>
+            <a:off x="822960" y="5321807"/>
+            <a:ext cx="146304" cy="445385"/>
+          </a:xfrm>
+          <a:prstGeom prst="rect">
+            <a:avLst/>
+          </a:prstGeom>
+          <a:solidFill>
+            <a:srgbClr val="2C898A"/>
+          </a:solidFill>
+          <a:ln>
+            <a:noFill/>
+          </a:ln>
+          <a:effectLst/>
+        </p:spPr>
+        <p:style>
+          <a:lnRef idx="1">
+            <a:schemeClr val="accent1"/>
+          </a:lnRef>
+          <a:fillRef idx="3">
+            <a:schemeClr val="accent1"/>
+          </a:fillRef>
+          <a:effectRef idx="2">
+            <a:schemeClr val="accent1"/>
+          </a:effectRef>
+          <a:fontRef idx="minor">
+            <a:schemeClr val="lt1"/>
+          </a:fontRef>
+        </p:style>
+        <p:txBody>
+          <a:bodyPr rtlCol="0" anchor="ctr"/>
+          <a:lstStyle/>
+          <a:p>
+            <a:pPr algn="ctr"/>
+          </a:p>
+        </p:txBody>
+      </p:sp>
+      <p:sp>
+        <p:nvSpPr>
+          <p:cNvPr id="19" name="TextBox 18"/>
+          <p:cNvSpPr txBox="1"/>
+          <p:nvPr/>
+        </p:nvSpPr>
+        <p:spPr>
+          <a:xfrm>
+            <a:off x="1143000" y="5285231"/>
+            <a:ext cx="2926080" cy="674827"/>
+          </a:xfrm>
+          <a:prstGeom prst="rect">
+            <a:avLst/>
+          </a:prstGeom>
+          <a:noFill/>
+        </p:spPr>
+        <p:txBody>
+          <a:bodyPr wrap="square" anchor="ctr" lIns="0" rIns="0" tIns="0" bIns="0">
+            <a:spAutoFit/>
+          </a:bodyPr>
+          <a:lstStyle/>
+          <a:p>
+            <a:pPr algn="l">
+              <a:lnSpc>
+                <a:spcPct val="108000"/>
+              </a:lnSpc>
+              <a:spcAft>
+                <a:spcPts val="400"/>
+              </a:spcAft>
+            </a:pPr>
+            <a:r>
+              <a:rPr sz="1400" b="1" i="0">
+                <a:solidFill>
+                  <a:srgbClr val="9FE0D8"/>
+                </a:solidFill>
+                <a:latin typeface="NanumGothic"/>
+                <a:ea typeface="NanumGothic"/>
+              </a:rPr>
+              <a:t>근거</a:t>
+            </a:r>
+          </a:p>
+        </p:txBody>
+      </p:sp>
+      <p:sp>
+        <p:nvSpPr>
+          <p:cNvPr id="20" name="TextBox 19"/>
+          <p:cNvSpPr txBox="1"/>
+          <p:nvPr/>
+        </p:nvSpPr>
+        <p:spPr>
+          <a:xfrm>
+            <a:off x="4114800" y="5285231"/>
+            <a:ext cx="7406640" cy="674827"/>
+          </a:xfrm>
+          <a:prstGeom prst="rect">
+            <a:avLst/>
+          </a:prstGeom>
+          <a:noFill/>
+        </p:spPr>
+        <p:txBody>
+          <a:bodyPr wrap="square" anchor="ctr" lIns="0" rIns="0" tIns="0" bIns="0">
+            <a:spAutoFit/>
+          </a:bodyPr>
+          <a:lstStyle/>
+          <a:p>
+            <a:pPr algn="l">
+              <a:lnSpc>
+                <a:spcPct val="105000"/>
+              </a:lnSpc>
+              <a:spcAft>
+                <a:spcPts val="400"/>
+              </a:spcAft>
+            </a:pPr>
+            <a:r>
+              <a:rPr sz="1250" b="0" i="0">
+                <a:solidFill>
+                  <a:srgbClr val="FFFFFF"/>
+                </a:solidFill>
+                <a:latin typeface="NanumGothic"/>
+                <a:ea typeface="NanumGothic"/>
+              </a:rPr>
+              <a:t>대규모 RCT 부족(관찰·증례 중심). 조기 CRPS·비재건성 CLI에서 유용.</a:t>
+            </a:r>
+          </a:p>
+        </p:txBody>
+      </p:sp>
+    </p:spTree>
+  </p:cSld>
+  <p:clrMapOvr>
+    <a:masterClrMapping/>
+  </p:clrMapOvr>
+</p:sld>
+</file>
+
+<file path=ppt/slides/slide21.xml><?xml version="1.0" encoding="utf-8"?>
+<p:sld xmlns:a="http://schemas.openxmlformats.org/drawingml/2006/main" xmlns:p="http://schemas.openxmlformats.org/presentationml/2006/main" xmlns:r="http://schemas.openxmlformats.org/officeDocument/2006/relationships">
+  <p:cSld>
+    <p:spTree>
+      <p:nvGrpSpPr>
+        <p:cNvPr id="1" name=""/>
+        <p:cNvGrpSpPr/>
+        <p:nvPr/>
+      </p:nvGrpSpPr>
+      <p:grpSpPr/>
+      <p:sp>
+        <p:nvSpPr>
+          <p:cNvPr id="2" name="Rectangle 1"/>
+          <p:cNvSpPr/>
+          <p:nvPr/>
+        </p:nvSpPr>
+        <p:spPr>
+          <a:xfrm>
+            <a:off x="502920" y="310896"/>
+            <a:ext cx="109728" cy="457200"/>
+          </a:xfrm>
+          <a:prstGeom prst="rect">
+            <a:avLst/>
+          </a:prstGeom>
+          <a:solidFill>
+            <a:srgbClr val="2C898A"/>
+          </a:solidFill>
+          <a:ln>
+            <a:noFill/>
+          </a:ln>
+          <a:effectLst/>
+        </p:spPr>
+        <p:style>
+          <a:lnRef idx="1">
+            <a:schemeClr val="accent1"/>
+          </a:lnRef>
+          <a:fillRef idx="3">
+            <a:schemeClr val="accent1"/>
+          </a:fillRef>
+          <a:effectRef idx="2">
+            <a:schemeClr val="accent1"/>
+          </a:effectRef>
+          <a:fontRef idx="minor">
+            <a:schemeClr val="lt1"/>
+          </a:fontRef>
+        </p:style>
+        <p:txBody>
+          <a:bodyPr rtlCol="0" anchor="ctr"/>
+          <a:lstStyle/>
+          <a:p>
+            <a:pPr algn="ctr"/>
+          </a:p>
+        </p:txBody>
+      </p:sp>
+      <p:sp>
+        <p:nvSpPr>
+          <p:cNvPr id="3" name="TextBox 2"/>
+          <p:cNvSpPr txBox="1"/>
+          <p:nvPr/>
+        </p:nvSpPr>
+        <p:spPr>
+          <a:xfrm>
+            <a:off x="731520" y="237744"/>
+            <a:ext cx="9509760" cy="685800"/>
+          </a:xfrm>
+          <a:prstGeom prst="rect">
+            <a:avLst/>
+          </a:prstGeom>
+          <a:noFill/>
+        </p:spPr>
+        <p:txBody>
+          <a:bodyPr wrap="square" anchor="ctr" lIns="0" rIns="0" tIns="0" bIns="0">
+            <a:spAutoFit/>
+          </a:bodyPr>
+          <a:lstStyle/>
+          <a:p>
+            <a:pPr algn="l">
+              <a:lnSpc>
+                <a:spcPct val="108000"/>
+              </a:lnSpc>
+              <a:spcAft>
+                <a:spcPts val="400"/>
+              </a:spcAft>
+            </a:pPr>
+            <a:r>
+              <a:rPr sz="2400" b="1" i="0">
+                <a:solidFill>
+                  <a:srgbClr val="1B355E"/>
+                </a:solidFill>
+                <a:latin typeface="NanumGothic"/>
+                <a:ea typeface="NanumGothic"/>
+              </a:rPr>
+              <a:t>참고문헌 — LSB</a:t>
+            </a:r>
+          </a:p>
+        </p:txBody>
+      </p:sp>
+      <p:sp>
+        <p:nvSpPr>
+          <p:cNvPr id="4" name="TextBox 3"/>
+          <p:cNvSpPr txBox="1"/>
+          <p:nvPr/>
+        </p:nvSpPr>
+        <p:spPr>
+          <a:xfrm>
+            <a:off x="749808" y="109728"/>
+            <a:ext cx="7315200" cy="219456"/>
+          </a:xfrm>
+          <a:prstGeom prst="rect">
+            <a:avLst/>
+          </a:prstGeom>
+          <a:noFill/>
+        </p:spPr>
+        <p:txBody>
+          <a:bodyPr wrap="square" anchor="t" lIns="0" rIns="0" tIns="0" bIns="0">
+            <a:spAutoFit/>
+          </a:bodyPr>
+          <a:lstStyle/>
+          <a:p>
+            <a:pPr algn="l">
+              <a:lnSpc>
+                <a:spcPct val="108000"/>
+              </a:lnSpc>
+              <a:spcAft>
+                <a:spcPts val="400"/>
+              </a:spcAft>
+            </a:pPr>
+            <a:r>
+              <a:rPr sz="1100" b="1" i="0">
+                <a:solidFill>
+                  <a:srgbClr val="1F6E70"/>
+                </a:solidFill>
+                <a:latin typeface="NanumGothic"/>
+                <a:ea typeface="NanumGothic"/>
+              </a:rPr>
+              <a:t>참고문헌</a:t>
+            </a:r>
+          </a:p>
+        </p:txBody>
+      </p:sp>
+      <p:sp>
+        <p:nvSpPr>
+          <p:cNvPr id="5" name="Rectangle 4"/>
+          <p:cNvSpPr/>
+          <p:nvPr/>
+        </p:nvSpPr>
+        <p:spPr>
+          <a:xfrm>
+            <a:off x="731520" y="969264"/>
+            <a:ext cx="10881360" cy="17780"/>
+          </a:xfrm>
+          <a:prstGeom prst="rect">
+            <a:avLst/>
+          </a:prstGeom>
+          <a:solidFill>
+            <a:srgbClr val="D5DEE7"/>
+          </a:solidFill>
+          <a:ln>
+            <a:noFill/>
+          </a:ln>
+          <a:effectLst/>
+        </p:spPr>
+        <p:style>
+          <a:lnRef idx="1">
+            <a:schemeClr val="accent1"/>
+          </a:lnRef>
+          <a:fillRef idx="3">
+            <a:schemeClr val="accent1"/>
+          </a:fillRef>
+          <a:effectRef idx="2">
+            <a:schemeClr val="accent1"/>
+          </a:effectRef>
+          <a:fontRef idx="minor">
+            <a:schemeClr val="lt1"/>
+          </a:fontRef>
+        </p:style>
+        <p:txBody>
+          <a:bodyPr rtlCol="0" anchor="ctr"/>
+          <a:lstStyle/>
+          <a:p>
+            <a:pPr algn="ctr"/>
+          </a:p>
+        </p:txBody>
+      </p:sp>
+      <p:sp>
+        <p:nvSpPr>
+          <p:cNvPr id="6" name="Rounded Rectangle 5"/>
+          <p:cNvSpPr/>
+          <p:nvPr/>
+        </p:nvSpPr>
+        <p:spPr>
+          <a:xfrm>
+            <a:off x="10317175" y="365760"/>
+            <a:ext cx="1371600" cy="347472"/>
+          </a:xfrm>
+          <a:prstGeom prst="roundRect">
+            <a:avLst>
+              <a:gd name="adj" fmla="val 8000"/>
+            </a:avLst>
+          </a:prstGeom>
+          <a:solidFill>
+            <a:srgbClr val="2C898A"/>
+          </a:solidFill>
+          <a:ln>
+            <a:noFill/>
+          </a:ln>
+          <a:effectLst/>
+        </p:spPr>
+        <p:style>
+          <a:lnRef idx="1">
+            <a:schemeClr val="accent1"/>
+          </a:lnRef>
+          <a:fillRef idx="3">
+            <a:schemeClr val="accent1"/>
+          </a:fillRef>
+          <a:effectRef idx="2">
+            <a:schemeClr val="accent1"/>
+          </a:effectRef>
+          <a:fontRef idx="minor">
+            <a:schemeClr val="lt1"/>
+          </a:fontRef>
+        </p:style>
+        <p:txBody>
+          <a:bodyPr rtlCol="0" anchor="ctr"/>
+          <a:lstStyle/>
+          <a:p>
+            <a:pPr algn="ctr"/>
+          </a:p>
+        </p:txBody>
+      </p:sp>
+      <p:sp>
+        <p:nvSpPr>
+          <p:cNvPr id="7" name="TextBox 6"/>
+          <p:cNvSpPr txBox="1"/>
+          <p:nvPr/>
+        </p:nvSpPr>
+        <p:spPr>
+          <a:xfrm>
+            <a:off x="10317175" y="365760"/>
+            <a:ext cx="1371600" cy="347472"/>
+          </a:xfrm>
+          <a:prstGeom prst="rect">
+            <a:avLst/>
+          </a:prstGeom>
+          <a:noFill/>
+        </p:spPr>
+        <p:txBody>
+          <a:bodyPr wrap="square" anchor="ctr" lIns="0" rIns="0" tIns="0" bIns="0">
+            <a:spAutoFit/>
+          </a:bodyPr>
+          <a:lstStyle/>
+          <a:p>
+            <a:pPr algn="ctr">
+              <a:lnSpc>
+                <a:spcPct val="108000"/>
+              </a:lnSpc>
+              <a:spcAft>
+                <a:spcPts val="400"/>
+              </a:spcAft>
+            </a:pPr>
+            <a:r>
+              <a:rPr sz="1150" b="1" i="0">
+                <a:solidFill>
+                  <a:srgbClr val="FFFFFF"/>
+                </a:solidFill>
+                <a:latin typeface="NanumGothic"/>
+                <a:ea typeface="NanumGothic"/>
+              </a:rPr>
+              <a:t>References</a:t>
+            </a:r>
+          </a:p>
+        </p:txBody>
+      </p:sp>
+      <p:sp>
+        <p:nvSpPr>
+          <p:cNvPr id="8" name="TextBox 7"/>
+          <p:cNvSpPr txBox="1"/>
+          <p:nvPr/>
+        </p:nvSpPr>
+        <p:spPr>
+          <a:xfrm>
+            <a:off x="731520" y="1371600"/>
+            <a:ext cx="5257800" cy="4846320"/>
+          </a:xfrm>
+          <a:prstGeom prst="rect">
+            <a:avLst/>
+          </a:prstGeom>
+          <a:noFill/>
+        </p:spPr>
+        <p:txBody>
+          <a:bodyPr wrap="square" anchor="t" lIns="0" rIns="0" tIns="0" bIns="0">
+            <a:spAutoFit/>
+          </a:bodyPr>
+          <a:lstStyle/>
+          <a:p>
+            <a:pPr algn="l">
+              <a:lnSpc>
+                <a:spcPct val="105000"/>
+              </a:lnSpc>
+              <a:spcAft>
+                <a:spcPts val="700"/>
+              </a:spcAft>
+            </a:pPr>
+            <a:r>
+              <a:rPr sz="1000" b="0" i="0">
+                <a:solidFill>
+                  <a:srgbClr val="1A202C"/>
+                </a:solidFill>
+                <a:latin typeface="NanumGothic"/>
+                <a:ea typeface="NanumGothic"/>
+              </a:rPr>
+              <a:t>Dua A, Varacallo MA. Lumbar sympathetic block. StatPearls. 2026. NBK431107.</a:t>
+            </a:r>
+          </a:p>
+          <a:p>
+            <a:pPr algn="l">
+              <a:lnSpc>
+                <a:spcPct val="105000"/>
+              </a:lnSpc>
+              <a:spcAft>
+                <a:spcPts val="700"/>
+              </a:spcAft>
+            </a:pPr>
+            <a:r>
+              <a:rPr sz="1000" b="0" i="0">
+                <a:solidFill>
+                  <a:srgbClr val="1A202C"/>
+                </a:solidFill>
+                <a:latin typeface="NanumGothic"/>
+                <a:ea typeface="NanumGothic"/>
+              </a:rPr>
+              <a:t>Lumbar sympatholysis. StatPearls. NBK560514.</a:t>
+            </a:r>
+          </a:p>
+          <a:p>
+            <a:pPr algn="l">
+              <a:lnSpc>
+                <a:spcPct val="105000"/>
+              </a:lnSpc>
+              <a:spcAft>
+                <a:spcPts val="700"/>
+              </a:spcAft>
+            </a:pPr>
+            <a:r>
+              <a:rPr sz="1000" b="0" i="0">
+                <a:solidFill>
+                  <a:srgbClr val="1A202C"/>
+                </a:solidFill>
+                <a:latin typeface="NanumGothic"/>
+                <a:ea typeface="NanumGothic"/>
+              </a:rPr>
+              <a:t>Zhang JH, Deng YP, Geng MJ. Efficacy of the lumbar sympathetic ganglion block in lower limb pain. Ibrain. 2022;8(4):442-52. PMID 37786587.</a:t>
+            </a:r>
+          </a:p>
+          <a:p>
+            <a:pPr algn="l">
+              <a:lnSpc>
+                <a:spcPct val="105000"/>
+              </a:lnSpc>
+              <a:spcAft>
+                <a:spcPts val="700"/>
+              </a:spcAft>
+            </a:pPr>
+            <a:r>
+              <a:rPr sz="1000" b="0" i="0">
+                <a:solidFill>
+                  <a:srgbClr val="1A202C"/>
+                </a:solidFill>
+                <a:latin typeface="NanumGothic"/>
+                <a:ea typeface="NanumGothic"/>
+              </a:rPr>
+              <a:t>Dickey Z, Sharma N. Lumbar sympathetic block leading to increased arterial diameter and blood flow. Cureus. 2024;16(6):e61755. PMID 38975506.</a:t>
+            </a:r>
+          </a:p>
+          <a:p>
+            <a:pPr algn="l">
+              <a:lnSpc>
+                <a:spcPct val="105000"/>
+              </a:lnSpc>
+              <a:spcAft>
+                <a:spcPts val="700"/>
+              </a:spcAft>
+            </a:pPr>
+            <a:r>
+              <a:rPr sz="1000" b="0" i="0">
+                <a:solidFill>
+                  <a:srgbClr val="1A202C"/>
+                </a:solidFill>
+                <a:latin typeface="NanumGothic"/>
+                <a:ea typeface="NanumGothic"/>
+              </a:rPr>
+              <a:t>Barreto Junior EPS, et al. Neurolytic block of the lumbar sympathetic chain in critical lower limb ischemia. Braz J Anesthesiol. 2018;68(1):100-3. PMC9391669.</a:t>
+            </a:r>
+          </a:p>
+          <a:p>
+            <a:pPr algn="l">
+              <a:lnSpc>
+                <a:spcPct val="105000"/>
+              </a:lnSpc>
+              <a:spcAft>
+                <a:spcPts val="700"/>
+              </a:spcAft>
+            </a:pPr>
+            <a:r>
+              <a:rPr sz="1000" b="0" i="0">
+                <a:solidFill>
+                  <a:srgbClr val="1A202C"/>
+                </a:solidFill>
+                <a:latin typeface="NanumGothic"/>
+                <a:ea typeface="NanumGothic"/>
+              </a:rPr>
+              <a:t>Choi EJ, et al. Effect duration of lumbar sympathetic ganglion neurolysis in CRPS. Sci Rep. 2024;14(1):12693. PMID 38830944.</a:t>
+            </a:r>
+          </a:p>
+        </p:txBody>
+      </p:sp>
+      <p:sp>
+        <p:nvSpPr>
+          <p:cNvPr id="9" name="TextBox 8"/>
+          <p:cNvSpPr txBox="1"/>
+          <p:nvPr/>
+        </p:nvSpPr>
+        <p:spPr>
+          <a:xfrm>
+            <a:off x="6217920" y="1371600"/>
+            <a:ext cx="5257800" cy="4846320"/>
+          </a:xfrm>
+          <a:prstGeom prst="rect">
+            <a:avLst/>
+          </a:prstGeom>
+          <a:noFill/>
+        </p:spPr>
+        <p:txBody>
+          <a:bodyPr wrap="square" anchor="t" lIns="0" rIns="0" tIns="0" bIns="0">
+            <a:spAutoFit/>
+          </a:bodyPr>
+          <a:lstStyle/>
+          <a:p>
+            <a:pPr algn="l">
+              <a:lnSpc>
+                <a:spcPct val="105000"/>
+              </a:lnSpc>
+              <a:spcAft>
+                <a:spcPts val="700"/>
+              </a:spcAft>
+            </a:pPr>
+            <a:r>
+              <a:rPr sz="1000" b="0" i="0">
+                <a:solidFill>
+                  <a:srgbClr val="1A202C"/>
+                </a:solidFill>
+                <a:latin typeface="NanumGothic"/>
+                <a:ea typeface="NanumGothic"/>
+              </a:rPr>
+              <a:t>Gungor S, et al. Sympathetic blocks for CRPS: a case series. Medicine (Baltimore). 2018;97(19):e0705. PMID 29742728.</a:t>
+            </a:r>
+          </a:p>
+          <a:p>
+            <a:pPr algn="l">
+              <a:lnSpc>
+                <a:spcPct val="105000"/>
+              </a:lnSpc>
+              <a:spcAft>
+                <a:spcPts val="700"/>
+              </a:spcAft>
+            </a:pPr>
+            <a:r>
+              <a:rPr sz="1000" b="0" i="0">
+                <a:solidFill>
+                  <a:srgbClr val="1A202C"/>
+                </a:solidFill>
+                <a:latin typeface="NanumGothic"/>
+                <a:ea typeface="NanumGothic"/>
+              </a:rPr>
+              <a:t>Effect of lumbar sympathetic blockade on pain, Fontaine classification, collateral perfusion in PAD. Medicina (Kaunas). 2024;60(5):682.</a:t>
+            </a:r>
+          </a:p>
+          <a:p>
+            <a:pPr algn="l">
+              <a:lnSpc>
+                <a:spcPct val="105000"/>
+              </a:lnSpc>
+              <a:spcAft>
+                <a:spcPts val="700"/>
+              </a:spcAft>
+            </a:pPr>
+            <a:r>
+              <a:rPr sz="1000" b="0" i="0">
+                <a:solidFill>
+                  <a:srgbClr val="1A202C"/>
+                </a:solidFill>
+                <a:latin typeface="NanumGothic"/>
+                <a:ea typeface="NanumGothic"/>
+              </a:rPr>
+              <a:t>Prediction of LSB efficacy in CRPS type 1 by sympathetic skin response. Pain Ther. 2023;12(3):809-22. PMC10199976.</a:t>
+            </a:r>
+          </a:p>
+          <a:p>
+            <a:pPr algn="l">
+              <a:lnSpc>
+                <a:spcPct val="105000"/>
+              </a:lnSpc>
+              <a:spcAft>
+                <a:spcPts val="700"/>
+              </a:spcAft>
+            </a:pPr>
+            <a:r>
+              <a:rPr sz="1000" b="0" i="0">
+                <a:solidFill>
+                  <a:srgbClr val="1A202C"/>
+                </a:solidFill>
+                <a:latin typeface="NanumGothic"/>
+                <a:ea typeface="NanumGothic"/>
+              </a:rPr>
+              <a:t>Continuous LSB + sympatholysis for refractory painful diabetic neuropathy — RCT. 2020. PMID 32915421.</a:t>
+            </a:r>
+          </a:p>
+          <a:p>
+            <a:pPr algn="l">
+              <a:lnSpc>
+                <a:spcPct val="105000"/>
+              </a:lnSpc>
+              <a:spcAft>
+                <a:spcPts val="700"/>
+              </a:spcAft>
+            </a:pPr>
+            <a:r>
+              <a:rPr sz="1000" b="0" i="0">
+                <a:solidFill>
+                  <a:srgbClr val="1A202C"/>
+                </a:solidFill>
+                <a:latin typeface="NanumGothic"/>
+                <a:ea typeface="NanumGothic"/>
+              </a:rPr>
+              <a:t>Sympathetic blocks: sustained relief in refractory painful diabetic neuropathy (case). 2012. PMID 22606406.</a:t>
+            </a:r>
+          </a:p>
+          <a:p>
+            <a:pPr algn="l">
+              <a:lnSpc>
+                <a:spcPct val="105000"/>
+              </a:lnSpc>
+              <a:spcAft>
+                <a:spcPts val="700"/>
+              </a:spcAft>
+            </a:pPr>
+            <a:r>
+              <a:rPr sz="1000" b="0" i="0">
+                <a:solidFill>
+                  <a:srgbClr val="1A202C"/>
+                </a:solidFill>
+                <a:latin typeface="NanumGothic"/>
+                <a:ea typeface="NanumGothic"/>
+              </a:rPr>
+              <a:t>Lumbar sympathectomy for ischaemia·vasculitis·diabetic neuropathy·hyperhidrosis — series. 2018. PMID 29516399.</a:t>
+            </a:r>
+          </a:p>
+        </p:txBody>
+      </p:sp>
+      <p:sp>
+        <p:nvSpPr>
+          <p:cNvPr id="10" name="TextBox 9"/>
+          <p:cNvSpPr txBox="1"/>
+          <p:nvPr/>
+        </p:nvSpPr>
+        <p:spPr>
+          <a:xfrm>
+            <a:off x="731520" y="6455664"/>
+            <a:ext cx="9875520" cy="292608"/>
+          </a:xfrm>
+          <a:prstGeom prst="rect">
+            <a:avLst/>
+          </a:prstGeom>
+          <a:noFill/>
+        </p:spPr>
+        <p:txBody>
+          <a:bodyPr wrap="square" anchor="ctr" lIns="0" rIns="0" tIns="0" bIns="0">
+            <a:spAutoFit/>
+          </a:bodyPr>
+          <a:lstStyle/>
+          <a:p>
+            <a:pPr algn="l">
+              <a:lnSpc>
+                <a:spcPct val="108000"/>
+              </a:lnSpc>
+              <a:spcAft>
+                <a:spcPts val="400"/>
+              </a:spcAft>
+            </a:pPr>
+            <a:r>
+              <a:rPr sz="900" b="0" i="0">
+                <a:solidFill>
+                  <a:srgbClr val="5A6B7B"/>
+                </a:solidFill>
+                <a:latin typeface="NanumGothic"/>
+                <a:ea typeface="NanumGothic"/>
+              </a:rPr>
+              <a:t>근거: PubMed/저널 목록 대조 — 조작 인용 없음</a:t>
+            </a:r>
+          </a:p>
+        </p:txBody>
+      </p:sp>
+      <p:sp>
+        <p:nvSpPr>
+          <p:cNvPr id="11" name="TextBox 10"/>
+          <p:cNvSpPr txBox="1"/>
+          <p:nvPr/>
+        </p:nvSpPr>
+        <p:spPr>
+          <a:xfrm>
+            <a:off x="11064240" y="6455664"/>
+            <a:ext cx="822960" cy="292608"/>
+          </a:xfrm>
+          <a:prstGeom prst="rect">
+            <a:avLst/>
+          </a:prstGeom>
+          <a:noFill/>
+        </p:spPr>
+        <p:txBody>
+          <a:bodyPr wrap="square" anchor="ctr" lIns="0" rIns="0" tIns="0" bIns="0">
+            <a:spAutoFit/>
+          </a:bodyPr>
+          <a:lstStyle/>
+          <a:p>
+            <a:pPr algn="r">
+              <a:lnSpc>
+                <a:spcPct val="108000"/>
+              </a:lnSpc>
+              <a:spcAft>
+                <a:spcPts val="400"/>
+              </a:spcAft>
+            </a:pPr>
+            <a:r>
+              <a:rPr sz="1000" b="1" i="0">
+                <a:solidFill>
+                  <a:srgbClr val="5A6B7B"/>
+                </a:solidFill>
+                <a:latin typeface="NanumGothic"/>
+                <a:ea typeface="NanumGothic"/>
+              </a:rPr>
+              <a:t>21</a:t>
+            </a:r>
+          </a:p>
+        </p:txBody>
+      </p:sp>
+    </p:spTree>
+  </p:cSld>
+  <p:clrMapOvr>
+    <a:masterClrMapping/>
+  </p:clrMapOvr>
+</p:sld>
+</file>
+
 <file path=ppt/slides/slide3.xml><?xml version="1.0" encoding="utf-8"?>
 <p:sld xmlns:a="http://schemas.openxmlformats.org/drawingml/2006/main" xmlns:p="http://schemas.openxmlformats.org/presentationml/2006/main" xmlns:r="http://schemas.openxmlformats.org/officeDocument/2006/relationships">
   <p:cSld>
@@ -11950,6 +14320,484 @@
 </file>
 
 <file path=ppt/slides/slide7.xml><?xml version="1.0" encoding="utf-8"?>
+<p:sld xmlns:a="http://schemas.openxmlformats.org/drawingml/2006/main" xmlns:p="http://schemas.openxmlformats.org/presentationml/2006/main" xmlns:r="http://schemas.openxmlformats.org/officeDocument/2006/relationships">
+  <p:cSld>
+    <p:spTree>
+      <p:nvGrpSpPr>
+        <p:cNvPr id="1" name=""/>
+        <p:cNvGrpSpPr/>
+        <p:nvPr/>
+      </p:nvGrpSpPr>
+      <p:grpSpPr/>
+      <p:sp>
+        <p:nvSpPr>
+          <p:cNvPr id="2" name="Rectangle 1"/>
+          <p:cNvSpPr/>
+          <p:nvPr/>
+        </p:nvSpPr>
+        <p:spPr>
+          <a:xfrm>
+            <a:off x="0" y="0"/>
+            <a:ext cx="12191695" cy="6858000"/>
+          </a:xfrm>
+          <a:prstGeom prst="rect">
+            <a:avLst/>
+          </a:prstGeom>
+          <a:solidFill>
+            <a:srgbClr val="FFFFFF"/>
+          </a:solidFill>
+          <a:ln>
+            <a:noFill/>
+          </a:ln>
+          <a:effectLst/>
+        </p:spPr>
+        <p:style>
+          <a:lnRef idx="1">
+            <a:schemeClr val="accent1"/>
+          </a:lnRef>
+          <a:fillRef idx="3">
+            <a:schemeClr val="accent1"/>
+          </a:fillRef>
+          <a:effectRef idx="2">
+            <a:schemeClr val="accent1"/>
+          </a:effectRef>
+          <a:fontRef idx="minor">
+            <a:schemeClr val="lt1"/>
+          </a:fontRef>
+        </p:style>
+        <p:txBody>
+          <a:bodyPr rtlCol="0" anchor="ctr"/>
+          <a:lstStyle/>
+          <a:p>
+            <a:pPr algn="ctr"/>
+          </a:p>
+        </p:txBody>
+      </p:sp>
+      <p:sp>
+        <p:nvSpPr>
+          <p:cNvPr id="3" name="Rectangle 2"/>
+          <p:cNvSpPr/>
+          <p:nvPr/>
+        </p:nvSpPr>
+        <p:spPr>
+          <a:xfrm>
+            <a:off x="502920" y="310896"/>
+            <a:ext cx="109728" cy="457200"/>
+          </a:xfrm>
+          <a:prstGeom prst="rect">
+            <a:avLst/>
+          </a:prstGeom>
+          <a:solidFill>
+            <a:srgbClr val="2C898A"/>
+          </a:solidFill>
+          <a:ln>
+            <a:noFill/>
+          </a:ln>
+          <a:effectLst/>
+        </p:spPr>
+        <p:style>
+          <a:lnRef idx="1">
+            <a:schemeClr val="accent1"/>
+          </a:lnRef>
+          <a:fillRef idx="3">
+            <a:schemeClr val="accent1"/>
+          </a:fillRef>
+          <a:effectRef idx="2">
+            <a:schemeClr val="accent1"/>
+          </a:effectRef>
+          <a:fontRef idx="minor">
+            <a:schemeClr val="lt1"/>
+          </a:fontRef>
+        </p:style>
+        <p:txBody>
+          <a:bodyPr rtlCol="0" anchor="ctr"/>
+          <a:lstStyle/>
+          <a:p>
+            <a:pPr algn="ctr"/>
+          </a:p>
+        </p:txBody>
+      </p:sp>
+      <p:sp>
+        <p:nvSpPr>
+          <p:cNvPr id="4" name="TextBox 3"/>
+          <p:cNvSpPr txBox="1"/>
+          <p:nvPr/>
+        </p:nvSpPr>
+        <p:spPr>
+          <a:xfrm>
+            <a:off x="731520" y="237744"/>
+            <a:ext cx="9509760" cy="685800"/>
+          </a:xfrm>
+          <a:prstGeom prst="rect">
+            <a:avLst/>
+          </a:prstGeom>
+          <a:noFill/>
+        </p:spPr>
+        <p:txBody>
+          <a:bodyPr wrap="square" anchor="ctr" lIns="0" rIns="0" tIns="0" bIns="0">
+            <a:spAutoFit/>
+          </a:bodyPr>
+          <a:lstStyle/>
+          <a:p>
+            <a:pPr algn="l">
+              <a:lnSpc>
+                <a:spcPct val="108000"/>
+              </a:lnSpc>
+              <a:spcAft>
+                <a:spcPts val="400"/>
+              </a:spcAft>
+            </a:pPr>
+            <a:r>
+              <a:rPr sz="2400" b="1" i="0">
+                <a:solidFill>
+                  <a:srgbClr val="1B355E"/>
+                </a:solidFill>
+                <a:latin typeface="NanumGothic"/>
+                <a:ea typeface="NanumGothic"/>
+              </a:rPr>
+              <a:t>조영제 확산 읽기 — 이 패턴이면 멈춰라</a:t>
+            </a:r>
+          </a:p>
+        </p:txBody>
+      </p:sp>
+      <p:sp>
+        <p:nvSpPr>
+          <p:cNvPr id="5" name="TextBox 4"/>
+          <p:cNvSpPr txBox="1"/>
+          <p:nvPr/>
+        </p:nvSpPr>
+        <p:spPr>
+          <a:xfrm>
+            <a:off x="749808" y="109728"/>
+            <a:ext cx="7315200" cy="219456"/>
+          </a:xfrm>
+          <a:prstGeom prst="rect">
+            <a:avLst/>
+          </a:prstGeom>
+          <a:noFill/>
+        </p:spPr>
+        <p:txBody>
+          <a:bodyPr wrap="square" anchor="t" lIns="0" rIns="0" tIns="0" bIns="0">
+            <a:spAutoFit/>
+          </a:bodyPr>
+          <a:lstStyle/>
+          <a:p>
+            <a:pPr algn="l">
+              <a:lnSpc>
+                <a:spcPct val="108000"/>
+              </a:lnSpc>
+              <a:spcAft>
+                <a:spcPts val="400"/>
+              </a:spcAft>
+            </a:pPr>
+            <a:r>
+              <a:rPr sz="1100" b="1" i="0">
+                <a:solidFill>
+                  <a:srgbClr val="1F6E70"/>
+                </a:solidFill>
+                <a:latin typeface="NanumGothic"/>
+                <a:ea typeface="NanumGothic"/>
+              </a:rPr>
+              <a:t>안전 · 핵심기술</a:t>
+            </a:r>
+          </a:p>
+        </p:txBody>
+      </p:sp>
+      <p:sp>
+        <p:nvSpPr>
+          <p:cNvPr id="6" name="Rectangle 5"/>
+          <p:cNvSpPr/>
+          <p:nvPr/>
+        </p:nvSpPr>
+        <p:spPr>
+          <a:xfrm>
+            <a:off x="731520" y="969264"/>
+            <a:ext cx="10881360" cy="17780"/>
+          </a:xfrm>
+          <a:prstGeom prst="rect">
+            <a:avLst/>
+          </a:prstGeom>
+          <a:solidFill>
+            <a:srgbClr val="D5DEE7"/>
+          </a:solidFill>
+          <a:ln>
+            <a:noFill/>
+          </a:ln>
+          <a:effectLst/>
+        </p:spPr>
+        <p:style>
+          <a:lnRef idx="1">
+            <a:schemeClr val="accent1"/>
+          </a:lnRef>
+          <a:fillRef idx="3">
+            <a:schemeClr val="accent1"/>
+          </a:fillRef>
+          <a:effectRef idx="2">
+            <a:schemeClr val="accent1"/>
+          </a:effectRef>
+          <a:fontRef idx="minor">
+            <a:schemeClr val="lt1"/>
+          </a:fontRef>
+        </p:style>
+        <p:txBody>
+          <a:bodyPr rtlCol="0" anchor="ctr"/>
+          <a:lstStyle/>
+          <a:p>
+            <a:pPr algn="ctr"/>
+          </a:p>
+        </p:txBody>
+      </p:sp>
+      <p:sp>
+        <p:nvSpPr>
+          <p:cNvPr id="7" name="Rounded Rectangle 6"/>
+          <p:cNvSpPr/>
+          <p:nvPr/>
+        </p:nvSpPr>
+        <p:spPr>
+          <a:xfrm>
+            <a:off x="10756087" y="365760"/>
+            <a:ext cx="932688" cy="347472"/>
+          </a:xfrm>
+          <a:prstGeom prst="roundRect">
+            <a:avLst>
+              <a:gd name="adj" fmla="val 8000"/>
+            </a:avLst>
+          </a:prstGeom>
+          <a:solidFill>
+            <a:srgbClr val="2C898A"/>
+          </a:solidFill>
+          <a:ln>
+            <a:noFill/>
+          </a:ln>
+          <a:effectLst/>
+        </p:spPr>
+        <p:style>
+          <a:lnRef idx="1">
+            <a:schemeClr val="accent1"/>
+          </a:lnRef>
+          <a:fillRef idx="3">
+            <a:schemeClr val="accent1"/>
+          </a:fillRef>
+          <a:effectRef idx="2">
+            <a:schemeClr val="accent1"/>
+          </a:effectRef>
+          <a:fontRef idx="minor">
+            <a:schemeClr val="lt1"/>
+          </a:fontRef>
+        </p:style>
+        <p:txBody>
+          <a:bodyPr rtlCol="0" anchor="ctr"/>
+          <a:lstStyle/>
+          <a:p>
+            <a:pPr algn="ctr"/>
+          </a:p>
+        </p:txBody>
+      </p:sp>
+      <p:sp>
+        <p:nvSpPr>
+          <p:cNvPr id="8" name="TextBox 7"/>
+          <p:cNvSpPr txBox="1"/>
+          <p:nvPr/>
+        </p:nvSpPr>
+        <p:spPr>
+          <a:xfrm>
+            <a:off x="10756087" y="365760"/>
+            <a:ext cx="932688" cy="347472"/>
+          </a:xfrm>
+          <a:prstGeom prst="rect">
+            <a:avLst/>
+          </a:prstGeom>
+          <a:noFill/>
+        </p:spPr>
+        <p:txBody>
+          <a:bodyPr wrap="square" anchor="ctr" lIns="0" rIns="0" tIns="0" bIns="0">
+            <a:spAutoFit/>
+          </a:bodyPr>
+          <a:lstStyle/>
+          <a:p>
+            <a:pPr algn="ctr">
+              <a:lnSpc>
+                <a:spcPct val="108000"/>
+              </a:lnSpc>
+              <a:spcAft>
+                <a:spcPts val="400"/>
+              </a:spcAft>
+            </a:pPr>
+            <a:r>
+              <a:rPr sz="1150" b="1" i="0">
+                <a:solidFill>
+                  <a:srgbClr val="FFFFFF"/>
+                </a:solidFill>
+                <a:latin typeface="NanumGothic"/>
+                <a:ea typeface="NanumGothic"/>
+              </a:rPr>
+              <a:t>조영제 읽기</a:t>
+            </a:r>
+          </a:p>
+        </p:txBody>
+      </p:sp>
+      <p:pic>
+        <p:nvPicPr>
+          <p:cNvPr id="9" name="Picture 8" descr="lsb_contrast.png"/>
+          <p:cNvPicPr>
+            <a:picLocks noChangeAspect="1"/>
+          </p:cNvPicPr>
+          <p:nvPr/>
+        </p:nvPicPr>
+        <p:blipFill>
+          <a:blip r:embed="rId2"/>
+          <a:stretch>
+            <a:fillRect/>
+          </a:stretch>
+        </p:blipFill>
+        <p:spPr>
+          <a:xfrm>
+            <a:off x="2033578" y="1417320"/>
+            <a:ext cx="8124539" cy="3977639"/>
+          </a:xfrm>
+          <a:prstGeom prst="rect">
+            <a:avLst/>
+          </a:prstGeom>
+        </p:spPr>
+      </p:pic>
+      <p:sp>
+        <p:nvSpPr>
+          <p:cNvPr id="10" name="TextBox 9"/>
+          <p:cNvSpPr txBox="1"/>
+          <p:nvPr/>
+        </p:nvSpPr>
+        <p:spPr>
+          <a:xfrm>
+            <a:off x="640080" y="5852160"/>
+            <a:ext cx="10927080" cy="457200"/>
+          </a:xfrm>
+          <a:prstGeom prst="rect">
+            <a:avLst/>
+          </a:prstGeom>
+          <a:noFill/>
+        </p:spPr>
+        <p:txBody>
+          <a:bodyPr wrap="square" anchor="ctr" lIns="0" rIns="0" tIns="0" bIns="0">
+            <a:spAutoFit/>
+          </a:bodyPr>
+          <a:lstStyle/>
+          <a:p>
+            <a:pPr algn="ctr">
+              <a:lnSpc>
+                <a:spcPct val="108000"/>
+              </a:lnSpc>
+              <a:spcAft>
+                <a:spcPts val="400"/>
+              </a:spcAft>
+            </a:pPr>
+            <a:r>
+              <a:rPr sz="1100" b="1" i="0">
+                <a:solidFill>
+                  <a:srgbClr val="1F6E70"/>
+                </a:solidFill>
+                <a:latin typeface="NanumGothic"/>
+                <a:ea typeface="NanumGothic"/>
+              </a:rPr>
+              <a:t>실시간 조영제가 최고의 안전장치 — 종방향(위·아래) 확산만 진행 · 혈관·경막외·근육내 패턴이면 즉시 재위치</a:t>
+            </a:r>
+          </a:p>
+        </p:txBody>
+      </p:sp>
+      <p:sp>
+        <p:nvSpPr>
+          <p:cNvPr id="11" name="TextBox 10"/>
+          <p:cNvSpPr txBox="1"/>
+          <p:nvPr/>
+        </p:nvSpPr>
+        <p:spPr>
+          <a:xfrm>
+            <a:off x="731520" y="6455664"/>
+            <a:ext cx="9875520" cy="292608"/>
+          </a:xfrm>
+          <a:prstGeom prst="rect">
+            <a:avLst/>
+          </a:prstGeom>
+          <a:noFill/>
+        </p:spPr>
+        <p:txBody>
+          <a:bodyPr wrap="square" anchor="ctr" lIns="0" rIns="0" tIns="0" bIns="0">
+            <a:spAutoFit/>
+          </a:bodyPr>
+          <a:lstStyle/>
+          <a:p>
+            <a:pPr algn="l">
+              <a:lnSpc>
+                <a:spcPct val="108000"/>
+              </a:lnSpc>
+              <a:spcAft>
+                <a:spcPts val="400"/>
+              </a:spcAft>
+            </a:pPr>
+            <a:r>
+              <a:rPr sz="900" b="0" i="0">
+                <a:solidFill>
+                  <a:srgbClr val="5A6B7B"/>
+                </a:solidFill>
+                <a:latin typeface="NanumGothic"/>
+                <a:ea typeface="NanumGothic"/>
+              </a:rPr>
+              <a:t>근거: 조영제 확산 패턴 판독 · StatPearls NBK431107</a:t>
+            </a:r>
+          </a:p>
+        </p:txBody>
+      </p:sp>
+      <p:sp>
+        <p:nvSpPr>
+          <p:cNvPr id="12" name="TextBox 11"/>
+          <p:cNvSpPr txBox="1"/>
+          <p:nvPr/>
+        </p:nvSpPr>
+        <p:spPr>
+          <a:xfrm>
+            <a:off x="11064240" y="6455664"/>
+            <a:ext cx="822960" cy="292608"/>
+          </a:xfrm>
+          <a:prstGeom prst="rect">
+            <a:avLst/>
+          </a:prstGeom>
+          <a:noFill/>
+        </p:spPr>
+        <p:txBody>
+          <a:bodyPr wrap="square" anchor="ctr" lIns="0" rIns="0" tIns="0" bIns="0">
+            <a:spAutoFit/>
+          </a:bodyPr>
+          <a:lstStyle/>
+          <a:p>
+            <a:pPr algn="r">
+              <a:lnSpc>
+                <a:spcPct val="108000"/>
+              </a:lnSpc>
+              <a:spcAft>
+                <a:spcPts val="400"/>
+              </a:spcAft>
+            </a:pPr>
+            <a:r>
+              <a:rPr sz="1000" b="1" i="0">
+                <a:solidFill>
+                  <a:srgbClr val="5A6B7B"/>
+                </a:solidFill>
+                <a:latin typeface="NanumGothic"/>
+                <a:ea typeface="NanumGothic"/>
+              </a:rPr>
+              <a:t>7</a:t>
+            </a:r>
+          </a:p>
+        </p:txBody>
+      </p:sp>
+    </p:spTree>
+  </p:cSld>
+  <p:clrMapOvr>
+    <a:masterClrMapping/>
+  </p:clrMapOvr>
+</p:sld>
+</file>
+
+<file path=ppt/slides/slide8.xml><?xml version="1.0" encoding="utf-8"?>
 <p:sld xmlns:a="http://schemas.openxmlformats.org/drawingml/2006/main" xmlns:p="http://schemas.openxmlformats.org/presentationml/2006/main" xmlns:r="http://schemas.openxmlformats.org/officeDocument/2006/relationships">
   <p:cSld>
     <p:spTree>
@@ -12891,692 +15739,6 @@
                 <a:latin typeface="NanumGothic"/>
                 <a:ea typeface="NanumGothic"/>
               </a:rPr>
-              <a:t>7</a:t>
-            </a:r>
-          </a:p>
-        </p:txBody>
-      </p:sp>
-    </p:spTree>
-  </p:cSld>
-  <p:clrMapOvr>
-    <a:masterClrMapping/>
-  </p:clrMapOvr>
-</p:sld>
-</file>
-
-<file path=ppt/slides/slide8.xml><?xml version="1.0" encoding="utf-8"?>
-<p:sld xmlns:a="http://schemas.openxmlformats.org/drawingml/2006/main" xmlns:p="http://schemas.openxmlformats.org/presentationml/2006/main" xmlns:r="http://schemas.openxmlformats.org/officeDocument/2006/relationships">
-  <p:cSld>
-    <p:spTree>
-      <p:nvGrpSpPr>
-        <p:cNvPr id="1" name=""/>
-        <p:cNvGrpSpPr/>
-        <p:nvPr/>
-      </p:nvGrpSpPr>
-      <p:grpSpPr/>
-      <p:sp>
-        <p:nvSpPr>
-          <p:cNvPr id="2" name="Rectangle 1"/>
-          <p:cNvSpPr/>
-          <p:nvPr/>
-        </p:nvSpPr>
-        <p:spPr>
-          <a:xfrm>
-            <a:off x="502920" y="310896"/>
-            <a:ext cx="109728" cy="457200"/>
-          </a:xfrm>
-          <a:prstGeom prst="rect">
-            <a:avLst/>
-          </a:prstGeom>
-          <a:solidFill>
-            <a:srgbClr val="2C898A"/>
-          </a:solidFill>
-          <a:ln>
-            <a:noFill/>
-          </a:ln>
-          <a:effectLst/>
-        </p:spPr>
-        <p:style>
-          <a:lnRef idx="1">
-            <a:schemeClr val="accent1"/>
-          </a:lnRef>
-          <a:fillRef idx="3">
-            <a:schemeClr val="accent1"/>
-          </a:fillRef>
-          <a:effectRef idx="2">
-            <a:schemeClr val="accent1"/>
-          </a:effectRef>
-          <a:fontRef idx="minor">
-            <a:schemeClr val="lt1"/>
-          </a:fontRef>
-        </p:style>
-        <p:txBody>
-          <a:bodyPr rtlCol="0" anchor="ctr"/>
-          <a:lstStyle/>
-          <a:p>
-            <a:pPr algn="ctr"/>
-          </a:p>
-        </p:txBody>
-      </p:sp>
-      <p:sp>
-        <p:nvSpPr>
-          <p:cNvPr id="3" name="TextBox 2"/>
-          <p:cNvSpPr txBox="1"/>
-          <p:nvPr/>
-        </p:nvSpPr>
-        <p:spPr>
-          <a:xfrm>
-            <a:off x="731520" y="237744"/>
-            <a:ext cx="9509760" cy="685800"/>
-          </a:xfrm>
-          <a:prstGeom prst="rect">
-            <a:avLst/>
-          </a:prstGeom>
-          <a:noFill/>
-        </p:spPr>
-        <p:txBody>
-          <a:bodyPr wrap="square" anchor="ctr" lIns="0" rIns="0" tIns="0" bIns="0">
-            <a:spAutoFit/>
-          </a:bodyPr>
-          <a:lstStyle/>
-          <a:p>
-            <a:pPr algn="l">
-              <a:lnSpc>
-                <a:spcPct val="108000"/>
-              </a:lnSpc>
-              <a:spcAft>
-                <a:spcPts val="400"/>
-              </a:spcAft>
-            </a:pPr>
-            <a:r>
-              <a:rPr sz="2400" b="1" i="0">
-                <a:solidFill>
-                  <a:srgbClr val="1B355E"/>
-                </a:solidFill>
-                <a:latin typeface="NanumGothic"/>
-                <a:ea typeface="NanumGothic"/>
-              </a:rPr>
-              <a:t>적응증 (Indications)</a:t>
-            </a:r>
-          </a:p>
-        </p:txBody>
-      </p:sp>
-      <p:sp>
-        <p:nvSpPr>
-          <p:cNvPr id="4" name="TextBox 3"/>
-          <p:cNvSpPr txBox="1"/>
-          <p:nvPr/>
-        </p:nvSpPr>
-        <p:spPr>
-          <a:xfrm>
-            <a:off x="749808" y="109728"/>
-            <a:ext cx="7315200" cy="219456"/>
-          </a:xfrm>
-          <a:prstGeom prst="rect">
-            <a:avLst/>
-          </a:prstGeom>
-          <a:noFill/>
-        </p:spPr>
-        <p:txBody>
-          <a:bodyPr wrap="square" anchor="t" lIns="0" rIns="0" tIns="0" bIns="0">
-            <a:spAutoFit/>
-          </a:bodyPr>
-          <a:lstStyle/>
-          <a:p>
-            <a:pPr algn="l">
-              <a:lnSpc>
-                <a:spcPct val="108000"/>
-              </a:lnSpc>
-              <a:spcAft>
-                <a:spcPts val="400"/>
-              </a:spcAft>
-            </a:pPr>
-            <a:r>
-              <a:rPr sz="1100" b="1" i="0">
-                <a:solidFill>
-                  <a:srgbClr val="1F6E70"/>
-                </a:solidFill>
-                <a:latin typeface="NanumGothic"/>
-                <a:ea typeface="NanumGothic"/>
-              </a:rPr>
-              <a:t>적응증</a:t>
-            </a:r>
-          </a:p>
-        </p:txBody>
-      </p:sp>
-      <p:sp>
-        <p:nvSpPr>
-          <p:cNvPr id="5" name="Rectangle 4"/>
-          <p:cNvSpPr/>
-          <p:nvPr/>
-        </p:nvSpPr>
-        <p:spPr>
-          <a:xfrm>
-            <a:off x="731520" y="969264"/>
-            <a:ext cx="10881360" cy="17780"/>
-          </a:xfrm>
-          <a:prstGeom prst="rect">
-            <a:avLst/>
-          </a:prstGeom>
-          <a:solidFill>
-            <a:srgbClr val="D5DEE7"/>
-          </a:solidFill>
-          <a:ln>
-            <a:noFill/>
-          </a:ln>
-          <a:effectLst/>
-        </p:spPr>
-        <p:style>
-          <a:lnRef idx="1">
-            <a:schemeClr val="accent1"/>
-          </a:lnRef>
-          <a:fillRef idx="3">
-            <a:schemeClr val="accent1"/>
-          </a:fillRef>
-          <a:effectRef idx="2">
-            <a:schemeClr val="accent1"/>
-          </a:effectRef>
-          <a:fontRef idx="minor">
-            <a:schemeClr val="lt1"/>
-          </a:fontRef>
-        </p:style>
-        <p:txBody>
-          <a:bodyPr rtlCol="0" anchor="ctr"/>
-          <a:lstStyle/>
-          <a:p>
-            <a:pPr algn="ctr"/>
-          </a:p>
-        </p:txBody>
-      </p:sp>
-      <p:sp>
-        <p:nvSpPr>
-          <p:cNvPr id="6" name="Rounded Rectangle 5"/>
-          <p:cNvSpPr/>
-          <p:nvPr/>
-        </p:nvSpPr>
-        <p:spPr>
-          <a:xfrm>
-            <a:off x="11194999" y="365760"/>
-            <a:ext cx="493776" cy="347472"/>
-          </a:xfrm>
-          <a:prstGeom prst="roundRect">
-            <a:avLst>
-              <a:gd name="adj" fmla="val 8000"/>
-            </a:avLst>
-          </a:prstGeom>
-          <a:solidFill>
-            <a:srgbClr val="2C898A"/>
-          </a:solidFill>
-          <a:ln>
-            <a:noFill/>
-          </a:ln>
-          <a:effectLst/>
-        </p:spPr>
-        <p:style>
-          <a:lnRef idx="1">
-            <a:schemeClr val="accent1"/>
-          </a:lnRef>
-          <a:fillRef idx="3">
-            <a:schemeClr val="accent1"/>
-          </a:fillRef>
-          <a:effectRef idx="2">
-            <a:schemeClr val="accent1"/>
-          </a:effectRef>
-          <a:fontRef idx="minor">
-            <a:schemeClr val="lt1"/>
-          </a:fontRef>
-        </p:style>
-        <p:txBody>
-          <a:bodyPr rtlCol="0" anchor="ctr"/>
-          <a:lstStyle/>
-          <a:p>
-            <a:pPr algn="ctr"/>
-          </a:p>
-        </p:txBody>
-      </p:sp>
-      <p:sp>
-        <p:nvSpPr>
-          <p:cNvPr id="7" name="TextBox 6"/>
-          <p:cNvSpPr txBox="1"/>
-          <p:nvPr/>
-        </p:nvSpPr>
-        <p:spPr>
-          <a:xfrm>
-            <a:off x="11194999" y="365760"/>
-            <a:ext cx="493776" cy="347472"/>
-          </a:xfrm>
-          <a:prstGeom prst="rect">
-            <a:avLst/>
-          </a:prstGeom>
-          <a:noFill/>
-        </p:spPr>
-        <p:txBody>
-          <a:bodyPr wrap="square" anchor="ctr" lIns="0" rIns="0" tIns="0" bIns="0">
-            <a:spAutoFit/>
-          </a:bodyPr>
-          <a:lstStyle/>
-          <a:p>
-            <a:pPr algn="ctr">
-              <a:lnSpc>
-                <a:spcPct val="108000"/>
-              </a:lnSpc>
-              <a:spcAft>
-                <a:spcPts val="400"/>
-              </a:spcAft>
-            </a:pPr>
-            <a:r>
-              <a:rPr sz="1150" b="1" i="0">
-                <a:solidFill>
-                  <a:srgbClr val="FFFFFF"/>
-                </a:solidFill>
-                <a:latin typeface="NanumGothic"/>
-                <a:ea typeface="NanumGothic"/>
-              </a:rPr>
-              <a:t>적응</a:t>
-            </a:r>
-          </a:p>
-        </p:txBody>
-      </p:sp>
-      <p:graphicFrame>
-        <p:nvGraphicFramePr>
-          <p:cNvPr id="8" name="Table 7"/>
-          <p:cNvGraphicFramePr>
-            <a:graphicFrameLocks noGrp="1"/>
-          </p:cNvGraphicFramePr>
-          <p:nvPr/>
-        </p:nvGraphicFramePr>
-        <p:xfrm>
-          <a:off x="731520" y="1371600"/>
-          <a:ext cx="10835640" cy="3017520"/>
-        </p:xfrm>
-        <a:graphic>
-          <a:graphicData uri="http://schemas.openxmlformats.org/drawingml/2006/table">
-            <a:tbl>
-              <a:tblPr>
-                <a:tableStyleId>{5C22544A-7EE6-4342-B048-85BDC9FD1C3A}</a:tableStyleId>
-              </a:tblPr>
-              <a:tblGrid>
-                <a:gridCol w="2194560"/>
-                <a:gridCol w="8641080"/>
-              </a:tblGrid>
-              <a:tr h="457200">
-                <a:tc>
-                  <a:txBody>
-                    <a:bodyPr wrap="square"/>
-                    <a:lstStyle/>
-                    <a:p>
-                      <a:pPr algn="l"/>
-                      <a:r>
-                        <a:rPr sz="1250" b="1" i="0">
-                          <a:solidFill>
-                            <a:srgbClr val="FFFFFF"/>
-                          </a:solidFill>
-                          <a:latin typeface="NanumGothic"/>
-                          <a:ea typeface="NanumGothic"/>
-                        </a:rPr>
-                        <a:t>범주</a:t>
-                      </a:r>
-                    </a:p>
-                  </a:txBody>
-                  <a:tcPr marL="73152" marR="54864" marT="18288" marB="18288" anchor="ctr">
-                    <a:solidFill>
-                      <a:srgbClr val="1B355E"/>
-                    </a:solidFill>
-                  </a:tcPr>
-                </a:tc>
-                <a:tc>
-                  <a:txBody>
-                    <a:bodyPr wrap="square"/>
-                    <a:lstStyle/>
-                    <a:p>
-                      <a:pPr algn="ctr"/>
-                      <a:r>
-                        <a:rPr sz="1250" b="1" i="0">
-                          <a:solidFill>
-                            <a:srgbClr val="FFFFFF"/>
-                          </a:solidFill>
-                          <a:latin typeface="NanumGothic"/>
-                          <a:ea typeface="NanumGothic"/>
-                        </a:rPr>
-                        <a:t>대표 적응증</a:t>
-                      </a:r>
-                    </a:p>
-                  </a:txBody>
-                  <a:tcPr marL="73152" marR="54864" marT="18288" marB="18288" anchor="ctr">
-                    <a:solidFill>
-                      <a:srgbClr val="1B355E"/>
-                    </a:solidFill>
-                  </a:tcPr>
-                </a:tc>
-              </a:tr>
-              <a:tr h="640080">
-                <a:tc>
-                  <a:txBody>
-                    <a:bodyPr wrap="square"/>
-                    <a:lstStyle/>
-                    <a:p>
-                      <a:pPr algn="l"/>
-                      <a:r>
-                        <a:rPr sz="1200" b="0" i="0">
-                          <a:solidFill>
-                            <a:srgbClr val="1A202C"/>
-                          </a:solidFill>
-                          <a:latin typeface="NanumGothic"/>
-                          <a:ea typeface="NanumGothic"/>
-                        </a:rPr>
-                        <a:t>통증증후군</a:t>
-                      </a:r>
-                    </a:p>
-                  </a:txBody>
-                  <a:tcPr marL="73152" marR="54864" marT="18288" marB="18288" anchor="ctr">
-                    <a:solidFill>
-                      <a:srgbClr val="FFFFFF"/>
-                    </a:solidFill>
-                  </a:tcPr>
-                </a:tc>
-                <a:tc>
-                  <a:txBody>
-                    <a:bodyPr wrap="square"/>
-                    <a:lstStyle/>
-                    <a:p>
-                      <a:pPr algn="ctr"/>
-                      <a:r>
-                        <a:rPr sz="1200" b="0" i="0">
-                          <a:solidFill>
-                            <a:srgbClr val="1A202C"/>
-                          </a:solidFill>
-                          <a:latin typeface="NanumGothic"/>
-                          <a:ea typeface="NanumGothic"/>
-                        </a:rPr>
-                        <a:t>하지 복합부위통증증후군(CRPS I/II) — 조기(≤12개월) 시행이 유리</a:t>
-                      </a:r>
-                    </a:p>
-                  </a:txBody>
-                  <a:tcPr marL="73152" marR="54864" marT="18288" marB="18288" anchor="ctr">
-                    <a:solidFill>
-                      <a:srgbClr val="FFFFFF"/>
-                    </a:solidFill>
-                  </a:tcPr>
-                </a:tc>
-              </a:tr>
-              <a:tr h="640080">
-                <a:tc>
-                  <a:txBody>
-                    <a:bodyPr wrap="square"/>
-                    <a:lstStyle/>
-                    <a:p>
-                      <a:pPr algn="l"/>
-                      <a:r>
-                        <a:rPr sz="1200" b="0" i="0">
-                          <a:solidFill>
-                            <a:srgbClr val="1A202C"/>
-                          </a:solidFill>
-                          <a:latin typeface="NanumGothic"/>
-                          <a:ea typeface="NanumGothic"/>
-                        </a:rPr>
-                        <a:t>허혈질환</a:t>
-                      </a:r>
-                    </a:p>
-                  </a:txBody>
-                  <a:tcPr marL="73152" marR="54864" marT="18288" marB="18288" anchor="ctr">
-                    <a:solidFill>
-                      <a:srgbClr val="EEF2F6"/>
-                    </a:solidFill>
-                  </a:tcPr>
-                </a:tc>
-                <a:tc>
-                  <a:txBody>
-                    <a:bodyPr wrap="square"/>
-                    <a:lstStyle/>
-                    <a:p>
-                      <a:pPr algn="ctr"/>
-                      <a:r>
-                        <a:rPr sz="1200" b="0" i="0">
-                          <a:solidFill>
-                            <a:srgbClr val="1A202C"/>
-                          </a:solidFill>
-                          <a:latin typeface="NanumGothic"/>
-                          <a:ea typeface="NanumGothic"/>
-                        </a:rPr>
-                        <a:t>PAD·중증 하지허혈(CLI) 안정통·비재건성, 버거병, 색전, 동상, 혈관연축</a:t>
-                      </a:r>
-                    </a:p>
-                  </a:txBody>
-                  <a:tcPr marL="73152" marR="54864" marT="18288" marB="18288" anchor="ctr">
-                    <a:solidFill>
-                      <a:srgbClr val="EEF2F6"/>
-                    </a:solidFill>
-                  </a:tcPr>
-                </a:tc>
-              </a:tr>
-              <a:tr h="640080">
-                <a:tc>
-                  <a:txBody>
-                    <a:bodyPr wrap="square"/>
-                    <a:lstStyle/>
-                    <a:p>
-                      <a:pPr algn="l"/>
-                      <a:r>
-                        <a:rPr sz="1200" b="0" i="0">
-                          <a:solidFill>
-                            <a:srgbClr val="1A202C"/>
-                          </a:solidFill>
-                          <a:latin typeface="NanumGothic"/>
-                          <a:ea typeface="NanumGothic"/>
-                        </a:rPr>
-                        <a:t>신경병증</a:t>
-                      </a:r>
-                    </a:p>
-                  </a:txBody>
-                  <a:tcPr marL="73152" marR="54864" marT="18288" marB="18288" anchor="ctr">
-                    <a:solidFill>
-                      <a:srgbClr val="FFFFFF"/>
-                    </a:solidFill>
-                  </a:tcPr>
-                </a:tc>
-                <a:tc>
-                  <a:txBody>
-                    <a:bodyPr wrap="square"/>
-                    <a:lstStyle/>
-                    <a:p>
-                      <a:pPr algn="ctr"/>
-                      <a:r>
-                        <a:rPr sz="1200" b="0" i="0">
-                          <a:solidFill>
-                            <a:srgbClr val="1A202C"/>
-                          </a:solidFill>
-                          <a:latin typeface="NanumGothic"/>
-                          <a:ea typeface="NanumGothic"/>
-                        </a:rPr>
-                        <a:t>당뇨병성 신경병증/당뇨발, 대상포진후신경통, 환상지통·단단통</a:t>
-                      </a:r>
-                    </a:p>
-                  </a:txBody>
-                  <a:tcPr marL="73152" marR="54864" marT="18288" marB="18288" anchor="ctr">
-                    <a:solidFill>
-                      <a:srgbClr val="FFFFFF"/>
-                    </a:solidFill>
-                  </a:tcPr>
-                </a:tc>
-              </a:tr>
-              <a:tr h="640080">
-                <a:tc>
-                  <a:txBody>
-                    <a:bodyPr wrap="square"/>
-                    <a:lstStyle/>
-                    <a:p>
-                      <a:pPr algn="l"/>
-                      <a:r>
-                        <a:rPr sz="1200" b="0" i="0">
-                          <a:solidFill>
-                            <a:srgbClr val="1A202C"/>
-                          </a:solidFill>
-                          <a:latin typeface="NanumGothic"/>
-                          <a:ea typeface="NanumGothic"/>
-                        </a:rPr>
-                        <a:t>기타</a:t>
-                      </a:r>
-                    </a:p>
-                  </a:txBody>
-                  <a:tcPr marL="73152" marR="54864" marT="18288" marB="18288" anchor="ctr">
-                    <a:solidFill>
-                      <a:srgbClr val="EEF2F6"/>
-                    </a:solidFill>
-                  </a:tcPr>
-                </a:tc>
-                <a:tc>
-                  <a:txBody>
-                    <a:bodyPr wrap="square"/>
-                    <a:lstStyle/>
-                    <a:p>
-                      <a:pPr algn="ctr"/>
-                      <a:r>
-                        <a:rPr sz="1200" b="0" i="0">
-                          <a:solidFill>
-                            <a:srgbClr val="1A202C"/>
-                          </a:solidFill>
-                          <a:latin typeface="NanumGothic"/>
-                          <a:ea typeface="NanumGothic"/>
-                        </a:rPr>
-                        <a:t>족부 다한증, 레이노 증후군(하지)·홍색사지통증, 암성 골반/하지통</a:t>
-                      </a:r>
-                    </a:p>
-                  </a:txBody>
-                  <a:tcPr marL="73152" marR="54864" marT="18288" marB="18288" anchor="ctr">
-                    <a:solidFill>
-                      <a:srgbClr val="EEF2F6"/>
-                    </a:solidFill>
-                  </a:tcPr>
-                </a:tc>
-              </a:tr>
-            </a:tbl>
-          </a:graphicData>
-        </a:graphic>
-      </p:graphicFrame>
-      <p:sp>
-        <p:nvSpPr>
-          <p:cNvPr id="9" name="TextBox 8"/>
-          <p:cNvSpPr txBox="1"/>
-          <p:nvPr/>
-        </p:nvSpPr>
-        <p:spPr>
-          <a:xfrm>
-            <a:off x="731520" y="5989320"/>
-            <a:ext cx="10789920" cy="365760"/>
-          </a:xfrm>
-          <a:prstGeom prst="rect">
-            <a:avLst/>
-          </a:prstGeom>
-          <a:noFill/>
-        </p:spPr>
-        <p:txBody>
-          <a:bodyPr wrap="square" anchor="t" lIns="0" rIns="0" tIns="0" bIns="0">
-            <a:spAutoFit/>
-          </a:bodyPr>
-          <a:lstStyle/>
-          <a:p>
-            <a:pPr algn="l">
-              <a:lnSpc>
-                <a:spcPct val="108000"/>
-              </a:lnSpc>
-              <a:spcAft>
-                <a:spcPts val="400"/>
-              </a:spcAft>
-            </a:pPr>
-            <a:r>
-              <a:rPr sz="1150" b="1" i="0">
-                <a:solidFill>
-                  <a:srgbClr val="1F6E70"/>
-                </a:solidFill>
-                <a:latin typeface="NanumGothic"/>
-                <a:ea typeface="NanumGothic"/>
-              </a:rPr>
-              <a:t>특발성 야간 하지경련(NLC)은 적응증 아님 — '밤 다리증상'이 허혈성 안정통(PAD/CLI)이면 적응. 원인 감별(ABI·도플러) 선행.</a:t>
-            </a:r>
-          </a:p>
-        </p:txBody>
-      </p:sp>
-      <p:sp>
-        <p:nvSpPr>
-          <p:cNvPr id="10" name="TextBox 9"/>
-          <p:cNvSpPr txBox="1"/>
-          <p:nvPr/>
-        </p:nvSpPr>
-        <p:spPr>
-          <a:xfrm>
-            <a:off x="731520" y="6455664"/>
-            <a:ext cx="9875520" cy="292608"/>
-          </a:xfrm>
-          <a:prstGeom prst="rect">
-            <a:avLst/>
-          </a:prstGeom>
-          <a:noFill/>
-        </p:spPr>
-        <p:txBody>
-          <a:bodyPr wrap="square" anchor="ctr" lIns="0" rIns="0" tIns="0" bIns="0">
-            <a:spAutoFit/>
-          </a:bodyPr>
-          <a:lstStyle/>
-          <a:p>
-            <a:pPr algn="l">
-              <a:lnSpc>
-                <a:spcPct val="108000"/>
-              </a:lnSpc>
-              <a:spcAft>
-                <a:spcPts val="400"/>
-              </a:spcAft>
-            </a:pPr>
-            <a:r>
-              <a:rPr sz="900" b="0" i="0">
-                <a:solidFill>
-                  <a:srgbClr val="5A6B7B"/>
-                </a:solidFill>
-                <a:latin typeface="NanumGothic"/>
-                <a:ea typeface="NanumGothic"/>
-              </a:rPr>
-              <a:t>근거: StatPearls; 문헌고찰 종합</a:t>
-            </a:r>
-          </a:p>
-        </p:txBody>
-      </p:sp>
-      <p:sp>
-        <p:nvSpPr>
-          <p:cNvPr id="11" name="TextBox 10"/>
-          <p:cNvSpPr txBox="1"/>
-          <p:nvPr/>
-        </p:nvSpPr>
-        <p:spPr>
-          <a:xfrm>
-            <a:off x="11064240" y="6455664"/>
-            <a:ext cx="822960" cy="292608"/>
-          </a:xfrm>
-          <a:prstGeom prst="rect">
-            <a:avLst/>
-          </a:prstGeom>
-          <a:noFill/>
-        </p:spPr>
-        <p:txBody>
-          <a:bodyPr wrap="square" anchor="ctr" lIns="0" rIns="0" tIns="0" bIns="0">
-            <a:spAutoFit/>
-          </a:bodyPr>
-          <a:lstStyle/>
-          <a:p>
-            <a:pPr algn="r">
-              <a:lnSpc>
-                <a:spcPct val="108000"/>
-              </a:lnSpc>
-              <a:spcAft>
-                <a:spcPts val="400"/>
-              </a:spcAft>
-            </a:pPr>
-            <a:r>
-              <a:rPr sz="1000" b="1" i="0">
-                <a:solidFill>
-                  <a:srgbClr val="5A6B7B"/>
-                </a:solidFill>
-                <a:latin typeface="NanumGothic"/>
-                <a:ea typeface="NanumGothic"/>
-              </a:rPr>
               <a:t>8</a:t>
             </a:r>
           </a:p>
@@ -13608,6 +15770,50 @@
         </p:nvSpPr>
         <p:spPr>
           <a:xfrm>
+            <a:off x="0" y="0"/>
+            <a:ext cx="12191695" cy="6858000"/>
+          </a:xfrm>
+          <a:prstGeom prst="rect">
+            <a:avLst/>
+          </a:prstGeom>
+          <a:solidFill>
+            <a:srgbClr val="FFFFFF"/>
+          </a:solidFill>
+          <a:ln>
+            <a:noFill/>
+          </a:ln>
+          <a:effectLst/>
+        </p:spPr>
+        <p:style>
+          <a:lnRef idx="1">
+            <a:schemeClr val="accent1"/>
+          </a:lnRef>
+          <a:fillRef idx="3">
+            <a:schemeClr val="accent1"/>
+          </a:fillRef>
+          <a:effectRef idx="2">
+            <a:schemeClr val="accent1"/>
+          </a:effectRef>
+          <a:fontRef idx="minor">
+            <a:schemeClr val="lt1"/>
+          </a:fontRef>
+        </p:style>
+        <p:txBody>
+          <a:bodyPr rtlCol="0" anchor="ctr"/>
+          <a:lstStyle/>
+          <a:p>
+            <a:pPr algn="ctr"/>
+          </a:p>
+        </p:txBody>
+      </p:sp>
+      <p:sp>
+        <p:nvSpPr>
+          <p:cNvPr id="3" name="Rectangle 2"/>
+          <p:cNvSpPr/>
+          <p:nvPr/>
+        </p:nvSpPr>
+        <p:spPr>
+          <a:xfrm>
             <a:off x="502920" y="310896"/>
             <a:ext cx="109728" cy="457200"/>
           </a:xfrm>
@@ -13646,7 +15852,7 @@
       </p:sp>
       <p:sp>
         <p:nvSpPr>
-          <p:cNvPr id="3" name="TextBox 2"/>
+          <p:cNvPr id="4" name="TextBox 3"/>
           <p:cNvSpPr txBox="1"/>
           <p:nvPr/>
         </p:nvSpPr>
@@ -13682,14 +15888,14 @@
                 <a:latin typeface="NanumGothic"/>
                 <a:ea typeface="NanumGothic"/>
               </a:rPr>
-              <a:t>적응증별 환자 증상·호소 ① — 통증증후군·허혈</a:t>
-            </a:r>
-          </a:p>
-        </p:txBody>
-      </p:sp>
-      <p:sp>
-        <p:nvSpPr>
-          <p:cNvPr id="4" name="TextBox 3"/>
+              <a:t>생식대퇴신경통 — 가장 흔한 걱정, 대부분 회피 가능</a:t>
+            </a:r>
+          </a:p>
+        </p:txBody>
+      </p:sp>
+      <p:sp>
+        <p:nvSpPr>
+          <p:cNvPr id="5" name="TextBox 4"/>
           <p:cNvSpPr txBox="1"/>
           <p:nvPr/>
         </p:nvSpPr>
@@ -13725,14 +15931,14 @@
                 <a:latin typeface="NanumGothic"/>
                 <a:ea typeface="NanumGothic"/>
               </a:rPr>
-              <a:t>적응증 · 증상</a:t>
-            </a:r>
-          </a:p>
-        </p:txBody>
-      </p:sp>
-      <p:sp>
-        <p:nvSpPr>
-          <p:cNvPr id="5" name="Rectangle 4"/>
+              <a:t>합병증 · 심화</a:t>
+            </a:r>
+          </a:p>
+        </p:txBody>
+      </p:sp>
+      <p:sp>
+        <p:nvSpPr>
+          <p:cNvPr id="6" name="Rectangle 5"/>
           <p:cNvSpPr/>
           <p:nvPr/>
         </p:nvSpPr>
@@ -13776,7 +15982,7 @@
       </p:sp>
       <p:sp>
         <p:nvSpPr>
-          <p:cNvPr id="6" name="Rounded Rectangle 5"/>
+          <p:cNvPr id="7" name="Rounded Rectangle 6"/>
           <p:cNvSpPr/>
           <p:nvPr/>
         </p:nvSpPr>
@@ -13822,7 +16028,7 @@
       </p:sp>
       <p:sp>
         <p:nvSpPr>
-          <p:cNvPr id="7" name="TextBox 6"/>
+          <p:cNvPr id="8" name="TextBox 7"/>
           <p:cNvSpPr txBox="1"/>
           <p:nvPr/>
         </p:nvSpPr>
@@ -13858,254 +16064,45 @@
                 <a:latin typeface="NanumGothic"/>
                 <a:ea typeface="NanumGothic"/>
               </a:rPr>
-              <a:t>환자 증상</a:t>
-            </a:r>
-          </a:p>
-        </p:txBody>
-      </p:sp>
-      <p:sp>
-        <p:nvSpPr>
-          <p:cNvPr id="8" name="TextBox 7"/>
+              <a:t>최다 우려</a:t>
+            </a:r>
+          </a:p>
+        </p:txBody>
+      </p:sp>
+      <p:pic>
+        <p:nvPicPr>
+          <p:cNvPr id="9" name="Picture 8" descr="lsb_gf.png"/>
+          <p:cNvPicPr>
+            <a:picLocks noChangeAspect="1"/>
+          </p:cNvPicPr>
+          <p:nvPr/>
+        </p:nvPicPr>
+        <p:blipFill>
+          <a:blip r:embed="rId2"/>
+          <a:stretch>
+            <a:fillRect/>
+          </a:stretch>
+        </p:blipFill>
+        <p:spPr>
+          <a:xfrm>
+            <a:off x="2156145" y="1417320"/>
+            <a:ext cx="7879404" cy="4114800"/>
+          </a:xfrm>
+          <a:prstGeom prst="rect">
+            <a:avLst/>
+          </a:prstGeom>
+        </p:spPr>
+      </p:pic>
+      <p:sp>
+        <p:nvSpPr>
+          <p:cNvPr id="10" name="TextBox 9"/>
           <p:cNvSpPr txBox="1"/>
           <p:nvPr/>
         </p:nvSpPr>
         <p:spPr>
           <a:xfrm>
-            <a:off x="731520" y="1371600"/>
-            <a:ext cx="10835640" cy="4754880"/>
-          </a:xfrm>
-          <a:prstGeom prst="rect">
-            <a:avLst/>
-          </a:prstGeom>
-          <a:noFill/>
-        </p:spPr>
-        <p:txBody>
-          <a:bodyPr wrap="square" lIns="0" rIns="0" tIns="0" bIns="0">
-            <a:spAutoFit/>
-          </a:bodyPr>
-          <a:lstStyle/>
-          <a:p>
-            <a:pPr algn="l">
-              <a:lnSpc>
-                <a:spcPct val="108000"/>
-              </a:lnSpc>
-              <a:spcAft>
-                <a:spcPts val="600"/>
-              </a:spcAft>
-            </a:pPr>
-            <a:r>
-              <a:rPr sz="979" b="1" i="0">
-                <a:solidFill>
-                  <a:srgbClr val="2C898A"/>
-                </a:solidFill>
-                <a:latin typeface="NanumGothic"/>
-                <a:ea typeface="NanumGothic"/>
-              </a:rPr>
-              <a:t>●  </a:t>
-            </a:r>
-            <a:r>
-              <a:rPr sz="1400" b="1" i="0">
-                <a:solidFill>
-                  <a:srgbClr val="1A202C"/>
-                </a:solidFill>
-                <a:latin typeface="NanumGothic"/>
-                <a:ea typeface="NanumGothic"/>
-              </a:rPr>
-              <a:t>하지 CRPS I/II (복합부위통증증후군) — 교감신경 매개 통증의 전형</a:t>
-            </a:r>
-          </a:p>
-          <a:p>
-            <a:pPr algn="l">
-              <a:lnSpc>
-                <a:spcPct val="108000"/>
-              </a:lnSpc>
-              <a:spcAft>
-                <a:spcPts val="600"/>
-              </a:spcAft>
-            </a:pPr>
-            <a:r>
-              <a:rPr sz="1400" b="1" i="0">
-                <a:solidFill>
-                  <a:srgbClr val="5A6B7B"/>
-                </a:solidFill>
-                <a:latin typeface="NanumGothic"/>
-                <a:ea typeface="NanumGothic"/>
-              </a:rPr>
-              <a:t>      –  </a:t>
-            </a:r>
-            <a:r>
-              <a:rPr sz="1400" b="0" i="0">
-                <a:solidFill>
-                  <a:srgbClr val="1A202C"/>
-                </a:solidFill>
-                <a:latin typeface="NanumGothic"/>
-                <a:ea typeface="NanumGothic"/>
-              </a:rPr>
-              <a:t>작열통·이질통(옷·바람 스침에도 통증)·통각과민 · 부종 · 피부색(발적↔창백)·좌우 온도차 · 발한 이상</a:t>
-            </a:r>
-          </a:p>
-          <a:p>
-            <a:pPr algn="l">
-              <a:lnSpc>
-                <a:spcPct val="108000"/>
-              </a:lnSpc>
-              <a:spcAft>
-                <a:spcPts val="600"/>
-              </a:spcAft>
-            </a:pPr>
-            <a:r>
-              <a:rPr sz="1400" b="1" i="0">
-                <a:solidFill>
-                  <a:srgbClr val="5A6B7B"/>
-                </a:solidFill>
-                <a:latin typeface="NanumGothic"/>
-                <a:ea typeface="NanumGothic"/>
-              </a:rPr>
-              <a:t>      –  </a:t>
-            </a:r>
-            <a:r>
-              <a:rPr sz="1400" b="0" i="0">
-                <a:solidFill>
-                  <a:srgbClr val="5A6B7B"/>
-                </a:solidFill>
-                <a:latin typeface="NanumGothic"/>
-                <a:ea typeface="NanumGothic"/>
-              </a:rPr>
-              <a:t>호소: “발이 타는 듯 화끈거려요” · “이불만 스쳐도 아파요” · “붓고 색이 자꾸 변해요”</a:t>
-            </a:r>
-          </a:p>
-          <a:p>
-            <a:pPr algn="l">
-              <a:lnSpc>
-                <a:spcPct val="108000"/>
-              </a:lnSpc>
-              <a:spcAft>
-                <a:spcPts val="600"/>
-              </a:spcAft>
-            </a:pPr>
-            <a:r>
-              <a:rPr sz="979" b="1" i="0">
-                <a:solidFill>
-                  <a:srgbClr val="2C898A"/>
-                </a:solidFill>
-                <a:latin typeface="NanumGothic"/>
-                <a:ea typeface="NanumGothic"/>
-              </a:rPr>
-              <a:t>●  </a:t>
-            </a:r>
-            <a:r>
-              <a:rPr sz="1400" b="1" i="0">
-                <a:solidFill>
-                  <a:srgbClr val="2E7D32"/>
-                </a:solidFill>
-                <a:latin typeface="NanumGothic"/>
-                <a:ea typeface="NanumGothic"/>
-              </a:rPr>
-              <a:t>허혈질환 — PAD·중증 하지허혈(CLI)·버거병 (동맥성 허혈)</a:t>
-            </a:r>
-          </a:p>
-          <a:p>
-            <a:pPr algn="l">
-              <a:lnSpc>
-                <a:spcPct val="108000"/>
-              </a:lnSpc>
-              <a:spcAft>
-                <a:spcPts val="600"/>
-              </a:spcAft>
-            </a:pPr>
-            <a:r>
-              <a:rPr sz="1400" b="1" i="0">
-                <a:solidFill>
-                  <a:srgbClr val="5A6B7B"/>
-                </a:solidFill>
-                <a:latin typeface="NanumGothic"/>
-                <a:ea typeface="NanumGothic"/>
-              </a:rPr>
-              <a:t>      –  </a:t>
-            </a:r>
-            <a:r>
-              <a:rPr sz="1400" b="0" i="0">
-                <a:solidFill>
-                  <a:srgbClr val="1A202C"/>
-                </a:solidFill>
-                <a:latin typeface="NanumGothic"/>
-                <a:ea typeface="NanumGothic"/>
-              </a:rPr>
-              <a:t>간헐적 파행(걷다 종아리 통증→쉬면 완화) → 진행 시 야간 안정통(다리 내리면 완화) · 차고 창백한 발 · 비치유 궤양·괴저</a:t>
-            </a:r>
-          </a:p>
-          <a:p>
-            <a:pPr algn="l">
-              <a:lnSpc>
-                <a:spcPct val="108000"/>
-              </a:lnSpc>
-              <a:spcAft>
-                <a:spcPts val="600"/>
-              </a:spcAft>
-            </a:pPr>
-            <a:r>
-              <a:rPr sz="1400" b="1" i="0">
-                <a:solidFill>
-                  <a:srgbClr val="5A6B7B"/>
-                </a:solidFill>
-                <a:latin typeface="NanumGothic"/>
-                <a:ea typeface="NanumGothic"/>
-              </a:rPr>
-              <a:t>      –  </a:t>
-            </a:r>
-            <a:r>
-              <a:rPr sz="1400" b="0" i="0">
-                <a:solidFill>
-                  <a:srgbClr val="5A6B7B"/>
-                </a:solidFill>
-                <a:latin typeface="NanumGothic"/>
-                <a:ea typeface="NanumGothic"/>
-              </a:rPr>
-              <a:t>호소: “걸으면 종아리가 터질 듯 아파요” · “밤에 발이 시려 잠을 못 자요” · “상처가 안 아물어요”</a:t>
-            </a:r>
-          </a:p>
-          <a:p>
-            <a:pPr algn="l">
-              <a:lnSpc>
-                <a:spcPct val="108000"/>
-              </a:lnSpc>
-              <a:spcAft>
-                <a:spcPts val="600"/>
-              </a:spcAft>
-            </a:pPr>
-            <a:r>
-              <a:rPr sz="1400" b="1" i="0">
-                <a:solidFill>
-                  <a:srgbClr val="5A6B7B"/>
-                </a:solidFill>
-                <a:latin typeface="NanumGothic"/>
-                <a:ea typeface="NanumGothic"/>
-              </a:rPr>
-              <a:t/>
-            </a:r>
-            <a:r>
-              <a:rPr sz="1400" b="1" i="0">
-                <a:solidFill>
-                  <a:srgbClr val="1F6E70"/>
-                </a:solidFill>
-                <a:latin typeface="NanumGothic"/>
-                <a:ea typeface="NanumGothic"/>
-              </a:rPr>
-              <a:t>‘허혈’은 동맥성 부족을 의미 — 하지정맥류 등 정맥질환은 LSB 적응증 아님(압박·정맥폐색술이 표준).</a:t>
-            </a:r>
-          </a:p>
-        </p:txBody>
-      </p:sp>
-      <p:sp>
-        <p:nvSpPr>
-          <p:cNvPr id="9" name="TextBox 8"/>
-          <p:cNvSpPr txBox="1"/>
-          <p:nvPr/>
-        </p:nvSpPr>
-        <p:spPr>
-          <a:xfrm>
-            <a:off x="731520" y="6455664"/>
-            <a:ext cx="9875520" cy="292608"/>
+            <a:off x="640080" y="5852160"/>
+            <a:ext cx="10927080" cy="457200"/>
           </a:xfrm>
           <a:prstGeom prst="rect">
             <a:avLst/>
@@ -14118,6 +16115,49 @@
           </a:bodyPr>
           <a:lstStyle/>
           <a:p>
+            <a:pPr algn="ctr">
+              <a:lnSpc>
+                <a:spcPct val="108000"/>
+              </a:lnSpc>
+              <a:spcAft>
+                <a:spcPts val="400"/>
+              </a:spcAft>
+            </a:pPr>
+            <a:r>
+              <a:rPr sz="1100" b="1" i="0">
+                <a:solidFill>
+                  <a:srgbClr val="1F6E70"/>
+                </a:solidFill>
+                <a:latin typeface="NanumGothic"/>
+                <a:ea typeface="NanumGothic"/>
+              </a:rPr>
+              <a:t>회피: L2하~L3상 표적·L4 회피·psoas 주입금지·소량 / 발생 시: 대개 수 주 내 자연호전·신경병증통 약물로 대증</a:t>
+            </a:r>
+          </a:p>
+        </p:txBody>
+      </p:sp>
+      <p:sp>
+        <p:nvSpPr>
+          <p:cNvPr id="11" name="TextBox 10"/>
+          <p:cNvSpPr txBox="1"/>
+          <p:nvPr/>
+        </p:nvSpPr>
+        <p:spPr>
+          <a:xfrm>
+            <a:off x="731520" y="6455664"/>
+            <a:ext cx="9875520" cy="292608"/>
+          </a:xfrm>
+          <a:prstGeom prst="rect">
+            <a:avLst/>
+          </a:prstGeom>
+          <a:noFill/>
+        </p:spPr>
+        <p:txBody>
+          <a:bodyPr wrap="square" anchor="ctr" lIns="0" rIns="0" tIns="0" bIns="0">
+            <a:spAutoFit/>
+          </a:bodyPr>
+          <a:lstStyle/>
+          <a:p>
             <a:pPr algn="l">
               <a:lnSpc>
                 <a:spcPct val="108000"/>
@@ -14134,14 +16174,14 @@
                 <a:latin typeface="NanumGothic"/>
                 <a:ea typeface="NanumGothic"/>
               </a:rPr>
-              <a:t>근거: StatPearls; 문헌고찰 종합</a:t>
-            </a:r>
-          </a:p>
-        </p:txBody>
-      </p:sp>
-      <p:sp>
-        <p:nvSpPr>
-          <p:cNvPr id="10" name="TextBox 9"/>
+              <a:t>근거: Feigl 1998(PMID 9425975); StatPearls NBK431107</a:t>
+            </a:r>
+          </a:p>
+        </p:txBody>
+      </p:sp>
+      <p:sp>
+        <p:nvSpPr>
+          <p:cNvPr id="12" name="TextBox 11"/>
           <p:cNvSpPr txBox="1"/>
           <p:nvPr/>
         </p:nvSpPr>

--- a/문헌고찰_NLC_RLS_LSB/03_LSB/LSB_발표.pptx
+++ b/문헌고찰_NLC_RLS_LSB/03_LSB/LSB_발표.pptx
@@ -26,6 +26,7 @@
     <p:sldId id="274" r:id="rId25"/>
     <p:sldId id="275" r:id="rId26"/>
     <p:sldId id="276" r:id="rId27"/>
+    <p:sldId id="277" r:id="rId28"/>
   </p:sldIdLst>
   <p:sldSz cx="12191695" cy="6858000" type="screen4x3"/>
   <p:notesSz cx="6858000" cy="9144000"/>
@@ -3545,6 +3546,50 @@
         </p:nvSpPr>
         <p:spPr>
           <a:xfrm>
+            <a:off x="0" y="0"/>
+            <a:ext cx="12191695" cy="6858000"/>
+          </a:xfrm>
+          <a:prstGeom prst="rect">
+            <a:avLst/>
+          </a:prstGeom>
+          <a:solidFill>
+            <a:srgbClr val="FFFFFF"/>
+          </a:solidFill>
+          <a:ln>
+            <a:noFill/>
+          </a:ln>
+          <a:effectLst/>
+        </p:spPr>
+        <p:style>
+          <a:lnRef idx="1">
+            <a:schemeClr val="accent1"/>
+          </a:lnRef>
+          <a:fillRef idx="3">
+            <a:schemeClr val="accent1"/>
+          </a:fillRef>
+          <a:effectRef idx="2">
+            <a:schemeClr val="accent1"/>
+          </a:effectRef>
+          <a:fontRef idx="minor">
+            <a:schemeClr val="lt1"/>
+          </a:fontRef>
+        </p:style>
+        <p:txBody>
+          <a:bodyPr rtlCol="0" anchor="ctr"/>
+          <a:lstStyle/>
+          <a:p>
+            <a:pPr algn="ctr"/>
+          </a:p>
+        </p:txBody>
+      </p:sp>
+      <p:sp>
+        <p:nvSpPr>
+          <p:cNvPr id="3" name="Rectangle 2"/>
+          <p:cNvSpPr/>
+          <p:nvPr/>
+        </p:nvSpPr>
+        <p:spPr>
+          <a:xfrm>
             <a:off x="502920" y="310896"/>
             <a:ext cx="109728" cy="457200"/>
           </a:xfrm>
@@ -3583,7 +3628,7 @@
       </p:sp>
       <p:sp>
         <p:nvSpPr>
-          <p:cNvPr id="3" name="TextBox 2"/>
+          <p:cNvPr id="4" name="TextBox 3"/>
           <p:cNvSpPr txBox="1"/>
           <p:nvPr/>
         </p:nvSpPr>
@@ -3619,14 +3664,14 @@
                 <a:latin typeface="NanumGothic"/>
                 <a:ea typeface="NanumGothic"/>
               </a:rPr>
-              <a:t>혈관·LAST·신경 손상 — 조기 인지와 대응</a:t>
-            </a:r>
-          </a:p>
-        </p:txBody>
-      </p:sp>
-      <p:sp>
-        <p:nvSpPr>
-          <p:cNvPr id="4" name="TextBox 3"/>
+              <a:t>생식대퇴신경통 — 가장 흔한 걱정, 대부분 회피 가능</a:t>
+            </a:r>
+          </a:p>
+        </p:txBody>
+      </p:sp>
+      <p:sp>
+        <p:nvSpPr>
+          <p:cNvPr id="5" name="TextBox 4"/>
           <p:cNvSpPr txBox="1"/>
           <p:nvPr/>
         </p:nvSpPr>
@@ -3662,14 +3707,14 @@
                 <a:latin typeface="NanumGothic"/>
                 <a:ea typeface="NanumGothic"/>
               </a:rPr>
-              <a:t>합병증 · 대응</a:t>
-            </a:r>
-          </a:p>
-        </p:txBody>
-      </p:sp>
-      <p:sp>
-        <p:nvSpPr>
-          <p:cNvPr id="5" name="Rectangle 4"/>
+              <a:t>합병증 · 심화</a:t>
+            </a:r>
+          </a:p>
+        </p:txBody>
+      </p:sp>
+      <p:sp>
+        <p:nvSpPr>
+          <p:cNvPr id="6" name="Rectangle 5"/>
           <p:cNvSpPr/>
           <p:nvPr/>
         </p:nvSpPr>
@@ -3713,7 +3758,7 @@
       </p:sp>
       <p:sp>
         <p:nvSpPr>
-          <p:cNvPr id="6" name="Rounded Rectangle 5"/>
+          <p:cNvPr id="7" name="Rounded Rectangle 6"/>
           <p:cNvSpPr/>
           <p:nvPr/>
         </p:nvSpPr>
@@ -3728,7 +3773,7 @@
             </a:avLst>
           </a:prstGeom>
           <a:solidFill>
-            <a:srgbClr val="B03A2E"/>
+            <a:srgbClr val="2C898A"/>
           </a:solidFill>
           <a:ln>
             <a:noFill/>
@@ -3759,7 +3804,7 @@
       </p:sp>
       <p:sp>
         <p:nvSpPr>
-          <p:cNvPr id="7" name="TextBox 6"/>
+          <p:cNvPr id="8" name="TextBox 7"/>
           <p:cNvSpPr txBox="1"/>
           <p:nvPr/>
         </p:nvSpPr>
@@ -3795,194 +3840,45 @@
                 <a:latin typeface="NanumGothic"/>
                 <a:ea typeface="NanumGothic"/>
               </a:rPr>
-              <a:t>인지·구조</a:t>
-            </a:r>
-          </a:p>
-        </p:txBody>
-      </p:sp>
-      <p:sp>
-        <p:nvSpPr>
-          <p:cNvPr id="8" name="TextBox 7"/>
+              <a:t>최다 우려</a:t>
+            </a:r>
+          </a:p>
+        </p:txBody>
+      </p:sp>
+      <p:pic>
+        <p:nvPicPr>
+          <p:cNvPr id="9" name="Picture 8" descr="lsb_gf.png"/>
+          <p:cNvPicPr>
+            <a:picLocks noChangeAspect="1"/>
+          </p:cNvPicPr>
+          <p:nvPr/>
+        </p:nvPicPr>
+        <p:blipFill>
+          <a:blip r:embed="rId2"/>
+          <a:stretch>
+            <a:fillRect/>
+          </a:stretch>
+        </p:blipFill>
+        <p:spPr>
+          <a:xfrm>
+            <a:off x="2156145" y="1417320"/>
+            <a:ext cx="7879404" cy="4114800"/>
+          </a:xfrm>
+          <a:prstGeom prst="rect">
+            <a:avLst/>
+          </a:prstGeom>
+        </p:spPr>
+      </p:pic>
+      <p:sp>
+        <p:nvSpPr>
+          <p:cNvPr id="10" name="TextBox 9"/>
           <p:cNvSpPr txBox="1"/>
           <p:nvPr/>
         </p:nvSpPr>
         <p:spPr>
           <a:xfrm>
-            <a:off x="731520" y="1371600"/>
-            <a:ext cx="10835640" cy="4754880"/>
-          </a:xfrm>
-          <a:prstGeom prst="rect">
-            <a:avLst/>
-          </a:prstGeom>
-          <a:noFill/>
-        </p:spPr>
-        <p:txBody>
-          <a:bodyPr wrap="square" lIns="0" rIns="0" tIns="0" bIns="0">
-            <a:spAutoFit/>
-          </a:bodyPr>
-          <a:lstStyle/>
-          <a:p>
-            <a:pPr algn="l">
-              <a:lnSpc>
-                <a:spcPct val="108000"/>
-              </a:lnSpc>
-              <a:spcAft>
-                <a:spcPts val="800"/>
-              </a:spcAft>
-            </a:pPr>
-            <a:r>
-              <a:rPr sz="979" b="1" i="0">
-                <a:solidFill>
-                  <a:srgbClr val="2C898A"/>
-                </a:solidFill>
-                <a:latin typeface="NanumGothic"/>
-                <a:ea typeface="NanumGothic"/>
-              </a:rPr>
-              <a:t>●  </a:t>
-            </a:r>
-            <a:r>
-              <a:rPr sz="1400" b="1" i="0">
-                <a:solidFill>
-                  <a:srgbClr val="B03A2E"/>
-                </a:solidFill>
-                <a:latin typeface="NanumGothic"/>
-                <a:ea typeface="NanumGothic"/>
-              </a:rPr>
-              <a:t>LAST(국소마취제 전신독성): 입 주변 저림·이명·금속맛·어지럼 → 경련·부정맥.</a:t>
-            </a:r>
-          </a:p>
-          <a:p>
-            <a:pPr algn="l">
-              <a:lnSpc>
-                <a:spcPct val="108000"/>
-              </a:lnSpc>
-              <a:spcAft>
-                <a:spcPts val="800"/>
-              </a:spcAft>
-            </a:pPr>
-            <a:r>
-              <a:rPr sz="979" b="1" i="0">
-                <a:solidFill>
-                  <a:srgbClr val="2C898A"/>
-                </a:solidFill>
-                <a:latin typeface="NanumGothic"/>
-                <a:ea typeface="NanumGothic"/>
-              </a:rPr>
-              <a:t>●  </a:t>
-            </a:r>
-            <a:r>
-              <a:rPr sz="1400" b="0" i="0">
-                <a:solidFill>
-                  <a:srgbClr val="1A202C"/>
-                </a:solidFill>
-                <a:latin typeface="NanumGothic"/>
-                <a:ea typeface="NanumGothic"/>
-              </a:rPr>
-              <a:t>대응 — 즉시 중단·산소/기도·경련조절·20% 지질유탁액 정주·소생술. 예방 — 흡인+조영제+분할주입+용량제한.</a:t>
-            </a:r>
-          </a:p>
-          <a:p>
-            <a:pPr algn="l">
-              <a:lnSpc>
-                <a:spcPct val="108000"/>
-              </a:lnSpc>
-              <a:spcAft>
-                <a:spcPts val="800"/>
-              </a:spcAft>
-            </a:pPr>
-            <a:r>
-              <a:rPr sz="979" b="1" i="0">
-                <a:solidFill>
-                  <a:srgbClr val="2C898A"/>
-                </a:solidFill>
-                <a:latin typeface="NanumGothic"/>
-                <a:ea typeface="NanumGothic"/>
-              </a:rPr>
-              <a:t>●  </a:t>
-            </a:r>
-            <a:r>
-              <a:rPr sz="1400" b="0" i="0">
-                <a:solidFill>
-                  <a:srgbClr val="1A202C"/>
-                </a:solidFill>
-                <a:latin typeface="NanumGothic"/>
-                <a:ea typeface="NanumGothic"/>
-              </a:rPr>
-              <a:t>신경·신경축: 주입 중 방사통·하지 위약 → 즉시 중단·재위치. 시술 후 근력·감각 확인.</a:t>
-            </a:r>
-          </a:p>
-          <a:p>
-            <a:pPr algn="l">
-              <a:lnSpc>
-                <a:spcPct val="108000"/>
-              </a:lnSpc>
-              <a:spcAft>
-                <a:spcPts val="800"/>
-              </a:spcAft>
-            </a:pPr>
-            <a:r>
-              <a:rPr sz="979" b="1" i="0">
-                <a:solidFill>
-                  <a:srgbClr val="2C898A"/>
-                </a:solidFill>
-                <a:latin typeface="NanumGothic"/>
-                <a:ea typeface="NanumGothic"/>
-              </a:rPr>
-              <a:t>●  </a:t>
-            </a:r>
-            <a:r>
-              <a:rPr sz="1400" b="0" i="0">
-                <a:solidFill>
-                  <a:srgbClr val="1A202C"/>
-                </a:solidFill>
-                <a:latin typeface="NanumGothic"/>
-                <a:ea typeface="NanumGothic"/>
-              </a:rPr>
-              <a:t>출혈·감염: 항응고 중단·무균술 · 심한 통증·발열·팽창 시 즉시 평가.</a:t>
-            </a:r>
-          </a:p>
-          <a:p>
-            <a:pPr algn="l">
-              <a:lnSpc>
-                <a:spcPct val="108000"/>
-              </a:lnSpc>
-              <a:spcAft>
-                <a:spcPts val="800"/>
-              </a:spcAft>
-            </a:pPr>
-            <a:r>
-              <a:rPr sz="1400" b="1" i="0">
-                <a:solidFill>
-                  <a:srgbClr val="5A6B7B"/>
-                </a:solidFill>
-                <a:latin typeface="NanumGothic"/>
-                <a:ea typeface="NanumGothic"/>
-              </a:rPr>
-              <a:t/>
-            </a:r>
-            <a:r>
-              <a:rPr sz="1400" b="1" i="0">
-                <a:solidFill>
-                  <a:srgbClr val="1F6E70"/>
-                </a:solidFill>
-                <a:latin typeface="NanumGothic"/>
-                <a:ea typeface="NanumGothic"/>
-              </a:rPr>
-              <a:t>준비된 상태(모니터·정맥로·지질유탁액)면 대부분 안전하게 관리된다.</a:t>
-            </a:r>
-          </a:p>
-        </p:txBody>
-      </p:sp>
-      <p:sp>
-        <p:nvSpPr>
-          <p:cNvPr id="9" name="TextBox 8"/>
-          <p:cNvSpPr txBox="1"/>
-          <p:nvPr/>
-        </p:nvSpPr>
-        <p:spPr>
-          <a:xfrm>
-            <a:off x="731520" y="6455664"/>
-            <a:ext cx="9875520" cy="292608"/>
+            <a:off x="640080" y="5852160"/>
+            <a:ext cx="10927080" cy="457200"/>
           </a:xfrm>
           <a:prstGeom prst="rect">
             <a:avLst/>
@@ -3995,6 +3891,49 @@
           </a:bodyPr>
           <a:lstStyle/>
           <a:p>
+            <a:pPr algn="ctr">
+              <a:lnSpc>
+                <a:spcPct val="108000"/>
+              </a:lnSpc>
+              <a:spcAft>
+                <a:spcPts val="400"/>
+              </a:spcAft>
+            </a:pPr>
+            <a:r>
+              <a:rPr sz="1100" b="1" i="0">
+                <a:solidFill>
+                  <a:srgbClr val="1F6E70"/>
+                </a:solidFill>
+                <a:latin typeface="NanumGothic"/>
+                <a:ea typeface="NanumGothic"/>
+              </a:rPr>
+              <a:t>회피: L2하~L3상 표적·L4 회피·psoas 주입금지·소량 / 발생 시: 대개 수 주 내 자연호전·신경병증통 약물로 대증</a:t>
+            </a:r>
+          </a:p>
+        </p:txBody>
+      </p:sp>
+      <p:sp>
+        <p:nvSpPr>
+          <p:cNvPr id="11" name="TextBox 10"/>
+          <p:cNvSpPr txBox="1"/>
+          <p:nvPr/>
+        </p:nvSpPr>
+        <p:spPr>
+          <a:xfrm>
+            <a:off x="731520" y="6455664"/>
+            <a:ext cx="9875520" cy="292608"/>
+          </a:xfrm>
+          <a:prstGeom prst="rect">
+            <a:avLst/>
+          </a:prstGeom>
+          <a:noFill/>
+        </p:spPr>
+        <p:txBody>
+          <a:bodyPr wrap="square" anchor="ctr" lIns="0" rIns="0" tIns="0" bIns="0">
+            <a:spAutoFit/>
+          </a:bodyPr>
+          <a:lstStyle/>
+          <a:p>
             <a:pPr algn="l">
               <a:lnSpc>
                 <a:spcPct val="108000"/>
@@ -4011,14 +3950,14 @@
                 <a:latin typeface="NanumGothic"/>
                 <a:ea typeface="NanumGothic"/>
               </a:rPr>
-              <a:t>근거: ASRA LAST 지침 · StatPearls NBK431107</a:t>
-            </a:r>
-          </a:p>
-        </p:txBody>
-      </p:sp>
-      <p:sp>
-        <p:nvSpPr>
-          <p:cNvPr id="10" name="TextBox 9"/>
+              <a:t>근거: Feigl 1998(PMID 9425975); StatPearls NBK431107</a:t>
+            </a:r>
+          </a:p>
+        </p:txBody>
+      </p:sp>
+      <p:sp>
+        <p:nvSpPr>
+          <p:cNvPr id="12" name="TextBox 11"/>
           <p:cNvSpPr txBox="1"/>
           <p:nvPr/>
         </p:nvSpPr>
@@ -4159,7 +4098,7 @@
                 <a:latin typeface="NanumGothic"/>
                 <a:ea typeface="NanumGothic"/>
               </a:rPr>
-              <a:t>합병증 대비 — 준비·조기인지·환자설명</a:t>
+              <a:t>혈관·LAST·신경 손상 — 조기 인지와 대응</a:t>
             </a:r>
           </a:p>
         </p:txBody>
@@ -4202,7 +4141,7 @@
                 <a:latin typeface="NanumGothic"/>
                 <a:ea typeface="NanumGothic"/>
               </a:rPr>
-              <a:t>합병증 · 대비</a:t>
+              <a:t>합병증 · 대응</a:t>
             </a:r>
           </a:p>
         </p:txBody>
@@ -4268,7 +4207,7 @@
             </a:avLst>
           </a:prstGeom>
           <a:solidFill>
-            <a:srgbClr val="1A202C"/>
+            <a:srgbClr val="B03A2E"/>
           </a:solidFill>
           <a:ln>
             <a:noFill/>
@@ -4335,7 +4274,7 @@
                 <a:latin typeface="NanumGothic"/>
                 <a:ea typeface="NanumGothic"/>
               </a:rPr>
-              <a:t>환자 안심</a:t>
+              <a:t>인지·구조</a:t>
             </a:r>
           </a:p>
         </p:txBody>
@@ -4383,12 +4322,42 @@
             <a:r>
               <a:rPr sz="1400" b="1" i="0">
                 <a:solidFill>
+                  <a:srgbClr val="B03A2E"/>
+                </a:solidFill>
+                <a:latin typeface="NanumGothic"/>
+                <a:ea typeface="NanumGothic"/>
+              </a:rPr>
+              <a:t>LAST(국소마취제 전신독성): 입 주변 저림·이명·금속맛·어지럼 → 경련·부정맥.</a:t>
+            </a:r>
+          </a:p>
+          <a:p>
+            <a:pPr algn="l">
+              <a:lnSpc>
+                <a:spcPct val="108000"/>
+              </a:lnSpc>
+              <a:spcAft>
+                <a:spcPts val="800"/>
+              </a:spcAft>
+            </a:pPr>
+            <a:r>
+              <a:rPr sz="979" b="1" i="0">
+                <a:solidFill>
+                  <a:srgbClr val="2C898A"/>
+                </a:solidFill>
+                <a:latin typeface="NanumGothic"/>
+                <a:ea typeface="NanumGothic"/>
+              </a:rPr>
+              <a:t>●  </a:t>
+            </a:r>
+            <a:r>
+              <a:rPr sz="1400" b="0" i="0">
+                <a:solidFill>
                   <a:srgbClr val="1A202C"/>
                 </a:solidFill>
                 <a:latin typeface="NanumGothic"/>
                 <a:ea typeface="NanumGothic"/>
               </a:rPr>
-              <a:t>대부분 경미·자가회복 — 심각 합병증은 영상유도·정확한 술기로 드묾.</a:t>
+              <a:t>대응 — 즉시 중단·산소/기도·경련조절·20% 지질유탁액 정주·소생술. 예방 — 흡인+조영제+분할주입+용량제한.</a:t>
             </a:r>
           </a:p>
           <a:p>
@@ -4418,7 +4387,7 @@
                 <a:latin typeface="NanumGothic"/>
                 <a:ea typeface="NanumGothic"/>
               </a:rPr>
-              <a:t>준비: 모니터·정맥로·응급장비·20% 지질유탁액 구비, 소생 프로토콜 숙지.</a:t>
+              <a:t>신경·신경축: 주입 중 방사통·하지 위약 → 즉시 중단·재위치. 시술 후 근력·감각 확인.</a:t>
             </a:r>
           </a:p>
           <a:p>
@@ -4448,7 +4417,7 @@
                 <a:latin typeface="NanumGothic"/>
                 <a:ea typeface="NanumGothic"/>
               </a:rPr>
-              <a:t>조기 인지: 조영제 패턴 + 환자 증상(통증·저림·어지럼)을 실시간 관찰.</a:t>
+              <a:t>출혈·감염: 항응고 중단·무균술 · 심한 통증·발열·팽창 시 즉시 평가.</a:t>
             </a:r>
           </a:p>
           <a:p>
@@ -4461,36 +4430,6 @@
               </a:spcAft>
             </a:pPr>
             <a:r>
-              <a:rPr sz="979" b="1" i="0">
-                <a:solidFill>
-                  <a:srgbClr val="2C898A"/>
-                </a:solidFill>
-                <a:latin typeface="NanumGothic"/>
-                <a:ea typeface="NanumGothic"/>
-              </a:rPr>
-              <a:t>●  </a:t>
-            </a:r>
-            <a:r>
-              <a:rPr sz="1400" b="0" i="0">
-                <a:solidFill>
-                  <a:srgbClr val="1A202C"/>
-                </a:solidFill>
-                <a:latin typeface="NanumGothic"/>
-                <a:ea typeface="NanumGothic"/>
-              </a:rPr>
-              <a:t>환자 설명(동의): 흔한 것(일시적 저림·주사부위통·저혈압) vs 드문 것(신경통·출혈)을 사전 고지 → 신뢰·불안↓.</a:t>
-            </a:r>
-          </a:p>
-          <a:p>
-            <a:pPr algn="l">
-              <a:lnSpc>
-                <a:spcPct val="108000"/>
-              </a:lnSpc>
-              <a:spcAft>
-                <a:spcPts val="800"/>
-              </a:spcAft>
-            </a:pPr>
-            <a:r>
               <a:rPr sz="1400" b="1" i="0">
                 <a:solidFill>
                   <a:srgbClr val="5A6B7B"/>
@@ -4508,7 +4447,7 @@
                 <a:latin typeface="NanumGothic"/>
                 <a:ea typeface="NanumGothic"/>
               </a:rPr>
-              <a:t>신경파괴는 진단차단 양성 시에만·소량 — 위해를 최소화.</a:t>
+              <a:t>준비된 상태(모니터·정맥로·지질유탁액)면 대부분 안전하게 관리된다.</a:t>
             </a:r>
           </a:p>
         </p:txBody>
@@ -4551,7 +4490,7 @@
                 <a:latin typeface="NanumGothic"/>
                 <a:ea typeface="NanumGothic"/>
               </a:rPr>
-              <a:t>근거: 교육용 정리</a:t>
+              <a:t>근거: ASRA LAST 지침 · StatPearls NBK431107</a:t>
             </a:r>
           </a:p>
         </p:txBody>
@@ -4608,6 +4547,546 @@
 </file>
 
 <file path=ppt/slides/slide12.xml><?xml version="1.0" encoding="utf-8"?>
+<p:sld xmlns:a="http://schemas.openxmlformats.org/drawingml/2006/main" xmlns:p="http://schemas.openxmlformats.org/presentationml/2006/main" xmlns:r="http://schemas.openxmlformats.org/officeDocument/2006/relationships">
+  <p:cSld>
+    <p:spTree>
+      <p:nvGrpSpPr>
+        <p:cNvPr id="1" name=""/>
+        <p:cNvGrpSpPr/>
+        <p:nvPr/>
+      </p:nvGrpSpPr>
+      <p:grpSpPr/>
+      <p:sp>
+        <p:nvSpPr>
+          <p:cNvPr id="2" name="Rectangle 1"/>
+          <p:cNvSpPr/>
+          <p:nvPr/>
+        </p:nvSpPr>
+        <p:spPr>
+          <a:xfrm>
+            <a:off x="502920" y="310896"/>
+            <a:ext cx="109728" cy="457200"/>
+          </a:xfrm>
+          <a:prstGeom prst="rect">
+            <a:avLst/>
+          </a:prstGeom>
+          <a:solidFill>
+            <a:srgbClr val="2C898A"/>
+          </a:solidFill>
+          <a:ln>
+            <a:noFill/>
+          </a:ln>
+          <a:effectLst/>
+        </p:spPr>
+        <p:style>
+          <a:lnRef idx="1">
+            <a:schemeClr val="accent1"/>
+          </a:lnRef>
+          <a:fillRef idx="3">
+            <a:schemeClr val="accent1"/>
+          </a:fillRef>
+          <a:effectRef idx="2">
+            <a:schemeClr val="accent1"/>
+          </a:effectRef>
+          <a:fontRef idx="minor">
+            <a:schemeClr val="lt1"/>
+          </a:fontRef>
+        </p:style>
+        <p:txBody>
+          <a:bodyPr rtlCol="0" anchor="ctr"/>
+          <a:lstStyle/>
+          <a:p>
+            <a:pPr algn="ctr"/>
+          </a:p>
+        </p:txBody>
+      </p:sp>
+      <p:sp>
+        <p:nvSpPr>
+          <p:cNvPr id="3" name="TextBox 2"/>
+          <p:cNvSpPr txBox="1"/>
+          <p:nvPr/>
+        </p:nvSpPr>
+        <p:spPr>
+          <a:xfrm>
+            <a:off x="731520" y="237744"/>
+            <a:ext cx="9509760" cy="685800"/>
+          </a:xfrm>
+          <a:prstGeom prst="rect">
+            <a:avLst/>
+          </a:prstGeom>
+          <a:noFill/>
+        </p:spPr>
+        <p:txBody>
+          <a:bodyPr wrap="square" anchor="ctr" lIns="0" rIns="0" tIns="0" bIns="0">
+            <a:spAutoFit/>
+          </a:bodyPr>
+          <a:lstStyle/>
+          <a:p>
+            <a:pPr algn="l">
+              <a:lnSpc>
+                <a:spcPct val="108000"/>
+              </a:lnSpc>
+              <a:spcAft>
+                <a:spcPts val="400"/>
+              </a:spcAft>
+            </a:pPr>
+            <a:r>
+              <a:rPr sz="2400" b="1" i="0">
+                <a:solidFill>
+                  <a:srgbClr val="1B355E"/>
+                </a:solidFill>
+                <a:latin typeface="NanumGothic"/>
+                <a:ea typeface="NanumGothic"/>
+              </a:rPr>
+              <a:t>합병증 대비 — 준비·조기인지·환자설명</a:t>
+            </a:r>
+          </a:p>
+        </p:txBody>
+      </p:sp>
+      <p:sp>
+        <p:nvSpPr>
+          <p:cNvPr id="4" name="TextBox 3"/>
+          <p:cNvSpPr txBox="1"/>
+          <p:nvPr/>
+        </p:nvSpPr>
+        <p:spPr>
+          <a:xfrm>
+            <a:off x="749808" y="109728"/>
+            <a:ext cx="7315200" cy="219456"/>
+          </a:xfrm>
+          <a:prstGeom prst="rect">
+            <a:avLst/>
+          </a:prstGeom>
+          <a:noFill/>
+        </p:spPr>
+        <p:txBody>
+          <a:bodyPr wrap="square" anchor="t" lIns="0" rIns="0" tIns="0" bIns="0">
+            <a:spAutoFit/>
+          </a:bodyPr>
+          <a:lstStyle/>
+          <a:p>
+            <a:pPr algn="l">
+              <a:lnSpc>
+                <a:spcPct val="108000"/>
+              </a:lnSpc>
+              <a:spcAft>
+                <a:spcPts val="400"/>
+              </a:spcAft>
+            </a:pPr>
+            <a:r>
+              <a:rPr sz="1100" b="1" i="0">
+                <a:solidFill>
+                  <a:srgbClr val="1F6E70"/>
+                </a:solidFill>
+                <a:latin typeface="NanumGothic"/>
+                <a:ea typeface="NanumGothic"/>
+              </a:rPr>
+              <a:t>합병증 · 대비</a:t>
+            </a:r>
+          </a:p>
+        </p:txBody>
+      </p:sp>
+      <p:sp>
+        <p:nvSpPr>
+          <p:cNvPr id="5" name="Rectangle 4"/>
+          <p:cNvSpPr/>
+          <p:nvPr/>
+        </p:nvSpPr>
+        <p:spPr>
+          <a:xfrm>
+            <a:off x="731520" y="969264"/>
+            <a:ext cx="10881360" cy="17780"/>
+          </a:xfrm>
+          <a:prstGeom prst="rect">
+            <a:avLst/>
+          </a:prstGeom>
+          <a:solidFill>
+            <a:srgbClr val="D5DEE7"/>
+          </a:solidFill>
+          <a:ln>
+            <a:noFill/>
+          </a:ln>
+          <a:effectLst/>
+        </p:spPr>
+        <p:style>
+          <a:lnRef idx="1">
+            <a:schemeClr val="accent1"/>
+          </a:lnRef>
+          <a:fillRef idx="3">
+            <a:schemeClr val="accent1"/>
+          </a:fillRef>
+          <a:effectRef idx="2">
+            <a:schemeClr val="accent1"/>
+          </a:effectRef>
+          <a:fontRef idx="minor">
+            <a:schemeClr val="lt1"/>
+          </a:fontRef>
+        </p:style>
+        <p:txBody>
+          <a:bodyPr rtlCol="0" anchor="ctr"/>
+          <a:lstStyle/>
+          <a:p>
+            <a:pPr algn="ctr"/>
+          </a:p>
+        </p:txBody>
+      </p:sp>
+      <p:sp>
+        <p:nvSpPr>
+          <p:cNvPr id="6" name="Rounded Rectangle 5"/>
+          <p:cNvSpPr/>
+          <p:nvPr/>
+        </p:nvSpPr>
+        <p:spPr>
+          <a:xfrm>
+            <a:off x="10865816" y="365760"/>
+            <a:ext cx="822959" cy="347472"/>
+          </a:xfrm>
+          <a:prstGeom prst="roundRect">
+            <a:avLst>
+              <a:gd name="adj" fmla="val 8000"/>
+            </a:avLst>
+          </a:prstGeom>
+          <a:solidFill>
+            <a:srgbClr val="1A202C"/>
+          </a:solidFill>
+          <a:ln>
+            <a:noFill/>
+          </a:ln>
+          <a:effectLst/>
+        </p:spPr>
+        <p:style>
+          <a:lnRef idx="1">
+            <a:schemeClr val="accent1"/>
+          </a:lnRef>
+          <a:fillRef idx="3">
+            <a:schemeClr val="accent1"/>
+          </a:fillRef>
+          <a:effectRef idx="2">
+            <a:schemeClr val="accent1"/>
+          </a:effectRef>
+          <a:fontRef idx="minor">
+            <a:schemeClr val="lt1"/>
+          </a:fontRef>
+        </p:style>
+        <p:txBody>
+          <a:bodyPr rtlCol="0" anchor="ctr"/>
+          <a:lstStyle/>
+          <a:p>
+            <a:pPr algn="ctr"/>
+          </a:p>
+        </p:txBody>
+      </p:sp>
+      <p:sp>
+        <p:nvSpPr>
+          <p:cNvPr id="7" name="TextBox 6"/>
+          <p:cNvSpPr txBox="1"/>
+          <p:nvPr/>
+        </p:nvSpPr>
+        <p:spPr>
+          <a:xfrm>
+            <a:off x="10865816" y="365760"/>
+            <a:ext cx="822959" cy="347472"/>
+          </a:xfrm>
+          <a:prstGeom prst="rect">
+            <a:avLst/>
+          </a:prstGeom>
+          <a:noFill/>
+        </p:spPr>
+        <p:txBody>
+          <a:bodyPr wrap="square" anchor="ctr" lIns="0" rIns="0" tIns="0" bIns="0">
+            <a:spAutoFit/>
+          </a:bodyPr>
+          <a:lstStyle/>
+          <a:p>
+            <a:pPr algn="ctr">
+              <a:lnSpc>
+                <a:spcPct val="108000"/>
+              </a:lnSpc>
+              <a:spcAft>
+                <a:spcPts val="400"/>
+              </a:spcAft>
+            </a:pPr>
+            <a:r>
+              <a:rPr sz="1150" b="1" i="0">
+                <a:solidFill>
+                  <a:srgbClr val="FFFFFF"/>
+                </a:solidFill>
+                <a:latin typeface="NanumGothic"/>
+                <a:ea typeface="NanumGothic"/>
+              </a:rPr>
+              <a:t>환자 안심</a:t>
+            </a:r>
+          </a:p>
+        </p:txBody>
+      </p:sp>
+      <p:sp>
+        <p:nvSpPr>
+          <p:cNvPr id="8" name="TextBox 7"/>
+          <p:cNvSpPr txBox="1"/>
+          <p:nvPr/>
+        </p:nvSpPr>
+        <p:spPr>
+          <a:xfrm>
+            <a:off x="731520" y="1371600"/>
+            <a:ext cx="10835640" cy="4754880"/>
+          </a:xfrm>
+          <a:prstGeom prst="rect">
+            <a:avLst/>
+          </a:prstGeom>
+          <a:noFill/>
+        </p:spPr>
+        <p:txBody>
+          <a:bodyPr wrap="square" lIns="0" rIns="0" tIns="0" bIns="0">
+            <a:spAutoFit/>
+          </a:bodyPr>
+          <a:lstStyle/>
+          <a:p>
+            <a:pPr algn="l">
+              <a:lnSpc>
+                <a:spcPct val="108000"/>
+              </a:lnSpc>
+              <a:spcAft>
+                <a:spcPts val="800"/>
+              </a:spcAft>
+            </a:pPr>
+            <a:r>
+              <a:rPr sz="979" b="1" i="0">
+                <a:solidFill>
+                  <a:srgbClr val="2C898A"/>
+                </a:solidFill>
+                <a:latin typeface="NanumGothic"/>
+                <a:ea typeface="NanumGothic"/>
+              </a:rPr>
+              <a:t>●  </a:t>
+            </a:r>
+            <a:r>
+              <a:rPr sz="1400" b="1" i="0">
+                <a:solidFill>
+                  <a:srgbClr val="1A202C"/>
+                </a:solidFill>
+                <a:latin typeface="NanumGothic"/>
+                <a:ea typeface="NanumGothic"/>
+              </a:rPr>
+              <a:t>대부분 경미·자가회복 — 심각 합병증은 영상유도·정확한 술기로 드묾.</a:t>
+            </a:r>
+          </a:p>
+          <a:p>
+            <a:pPr algn="l">
+              <a:lnSpc>
+                <a:spcPct val="108000"/>
+              </a:lnSpc>
+              <a:spcAft>
+                <a:spcPts val="800"/>
+              </a:spcAft>
+            </a:pPr>
+            <a:r>
+              <a:rPr sz="979" b="1" i="0">
+                <a:solidFill>
+                  <a:srgbClr val="2C898A"/>
+                </a:solidFill>
+                <a:latin typeface="NanumGothic"/>
+                <a:ea typeface="NanumGothic"/>
+              </a:rPr>
+              <a:t>●  </a:t>
+            </a:r>
+            <a:r>
+              <a:rPr sz="1400" b="0" i="0">
+                <a:solidFill>
+                  <a:srgbClr val="1A202C"/>
+                </a:solidFill>
+                <a:latin typeface="NanumGothic"/>
+                <a:ea typeface="NanumGothic"/>
+              </a:rPr>
+              <a:t>준비: 모니터·정맥로·응급장비·20% 지질유탁액 구비, 소생 프로토콜 숙지.</a:t>
+            </a:r>
+          </a:p>
+          <a:p>
+            <a:pPr algn="l">
+              <a:lnSpc>
+                <a:spcPct val="108000"/>
+              </a:lnSpc>
+              <a:spcAft>
+                <a:spcPts val="800"/>
+              </a:spcAft>
+            </a:pPr>
+            <a:r>
+              <a:rPr sz="979" b="1" i="0">
+                <a:solidFill>
+                  <a:srgbClr val="2C898A"/>
+                </a:solidFill>
+                <a:latin typeface="NanumGothic"/>
+                <a:ea typeface="NanumGothic"/>
+              </a:rPr>
+              <a:t>●  </a:t>
+            </a:r>
+            <a:r>
+              <a:rPr sz="1400" b="0" i="0">
+                <a:solidFill>
+                  <a:srgbClr val="1A202C"/>
+                </a:solidFill>
+                <a:latin typeface="NanumGothic"/>
+                <a:ea typeface="NanumGothic"/>
+              </a:rPr>
+              <a:t>조기 인지: 조영제 패턴 + 환자 증상(통증·저림·어지럼)을 실시간 관찰.</a:t>
+            </a:r>
+          </a:p>
+          <a:p>
+            <a:pPr algn="l">
+              <a:lnSpc>
+                <a:spcPct val="108000"/>
+              </a:lnSpc>
+              <a:spcAft>
+                <a:spcPts val="800"/>
+              </a:spcAft>
+            </a:pPr>
+            <a:r>
+              <a:rPr sz="979" b="1" i="0">
+                <a:solidFill>
+                  <a:srgbClr val="2C898A"/>
+                </a:solidFill>
+                <a:latin typeface="NanumGothic"/>
+                <a:ea typeface="NanumGothic"/>
+              </a:rPr>
+              <a:t>●  </a:t>
+            </a:r>
+            <a:r>
+              <a:rPr sz="1400" b="0" i="0">
+                <a:solidFill>
+                  <a:srgbClr val="1A202C"/>
+                </a:solidFill>
+                <a:latin typeface="NanumGothic"/>
+                <a:ea typeface="NanumGothic"/>
+              </a:rPr>
+              <a:t>환자 설명(동의): 흔한 것(일시적 저림·주사부위통·저혈압) vs 드문 것(신경통·출혈)을 사전 고지 → 신뢰·불안↓.</a:t>
+            </a:r>
+          </a:p>
+          <a:p>
+            <a:pPr algn="l">
+              <a:lnSpc>
+                <a:spcPct val="108000"/>
+              </a:lnSpc>
+              <a:spcAft>
+                <a:spcPts val="800"/>
+              </a:spcAft>
+            </a:pPr>
+            <a:r>
+              <a:rPr sz="1400" b="1" i="0">
+                <a:solidFill>
+                  <a:srgbClr val="5A6B7B"/>
+                </a:solidFill>
+                <a:latin typeface="NanumGothic"/>
+                <a:ea typeface="NanumGothic"/>
+              </a:rPr>
+              <a:t/>
+            </a:r>
+            <a:r>
+              <a:rPr sz="1400" b="1" i="0">
+                <a:solidFill>
+                  <a:srgbClr val="1F6E70"/>
+                </a:solidFill>
+                <a:latin typeface="NanumGothic"/>
+                <a:ea typeface="NanumGothic"/>
+              </a:rPr>
+              <a:t>신경파괴는 진단차단 양성 시에만·소량 — 위해를 최소화.</a:t>
+            </a:r>
+          </a:p>
+        </p:txBody>
+      </p:sp>
+      <p:sp>
+        <p:nvSpPr>
+          <p:cNvPr id="9" name="TextBox 8"/>
+          <p:cNvSpPr txBox="1"/>
+          <p:nvPr/>
+        </p:nvSpPr>
+        <p:spPr>
+          <a:xfrm>
+            <a:off x="731520" y="6455664"/>
+            <a:ext cx="9875520" cy="292608"/>
+          </a:xfrm>
+          <a:prstGeom prst="rect">
+            <a:avLst/>
+          </a:prstGeom>
+          <a:noFill/>
+        </p:spPr>
+        <p:txBody>
+          <a:bodyPr wrap="square" anchor="ctr" lIns="0" rIns="0" tIns="0" bIns="0">
+            <a:spAutoFit/>
+          </a:bodyPr>
+          <a:lstStyle/>
+          <a:p>
+            <a:pPr algn="l">
+              <a:lnSpc>
+                <a:spcPct val="108000"/>
+              </a:lnSpc>
+              <a:spcAft>
+                <a:spcPts val="400"/>
+              </a:spcAft>
+            </a:pPr>
+            <a:r>
+              <a:rPr sz="900" b="0" i="0">
+                <a:solidFill>
+                  <a:srgbClr val="5A6B7B"/>
+                </a:solidFill>
+                <a:latin typeface="NanumGothic"/>
+                <a:ea typeface="NanumGothic"/>
+              </a:rPr>
+              <a:t>근거: 교육용 정리</a:t>
+            </a:r>
+          </a:p>
+        </p:txBody>
+      </p:sp>
+      <p:sp>
+        <p:nvSpPr>
+          <p:cNvPr id="10" name="TextBox 9"/>
+          <p:cNvSpPr txBox="1"/>
+          <p:nvPr/>
+        </p:nvSpPr>
+        <p:spPr>
+          <a:xfrm>
+            <a:off x="11064240" y="6455664"/>
+            <a:ext cx="822960" cy="292608"/>
+          </a:xfrm>
+          <a:prstGeom prst="rect">
+            <a:avLst/>
+          </a:prstGeom>
+          <a:noFill/>
+        </p:spPr>
+        <p:txBody>
+          <a:bodyPr wrap="square" anchor="ctr" lIns="0" rIns="0" tIns="0" bIns="0">
+            <a:spAutoFit/>
+          </a:bodyPr>
+          <a:lstStyle/>
+          <a:p>
+            <a:pPr algn="r">
+              <a:lnSpc>
+                <a:spcPct val="108000"/>
+              </a:lnSpc>
+              <a:spcAft>
+                <a:spcPts val="400"/>
+              </a:spcAft>
+            </a:pPr>
+            <a:r>
+              <a:rPr sz="1000" b="1" i="0">
+                <a:solidFill>
+                  <a:srgbClr val="5A6B7B"/>
+                </a:solidFill>
+                <a:latin typeface="NanumGothic"/>
+                <a:ea typeface="NanumGothic"/>
+              </a:rPr>
+              <a:t>12</a:t>
+            </a:r>
+          </a:p>
+        </p:txBody>
+      </p:sp>
+    </p:spTree>
+  </p:cSld>
+  <p:clrMapOvr>
+    <a:masterClrMapping/>
+  </p:clrMapOvr>
+</p:sld>
+</file>
+
+<file path=ppt/slides/slide13.xml><?xml version="1.0" encoding="utf-8"?>
 <p:sld xmlns:a="http://schemas.openxmlformats.org/drawingml/2006/main" xmlns:p="http://schemas.openxmlformats.org/presentationml/2006/main" xmlns:r="http://schemas.openxmlformats.org/officeDocument/2006/relationships">
   <p:cSld>
     <p:spTree>
@@ -5280,606 +5759,6 @@
                 <a:latin typeface="NanumGothic"/>
                 <a:ea typeface="NanumGothic"/>
               </a:rPr>
-              <a:t>12</a:t>
-            </a:r>
-          </a:p>
-        </p:txBody>
-      </p:sp>
-    </p:spTree>
-  </p:cSld>
-  <p:clrMapOvr>
-    <a:masterClrMapping/>
-  </p:clrMapOvr>
-</p:sld>
-</file>
-
-<file path=ppt/slides/slide13.xml><?xml version="1.0" encoding="utf-8"?>
-<p:sld xmlns:a="http://schemas.openxmlformats.org/drawingml/2006/main" xmlns:p="http://schemas.openxmlformats.org/presentationml/2006/main" xmlns:r="http://schemas.openxmlformats.org/officeDocument/2006/relationships">
-  <p:cSld>
-    <p:spTree>
-      <p:nvGrpSpPr>
-        <p:cNvPr id="1" name=""/>
-        <p:cNvGrpSpPr/>
-        <p:nvPr/>
-      </p:nvGrpSpPr>
-      <p:grpSpPr/>
-      <p:sp>
-        <p:nvSpPr>
-          <p:cNvPr id="2" name="Rectangle 1"/>
-          <p:cNvSpPr/>
-          <p:nvPr/>
-        </p:nvSpPr>
-        <p:spPr>
-          <a:xfrm>
-            <a:off x="502920" y="310896"/>
-            <a:ext cx="109728" cy="457200"/>
-          </a:xfrm>
-          <a:prstGeom prst="rect">
-            <a:avLst/>
-          </a:prstGeom>
-          <a:solidFill>
-            <a:srgbClr val="2C898A"/>
-          </a:solidFill>
-          <a:ln>
-            <a:noFill/>
-          </a:ln>
-          <a:effectLst/>
-        </p:spPr>
-        <p:style>
-          <a:lnRef idx="1">
-            <a:schemeClr val="accent1"/>
-          </a:lnRef>
-          <a:fillRef idx="3">
-            <a:schemeClr val="accent1"/>
-          </a:fillRef>
-          <a:effectRef idx="2">
-            <a:schemeClr val="accent1"/>
-          </a:effectRef>
-          <a:fontRef idx="minor">
-            <a:schemeClr val="lt1"/>
-          </a:fontRef>
-        </p:style>
-        <p:txBody>
-          <a:bodyPr rtlCol="0" anchor="ctr"/>
-          <a:lstStyle/>
-          <a:p>
-            <a:pPr algn="ctr"/>
-          </a:p>
-        </p:txBody>
-      </p:sp>
-      <p:sp>
-        <p:nvSpPr>
-          <p:cNvPr id="3" name="TextBox 2"/>
-          <p:cNvSpPr txBox="1"/>
-          <p:nvPr/>
-        </p:nvSpPr>
-        <p:spPr>
-          <a:xfrm>
-            <a:off x="731520" y="237744"/>
-            <a:ext cx="9509760" cy="685800"/>
-          </a:xfrm>
-          <a:prstGeom prst="rect">
-            <a:avLst/>
-          </a:prstGeom>
-          <a:noFill/>
-        </p:spPr>
-        <p:txBody>
-          <a:bodyPr wrap="square" anchor="ctr" lIns="0" rIns="0" tIns="0" bIns="0">
-            <a:spAutoFit/>
-          </a:bodyPr>
-          <a:lstStyle/>
-          <a:p>
-            <a:pPr algn="l">
-              <a:lnSpc>
-                <a:spcPct val="108000"/>
-              </a:lnSpc>
-              <a:spcAft>
-                <a:spcPts val="400"/>
-              </a:spcAft>
-            </a:pPr>
-            <a:r>
-              <a:rPr sz="2400" b="1" i="0">
-                <a:solidFill>
-                  <a:srgbClr val="1B355E"/>
-                </a:solidFill>
-                <a:latin typeface="NanumGothic"/>
-                <a:ea typeface="NanumGothic"/>
-              </a:rPr>
-              <a:t>적응증별 환자 증상·호소 ① — 통증증후군·허혈</a:t>
-            </a:r>
-          </a:p>
-        </p:txBody>
-      </p:sp>
-      <p:sp>
-        <p:nvSpPr>
-          <p:cNvPr id="4" name="TextBox 3"/>
-          <p:cNvSpPr txBox="1"/>
-          <p:nvPr/>
-        </p:nvSpPr>
-        <p:spPr>
-          <a:xfrm>
-            <a:off x="749808" y="109728"/>
-            <a:ext cx="7315200" cy="219456"/>
-          </a:xfrm>
-          <a:prstGeom prst="rect">
-            <a:avLst/>
-          </a:prstGeom>
-          <a:noFill/>
-        </p:spPr>
-        <p:txBody>
-          <a:bodyPr wrap="square" anchor="t" lIns="0" rIns="0" tIns="0" bIns="0">
-            <a:spAutoFit/>
-          </a:bodyPr>
-          <a:lstStyle/>
-          <a:p>
-            <a:pPr algn="l">
-              <a:lnSpc>
-                <a:spcPct val="108000"/>
-              </a:lnSpc>
-              <a:spcAft>
-                <a:spcPts val="400"/>
-              </a:spcAft>
-            </a:pPr>
-            <a:r>
-              <a:rPr sz="1100" b="1" i="0">
-                <a:solidFill>
-                  <a:srgbClr val="1F6E70"/>
-                </a:solidFill>
-                <a:latin typeface="NanumGothic"/>
-                <a:ea typeface="NanumGothic"/>
-              </a:rPr>
-              <a:t>적응증 · 증상</a:t>
-            </a:r>
-          </a:p>
-        </p:txBody>
-      </p:sp>
-      <p:sp>
-        <p:nvSpPr>
-          <p:cNvPr id="5" name="Rectangle 4"/>
-          <p:cNvSpPr/>
-          <p:nvPr/>
-        </p:nvSpPr>
-        <p:spPr>
-          <a:xfrm>
-            <a:off x="731520" y="969264"/>
-            <a:ext cx="10881360" cy="17780"/>
-          </a:xfrm>
-          <a:prstGeom prst="rect">
-            <a:avLst/>
-          </a:prstGeom>
-          <a:solidFill>
-            <a:srgbClr val="D5DEE7"/>
-          </a:solidFill>
-          <a:ln>
-            <a:noFill/>
-          </a:ln>
-          <a:effectLst/>
-        </p:spPr>
-        <p:style>
-          <a:lnRef idx="1">
-            <a:schemeClr val="accent1"/>
-          </a:lnRef>
-          <a:fillRef idx="3">
-            <a:schemeClr val="accent1"/>
-          </a:fillRef>
-          <a:effectRef idx="2">
-            <a:schemeClr val="accent1"/>
-          </a:effectRef>
-          <a:fontRef idx="minor">
-            <a:schemeClr val="lt1"/>
-          </a:fontRef>
-        </p:style>
-        <p:txBody>
-          <a:bodyPr rtlCol="0" anchor="ctr"/>
-          <a:lstStyle/>
-          <a:p>
-            <a:pPr algn="ctr"/>
-          </a:p>
-        </p:txBody>
-      </p:sp>
-      <p:sp>
-        <p:nvSpPr>
-          <p:cNvPr id="6" name="Rounded Rectangle 5"/>
-          <p:cNvSpPr/>
-          <p:nvPr/>
-        </p:nvSpPr>
-        <p:spPr>
-          <a:xfrm>
-            <a:off x="10865816" y="365760"/>
-            <a:ext cx="822959" cy="347472"/>
-          </a:xfrm>
-          <a:prstGeom prst="roundRect">
-            <a:avLst>
-              <a:gd name="adj" fmla="val 8000"/>
-            </a:avLst>
-          </a:prstGeom>
-          <a:solidFill>
-            <a:srgbClr val="2C898A"/>
-          </a:solidFill>
-          <a:ln>
-            <a:noFill/>
-          </a:ln>
-          <a:effectLst/>
-        </p:spPr>
-        <p:style>
-          <a:lnRef idx="1">
-            <a:schemeClr val="accent1"/>
-          </a:lnRef>
-          <a:fillRef idx="3">
-            <a:schemeClr val="accent1"/>
-          </a:fillRef>
-          <a:effectRef idx="2">
-            <a:schemeClr val="accent1"/>
-          </a:effectRef>
-          <a:fontRef idx="minor">
-            <a:schemeClr val="lt1"/>
-          </a:fontRef>
-        </p:style>
-        <p:txBody>
-          <a:bodyPr rtlCol="0" anchor="ctr"/>
-          <a:lstStyle/>
-          <a:p>
-            <a:pPr algn="ctr"/>
-          </a:p>
-        </p:txBody>
-      </p:sp>
-      <p:sp>
-        <p:nvSpPr>
-          <p:cNvPr id="7" name="TextBox 6"/>
-          <p:cNvSpPr txBox="1"/>
-          <p:nvPr/>
-        </p:nvSpPr>
-        <p:spPr>
-          <a:xfrm>
-            <a:off x="10865816" y="365760"/>
-            <a:ext cx="822959" cy="347472"/>
-          </a:xfrm>
-          <a:prstGeom prst="rect">
-            <a:avLst/>
-          </a:prstGeom>
-          <a:noFill/>
-        </p:spPr>
-        <p:txBody>
-          <a:bodyPr wrap="square" anchor="ctr" lIns="0" rIns="0" tIns="0" bIns="0">
-            <a:spAutoFit/>
-          </a:bodyPr>
-          <a:lstStyle/>
-          <a:p>
-            <a:pPr algn="ctr">
-              <a:lnSpc>
-                <a:spcPct val="108000"/>
-              </a:lnSpc>
-              <a:spcAft>
-                <a:spcPts val="400"/>
-              </a:spcAft>
-            </a:pPr>
-            <a:r>
-              <a:rPr sz="1150" b="1" i="0">
-                <a:solidFill>
-                  <a:srgbClr val="FFFFFF"/>
-                </a:solidFill>
-                <a:latin typeface="NanumGothic"/>
-                <a:ea typeface="NanumGothic"/>
-              </a:rPr>
-              <a:t>환자 증상</a:t>
-            </a:r>
-          </a:p>
-        </p:txBody>
-      </p:sp>
-      <p:sp>
-        <p:nvSpPr>
-          <p:cNvPr id="8" name="TextBox 7"/>
-          <p:cNvSpPr txBox="1"/>
-          <p:nvPr/>
-        </p:nvSpPr>
-        <p:spPr>
-          <a:xfrm>
-            <a:off x="731520" y="1371600"/>
-            <a:ext cx="10835640" cy="4754880"/>
-          </a:xfrm>
-          <a:prstGeom prst="rect">
-            <a:avLst/>
-          </a:prstGeom>
-          <a:noFill/>
-        </p:spPr>
-        <p:txBody>
-          <a:bodyPr wrap="square" lIns="0" rIns="0" tIns="0" bIns="0">
-            <a:spAutoFit/>
-          </a:bodyPr>
-          <a:lstStyle/>
-          <a:p>
-            <a:pPr algn="l">
-              <a:lnSpc>
-                <a:spcPct val="108000"/>
-              </a:lnSpc>
-              <a:spcAft>
-                <a:spcPts val="600"/>
-              </a:spcAft>
-            </a:pPr>
-            <a:r>
-              <a:rPr sz="979" b="1" i="0">
-                <a:solidFill>
-                  <a:srgbClr val="2C898A"/>
-                </a:solidFill>
-                <a:latin typeface="NanumGothic"/>
-                <a:ea typeface="NanumGothic"/>
-              </a:rPr>
-              <a:t>●  </a:t>
-            </a:r>
-            <a:r>
-              <a:rPr sz="1400" b="1" i="0">
-                <a:solidFill>
-                  <a:srgbClr val="1A202C"/>
-                </a:solidFill>
-                <a:latin typeface="NanumGothic"/>
-                <a:ea typeface="NanumGothic"/>
-              </a:rPr>
-              <a:t>하지 CRPS I/II (복합부위통증증후군) — 교감신경 매개 통증의 전형</a:t>
-            </a:r>
-          </a:p>
-          <a:p>
-            <a:pPr algn="l">
-              <a:lnSpc>
-                <a:spcPct val="108000"/>
-              </a:lnSpc>
-              <a:spcAft>
-                <a:spcPts val="600"/>
-              </a:spcAft>
-            </a:pPr>
-            <a:r>
-              <a:rPr sz="1400" b="1" i="0">
-                <a:solidFill>
-                  <a:srgbClr val="5A6B7B"/>
-                </a:solidFill>
-                <a:latin typeface="NanumGothic"/>
-                <a:ea typeface="NanumGothic"/>
-              </a:rPr>
-              <a:t>      –  </a:t>
-            </a:r>
-            <a:r>
-              <a:rPr sz="1400" b="0" i="0">
-                <a:solidFill>
-                  <a:srgbClr val="1A202C"/>
-                </a:solidFill>
-                <a:latin typeface="NanumGothic"/>
-                <a:ea typeface="NanumGothic"/>
-              </a:rPr>
-              <a:t>작열통·이질통(옷·바람 스침에도 통증)·통각과민 · 부종 · 피부색(발적↔창백)·좌우 온도차 · 발한 이상</a:t>
-            </a:r>
-          </a:p>
-          <a:p>
-            <a:pPr algn="l">
-              <a:lnSpc>
-                <a:spcPct val="108000"/>
-              </a:lnSpc>
-              <a:spcAft>
-                <a:spcPts val="600"/>
-              </a:spcAft>
-            </a:pPr>
-            <a:r>
-              <a:rPr sz="1400" b="1" i="0">
-                <a:solidFill>
-                  <a:srgbClr val="5A6B7B"/>
-                </a:solidFill>
-                <a:latin typeface="NanumGothic"/>
-                <a:ea typeface="NanumGothic"/>
-              </a:rPr>
-              <a:t>      –  </a:t>
-            </a:r>
-            <a:r>
-              <a:rPr sz="1400" b="0" i="0">
-                <a:solidFill>
-                  <a:srgbClr val="5A6B7B"/>
-                </a:solidFill>
-                <a:latin typeface="NanumGothic"/>
-                <a:ea typeface="NanumGothic"/>
-              </a:rPr>
-              <a:t>호소: “발이 타는 듯 화끈거려요” · “이불만 스쳐도 아파요” · “붓고 색이 자꾸 변해요”</a:t>
-            </a:r>
-          </a:p>
-          <a:p>
-            <a:pPr algn="l">
-              <a:lnSpc>
-                <a:spcPct val="108000"/>
-              </a:lnSpc>
-              <a:spcAft>
-                <a:spcPts val="600"/>
-              </a:spcAft>
-            </a:pPr>
-            <a:r>
-              <a:rPr sz="979" b="1" i="0">
-                <a:solidFill>
-                  <a:srgbClr val="2C898A"/>
-                </a:solidFill>
-                <a:latin typeface="NanumGothic"/>
-                <a:ea typeface="NanumGothic"/>
-              </a:rPr>
-              <a:t>●  </a:t>
-            </a:r>
-            <a:r>
-              <a:rPr sz="1400" b="1" i="0">
-                <a:solidFill>
-                  <a:srgbClr val="2E7D32"/>
-                </a:solidFill>
-                <a:latin typeface="NanumGothic"/>
-                <a:ea typeface="NanumGothic"/>
-              </a:rPr>
-              <a:t>허혈질환 — PAD·중증 하지허혈(CLI)·버거병 (동맥성 허혈)</a:t>
-            </a:r>
-          </a:p>
-          <a:p>
-            <a:pPr algn="l">
-              <a:lnSpc>
-                <a:spcPct val="108000"/>
-              </a:lnSpc>
-              <a:spcAft>
-                <a:spcPts val="600"/>
-              </a:spcAft>
-            </a:pPr>
-            <a:r>
-              <a:rPr sz="1400" b="1" i="0">
-                <a:solidFill>
-                  <a:srgbClr val="5A6B7B"/>
-                </a:solidFill>
-                <a:latin typeface="NanumGothic"/>
-                <a:ea typeface="NanumGothic"/>
-              </a:rPr>
-              <a:t>      –  </a:t>
-            </a:r>
-            <a:r>
-              <a:rPr sz="1400" b="0" i="0">
-                <a:solidFill>
-                  <a:srgbClr val="1A202C"/>
-                </a:solidFill>
-                <a:latin typeface="NanumGothic"/>
-                <a:ea typeface="NanumGothic"/>
-              </a:rPr>
-              <a:t>간헐적 파행(걷다 종아리 통증→쉬면 완화) → 진행 시 야간 안정통(다리 내리면 완화) · 차고 창백한 발 · 비치유 궤양·괴저</a:t>
-            </a:r>
-          </a:p>
-          <a:p>
-            <a:pPr algn="l">
-              <a:lnSpc>
-                <a:spcPct val="108000"/>
-              </a:lnSpc>
-              <a:spcAft>
-                <a:spcPts val="600"/>
-              </a:spcAft>
-            </a:pPr>
-            <a:r>
-              <a:rPr sz="1400" b="1" i="0">
-                <a:solidFill>
-                  <a:srgbClr val="5A6B7B"/>
-                </a:solidFill>
-                <a:latin typeface="NanumGothic"/>
-                <a:ea typeface="NanumGothic"/>
-              </a:rPr>
-              <a:t>      –  </a:t>
-            </a:r>
-            <a:r>
-              <a:rPr sz="1400" b="0" i="0">
-                <a:solidFill>
-                  <a:srgbClr val="5A6B7B"/>
-                </a:solidFill>
-                <a:latin typeface="NanumGothic"/>
-                <a:ea typeface="NanumGothic"/>
-              </a:rPr>
-              <a:t>호소: “걸으면 종아리가 터질 듯 아파요” · “밤에 발이 시려 잠을 못 자요” · “상처가 안 아물어요”</a:t>
-            </a:r>
-          </a:p>
-          <a:p>
-            <a:pPr algn="l">
-              <a:lnSpc>
-                <a:spcPct val="108000"/>
-              </a:lnSpc>
-              <a:spcAft>
-                <a:spcPts val="600"/>
-              </a:spcAft>
-            </a:pPr>
-            <a:r>
-              <a:rPr sz="1400" b="1" i="0">
-                <a:solidFill>
-                  <a:srgbClr val="5A6B7B"/>
-                </a:solidFill>
-                <a:latin typeface="NanumGothic"/>
-                <a:ea typeface="NanumGothic"/>
-              </a:rPr>
-              <a:t/>
-            </a:r>
-            <a:r>
-              <a:rPr sz="1400" b="1" i="0">
-                <a:solidFill>
-                  <a:srgbClr val="1F6E70"/>
-                </a:solidFill>
-                <a:latin typeface="NanumGothic"/>
-                <a:ea typeface="NanumGothic"/>
-              </a:rPr>
-              <a:t>‘허혈’은 동맥성 부족을 의미 — 하지정맥류 등 정맥질환은 LSB 적응증 아님(압박·정맥폐색술이 표준).</a:t>
-            </a:r>
-          </a:p>
-        </p:txBody>
-      </p:sp>
-      <p:sp>
-        <p:nvSpPr>
-          <p:cNvPr id="9" name="TextBox 8"/>
-          <p:cNvSpPr txBox="1"/>
-          <p:nvPr/>
-        </p:nvSpPr>
-        <p:spPr>
-          <a:xfrm>
-            <a:off x="731520" y="6455664"/>
-            <a:ext cx="9875520" cy="292608"/>
-          </a:xfrm>
-          <a:prstGeom prst="rect">
-            <a:avLst/>
-          </a:prstGeom>
-          <a:noFill/>
-        </p:spPr>
-        <p:txBody>
-          <a:bodyPr wrap="square" anchor="ctr" lIns="0" rIns="0" tIns="0" bIns="0">
-            <a:spAutoFit/>
-          </a:bodyPr>
-          <a:lstStyle/>
-          <a:p>
-            <a:pPr algn="l">
-              <a:lnSpc>
-                <a:spcPct val="108000"/>
-              </a:lnSpc>
-              <a:spcAft>
-                <a:spcPts val="400"/>
-              </a:spcAft>
-            </a:pPr>
-            <a:r>
-              <a:rPr sz="900" b="0" i="0">
-                <a:solidFill>
-                  <a:srgbClr val="5A6B7B"/>
-                </a:solidFill>
-                <a:latin typeface="NanumGothic"/>
-                <a:ea typeface="NanumGothic"/>
-              </a:rPr>
-              <a:t>근거: StatPearls; 문헌고찰 종합</a:t>
-            </a:r>
-          </a:p>
-        </p:txBody>
-      </p:sp>
-      <p:sp>
-        <p:nvSpPr>
-          <p:cNvPr id="10" name="TextBox 9"/>
-          <p:cNvSpPr txBox="1"/>
-          <p:nvPr/>
-        </p:nvSpPr>
-        <p:spPr>
-          <a:xfrm>
-            <a:off x="11064240" y="6455664"/>
-            <a:ext cx="822960" cy="292608"/>
-          </a:xfrm>
-          <a:prstGeom prst="rect">
-            <a:avLst/>
-          </a:prstGeom>
-          <a:noFill/>
-        </p:spPr>
-        <p:txBody>
-          <a:bodyPr wrap="square" anchor="ctr" lIns="0" rIns="0" tIns="0" bIns="0">
-            <a:spAutoFit/>
-          </a:bodyPr>
-          <a:lstStyle/>
-          <a:p>
-            <a:pPr algn="r">
-              <a:lnSpc>
-                <a:spcPct val="108000"/>
-              </a:lnSpc>
-              <a:spcAft>
-                <a:spcPts val="400"/>
-              </a:spcAft>
-            </a:pPr>
-            <a:r>
-              <a:rPr sz="1000" b="1" i="0">
-                <a:solidFill>
-                  <a:srgbClr val="5A6B7B"/>
-                </a:solidFill>
-                <a:latin typeface="NanumGothic"/>
-                <a:ea typeface="NanumGothic"/>
-              </a:rPr>
               <a:t>13</a:t>
             </a:r>
           </a:p>
@@ -5985,7 +5864,7 @@
                 <a:latin typeface="NanumGothic"/>
                 <a:ea typeface="NanumGothic"/>
               </a:rPr>
-              <a:t>적응증별 환자 증상·호소 ② — 신경병증·기타</a:t>
+              <a:t>적응증별 환자 증상·호소 ① — 통증증후군·허혈</a:t>
             </a:r>
           </a:p>
         </p:txBody>
@@ -6214,7 +6093,7 @@
                 <a:latin typeface="NanumGothic"/>
                 <a:ea typeface="NanumGothic"/>
               </a:rPr>
-              <a:t>신경병증 — 당뇨병성 신경병증/당뇨발·대상포진후신경통·환상지통</a:t>
+              <a:t>하지 CRPS I/II (복합부위통증증후군) — 교감신경 매개 통증의 전형</a:t>
             </a:r>
           </a:p>
           <a:p>
@@ -6244,7 +6123,7 @@
                 <a:latin typeface="NanumGothic"/>
                 <a:ea typeface="NanumGothic"/>
               </a:rPr>
-              <a:t>저림·화끈거림·전기 오듯 찌름 · 이질통 · 감각저하(양말 신은 느낌) · 야간 악화 · 당뇨발 궤양·관류저하</a:t>
+              <a:t>작열통·이질통(옷·바람 스침에도 통증)·통각과민 · 부종 · 피부색(발적↔창백)·좌우 온도차 · 발한 이상</a:t>
             </a:r>
           </a:p>
           <a:p>
@@ -6274,7 +6153,7 @@
                 <a:latin typeface="NanumGothic"/>
                 <a:ea typeface="NanumGothic"/>
               </a:rPr>
-              <a:t>호소: “발이 저리고 화끈거려요” · “밤에 더 심해요” · “전기가 찌릿 오는 것 같아요”</a:t>
+              <a:t>호소: “발이 타는 듯 화끈거려요” · “이불만 스쳐도 아파요” · “붓고 색이 자꾸 변해요”</a:t>
             </a:r>
           </a:p>
           <a:p>
@@ -6299,12 +6178,42 @@
             <a:r>
               <a:rPr sz="1400" b="1" i="0">
                 <a:solidFill>
+                  <a:srgbClr val="2E7D32"/>
+                </a:solidFill>
+                <a:latin typeface="NanumGothic"/>
+                <a:ea typeface="NanumGothic"/>
+              </a:rPr>
+              <a:t>허혈질환 — PAD·중증 하지허혈(CLI)·버거병 (동맥성 허혈)</a:t>
+            </a:r>
+          </a:p>
+          <a:p>
+            <a:pPr algn="l">
+              <a:lnSpc>
+                <a:spcPct val="108000"/>
+              </a:lnSpc>
+              <a:spcAft>
+                <a:spcPts val="600"/>
+              </a:spcAft>
+            </a:pPr>
+            <a:r>
+              <a:rPr sz="1400" b="1" i="0">
+                <a:solidFill>
+                  <a:srgbClr val="5A6B7B"/>
+                </a:solidFill>
+                <a:latin typeface="NanumGothic"/>
+                <a:ea typeface="NanumGothic"/>
+              </a:rPr>
+              <a:t>      –  </a:t>
+            </a:r>
+            <a:r>
+              <a:rPr sz="1400" b="0" i="0">
+                <a:solidFill>
                   <a:srgbClr val="1A202C"/>
                 </a:solidFill>
                 <a:latin typeface="NanumGothic"/>
                 <a:ea typeface="NanumGothic"/>
               </a:rPr>
-              <a:t>기타 — 족부 다한증·레이노(하지)·홍색사지통증·암성 하지통</a:t>
+              <a:t>간헐적 파행(걷다 종아리 통증→쉬면 완화) → 진행 시 야간 안정통(다리 내리면 완화) · 차고 창백한 발 · 비치유 궤양·괴저</a:t>
             </a:r>
           </a:p>
           <a:p>
@@ -6329,12 +6238,12 @@
             <a:r>
               <a:rPr sz="1400" b="0" i="0">
                 <a:solidFill>
-                  <a:srgbClr val="1A202C"/>
-                </a:solidFill>
-                <a:latin typeface="NanumGothic"/>
-                <a:ea typeface="NanumGothic"/>
-              </a:rPr>
-              <a:t>다한증(과한 발땀·축축·악취) · 레이노(추위·스트레스에 창백→청색→발적 삼색변화·저림) · 홍색사지통증(발작적 발적·작열·열감, 열에 악화)</a:t>
+                  <a:srgbClr val="5A6B7B"/>
+                </a:solidFill>
+                <a:latin typeface="NanumGothic"/>
+                <a:ea typeface="NanumGothic"/>
+              </a:rPr>
+              <a:t>호소: “걸으면 종아리가 터질 듯 아파요” · “밤에 발이 시려 잠을 못 자요” · “상처가 안 아물어요”</a:t>
             </a:r>
           </a:p>
           <a:p>
@@ -6354,17 +6263,17 @@
                 <a:latin typeface="NanumGothic"/>
                 <a:ea typeface="NanumGothic"/>
               </a:rPr>
-              <a:t>      –  </a:t>
-            </a:r>
-            <a:r>
-              <a:rPr sz="1400" b="0" i="0">
-                <a:solidFill>
-                  <a:srgbClr val="5A6B7B"/>
-                </a:solidFill>
-                <a:latin typeface="NanumGothic"/>
-                <a:ea typeface="NanumGothic"/>
-              </a:rPr>
-              <a:t>호소: “발에 땀이 너무 많아요” · “추우면 발이 하얘졌다 파래져요” · “발이 화끈 달아올라요”</a:t>
+              <a:t/>
+            </a:r>
+            <a:r>
+              <a:rPr sz="1400" b="1" i="0">
+                <a:solidFill>
+                  <a:srgbClr val="1F6E70"/>
+                </a:solidFill>
+                <a:latin typeface="NanumGothic"/>
+                <a:ea typeface="NanumGothic"/>
+              </a:rPr>
+              <a:t>‘허혈’은 동맥성 부족을 의미 — 하지정맥류 등 정맥질환은 LSB 적응증 아님(압박·정맥폐색술이 표준).</a:t>
             </a:r>
           </a:p>
         </p:txBody>
@@ -6555,7 +6464,7 @@
                 <a:latin typeface="NanumGothic"/>
                 <a:ea typeface="NanumGothic"/>
               </a:rPr>
-              <a:t>밤에 저리고 화끈거리는 다리 — 당뇨병성 신경병증과 LSB</a:t>
+              <a:t>적응증별 환자 증상·호소 ② — 신경병증·기타</a:t>
             </a:r>
           </a:p>
         </p:txBody>
@@ -6598,7 +6507,7 @@
                 <a:latin typeface="NanumGothic"/>
                 <a:ea typeface="NanumGothic"/>
               </a:rPr>
-              <a:t>적응증 · 심화</a:t>
+              <a:t>적응증 · 증상</a:t>
             </a:r>
           </a:p>
         </p:txBody>
@@ -6655,8 +6564,8 @@
         </p:nvSpPr>
         <p:spPr>
           <a:xfrm>
-            <a:off x="10536631" y="365760"/>
-            <a:ext cx="1152144" cy="347472"/>
+            <a:off x="10865816" y="365760"/>
+            <a:ext cx="822959" cy="347472"/>
           </a:xfrm>
           <a:prstGeom prst="roundRect">
             <a:avLst>
@@ -6701,8 +6610,8 @@
         </p:nvSpPr>
         <p:spPr>
           <a:xfrm>
-            <a:off x="10536631" y="365760"/>
-            <a:ext cx="1152144" cy="347472"/>
+            <a:off x="10865816" y="365760"/>
+            <a:ext cx="822959" cy="347472"/>
           </a:xfrm>
           <a:prstGeom prst="rect">
             <a:avLst/>
@@ -6731,7 +6640,7 @@
                 <a:latin typeface="NanumGothic"/>
                 <a:ea typeface="NanumGothic"/>
               </a:rPr>
-              <a:t>야간 신경병증통</a:t>
+              <a:t>환자 증상</a:t>
             </a:r>
           </a:p>
         </p:txBody>
@@ -6745,7 +6654,7 @@
         <p:spPr>
           <a:xfrm>
             <a:off x="731520" y="1371600"/>
-            <a:ext cx="6400800" cy="4663440"/>
+            <a:ext cx="10835640" cy="4754880"/>
           </a:xfrm>
           <a:prstGeom prst="rect">
             <a:avLst/>
@@ -6763,7 +6672,7 @@
                 <a:spcPct val="108000"/>
               </a:lnSpc>
               <a:spcAft>
-                <a:spcPts val="800"/>
+                <a:spcPts val="600"/>
               </a:spcAft>
             </a:pPr>
             <a:r>
@@ -6784,7 +6693,7 @@
                 <a:latin typeface="NanumGothic"/>
                 <a:ea typeface="NanumGothic"/>
               </a:rPr>
-              <a:t>임상상: 당뇨병성 말초신경병증 — 발·종아리 저림·화끈거림·전기 찌름, 양측 ‘양말’ 분포.</a:t>
+              <a:t>신경병증 — 당뇨병성 신경병증/당뇨발·대상포진후신경통·환상지통</a:t>
             </a:r>
           </a:p>
           <a:p>
@@ -6793,7 +6702,67 @@
                 <a:spcPct val="108000"/>
               </a:lnSpc>
               <a:spcAft>
-                <a:spcPts val="800"/>
+                <a:spcPts val="600"/>
+              </a:spcAft>
+            </a:pPr>
+            <a:r>
+              <a:rPr sz="1400" b="1" i="0">
+                <a:solidFill>
+                  <a:srgbClr val="5A6B7B"/>
+                </a:solidFill>
+                <a:latin typeface="NanumGothic"/>
+                <a:ea typeface="NanumGothic"/>
+              </a:rPr>
+              <a:t>      –  </a:t>
+            </a:r>
+            <a:r>
+              <a:rPr sz="1400" b="0" i="0">
+                <a:solidFill>
+                  <a:srgbClr val="1A202C"/>
+                </a:solidFill>
+                <a:latin typeface="NanumGothic"/>
+                <a:ea typeface="NanumGothic"/>
+              </a:rPr>
+              <a:t>저림·화끈거림·전기 오듯 찌름 · 이질통 · 감각저하(양말 신은 느낌) · 야간 악화 · 당뇨발 궤양·관류저하</a:t>
+            </a:r>
+          </a:p>
+          <a:p>
+            <a:pPr algn="l">
+              <a:lnSpc>
+                <a:spcPct val="108000"/>
+              </a:lnSpc>
+              <a:spcAft>
+                <a:spcPts val="600"/>
+              </a:spcAft>
+            </a:pPr>
+            <a:r>
+              <a:rPr sz="1400" b="1" i="0">
+                <a:solidFill>
+                  <a:srgbClr val="5A6B7B"/>
+                </a:solidFill>
+                <a:latin typeface="NanumGothic"/>
+                <a:ea typeface="NanumGothic"/>
+              </a:rPr>
+              <a:t>      –  </a:t>
+            </a:r>
+            <a:r>
+              <a:rPr sz="1400" b="0" i="0">
+                <a:solidFill>
+                  <a:srgbClr val="5A6B7B"/>
+                </a:solidFill>
+                <a:latin typeface="NanumGothic"/>
+                <a:ea typeface="NanumGothic"/>
+              </a:rPr>
+              <a:t>호소: “발이 저리고 화끈거려요” · “밤에 더 심해요” · “전기가 찌릿 오는 것 같아요”</a:t>
+            </a:r>
+          </a:p>
+          <a:p>
+            <a:pPr algn="l">
+              <a:lnSpc>
+                <a:spcPct val="108000"/>
+              </a:lnSpc>
+              <a:spcAft>
+                <a:spcPts val="600"/>
               </a:spcAft>
             </a:pPr>
             <a:r>
@@ -6807,6 +6776,36 @@
               <a:t>●  </a:t>
             </a:r>
             <a:r>
+              <a:rPr sz="1400" b="1" i="0">
+                <a:solidFill>
+                  <a:srgbClr val="1A202C"/>
+                </a:solidFill>
+                <a:latin typeface="NanumGothic"/>
+                <a:ea typeface="NanumGothic"/>
+              </a:rPr>
+              <a:t>기타 — 족부 다한증·레이노(하지)·홍색사지통증·암성 하지통</a:t>
+            </a:r>
+          </a:p>
+          <a:p>
+            <a:pPr algn="l">
+              <a:lnSpc>
+                <a:spcPct val="108000"/>
+              </a:lnSpc>
+              <a:spcAft>
+                <a:spcPts val="600"/>
+              </a:spcAft>
+            </a:pPr>
+            <a:r>
+              <a:rPr sz="1400" b="1" i="0">
+                <a:solidFill>
+                  <a:srgbClr val="5A6B7B"/>
+                </a:solidFill>
+                <a:latin typeface="NanumGothic"/>
+                <a:ea typeface="NanumGothic"/>
+              </a:rPr>
+              <a:t>      –  </a:t>
+            </a:r>
+            <a:r>
               <a:rPr sz="1400" b="0" i="0">
                 <a:solidFill>
                   <a:srgbClr val="1A202C"/>
@@ -6814,7 +6813,7 @@
                 <a:latin typeface="NanumGothic"/>
                 <a:ea typeface="NanumGothic"/>
               </a:rPr>
-              <a:t>야간통: 이불 온기·야간 순환·주의분산 소실 → 밤에 증폭·수면 방해.</a:t>
+              <a:t>다한증(과한 발땀·축축·악취) · 레이노(추위·스트레스에 창백→청색→발적 삼색변화·저림) · 홍색사지통증(발작적 발적·작열·열감, 열에 악화)</a:t>
             </a:r>
           </a:p>
           <a:p>
@@ -6823,297 +6822,35 @@
                 <a:spcPct val="108000"/>
               </a:lnSpc>
               <a:spcAft>
-                <a:spcPts val="800"/>
-              </a:spcAft>
-            </a:pPr>
-            <a:r>
-              <a:rPr sz="979" b="1" i="0">
-                <a:solidFill>
-                  <a:srgbClr val="2C898A"/>
-                </a:solidFill>
-                <a:latin typeface="NanumGothic"/>
-                <a:ea typeface="NanumGothic"/>
-              </a:rPr>
-              <a:t>●  </a:t>
+                <a:spcPts val="600"/>
+              </a:spcAft>
+            </a:pPr>
+            <a:r>
+              <a:rPr sz="1400" b="1" i="0">
+                <a:solidFill>
+                  <a:srgbClr val="5A6B7B"/>
+                </a:solidFill>
+                <a:latin typeface="NanumGothic"/>
+                <a:ea typeface="NanumGothic"/>
+              </a:rPr>
+              <a:t>      –  </a:t>
             </a:r>
             <a:r>
               <a:rPr sz="1400" b="0" i="0">
                 <a:solidFill>
-                  <a:srgbClr val="1A202C"/>
-                </a:solidFill>
-                <a:latin typeface="NanumGothic"/>
-                <a:ea typeface="NanumGothic"/>
-              </a:rPr>
-              <a:t>먼저 감별: RLS(움직이면 완화)·NLC(경련)·허혈성 안정통과 구분.</a:t>
-            </a:r>
-          </a:p>
-          <a:p>
-            <a:pPr algn="l">
-              <a:lnSpc>
-                <a:spcPct val="108000"/>
-              </a:lnSpc>
-              <a:spcAft>
-                <a:spcPts val="800"/>
-              </a:spcAft>
-            </a:pPr>
-            <a:r>
-              <a:rPr sz="1400" b="1" i="0">
-                <a:solidFill>
                   <a:srgbClr val="5A6B7B"/>
                 </a:solidFill>
                 <a:latin typeface="NanumGothic"/>
                 <a:ea typeface="NanumGothic"/>
               </a:rPr>
-              <a:t/>
-            </a:r>
-            <a:r>
-              <a:rPr sz="1400" b="1" i="0">
-                <a:solidFill>
-                  <a:srgbClr val="1F6E70"/>
-                </a:solidFill>
-                <a:latin typeface="NanumGothic"/>
-                <a:ea typeface="NanumGothic"/>
-              </a:rPr>
-              <a:t>1차: 혈당조절+약물(가바펜틴·듀록세틴) → 난치성이면 LSB 고려</a:t>
-            </a:r>
-          </a:p>
-        </p:txBody>
-      </p:sp>
-      <p:sp>
-        <p:nvSpPr>
-          <p:cNvPr id="9" name="Rounded Rectangle 8"/>
-          <p:cNvSpPr/>
-          <p:nvPr/>
-        </p:nvSpPr>
-        <p:spPr>
-          <a:xfrm>
-            <a:off x="7406640" y="1463040"/>
-            <a:ext cx="4114800" cy="4480560"/>
-          </a:xfrm>
-          <a:prstGeom prst="roundRect">
-            <a:avLst>
-              <a:gd name="adj" fmla="val 8000"/>
-            </a:avLst>
-          </a:prstGeom>
-          <a:solidFill>
-            <a:srgbClr val="1B355E"/>
-          </a:solidFill>
-          <a:ln>
-            <a:noFill/>
-          </a:ln>
-          <a:effectLst/>
-        </p:spPr>
-        <p:style>
-          <a:lnRef idx="1">
-            <a:schemeClr val="accent1"/>
-          </a:lnRef>
-          <a:fillRef idx="3">
-            <a:schemeClr val="accent1"/>
-          </a:fillRef>
-          <a:effectRef idx="2">
-            <a:schemeClr val="accent1"/>
-          </a:effectRef>
-          <a:fontRef idx="minor">
-            <a:schemeClr val="lt1"/>
-          </a:fontRef>
-        </p:style>
-        <p:txBody>
-          <a:bodyPr rtlCol="0" anchor="ctr"/>
-          <a:lstStyle/>
-          <a:p>
-            <a:pPr algn="ctr"/>
-          </a:p>
-        </p:txBody>
-      </p:sp>
-      <p:sp>
-        <p:nvSpPr>
-          <p:cNvPr id="10" name="TextBox 9"/>
-          <p:cNvSpPr txBox="1"/>
-          <p:nvPr/>
-        </p:nvSpPr>
-        <p:spPr>
-          <a:xfrm>
-            <a:off x="7680960" y="1691640"/>
-            <a:ext cx="3657600" cy="365760"/>
-          </a:xfrm>
-          <a:prstGeom prst="rect">
-            <a:avLst/>
-          </a:prstGeom>
-          <a:noFill/>
-        </p:spPr>
-        <p:txBody>
-          <a:bodyPr wrap="square" anchor="t" lIns="0" rIns="0" tIns="0" bIns="0">
-            <a:spAutoFit/>
-          </a:bodyPr>
-          <a:lstStyle/>
-          <a:p>
-            <a:pPr algn="l">
-              <a:lnSpc>
-                <a:spcPct val="108000"/>
-              </a:lnSpc>
-              <a:spcAft>
-                <a:spcPts val="400"/>
-              </a:spcAft>
-            </a:pPr>
-            <a:r>
-              <a:rPr sz="1300" b="1" i="0">
-                <a:solidFill>
-                  <a:srgbClr val="BFD3E6"/>
-                </a:solidFill>
-                <a:latin typeface="NanumGothic"/>
-                <a:ea typeface="NanumGothic"/>
-              </a:rPr>
-              <a:t>LSB — 치료 삽입</a:t>
-            </a:r>
-          </a:p>
-        </p:txBody>
-      </p:sp>
-      <p:sp>
-        <p:nvSpPr>
-          <p:cNvPr id="11" name="TextBox 10"/>
-          <p:cNvSpPr txBox="1"/>
-          <p:nvPr/>
-        </p:nvSpPr>
-        <p:spPr>
-          <a:xfrm>
-            <a:off x="7680960" y="2194560"/>
-            <a:ext cx="3611880" cy="3657600"/>
-          </a:xfrm>
-          <a:prstGeom prst="rect">
-            <a:avLst/>
-          </a:prstGeom>
-          <a:noFill/>
-        </p:spPr>
-        <p:txBody>
-          <a:bodyPr wrap="square" lIns="0" rIns="0" tIns="0" bIns="0">
-            <a:spAutoFit/>
-          </a:bodyPr>
-          <a:lstStyle/>
-          <a:p>
-            <a:pPr algn="l">
-              <a:lnSpc>
-                <a:spcPct val="108000"/>
-              </a:lnSpc>
-              <a:spcAft>
-                <a:spcPts val="800"/>
-              </a:spcAft>
-            </a:pPr>
-            <a:r>
-              <a:rPr sz="875" b="1" i="0">
-                <a:solidFill>
-                  <a:srgbClr val="2C898A"/>
-                </a:solidFill>
-                <a:latin typeface="NanumGothic"/>
-                <a:ea typeface="NanumGothic"/>
-              </a:rPr>
-              <a:t>●  </a:t>
-            </a:r>
-            <a:r>
-              <a:rPr sz="1250" b="0" i="0">
-                <a:solidFill>
-                  <a:srgbClr val="FFFFFF"/>
-                </a:solidFill>
-                <a:latin typeface="NanumGothic"/>
-                <a:ea typeface="NanumGothic"/>
-              </a:rPr>
-              <a:t>기전: 교감차단 → 미세순환↑ + 교감매개통 차단</a:t>
-            </a:r>
-          </a:p>
-          <a:p>
-            <a:pPr algn="l">
-              <a:lnSpc>
-                <a:spcPct val="108000"/>
-              </a:lnSpc>
-              <a:spcAft>
-                <a:spcPts val="800"/>
-              </a:spcAft>
-            </a:pPr>
-            <a:r>
-              <a:rPr sz="875" b="1" i="0">
-                <a:solidFill>
-                  <a:srgbClr val="2C898A"/>
-                </a:solidFill>
-                <a:latin typeface="NanumGothic"/>
-                <a:ea typeface="NanumGothic"/>
-              </a:rPr>
-              <a:t>●  </a:t>
-            </a:r>
-            <a:r>
-              <a:rPr sz="1250" b="0" i="0">
-                <a:solidFill>
-                  <a:srgbClr val="FFFFFF"/>
-                </a:solidFill>
-                <a:latin typeface="NanumGothic"/>
-                <a:ea typeface="NanumGothic"/>
-              </a:rPr>
-              <a:t>근거: 난치성 DPN에 LSB+신경파괴 RCT·증례</a:t>
-            </a:r>
-          </a:p>
-          <a:p>
-            <a:pPr algn="l">
-              <a:lnSpc>
-                <a:spcPct val="108000"/>
-              </a:lnSpc>
-              <a:spcAft>
-                <a:spcPts val="800"/>
-              </a:spcAft>
-            </a:pPr>
-            <a:r>
-              <a:rPr sz="875" b="1" i="0">
-                <a:solidFill>
-                  <a:srgbClr val="2C898A"/>
-                </a:solidFill>
-                <a:latin typeface="NanumGothic"/>
-                <a:ea typeface="NanumGothic"/>
-              </a:rPr>
-              <a:t>●  </a:t>
-            </a:r>
-            <a:r>
-              <a:rPr sz="1250" b="0" i="0">
-                <a:solidFill>
-                  <a:srgbClr val="FFFFFF"/>
-                </a:solidFill>
-                <a:latin typeface="NanumGothic"/>
-                <a:ea typeface="NanumGothic"/>
-              </a:rPr>
-              <a:t>적용: 약물 불응·진단차단 양성 시 선택적 시행</a:t>
-            </a:r>
-          </a:p>
-          <a:p>
-            <a:pPr algn="l">
-              <a:lnSpc>
-                <a:spcPct val="108000"/>
-              </a:lnSpc>
-              <a:spcAft>
-                <a:spcPts val="800"/>
-              </a:spcAft>
-            </a:pPr>
-            <a:r>
-              <a:rPr sz="875" b="1" i="0">
-                <a:solidFill>
-                  <a:srgbClr val="2C898A"/>
-                </a:solidFill>
-                <a:latin typeface="NanumGothic"/>
-                <a:ea typeface="NanumGothic"/>
-              </a:rPr>
-              <a:t>●  </a:t>
-            </a:r>
-            <a:r>
-              <a:rPr sz="1250" b="0" i="0">
-                <a:solidFill>
-                  <a:srgbClr val="FFFFFF"/>
-                </a:solidFill>
-                <a:latin typeface="NanumGothic"/>
-                <a:ea typeface="NanumGothic"/>
-              </a:rPr>
-              <a:t>성공지표: 피부온도 ≥2°C↑ (근거 제한적)</a:t>
-            </a:r>
-          </a:p>
-        </p:txBody>
-      </p:sp>
-      <p:sp>
-        <p:nvSpPr>
-          <p:cNvPr id="12" name="TextBox 11"/>
+              <a:t>호소: “발에 땀이 너무 많아요” · “추우면 발이 하얘졌다 파래져요” · “발이 화끈 달아올라요”</a:t>
+            </a:r>
+          </a:p>
+        </p:txBody>
+      </p:sp>
+      <p:sp>
+        <p:nvSpPr>
+          <p:cNvPr id="9" name="TextBox 8"/>
           <p:cNvSpPr txBox="1"/>
           <p:nvPr/>
         </p:nvSpPr>
@@ -7149,14 +6886,14 @@
                 <a:latin typeface="NanumGothic"/>
                 <a:ea typeface="NanumGothic"/>
               </a:rPr>
-              <a:t>근거: Zhang 2020(RCT) PMID 32915421; 증례 PMID 22606406; StatPearls NBK442009</a:t>
-            </a:r>
-          </a:p>
-        </p:txBody>
-      </p:sp>
-      <p:sp>
-        <p:nvSpPr>
-          <p:cNvPr id="13" name="TextBox 12"/>
+              <a:t>근거: StatPearls; 문헌고찰 종합</a:t>
+            </a:r>
+          </a:p>
+        </p:txBody>
+      </p:sp>
+      <p:sp>
+        <p:nvSpPr>
+          <p:cNvPr id="10" name="TextBox 9"/>
           <p:cNvSpPr txBox="1"/>
           <p:nvPr/>
         </p:nvSpPr>
@@ -7297,7 +7034,7 @@
                 <a:latin typeface="NanumGothic"/>
                 <a:ea typeface="NanumGothic"/>
               </a:rPr>
-              <a:t>효과 (1) 관류 개선 · 허혈성 통증</a:t>
+              <a:t>밤에 저리고 화끈거리는 다리 — 당뇨병성 신경병증과 LSB</a:t>
             </a:r>
           </a:p>
         </p:txBody>
@@ -7340,7 +7077,7 @@
                 <a:latin typeface="NanumGothic"/>
                 <a:ea typeface="NanumGothic"/>
               </a:rPr>
-              <a:t>효과</a:t>
+              <a:t>적응증 · 심화</a:t>
             </a:r>
           </a:p>
         </p:txBody>
@@ -7397,8 +7134,8 @@
         </p:nvSpPr>
         <p:spPr>
           <a:xfrm>
-            <a:off x="10426903" y="365760"/>
-            <a:ext cx="1261872" cy="347472"/>
+            <a:off x="10536631" y="365760"/>
+            <a:ext cx="1152144" cy="347472"/>
           </a:xfrm>
           <a:prstGeom prst="roundRect">
             <a:avLst>
@@ -7406,7 +7143,7 @@
             </a:avLst>
           </a:prstGeom>
           <a:solidFill>
-            <a:srgbClr val="B97A0C"/>
+            <a:srgbClr val="2C898A"/>
           </a:solidFill>
           <a:ln>
             <a:noFill/>
@@ -7443,8 +7180,8 @@
         </p:nvSpPr>
         <p:spPr>
           <a:xfrm>
-            <a:off x="10426903" y="365760"/>
-            <a:ext cx="1261872" cy="347472"/>
+            <a:off x="10536631" y="365760"/>
+            <a:ext cx="1152144" cy="347472"/>
           </a:xfrm>
           <a:prstGeom prst="rect">
             <a:avLst/>
@@ -7473,7 +7210,7 @@
                 <a:latin typeface="NanumGothic"/>
                 <a:ea typeface="NanumGothic"/>
               </a:rPr>
-              <a:t>Lv III–IV</a:t>
+              <a:t>야간 신경병증통</a:t>
             </a:r>
           </a:p>
         </p:txBody>
@@ -7526,7 +7263,7 @@
                 <a:latin typeface="NanumGothic"/>
                 <a:ea typeface="NanumGothic"/>
               </a:rPr>
-              <a:t>관류 실측(Dickey 2024): LSB 후 후경골동맥 직경 0.17→0.27 cm(+58.8%), 모세혈관 재충혈 3.92→1.30초, 족부온도 +2.8°C.</a:t>
+              <a:t>임상상: 당뇨병성 말초신경병증 — 발·종아리 저림·화끈거림·전기 찌름, 양측 ‘양말’ 분포.</a:t>
             </a:r>
           </a:p>
           <a:p>
@@ -7551,12 +7288,12 @@
             <a:r>
               <a:rPr sz="1400" b="0" i="0">
                 <a:solidFill>
-                  <a:srgbClr val="2E7D32"/>
-                </a:solidFill>
-                <a:latin typeface="NanumGothic"/>
-                <a:ea typeface="NanumGothic"/>
-              </a:rPr>
-              <a:t>허혈성 통증(PAD): 하지 통증 최대 75%↓, Fontaine 분류·측부관류 개선(Medicina 2024).</a:t>
+                  <a:srgbClr val="1A202C"/>
+                </a:solidFill>
+                <a:latin typeface="NanumGothic"/>
+                <a:ea typeface="NanumGothic"/>
+              </a:rPr>
+              <a:t>야간통: 이불 온기·야간 순환·주의분산 소실 → 밤에 증폭·수면 방해.</a:t>
             </a:r>
           </a:p>
           <a:p>
@@ -7586,7 +7323,37 @@
                 <a:latin typeface="NanumGothic"/>
                 <a:ea typeface="NanumGothic"/>
               </a:rPr>
-              <a:t>비재건성 CLI: 교감신경 신경파괴가 절단 외 대안이 없는 환자의 통증조절에 효과적·안전(Barreto 2018).</a:t>
+              <a:t>먼저 감별: RLS(움직이면 완화)·NLC(경련)·허혈성 안정통과 구분.</a:t>
+            </a:r>
+          </a:p>
+          <a:p>
+            <a:pPr algn="l">
+              <a:lnSpc>
+                <a:spcPct val="108000"/>
+              </a:lnSpc>
+              <a:spcAft>
+                <a:spcPts val="800"/>
+              </a:spcAft>
+            </a:pPr>
+            <a:r>
+              <a:rPr sz="1400" b="1" i="0">
+                <a:solidFill>
+                  <a:srgbClr val="5A6B7B"/>
+                </a:solidFill>
+                <a:latin typeface="NanumGothic"/>
+                <a:ea typeface="NanumGothic"/>
+              </a:rPr>
+              <a:t/>
+            </a:r>
+            <a:r>
+              <a:rPr sz="1400" b="1" i="0">
+                <a:solidFill>
+                  <a:srgbClr val="1F6E70"/>
+                </a:solidFill>
+                <a:latin typeface="NanumGothic"/>
+                <a:ea typeface="NanumGothic"/>
+              </a:rPr>
+              <a:t>1차: 혈당조절+약물(가바펜틴·듀록세틴) → 난치성이면 LSB 고려</a:t>
             </a:r>
           </a:p>
         </p:txBody>
@@ -7675,7 +7442,7 @@
                 <a:latin typeface="NanumGothic"/>
                 <a:ea typeface="NanumGothic"/>
               </a:rPr>
-              <a:t>실측 수치(Dickey 2024)</a:t>
+              <a:t>LSB — 치료 삽입</a:t>
             </a:r>
           </a:p>
         </p:txBody>
@@ -7721,14 +7488,14 @@
               <a:t>●  </a:t>
             </a:r>
             <a:r>
-              <a:rPr sz="1250" b="1" i="0">
-                <a:solidFill>
-                  <a:srgbClr val="9FE0D8"/>
-                </a:solidFill>
-                <a:latin typeface="NanumGothic"/>
-                <a:ea typeface="NanumGothic"/>
-              </a:rPr>
-              <a:t>후경골동맥 +58.8%</a:t>
+              <a:rPr sz="1250" b="0" i="0">
+                <a:solidFill>
+                  <a:srgbClr val="FFFFFF"/>
+                </a:solidFill>
+                <a:latin typeface="NanumGothic"/>
+                <a:ea typeface="NanumGothic"/>
+              </a:rPr>
+              <a:t>기전: 교감차단 → 미세순환↑ + 교감매개통 차단</a:t>
             </a:r>
           </a:p>
           <a:p>
@@ -7758,7 +7525,7 @@
                 <a:latin typeface="NanumGothic"/>
                 <a:ea typeface="NanumGothic"/>
               </a:rPr>
-              <a:t>모세혈관 재충혈 3.92→1.30초</a:t>
+              <a:t>근거: 난치성 DPN에 LSB+신경파괴 RCT·증례</a:t>
             </a:r>
           </a:p>
           <a:p>
@@ -7788,7 +7555,7 @@
                 <a:latin typeface="NanumGothic"/>
                 <a:ea typeface="NanumGothic"/>
               </a:rPr>
-              <a:t>족부온도 +2.8°C</a:t>
+              <a:t>적용: 약물 불응·진단차단 양성 시 선택적 시행</a:t>
             </a:r>
           </a:p>
           <a:p>
@@ -7811,14 +7578,14 @@
               <a:t>●  </a:t>
             </a:r>
             <a:r>
-              <a:rPr sz="1250" b="1" i="0">
-                <a:solidFill>
-                  <a:srgbClr val="9FE0D8"/>
-                </a:solidFill>
-                <a:latin typeface="NanumGothic"/>
-                <a:ea typeface="NanumGothic"/>
-              </a:rPr>
-              <a:t>→ 관류 개선의 객관 근거</a:t>
+              <a:rPr sz="1250" b="0" i="0">
+                <a:solidFill>
+                  <a:srgbClr val="FFFFFF"/>
+                </a:solidFill>
+                <a:latin typeface="NanumGothic"/>
+                <a:ea typeface="NanumGothic"/>
+              </a:rPr>
+              <a:t>성공지표: 피부온도 ≥2°C↑ (근거 제한적)</a:t>
             </a:r>
           </a:p>
         </p:txBody>
@@ -7861,7 +7628,7 @@
                 <a:latin typeface="NanumGothic"/>
                 <a:ea typeface="NanumGothic"/>
               </a:rPr>
-              <a:t>근거: Dickey 2024(Cureus); Medicina 2024; Barreto 2018</a:t>
+              <a:t>근거: Zhang 2020(RCT) PMID 32915421; 증례 PMID 22606406; StatPearls NBK442009</a:t>
             </a:r>
           </a:p>
         </p:txBody>
@@ -8009,7 +7776,7 @@
                 <a:latin typeface="NanumGothic"/>
                 <a:ea typeface="NanumGothic"/>
               </a:rPr>
-              <a:t>효과 (2) CRPS · 기전</a:t>
+              <a:t>효과 (1) 관류 개선 · 허혈성 통증</a:t>
             </a:r>
           </a:p>
         </p:txBody>
@@ -8199,7 +7966,7 @@
         <p:spPr>
           <a:xfrm>
             <a:off x="731520" y="1371600"/>
-            <a:ext cx="10835640" cy="4754880"/>
+            <a:ext cx="6400800" cy="4663440"/>
           </a:xfrm>
           <a:prstGeom prst="rect">
             <a:avLst/>
@@ -8217,11 +7984,11 @@
                 <a:spcPct val="108000"/>
               </a:lnSpc>
               <a:spcAft>
-                <a:spcPts val="900"/>
-              </a:spcAft>
-            </a:pPr>
-            <a:r>
-              <a:rPr sz="1050" b="1" i="0">
+                <a:spcPts val="800"/>
+              </a:spcAft>
+            </a:pPr>
+            <a:r>
+              <a:rPr sz="979" b="1" i="0">
                 <a:solidFill>
                   <a:srgbClr val="2C898A"/>
                 </a:solidFill>
@@ -8231,14 +7998,14 @@
               <a:t>●  </a:t>
             </a:r>
             <a:r>
-              <a:rPr sz="1500" b="1" i="0">
+              <a:rPr sz="1400" b="1" i="0">
                 <a:solidFill>
                   <a:srgbClr val="1A202C"/>
                 </a:solidFill>
                 <a:latin typeface="NanumGothic"/>
                 <a:ea typeface="NanumGothic"/>
               </a:rPr>
-              <a:t>CRPS는 교감신경 매개 통증의 전형 → LSB 후 유의한 통증완화가 축적된 근거. 최적 환자 선택·조기 시행이 성공률↑.</a:t>
+              <a:t>관류 실측(Dickey 2024): LSB 후 후경골동맥 직경 0.17→0.27 cm(+58.8%), 모세혈관 재충혈 3.92→1.30초, 족부온도 +2.8°C.</a:t>
             </a:r>
           </a:p>
           <a:p>
@@ -8247,11 +8014,11 @@
                 <a:spcPct val="108000"/>
               </a:lnSpc>
               <a:spcAft>
-                <a:spcPts val="900"/>
-              </a:spcAft>
-            </a:pPr>
-            <a:r>
-              <a:rPr sz="1050" b="1" i="0">
+                <a:spcPts val="800"/>
+              </a:spcAft>
+            </a:pPr>
+            <a:r>
+              <a:rPr sz="979" b="1" i="0">
                 <a:solidFill>
                   <a:srgbClr val="2C898A"/>
                 </a:solidFill>
@@ -8261,27 +8028,169 @@
               <a:t>●  </a:t>
             </a:r>
             <a:r>
-              <a:rPr sz="1500" b="0" i="0">
+              <a:rPr sz="1400" b="0" i="0">
+                <a:solidFill>
+                  <a:srgbClr val="2E7D32"/>
+                </a:solidFill>
+                <a:latin typeface="NanumGothic"/>
+                <a:ea typeface="NanumGothic"/>
+              </a:rPr>
+              <a:t>허혈성 통증(PAD): 하지 통증 최대 75%↓, Fontaine 분류·측부관류 개선(Medicina 2024).</a:t>
+            </a:r>
+          </a:p>
+          <a:p>
+            <a:pPr algn="l">
+              <a:lnSpc>
+                <a:spcPct val="108000"/>
+              </a:lnSpc>
+              <a:spcAft>
+                <a:spcPts val="800"/>
+              </a:spcAft>
+            </a:pPr>
+            <a:r>
+              <a:rPr sz="979" b="1" i="0">
+                <a:solidFill>
+                  <a:srgbClr val="2C898A"/>
+                </a:solidFill>
+                <a:latin typeface="NanumGothic"/>
+                <a:ea typeface="NanumGothic"/>
+              </a:rPr>
+              <a:t>●  </a:t>
+            </a:r>
+            <a:r>
+              <a:rPr sz="1400" b="0" i="0">
                 <a:solidFill>
                   <a:srgbClr val="1A202C"/>
                 </a:solidFill>
                 <a:latin typeface="NanumGothic"/>
                 <a:ea typeface="NanumGothic"/>
               </a:rPr>
-              <a:t>Choi 2024(Sci Rep): 교감신경 신경파괴의 효과 지속기간을 전향 관찰로 제시.</a:t>
-            </a:r>
-          </a:p>
+              <a:t>비재건성 CLI: 교감신경 신경파괴가 절단 외 대안이 없는 환자의 통증조절에 효과적·안전(Barreto 2018).</a:t>
+            </a:r>
+          </a:p>
+        </p:txBody>
+      </p:sp>
+      <p:sp>
+        <p:nvSpPr>
+          <p:cNvPr id="9" name="Rounded Rectangle 8"/>
+          <p:cNvSpPr/>
+          <p:nvPr/>
+        </p:nvSpPr>
+        <p:spPr>
+          <a:xfrm>
+            <a:off x="7406640" y="1463040"/>
+            <a:ext cx="4114800" cy="4480560"/>
+          </a:xfrm>
+          <a:prstGeom prst="roundRect">
+            <a:avLst>
+              <a:gd name="adj" fmla="val 8000"/>
+            </a:avLst>
+          </a:prstGeom>
+          <a:solidFill>
+            <a:srgbClr val="1B355E"/>
+          </a:solidFill>
+          <a:ln>
+            <a:noFill/>
+          </a:ln>
+          <a:effectLst/>
+        </p:spPr>
+        <p:style>
+          <a:lnRef idx="1">
+            <a:schemeClr val="accent1"/>
+          </a:lnRef>
+          <a:fillRef idx="3">
+            <a:schemeClr val="accent1"/>
+          </a:fillRef>
+          <a:effectRef idx="2">
+            <a:schemeClr val="accent1"/>
+          </a:effectRef>
+          <a:fontRef idx="minor">
+            <a:schemeClr val="lt1"/>
+          </a:fontRef>
+        </p:style>
+        <p:txBody>
+          <a:bodyPr rtlCol="0" anchor="ctr"/>
+          <a:lstStyle/>
+          <a:p>
+            <a:pPr algn="ctr"/>
+          </a:p>
+        </p:txBody>
+      </p:sp>
+      <p:sp>
+        <p:nvSpPr>
+          <p:cNvPr id="10" name="TextBox 9"/>
+          <p:cNvSpPr txBox="1"/>
+          <p:nvPr/>
+        </p:nvSpPr>
+        <p:spPr>
+          <a:xfrm>
+            <a:off x="7680960" y="1691640"/>
+            <a:ext cx="3657600" cy="365760"/>
+          </a:xfrm>
+          <a:prstGeom prst="rect">
+            <a:avLst/>
+          </a:prstGeom>
+          <a:noFill/>
+        </p:spPr>
+        <p:txBody>
+          <a:bodyPr wrap="square" anchor="t" lIns="0" rIns="0" tIns="0" bIns="0">
+            <a:spAutoFit/>
+          </a:bodyPr>
+          <a:lstStyle/>
           <a:p>
             <a:pPr algn="l">
               <a:lnSpc>
                 <a:spcPct val="108000"/>
               </a:lnSpc>
               <a:spcAft>
-                <a:spcPts val="900"/>
-              </a:spcAft>
-            </a:pPr>
-            <a:r>
-              <a:rPr sz="1050" b="1" i="0">
+                <a:spcPts val="400"/>
+              </a:spcAft>
+            </a:pPr>
+            <a:r>
+              <a:rPr sz="1300" b="1" i="0">
+                <a:solidFill>
+                  <a:srgbClr val="BFD3E6"/>
+                </a:solidFill>
+                <a:latin typeface="NanumGothic"/>
+                <a:ea typeface="NanumGothic"/>
+              </a:rPr>
+              <a:t>실측 수치(Dickey 2024)</a:t>
+            </a:r>
+          </a:p>
+        </p:txBody>
+      </p:sp>
+      <p:sp>
+        <p:nvSpPr>
+          <p:cNvPr id="11" name="TextBox 10"/>
+          <p:cNvSpPr txBox="1"/>
+          <p:nvPr/>
+        </p:nvSpPr>
+        <p:spPr>
+          <a:xfrm>
+            <a:off x="7680960" y="2194560"/>
+            <a:ext cx="3611880" cy="3657600"/>
+          </a:xfrm>
+          <a:prstGeom prst="rect">
+            <a:avLst/>
+          </a:prstGeom>
+          <a:noFill/>
+        </p:spPr>
+        <p:txBody>
+          <a:bodyPr wrap="square" lIns="0" rIns="0" tIns="0" bIns="0">
+            <a:spAutoFit/>
+          </a:bodyPr>
+          <a:lstStyle/>
+          <a:p>
+            <a:pPr algn="l">
+              <a:lnSpc>
+                <a:spcPct val="108000"/>
+              </a:lnSpc>
+              <a:spcAft>
+                <a:spcPts val="800"/>
+              </a:spcAft>
+            </a:pPr>
+            <a:r>
+              <a:rPr sz="875" b="1" i="0">
                 <a:solidFill>
                   <a:srgbClr val="2C898A"/>
                 </a:solidFill>
@@ -8291,14 +8200,14 @@
               <a:t>●  </a:t>
             </a:r>
             <a:r>
-              <a:rPr sz="1500" b="0" i="0">
-                <a:solidFill>
-                  <a:srgbClr val="1A202C"/>
-                </a:solidFill>
-                <a:latin typeface="NanumGothic"/>
-                <a:ea typeface="NanumGothic"/>
-              </a:rPr>
-              <a:t>반응 예측: 교감신경 피부반응(sympathetic skin response)이 LSB 반응 예측에 유용(Pain Ther 2023).</a:t>
+              <a:rPr sz="1250" b="1" i="0">
+                <a:solidFill>
+                  <a:srgbClr val="9FE0D8"/>
+                </a:solidFill>
+                <a:latin typeface="NanumGothic"/>
+                <a:ea typeface="NanumGothic"/>
+              </a:rPr>
+              <a:t>후경골동맥 +58.8%</a:t>
             </a:r>
           </a:p>
           <a:p>
@@ -8307,11 +8216,11 @@
                 <a:spcPct val="108000"/>
               </a:lnSpc>
               <a:spcAft>
-                <a:spcPts val="900"/>
-              </a:spcAft>
-            </a:pPr>
-            <a:r>
-              <a:rPr sz="1050" b="1" i="0">
+                <a:spcPts val="800"/>
+              </a:spcAft>
+            </a:pPr>
+            <a:r>
+              <a:rPr sz="875" b="1" i="0">
                 <a:solidFill>
                   <a:srgbClr val="2C898A"/>
                 </a:solidFill>
@@ -8321,14 +8230,14 @@
               <a:t>●  </a:t>
             </a:r>
             <a:r>
-              <a:rPr sz="1500" b="0" i="0">
-                <a:solidFill>
-                  <a:srgbClr val="5A6B7B"/>
-                </a:solidFill>
-                <a:latin typeface="NanumGothic"/>
-                <a:ea typeface="NanumGothic"/>
-              </a:rPr>
-              <a:t>한계: 중추 감작이 진행되면 시간이 지날수록 효과 감소 가능.</a:t>
+              <a:rPr sz="1250" b="0" i="0">
+                <a:solidFill>
+                  <a:srgbClr val="FFFFFF"/>
+                </a:solidFill>
+                <a:latin typeface="NanumGothic"/>
+                <a:ea typeface="NanumGothic"/>
+              </a:rPr>
+              <a:t>모세혈관 재충혈 3.92→1.30초</a:t>
             </a:r>
           </a:p>
           <a:p>
@@ -8337,35 +8246,65 @@
                 <a:spcPct val="108000"/>
               </a:lnSpc>
               <a:spcAft>
-                <a:spcPts val="900"/>
-              </a:spcAft>
-            </a:pPr>
-            <a:r>
-              <a:rPr sz="1500" b="1" i="0">
-                <a:solidFill>
-                  <a:srgbClr val="5A6B7B"/>
-                </a:solidFill>
-                <a:latin typeface="NanumGothic"/>
-                <a:ea typeface="NanumGothic"/>
-              </a:rPr>
-              <a:t/>
-            </a:r>
-            <a:r>
-              <a:rPr sz="1500" b="1" i="0">
-                <a:solidFill>
-                  <a:srgbClr val="1F6E70"/>
-                </a:solidFill>
-                <a:latin typeface="NanumGothic"/>
-                <a:ea typeface="NanumGothic"/>
-              </a:rPr>
-              <a:t>기전 요약: 교감차단 → 측부순환 혈관확장 → 조직 산소화↑ → 통증↓ + 교감매개통 차단 + 신경파괴 직접효과.</a:t>
-            </a:r>
-          </a:p>
-        </p:txBody>
-      </p:sp>
-      <p:sp>
-        <p:nvSpPr>
-          <p:cNvPr id="9" name="TextBox 8"/>
+                <a:spcPts val="800"/>
+              </a:spcAft>
+            </a:pPr>
+            <a:r>
+              <a:rPr sz="875" b="1" i="0">
+                <a:solidFill>
+                  <a:srgbClr val="2C898A"/>
+                </a:solidFill>
+                <a:latin typeface="NanumGothic"/>
+                <a:ea typeface="NanumGothic"/>
+              </a:rPr>
+              <a:t>●  </a:t>
+            </a:r>
+            <a:r>
+              <a:rPr sz="1250" b="0" i="0">
+                <a:solidFill>
+                  <a:srgbClr val="FFFFFF"/>
+                </a:solidFill>
+                <a:latin typeface="NanumGothic"/>
+                <a:ea typeface="NanumGothic"/>
+              </a:rPr>
+              <a:t>족부온도 +2.8°C</a:t>
+            </a:r>
+          </a:p>
+          <a:p>
+            <a:pPr algn="l">
+              <a:lnSpc>
+                <a:spcPct val="108000"/>
+              </a:lnSpc>
+              <a:spcAft>
+                <a:spcPts val="800"/>
+              </a:spcAft>
+            </a:pPr>
+            <a:r>
+              <a:rPr sz="875" b="1" i="0">
+                <a:solidFill>
+                  <a:srgbClr val="2C898A"/>
+                </a:solidFill>
+                <a:latin typeface="NanumGothic"/>
+                <a:ea typeface="NanumGothic"/>
+              </a:rPr>
+              <a:t>●  </a:t>
+            </a:r>
+            <a:r>
+              <a:rPr sz="1250" b="1" i="0">
+                <a:solidFill>
+                  <a:srgbClr val="9FE0D8"/>
+                </a:solidFill>
+                <a:latin typeface="NanumGothic"/>
+                <a:ea typeface="NanumGothic"/>
+              </a:rPr>
+              <a:t>→ 관류 개선의 객관 근거</a:t>
+            </a:r>
+          </a:p>
+        </p:txBody>
+      </p:sp>
+      <p:sp>
+        <p:nvSpPr>
+          <p:cNvPr id="12" name="TextBox 11"/>
           <p:cNvSpPr txBox="1"/>
           <p:nvPr/>
         </p:nvSpPr>
@@ -8401,14 +8340,14 @@
                 <a:latin typeface="NanumGothic"/>
                 <a:ea typeface="NanumGothic"/>
               </a:rPr>
-              <a:t>근거: Choi 2024(Sci Rep); Pain Ther 2023</a:t>
-            </a:r>
-          </a:p>
-        </p:txBody>
-      </p:sp>
-      <p:sp>
-        <p:nvSpPr>
-          <p:cNvPr id="10" name="TextBox 9"/>
+              <a:t>근거: Dickey 2024(Cureus); Medicina 2024; Barreto 2018</a:t>
+            </a:r>
+          </a:p>
+        </p:txBody>
+      </p:sp>
+      <p:sp>
+        <p:nvSpPr>
+          <p:cNvPr id="13" name="TextBox 12"/>
           <p:cNvSpPr txBox="1"/>
           <p:nvPr/>
         </p:nvSpPr>
@@ -8549,7 +8488,7 @@
                 <a:latin typeface="NanumGothic"/>
                 <a:ea typeface="NanumGothic"/>
               </a:rPr>
-              <a:t>근거수준 · 결론</a:t>
+              <a:t>효과 (2) CRPS · 기전</a:t>
             </a:r>
           </a:p>
         </p:txBody>
@@ -8592,7 +8531,7 @@
                 <a:latin typeface="NanumGothic"/>
                 <a:ea typeface="NanumGothic"/>
               </a:rPr>
-              <a:t>안전성 · 결론</a:t>
+              <a:t>효과</a:t>
             </a:r>
           </a:p>
         </p:txBody>
@@ -8649,8 +8588,8 @@
         </p:nvSpPr>
         <p:spPr>
           <a:xfrm>
-            <a:off x="11194999" y="365760"/>
-            <a:ext cx="493776" cy="347472"/>
+            <a:off x="10426903" y="365760"/>
+            <a:ext cx="1261872" cy="347472"/>
           </a:xfrm>
           <a:prstGeom prst="roundRect">
             <a:avLst>
@@ -8658,7 +8597,7 @@
             </a:avLst>
           </a:prstGeom>
           <a:solidFill>
-            <a:srgbClr val="B03A2E"/>
+            <a:srgbClr val="B97A0C"/>
           </a:solidFill>
           <a:ln>
             <a:noFill/>
@@ -8695,8 +8634,8 @@
         </p:nvSpPr>
         <p:spPr>
           <a:xfrm>
-            <a:off x="11194999" y="365760"/>
-            <a:ext cx="493776" cy="347472"/>
+            <a:off x="10426903" y="365760"/>
+            <a:ext cx="1261872" cy="347472"/>
           </a:xfrm>
           <a:prstGeom prst="rect">
             <a:avLst/>
@@ -8725,7 +8664,7 @@
                 <a:latin typeface="NanumGothic"/>
                 <a:ea typeface="NanumGothic"/>
               </a:rPr>
-              <a:t>결론</a:t>
+              <a:t>Lv III–IV</a:t>
             </a:r>
           </a:p>
         </p:txBody>
@@ -8773,12 +8712,12 @@
             <a:r>
               <a:rPr sz="1500" b="1" i="0">
                 <a:solidFill>
-                  <a:srgbClr val="B03A2E"/>
-                </a:solidFill>
-                <a:latin typeface="NanumGothic"/>
-                <a:ea typeface="NanumGothic"/>
-              </a:rPr>
-              <a:t>합병증·회피는 앞의 조감도·회피표 참고 — 대부분 영상유도·정확한 바늘 위치로 예방 가능.</a:t>
+                  <a:srgbClr val="1A202C"/>
+                </a:solidFill>
+                <a:latin typeface="NanumGothic"/>
+                <a:ea typeface="NanumGothic"/>
+              </a:rPr>
+              <a:t>CRPS는 교감신경 매개 통증의 전형 → LSB 후 유의한 통증완화가 축적된 근거. 최적 환자 선택·조기 시행이 성공률↑.</a:t>
             </a:r>
           </a:p>
           <a:p>
@@ -8808,7 +8747,7 @@
                 <a:latin typeface="NanumGothic"/>
                 <a:ea typeface="NanumGothic"/>
               </a:rPr>
-              <a:t>근거수준: 대부분 관찰·증례군·소규모 전향연구로 대규모 RCT는 부족(허혈·CRPS Level III~IV). 단, 난치성 당뇨병성 신경병증엔 RCT 존재.</a:t>
+              <a:t>Choi 2024(Sci Rep): 교감신경 신경파괴의 효과 지속기간을 전향 관찰로 제시.</a:t>
             </a:r>
           </a:p>
           <a:p>
@@ -8838,7 +8777,7 @@
                 <a:latin typeface="NanumGothic"/>
                 <a:ea typeface="NanumGothic"/>
               </a:rPr>
-              <a:t>시행 원칙: 원인 감별 → 진단적 국소마취제 차단(온도 ≥2°C 확인) → 반응 양호 시 신경파괴/RFA.</a:t>
+              <a:t>반응 예측: 교감신경 피부반응(sympathetic skin response)이 LSB 반응 예측에 유용(Pain Ther 2023).</a:t>
             </a:r>
           </a:p>
           <a:p>
@@ -8851,6 +8790,36 @@
               </a:spcAft>
             </a:pPr>
             <a:r>
+              <a:rPr sz="1050" b="1" i="0">
+                <a:solidFill>
+                  <a:srgbClr val="2C898A"/>
+                </a:solidFill>
+                <a:latin typeface="NanumGothic"/>
+                <a:ea typeface="NanumGothic"/>
+              </a:rPr>
+              <a:t>●  </a:t>
+            </a:r>
+            <a:r>
+              <a:rPr sz="1500" b="0" i="0">
+                <a:solidFill>
+                  <a:srgbClr val="5A6B7B"/>
+                </a:solidFill>
+                <a:latin typeface="NanumGothic"/>
+                <a:ea typeface="NanumGothic"/>
+              </a:rPr>
+              <a:t>한계: 중추 감작이 진행되면 시간이 지날수록 효과 감소 가능.</a:t>
+            </a:r>
+          </a:p>
+          <a:p>
+            <a:pPr algn="l">
+              <a:lnSpc>
+                <a:spcPct val="108000"/>
+              </a:lnSpc>
+              <a:spcAft>
+                <a:spcPts val="900"/>
+              </a:spcAft>
+            </a:pPr>
+            <a:r>
               <a:rPr sz="1500" b="1" i="0">
                 <a:solidFill>
                   <a:srgbClr val="5A6B7B"/>
@@ -8868,7 +8837,7 @@
                 <a:latin typeface="NanumGothic"/>
                 <a:ea typeface="NanumGothic"/>
               </a:rPr>
-              <a:t>그럼에도 조기 CRPS·재건 불가능한 중증 하지허혈(안정통)·난치성 신경병증에서 임상적으로 유용.</a:t>
+              <a:t>기전 요약: 교감차단 → 측부순환 혈관확장 → 조직 산소화↑ → 통증↓ + 교감매개통 차단 + 신경파괴 직접효과.</a:t>
             </a:r>
           </a:p>
         </p:txBody>
@@ -8911,7 +8880,7 @@
                 <a:latin typeface="NanumGothic"/>
                 <a:ea typeface="NanumGothic"/>
               </a:rPr>
-              <a:t>근거: StatPearls; 문헌고찰 종합</a:t>
+              <a:t>근거: Choi 2024(Sci Rep); Pain Ther 2023</a:t>
             </a:r>
           </a:p>
         </p:txBody>
@@ -9059,7 +9028,7 @@
                 <a:latin typeface="NanumGothic"/>
                 <a:ea typeface="NanumGothic"/>
               </a:rPr>
-              <a:t>실제 진료 순서 — 교감신경 축을 겨냥한 단계적 접근</a:t>
+              <a:t>근거수준 · 결론</a:t>
             </a:r>
           </a:p>
         </p:txBody>
@@ -9102,7 +9071,7 @@
                 <a:latin typeface="NanumGothic"/>
                 <a:ea typeface="NanumGothic"/>
               </a:rPr>
-              <a:t>나의 프로토콜 · 실제 적용</a:t>
+              <a:t>안전성 · 결론</a:t>
             </a:r>
           </a:p>
         </p:txBody>
@@ -9159,8 +9128,8 @@
         </p:nvSpPr>
         <p:spPr>
           <a:xfrm>
-            <a:off x="10865816" y="365760"/>
-            <a:ext cx="822959" cy="347472"/>
+            <a:off x="11194999" y="365760"/>
+            <a:ext cx="493776" cy="347472"/>
           </a:xfrm>
           <a:prstGeom prst="roundRect">
             <a:avLst>
@@ -9168,7 +9137,7 @@
             </a:avLst>
           </a:prstGeom>
           <a:solidFill>
-            <a:srgbClr val="1A202C"/>
+            <a:srgbClr val="B03A2E"/>
           </a:solidFill>
           <a:ln>
             <a:noFill/>
@@ -9205,8 +9174,8 @@
         </p:nvSpPr>
         <p:spPr>
           <a:xfrm>
-            <a:off x="10865816" y="365760"/>
-            <a:ext cx="822959" cy="347472"/>
+            <a:off x="11194999" y="365760"/>
+            <a:ext cx="493776" cy="347472"/>
           </a:xfrm>
           <a:prstGeom prst="rect">
             <a:avLst/>
@@ -9235,7 +9204,7 @@
                 <a:latin typeface="NanumGothic"/>
                 <a:ea typeface="NanumGothic"/>
               </a:rPr>
-              <a:t>실전 순서</a:t>
+              <a:t>결론</a:t>
             </a:r>
           </a:p>
         </p:txBody>
@@ -9267,11 +9236,11 @@
                 <a:spcPct val="108000"/>
               </a:lnSpc>
               <a:spcAft>
-                <a:spcPts val="800"/>
-              </a:spcAft>
-            </a:pPr>
-            <a:r>
-              <a:rPr sz="979" b="1" i="0">
+                <a:spcPts val="900"/>
+              </a:spcAft>
+            </a:pPr>
+            <a:r>
+              <a:rPr sz="1050" b="1" i="0">
                 <a:solidFill>
                   <a:srgbClr val="2C898A"/>
                 </a:solidFill>
@@ -9281,14 +9250,44 @@
               <a:t>●  </a:t>
             </a:r>
             <a:r>
-              <a:rPr sz="1400" b="0" i="0">
+              <a:rPr sz="1500" b="1" i="0">
+                <a:solidFill>
+                  <a:srgbClr val="B03A2E"/>
+                </a:solidFill>
+                <a:latin typeface="NanumGothic"/>
+                <a:ea typeface="NanumGothic"/>
+              </a:rPr>
+              <a:t>합병증·회피는 앞의 조감도·회피표 참고 — 대부분 영상유도·정확한 바늘 위치로 예방 가능.</a:t>
+            </a:r>
+          </a:p>
+          <a:p>
+            <a:pPr algn="l">
+              <a:lnSpc>
+                <a:spcPct val="108000"/>
+              </a:lnSpc>
+              <a:spcAft>
+                <a:spcPts val="900"/>
+              </a:spcAft>
+            </a:pPr>
+            <a:r>
+              <a:rPr sz="1050" b="1" i="0">
+                <a:solidFill>
+                  <a:srgbClr val="2C898A"/>
+                </a:solidFill>
+                <a:latin typeface="NanumGothic"/>
+                <a:ea typeface="NanumGothic"/>
+              </a:rPr>
+              <a:t>●  </a:t>
+            </a:r>
+            <a:r>
+              <a:rPr sz="1500" b="0" i="0">
                 <a:solidFill>
                   <a:srgbClr val="1A202C"/>
                 </a:solidFill>
                 <a:latin typeface="NanumGothic"/>
                 <a:ea typeface="NanumGothic"/>
               </a:rPr>
-              <a:t>① 감별·검사: '밤/하지 증상'이 동맥성 허혈(ABI·도플러)·CRPS·신경병증인지 확인. 특발 경련·RLS·정맥류 배제.</a:t>
+              <a:t>근거수준: 대부분 관찰·증례군·소규모 전향연구로 대규모 RCT는 부족(허혈·CRPS Level III~IV). 단, 난치성 당뇨병성 신경병증엔 RCT 존재.</a:t>
             </a:r>
           </a:p>
           <a:p>
@@ -9297,11 +9296,11 @@
                 <a:spcPct val="108000"/>
               </a:lnSpc>
               <a:spcAft>
-                <a:spcPts val="800"/>
-              </a:spcAft>
-            </a:pPr>
-            <a:r>
-              <a:rPr sz="979" b="1" i="0">
+                <a:spcPts val="900"/>
+              </a:spcAft>
+            </a:pPr>
+            <a:r>
+              <a:rPr sz="1050" b="1" i="0">
                 <a:solidFill>
                   <a:srgbClr val="2C898A"/>
                 </a:solidFill>
@@ -9311,14 +9310,14 @@
               <a:t>●  </a:t>
             </a:r>
             <a:r>
-              <a:rPr sz="1400" b="0" i="0">
+              <a:rPr sz="1500" b="0" i="0">
                 <a:solidFill>
                   <a:srgbClr val="1A202C"/>
                 </a:solidFill>
                 <a:latin typeface="NanumGothic"/>
                 <a:ea typeface="NanumGothic"/>
               </a:rPr>
-              <a:t>② 방향 설정: 교감매개통·허혈로 판단되면 교감신경 축(L2–L3)을 겨냥.</a:t>
+              <a:t>시행 원칙: 원인 감별 → 진단적 국소마취제 차단(온도 ≥2°C 확인) → 반응 양호 시 신경파괴/RFA.</a:t>
             </a:r>
           </a:p>
           <a:p>
@@ -9327,101 +9326,11 @@
                 <a:spcPct val="108000"/>
               </a:lnSpc>
               <a:spcAft>
-                <a:spcPts val="800"/>
-              </a:spcAft>
-            </a:pPr>
-            <a:r>
-              <a:rPr sz="979" b="1" i="0">
-                <a:solidFill>
-                  <a:srgbClr val="2C898A"/>
-                </a:solidFill>
-                <a:latin typeface="NanumGothic"/>
-                <a:ea typeface="NanumGothic"/>
-              </a:rPr>
-              <a:t>●  </a:t>
-            </a:r>
-            <a:r>
-              <a:rPr sz="1400" b="1" i="0">
-                <a:solidFill>
-                  <a:srgbClr val="2E7D32"/>
-                </a:solidFill>
-                <a:latin typeface="NanumGothic"/>
-                <a:ea typeface="NanumGothic"/>
-              </a:rPr>
-              <a:t>③ 진단적 차단: 투시 유도 국소마취제 LSB → 피부온도 ≥2°C 상승·통증 반응 확인.</a:t>
-            </a:r>
-          </a:p>
-          <a:p>
-            <a:pPr algn="l">
-              <a:lnSpc>
-                <a:spcPct val="108000"/>
-              </a:lnSpc>
-              <a:spcAft>
-                <a:spcPts val="800"/>
-              </a:spcAft>
-            </a:pPr>
-            <a:r>
-              <a:rPr sz="979" b="1" i="0">
-                <a:solidFill>
-                  <a:srgbClr val="2C898A"/>
-                </a:solidFill>
-                <a:latin typeface="NanumGothic"/>
-                <a:ea typeface="NanumGothic"/>
-              </a:rPr>
-              <a:t>●  </a:t>
-            </a:r>
-            <a:r>
-              <a:rPr sz="1400" b="1" i="0">
-                <a:solidFill>
-                  <a:srgbClr val="2E7D32"/>
-                </a:solidFill>
-                <a:latin typeface="NanumGothic"/>
-                <a:ea typeface="NanumGothic"/>
-              </a:rPr>
-              <a:t>④ 반응 양호 시: 치료적 반복 차단, 또는 신경파괴(무수알코올/phenol)·RFA로 장기 완화.</a:t>
-            </a:r>
-          </a:p>
-          <a:p>
-            <a:pPr algn="l">
-              <a:lnSpc>
-                <a:spcPct val="108000"/>
-              </a:lnSpc>
-              <a:spcAft>
-                <a:spcPts val="800"/>
-              </a:spcAft>
-            </a:pPr>
-            <a:r>
-              <a:rPr sz="979" b="1" i="0">
-                <a:solidFill>
-                  <a:srgbClr val="2C898A"/>
-                </a:solidFill>
-                <a:latin typeface="NanumGothic"/>
-                <a:ea typeface="NanumGothic"/>
-              </a:rPr>
-              <a:t>●  </a:t>
-            </a:r>
-            <a:r>
-              <a:rPr sz="1400" b="0" i="0">
-                <a:solidFill>
-                  <a:srgbClr val="1A202C"/>
-                </a:solidFill>
-                <a:latin typeface="NanumGothic"/>
-                <a:ea typeface="NanumGothic"/>
-              </a:rPr>
-              <a:t>⑤ 대상별: CRPS는 조기(≤12개월) 유리 · 난치성 당뇨병성 신경병증은 지속 LSB+신경파괴(RCT).</a:t>
-            </a:r>
-          </a:p>
-          <a:p>
-            <a:pPr algn="l">
-              <a:lnSpc>
-                <a:spcPct val="108000"/>
-              </a:lnSpc>
-              <a:spcAft>
-                <a:spcPts val="800"/>
-              </a:spcAft>
-            </a:pPr>
-            <a:r>
-              <a:rPr sz="1400" b="1" i="0">
+                <a:spcPts val="900"/>
+              </a:spcAft>
+            </a:pPr>
+            <a:r>
+              <a:rPr sz="1500" b="1" i="0">
                 <a:solidFill>
                   <a:srgbClr val="5A6B7B"/>
                 </a:solidFill>
@@ -9431,14 +9340,14 @@
               <a:t/>
             </a:r>
             <a:r>
-              <a:rPr sz="1400" b="1" i="0">
+              <a:rPr sz="1500" b="1" i="0">
                 <a:solidFill>
                   <a:srgbClr val="1F6E70"/>
                 </a:solidFill>
                 <a:latin typeface="NanumGothic"/>
                 <a:ea typeface="NanumGothic"/>
               </a:rPr>
-              <a:t>⑥ 주의: 특발성 NLC·정맥질환은 적응 아님 · 합병증(생식대퇴신경통 5–10% 등) 사전 고지.</a:t>
+              <a:t>그럼에도 조기 CRPS·재건 불가능한 중증 하지허혈(안정통)·난치성 신경병증에서 임상적으로 유용.</a:t>
             </a:r>
           </a:p>
         </p:txBody>
@@ -9481,7 +9390,7 @@
                 <a:latin typeface="NanumGothic"/>
                 <a:ea typeface="NanumGothic"/>
               </a:rPr>
-              <a:t>근거: 교육용 제안 · 개별 적용은 임상 판단 · 신경파괴는 진단차단 양성 시에만</a:t>
+              <a:t>근거: StatPearls; 문헌고찰 종합</a:t>
             </a:r>
           </a:p>
         </p:txBody>
@@ -10510,52 +10419,8 @@
         </p:nvSpPr>
         <p:spPr>
           <a:xfrm>
-            <a:off x="0" y="0"/>
-            <a:ext cx="12191695" cy="6858000"/>
-          </a:xfrm>
-          <a:prstGeom prst="rect">
-            <a:avLst/>
-          </a:prstGeom>
-          <a:solidFill>
-            <a:srgbClr val="1B355E"/>
-          </a:solidFill>
-          <a:ln>
-            <a:noFill/>
-          </a:ln>
-          <a:effectLst/>
-        </p:spPr>
-        <p:style>
-          <a:lnRef idx="1">
-            <a:schemeClr val="accent1"/>
-          </a:lnRef>
-          <a:fillRef idx="3">
-            <a:schemeClr val="accent1"/>
-          </a:fillRef>
-          <a:effectRef idx="2">
-            <a:schemeClr val="accent1"/>
-          </a:effectRef>
-          <a:fontRef idx="minor">
-            <a:schemeClr val="lt1"/>
-          </a:fontRef>
-        </p:style>
-        <p:txBody>
-          <a:bodyPr rtlCol="0" anchor="ctr"/>
-          <a:lstStyle/>
-          <a:p>
-            <a:pPr algn="ctr"/>
-          </a:p>
-        </p:txBody>
-      </p:sp>
-      <p:sp>
-        <p:nvSpPr>
-          <p:cNvPr id="3" name="Rectangle 2"/>
-          <p:cNvSpPr/>
-          <p:nvPr/>
-        </p:nvSpPr>
-        <p:spPr>
-          <a:xfrm>
-            <a:off x="0" y="0"/>
-            <a:ext cx="201168" cy="6858000"/>
+            <a:off x="502920" y="310896"/>
+            <a:ext cx="109728" cy="457200"/>
           </a:xfrm>
           <a:prstGeom prst="rect">
             <a:avLst/>
@@ -10592,14 +10457,57 @@
       </p:sp>
       <p:sp>
         <p:nvSpPr>
+          <p:cNvPr id="3" name="TextBox 2"/>
+          <p:cNvSpPr txBox="1"/>
+          <p:nvPr/>
+        </p:nvSpPr>
+        <p:spPr>
+          <a:xfrm>
+            <a:off x="731520" y="237744"/>
+            <a:ext cx="9509760" cy="685800"/>
+          </a:xfrm>
+          <a:prstGeom prst="rect">
+            <a:avLst/>
+          </a:prstGeom>
+          <a:noFill/>
+        </p:spPr>
+        <p:txBody>
+          <a:bodyPr wrap="square" anchor="ctr" lIns="0" rIns="0" tIns="0" bIns="0">
+            <a:spAutoFit/>
+          </a:bodyPr>
+          <a:lstStyle/>
+          <a:p>
+            <a:pPr algn="l">
+              <a:lnSpc>
+                <a:spcPct val="108000"/>
+              </a:lnSpc>
+              <a:spcAft>
+                <a:spcPts val="400"/>
+              </a:spcAft>
+            </a:pPr>
+            <a:r>
+              <a:rPr sz="2400" b="1" i="0">
+                <a:solidFill>
+                  <a:srgbClr val="1B355E"/>
+                </a:solidFill>
+                <a:latin typeface="NanumGothic"/>
+                <a:ea typeface="NanumGothic"/>
+              </a:rPr>
+              <a:t>실제 진료 순서 — 교감신경 축을 겨냥한 단계적 접근</a:t>
+            </a:r>
+          </a:p>
+        </p:txBody>
+      </p:sp>
+      <p:sp>
+        <p:nvSpPr>
           <p:cNvPr id="4" name="TextBox 3"/>
           <p:cNvSpPr txBox="1"/>
           <p:nvPr/>
         </p:nvSpPr>
         <p:spPr>
           <a:xfrm>
-            <a:off x="822960" y="640080"/>
-            <a:ext cx="10515600" cy="457200"/>
+            <a:off x="749808" y="109728"/>
+            <a:ext cx="7315200" cy="219456"/>
           </a:xfrm>
           <a:prstGeom prst="rect">
             <a:avLst/>
@@ -10621,77 +10529,34 @@
               </a:spcAft>
             </a:pPr>
             <a:r>
-              <a:rPr sz="1300" b="1" i="0">
-                <a:solidFill>
-                  <a:srgbClr val="9FE0D8"/>
-                </a:solidFill>
-                <a:latin typeface="NanumGothic"/>
-                <a:ea typeface="NanumGothic"/>
-              </a:rPr>
-              <a:t>핵심 메시지 — LSB</a:t>
-            </a:r>
-          </a:p>
-        </p:txBody>
-      </p:sp>
-      <p:sp>
-        <p:nvSpPr>
-          <p:cNvPr id="5" name="TextBox 4"/>
-          <p:cNvSpPr txBox="1"/>
-          <p:nvPr/>
-        </p:nvSpPr>
-        <p:spPr>
-          <a:xfrm>
-            <a:off x="822960" y="1097280"/>
-            <a:ext cx="10515600" cy="914400"/>
-          </a:xfrm>
-          <a:prstGeom prst="rect">
-            <a:avLst/>
-          </a:prstGeom>
-          <a:noFill/>
-        </p:spPr>
-        <p:txBody>
-          <a:bodyPr wrap="square" anchor="t" lIns="0" rIns="0" tIns="0" bIns="0">
-            <a:spAutoFit/>
-          </a:bodyPr>
-          <a:lstStyle/>
-          <a:p>
-            <a:pPr algn="l">
-              <a:lnSpc>
-                <a:spcPct val="110000"/>
-              </a:lnSpc>
-              <a:spcAft>
-                <a:spcPts val="400"/>
-              </a:spcAft>
-            </a:pPr>
-            <a:r>
-              <a:rPr sz="2200" b="1" i="0">
-                <a:solidFill>
-                  <a:srgbClr val="FFFFFF"/>
-                </a:solidFill>
-                <a:latin typeface="NanumGothic"/>
-                <a:ea typeface="NanumGothic"/>
-              </a:rPr>
-              <a:t>표준은 투시 유도 방척추 접근, 성공은 온도 ≥2°C</a:t>
-            </a:r>
-          </a:p>
-        </p:txBody>
-      </p:sp>
-      <p:sp>
-        <p:nvSpPr>
-          <p:cNvPr id="6" name="Rectangle 5"/>
+              <a:rPr sz="1100" b="1" i="0">
+                <a:solidFill>
+                  <a:srgbClr val="1F6E70"/>
+                </a:solidFill>
+                <a:latin typeface="NanumGothic"/>
+                <a:ea typeface="NanumGothic"/>
+              </a:rPr>
+              <a:t>나의 프로토콜 · 실제 적용</a:t>
+            </a:r>
+          </a:p>
+        </p:txBody>
+      </p:sp>
+      <p:sp>
+        <p:nvSpPr>
+          <p:cNvPr id="5" name="Rectangle 4"/>
           <p:cNvSpPr/>
           <p:nvPr/>
         </p:nvSpPr>
         <p:spPr>
           <a:xfrm>
-            <a:off x="822960" y="2322576"/>
-            <a:ext cx="146304" cy="445385"/>
+            <a:off x="731520" y="969264"/>
+            <a:ext cx="10881360" cy="17780"/>
           </a:xfrm>
           <a:prstGeom prst="rect">
             <a:avLst/>
           </a:prstGeom>
           <a:solidFill>
-            <a:srgbClr val="2C898A"/>
+            <a:srgbClr val="D5DEE7"/>
           </a:solidFill>
           <a:ln>
             <a:noFill/>
@@ -10722,106 +10587,22 @@
       </p:sp>
       <p:sp>
         <p:nvSpPr>
-          <p:cNvPr id="7" name="TextBox 6"/>
-          <p:cNvSpPr txBox="1"/>
-          <p:nvPr/>
-        </p:nvSpPr>
-        <p:spPr>
-          <a:xfrm>
-            <a:off x="1143000" y="2286000"/>
-            <a:ext cx="2926080" cy="674827"/>
-          </a:xfrm>
-          <a:prstGeom prst="rect">
-            <a:avLst/>
-          </a:prstGeom>
-          <a:noFill/>
-        </p:spPr>
-        <p:txBody>
-          <a:bodyPr wrap="square" anchor="ctr" lIns="0" rIns="0" tIns="0" bIns="0">
-            <a:spAutoFit/>
-          </a:bodyPr>
-          <a:lstStyle/>
-          <a:p>
-            <a:pPr algn="l">
-              <a:lnSpc>
-                <a:spcPct val="108000"/>
-              </a:lnSpc>
-              <a:spcAft>
-                <a:spcPts val="400"/>
-              </a:spcAft>
-            </a:pPr>
-            <a:r>
-              <a:rPr sz="1400" b="1" i="0">
-                <a:solidFill>
-                  <a:srgbClr val="9FE0D8"/>
-                </a:solidFill>
-                <a:latin typeface="NanumGothic"/>
-                <a:ea typeface="NanumGothic"/>
-              </a:rPr>
-              <a:t>방법</a:t>
-            </a:r>
-          </a:p>
-        </p:txBody>
-      </p:sp>
-      <p:sp>
-        <p:nvSpPr>
-          <p:cNvPr id="8" name="TextBox 7"/>
-          <p:cNvSpPr txBox="1"/>
-          <p:nvPr/>
-        </p:nvSpPr>
-        <p:spPr>
-          <a:xfrm>
-            <a:off x="4114800" y="2286000"/>
-            <a:ext cx="7406640" cy="674827"/>
-          </a:xfrm>
-          <a:prstGeom prst="rect">
-            <a:avLst/>
-          </a:prstGeom>
-          <a:noFill/>
-        </p:spPr>
-        <p:txBody>
-          <a:bodyPr wrap="square" anchor="ctr" lIns="0" rIns="0" tIns="0" bIns="0">
-            <a:spAutoFit/>
-          </a:bodyPr>
-          <a:lstStyle/>
-          <a:p>
-            <a:pPr algn="l">
-              <a:lnSpc>
-                <a:spcPct val="105000"/>
-              </a:lnSpc>
-              <a:spcAft>
-                <a:spcPts val="400"/>
-              </a:spcAft>
-            </a:pPr>
-            <a:r>
-              <a:rPr sz="1250" b="0" i="0">
-                <a:solidFill>
-                  <a:srgbClr val="FFFFFF"/>
-                </a:solidFill>
-                <a:latin typeface="NanumGothic"/>
-                <a:ea typeface="NanumGothic"/>
-              </a:rPr>
-              <a:t>L2–L3 방척추 접근·투시, 정중선 7 cm 외측, 조영제 두미측 확산, 성공지표 온도 ≥2°C.</a:t>
-            </a:r>
-          </a:p>
-        </p:txBody>
-      </p:sp>
-      <p:sp>
-        <p:nvSpPr>
-          <p:cNvPr id="9" name="Rectangle 8"/>
+          <p:cNvPr id="6" name="Rounded Rectangle 5"/>
           <p:cNvSpPr/>
           <p:nvPr/>
         </p:nvSpPr>
         <p:spPr>
           <a:xfrm>
-            <a:off x="822960" y="3072384"/>
-            <a:ext cx="146304" cy="445385"/>
-          </a:xfrm>
-          <a:prstGeom prst="rect">
-            <a:avLst/>
+            <a:off x="10865816" y="365760"/>
+            <a:ext cx="822959" cy="347472"/>
+          </a:xfrm>
+          <a:prstGeom prst="roundRect">
+            <a:avLst>
+              <a:gd name="adj" fmla="val 8000"/>
+            </a:avLst>
           </a:prstGeom>
           <a:solidFill>
-            <a:srgbClr val="2C898A"/>
+            <a:srgbClr val="1A202C"/>
           </a:solidFill>
           <a:ln>
             <a:noFill/>
@@ -10852,14 +10633,14 @@
       </p:sp>
       <p:sp>
         <p:nvSpPr>
-          <p:cNvPr id="10" name="TextBox 9"/>
+          <p:cNvPr id="7" name="TextBox 6"/>
           <p:cNvSpPr txBox="1"/>
           <p:nvPr/>
         </p:nvSpPr>
         <p:spPr>
           <a:xfrm>
-            <a:off x="1143000" y="3035808"/>
-            <a:ext cx="2926080" cy="674827"/>
+            <a:off x="10865816" y="365760"/>
+            <a:ext cx="822959" cy="347472"/>
           </a:xfrm>
           <a:prstGeom prst="rect">
             <a:avLst/>
@@ -10872,37 +10653,240 @@
           </a:bodyPr>
           <a:lstStyle/>
           <a:p>
+            <a:pPr algn="ctr">
+              <a:lnSpc>
+                <a:spcPct val="108000"/>
+              </a:lnSpc>
+              <a:spcAft>
+                <a:spcPts val="400"/>
+              </a:spcAft>
+            </a:pPr>
+            <a:r>
+              <a:rPr sz="1150" b="1" i="0">
+                <a:solidFill>
+                  <a:srgbClr val="FFFFFF"/>
+                </a:solidFill>
+                <a:latin typeface="NanumGothic"/>
+                <a:ea typeface="NanumGothic"/>
+              </a:rPr>
+              <a:t>실전 순서</a:t>
+            </a:r>
+          </a:p>
+        </p:txBody>
+      </p:sp>
+      <p:sp>
+        <p:nvSpPr>
+          <p:cNvPr id="8" name="TextBox 7"/>
+          <p:cNvSpPr txBox="1"/>
+          <p:nvPr/>
+        </p:nvSpPr>
+        <p:spPr>
+          <a:xfrm>
+            <a:off x="731520" y="1371600"/>
+            <a:ext cx="10835640" cy="4754880"/>
+          </a:xfrm>
+          <a:prstGeom prst="rect">
+            <a:avLst/>
+          </a:prstGeom>
+          <a:noFill/>
+        </p:spPr>
+        <p:txBody>
+          <a:bodyPr wrap="square" lIns="0" rIns="0" tIns="0" bIns="0">
+            <a:spAutoFit/>
+          </a:bodyPr>
+          <a:lstStyle/>
+          <a:p>
             <a:pPr algn="l">
               <a:lnSpc>
                 <a:spcPct val="108000"/>
               </a:lnSpc>
               <a:spcAft>
-                <a:spcPts val="400"/>
-              </a:spcAft>
-            </a:pPr>
+                <a:spcPts val="800"/>
+              </a:spcAft>
+            </a:pPr>
+            <a:r>
+              <a:rPr sz="979" b="1" i="0">
+                <a:solidFill>
+                  <a:srgbClr val="2C898A"/>
+                </a:solidFill>
+                <a:latin typeface="NanumGothic"/>
+                <a:ea typeface="NanumGothic"/>
+              </a:rPr>
+              <a:t>●  </a:t>
+            </a:r>
+            <a:r>
+              <a:rPr sz="1400" b="0" i="0">
+                <a:solidFill>
+                  <a:srgbClr val="1A202C"/>
+                </a:solidFill>
+                <a:latin typeface="NanumGothic"/>
+                <a:ea typeface="NanumGothic"/>
+              </a:rPr>
+              <a:t>① 감별·검사: '밤/하지 증상'이 동맥성 허혈(ABI·도플러)·CRPS·신경병증인지 확인. 특발 경련·RLS·정맥류 배제.</a:t>
+            </a:r>
+          </a:p>
+          <a:p>
+            <a:pPr algn="l">
+              <a:lnSpc>
+                <a:spcPct val="108000"/>
+              </a:lnSpc>
+              <a:spcAft>
+                <a:spcPts val="800"/>
+              </a:spcAft>
+            </a:pPr>
+            <a:r>
+              <a:rPr sz="979" b="1" i="0">
+                <a:solidFill>
+                  <a:srgbClr val="2C898A"/>
+                </a:solidFill>
+                <a:latin typeface="NanumGothic"/>
+                <a:ea typeface="NanumGothic"/>
+              </a:rPr>
+              <a:t>●  </a:t>
+            </a:r>
+            <a:r>
+              <a:rPr sz="1400" b="0" i="0">
+                <a:solidFill>
+                  <a:srgbClr val="1A202C"/>
+                </a:solidFill>
+                <a:latin typeface="NanumGothic"/>
+                <a:ea typeface="NanumGothic"/>
+              </a:rPr>
+              <a:t>② 방향 설정: 교감매개통·허혈로 판단되면 교감신경 축(L2–L3)을 겨냥.</a:t>
+            </a:r>
+          </a:p>
+          <a:p>
+            <a:pPr algn="l">
+              <a:lnSpc>
+                <a:spcPct val="108000"/>
+              </a:lnSpc>
+              <a:spcAft>
+                <a:spcPts val="800"/>
+              </a:spcAft>
+            </a:pPr>
+            <a:r>
+              <a:rPr sz="979" b="1" i="0">
+                <a:solidFill>
+                  <a:srgbClr val="2C898A"/>
+                </a:solidFill>
+                <a:latin typeface="NanumGothic"/>
+                <a:ea typeface="NanumGothic"/>
+              </a:rPr>
+              <a:t>●  </a:t>
+            </a:r>
             <a:r>
               <a:rPr sz="1400" b="1" i="0">
                 <a:solidFill>
-                  <a:srgbClr val="9FE0D8"/>
-                </a:solidFill>
-                <a:latin typeface="NanumGothic"/>
-                <a:ea typeface="NanumGothic"/>
-              </a:rPr>
-              <a:t>약제</a:t>
-            </a:r>
-          </a:p>
-        </p:txBody>
-      </p:sp>
-      <p:sp>
-        <p:nvSpPr>
-          <p:cNvPr id="11" name="TextBox 10"/>
+                  <a:srgbClr val="2E7D32"/>
+                </a:solidFill>
+                <a:latin typeface="NanumGothic"/>
+                <a:ea typeface="NanumGothic"/>
+              </a:rPr>
+              <a:t>③ 진단적 차단: 투시 유도 국소마취제 LSB → 피부온도 ≥2°C 상승·통증 반응 확인.</a:t>
+            </a:r>
+          </a:p>
+          <a:p>
+            <a:pPr algn="l">
+              <a:lnSpc>
+                <a:spcPct val="108000"/>
+              </a:lnSpc>
+              <a:spcAft>
+                <a:spcPts val="800"/>
+              </a:spcAft>
+            </a:pPr>
+            <a:r>
+              <a:rPr sz="979" b="1" i="0">
+                <a:solidFill>
+                  <a:srgbClr val="2C898A"/>
+                </a:solidFill>
+                <a:latin typeface="NanumGothic"/>
+                <a:ea typeface="NanumGothic"/>
+              </a:rPr>
+              <a:t>●  </a:t>
+            </a:r>
+            <a:r>
+              <a:rPr sz="1400" b="1" i="0">
+                <a:solidFill>
+                  <a:srgbClr val="2E7D32"/>
+                </a:solidFill>
+                <a:latin typeface="NanumGothic"/>
+                <a:ea typeface="NanumGothic"/>
+              </a:rPr>
+              <a:t>④ 반응 양호 시: 치료적 반복 차단, 또는 신경파괴(무수알코올/phenol)·RFA로 장기 완화.</a:t>
+            </a:r>
+          </a:p>
+          <a:p>
+            <a:pPr algn="l">
+              <a:lnSpc>
+                <a:spcPct val="108000"/>
+              </a:lnSpc>
+              <a:spcAft>
+                <a:spcPts val="800"/>
+              </a:spcAft>
+            </a:pPr>
+            <a:r>
+              <a:rPr sz="979" b="1" i="0">
+                <a:solidFill>
+                  <a:srgbClr val="2C898A"/>
+                </a:solidFill>
+                <a:latin typeface="NanumGothic"/>
+                <a:ea typeface="NanumGothic"/>
+              </a:rPr>
+              <a:t>●  </a:t>
+            </a:r>
+            <a:r>
+              <a:rPr sz="1400" b="0" i="0">
+                <a:solidFill>
+                  <a:srgbClr val="1A202C"/>
+                </a:solidFill>
+                <a:latin typeface="NanumGothic"/>
+                <a:ea typeface="NanumGothic"/>
+              </a:rPr>
+              <a:t>⑤ 대상별: CRPS는 조기(≤12개월) 유리 · 난치성 당뇨병성 신경병증은 지속 LSB+신경파괴(RCT).</a:t>
+            </a:r>
+          </a:p>
+          <a:p>
+            <a:pPr algn="l">
+              <a:lnSpc>
+                <a:spcPct val="108000"/>
+              </a:lnSpc>
+              <a:spcAft>
+                <a:spcPts val="800"/>
+              </a:spcAft>
+            </a:pPr>
+            <a:r>
+              <a:rPr sz="1400" b="1" i="0">
+                <a:solidFill>
+                  <a:srgbClr val="5A6B7B"/>
+                </a:solidFill>
+                <a:latin typeface="NanumGothic"/>
+                <a:ea typeface="NanumGothic"/>
+              </a:rPr>
+              <a:t/>
+            </a:r>
+            <a:r>
+              <a:rPr sz="1400" b="1" i="0">
+                <a:solidFill>
+                  <a:srgbClr val="1F6E70"/>
+                </a:solidFill>
+                <a:latin typeface="NanumGothic"/>
+                <a:ea typeface="NanumGothic"/>
+              </a:rPr>
+              <a:t>⑥ 주의: 특발성 NLC·정맥질환은 적응 아님 · 합병증(생식대퇴신경통 5–10% 등) 사전 고지.</a:t>
+            </a:r>
+          </a:p>
+        </p:txBody>
+      </p:sp>
+      <p:sp>
+        <p:nvSpPr>
+          <p:cNvPr id="9" name="TextBox 8"/>
           <p:cNvSpPr txBox="1"/>
           <p:nvPr/>
         </p:nvSpPr>
         <p:spPr>
           <a:xfrm>
-            <a:off x="4114800" y="3035808"/>
-            <a:ext cx="7406640" cy="674827"/>
+            <a:off x="731520" y="6455664"/>
+            <a:ext cx="9875520" cy="292608"/>
           </a:xfrm>
           <a:prstGeom prst="rect">
             <a:avLst/>
@@ -10917,79 +10901,35 @@
           <a:p>
             <a:pPr algn="l">
               <a:lnSpc>
-                <a:spcPct val="105000"/>
+                <a:spcPct val="108000"/>
               </a:lnSpc>
               <a:spcAft>
                 <a:spcPts val="400"/>
               </a:spcAft>
             </a:pPr>
             <a:r>
-              <a:rPr sz="1250" b="0" i="0">
-                <a:solidFill>
-                  <a:srgbClr val="FFFFFF"/>
-                </a:solidFill>
-                <a:latin typeface="NanumGothic"/>
-                <a:ea typeface="NanumGothic"/>
-              </a:rPr>
-              <a:t>진단/치료는 국소마취제, 신경파괴는 무수알코올/phenol·RFA — 진단차단 양성 시에만.</a:t>
-            </a:r>
-          </a:p>
-        </p:txBody>
-      </p:sp>
-      <p:sp>
-        <p:nvSpPr>
-          <p:cNvPr id="12" name="Rectangle 11"/>
-          <p:cNvSpPr/>
-          <p:nvPr/>
-        </p:nvSpPr>
-        <p:spPr>
-          <a:xfrm>
-            <a:off x="822960" y="3822191"/>
-            <a:ext cx="146304" cy="445385"/>
-          </a:xfrm>
-          <a:prstGeom prst="rect">
-            <a:avLst/>
-          </a:prstGeom>
-          <a:solidFill>
-            <a:srgbClr val="2C898A"/>
-          </a:solidFill>
-          <a:ln>
-            <a:noFill/>
-          </a:ln>
-          <a:effectLst/>
-        </p:spPr>
-        <p:style>
-          <a:lnRef idx="1">
-            <a:schemeClr val="accent1"/>
-          </a:lnRef>
-          <a:fillRef idx="3">
-            <a:schemeClr val="accent1"/>
-          </a:fillRef>
-          <a:effectRef idx="2">
-            <a:schemeClr val="accent1"/>
-          </a:effectRef>
-          <a:fontRef idx="minor">
-            <a:schemeClr val="lt1"/>
-          </a:fontRef>
-        </p:style>
-        <p:txBody>
-          <a:bodyPr rtlCol="0" anchor="ctr"/>
-          <a:lstStyle/>
-          <a:p>
-            <a:pPr algn="ctr"/>
-          </a:p>
-        </p:txBody>
-      </p:sp>
-      <p:sp>
-        <p:nvSpPr>
-          <p:cNvPr id="13" name="TextBox 12"/>
+              <a:rPr sz="900" b="0" i="0">
+                <a:solidFill>
+                  <a:srgbClr val="5A6B7B"/>
+                </a:solidFill>
+                <a:latin typeface="NanumGothic"/>
+                <a:ea typeface="NanumGothic"/>
+              </a:rPr>
+              <a:t>근거: 교육용 제안 · 개별 적용은 임상 판단 · 신경파괴는 진단차단 양성 시에만</a:t>
+            </a:r>
+          </a:p>
+        </p:txBody>
+      </p:sp>
+      <p:sp>
+        <p:nvSpPr>
+          <p:cNvPr id="10" name="TextBox 9"/>
           <p:cNvSpPr txBox="1"/>
           <p:nvPr/>
         </p:nvSpPr>
         <p:spPr>
           <a:xfrm>
-            <a:off x="1143000" y="3785615"/>
-            <a:ext cx="2926080" cy="674827"/>
+            <a:off x="11064240" y="6455664"/>
+            <a:ext cx="822960" cy="292608"/>
           </a:xfrm>
           <a:prstGeom prst="rect">
             <a:avLst/>
@@ -11002,7 +10942,7 @@
           </a:bodyPr>
           <a:lstStyle/>
           <a:p>
-            <a:pPr algn="l">
+            <a:pPr algn="r">
               <a:lnSpc>
                 <a:spcPct val="108000"/>
               </a:lnSpc>
@@ -11011,317 +10951,14 @@
               </a:spcAft>
             </a:pPr>
             <a:r>
-              <a:rPr sz="1400" b="1" i="0">
-                <a:solidFill>
-                  <a:srgbClr val="9FE0D8"/>
-                </a:solidFill>
-                <a:latin typeface="NanumGothic"/>
-                <a:ea typeface="NanumGothic"/>
-              </a:rPr>
-              <a:t>적응증</a:t>
-            </a:r>
-          </a:p>
-        </p:txBody>
-      </p:sp>
-      <p:sp>
-        <p:nvSpPr>
-          <p:cNvPr id="14" name="TextBox 13"/>
-          <p:cNvSpPr txBox="1"/>
-          <p:nvPr/>
-        </p:nvSpPr>
-        <p:spPr>
-          <a:xfrm>
-            <a:off x="4114800" y="3785615"/>
-            <a:ext cx="7406640" cy="674827"/>
-          </a:xfrm>
-          <a:prstGeom prst="rect">
-            <a:avLst/>
-          </a:prstGeom>
-          <a:noFill/>
-        </p:spPr>
-        <p:txBody>
-          <a:bodyPr wrap="square" anchor="ctr" lIns="0" rIns="0" tIns="0" bIns="0">
-            <a:spAutoFit/>
-          </a:bodyPr>
-          <a:lstStyle/>
-          <a:p>
-            <a:pPr algn="l">
-              <a:lnSpc>
-                <a:spcPct val="105000"/>
-              </a:lnSpc>
-              <a:spcAft>
-                <a:spcPts val="400"/>
-              </a:spcAft>
-            </a:pPr>
-            <a:r>
-              <a:rPr sz="1250" b="0" i="0">
-                <a:solidFill>
-                  <a:srgbClr val="FFFFFF"/>
-                </a:solidFill>
-                <a:latin typeface="NanumGothic"/>
-                <a:ea typeface="NanumGothic"/>
-              </a:rPr>
-              <a:t>조기 CRPS·PAD/CLI 안정통·신경병증·다한증 등. 특발성 NLC·정맥질환(정맥류)은 적응 아님.</a:t>
-            </a:r>
-          </a:p>
-        </p:txBody>
-      </p:sp>
-      <p:sp>
-        <p:nvSpPr>
-          <p:cNvPr id="15" name="Rectangle 14"/>
-          <p:cNvSpPr/>
-          <p:nvPr/>
-        </p:nvSpPr>
-        <p:spPr>
-          <a:xfrm>
-            <a:off x="822960" y="4572000"/>
-            <a:ext cx="146304" cy="445385"/>
-          </a:xfrm>
-          <a:prstGeom prst="rect">
-            <a:avLst/>
-          </a:prstGeom>
-          <a:solidFill>
-            <a:srgbClr val="2C898A"/>
-          </a:solidFill>
-          <a:ln>
-            <a:noFill/>
-          </a:ln>
-          <a:effectLst/>
-        </p:spPr>
-        <p:style>
-          <a:lnRef idx="1">
-            <a:schemeClr val="accent1"/>
-          </a:lnRef>
-          <a:fillRef idx="3">
-            <a:schemeClr val="accent1"/>
-          </a:fillRef>
-          <a:effectRef idx="2">
-            <a:schemeClr val="accent1"/>
-          </a:effectRef>
-          <a:fontRef idx="minor">
-            <a:schemeClr val="lt1"/>
-          </a:fontRef>
-        </p:style>
-        <p:txBody>
-          <a:bodyPr rtlCol="0" anchor="ctr"/>
-          <a:lstStyle/>
-          <a:p>
-            <a:pPr algn="ctr"/>
-          </a:p>
-        </p:txBody>
-      </p:sp>
-      <p:sp>
-        <p:nvSpPr>
-          <p:cNvPr id="16" name="TextBox 15"/>
-          <p:cNvSpPr txBox="1"/>
-          <p:nvPr/>
-        </p:nvSpPr>
-        <p:spPr>
-          <a:xfrm>
-            <a:off x="1143000" y="4535424"/>
-            <a:ext cx="2926080" cy="674827"/>
-          </a:xfrm>
-          <a:prstGeom prst="rect">
-            <a:avLst/>
-          </a:prstGeom>
-          <a:noFill/>
-        </p:spPr>
-        <p:txBody>
-          <a:bodyPr wrap="square" anchor="ctr" lIns="0" rIns="0" tIns="0" bIns="0">
-            <a:spAutoFit/>
-          </a:bodyPr>
-          <a:lstStyle/>
-          <a:p>
-            <a:pPr algn="l">
-              <a:lnSpc>
-                <a:spcPct val="108000"/>
-              </a:lnSpc>
-              <a:spcAft>
-                <a:spcPts val="400"/>
-              </a:spcAft>
-            </a:pPr>
-            <a:r>
-              <a:rPr sz="1400" b="1" i="0">
-                <a:solidFill>
-                  <a:srgbClr val="9FE0D8"/>
-                </a:solidFill>
-                <a:latin typeface="NanumGothic"/>
-                <a:ea typeface="NanumGothic"/>
-              </a:rPr>
-              <a:t>효과</a:t>
-            </a:r>
-          </a:p>
-        </p:txBody>
-      </p:sp>
-      <p:sp>
-        <p:nvSpPr>
-          <p:cNvPr id="17" name="TextBox 16"/>
-          <p:cNvSpPr txBox="1"/>
-          <p:nvPr/>
-        </p:nvSpPr>
-        <p:spPr>
-          <a:xfrm>
-            <a:off x="4114800" y="4535424"/>
-            <a:ext cx="7406640" cy="674827"/>
-          </a:xfrm>
-          <a:prstGeom prst="rect">
-            <a:avLst/>
-          </a:prstGeom>
-          <a:noFill/>
-        </p:spPr>
-        <p:txBody>
-          <a:bodyPr wrap="square" anchor="ctr" lIns="0" rIns="0" tIns="0" bIns="0">
-            <a:spAutoFit/>
-          </a:bodyPr>
-          <a:lstStyle/>
-          <a:p>
-            <a:pPr algn="l">
-              <a:lnSpc>
-                <a:spcPct val="105000"/>
-              </a:lnSpc>
-              <a:spcAft>
-                <a:spcPts val="400"/>
-              </a:spcAft>
-            </a:pPr>
-            <a:r>
-              <a:rPr sz="1250" b="0" i="0">
-                <a:solidFill>
-                  <a:srgbClr val="FFFFFF"/>
-                </a:solidFill>
-                <a:latin typeface="NanumGothic"/>
-                <a:ea typeface="NanumGothic"/>
-              </a:rPr>
-              <a:t>관류 실측 개선(Dickey), 허혈통 최대 75%↓, CRPS 통증완화(교감피부반응으로 예측).</a:t>
-            </a:r>
-          </a:p>
-        </p:txBody>
-      </p:sp>
-      <p:sp>
-        <p:nvSpPr>
-          <p:cNvPr id="18" name="Rectangle 17"/>
-          <p:cNvSpPr/>
-          <p:nvPr/>
-        </p:nvSpPr>
-        <p:spPr>
-          <a:xfrm>
-            <a:off x="822960" y="5321807"/>
-            <a:ext cx="146304" cy="445385"/>
-          </a:xfrm>
-          <a:prstGeom prst="rect">
-            <a:avLst/>
-          </a:prstGeom>
-          <a:solidFill>
-            <a:srgbClr val="2C898A"/>
-          </a:solidFill>
-          <a:ln>
-            <a:noFill/>
-          </a:ln>
-          <a:effectLst/>
-        </p:spPr>
-        <p:style>
-          <a:lnRef idx="1">
-            <a:schemeClr val="accent1"/>
-          </a:lnRef>
-          <a:fillRef idx="3">
-            <a:schemeClr val="accent1"/>
-          </a:fillRef>
-          <a:effectRef idx="2">
-            <a:schemeClr val="accent1"/>
-          </a:effectRef>
-          <a:fontRef idx="minor">
-            <a:schemeClr val="lt1"/>
-          </a:fontRef>
-        </p:style>
-        <p:txBody>
-          <a:bodyPr rtlCol="0" anchor="ctr"/>
-          <a:lstStyle/>
-          <a:p>
-            <a:pPr algn="ctr"/>
-          </a:p>
-        </p:txBody>
-      </p:sp>
-      <p:sp>
-        <p:nvSpPr>
-          <p:cNvPr id="19" name="TextBox 18"/>
-          <p:cNvSpPr txBox="1"/>
-          <p:nvPr/>
-        </p:nvSpPr>
-        <p:spPr>
-          <a:xfrm>
-            <a:off x="1143000" y="5285231"/>
-            <a:ext cx="2926080" cy="674827"/>
-          </a:xfrm>
-          <a:prstGeom prst="rect">
-            <a:avLst/>
-          </a:prstGeom>
-          <a:noFill/>
-        </p:spPr>
-        <p:txBody>
-          <a:bodyPr wrap="square" anchor="ctr" lIns="0" rIns="0" tIns="0" bIns="0">
-            <a:spAutoFit/>
-          </a:bodyPr>
-          <a:lstStyle/>
-          <a:p>
-            <a:pPr algn="l">
-              <a:lnSpc>
-                <a:spcPct val="108000"/>
-              </a:lnSpc>
-              <a:spcAft>
-                <a:spcPts val="400"/>
-              </a:spcAft>
-            </a:pPr>
-            <a:r>
-              <a:rPr sz="1400" b="1" i="0">
-                <a:solidFill>
-                  <a:srgbClr val="9FE0D8"/>
-                </a:solidFill>
-                <a:latin typeface="NanumGothic"/>
-                <a:ea typeface="NanumGothic"/>
-              </a:rPr>
-              <a:t>근거</a:t>
-            </a:r>
-          </a:p>
-        </p:txBody>
-      </p:sp>
-      <p:sp>
-        <p:nvSpPr>
-          <p:cNvPr id="20" name="TextBox 19"/>
-          <p:cNvSpPr txBox="1"/>
-          <p:nvPr/>
-        </p:nvSpPr>
-        <p:spPr>
-          <a:xfrm>
-            <a:off x="4114800" y="5285231"/>
-            <a:ext cx="7406640" cy="674827"/>
-          </a:xfrm>
-          <a:prstGeom prst="rect">
-            <a:avLst/>
-          </a:prstGeom>
-          <a:noFill/>
-        </p:spPr>
-        <p:txBody>
-          <a:bodyPr wrap="square" anchor="ctr" lIns="0" rIns="0" tIns="0" bIns="0">
-            <a:spAutoFit/>
-          </a:bodyPr>
-          <a:lstStyle/>
-          <a:p>
-            <a:pPr algn="l">
-              <a:lnSpc>
-                <a:spcPct val="105000"/>
-              </a:lnSpc>
-              <a:spcAft>
-                <a:spcPts val="400"/>
-              </a:spcAft>
-            </a:pPr>
-            <a:r>
-              <a:rPr sz="1250" b="0" i="0">
-                <a:solidFill>
-                  <a:srgbClr val="FFFFFF"/>
-                </a:solidFill>
-                <a:latin typeface="NanumGothic"/>
-                <a:ea typeface="NanumGothic"/>
-              </a:rPr>
-              <a:t>대규모 RCT 부족(관찰·증례 중심). 조기 CRPS·비재건성 CLI에서 유용.</a:t>
+              <a:rPr sz="1000" b="1" i="0">
+                <a:solidFill>
+                  <a:srgbClr val="5A6B7B"/>
+                </a:solidFill>
+                <a:latin typeface="NanumGothic"/>
+                <a:ea typeface="NanumGothic"/>
+              </a:rPr>
+              <a:t>20</a:t>
             </a:r>
           </a:p>
         </p:txBody>
@@ -11352,8 +10989,52 @@
         </p:nvSpPr>
         <p:spPr>
           <a:xfrm>
-            <a:off x="502920" y="310896"/>
-            <a:ext cx="109728" cy="457200"/>
+            <a:off x="0" y="0"/>
+            <a:ext cx="12191695" cy="6858000"/>
+          </a:xfrm>
+          <a:prstGeom prst="rect">
+            <a:avLst/>
+          </a:prstGeom>
+          <a:solidFill>
+            <a:srgbClr val="1B355E"/>
+          </a:solidFill>
+          <a:ln>
+            <a:noFill/>
+          </a:ln>
+          <a:effectLst/>
+        </p:spPr>
+        <p:style>
+          <a:lnRef idx="1">
+            <a:schemeClr val="accent1"/>
+          </a:lnRef>
+          <a:fillRef idx="3">
+            <a:schemeClr val="accent1"/>
+          </a:fillRef>
+          <a:effectRef idx="2">
+            <a:schemeClr val="accent1"/>
+          </a:effectRef>
+          <a:fontRef idx="minor">
+            <a:schemeClr val="lt1"/>
+          </a:fontRef>
+        </p:style>
+        <p:txBody>
+          <a:bodyPr rtlCol="0" anchor="ctr"/>
+          <a:lstStyle/>
+          <a:p>
+            <a:pPr algn="ctr"/>
+          </a:p>
+        </p:txBody>
+      </p:sp>
+      <p:sp>
+        <p:nvSpPr>
+          <p:cNvPr id="3" name="Rectangle 2"/>
+          <p:cNvSpPr/>
+          <p:nvPr/>
+        </p:nvSpPr>
+        <p:spPr>
+          <a:xfrm>
+            <a:off x="0" y="0"/>
+            <a:ext cx="201168" cy="6858000"/>
           </a:xfrm>
           <a:prstGeom prst="rect">
             <a:avLst/>
@@ -11390,6 +11071,804 @@
       </p:sp>
       <p:sp>
         <p:nvSpPr>
+          <p:cNvPr id="4" name="TextBox 3"/>
+          <p:cNvSpPr txBox="1"/>
+          <p:nvPr/>
+        </p:nvSpPr>
+        <p:spPr>
+          <a:xfrm>
+            <a:off x="822960" y="640080"/>
+            <a:ext cx="10515600" cy="457200"/>
+          </a:xfrm>
+          <a:prstGeom prst="rect">
+            <a:avLst/>
+          </a:prstGeom>
+          <a:noFill/>
+        </p:spPr>
+        <p:txBody>
+          <a:bodyPr wrap="square" anchor="t" lIns="0" rIns="0" tIns="0" bIns="0">
+            <a:spAutoFit/>
+          </a:bodyPr>
+          <a:lstStyle/>
+          <a:p>
+            <a:pPr algn="l">
+              <a:lnSpc>
+                <a:spcPct val="108000"/>
+              </a:lnSpc>
+              <a:spcAft>
+                <a:spcPts val="400"/>
+              </a:spcAft>
+            </a:pPr>
+            <a:r>
+              <a:rPr sz="1300" b="1" i="0">
+                <a:solidFill>
+                  <a:srgbClr val="9FE0D8"/>
+                </a:solidFill>
+                <a:latin typeface="NanumGothic"/>
+                <a:ea typeface="NanumGothic"/>
+              </a:rPr>
+              <a:t>핵심 메시지 — LSB</a:t>
+            </a:r>
+          </a:p>
+        </p:txBody>
+      </p:sp>
+      <p:sp>
+        <p:nvSpPr>
+          <p:cNvPr id="5" name="TextBox 4"/>
+          <p:cNvSpPr txBox="1"/>
+          <p:nvPr/>
+        </p:nvSpPr>
+        <p:spPr>
+          <a:xfrm>
+            <a:off x="822960" y="1097280"/>
+            <a:ext cx="10515600" cy="914400"/>
+          </a:xfrm>
+          <a:prstGeom prst="rect">
+            <a:avLst/>
+          </a:prstGeom>
+          <a:noFill/>
+        </p:spPr>
+        <p:txBody>
+          <a:bodyPr wrap="square" anchor="t" lIns="0" rIns="0" tIns="0" bIns="0">
+            <a:spAutoFit/>
+          </a:bodyPr>
+          <a:lstStyle/>
+          <a:p>
+            <a:pPr algn="l">
+              <a:lnSpc>
+                <a:spcPct val="110000"/>
+              </a:lnSpc>
+              <a:spcAft>
+                <a:spcPts val="400"/>
+              </a:spcAft>
+            </a:pPr>
+            <a:r>
+              <a:rPr sz="2200" b="1" i="0">
+                <a:solidFill>
+                  <a:srgbClr val="FFFFFF"/>
+                </a:solidFill>
+                <a:latin typeface="NanumGothic"/>
+                <a:ea typeface="NanumGothic"/>
+              </a:rPr>
+              <a:t>표준은 투시 유도 방척추 접근, 성공은 온도 ≥2°C</a:t>
+            </a:r>
+          </a:p>
+        </p:txBody>
+      </p:sp>
+      <p:sp>
+        <p:nvSpPr>
+          <p:cNvPr id="6" name="Rectangle 5"/>
+          <p:cNvSpPr/>
+          <p:nvPr/>
+        </p:nvSpPr>
+        <p:spPr>
+          <a:xfrm>
+            <a:off x="822960" y="2322576"/>
+            <a:ext cx="146304" cy="445385"/>
+          </a:xfrm>
+          <a:prstGeom prst="rect">
+            <a:avLst/>
+          </a:prstGeom>
+          <a:solidFill>
+            <a:srgbClr val="2C898A"/>
+          </a:solidFill>
+          <a:ln>
+            <a:noFill/>
+          </a:ln>
+          <a:effectLst/>
+        </p:spPr>
+        <p:style>
+          <a:lnRef idx="1">
+            <a:schemeClr val="accent1"/>
+          </a:lnRef>
+          <a:fillRef idx="3">
+            <a:schemeClr val="accent1"/>
+          </a:fillRef>
+          <a:effectRef idx="2">
+            <a:schemeClr val="accent1"/>
+          </a:effectRef>
+          <a:fontRef idx="minor">
+            <a:schemeClr val="lt1"/>
+          </a:fontRef>
+        </p:style>
+        <p:txBody>
+          <a:bodyPr rtlCol="0" anchor="ctr"/>
+          <a:lstStyle/>
+          <a:p>
+            <a:pPr algn="ctr"/>
+          </a:p>
+        </p:txBody>
+      </p:sp>
+      <p:sp>
+        <p:nvSpPr>
+          <p:cNvPr id="7" name="TextBox 6"/>
+          <p:cNvSpPr txBox="1"/>
+          <p:nvPr/>
+        </p:nvSpPr>
+        <p:spPr>
+          <a:xfrm>
+            <a:off x="1143000" y="2286000"/>
+            <a:ext cx="2926080" cy="674827"/>
+          </a:xfrm>
+          <a:prstGeom prst="rect">
+            <a:avLst/>
+          </a:prstGeom>
+          <a:noFill/>
+        </p:spPr>
+        <p:txBody>
+          <a:bodyPr wrap="square" anchor="ctr" lIns="0" rIns="0" tIns="0" bIns="0">
+            <a:spAutoFit/>
+          </a:bodyPr>
+          <a:lstStyle/>
+          <a:p>
+            <a:pPr algn="l">
+              <a:lnSpc>
+                <a:spcPct val="108000"/>
+              </a:lnSpc>
+              <a:spcAft>
+                <a:spcPts val="400"/>
+              </a:spcAft>
+            </a:pPr>
+            <a:r>
+              <a:rPr sz="1400" b="1" i="0">
+                <a:solidFill>
+                  <a:srgbClr val="9FE0D8"/>
+                </a:solidFill>
+                <a:latin typeface="NanumGothic"/>
+                <a:ea typeface="NanumGothic"/>
+              </a:rPr>
+              <a:t>방법</a:t>
+            </a:r>
+          </a:p>
+        </p:txBody>
+      </p:sp>
+      <p:sp>
+        <p:nvSpPr>
+          <p:cNvPr id="8" name="TextBox 7"/>
+          <p:cNvSpPr txBox="1"/>
+          <p:nvPr/>
+        </p:nvSpPr>
+        <p:spPr>
+          <a:xfrm>
+            <a:off x="4114800" y="2286000"/>
+            <a:ext cx="7406640" cy="674827"/>
+          </a:xfrm>
+          <a:prstGeom prst="rect">
+            <a:avLst/>
+          </a:prstGeom>
+          <a:noFill/>
+        </p:spPr>
+        <p:txBody>
+          <a:bodyPr wrap="square" anchor="ctr" lIns="0" rIns="0" tIns="0" bIns="0">
+            <a:spAutoFit/>
+          </a:bodyPr>
+          <a:lstStyle/>
+          <a:p>
+            <a:pPr algn="l">
+              <a:lnSpc>
+                <a:spcPct val="105000"/>
+              </a:lnSpc>
+              <a:spcAft>
+                <a:spcPts val="400"/>
+              </a:spcAft>
+            </a:pPr>
+            <a:r>
+              <a:rPr sz="1250" b="0" i="0">
+                <a:solidFill>
+                  <a:srgbClr val="FFFFFF"/>
+                </a:solidFill>
+                <a:latin typeface="NanumGothic"/>
+                <a:ea typeface="NanumGothic"/>
+              </a:rPr>
+              <a:t>L2–L3 방척추 접근·투시, 정중선 7 cm 외측, 조영제 두미측 확산, 성공지표 온도 ≥2°C.</a:t>
+            </a:r>
+          </a:p>
+        </p:txBody>
+      </p:sp>
+      <p:sp>
+        <p:nvSpPr>
+          <p:cNvPr id="9" name="Rectangle 8"/>
+          <p:cNvSpPr/>
+          <p:nvPr/>
+        </p:nvSpPr>
+        <p:spPr>
+          <a:xfrm>
+            <a:off x="822960" y="3072384"/>
+            <a:ext cx="146304" cy="445385"/>
+          </a:xfrm>
+          <a:prstGeom prst="rect">
+            <a:avLst/>
+          </a:prstGeom>
+          <a:solidFill>
+            <a:srgbClr val="2C898A"/>
+          </a:solidFill>
+          <a:ln>
+            <a:noFill/>
+          </a:ln>
+          <a:effectLst/>
+        </p:spPr>
+        <p:style>
+          <a:lnRef idx="1">
+            <a:schemeClr val="accent1"/>
+          </a:lnRef>
+          <a:fillRef idx="3">
+            <a:schemeClr val="accent1"/>
+          </a:fillRef>
+          <a:effectRef idx="2">
+            <a:schemeClr val="accent1"/>
+          </a:effectRef>
+          <a:fontRef idx="minor">
+            <a:schemeClr val="lt1"/>
+          </a:fontRef>
+        </p:style>
+        <p:txBody>
+          <a:bodyPr rtlCol="0" anchor="ctr"/>
+          <a:lstStyle/>
+          <a:p>
+            <a:pPr algn="ctr"/>
+          </a:p>
+        </p:txBody>
+      </p:sp>
+      <p:sp>
+        <p:nvSpPr>
+          <p:cNvPr id="10" name="TextBox 9"/>
+          <p:cNvSpPr txBox="1"/>
+          <p:nvPr/>
+        </p:nvSpPr>
+        <p:spPr>
+          <a:xfrm>
+            <a:off x="1143000" y="3035808"/>
+            <a:ext cx="2926080" cy="674827"/>
+          </a:xfrm>
+          <a:prstGeom prst="rect">
+            <a:avLst/>
+          </a:prstGeom>
+          <a:noFill/>
+        </p:spPr>
+        <p:txBody>
+          <a:bodyPr wrap="square" anchor="ctr" lIns="0" rIns="0" tIns="0" bIns="0">
+            <a:spAutoFit/>
+          </a:bodyPr>
+          <a:lstStyle/>
+          <a:p>
+            <a:pPr algn="l">
+              <a:lnSpc>
+                <a:spcPct val="108000"/>
+              </a:lnSpc>
+              <a:spcAft>
+                <a:spcPts val="400"/>
+              </a:spcAft>
+            </a:pPr>
+            <a:r>
+              <a:rPr sz="1400" b="1" i="0">
+                <a:solidFill>
+                  <a:srgbClr val="9FE0D8"/>
+                </a:solidFill>
+                <a:latin typeface="NanumGothic"/>
+                <a:ea typeface="NanumGothic"/>
+              </a:rPr>
+              <a:t>약제</a:t>
+            </a:r>
+          </a:p>
+        </p:txBody>
+      </p:sp>
+      <p:sp>
+        <p:nvSpPr>
+          <p:cNvPr id="11" name="TextBox 10"/>
+          <p:cNvSpPr txBox="1"/>
+          <p:nvPr/>
+        </p:nvSpPr>
+        <p:spPr>
+          <a:xfrm>
+            <a:off x="4114800" y="3035808"/>
+            <a:ext cx="7406640" cy="674827"/>
+          </a:xfrm>
+          <a:prstGeom prst="rect">
+            <a:avLst/>
+          </a:prstGeom>
+          <a:noFill/>
+        </p:spPr>
+        <p:txBody>
+          <a:bodyPr wrap="square" anchor="ctr" lIns="0" rIns="0" tIns="0" bIns="0">
+            <a:spAutoFit/>
+          </a:bodyPr>
+          <a:lstStyle/>
+          <a:p>
+            <a:pPr algn="l">
+              <a:lnSpc>
+                <a:spcPct val="105000"/>
+              </a:lnSpc>
+              <a:spcAft>
+                <a:spcPts val="400"/>
+              </a:spcAft>
+            </a:pPr>
+            <a:r>
+              <a:rPr sz="1250" b="0" i="0">
+                <a:solidFill>
+                  <a:srgbClr val="FFFFFF"/>
+                </a:solidFill>
+                <a:latin typeface="NanumGothic"/>
+                <a:ea typeface="NanumGothic"/>
+              </a:rPr>
+              <a:t>진단/치료는 국소마취제, 신경파괴는 무수알코올/phenol·RFA — 진단차단 양성 시에만.</a:t>
+            </a:r>
+          </a:p>
+        </p:txBody>
+      </p:sp>
+      <p:sp>
+        <p:nvSpPr>
+          <p:cNvPr id="12" name="Rectangle 11"/>
+          <p:cNvSpPr/>
+          <p:nvPr/>
+        </p:nvSpPr>
+        <p:spPr>
+          <a:xfrm>
+            <a:off x="822960" y="3822191"/>
+            <a:ext cx="146304" cy="445385"/>
+          </a:xfrm>
+          <a:prstGeom prst="rect">
+            <a:avLst/>
+          </a:prstGeom>
+          <a:solidFill>
+            <a:srgbClr val="2C898A"/>
+          </a:solidFill>
+          <a:ln>
+            <a:noFill/>
+          </a:ln>
+          <a:effectLst/>
+        </p:spPr>
+        <p:style>
+          <a:lnRef idx="1">
+            <a:schemeClr val="accent1"/>
+          </a:lnRef>
+          <a:fillRef idx="3">
+            <a:schemeClr val="accent1"/>
+          </a:fillRef>
+          <a:effectRef idx="2">
+            <a:schemeClr val="accent1"/>
+          </a:effectRef>
+          <a:fontRef idx="minor">
+            <a:schemeClr val="lt1"/>
+          </a:fontRef>
+        </p:style>
+        <p:txBody>
+          <a:bodyPr rtlCol="0" anchor="ctr"/>
+          <a:lstStyle/>
+          <a:p>
+            <a:pPr algn="ctr"/>
+          </a:p>
+        </p:txBody>
+      </p:sp>
+      <p:sp>
+        <p:nvSpPr>
+          <p:cNvPr id="13" name="TextBox 12"/>
+          <p:cNvSpPr txBox="1"/>
+          <p:nvPr/>
+        </p:nvSpPr>
+        <p:spPr>
+          <a:xfrm>
+            <a:off x="1143000" y="3785615"/>
+            <a:ext cx="2926080" cy="674827"/>
+          </a:xfrm>
+          <a:prstGeom prst="rect">
+            <a:avLst/>
+          </a:prstGeom>
+          <a:noFill/>
+        </p:spPr>
+        <p:txBody>
+          <a:bodyPr wrap="square" anchor="ctr" lIns="0" rIns="0" tIns="0" bIns="0">
+            <a:spAutoFit/>
+          </a:bodyPr>
+          <a:lstStyle/>
+          <a:p>
+            <a:pPr algn="l">
+              <a:lnSpc>
+                <a:spcPct val="108000"/>
+              </a:lnSpc>
+              <a:spcAft>
+                <a:spcPts val="400"/>
+              </a:spcAft>
+            </a:pPr>
+            <a:r>
+              <a:rPr sz="1400" b="1" i="0">
+                <a:solidFill>
+                  <a:srgbClr val="9FE0D8"/>
+                </a:solidFill>
+                <a:latin typeface="NanumGothic"/>
+                <a:ea typeface="NanumGothic"/>
+              </a:rPr>
+              <a:t>적응증</a:t>
+            </a:r>
+          </a:p>
+        </p:txBody>
+      </p:sp>
+      <p:sp>
+        <p:nvSpPr>
+          <p:cNvPr id="14" name="TextBox 13"/>
+          <p:cNvSpPr txBox="1"/>
+          <p:nvPr/>
+        </p:nvSpPr>
+        <p:spPr>
+          <a:xfrm>
+            <a:off x="4114800" y="3785615"/>
+            <a:ext cx="7406640" cy="674827"/>
+          </a:xfrm>
+          <a:prstGeom prst="rect">
+            <a:avLst/>
+          </a:prstGeom>
+          <a:noFill/>
+        </p:spPr>
+        <p:txBody>
+          <a:bodyPr wrap="square" anchor="ctr" lIns="0" rIns="0" tIns="0" bIns="0">
+            <a:spAutoFit/>
+          </a:bodyPr>
+          <a:lstStyle/>
+          <a:p>
+            <a:pPr algn="l">
+              <a:lnSpc>
+                <a:spcPct val="105000"/>
+              </a:lnSpc>
+              <a:spcAft>
+                <a:spcPts val="400"/>
+              </a:spcAft>
+            </a:pPr>
+            <a:r>
+              <a:rPr sz="1250" b="0" i="0">
+                <a:solidFill>
+                  <a:srgbClr val="FFFFFF"/>
+                </a:solidFill>
+                <a:latin typeface="NanumGothic"/>
+                <a:ea typeface="NanumGothic"/>
+              </a:rPr>
+              <a:t>조기 CRPS·PAD/CLI 안정통·신경병증·다한증 등. 특발성 NLC·정맥질환(정맥류)은 적응 아님.</a:t>
+            </a:r>
+          </a:p>
+        </p:txBody>
+      </p:sp>
+      <p:sp>
+        <p:nvSpPr>
+          <p:cNvPr id="15" name="Rectangle 14"/>
+          <p:cNvSpPr/>
+          <p:nvPr/>
+        </p:nvSpPr>
+        <p:spPr>
+          <a:xfrm>
+            <a:off x="822960" y="4572000"/>
+            <a:ext cx="146304" cy="445385"/>
+          </a:xfrm>
+          <a:prstGeom prst="rect">
+            <a:avLst/>
+          </a:prstGeom>
+          <a:solidFill>
+            <a:srgbClr val="2C898A"/>
+          </a:solidFill>
+          <a:ln>
+            <a:noFill/>
+          </a:ln>
+          <a:effectLst/>
+        </p:spPr>
+        <p:style>
+          <a:lnRef idx="1">
+            <a:schemeClr val="accent1"/>
+          </a:lnRef>
+          <a:fillRef idx="3">
+            <a:schemeClr val="accent1"/>
+          </a:fillRef>
+          <a:effectRef idx="2">
+            <a:schemeClr val="accent1"/>
+          </a:effectRef>
+          <a:fontRef idx="minor">
+            <a:schemeClr val="lt1"/>
+          </a:fontRef>
+        </p:style>
+        <p:txBody>
+          <a:bodyPr rtlCol="0" anchor="ctr"/>
+          <a:lstStyle/>
+          <a:p>
+            <a:pPr algn="ctr"/>
+          </a:p>
+        </p:txBody>
+      </p:sp>
+      <p:sp>
+        <p:nvSpPr>
+          <p:cNvPr id="16" name="TextBox 15"/>
+          <p:cNvSpPr txBox="1"/>
+          <p:nvPr/>
+        </p:nvSpPr>
+        <p:spPr>
+          <a:xfrm>
+            <a:off x="1143000" y="4535424"/>
+            <a:ext cx="2926080" cy="674827"/>
+          </a:xfrm>
+          <a:prstGeom prst="rect">
+            <a:avLst/>
+          </a:prstGeom>
+          <a:noFill/>
+        </p:spPr>
+        <p:txBody>
+          <a:bodyPr wrap="square" anchor="ctr" lIns="0" rIns="0" tIns="0" bIns="0">
+            <a:spAutoFit/>
+          </a:bodyPr>
+          <a:lstStyle/>
+          <a:p>
+            <a:pPr algn="l">
+              <a:lnSpc>
+                <a:spcPct val="108000"/>
+              </a:lnSpc>
+              <a:spcAft>
+                <a:spcPts val="400"/>
+              </a:spcAft>
+            </a:pPr>
+            <a:r>
+              <a:rPr sz="1400" b="1" i="0">
+                <a:solidFill>
+                  <a:srgbClr val="9FE0D8"/>
+                </a:solidFill>
+                <a:latin typeface="NanumGothic"/>
+                <a:ea typeface="NanumGothic"/>
+              </a:rPr>
+              <a:t>효과</a:t>
+            </a:r>
+          </a:p>
+        </p:txBody>
+      </p:sp>
+      <p:sp>
+        <p:nvSpPr>
+          <p:cNvPr id="17" name="TextBox 16"/>
+          <p:cNvSpPr txBox="1"/>
+          <p:nvPr/>
+        </p:nvSpPr>
+        <p:spPr>
+          <a:xfrm>
+            <a:off x="4114800" y="4535424"/>
+            <a:ext cx="7406640" cy="674827"/>
+          </a:xfrm>
+          <a:prstGeom prst="rect">
+            <a:avLst/>
+          </a:prstGeom>
+          <a:noFill/>
+        </p:spPr>
+        <p:txBody>
+          <a:bodyPr wrap="square" anchor="ctr" lIns="0" rIns="0" tIns="0" bIns="0">
+            <a:spAutoFit/>
+          </a:bodyPr>
+          <a:lstStyle/>
+          <a:p>
+            <a:pPr algn="l">
+              <a:lnSpc>
+                <a:spcPct val="105000"/>
+              </a:lnSpc>
+              <a:spcAft>
+                <a:spcPts val="400"/>
+              </a:spcAft>
+            </a:pPr>
+            <a:r>
+              <a:rPr sz="1250" b="0" i="0">
+                <a:solidFill>
+                  <a:srgbClr val="FFFFFF"/>
+                </a:solidFill>
+                <a:latin typeface="NanumGothic"/>
+                <a:ea typeface="NanumGothic"/>
+              </a:rPr>
+              <a:t>관류 실측 개선(Dickey), 허혈통 최대 75%↓, CRPS 통증완화(교감피부반응으로 예측).</a:t>
+            </a:r>
+          </a:p>
+        </p:txBody>
+      </p:sp>
+      <p:sp>
+        <p:nvSpPr>
+          <p:cNvPr id="18" name="Rectangle 17"/>
+          <p:cNvSpPr/>
+          <p:nvPr/>
+        </p:nvSpPr>
+        <p:spPr>
+          <a:xfrm>
+            <a:off x="822960" y="5321807"/>
+            <a:ext cx="146304" cy="445385"/>
+          </a:xfrm>
+          <a:prstGeom prst="rect">
+            <a:avLst/>
+          </a:prstGeom>
+          <a:solidFill>
+            <a:srgbClr val="2C898A"/>
+          </a:solidFill>
+          <a:ln>
+            <a:noFill/>
+          </a:ln>
+          <a:effectLst/>
+        </p:spPr>
+        <p:style>
+          <a:lnRef idx="1">
+            <a:schemeClr val="accent1"/>
+          </a:lnRef>
+          <a:fillRef idx="3">
+            <a:schemeClr val="accent1"/>
+          </a:fillRef>
+          <a:effectRef idx="2">
+            <a:schemeClr val="accent1"/>
+          </a:effectRef>
+          <a:fontRef idx="minor">
+            <a:schemeClr val="lt1"/>
+          </a:fontRef>
+        </p:style>
+        <p:txBody>
+          <a:bodyPr rtlCol="0" anchor="ctr"/>
+          <a:lstStyle/>
+          <a:p>
+            <a:pPr algn="ctr"/>
+          </a:p>
+        </p:txBody>
+      </p:sp>
+      <p:sp>
+        <p:nvSpPr>
+          <p:cNvPr id="19" name="TextBox 18"/>
+          <p:cNvSpPr txBox="1"/>
+          <p:nvPr/>
+        </p:nvSpPr>
+        <p:spPr>
+          <a:xfrm>
+            <a:off x="1143000" y="5285231"/>
+            <a:ext cx="2926080" cy="674827"/>
+          </a:xfrm>
+          <a:prstGeom prst="rect">
+            <a:avLst/>
+          </a:prstGeom>
+          <a:noFill/>
+        </p:spPr>
+        <p:txBody>
+          <a:bodyPr wrap="square" anchor="ctr" lIns="0" rIns="0" tIns="0" bIns="0">
+            <a:spAutoFit/>
+          </a:bodyPr>
+          <a:lstStyle/>
+          <a:p>
+            <a:pPr algn="l">
+              <a:lnSpc>
+                <a:spcPct val="108000"/>
+              </a:lnSpc>
+              <a:spcAft>
+                <a:spcPts val="400"/>
+              </a:spcAft>
+            </a:pPr>
+            <a:r>
+              <a:rPr sz="1400" b="1" i="0">
+                <a:solidFill>
+                  <a:srgbClr val="9FE0D8"/>
+                </a:solidFill>
+                <a:latin typeface="NanumGothic"/>
+                <a:ea typeface="NanumGothic"/>
+              </a:rPr>
+              <a:t>근거</a:t>
+            </a:r>
+          </a:p>
+        </p:txBody>
+      </p:sp>
+      <p:sp>
+        <p:nvSpPr>
+          <p:cNvPr id="20" name="TextBox 19"/>
+          <p:cNvSpPr txBox="1"/>
+          <p:nvPr/>
+        </p:nvSpPr>
+        <p:spPr>
+          <a:xfrm>
+            <a:off x="4114800" y="5285231"/>
+            <a:ext cx="7406640" cy="674827"/>
+          </a:xfrm>
+          <a:prstGeom prst="rect">
+            <a:avLst/>
+          </a:prstGeom>
+          <a:noFill/>
+        </p:spPr>
+        <p:txBody>
+          <a:bodyPr wrap="square" anchor="ctr" lIns="0" rIns="0" tIns="0" bIns="0">
+            <a:spAutoFit/>
+          </a:bodyPr>
+          <a:lstStyle/>
+          <a:p>
+            <a:pPr algn="l">
+              <a:lnSpc>
+                <a:spcPct val="105000"/>
+              </a:lnSpc>
+              <a:spcAft>
+                <a:spcPts val="400"/>
+              </a:spcAft>
+            </a:pPr>
+            <a:r>
+              <a:rPr sz="1250" b="0" i="0">
+                <a:solidFill>
+                  <a:srgbClr val="FFFFFF"/>
+                </a:solidFill>
+                <a:latin typeface="NanumGothic"/>
+                <a:ea typeface="NanumGothic"/>
+              </a:rPr>
+              <a:t>대규모 RCT 부족(관찰·증례 중심). 조기 CRPS·비재건성 CLI에서 유용.</a:t>
+            </a:r>
+          </a:p>
+        </p:txBody>
+      </p:sp>
+    </p:spTree>
+  </p:cSld>
+  <p:clrMapOvr>
+    <a:masterClrMapping/>
+  </p:clrMapOvr>
+</p:sld>
+</file>
+
+<file path=ppt/slides/slide22.xml><?xml version="1.0" encoding="utf-8"?>
+<p:sld xmlns:a="http://schemas.openxmlformats.org/drawingml/2006/main" xmlns:p="http://schemas.openxmlformats.org/presentationml/2006/main" xmlns:r="http://schemas.openxmlformats.org/officeDocument/2006/relationships">
+  <p:cSld>
+    <p:spTree>
+      <p:nvGrpSpPr>
+        <p:cNvPr id="1" name=""/>
+        <p:cNvGrpSpPr/>
+        <p:nvPr/>
+      </p:nvGrpSpPr>
+      <p:grpSpPr/>
+      <p:sp>
+        <p:nvSpPr>
+          <p:cNvPr id="2" name="Rectangle 1"/>
+          <p:cNvSpPr/>
+          <p:nvPr/>
+        </p:nvSpPr>
+        <p:spPr>
+          <a:xfrm>
+            <a:off x="502920" y="310896"/>
+            <a:ext cx="109728" cy="457200"/>
+          </a:xfrm>
+          <a:prstGeom prst="rect">
+            <a:avLst/>
+          </a:prstGeom>
+          <a:solidFill>
+            <a:srgbClr val="2C898A"/>
+          </a:solidFill>
+          <a:ln>
+            <a:noFill/>
+          </a:ln>
+          <a:effectLst/>
+        </p:spPr>
+        <p:style>
+          <a:lnRef idx="1">
+            <a:schemeClr val="accent1"/>
+          </a:lnRef>
+          <a:fillRef idx="3">
+            <a:schemeClr val="accent1"/>
+          </a:fillRef>
+          <a:effectRef idx="2">
+            <a:schemeClr val="accent1"/>
+          </a:effectRef>
+          <a:fontRef idx="minor">
+            <a:schemeClr val="lt1"/>
+          </a:fontRef>
+        </p:style>
+        <p:txBody>
+          <a:bodyPr rtlCol="0" anchor="ctr"/>
+          <a:lstStyle/>
+          <a:p>
+            <a:pPr algn="ctr"/>
+          </a:p>
+        </p:txBody>
+      </p:sp>
+      <p:sp>
+        <p:nvSpPr>
           <p:cNvPr id="3" name="TextBox 2"/>
           <p:cNvSpPr txBox="1"/>
           <p:nvPr/>
@@ -11974,7 +12453,7 @@
                 <a:latin typeface="NanumGothic"/>
                 <a:ea typeface="NanumGothic"/>
               </a:rPr>
-              <a:t>21</a:t>
+              <a:t>22</a:t>
             </a:r>
           </a:p>
         </p:txBody>
@@ -12545,6 +13024,50 @@
         </p:nvSpPr>
         <p:spPr>
           <a:xfrm>
+            <a:off x="0" y="0"/>
+            <a:ext cx="12191695" cy="6858000"/>
+          </a:xfrm>
+          <a:prstGeom prst="rect">
+            <a:avLst/>
+          </a:prstGeom>
+          <a:solidFill>
+            <a:srgbClr val="FFFFFF"/>
+          </a:solidFill>
+          <a:ln>
+            <a:noFill/>
+          </a:ln>
+          <a:effectLst/>
+        </p:spPr>
+        <p:style>
+          <a:lnRef idx="1">
+            <a:schemeClr val="accent1"/>
+          </a:lnRef>
+          <a:fillRef idx="3">
+            <a:schemeClr val="accent1"/>
+          </a:fillRef>
+          <a:effectRef idx="2">
+            <a:schemeClr val="accent1"/>
+          </a:effectRef>
+          <a:fontRef idx="minor">
+            <a:schemeClr val="lt1"/>
+          </a:fontRef>
+        </p:style>
+        <p:txBody>
+          <a:bodyPr rtlCol="0" anchor="ctr"/>
+          <a:lstStyle/>
+          <a:p>
+            <a:pPr algn="ctr"/>
+          </a:p>
+        </p:txBody>
+      </p:sp>
+      <p:sp>
+        <p:nvSpPr>
+          <p:cNvPr id="3" name="Rectangle 2"/>
+          <p:cNvSpPr/>
+          <p:nvPr/>
+        </p:nvSpPr>
+        <p:spPr>
+          <a:xfrm>
             <a:off x="502920" y="310896"/>
             <a:ext cx="109728" cy="457200"/>
           </a:xfrm>
@@ -12583,7 +13106,7 @@
       </p:sp>
       <p:sp>
         <p:nvSpPr>
-          <p:cNvPr id="3" name="TextBox 2"/>
+          <p:cNvPr id="4" name="TextBox 3"/>
           <p:cNvSpPr txBox="1"/>
           <p:nvPr/>
         </p:nvSpPr>
@@ -12626,7 +13149,7 @@
       </p:sp>
       <p:sp>
         <p:nvSpPr>
-          <p:cNvPr id="4" name="TextBox 3"/>
+          <p:cNvPr id="5" name="TextBox 4"/>
           <p:cNvSpPr txBox="1"/>
           <p:nvPr/>
         </p:nvSpPr>
@@ -12669,7 +13192,7 @@
       </p:sp>
       <p:sp>
         <p:nvSpPr>
-          <p:cNvPr id="5" name="Rectangle 4"/>
+          <p:cNvPr id="6" name="Rectangle 5"/>
           <p:cNvSpPr/>
           <p:nvPr/>
         </p:nvSpPr>
@@ -12713,7 +13236,7 @@
       </p:sp>
       <p:sp>
         <p:nvSpPr>
-          <p:cNvPr id="6" name="Rounded Rectangle 5"/>
+          <p:cNvPr id="7" name="Rounded Rectangle 6"/>
           <p:cNvSpPr/>
           <p:nvPr/>
         </p:nvSpPr>
@@ -12728,7 +13251,7 @@
             </a:avLst>
           </a:prstGeom>
           <a:solidFill>
-            <a:srgbClr val="1F6E70"/>
+            <a:srgbClr val="2C898A"/>
           </a:solidFill>
           <a:ln>
             <a:noFill/>
@@ -12759,7 +13282,7 @@
       </p:sp>
       <p:sp>
         <p:nvSpPr>
-          <p:cNvPr id="7" name="TextBox 6"/>
+          <p:cNvPr id="8" name="TextBox 7"/>
           <p:cNvSpPr txBox="1"/>
           <p:nvPr/>
         </p:nvSpPr>
@@ -12802,14 +13325,14 @@
       </p:sp>
       <p:sp>
         <p:nvSpPr>
-          <p:cNvPr id="8" name="TextBox 7"/>
+          <p:cNvPr id="9" name="TextBox 8"/>
           <p:cNvSpPr txBox="1"/>
           <p:nvPr/>
         </p:nvSpPr>
         <p:spPr>
           <a:xfrm>
-            <a:off x="731520" y="1371600"/>
-            <a:ext cx="6400800" cy="4663440"/>
+            <a:off x="731520" y="1463040"/>
+            <a:ext cx="5943600" cy="4389120"/>
           </a:xfrm>
           <a:prstGeom prst="rect">
             <a:avLst/>
@@ -12827,11 +13350,11 @@
                 <a:spcPct val="108000"/>
               </a:lnSpc>
               <a:spcAft>
-                <a:spcPts val="800"/>
-              </a:spcAft>
-            </a:pPr>
-            <a:r>
-              <a:rPr sz="979" b="1" i="0">
+                <a:spcPts val="900"/>
+              </a:spcAft>
+            </a:pPr>
+            <a:r>
+              <a:rPr sz="944" b="1" i="0">
                 <a:solidFill>
                   <a:srgbClr val="2C898A"/>
                 </a:solidFill>
@@ -12841,14 +13364,14 @@
               <a:t>●  </a:t>
             </a:r>
             <a:r>
-              <a:rPr sz="1400" b="1" i="0">
+              <a:rPr sz="1350" b="1" i="0">
                 <a:solidFill>
                   <a:srgbClr val="1A202C"/>
                 </a:solidFill>
                 <a:latin typeface="NanumGothic"/>
                 <a:ea typeface="NanumGothic"/>
               </a:rPr>
-              <a:t>표준: 방척추(paravertebral) 접근 + 투시(fluoroscopy). CT·초음파도 가능.</a:t>
+              <a:t>표준: 방척추(paravertebral) 접근 + 투시 (CT·초음파도 가능)</a:t>
             </a:r>
           </a:p>
           <a:p>
@@ -12857,11 +13380,11 @@
                 <a:spcPct val="108000"/>
               </a:lnSpc>
               <a:spcAft>
-                <a:spcPts val="800"/>
-              </a:spcAft>
-            </a:pPr>
-            <a:r>
-              <a:rPr sz="979" b="1" i="0">
+                <a:spcPts val="900"/>
+              </a:spcAft>
+            </a:pPr>
+            <a:r>
+              <a:rPr sz="944" b="1" i="0">
                 <a:solidFill>
                   <a:srgbClr val="2C898A"/>
                 </a:solidFill>
@@ -12871,14 +13394,14 @@
               <a:t>●  </a:t>
             </a:r>
             <a:r>
-              <a:rPr sz="1400" b="0" i="0">
+              <a:rPr sz="1350" b="0" i="0">
                 <a:solidFill>
                   <a:srgbClr val="1A202C"/>
                 </a:solidFill>
                 <a:latin typeface="NanumGothic"/>
                 <a:ea typeface="NanumGothic"/>
               </a:rPr>
-              <a:t>바늘 진입: 정중선에서 약 7 cm 외측. 척추체 접촉 후 전내측으로 'walk'하여 척추체 전외측으로 진입.</a:t>
+              <a:t>바늘: 정중선 ~7 cm 외측 → 척추체 접촉 후 전내측 'walk'</a:t>
             </a:r>
           </a:p>
           <a:p>
@@ -12887,11 +13410,11 @@
                 <a:spcPct val="108000"/>
               </a:lnSpc>
               <a:spcAft>
-                <a:spcPts val="800"/>
-              </a:spcAft>
-            </a:pPr>
-            <a:r>
-              <a:rPr sz="979" b="1" i="0">
+                <a:spcPts val="900"/>
+              </a:spcAft>
+            </a:pPr>
+            <a:r>
+              <a:rPr sz="944" b="1" i="0">
                 <a:solidFill>
                   <a:srgbClr val="2C898A"/>
                 </a:solidFill>
@@ -12901,14 +13424,14 @@
               <a:t>●  </a:t>
             </a:r>
             <a:r>
-              <a:rPr sz="1400" b="0" i="0">
+              <a:rPr sz="1350" b="0" i="0">
                 <a:solidFill>
                   <a:srgbClr val="1A202C"/>
                 </a:solidFill>
                 <a:latin typeface="NanumGothic"/>
                 <a:ea typeface="NanumGothic"/>
               </a:rPr>
-              <a:t>흡인 후 조영제 주입 → 두미측(craniocaudal) 종방향 확산 확인.</a:t>
+              <a:t>조영제로 두미측 종방향 확산 확인</a:t>
             </a:r>
           </a:p>
           <a:p>
@@ -12917,11 +13440,11 @@
                 <a:spcPct val="108000"/>
               </a:lnSpc>
               <a:spcAft>
-                <a:spcPts val="800"/>
-              </a:spcAft>
-            </a:pPr>
-            <a:r>
-              <a:rPr sz="979" b="1" i="0">
+                <a:spcPts val="900"/>
+              </a:spcAft>
+            </a:pPr>
+            <a:r>
+              <a:rPr sz="944" b="1" i="0">
                 <a:solidFill>
                   <a:srgbClr val="2C898A"/>
                 </a:solidFill>
@@ -12931,28 +13454,58 @@
               <a:t>●  </a:t>
             </a:r>
             <a:r>
-              <a:rPr sz="1400" b="1" i="0">
+              <a:rPr sz="1350" b="1" i="0">
                 <a:solidFill>
                   <a:srgbClr val="1A202C"/>
                 </a:solidFill>
                 <a:latin typeface="NanumGothic"/>
                 <a:ea typeface="NanumGothic"/>
               </a:rPr>
-              <a:t>성공 지표: 동측 하지 피부온도 ≥2°C 상승.</a:t>
-            </a:r>
-          </a:p>
-        </p:txBody>
-      </p:sp>
-      <p:sp>
-        <p:nvSpPr>
-          <p:cNvPr id="9" name="Rounded Rectangle 8"/>
+              <a:t>성공 지표: 피부온도 ≥2°C 상승</a:t>
+            </a:r>
+          </a:p>
+          <a:p>
+            <a:pPr algn="l">
+              <a:lnSpc>
+                <a:spcPct val="108000"/>
+              </a:lnSpc>
+              <a:spcAft>
+                <a:spcPts val="900"/>
+              </a:spcAft>
+            </a:pPr>
+            <a:r>
+              <a:rPr sz="1350" b="1" i="0">
+                <a:solidFill>
+                  <a:srgbClr val="5A6B7B"/>
+                </a:solidFill>
+                <a:latin typeface="NanumGothic"/>
+                <a:ea typeface="NanumGothic"/>
+              </a:rPr>
+              <a:t/>
+            </a:r>
+            <a:r>
+              <a:rPr sz="1350" b="1" i="0">
+                <a:solidFill>
+                  <a:srgbClr val="1F6E70"/>
+                </a:solidFill>
+                <a:latin typeface="NanumGothic"/>
+                <a:ea typeface="NanumGothic"/>
+              </a:rPr>
+              <a:t>약제: 국소마취제 / 신경파괴(무수알코올·phenol·RFA)는 진단차단 양성 시에만</a:t>
+            </a:r>
+          </a:p>
+        </p:txBody>
+      </p:sp>
+      <p:sp>
+        <p:nvSpPr>
+          <p:cNvPr id="10" name="Rounded Rectangle 9"/>
           <p:cNvSpPr/>
           <p:nvPr/>
         </p:nvSpPr>
         <p:spPr>
           <a:xfrm>
-            <a:off x="7406640" y="1463040"/>
-            <a:ext cx="4114800" cy="4480560"/>
+            <a:off x="7040880" y="1417320"/>
+            <a:ext cx="4526280" cy="4526280"/>
           </a:xfrm>
           <a:prstGeom prst="roundRect">
             <a:avLst>
@@ -12991,192 +13544,30 @@
           </a:p>
         </p:txBody>
       </p:sp>
-      <p:sp>
-        <p:nvSpPr>
-          <p:cNvPr id="10" name="TextBox 9"/>
-          <p:cNvSpPr txBox="1"/>
-          <p:nvPr/>
-        </p:nvSpPr>
-        <p:spPr>
-          <a:xfrm>
-            <a:off x="7680960" y="1691640"/>
-            <a:ext cx="3657600" cy="365760"/>
-          </a:xfrm>
-          <a:prstGeom prst="rect">
-            <a:avLst/>
-          </a:prstGeom>
-          <a:noFill/>
-        </p:spPr>
-        <p:txBody>
-          <a:bodyPr wrap="square" anchor="t" lIns="0" rIns="0" tIns="0" bIns="0">
-            <a:spAutoFit/>
-          </a:bodyPr>
-          <a:lstStyle/>
-          <a:p>
-            <a:pPr algn="l">
-              <a:lnSpc>
-                <a:spcPct val="108000"/>
-              </a:lnSpc>
-              <a:spcAft>
-                <a:spcPts val="400"/>
-              </a:spcAft>
-            </a:pPr>
-            <a:r>
-              <a:rPr sz="1300" b="1" i="0">
-                <a:solidFill>
-                  <a:srgbClr val="1F6E70"/>
-                </a:solidFill>
-                <a:latin typeface="NanumGothic"/>
-                <a:ea typeface="NanumGothic"/>
-              </a:rPr>
-              <a:t>약제</a:t>
-            </a:r>
-          </a:p>
-        </p:txBody>
-      </p:sp>
-      <p:sp>
-        <p:nvSpPr>
-          <p:cNvPr id="11" name="TextBox 10"/>
-          <p:cNvSpPr txBox="1"/>
-          <p:nvPr/>
-        </p:nvSpPr>
-        <p:spPr>
-          <a:xfrm>
-            <a:off x="7680960" y="2194560"/>
-            <a:ext cx="3611880" cy="3657600"/>
-          </a:xfrm>
-          <a:prstGeom prst="rect">
-            <a:avLst/>
-          </a:prstGeom>
-          <a:noFill/>
-        </p:spPr>
-        <p:txBody>
-          <a:bodyPr wrap="square" lIns="0" rIns="0" tIns="0" bIns="0">
-            <a:spAutoFit/>
-          </a:bodyPr>
-          <a:lstStyle/>
-          <a:p>
-            <a:pPr algn="l">
-              <a:lnSpc>
-                <a:spcPct val="108000"/>
-              </a:lnSpc>
-              <a:spcAft>
-                <a:spcPts val="800"/>
-              </a:spcAft>
-            </a:pPr>
-            <a:r>
-              <a:rPr sz="875" b="1" i="0">
-                <a:solidFill>
-                  <a:srgbClr val="2C898A"/>
-                </a:solidFill>
-                <a:latin typeface="NanumGothic"/>
-                <a:ea typeface="NanumGothic"/>
-              </a:rPr>
-              <a:t>●  </a:t>
-            </a:r>
-            <a:r>
-              <a:rPr sz="1250" b="0" i="0">
-                <a:solidFill>
-                  <a:srgbClr val="1A202C"/>
-                </a:solidFill>
-                <a:latin typeface="NanumGothic"/>
-                <a:ea typeface="NanumGothic"/>
-              </a:rPr>
-              <a:t>진단/치료: lidocaine 1%,</a:t>
-            </a:r>
-          </a:p>
-          <a:p>
-            <a:pPr algn="l">
-              <a:lnSpc>
-                <a:spcPct val="108000"/>
-              </a:lnSpc>
-              <a:spcAft>
-                <a:spcPts val="800"/>
-              </a:spcAft>
-            </a:pPr>
-            <a:r>
-              <a:rPr sz="875" b="1" i="0">
-                <a:solidFill>
-                  <a:srgbClr val="2C898A"/>
-                </a:solidFill>
-                <a:latin typeface="NanumGothic"/>
-                <a:ea typeface="NanumGothic"/>
-              </a:rPr>
-              <a:t>●  </a:t>
-            </a:r>
-            <a:r>
-              <a:rPr sz="1250" b="0" i="0">
-                <a:solidFill>
-                  <a:srgbClr val="1A202C"/>
-                </a:solidFill>
-                <a:latin typeface="NanumGothic"/>
-                <a:ea typeface="NanumGothic"/>
-              </a:rPr>
-              <a:t>  bupivacaine 0.25–0.5%, ropivacaine</a:t>
-            </a:r>
-          </a:p>
-          <a:p>
-            <a:pPr algn="l">
-              <a:lnSpc>
-                <a:spcPct val="108000"/>
-              </a:lnSpc>
-              <a:spcAft>
-                <a:spcPts val="800"/>
-              </a:spcAft>
-            </a:pPr>
-            <a:r>
-              <a:rPr sz="875" b="1" i="0">
-                <a:solidFill>
-                  <a:srgbClr val="2C898A"/>
-                </a:solidFill>
-                <a:latin typeface="NanumGothic"/>
-                <a:ea typeface="NanumGothic"/>
-              </a:rPr>
-              <a:t>●  </a:t>
-            </a:r>
-            <a:r>
-              <a:rPr sz="1250" b="0" i="0">
-                <a:solidFill>
-                  <a:srgbClr val="1A202C"/>
-                </a:solidFill>
-                <a:latin typeface="NanumGothic"/>
-                <a:ea typeface="NanumGothic"/>
-              </a:rPr>
-              <a:t>신경파괴: 무수알코올/phenol, RFA</a:t>
-            </a:r>
-          </a:p>
-          <a:p>
-            <a:pPr algn="l">
-              <a:lnSpc>
-                <a:spcPct val="108000"/>
-              </a:lnSpc>
-              <a:spcAft>
-                <a:spcPts val="800"/>
-              </a:spcAft>
-            </a:pPr>
-            <a:r>
-              <a:rPr sz="875" b="1" i="0">
-                <a:solidFill>
-                  <a:srgbClr val="2C898A"/>
-                </a:solidFill>
-                <a:latin typeface="NanumGothic"/>
-                <a:ea typeface="NanumGothic"/>
-              </a:rPr>
-              <a:t>●  </a:t>
-            </a:r>
-            <a:r>
-              <a:rPr sz="1250" b="0" i="0">
-                <a:solidFill>
-                  <a:srgbClr val="1A202C"/>
-                </a:solidFill>
-                <a:latin typeface="NanumGothic"/>
-                <a:ea typeface="NanumGothic"/>
-              </a:rPr>
-              <a:t>원칙: 신경파괴는 진단적 차단 양성 시에만</a:t>
-            </a:r>
-          </a:p>
-        </p:txBody>
-      </p:sp>
+      <p:pic>
+        <p:nvPicPr>
+          <p:cNvPr id="11" name="Picture 10" descr="lsb_sag.png"/>
+          <p:cNvPicPr>
+            <a:picLocks noChangeAspect="1"/>
+          </p:cNvPicPr>
+          <p:nvPr/>
+        </p:nvPicPr>
+        <p:blipFill>
+          <a:blip r:embed="rId2"/>
+          <a:stretch>
+            <a:fillRect/>
+          </a:stretch>
+        </p:blipFill>
+        <p:spPr>
+          <a:xfrm>
+            <a:off x="7178040" y="1958147"/>
+            <a:ext cx="4251960" cy="3444625"/>
+          </a:xfrm>
+          <a:prstGeom prst="rect">
+            <a:avLst/>
+          </a:prstGeom>
+        </p:spPr>
+      </p:pic>
       <p:sp>
         <p:nvSpPr>
           <p:cNvPr id="12" name="TextBox 11"/>
@@ -13215,7 +13606,7 @@
                 <a:latin typeface="NanumGothic"/>
                 <a:ea typeface="NanumGothic"/>
               </a:rPr>
-              <a:t>근거: StatPearls; Lumbar Sympatholysis NBK560514</a:t>
+              <a:t>근거: StatPearls NBK431107 · NBK560514 · 측면 모식도</a:t>
             </a:r>
           </a:p>
         </p:txBody>
@@ -13767,6 +14158,50 @@
         </p:nvSpPr>
         <p:spPr>
           <a:xfrm>
+            <a:off x="0" y="0"/>
+            <a:ext cx="12191695" cy="6858000"/>
+          </a:xfrm>
+          <a:prstGeom prst="rect">
+            <a:avLst/>
+          </a:prstGeom>
+          <a:solidFill>
+            <a:srgbClr val="FFFFFF"/>
+          </a:solidFill>
+          <a:ln>
+            <a:noFill/>
+          </a:ln>
+          <a:effectLst/>
+        </p:spPr>
+        <p:style>
+          <a:lnRef idx="1">
+            <a:schemeClr val="accent1"/>
+          </a:lnRef>
+          <a:fillRef idx="3">
+            <a:schemeClr val="accent1"/>
+          </a:fillRef>
+          <a:effectRef idx="2">
+            <a:schemeClr val="accent1"/>
+          </a:effectRef>
+          <a:fontRef idx="minor">
+            <a:schemeClr val="lt1"/>
+          </a:fontRef>
+        </p:style>
+        <p:txBody>
+          <a:bodyPr rtlCol="0" anchor="ctr"/>
+          <a:lstStyle/>
+          <a:p>
+            <a:pPr algn="ctr"/>
+          </a:p>
+        </p:txBody>
+      </p:sp>
+      <p:sp>
+        <p:nvSpPr>
+          <p:cNvPr id="3" name="Rectangle 2"/>
+          <p:cNvSpPr/>
+          <p:nvPr/>
+        </p:nvSpPr>
+        <p:spPr>
+          <a:xfrm>
             <a:off x="502920" y="310896"/>
             <a:ext cx="109728" cy="457200"/>
           </a:xfrm>
@@ -13805,7 +14240,7 @@
       </p:sp>
       <p:sp>
         <p:nvSpPr>
-          <p:cNvPr id="3" name="TextBox 2"/>
+          <p:cNvPr id="4" name="TextBox 3"/>
           <p:cNvSpPr txBox="1"/>
           <p:nvPr/>
         </p:nvSpPr>
@@ -13841,14 +14276,14 @@
                 <a:latin typeface="NanumGothic"/>
                 <a:ea typeface="NanumGothic"/>
               </a:rPr>
-              <a:t>L2·L3 시술 — 전·중 주의할 점</a:t>
-            </a:r>
-          </a:p>
-        </p:txBody>
-      </p:sp>
-      <p:sp>
-        <p:nvSpPr>
-          <p:cNvPr id="4" name="TextBox 3"/>
+              <a:t>복부 교감신경간과 요추 레벨 — 어디를 겨냥하나</a:t>
+            </a:r>
+          </a:p>
+        </p:txBody>
+      </p:sp>
+      <p:sp>
+        <p:nvSpPr>
+          <p:cNvPr id="5" name="TextBox 4"/>
           <p:cNvSpPr txBox="1"/>
           <p:nvPr/>
         </p:nvSpPr>
@@ -13884,14 +14319,14 @@
                 <a:latin typeface="NanumGothic"/>
                 <a:ea typeface="NanumGothic"/>
               </a:rPr>
-              <a:t>방법 · 안전</a:t>
-            </a:r>
-          </a:p>
-        </p:txBody>
-      </p:sp>
-      <p:sp>
-        <p:nvSpPr>
-          <p:cNvPr id="5" name="Rectangle 4"/>
+              <a:t>해부 · 레벨</a:t>
+            </a:r>
+          </a:p>
+        </p:txBody>
+      </p:sp>
+      <p:sp>
+        <p:nvSpPr>
+          <p:cNvPr id="6" name="Rectangle 5"/>
           <p:cNvSpPr/>
           <p:nvPr/>
         </p:nvSpPr>
@@ -13935,7 +14370,7 @@
       </p:sp>
       <p:sp>
         <p:nvSpPr>
-          <p:cNvPr id="6" name="Rounded Rectangle 5"/>
+          <p:cNvPr id="7" name="Rounded Rectangle 6"/>
           <p:cNvSpPr/>
           <p:nvPr/>
         </p:nvSpPr>
@@ -13981,7 +14416,7 @@
       </p:sp>
       <p:sp>
         <p:nvSpPr>
-          <p:cNvPr id="7" name="TextBox 6"/>
+          <p:cNvPr id="8" name="TextBox 7"/>
           <p:cNvSpPr txBox="1"/>
           <p:nvPr/>
         </p:nvSpPr>
@@ -14017,224 +14452,45 @@
                 <a:latin typeface="NanumGothic"/>
                 <a:ea typeface="NanumGothic"/>
               </a:rPr>
-              <a:t>시술 주의</a:t>
-            </a:r>
-          </a:p>
-        </p:txBody>
-      </p:sp>
-      <p:sp>
-        <p:nvSpPr>
-          <p:cNvPr id="8" name="TextBox 7"/>
+              <a:t>요추 레벨</a:t>
+            </a:r>
+          </a:p>
+        </p:txBody>
+      </p:sp>
+      <p:pic>
+        <p:nvPicPr>
+          <p:cNvPr id="9" name="Picture 8" descr="lsb_cor.png"/>
+          <p:cNvPicPr>
+            <a:picLocks noChangeAspect="1"/>
+          </p:cNvPicPr>
+          <p:nvPr/>
+        </p:nvPicPr>
+        <p:blipFill>
+          <a:blip r:embed="rId2"/>
+          <a:stretch>
+            <a:fillRect/>
+          </a:stretch>
+        </p:blipFill>
+        <p:spPr>
+          <a:xfrm>
+            <a:off x="2323947" y="1417320"/>
+            <a:ext cx="7543800" cy="4023360"/>
+          </a:xfrm>
+          <a:prstGeom prst="rect">
+            <a:avLst/>
+          </a:prstGeom>
+        </p:spPr>
+      </p:pic>
+      <p:sp>
+        <p:nvSpPr>
+          <p:cNvPr id="10" name="TextBox 9"/>
           <p:cNvSpPr txBox="1"/>
           <p:nvPr/>
         </p:nvSpPr>
         <p:spPr>
           <a:xfrm>
-            <a:off x="731520" y="1371600"/>
-            <a:ext cx="10835640" cy="4754880"/>
-          </a:xfrm>
-          <a:prstGeom prst="rect">
-            <a:avLst/>
-          </a:prstGeom>
-          <a:noFill/>
-        </p:spPr>
-        <p:txBody>
-          <a:bodyPr wrap="square" lIns="0" rIns="0" tIns="0" bIns="0">
-            <a:spAutoFit/>
-          </a:bodyPr>
-          <a:lstStyle/>
-          <a:p>
-            <a:pPr algn="l">
-              <a:lnSpc>
-                <a:spcPct val="108000"/>
-              </a:lnSpc>
-              <a:spcAft>
-                <a:spcPts val="700"/>
-              </a:spcAft>
-            </a:pPr>
-            <a:r>
-              <a:rPr sz="979" b="1" i="0">
-                <a:solidFill>
-                  <a:srgbClr val="2C898A"/>
-                </a:solidFill>
-                <a:latin typeface="NanumGothic"/>
-                <a:ea typeface="NanumGothic"/>
-              </a:rPr>
-              <a:t>●  </a:t>
-            </a:r>
-            <a:r>
-              <a:rPr sz="1400" b="0" i="0">
-                <a:solidFill>
-                  <a:srgbClr val="1A202C"/>
-                </a:solidFill>
-                <a:latin typeface="NanumGothic"/>
-                <a:ea typeface="NanumGothic"/>
-              </a:rPr>
-              <a:t>영상 유도 필수: 투시(또는 CT). 조영제로 두미측 종방향 확산 확인 — 후방(추간공)·혈관 확산 시 즉시 재위치.</a:t>
-            </a:r>
-          </a:p>
-          <a:p>
-            <a:pPr algn="l">
-              <a:lnSpc>
-                <a:spcPct val="108000"/>
-              </a:lnSpc>
-              <a:spcAft>
-                <a:spcPts val="700"/>
-              </a:spcAft>
-            </a:pPr>
-            <a:r>
-              <a:rPr sz="979" b="1" i="0">
-                <a:solidFill>
-                  <a:srgbClr val="2C898A"/>
-                </a:solidFill>
-                <a:latin typeface="NanumGothic"/>
-                <a:ea typeface="NanumGothic"/>
-              </a:rPr>
-              <a:t>●  </a:t>
-            </a:r>
-            <a:r>
-              <a:rPr sz="1400" b="1" i="0">
-                <a:solidFill>
-                  <a:srgbClr val="1A202C"/>
-                </a:solidFill>
-                <a:latin typeface="NanumGothic"/>
-                <a:ea typeface="NanumGothic"/>
-              </a:rPr>
-              <a:t>바늘 끝은 척추체 전외측에 — psoas·추간공 진입 금지.</a:t>
-            </a:r>
-          </a:p>
-          <a:p>
-            <a:pPr algn="l">
-              <a:lnSpc>
-                <a:spcPct val="108000"/>
-              </a:lnSpc>
-              <a:spcAft>
-                <a:spcPts val="700"/>
-              </a:spcAft>
-            </a:pPr>
-            <a:r>
-              <a:rPr sz="979" b="1" i="0">
-                <a:solidFill>
-                  <a:srgbClr val="2C898A"/>
-                </a:solidFill>
-                <a:latin typeface="NanumGothic"/>
-                <a:ea typeface="NanumGothic"/>
-              </a:rPr>
-              <a:t>●  </a:t>
-            </a:r>
-            <a:r>
-              <a:rPr sz="1400" b="1" i="0">
-                <a:solidFill>
-                  <a:srgbClr val="1A202C"/>
-                </a:solidFill>
-                <a:latin typeface="NanumGothic"/>
-                <a:ea typeface="NanumGothic"/>
-              </a:rPr>
-              <a:t>레벨은 L2 하1/3~L3 상1/3, L4로 내려가지 말 것(생식대퇴신경통 급증).</a:t>
-            </a:r>
-          </a:p>
-          <a:p>
-            <a:pPr algn="l">
-              <a:lnSpc>
-                <a:spcPct val="108000"/>
-              </a:lnSpc>
-              <a:spcAft>
-                <a:spcPts val="700"/>
-              </a:spcAft>
-            </a:pPr>
-            <a:r>
-              <a:rPr sz="979" b="1" i="0">
-                <a:solidFill>
-                  <a:srgbClr val="2C898A"/>
-                </a:solidFill>
-                <a:latin typeface="NanumGothic"/>
-                <a:ea typeface="NanumGothic"/>
-              </a:rPr>
-              <a:t>●  </a:t>
-            </a:r>
-            <a:r>
-              <a:rPr sz="1400" b="0" i="0">
-                <a:solidFill>
-                  <a:srgbClr val="1A202C"/>
-                </a:solidFill>
-                <a:latin typeface="NanumGothic"/>
-                <a:ea typeface="NanumGothic"/>
-              </a:rPr>
-              <a:t>흡인 후 분할·점진 주입(혈관내·경막외 조기 발견) · 소량 시험주입.</a:t>
-            </a:r>
-          </a:p>
-          <a:p>
-            <a:pPr algn="l">
-              <a:lnSpc>
-                <a:spcPct val="108000"/>
-              </a:lnSpc>
-              <a:spcAft>
-                <a:spcPts val="700"/>
-              </a:spcAft>
-            </a:pPr>
-            <a:r>
-              <a:rPr sz="979" b="1" i="0">
-                <a:solidFill>
-                  <a:srgbClr val="2C898A"/>
-                </a:solidFill>
-                <a:latin typeface="NanumGothic"/>
-                <a:ea typeface="NanumGothic"/>
-              </a:rPr>
-              <a:t>●  </a:t>
-            </a:r>
-            <a:r>
-              <a:rPr sz="1400" b="0" i="0">
-                <a:solidFill>
-                  <a:srgbClr val="1A202C"/>
-                </a:solidFill>
-                <a:latin typeface="NanumGothic"/>
-                <a:ea typeface="NanumGothic"/>
-              </a:rPr>
-              <a:t>항응고·항혈소판제 중단(심부·후복막 차단 — 출혈 위험) · 무균술.</a:t>
-            </a:r>
-          </a:p>
-          <a:p>
-            <a:pPr algn="l">
-              <a:lnSpc>
-                <a:spcPct val="108000"/>
-              </a:lnSpc>
-              <a:spcAft>
-                <a:spcPts val="700"/>
-              </a:spcAft>
-            </a:pPr>
-            <a:r>
-              <a:rPr sz="1400" b="1" i="0">
-                <a:solidFill>
-                  <a:srgbClr val="5A6B7B"/>
-                </a:solidFill>
-                <a:latin typeface="NanumGothic"/>
-                <a:ea typeface="NanumGothic"/>
-              </a:rPr>
-              <a:t/>
-            </a:r>
-            <a:r>
-              <a:rPr sz="1400" b="1" i="0">
-                <a:solidFill>
-                  <a:srgbClr val="1F6E70"/>
-                </a:solidFill>
-                <a:latin typeface="NanumGothic"/>
-                <a:ea typeface="NanumGothic"/>
-              </a:rPr>
-              <a:t>성공지표 온도 ≥2°C↑ 확인 · 시술 후 혈압·하지 근력/감각 모니터.</a:t>
-            </a:r>
-          </a:p>
-        </p:txBody>
-      </p:sp>
-      <p:sp>
-        <p:nvSpPr>
-          <p:cNvPr id="9" name="TextBox 8"/>
-          <p:cNvSpPr txBox="1"/>
-          <p:nvPr/>
-        </p:nvSpPr>
-        <p:spPr>
-          <a:xfrm>
-            <a:off x="731520" y="6455664"/>
-            <a:ext cx="9875520" cy="292608"/>
+            <a:off x="640080" y="5852160"/>
+            <a:ext cx="10927080" cy="457200"/>
           </a:xfrm>
           <a:prstGeom prst="rect">
             <a:avLst/>
@@ -14247,6 +14503,49 @@
           </a:bodyPr>
           <a:lstStyle/>
           <a:p>
+            <a:pPr algn="ctr">
+              <a:lnSpc>
+                <a:spcPct val="108000"/>
+              </a:lnSpc>
+              <a:spcAft>
+                <a:spcPts val="400"/>
+              </a:spcAft>
+            </a:pPr>
+            <a:r>
+              <a:rPr sz="1100" b="1" i="0">
+                <a:solidFill>
+                  <a:srgbClr val="1F6E70"/>
+                </a:solidFill>
+                <a:latin typeface="NanumGothic"/>
+                <a:ea typeface="NanumGothic"/>
+              </a:rPr>
+              <a:t>교감신경간은 척추체 전외측을 좌우로 주행 · 복강(T12–L1)·상장간막·하장간막 신경절은 대동맥 전면 · LSB 표적은 L2–L3</a:t>
+            </a:r>
+          </a:p>
+        </p:txBody>
+      </p:sp>
+      <p:sp>
+        <p:nvSpPr>
+          <p:cNvPr id="11" name="TextBox 10"/>
+          <p:cNvSpPr txBox="1"/>
+          <p:nvPr/>
+        </p:nvSpPr>
+        <p:spPr>
+          <a:xfrm>
+            <a:off x="731520" y="6455664"/>
+            <a:ext cx="9875520" cy="292608"/>
+          </a:xfrm>
+          <a:prstGeom prst="rect">
+            <a:avLst/>
+          </a:prstGeom>
+          <a:noFill/>
+        </p:spPr>
+        <p:txBody>
+          <a:bodyPr wrap="square" anchor="ctr" lIns="0" rIns="0" tIns="0" bIns="0">
+            <a:spAutoFit/>
+          </a:bodyPr>
+          <a:lstStyle/>
+          <a:p>
             <a:pPr algn="l">
               <a:lnSpc>
                 <a:spcPct val="108000"/>
@@ -14263,14 +14562,14 @@
                 <a:latin typeface="NanumGothic"/>
                 <a:ea typeface="NanumGothic"/>
               </a:rPr>
-              <a:t>근거: StatPearls NBK431107 · NBK557637 · Feigl 1998(PMID 9425975)</a:t>
-            </a:r>
-          </a:p>
-        </p:txBody>
-      </p:sp>
-      <p:sp>
-        <p:nvSpPr>
-          <p:cNvPr id="10" name="TextBox 9"/>
+              <a:t>근거: 교육용 오리지널 도해 · StatPearls NBK431107</a:t>
+            </a:r>
+          </a:p>
+        </p:txBody>
+      </p:sp>
+      <p:sp>
+        <p:nvSpPr>
+          <p:cNvPr id="12" name="TextBox 11"/>
           <p:cNvSpPr txBox="1"/>
           <p:nvPr/>
         </p:nvSpPr>
@@ -14337,50 +14636,6 @@
         </p:nvSpPr>
         <p:spPr>
           <a:xfrm>
-            <a:off x="0" y="0"/>
-            <a:ext cx="12191695" cy="6858000"/>
-          </a:xfrm>
-          <a:prstGeom prst="rect">
-            <a:avLst/>
-          </a:prstGeom>
-          <a:solidFill>
-            <a:srgbClr val="FFFFFF"/>
-          </a:solidFill>
-          <a:ln>
-            <a:noFill/>
-          </a:ln>
-          <a:effectLst/>
-        </p:spPr>
-        <p:style>
-          <a:lnRef idx="1">
-            <a:schemeClr val="accent1"/>
-          </a:lnRef>
-          <a:fillRef idx="3">
-            <a:schemeClr val="accent1"/>
-          </a:fillRef>
-          <a:effectRef idx="2">
-            <a:schemeClr val="accent1"/>
-          </a:effectRef>
-          <a:fontRef idx="minor">
-            <a:schemeClr val="lt1"/>
-          </a:fontRef>
-        </p:style>
-        <p:txBody>
-          <a:bodyPr rtlCol="0" anchor="ctr"/>
-          <a:lstStyle/>
-          <a:p>
-            <a:pPr algn="ctr"/>
-          </a:p>
-        </p:txBody>
-      </p:sp>
-      <p:sp>
-        <p:nvSpPr>
-          <p:cNvPr id="3" name="Rectangle 2"/>
-          <p:cNvSpPr/>
-          <p:nvPr/>
-        </p:nvSpPr>
-        <p:spPr>
-          <a:xfrm>
             <a:off x="502920" y="310896"/>
             <a:ext cx="109728" cy="457200"/>
           </a:xfrm>
@@ -14419,7 +14674,7 @@
       </p:sp>
       <p:sp>
         <p:nvSpPr>
-          <p:cNvPr id="4" name="TextBox 3"/>
+          <p:cNvPr id="3" name="TextBox 2"/>
           <p:cNvSpPr txBox="1"/>
           <p:nvPr/>
         </p:nvSpPr>
@@ -14455,14 +14710,14 @@
                 <a:latin typeface="NanumGothic"/>
                 <a:ea typeface="NanumGothic"/>
               </a:rPr>
-              <a:t>조영제 확산 읽기 — 이 패턴이면 멈춰라</a:t>
-            </a:r>
-          </a:p>
-        </p:txBody>
-      </p:sp>
-      <p:sp>
-        <p:nvSpPr>
-          <p:cNvPr id="5" name="TextBox 4"/>
+              <a:t>L2·L3 시술 — 전·중 주의할 점</a:t>
+            </a:r>
+          </a:p>
+        </p:txBody>
+      </p:sp>
+      <p:sp>
+        <p:nvSpPr>
+          <p:cNvPr id="4" name="TextBox 3"/>
           <p:cNvSpPr txBox="1"/>
           <p:nvPr/>
         </p:nvSpPr>
@@ -14498,14 +14753,14 @@
                 <a:latin typeface="NanumGothic"/>
                 <a:ea typeface="NanumGothic"/>
               </a:rPr>
-              <a:t>안전 · 핵심기술</a:t>
-            </a:r>
-          </a:p>
-        </p:txBody>
-      </p:sp>
-      <p:sp>
-        <p:nvSpPr>
-          <p:cNvPr id="6" name="Rectangle 5"/>
+              <a:t>방법 · 안전</a:t>
+            </a:r>
+          </a:p>
+        </p:txBody>
+      </p:sp>
+      <p:sp>
+        <p:nvSpPr>
+          <p:cNvPr id="5" name="Rectangle 4"/>
           <p:cNvSpPr/>
           <p:nvPr/>
         </p:nvSpPr>
@@ -14549,14 +14804,14 @@
       </p:sp>
       <p:sp>
         <p:nvSpPr>
-          <p:cNvPr id="7" name="Rounded Rectangle 6"/>
+          <p:cNvPr id="6" name="Rounded Rectangle 5"/>
           <p:cNvSpPr/>
           <p:nvPr/>
         </p:nvSpPr>
         <p:spPr>
           <a:xfrm>
-            <a:off x="10756087" y="365760"/>
-            <a:ext cx="932688" cy="347472"/>
+            <a:off x="10865816" y="365760"/>
+            <a:ext cx="822959" cy="347472"/>
           </a:xfrm>
           <a:prstGeom prst="roundRect">
             <a:avLst>
@@ -14595,14 +14850,14 @@
       </p:sp>
       <p:sp>
         <p:nvSpPr>
-          <p:cNvPr id="8" name="TextBox 7"/>
+          <p:cNvPr id="7" name="TextBox 6"/>
           <p:cNvSpPr txBox="1"/>
           <p:nvPr/>
         </p:nvSpPr>
         <p:spPr>
           <a:xfrm>
-            <a:off x="10756087" y="365760"/>
-            <a:ext cx="932688" cy="347472"/>
+            <a:off x="10865816" y="365760"/>
+            <a:ext cx="822959" cy="347472"/>
           </a:xfrm>
           <a:prstGeom prst="rect">
             <a:avLst/>
@@ -14631,45 +14886,224 @@
                 <a:latin typeface="NanumGothic"/>
                 <a:ea typeface="NanumGothic"/>
               </a:rPr>
-              <a:t>조영제 읽기</a:t>
-            </a:r>
-          </a:p>
-        </p:txBody>
-      </p:sp>
-      <p:pic>
-        <p:nvPicPr>
-          <p:cNvPr id="9" name="Picture 8" descr="lsb_contrast.png"/>
-          <p:cNvPicPr>
-            <a:picLocks noChangeAspect="1"/>
-          </p:cNvPicPr>
-          <p:nvPr/>
-        </p:nvPicPr>
-        <p:blipFill>
-          <a:blip r:embed="rId2"/>
-          <a:stretch>
-            <a:fillRect/>
-          </a:stretch>
-        </p:blipFill>
-        <p:spPr>
-          <a:xfrm>
-            <a:off x="2033578" y="1417320"/>
-            <a:ext cx="8124539" cy="3977639"/>
-          </a:xfrm>
-          <a:prstGeom prst="rect">
-            <a:avLst/>
-          </a:prstGeom>
-        </p:spPr>
-      </p:pic>
-      <p:sp>
-        <p:nvSpPr>
-          <p:cNvPr id="10" name="TextBox 9"/>
+              <a:t>시술 주의</a:t>
+            </a:r>
+          </a:p>
+        </p:txBody>
+      </p:sp>
+      <p:sp>
+        <p:nvSpPr>
+          <p:cNvPr id="8" name="TextBox 7"/>
           <p:cNvSpPr txBox="1"/>
           <p:nvPr/>
         </p:nvSpPr>
         <p:spPr>
           <a:xfrm>
-            <a:off x="640080" y="5852160"/>
-            <a:ext cx="10927080" cy="457200"/>
+            <a:off x="731520" y="1371600"/>
+            <a:ext cx="10835640" cy="4754880"/>
+          </a:xfrm>
+          <a:prstGeom prst="rect">
+            <a:avLst/>
+          </a:prstGeom>
+          <a:noFill/>
+        </p:spPr>
+        <p:txBody>
+          <a:bodyPr wrap="square" lIns="0" rIns="0" tIns="0" bIns="0">
+            <a:spAutoFit/>
+          </a:bodyPr>
+          <a:lstStyle/>
+          <a:p>
+            <a:pPr algn="l">
+              <a:lnSpc>
+                <a:spcPct val="108000"/>
+              </a:lnSpc>
+              <a:spcAft>
+                <a:spcPts val="700"/>
+              </a:spcAft>
+            </a:pPr>
+            <a:r>
+              <a:rPr sz="979" b="1" i="0">
+                <a:solidFill>
+                  <a:srgbClr val="2C898A"/>
+                </a:solidFill>
+                <a:latin typeface="NanumGothic"/>
+                <a:ea typeface="NanumGothic"/>
+              </a:rPr>
+              <a:t>●  </a:t>
+            </a:r>
+            <a:r>
+              <a:rPr sz="1400" b="0" i="0">
+                <a:solidFill>
+                  <a:srgbClr val="1A202C"/>
+                </a:solidFill>
+                <a:latin typeface="NanumGothic"/>
+                <a:ea typeface="NanumGothic"/>
+              </a:rPr>
+              <a:t>영상 유도 필수: 투시(또는 CT). 조영제로 두미측 종방향 확산 확인 — 후방(추간공)·혈관 확산 시 즉시 재위치.</a:t>
+            </a:r>
+          </a:p>
+          <a:p>
+            <a:pPr algn="l">
+              <a:lnSpc>
+                <a:spcPct val="108000"/>
+              </a:lnSpc>
+              <a:spcAft>
+                <a:spcPts val="700"/>
+              </a:spcAft>
+            </a:pPr>
+            <a:r>
+              <a:rPr sz="979" b="1" i="0">
+                <a:solidFill>
+                  <a:srgbClr val="2C898A"/>
+                </a:solidFill>
+                <a:latin typeface="NanumGothic"/>
+                <a:ea typeface="NanumGothic"/>
+              </a:rPr>
+              <a:t>●  </a:t>
+            </a:r>
+            <a:r>
+              <a:rPr sz="1400" b="1" i="0">
+                <a:solidFill>
+                  <a:srgbClr val="1A202C"/>
+                </a:solidFill>
+                <a:latin typeface="NanumGothic"/>
+                <a:ea typeface="NanumGothic"/>
+              </a:rPr>
+              <a:t>바늘 끝은 척추체 전외측에 — psoas·추간공 진입 금지.</a:t>
+            </a:r>
+          </a:p>
+          <a:p>
+            <a:pPr algn="l">
+              <a:lnSpc>
+                <a:spcPct val="108000"/>
+              </a:lnSpc>
+              <a:spcAft>
+                <a:spcPts val="700"/>
+              </a:spcAft>
+            </a:pPr>
+            <a:r>
+              <a:rPr sz="979" b="1" i="0">
+                <a:solidFill>
+                  <a:srgbClr val="2C898A"/>
+                </a:solidFill>
+                <a:latin typeface="NanumGothic"/>
+                <a:ea typeface="NanumGothic"/>
+              </a:rPr>
+              <a:t>●  </a:t>
+            </a:r>
+            <a:r>
+              <a:rPr sz="1400" b="1" i="0">
+                <a:solidFill>
+                  <a:srgbClr val="1A202C"/>
+                </a:solidFill>
+                <a:latin typeface="NanumGothic"/>
+                <a:ea typeface="NanumGothic"/>
+              </a:rPr>
+              <a:t>레벨은 L2 하1/3~L3 상1/3, L4로 내려가지 말 것(생식대퇴신경통 급증).</a:t>
+            </a:r>
+          </a:p>
+          <a:p>
+            <a:pPr algn="l">
+              <a:lnSpc>
+                <a:spcPct val="108000"/>
+              </a:lnSpc>
+              <a:spcAft>
+                <a:spcPts val="700"/>
+              </a:spcAft>
+            </a:pPr>
+            <a:r>
+              <a:rPr sz="979" b="1" i="0">
+                <a:solidFill>
+                  <a:srgbClr val="2C898A"/>
+                </a:solidFill>
+                <a:latin typeface="NanumGothic"/>
+                <a:ea typeface="NanumGothic"/>
+              </a:rPr>
+              <a:t>●  </a:t>
+            </a:r>
+            <a:r>
+              <a:rPr sz="1400" b="0" i="0">
+                <a:solidFill>
+                  <a:srgbClr val="1A202C"/>
+                </a:solidFill>
+                <a:latin typeface="NanumGothic"/>
+                <a:ea typeface="NanumGothic"/>
+              </a:rPr>
+              <a:t>흡인 후 분할·점진 주입(혈관내·경막외 조기 발견) · 소량 시험주입.</a:t>
+            </a:r>
+          </a:p>
+          <a:p>
+            <a:pPr algn="l">
+              <a:lnSpc>
+                <a:spcPct val="108000"/>
+              </a:lnSpc>
+              <a:spcAft>
+                <a:spcPts val="700"/>
+              </a:spcAft>
+            </a:pPr>
+            <a:r>
+              <a:rPr sz="979" b="1" i="0">
+                <a:solidFill>
+                  <a:srgbClr val="2C898A"/>
+                </a:solidFill>
+                <a:latin typeface="NanumGothic"/>
+                <a:ea typeface="NanumGothic"/>
+              </a:rPr>
+              <a:t>●  </a:t>
+            </a:r>
+            <a:r>
+              <a:rPr sz="1400" b="0" i="0">
+                <a:solidFill>
+                  <a:srgbClr val="1A202C"/>
+                </a:solidFill>
+                <a:latin typeface="NanumGothic"/>
+                <a:ea typeface="NanumGothic"/>
+              </a:rPr>
+              <a:t>항응고·항혈소판제 중단(심부·후복막 차단 — 출혈 위험) · 무균술.</a:t>
+            </a:r>
+          </a:p>
+          <a:p>
+            <a:pPr algn="l">
+              <a:lnSpc>
+                <a:spcPct val="108000"/>
+              </a:lnSpc>
+              <a:spcAft>
+                <a:spcPts val="700"/>
+              </a:spcAft>
+            </a:pPr>
+            <a:r>
+              <a:rPr sz="1400" b="1" i="0">
+                <a:solidFill>
+                  <a:srgbClr val="5A6B7B"/>
+                </a:solidFill>
+                <a:latin typeface="NanumGothic"/>
+                <a:ea typeface="NanumGothic"/>
+              </a:rPr>
+              <a:t/>
+            </a:r>
+            <a:r>
+              <a:rPr sz="1400" b="1" i="0">
+                <a:solidFill>
+                  <a:srgbClr val="1F6E70"/>
+                </a:solidFill>
+                <a:latin typeface="NanumGothic"/>
+                <a:ea typeface="NanumGothic"/>
+              </a:rPr>
+              <a:t>성공지표 온도 ≥2°C↑ 확인 · 시술 후 혈압·하지 근력/감각 모니터.</a:t>
+            </a:r>
+          </a:p>
+        </p:txBody>
+      </p:sp>
+      <p:sp>
+        <p:nvSpPr>
+          <p:cNvPr id="9" name="TextBox 8"/>
+          <p:cNvSpPr txBox="1"/>
+          <p:nvPr/>
+        </p:nvSpPr>
+        <p:spPr>
+          <a:xfrm>
+            <a:off x="731520" y="6455664"/>
+            <a:ext cx="9875520" cy="292608"/>
           </a:xfrm>
           <a:prstGeom prst="rect">
             <a:avLst/>
@@ -14682,7 +15116,7 @@
           </a:bodyPr>
           <a:lstStyle/>
           <a:p>
-            <a:pPr algn="ctr">
+            <a:pPr algn="l">
               <a:lnSpc>
                 <a:spcPct val="108000"/>
               </a:lnSpc>
@@ -14691,49 +15125,6 @@
               </a:spcAft>
             </a:pPr>
             <a:r>
-              <a:rPr sz="1100" b="1" i="0">
-                <a:solidFill>
-                  <a:srgbClr val="1F6E70"/>
-                </a:solidFill>
-                <a:latin typeface="NanumGothic"/>
-                <a:ea typeface="NanumGothic"/>
-              </a:rPr>
-              <a:t>실시간 조영제가 최고의 안전장치 — 종방향(위·아래) 확산만 진행 · 혈관·경막외·근육내 패턴이면 즉시 재위치</a:t>
-            </a:r>
-          </a:p>
-        </p:txBody>
-      </p:sp>
-      <p:sp>
-        <p:nvSpPr>
-          <p:cNvPr id="11" name="TextBox 10"/>
-          <p:cNvSpPr txBox="1"/>
-          <p:nvPr/>
-        </p:nvSpPr>
-        <p:spPr>
-          <a:xfrm>
-            <a:off x="731520" y="6455664"/>
-            <a:ext cx="9875520" cy="292608"/>
-          </a:xfrm>
-          <a:prstGeom prst="rect">
-            <a:avLst/>
-          </a:prstGeom>
-          <a:noFill/>
-        </p:spPr>
-        <p:txBody>
-          <a:bodyPr wrap="square" anchor="ctr" lIns="0" rIns="0" tIns="0" bIns="0">
-            <a:spAutoFit/>
-          </a:bodyPr>
-          <a:lstStyle/>
-          <a:p>
-            <a:pPr algn="l">
-              <a:lnSpc>
-                <a:spcPct val="108000"/>
-              </a:lnSpc>
-              <a:spcAft>
-                <a:spcPts val="400"/>
-              </a:spcAft>
-            </a:pPr>
-            <a:r>
               <a:rPr sz="900" b="0" i="0">
                 <a:solidFill>
                   <a:srgbClr val="5A6B7B"/>
@@ -14741,14 +15132,14 @@
                 <a:latin typeface="NanumGothic"/>
                 <a:ea typeface="NanumGothic"/>
               </a:rPr>
-              <a:t>근거: 조영제 확산 패턴 판독 · StatPearls NBK431107</a:t>
-            </a:r>
-          </a:p>
-        </p:txBody>
-      </p:sp>
-      <p:sp>
-        <p:nvSpPr>
-          <p:cNvPr id="12" name="TextBox 11"/>
+              <a:t>근거: StatPearls NBK431107 · NBK557637 · Feigl 1998(PMID 9425975)</a:t>
+            </a:r>
+          </a:p>
+        </p:txBody>
+      </p:sp>
+      <p:sp>
+        <p:nvSpPr>
+          <p:cNvPr id="10" name="TextBox 9"/>
           <p:cNvSpPr txBox="1"/>
           <p:nvPr/>
         </p:nvSpPr>
@@ -14798,6 +15189,484 @@
 </file>
 
 <file path=ppt/slides/slide8.xml><?xml version="1.0" encoding="utf-8"?>
+<p:sld xmlns:a="http://schemas.openxmlformats.org/drawingml/2006/main" xmlns:p="http://schemas.openxmlformats.org/presentationml/2006/main" xmlns:r="http://schemas.openxmlformats.org/officeDocument/2006/relationships">
+  <p:cSld>
+    <p:spTree>
+      <p:nvGrpSpPr>
+        <p:cNvPr id="1" name=""/>
+        <p:cNvGrpSpPr/>
+        <p:nvPr/>
+      </p:nvGrpSpPr>
+      <p:grpSpPr/>
+      <p:sp>
+        <p:nvSpPr>
+          <p:cNvPr id="2" name="Rectangle 1"/>
+          <p:cNvSpPr/>
+          <p:nvPr/>
+        </p:nvSpPr>
+        <p:spPr>
+          <a:xfrm>
+            <a:off x="0" y="0"/>
+            <a:ext cx="12191695" cy="6858000"/>
+          </a:xfrm>
+          <a:prstGeom prst="rect">
+            <a:avLst/>
+          </a:prstGeom>
+          <a:solidFill>
+            <a:srgbClr val="FFFFFF"/>
+          </a:solidFill>
+          <a:ln>
+            <a:noFill/>
+          </a:ln>
+          <a:effectLst/>
+        </p:spPr>
+        <p:style>
+          <a:lnRef idx="1">
+            <a:schemeClr val="accent1"/>
+          </a:lnRef>
+          <a:fillRef idx="3">
+            <a:schemeClr val="accent1"/>
+          </a:fillRef>
+          <a:effectRef idx="2">
+            <a:schemeClr val="accent1"/>
+          </a:effectRef>
+          <a:fontRef idx="minor">
+            <a:schemeClr val="lt1"/>
+          </a:fontRef>
+        </p:style>
+        <p:txBody>
+          <a:bodyPr rtlCol="0" anchor="ctr"/>
+          <a:lstStyle/>
+          <a:p>
+            <a:pPr algn="ctr"/>
+          </a:p>
+        </p:txBody>
+      </p:sp>
+      <p:sp>
+        <p:nvSpPr>
+          <p:cNvPr id="3" name="Rectangle 2"/>
+          <p:cNvSpPr/>
+          <p:nvPr/>
+        </p:nvSpPr>
+        <p:spPr>
+          <a:xfrm>
+            <a:off x="502920" y="310896"/>
+            <a:ext cx="109728" cy="457200"/>
+          </a:xfrm>
+          <a:prstGeom prst="rect">
+            <a:avLst/>
+          </a:prstGeom>
+          <a:solidFill>
+            <a:srgbClr val="2C898A"/>
+          </a:solidFill>
+          <a:ln>
+            <a:noFill/>
+          </a:ln>
+          <a:effectLst/>
+        </p:spPr>
+        <p:style>
+          <a:lnRef idx="1">
+            <a:schemeClr val="accent1"/>
+          </a:lnRef>
+          <a:fillRef idx="3">
+            <a:schemeClr val="accent1"/>
+          </a:fillRef>
+          <a:effectRef idx="2">
+            <a:schemeClr val="accent1"/>
+          </a:effectRef>
+          <a:fontRef idx="minor">
+            <a:schemeClr val="lt1"/>
+          </a:fontRef>
+        </p:style>
+        <p:txBody>
+          <a:bodyPr rtlCol="0" anchor="ctr"/>
+          <a:lstStyle/>
+          <a:p>
+            <a:pPr algn="ctr"/>
+          </a:p>
+        </p:txBody>
+      </p:sp>
+      <p:sp>
+        <p:nvSpPr>
+          <p:cNvPr id="4" name="TextBox 3"/>
+          <p:cNvSpPr txBox="1"/>
+          <p:nvPr/>
+        </p:nvSpPr>
+        <p:spPr>
+          <a:xfrm>
+            <a:off x="731520" y="237744"/>
+            <a:ext cx="9509760" cy="685800"/>
+          </a:xfrm>
+          <a:prstGeom prst="rect">
+            <a:avLst/>
+          </a:prstGeom>
+          <a:noFill/>
+        </p:spPr>
+        <p:txBody>
+          <a:bodyPr wrap="square" anchor="ctr" lIns="0" rIns="0" tIns="0" bIns="0">
+            <a:spAutoFit/>
+          </a:bodyPr>
+          <a:lstStyle/>
+          <a:p>
+            <a:pPr algn="l">
+              <a:lnSpc>
+                <a:spcPct val="108000"/>
+              </a:lnSpc>
+              <a:spcAft>
+                <a:spcPts val="400"/>
+              </a:spcAft>
+            </a:pPr>
+            <a:r>
+              <a:rPr sz="2400" b="1" i="0">
+                <a:solidFill>
+                  <a:srgbClr val="1B355E"/>
+                </a:solidFill>
+                <a:latin typeface="NanumGothic"/>
+                <a:ea typeface="NanumGothic"/>
+              </a:rPr>
+              <a:t>조영제 확산 읽기 — 이 패턴이면 멈춰라</a:t>
+            </a:r>
+          </a:p>
+        </p:txBody>
+      </p:sp>
+      <p:sp>
+        <p:nvSpPr>
+          <p:cNvPr id="5" name="TextBox 4"/>
+          <p:cNvSpPr txBox="1"/>
+          <p:nvPr/>
+        </p:nvSpPr>
+        <p:spPr>
+          <a:xfrm>
+            <a:off x="749808" y="109728"/>
+            <a:ext cx="7315200" cy="219456"/>
+          </a:xfrm>
+          <a:prstGeom prst="rect">
+            <a:avLst/>
+          </a:prstGeom>
+          <a:noFill/>
+        </p:spPr>
+        <p:txBody>
+          <a:bodyPr wrap="square" anchor="t" lIns="0" rIns="0" tIns="0" bIns="0">
+            <a:spAutoFit/>
+          </a:bodyPr>
+          <a:lstStyle/>
+          <a:p>
+            <a:pPr algn="l">
+              <a:lnSpc>
+                <a:spcPct val="108000"/>
+              </a:lnSpc>
+              <a:spcAft>
+                <a:spcPts val="400"/>
+              </a:spcAft>
+            </a:pPr>
+            <a:r>
+              <a:rPr sz="1100" b="1" i="0">
+                <a:solidFill>
+                  <a:srgbClr val="1F6E70"/>
+                </a:solidFill>
+                <a:latin typeface="NanumGothic"/>
+                <a:ea typeface="NanumGothic"/>
+              </a:rPr>
+              <a:t>안전 · 핵심기술</a:t>
+            </a:r>
+          </a:p>
+        </p:txBody>
+      </p:sp>
+      <p:sp>
+        <p:nvSpPr>
+          <p:cNvPr id="6" name="Rectangle 5"/>
+          <p:cNvSpPr/>
+          <p:nvPr/>
+        </p:nvSpPr>
+        <p:spPr>
+          <a:xfrm>
+            <a:off x="731520" y="969264"/>
+            <a:ext cx="10881360" cy="17780"/>
+          </a:xfrm>
+          <a:prstGeom prst="rect">
+            <a:avLst/>
+          </a:prstGeom>
+          <a:solidFill>
+            <a:srgbClr val="D5DEE7"/>
+          </a:solidFill>
+          <a:ln>
+            <a:noFill/>
+          </a:ln>
+          <a:effectLst/>
+        </p:spPr>
+        <p:style>
+          <a:lnRef idx="1">
+            <a:schemeClr val="accent1"/>
+          </a:lnRef>
+          <a:fillRef idx="3">
+            <a:schemeClr val="accent1"/>
+          </a:fillRef>
+          <a:effectRef idx="2">
+            <a:schemeClr val="accent1"/>
+          </a:effectRef>
+          <a:fontRef idx="minor">
+            <a:schemeClr val="lt1"/>
+          </a:fontRef>
+        </p:style>
+        <p:txBody>
+          <a:bodyPr rtlCol="0" anchor="ctr"/>
+          <a:lstStyle/>
+          <a:p>
+            <a:pPr algn="ctr"/>
+          </a:p>
+        </p:txBody>
+      </p:sp>
+      <p:sp>
+        <p:nvSpPr>
+          <p:cNvPr id="7" name="Rounded Rectangle 6"/>
+          <p:cNvSpPr/>
+          <p:nvPr/>
+        </p:nvSpPr>
+        <p:spPr>
+          <a:xfrm>
+            <a:off x="10756087" y="365760"/>
+            <a:ext cx="932688" cy="347472"/>
+          </a:xfrm>
+          <a:prstGeom prst="roundRect">
+            <a:avLst>
+              <a:gd name="adj" fmla="val 8000"/>
+            </a:avLst>
+          </a:prstGeom>
+          <a:solidFill>
+            <a:srgbClr val="2C898A"/>
+          </a:solidFill>
+          <a:ln>
+            <a:noFill/>
+          </a:ln>
+          <a:effectLst/>
+        </p:spPr>
+        <p:style>
+          <a:lnRef idx="1">
+            <a:schemeClr val="accent1"/>
+          </a:lnRef>
+          <a:fillRef idx="3">
+            <a:schemeClr val="accent1"/>
+          </a:fillRef>
+          <a:effectRef idx="2">
+            <a:schemeClr val="accent1"/>
+          </a:effectRef>
+          <a:fontRef idx="minor">
+            <a:schemeClr val="lt1"/>
+          </a:fontRef>
+        </p:style>
+        <p:txBody>
+          <a:bodyPr rtlCol="0" anchor="ctr"/>
+          <a:lstStyle/>
+          <a:p>
+            <a:pPr algn="ctr"/>
+          </a:p>
+        </p:txBody>
+      </p:sp>
+      <p:sp>
+        <p:nvSpPr>
+          <p:cNvPr id="8" name="TextBox 7"/>
+          <p:cNvSpPr txBox="1"/>
+          <p:nvPr/>
+        </p:nvSpPr>
+        <p:spPr>
+          <a:xfrm>
+            <a:off x="10756087" y="365760"/>
+            <a:ext cx="932688" cy="347472"/>
+          </a:xfrm>
+          <a:prstGeom prst="rect">
+            <a:avLst/>
+          </a:prstGeom>
+          <a:noFill/>
+        </p:spPr>
+        <p:txBody>
+          <a:bodyPr wrap="square" anchor="ctr" lIns="0" rIns="0" tIns="0" bIns="0">
+            <a:spAutoFit/>
+          </a:bodyPr>
+          <a:lstStyle/>
+          <a:p>
+            <a:pPr algn="ctr">
+              <a:lnSpc>
+                <a:spcPct val="108000"/>
+              </a:lnSpc>
+              <a:spcAft>
+                <a:spcPts val="400"/>
+              </a:spcAft>
+            </a:pPr>
+            <a:r>
+              <a:rPr sz="1150" b="1" i="0">
+                <a:solidFill>
+                  <a:srgbClr val="FFFFFF"/>
+                </a:solidFill>
+                <a:latin typeface="NanumGothic"/>
+                <a:ea typeface="NanumGothic"/>
+              </a:rPr>
+              <a:t>조영제 읽기</a:t>
+            </a:r>
+          </a:p>
+        </p:txBody>
+      </p:sp>
+      <p:pic>
+        <p:nvPicPr>
+          <p:cNvPr id="9" name="Picture 8" descr="lsb_contrast.png"/>
+          <p:cNvPicPr>
+            <a:picLocks noChangeAspect="1"/>
+          </p:cNvPicPr>
+          <p:nvPr/>
+        </p:nvPicPr>
+        <p:blipFill>
+          <a:blip r:embed="rId2"/>
+          <a:stretch>
+            <a:fillRect/>
+          </a:stretch>
+        </p:blipFill>
+        <p:spPr>
+          <a:xfrm>
+            <a:off x="2033578" y="1417320"/>
+            <a:ext cx="8124539" cy="3977639"/>
+          </a:xfrm>
+          <a:prstGeom prst="rect">
+            <a:avLst/>
+          </a:prstGeom>
+        </p:spPr>
+      </p:pic>
+      <p:sp>
+        <p:nvSpPr>
+          <p:cNvPr id="10" name="TextBox 9"/>
+          <p:cNvSpPr txBox="1"/>
+          <p:nvPr/>
+        </p:nvSpPr>
+        <p:spPr>
+          <a:xfrm>
+            <a:off x="640080" y="5852160"/>
+            <a:ext cx="10927080" cy="457200"/>
+          </a:xfrm>
+          <a:prstGeom prst="rect">
+            <a:avLst/>
+          </a:prstGeom>
+          <a:noFill/>
+        </p:spPr>
+        <p:txBody>
+          <a:bodyPr wrap="square" anchor="ctr" lIns="0" rIns="0" tIns="0" bIns="0">
+            <a:spAutoFit/>
+          </a:bodyPr>
+          <a:lstStyle/>
+          <a:p>
+            <a:pPr algn="ctr">
+              <a:lnSpc>
+                <a:spcPct val="108000"/>
+              </a:lnSpc>
+              <a:spcAft>
+                <a:spcPts val="400"/>
+              </a:spcAft>
+            </a:pPr>
+            <a:r>
+              <a:rPr sz="1100" b="1" i="0">
+                <a:solidFill>
+                  <a:srgbClr val="1F6E70"/>
+                </a:solidFill>
+                <a:latin typeface="NanumGothic"/>
+                <a:ea typeface="NanumGothic"/>
+              </a:rPr>
+              <a:t>실시간 조영제가 최고의 안전장치 — 종방향(위·아래) 확산만 진행 · 혈관·경막외·근육내 패턴이면 즉시 재위치</a:t>
+            </a:r>
+          </a:p>
+        </p:txBody>
+      </p:sp>
+      <p:sp>
+        <p:nvSpPr>
+          <p:cNvPr id="11" name="TextBox 10"/>
+          <p:cNvSpPr txBox="1"/>
+          <p:nvPr/>
+        </p:nvSpPr>
+        <p:spPr>
+          <a:xfrm>
+            <a:off x="731520" y="6455664"/>
+            <a:ext cx="9875520" cy="292608"/>
+          </a:xfrm>
+          <a:prstGeom prst="rect">
+            <a:avLst/>
+          </a:prstGeom>
+          <a:noFill/>
+        </p:spPr>
+        <p:txBody>
+          <a:bodyPr wrap="square" anchor="ctr" lIns="0" rIns="0" tIns="0" bIns="0">
+            <a:spAutoFit/>
+          </a:bodyPr>
+          <a:lstStyle/>
+          <a:p>
+            <a:pPr algn="l">
+              <a:lnSpc>
+                <a:spcPct val="108000"/>
+              </a:lnSpc>
+              <a:spcAft>
+                <a:spcPts val="400"/>
+              </a:spcAft>
+            </a:pPr>
+            <a:r>
+              <a:rPr sz="900" b="0" i="0">
+                <a:solidFill>
+                  <a:srgbClr val="5A6B7B"/>
+                </a:solidFill>
+                <a:latin typeface="NanumGothic"/>
+                <a:ea typeface="NanumGothic"/>
+              </a:rPr>
+              <a:t>근거: 조영제 확산 패턴 판독 · StatPearls NBK431107</a:t>
+            </a:r>
+          </a:p>
+        </p:txBody>
+      </p:sp>
+      <p:sp>
+        <p:nvSpPr>
+          <p:cNvPr id="12" name="TextBox 11"/>
+          <p:cNvSpPr txBox="1"/>
+          <p:nvPr/>
+        </p:nvSpPr>
+        <p:spPr>
+          <a:xfrm>
+            <a:off x="11064240" y="6455664"/>
+            <a:ext cx="822960" cy="292608"/>
+          </a:xfrm>
+          <a:prstGeom prst="rect">
+            <a:avLst/>
+          </a:prstGeom>
+          <a:noFill/>
+        </p:spPr>
+        <p:txBody>
+          <a:bodyPr wrap="square" anchor="ctr" lIns="0" rIns="0" tIns="0" bIns="0">
+            <a:spAutoFit/>
+          </a:bodyPr>
+          <a:lstStyle/>
+          <a:p>
+            <a:pPr algn="r">
+              <a:lnSpc>
+                <a:spcPct val="108000"/>
+              </a:lnSpc>
+              <a:spcAft>
+                <a:spcPts val="400"/>
+              </a:spcAft>
+            </a:pPr>
+            <a:r>
+              <a:rPr sz="1000" b="1" i="0">
+                <a:solidFill>
+                  <a:srgbClr val="5A6B7B"/>
+                </a:solidFill>
+                <a:latin typeface="NanumGothic"/>
+                <a:ea typeface="NanumGothic"/>
+              </a:rPr>
+              <a:t>8</a:t>
+            </a:r>
+          </a:p>
+        </p:txBody>
+      </p:sp>
+    </p:spTree>
+  </p:cSld>
+  <p:clrMapOvr>
+    <a:masterClrMapping/>
+  </p:clrMapOvr>
+</p:sld>
+</file>
+
+<file path=ppt/slides/slide9.xml><?xml version="1.0" encoding="utf-8"?>
 <p:sld xmlns:a="http://schemas.openxmlformats.org/drawingml/2006/main" xmlns:p="http://schemas.openxmlformats.org/presentationml/2006/main" xmlns:r="http://schemas.openxmlformats.org/officeDocument/2006/relationships">
   <p:cSld>
     <p:spTree>
@@ -15739,484 +16608,6 @@
                 <a:latin typeface="NanumGothic"/>
                 <a:ea typeface="NanumGothic"/>
               </a:rPr>
-              <a:t>8</a:t>
-            </a:r>
-          </a:p>
-        </p:txBody>
-      </p:sp>
-    </p:spTree>
-  </p:cSld>
-  <p:clrMapOvr>
-    <a:masterClrMapping/>
-  </p:clrMapOvr>
-</p:sld>
-</file>
-
-<file path=ppt/slides/slide9.xml><?xml version="1.0" encoding="utf-8"?>
-<p:sld xmlns:a="http://schemas.openxmlformats.org/drawingml/2006/main" xmlns:p="http://schemas.openxmlformats.org/presentationml/2006/main" xmlns:r="http://schemas.openxmlformats.org/officeDocument/2006/relationships">
-  <p:cSld>
-    <p:spTree>
-      <p:nvGrpSpPr>
-        <p:cNvPr id="1" name=""/>
-        <p:cNvGrpSpPr/>
-        <p:nvPr/>
-      </p:nvGrpSpPr>
-      <p:grpSpPr/>
-      <p:sp>
-        <p:nvSpPr>
-          <p:cNvPr id="2" name="Rectangle 1"/>
-          <p:cNvSpPr/>
-          <p:nvPr/>
-        </p:nvSpPr>
-        <p:spPr>
-          <a:xfrm>
-            <a:off x="0" y="0"/>
-            <a:ext cx="12191695" cy="6858000"/>
-          </a:xfrm>
-          <a:prstGeom prst="rect">
-            <a:avLst/>
-          </a:prstGeom>
-          <a:solidFill>
-            <a:srgbClr val="FFFFFF"/>
-          </a:solidFill>
-          <a:ln>
-            <a:noFill/>
-          </a:ln>
-          <a:effectLst/>
-        </p:spPr>
-        <p:style>
-          <a:lnRef idx="1">
-            <a:schemeClr val="accent1"/>
-          </a:lnRef>
-          <a:fillRef idx="3">
-            <a:schemeClr val="accent1"/>
-          </a:fillRef>
-          <a:effectRef idx="2">
-            <a:schemeClr val="accent1"/>
-          </a:effectRef>
-          <a:fontRef idx="minor">
-            <a:schemeClr val="lt1"/>
-          </a:fontRef>
-        </p:style>
-        <p:txBody>
-          <a:bodyPr rtlCol="0" anchor="ctr"/>
-          <a:lstStyle/>
-          <a:p>
-            <a:pPr algn="ctr"/>
-          </a:p>
-        </p:txBody>
-      </p:sp>
-      <p:sp>
-        <p:nvSpPr>
-          <p:cNvPr id="3" name="Rectangle 2"/>
-          <p:cNvSpPr/>
-          <p:nvPr/>
-        </p:nvSpPr>
-        <p:spPr>
-          <a:xfrm>
-            <a:off x="502920" y="310896"/>
-            <a:ext cx="109728" cy="457200"/>
-          </a:xfrm>
-          <a:prstGeom prst="rect">
-            <a:avLst/>
-          </a:prstGeom>
-          <a:solidFill>
-            <a:srgbClr val="2C898A"/>
-          </a:solidFill>
-          <a:ln>
-            <a:noFill/>
-          </a:ln>
-          <a:effectLst/>
-        </p:spPr>
-        <p:style>
-          <a:lnRef idx="1">
-            <a:schemeClr val="accent1"/>
-          </a:lnRef>
-          <a:fillRef idx="3">
-            <a:schemeClr val="accent1"/>
-          </a:fillRef>
-          <a:effectRef idx="2">
-            <a:schemeClr val="accent1"/>
-          </a:effectRef>
-          <a:fontRef idx="minor">
-            <a:schemeClr val="lt1"/>
-          </a:fontRef>
-        </p:style>
-        <p:txBody>
-          <a:bodyPr rtlCol="0" anchor="ctr"/>
-          <a:lstStyle/>
-          <a:p>
-            <a:pPr algn="ctr"/>
-          </a:p>
-        </p:txBody>
-      </p:sp>
-      <p:sp>
-        <p:nvSpPr>
-          <p:cNvPr id="4" name="TextBox 3"/>
-          <p:cNvSpPr txBox="1"/>
-          <p:nvPr/>
-        </p:nvSpPr>
-        <p:spPr>
-          <a:xfrm>
-            <a:off x="731520" y="237744"/>
-            <a:ext cx="9509760" cy="685800"/>
-          </a:xfrm>
-          <a:prstGeom prst="rect">
-            <a:avLst/>
-          </a:prstGeom>
-          <a:noFill/>
-        </p:spPr>
-        <p:txBody>
-          <a:bodyPr wrap="square" anchor="ctr" lIns="0" rIns="0" tIns="0" bIns="0">
-            <a:spAutoFit/>
-          </a:bodyPr>
-          <a:lstStyle/>
-          <a:p>
-            <a:pPr algn="l">
-              <a:lnSpc>
-                <a:spcPct val="108000"/>
-              </a:lnSpc>
-              <a:spcAft>
-                <a:spcPts val="400"/>
-              </a:spcAft>
-            </a:pPr>
-            <a:r>
-              <a:rPr sz="2400" b="1" i="0">
-                <a:solidFill>
-                  <a:srgbClr val="1B355E"/>
-                </a:solidFill>
-                <a:latin typeface="NanumGothic"/>
-                <a:ea typeface="NanumGothic"/>
-              </a:rPr>
-              <a:t>생식대퇴신경통 — 가장 흔한 걱정, 대부분 회피 가능</a:t>
-            </a:r>
-          </a:p>
-        </p:txBody>
-      </p:sp>
-      <p:sp>
-        <p:nvSpPr>
-          <p:cNvPr id="5" name="TextBox 4"/>
-          <p:cNvSpPr txBox="1"/>
-          <p:nvPr/>
-        </p:nvSpPr>
-        <p:spPr>
-          <a:xfrm>
-            <a:off x="749808" y="109728"/>
-            <a:ext cx="7315200" cy="219456"/>
-          </a:xfrm>
-          <a:prstGeom prst="rect">
-            <a:avLst/>
-          </a:prstGeom>
-          <a:noFill/>
-        </p:spPr>
-        <p:txBody>
-          <a:bodyPr wrap="square" anchor="t" lIns="0" rIns="0" tIns="0" bIns="0">
-            <a:spAutoFit/>
-          </a:bodyPr>
-          <a:lstStyle/>
-          <a:p>
-            <a:pPr algn="l">
-              <a:lnSpc>
-                <a:spcPct val="108000"/>
-              </a:lnSpc>
-              <a:spcAft>
-                <a:spcPts val="400"/>
-              </a:spcAft>
-            </a:pPr>
-            <a:r>
-              <a:rPr sz="1100" b="1" i="0">
-                <a:solidFill>
-                  <a:srgbClr val="1F6E70"/>
-                </a:solidFill>
-                <a:latin typeface="NanumGothic"/>
-                <a:ea typeface="NanumGothic"/>
-              </a:rPr>
-              <a:t>합병증 · 심화</a:t>
-            </a:r>
-          </a:p>
-        </p:txBody>
-      </p:sp>
-      <p:sp>
-        <p:nvSpPr>
-          <p:cNvPr id="6" name="Rectangle 5"/>
-          <p:cNvSpPr/>
-          <p:nvPr/>
-        </p:nvSpPr>
-        <p:spPr>
-          <a:xfrm>
-            <a:off x="731520" y="969264"/>
-            <a:ext cx="10881360" cy="17780"/>
-          </a:xfrm>
-          <a:prstGeom prst="rect">
-            <a:avLst/>
-          </a:prstGeom>
-          <a:solidFill>
-            <a:srgbClr val="D5DEE7"/>
-          </a:solidFill>
-          <a:ln>
-            <a:noFill/>
-          </a:ln>
-          <a:effectLst/>
-        </p:spPr>
-        <p:style>
-          <a:lnRef idx="1">
-            <a:schemeClr val="accent1"/>
-          </a:lnRef>
-          <a:fillRef idx="3">
-            <a:schemeClr val="accent1"/>
-          </a:fillRef>
-          <a:effectRef idx="2">
-            <a:schemeClr val="accent1"/>
-          </a:effectRef>
-          <a:fontRef idx="minor">
-            <a:schemeClr val="lt1"/>
-          </a:fontRef>
-        </p:style>
-        <p:txBody>
-          <a:bodyPr rtlCol="0" anchor="ctr"/>
-          <a:lstStyle/>
-          <a:p>
-            <a:pPr algn="ctr"/>
-          </a:p>
-        </p:txBody>
-      </p:sp>
-      <p:sp>
-        <p:nvSpPr>
-          <p:cNvPr id="7" name="Rounded Rectangle 6"/>
-          <p:cNvSpPr/>
-          <p:nvPr/>
-        </p:nvSpPr>
-        <p:spPr>
-          <a:xfrm>
-            <a:off x="10865816" y="365760"/>
-            <a:ext cx="822959" cy="347472"/>
-          </a:xfrm>
-          <a:prstGeom prst="roundRect">
-            <a:avLst>
-              <a:gd name="adj" fmla="val 8000"/>
-            </a:avLst>
-          </a:prstGeom>
-          <a:solidFill>
-            <a:srgbClr val="2C898A"/>
-          </a:solidFill>
-          <a:ln>
-            <a:noFill/>
-          </a:ln>
-          <a:effectLst/>
-        </p:spPr>
-        <p:style>
-          <a:lnRef idx="1">
-            <a:schemeClr val="accent1"/>
-          </a:lnRef>
-          <a:fillRef idx="3">
-            <a:schemeClr val="accent1"/>
-          </a:fillRef>
-          <a:effectRef idx="2">
-            <a:schemeClr val="accent1"/>
-          </a:effectRef>
-          <a:fontRef idx="minor">
-            <a:schemeClr val="lt1"/>
-          </a:fontRef>
-        </p:style>
-        <p:txBody>
-          <a:bodyPr rtlCol="0" anchor="ctr"/>
-          <a:lstStyle/>
-          <a:p>
-            <a:pPr algn="ctr"/>
-          </a:p>
-        </p:txBody>
-      </p:sp>
-      <p:sp>
-        <p:nvSpPr>
-          <p:cNvPr id="8" name="TextBox 7"/>
-          <p:cNvSpPr txBox="1"/>
-          <p:nvPr/>
-        </p:nvSpPr>
-        <p:spPr>
-          <a:xfrm>
-            <a:off x="10865816" y="365760"/>
-            <a:ext cx="822959" cy="347472"/>
-          </a:xfrm>
-          <a:prstGeom prst="rect">
-            <a:avLst/>
-          </a:prstGeom>
-          <a:noFill/>
-        </p:spPr>
-        <p:txBody>
-          <a:bodyPr wrap="square" anchor="ctr" lIns="0" rIns="0" tIns="0" bIns="0">
-            <a:spAutoFit/>
-          </a:bodyPr>
-          <a:lstStyle/>
-          <a:p>
-            <a:pPr algn="ctr">
-              <a:lnSpc>
-                <a:spcPct val="108000"/>
-              </a:lnSpc>
-              <a:spcAft>
-                <a:spcPts val="400"/>
-              </a:spcAft>
-            </a:pPr>
-            <a:r>
-              <a:rPr sz="1150" b="1" i="0">
-                <a:solidFill>
-                  <a:srgbClr val="FFFFFF"/>
-                </a:solidFill>
-                <a:latin typeface="NanumGothic"/>
-                <a:ea typeface="NanumGothic"/>
-              </a:rPr>
-              <a:t>최다 우려</a:t>
-            </a:r>
-          </a:p>
-        </p:txBody>
-      </p:sp>
-      <p:pic>
-        <p:nvPicPr>
-          <p:cNvPr id="9" name="Picture 8" descr="lsb_gf.png"/>
-          <p:cNvPicPr>
-            <a:picLocks noChangeAspect="1"/>
-          </p:cNvPicPr>
-          <p:nvPr/>
-        </p:nvPicPr>
-        <p:blipFill>
-          <a:blip r:embed="rId2"/>
-          <a:stretch>
-            <a:fillRect/>
-          </a:stretch>
-        </p:blipFill>
-        <p:spPr>
-          <a:xfrm>
-            <a:off x="2156145" y="1417320"/>
-            <a:ext cx="7879404" cy="4114800"/>
-          </a:xfrm>
-          <a:prstGeom prst="rect">
-            <a:avLst/>
-          </a:prstGeom>
-        </p:spPr>
-      </p:pic>
-      <p:sp>
-        <p:nvSpPr>
-          <p:cNvPr id="10" name="TextBox 9"/>
-          <p:cNvSpPr txBox="1"/>
-          <p:nvPr/>
-        </p:nvSpPr>
-        <p:spPr>
-          <a:xfrm>
-            <a:off x="640080" y="5852160"/>
-            <a:ext cx="10927080" cy="457200"/>
-          </a:xfrm>
-          <a:prstGeom prst="rect">
-            <a:avLst/>
-          </a:prstGeom>
-          <a:noFill/>
-        </p:spPr>
-        <p:txBody>
-          <a:bodyPr wrap="square" anchor="ctr" lIns="0" rIns="0" tIns="0" bIns="0">
-            <a:spAutoFit/>
-          </a:bodyPr>
-          <a:lstStyle/>
-          <a:p>
-            <a:pPr algn="ctr">
-              <a:lnSpc>
-                <a:spcPct val="108000"/>
-              </a:lnSpc>
-              <a:spcAft>
-                <a:spcPts val="400"/>
-              </a:spcAft>
-            </a:pPr>
-            <a:r>
-              <a:rPr sz="1100" b="1" i="0">
-                <a:solidFill>
-                  <a:srgbClr val="1F6E70"/>
-                </a:solidFill>
-                <a:latin typeface="NanumGothic"/>
-                <a:ea typeface="NanumGothic"/>
-              </a:rPr>
-              <a:t>회피: L2하~L3상 표적·L4 회피·psoas 주입금지·소량 / 발생 시: 대개 수 주 내 자연호전·신경병증통 약물로 대증</a:t>
-            </a:r>
-          </a:p>
-        </p:txBody>
-      </p:sp>
-      <p:sp>
-        <p:nvSpPr>
-          <p:cNvPr id="11" name="TextBox 10"/>
-          <p:cNvSpPr txBox="1"/>
-          <p:nvPr/>
-        </p:nvSpPr>
-        <p:spPr>
-          <a:xfrm>
-            <a:off x="731520" y="6455664"/>
-            <a:ext cx="9875520" cy="292608"/>
-          </a:xfrm>
-          <a:prstGeom prst="rect">
-            <a:avLst/>
-          </a:prstGeom>
-          <a:noFill/>
-        </p:spPr>
-        <p:txBody>
-          <a:bodyPr wrap="square" anchor="ctr" lIns="0" rIns="0" tIns="0" bIns="0">
-            <a:spAutoFit/>
-          </a:bodyPr>
-          <a:lstStyle/>
-          <a:p>
-            <a:pPr algn="l">
-              <a:lnSpc>
-                <a:spcPct val="108000"/>
-              </a:lnSpc>
-              <a:spcAft>
-                <a:spcPts val="400"/>
-              </a:spcAft>
-            </a:pPr>
-            <a:r>
-              <a:rPr sz="900" b="0" i="0">
-                <a:solidFill>
-                  <a:srgbClr val="5A6B7B"/>
-                </a:solidFill>
-                <a:latin typeface="NanumGothic"/>
-                <a:ea typeface="NanumGothic"/>
-              </a:rPr>
-              <a:t>근거: Feigl 1998(PMID 9425975); StatPearls NBK431107</a:t>
-            </a:r>
-          </a:p>
-        </p:txBody>
-      </p:sp>
-      <p:sp>
-        <p:nvSpPr>
-          <p:cNvPr id="12" name="TextBox 11"/>
-          <p:cNvSpPr txBox="1"/>
-          <p:nvPr/>
-        </p:nvSpPr>
-        <p:spPr>
-          <a:xfrm>
-            <a:off x="11064240" y="6455664"/>
-            <a:ext cx="822960" cy="292608"/>
-          </a:xfrm>
-          <a:prstGeom prst="rect">
-            <a:avLst/>
-          </a:prstGeom>
-          <a:noFill/>
-        </p:spPr>
-        <p:txBody>
-          <a:bodyPr wrap="square" anchor="ctr" lIns="0" rIns="0" tIns="0" bIns="0">
-            <a:spAutoFit/>
-          </a:bodyPr>
-          <a:lstStyle/>
-          <a:p>
-            <a:pPr algn="r">
-              <a:lnSpc>
-                <a:spcPct val="108000"/>
-              </a:lnSpc>
-              <a:spcAft>
-                <a:spcPts val="400"/>
-              </a:spcAft>
-            </a:pPr>
-            <a:r>
-              <a:rPr sz="1000" b="1" i="0">
-                <a:solidFill>
-                  <a:srgbClr val="5A6B7B"/>
-                </a:solidFill>
-                <a:latin typeface="NanumGothic"/>
-                <a:ea typeface="NanumGothic"/>
-              </a:rPr>
               <a:t>9</a:t>
             </a:r>
           </a:p>

--- a/문헌고찰_NLC_RLS_LSB/03_LSB/LSB_발표.pptx
+++ b/문헌고찰_NLC_RLS_LSB/03_LSB/LSB_발표.pptx
@@ -6,23 +6,24 @@
   </p:sldMasterIdLst>
   <p:sldIdLst>
     <p:sldId id="256" r:id="rId7"/>
+    <p:sldId id="278" r:id="rId29"/>
     <p:sldId id="257" r:id="rId8"/>
     <p:sldId id="258" r:id="rId9"/>
-    <p:sldId id="259" r:id="rId10"/>
-    <p:sldId id="260" r:id="rId11"/>
     <p:sldId id="261" r:id="rId12"/>
-    <p:sldId id="262" r:id="rId13"/>
-    <p:sldId id="263" r:id="rId14"/>
-    <p:sldId id="264" r:id="rId15"/>
-    <p:sldId id="265" r:id="rId16"/>
-    <p:sldId id="266" r:id="rId17"/>
-    <p:sldId id="267" r:id="rId18"/>
     <p:sldId id="268" r:id="rId19"/>
     <p:sldId id="269" r:id="rId20"/>
     <p:sldId id="270" r:id="rId21"/>
     <p:sldId id="271" r:id="rId22"/>
     <p:sldId id="272" r:id="rId23"/>
     <p:sldId id="273" r:id="rId24"/>
+    <p:sldId id="259" r:id="rId10"/>
+    <p:sldId id="260" r:id="rId11"/>
+    <p:sldId id="263" r:id="rId14"/>
+    <p:sldId id="262" r:id="rId13"/>
+    <p:sldId id="264" r:id="rId15"/>
+    <p:sldId id="265" r:id="rId16"/>
+    <p:sldId id="266" r:id="rId17"/>
+    <p:sldId id="267" r:id="rId18"/>
     <p:sldId id="274" r:id="rId25"/>
     <p:sldId id="275" r:id="rId26"/>
     <p:sldId id="276" r:id="rId27"/>
@@ -12466,6 +12467,848 @@
 </p:sld>
 </file>
 
+<file path=ppt/slides/slide23.xml><?xml version="1.0" encoding="utf-8"?>
+<p:sld xmlns:a="http://schemas.openxmlformats.org/drawingml/2006/main" xmlns:p="http://schemas.openxmlformats.org/presentationml/2006/main" xmlns:r="http://schemas.openxmlformats.org/officeDocument/2006/relationships">
+  <p:cSld>
+    <p:spTree>
+      <p:nvGrpSpPr>
+        <p:cNvPr id="1" name=""/>
+        <p:cNvGrpSpPr/>
+        <p:nvPr/>
+      </p:nvGrpSpPr>
+      <p:grpSpPr/>
+      <p:sp>
+        <p:nvSpPr>
+          <p:cNvPr id="2" name="Rectangle 1"/>
+          <p:cNvSpPr/>
+          <p:nvPr/>
+        </p:nvSpPr>
+        <p:spPr>
+          <a:xfrm>
+            <a:off x="0" y="0"/>
+            <a:ext cx="12191695" cy="6858000"/>
+          </a:xfrm>
+          <a:prstGeom prst="rect">
+            <a:avLst/>
+          </a:prstGeom>
+          <a:solidFill>
+            <a:srgbClr val="1B355E"/>
+          </a:solidFill>
+          <a:ln>
+            <a:noFill/>
+          </a:ln>
+          <a:effectLst/>
+        </p:spPr>
+        <p:style>
+          <a:lnRef idx="1">
+            <a:schemeClr val="accent1"/>
+          </a:lnRef>
+          <a:fillRef idx="3">
+            <a:schemeClr val="accent1"/>
+          </a:fillRef>
+          <a:effectRef idx="2">
+            <a:schemeClr val="accent1"/>
+          </a:effectRef>
+          <a:fontRef idx="minor">
+            <a:schemeClr val="lt1"/>
+          </a:fontRef>
+        </p:style>
+        <p:txBody>
+          <a:bodyPr rtlCol="0" anchor="ctr"/>
+          <a:lstStyle/>
+          <a:p>
+            <a:pPr algn="ctr"/>
+          </a:p>
+        </p:txBody>
+      </p:sp>
+      <p:sp>
+        <p:nvSpPr>
+          <p:cNvPr id="3" name="Rectangle 2"/>
+          <p:cNvSpPr/>
+          <p:nvPr/>
+        </p:nvSpPr>
+        <p:spPr>
+          <a:xfrm>
+            <a:off x="0" y="0"/>
+            <a:ext cx="201168" cy="6858000"/>
+          </a:xfrm>
+          <a:prstGeom prst="rect">
+            <a:avLst/>
+          </a:prstGeom>
+          <a:solidFill>
+            <a:srgbClr val="2C898A"/>
+          </a:solidFill>
+          <a:ln>
+            <a:noFill/>
+          </a:ln>
+          <a:effectLst/>
+        </p:spPr>
+        <p:style>
+          <a:lnRef idx="1">
+            <a:schemeClr val="accent1"/>
+          </a:lnRef>
+          <a:fillRef idx="3">
+            <a:schemeClr val="accent1"/>
+          </a:fillRef>
+          <a:effectRef idx="2">
+            <a:schemeClr val="accent1"/>
+          </a:effectRef>
+          <a:fontRef idx="minor">
+            <a:schemeClr val="lt1"/>
+          </a:fontRef>
+        </p:style>
+        <p:txBody>
+          <a:bodyPr rtlCol="0" anchor="ctr"/>
+          <a:lstStyle/>
+          <a:p>
+            <a:pPr algn="ctr"/>
+          </a:p>
+        </p:txBody>
+      </p:sp>
+      <p:sp>
+        <p:nvSpPr>
+          <p:cNvPr id="4" name="TextBox 3"/>
+          <p:cNvSpPr txBox="1"/>
+          <p:nvPr/>
+        </p:nvSpPr>
+        <p:spPr>
+          <a:xfrm>
+            <a:off x="822960" y="640080"/>
+            <a:ext cx="10515600" cy="457200"/>
+          </a:xfrm>
+          <a:prstGeom prst="rect">
+            <a:avLst/>
+          </a:prstGeom>
+          <a:noFill/>
+        </p:spPr>
+        <p:txBody>
+          <a:bodyPr wrap="square" anchor="t" lIns="0" rIns="0" tIns="0" bIns="0">
+            <a:spAutoFit/>
+          </a:bodyPr>
+          <a:lstStyle/>
+          <a:p>
+            <a:pPr algn="l">
+              <a:lnSpc>
+                <a:spcPct val="108000"/>
+              </a:lnSpc>
+              <a:spcAft>
+                <a:spcPts val="400"/>
+              </a:spcAft>
+            </a:pPr>
+            <a:r>
+              <a:rPr sz="1300" b="1" i="0">
+                <a:solidFill>
+                  <a:srgbClr val="9FE0D8"/>
+                </a:solidFill>
+                <a:latin typeface="NanumGothic"/>
+                <a:ea typeface="NanumGothic"/>
+              </a:rPr>
+              <a:t>전체 흐름 · Roadmap</a:t>
+            </a:r>
+          </a:p>
+        </p:txBody>
+      </p:sp>
+      <p:sp>
+        <p:nvSpPr>
+          <p:cNvPr id="5" name="TextBox 4"/>
+          <p:cNvSpPr txBox="1"/>
+          <p:nvPr/>
+        </p:nvSpPr>
+        <p:spPr>
+          <a:xfrm>
+            <a:off x="822960" y="1097280"/>
+            <a:ext cx="10515600" cy="914400"/>
+          </a:xfrm>
+          <a:prstGeom prst="rect">
+            <a:avLst/>
+          </a:prstGeom>
+          <a:noFill/>
+        </p:spPr>
+        <p:txBody>
+          <a:bodyPr wrap="square" anchor="t" lIns="0" rIns="0" tIns="0" bIns="0">
+            <a:spAutoFit/>
+          </a:bodyPr>
+          <a:lstStyle/>
+          <a:p>
+            <a:pPr algn="l">
+              <a:lnSpc>
+                <a:spcPct val="110000"/>
+              </a:lnSpc>
+              <a:spcAft>
+                <a:spcPts val="400"/>
+              </a:spcAft>
+            </a:pPr>
+            <a:r>
+              <a:rPr sz="2200" b="1" i="0">
+                <a:solidFill>
+                  <a:srgbClr val="FFFFFF"/>
+                </a:solidFill>
+                <a:latin typeface="NanumGothic"/>
+                <a:ea typeface="NanumGothic"/>
+              </a:rPr>
+              <a:t>누구에게 → 어디를 → 왜 → 어떻게 → 안전하게</a:t>
+            </a:r>
+          </a:p>
+        </p:txBody>
+      </p:sp>
+      <p:sp>
+        <p:nvSpPr>
+          <p:cNvPr id="6" name="Rectangle 5"/>
+          <p:cNvSpPr/>
+          <p:nvPr/>
+        </p:nvSpPr>
+        <p:spPr>
+          <a:xfrm>
+            <a:off x="822960" y="2322576"/>
+            <a:ext cx="146304" cy="445385"/>
+          </a:xfrm>
+          <a:prstGeom prst="rect">
+            <a:avLst/>
+          </a:prstGeom>
+          <a:solidFill>
+            <a:srgbClr val="2C898A"/>
+          </a:solidFill>
+          <a:ln>
+            <a:noFill/>
+          </a:ln>
+          <a:effectLst/>
+        </p:spPr>
+        <p:style>
+          <a:lnRef idx="1">
+            <a:schemeClr val="accent1"/>
+          </a:lnRef>
+          <a:fillRef idx="3">
+            <a:schemeClr val="accent1"/>
+          </a:fillRef>
+          <a:effectRef idx="2">
+            <a:schemeClr val="accent1"/>
+          </a:effectRef>
+          <a:fontRef idx="minor">
+            <a:schemeClr val="lt1"/>
+          </a:fontRef>
+        </p:style>
+        <p:txBody>
+          <a:bodyPr rtlCol="0" anchor="ctr"/>
+          <a:lstStyle/>
+          <a:p>
+            <a:pPr algn="ctr"/>
+          </a:p>
+        </p:txBody>
+      </p:sp>
+      <p:sp>
+        <p:nvSpPr>
+          <p:cNvPr id="7" name="TextBox 6"/>
+          <p:cNvSpPr txBox="1"/>
+          <p:nvPr/>
+        </p:nvSpPr>
+        <p:spPr>
+          <a:xfrm>
+            <a:off x="1143000" y="2286000"/>
+            <a:ext cx="2926080" cy="674827"/>
+          </a:xfrm>
+          <a:prstGeom prst="rect">
+            <a:avLst/>
+          </a:prstGeom>
+          <a:noFill/>
+        </p:spPr>
+        <p:txBody>
+          <a:bodyPr wrap="square" anchor="ctr" lIns="0" rIns="0" tIns="0" bIns="0">
+            <a:spAutoFit/>
+          </a:bodyPr>
+          <a:lstStyle/>
+          <a:p>
+            <a:pPr algn="l">
+              <a:lnSpc>
+                <a:spcPct val="108000"/>
+              </a:lnSpc>
+              <a:spcAft>
+                <a:spcPts val="400"/>
+              </a:spcAft>
+            </a:pPr>
+            <a:r>
+              <a:rPr sz="1400" b="1" i="0">
+                <a:solidFill>
+                  <a:srgbClr val="9FE0D8"/>
+                </a:solidFill>
+                <a:latin typeface="NanumGothic"/>
+                <a:ea typeface="NanumGothic"/>
+              </a:rPr>
+              <a:t>① 감별</a:t>
+            </a:r>
+          </a:p>
+        </p:txBody>
+      </p:sp>
+      <p:sp>
+        <p:nvSpPr>
+          <p:cNvPr id="8" name="TextBox 7"/>
+          <p:cNvSpPr txBox="1"/>
+          <p:nvPr/>
+        </p:nvSpPr>
+        <p:spPr>
+          <a:xfrm>
+            <a:off x="4114800" y="2286000"/>
+            <a:ext cx="7406640" cy="674827"/>
+          </a:xfrm>
+          <a:prstGeom prst="rect">
+            <a:avLst/>
+          </a:prstGeom>
+          <a:noFill/>
+        </p:spPr>
+        <p:txBody>
+          <a:bodyPr wrap="square" anchor="ctr" lIns="0" rIns="0" tIns="0" bIns="0">
+            <a:spAutoFit/>
+          </a:bodyPr>
+          <a:lstStyle/>
+          <a:p>
+            <a:pPr algn="l">
+              <a:lnSpc>
+                <a:spcPct val="105000"/>
+              </a:lnSpc>
+              <a:spcAft>
+                <a:spcPts val="400"/>
+              </a:spcAft>
+            </a:pPr>
+            <a:r>
+              <a:rPr sz="1250" b="0" i="0">
+                <a:solidFill>
+                  <a:srgbClr val="FFFFFF"/>
+                </a:solidFill>
+                <a:latin typeface="NanumGothic"/>
+                <a:ea typeface="NanumGothic"/>
+              </a:rPr>
+              <a:t>밤·하지 증상 중 LSB가 듣는 것과 아닌 것을 먼저 가른다</a:t>
+            </a:r>
+          </a:p>
+        </p:txBody>
+      </p:sp>
+      <p:sp>
+        <p:nvSpPr>
+          <p:cNvPr id="9" name="Rectangle 8"/>
+          <p:cNvSpPr/>
+          <p:nvPr/>
+        </p:nvSpPr>
+        <p:spPr>
+          <a:xfrm>
+            <a:off x="822960" y="3072384"/>
+            <a:ext cx="146304" cy="445385"/>
+          </a:xfrm>
+          <a:prstGeom prst="rect">
+            <a:avLst/>
+          </a:prstGeom>
+          <a:solidFill>
+            <a:srgbClr val="2C898A"/>
+          </a:solidFill>
+          <a:ln>
+            <a:noFill/>
+          </a:ln>
+          <a:effectLst/>
+        </p:spPr>
+        <p:style>
+          <a:lnRef idx="1">
+            <a:schemeClr val="accent1"/>
+          </a:lnRef>
+          <a:fillRef idx="3">
+            <a:schemeClr val="accent1"/>
+          </a:fillRef>
+          <a:effectRef idx="2">
+            <a:schemeClr val="accent1"/>
+          </a:effectRef>
+          <a:fontRef idx="minor">
+            <a:schemeClr val="lt1"/>
+          </a:fontRef>
+        </p:style>
+        <p:txBody>
+          <a:bodyPr rtlCol="0" anchor="ctr"/>
+          <a:lstStyle/>
+          <a:p>
+            <a:pPr algn="ctr"/>
+          </a:p>
+        </p:txBody>
+      </p:sp>
+      <p:sp>
+        <p:nvSpPr>
+          <p:cNvPr id="10" name="TextBox 9"/>
+          <p:cNvSpPr txBox="1"/>
+          <p:nvPr/>
+        </p:nvSpPr>
+        <p:spPr>
+          <a:xfrm>
+            <a:off x="1143000" y="3035808"/>
+            <a:ext cx="2926080" cy="674827"/>
+          </a:xfrm>
+          <a:prstGeom prst="rect">
+            <a:avLst/>
+          </a:prstGeom>
+          <a:noFill/>
+        </p:spPr>
+        <p:txBody>
+          <a:bodyPr wrap="square" anchor="ctr" lIns="0" rIns="0" tIns="0" bIns="0">
+            <a:spAutoFit/>
+          </a:bodyPr>
+          <a:lstStyle/>
+          <a:p>
+            <a:pPr algn="l">
+              <a:lnSpc>
+                <a:spcPct val="108000"/>
+              </a:lnSpc>
+              <a:spcAft>
+                <a:spcPts val="400"/>
+              </a:spcAft>
+            </a:pPr>
+            <a:r>
+              <a:rPr sz="1400" b="1" i="0">
+                <a:solidFill>
+                  <a:srgbClr val="9FE0D8"/>
+                </a:solidFill>
+                <a:latin typeface="NanumGothic"/>
+                <a:ea typeface="NanumGothic"/>
+              </a:rPr>
+              <a:t>② 해부</a:t>
+            </a:r>
+          </a:p>
+        </p:txBody>
+      </p:sp>
+      <p:sp>
+        <p:nvSpPr>
+          <p:cNvPr id="11" name="TextBox 10"/>
+          <p:cNvSpPr txBox="1"/>
+          <p:nvPr/>
+        </p:nvSpPr>
+        <p:spPr>
+          <a:xfrm>
+            <a:off x="4114800" y="3035808"/>
+            <a:ext cx="7406640" cy="674827"/>
+          </a:xfrm>
+          <a:prstGeom prst="rect">
+            <a:avLst/>
+          </a:prstGeom>
+          <a:noFill/>
+        </p:spPr>
+        <p:txBody>
+          <a:bodyPr wrap="square" anchor="ctr" lIns="0" rIns="0" tIns="0" bIns="0">
+            <a:spAutoFit/>
+          </a:bodyPr>
+          <a:lstStyle/>
+          <a:p>
+            <a:pPr algn="l">
+              <a:lnSpc>
+                <a:spcPct val="105000"/>
+              </a:lnSpc>
+              <a:spcAft>
+                <a:spcPts val="400"/>
+              </a:spcAft>
+            </a:pPr>
+            <a:r>
+              <a:rPr sz="1250" b="0" i="0">
+                <a:solidFill>
+                  <a:srgbClr val="FFFFFF"/>
+                </a:solidFill>
+                <a:latin typeface="NanumGothic"/>
+                <a:ea typeface="NanumGothic"/>
+              </a:rPr>
+              <a:t>교감신경간은 척추체 전외측 L2–L3 — 표적과 주변 위험 구조</a:t>
+            </a:r>
+          </a:p>
+        </p:txBody>
+      </p:sp>
+      <p:sp>
+        <p:nvSpPr>
+          <p:cNvPr id="12" name="Rectangle 11"/>
+          <p:cNvSpPr/>
+          <p:nvPr/>
+        </p:nvSpPr>
+        <p:spPr>
+          <a:xfrm>
+            <a:off x="822960" y="3822191"/>
+            <a:ext cx="146304" cy="445385"/>
+          </a:xfrm>
+          <a:prstGeom prst="rect">
+            <a:avLst/>
+          </a:prstGeom>
+          <a:solidFill>
+            <a:srgbClr val="2C898A"/>
+          </a:solidFill>
+          <a:ln>
+            <a:noFill/>
+          </a:ln>
+          <a:effectLst/>
+        </p:spPr>
+        <p:style>
+          <a:lnRef idx="1">
+            <a:schemeClr val="accent1"/>
+          </a:lnRef>
+          <a:fillRef idx="3">
+            <a:schemeClr val="accent1"/>
+          </a:fillRef>
+          <a:effectRef idx="2">
+            <a:schemeClr val="accent1"/>
+          </a:effectRef>
+          <a:fontRef idx="minor">
+            <a:schemeClr val="lt1"/>
+          </a:fontRef>
+        </p:style>
+        <p:txBody>
+          <a:bodyPr rtlCol="0" anchor="ctr"/>
+          <a:lstStyle/>
+          <a:p>
+            <a:pPr algn="ctr"/>
+          </a:p>
+        </p:txBody>
+      </p:sp>
+      <p:sp>
+        <p:nvSpPr>
+          <p:cNvPr id="13" name="TextBox 12"/>
+          <p:cNvSpPr txBox="1"/>
+          <p:nvPr/>
+        </p:nvSpPr>
+        <p:spPr>
+          <a:xfrm>
+            <a:off x="1143000" y="3785615"/>
+            <a:ext cx="2926080" cy="674827"/>
+          </a:xfrm>
+          <a:prstGeom prst="rect">
+            <a:avLst/>
+          </a:prstGeom>
+          <a:noFill/>
+        </p:spPr>
+        <p:txBody>
+          <a:bodyPr wrap="square" anchor="ctr" lIns="0" rIns="0" tIns="0" bIns="0">
+            <a:spAutoFit/>
+          </a:bodyPr>
+          <a:lstStyle/>
+          <a:p>
+            <a:pPr algn="l">
+              <a:lnSpc>
+                <a:spcPct val="108000"/>
+              </a:lnSpc>
+              <a:spcAft>
+                <a:spcPts val="400"/>
+              </a:spcAft>
+            </a:pPr>
+            <a:r>
+              <a:rPr sz="1400" b="1" i="0">
+                <a:solidFill>
+                  <a:srgbClr val="9FE0D8"/>
+                </a:solidFill>
+                <a:latin typeface="NanumGothic"/>
+                <a:ea typeface="NanumGothic"/>
+              </a:rPr>
+              <a:t>③ 적응증·증상</a:t>
+            </a:r>
+          </a:p>
+        </p:txBody>
+      </p:sp>
+      <p:sp>
+        <p:nvSpPr>
+          <p:cNvPr id="14" name="TextBox 13"/>
+          <p:cNvSpPr txBox="1"/>
+          <p:nvPr/>
+        </p:nvSpPr>
+        <p:spPr>
+          <a:xfrm>
+            <a:off x="4114800" y="3785615"/>
+            <a:ext cx="7406640" cy="674827"/>
+          </a:xfrm>
+          <a:prstGeom prst="rect">
+            <a:avLst/>
+          </a:prstGeom>
+          <a:noFill/>
+        </p:spPr>
+        <p:txBody>
+          <a:bodyPr wrap="square" anchor="ctr" lIns="0" rIns="0" tIns="0" bIns="0">
+            <a:spAutoFit/>
+          </a:bodyPr>
+          <a:lstStyle/>
+          <a:p>
+            <a:pPr algn="l">
+              <a:lnSpc>
+                <a:spcPct val="105000"/>
+              </a:lnSpc>
+              <a:spcAft>
+                <a:spcPts val="400"/>
+              </a:spcAft>
+            </a:pPr>
+            <a:r>
+              <a:rPr sz="1250" b="0" i="0">
+                <a:solidFill>
+                  <a:srgbClr val="FFFFFF"/>
+                </a:solidFill>
+                <a:latin typeface="NanumGothic"/>
+                <a:ea typeface="NanumGothic"/>
+              </a:rPr>
+              <a:t>CRPS·허혈·신경병증에서 환자가 실제로 하는 말</a:t>
+            </a:r>
+          </a:p>
+        </p:txBody>
+      </p:sp>
+      <p:sp>
+        <p:nvSpPr>
+          <p:cNvPr id="15" name="Rectangle 14"/>
+          <p:cNvSpPr/>
+          <p:nvPr/>
+        </p:nvSpPr>
+        <p:spPr>
+          <a:xfrm>
+            <a:off x="822960" y="4572000"/>
+            <a:ext cx="146304" cy="445385"/>
+          </a:xfrm>
+          <a:prstGeom prst="rect">
+            <a:avLst/>
+          </a:prstGeom>
+          <a:solidFill>
+            <a:srgbClr val="2C898A"/>
+          </a:solidFill>
+          <a:ln>
+            <a:noFill/>
+          </a:ln>
+          <a:effectLst/>
+        </p:spPr>
+        <p:style>
+          <a:lnRef idx="1">
+            <a:schemeClr val="accent1"/>
+          </a:lnRef>
+          <a:fillRef idx="3">
+            <a:schemeClr val="accent1"/>
+          </a:fillRef>
+          <a:effectRef idx="2">
+            <a:schemeClr val="accent1"/>
+          </a:effectRef>
+          <a:fontRef idx="minor">
+            <a:schemeClr val="lt1"/>
+          </a:fontRef>
+        </p:style>
+        <p:txBody>
+          <a:bodyPr rtlCol="0" anchor="ctr"/>
+          <a:lstStyle/>
+          <a:p>
+            <a:pPr algn="ctr"/>
+          </a:p>
+        </p:txBody>
+      </p:sp>
+      <p:sp>
+        <p:nvSpPr>
+          <p:cNvPr id="16" name="TextBox 15"/>
+          <p:cNvSpPr txBox="1"/>
+          <p:nvPr/>
+        </p:nvSpPr>
+        <p:spPr>
+          <a:xfrm>
+            <a:off x="1143000" y="4535424"/>
+            <a:ext cx="2926080" cy="674827"/>
+          </a:xfrm>
+          <a:prstGeom prst="rect">
+            <a:avLst/>
+          </a:prstGeom>
+          <a:noFill/>
+        </p:spPr>
+        <p:txBody>
+          <a:bodyPr wrap="square" anchor="ctr" lIns="0" rIns="0" tIns="0" bIns="0">
+            <a:spAutoFit/>
+          </a:bodyPr>
+          <a:lstStyle/>
+          <a:p>
+            <a:pPr algn="l">
+              <a:lnSpc>
+                <a:spcPct val="108000"/>
+              </a:lnSpc>
+              <a:spcAft>
+                <a:spcPts val="400"/>
+              </a:spcAft>
+            </a:pPr>
+            <a:r>
+              <a:rPr sz="1400" b="1" i="0">
+                <a:solidFill>
+                  <a:srgbClr val="9FE0D8"/>
+                </a:solidFill>
+                <a:latin typeface="NanumGothic"/>
+                <a:ea typeface="NanumGothic"/>
+              </a:rPr>
+              <a:t>④ 효과</a:t>
+            </a:r>
+          </a:p>
+        </p:txBody>
+      </p:sp>
+      <p:sp>
+        <p:nvSpPr>
+          <p:cNvPr id="17" name="TextBox 16"/>
+          <p:cNvSpPr txBox="1"/>
+          <p:nvPr/>
+        </p:nvSpPr>
+        <p:spPr>
+          <a:xfrm>
+            <a:off x="4114800" y="4535424"/>
+            <a:ext cx="7406640" cy="674827"/>
+          </a:xfrm>
+          <a:prstGeom prst="rect">
+            <a:avLst/>
+          </a:prstGeom>
+          <a:noFill/>
+        </p:spPr>
+        <p:txBody>
+          <a:bodyPr wrap="square" anchor="ctr" lIns="0" rIns="0" tIns="0" bIns="0">
+            <a:spAutoFit/>
+          </a:bodyPr>
+          <a:lstStyle/>
+          <a:p>
+            <a:pPr algn="l">
+              <a:lnSpc>
+                <a:spcPct val="105000"/>
+              </a:lnSpc>
+              <a:spcAft>
+                <a:spcPts val="400"/>
+              </a:spcAft>
+            </a:pPr>
+            <a:r>
+              <a:rPr sz="1250" b="0" i="0">
+                <a:solidFill>
+                  <a:srgbClr val="FFFFFF"/>
+                </a:solidFill>
+                <a:latin typeface="NanumGothic"/>
+                <a:ea typeface="NanumGothic"/>
+              </a:rPr>
+              <a:t>관류 실측·통증 감소·CRPS 완화 (근거수준과 함께)</a:t>
+            </a:r>
+          </a:p>
+        </p:txBody>
+      </p:sp>
+      <p:sp>
+        <p:nvSpPr>
+          <p:cNvPr id="18" name="Rectangle 17"/>
+          <p:cNvSpPr/>
+          <p:nvPr/>
+        </p:nvSpPr>
+        <p:spPr>
+          <a:xfrm>
+            <a:off x="822960" y="5321807"/>
+            <a:ext cx="146304" cy="445385"/>
+          </a:xfrm>
+          <a:prstGeom prst="rect">
+            <a:avLst/>
+          </a:prstGeom>
+          <a:solidFill>
+            <a:srgbClr val="2C898A"/>
+          </a:solidFill>
+          <a:ln>
+            <a:noFill/>
+          </a:ln>
+          <a:effectLst/>
+        </p:spPr>
+        <p:style>
+          <a:lnRef idx="1">
+            <a:schemeClr val="accent1"/>
+          </a:lnRef>
+          <a:fillRef idx="3">
+            <a:schemeClr val="accent1"/>
+          </a:fillRef>
+          <a:effectRef idx="2">
+            <a:schemeClr val="accent1"/>
+          </a:effectRef>
+          <a:fontRef idx="minor">
+            <a:schemeClr val="lt1"/>
+          </a:fontRef>
+        </p:style>
+        <p:txBody>
+          <a:bodyPr rtlCol="0" anchor="ctr"/>
+          <a:lstStyle/>
+          <a:p>
+            <a:pPr algn="ctr"/>
+          </a:p>
+        </p:txBody>
+      </p:sp>
+      <p:sp>
+        <p:nvSpPr>
+          <p:cNvPr id="19" name="TextBox 18"/>
+          <p:cNvSpPr txBox="1"/>
+          <p:nvPr/>
+        </p:nvSpPr>
+        <p:spPr>
+          <a:xfrm>
+            <a:off x="1143000" y="5285231"/>
+            <a:ext cx="2926080" cy="674827"/>
+          </a:xfrm>
+          <a:prstGeom prst="rect">
+            <a:avLst/>
+          </a:prstGeom>
+          <a:noFill/>
+        </p:spPr>
+        <p:txBody>
+          <a:bodyPr wrap="square" anchor="ctr" lIns="0" rIns="0" tIns="0" bIns="0">
+            <a:spAutoFit/>
+          </a:bodyPr>
+          <a:lstStyle/>
+          <a:p>
+            <a:pPr algn="l">
+              <a:lnSpc>
+                <a:spcPct val="108000"/>
+              </a:lnSpc>
+              <a:spcAft>
+                <a:spcPts val="400"/>
+              </a:spcAft>
+            </a:pPr>
+            <a:r>
+              <a:rPr sz="1400" b="1" i="0">
+                <a:solidFill>
+                  <a:srgbClr val="9FE0D8"/>
+                </a:solidFill>
+                <a:latin typeface="NanumGothic"/>
+                <a:ea typeface="NanumGothic"/>
+              </a:rPr>
+              <a:t>⑤ 술기·안전</a:t>
+            </a:r>
+          </a:p>
+        </p:txBody>
+      </p:sp>
+      <p:sp>
+        <p:nvSpPr>
+          <p:cNvPr id="20" name="TextBox 19"/>
+          <p:cNvSpPr txBox="1"/>
+          <p:nvPr/>
+        </p:nvSpPr>
+        <p:spPr>
+          <a:xfrm>
+            <a:off x="4114800" y="5285231"/>
+            <a:ext cx="7406640" cy="674827"/>
+          </a:xfrm>
+          <a:prstGeom prst="rect">
+            <a:avLst/>
+          </a:prstGeom>
+          <a:noFill/>
+        </p:spPr>
+        <p:txBody>
+          <a:bodyPr wrap="square" anchor="ctr" lIns="0" rIns="0" tIns="0" bIns="0">
+            <a:spAutoFit/>
+          </a:bodyPr>
+          <a:lstStyle/>
+          <a:p>
+            <a:pPr algn="l">
+              <a:lnSpc>
+                <a:spcPct val="105000"/>
+              </a:lnSpc>
+              <a:spcAft>
+                <a:spcPts val="400"/>
+              </a:spcAft>
+            </a:pPr>
+            <a:r>
+              <a:rPr sz="1250" b="0" i="0">
+                <a:solidFill>
+                  <a:srgbClr val="FFFFFF"/>
+                </a:solidFill>
+                <a:latin typeface="NanumGothic"/>
+                <a:ea typeface="NanumGothic"/>
+              </a:rPr>
+              <a:t>투시+조영제로 정확히 — 합병증은 대부분 회피·관리 가능</a:t>
+            </a:r>
+          </a:p>
+        </p:txBody>
+      </p:sp>
+    </p:spTree>
+  </p:cSld>
+  <p:clrMapOvr>
+    <a:masterClrMapping/>
+  </p:clrMapOvr>
+</p:sld>
+</file>
+
 <file path=ppt/slides/slide3.xml><?xml version="1.0" encoding="utf-8"?>
 <p:sld xmlns:a="http://schemas.openxmlformats.org/drawingml/2006/main" xmlns:p="http://schemas.openxmlformats.org/presentationml/2006/main" xmlns:r="http://schemas.openxmlformats.org/officeDocument/2006/relationships">
   <p:cSld>

--- a/문헌고찰_NLC_RLS_LSB/03_LSB/LSB_발표.pptx
+++ b/문헌고찰_NLC_RLS_LSB/03_LSB/LSB_발표.pptx
@@ -6,13 +6,14 @@
   </p:sldMasterIdLst>
   <p:sldIdLst>
     <p:sldId id="256" r:id="rId7"/>
-    <p:sldId id="278" r:id="rId29"/>
+    <p:sldId id="279" r:id="rId30"/>
     <p:sldId id="257" r:id="rId8"/>
     <p:sldId id="258" r:id="rId9"/>
     <p:sldId id="261" r:id="rId12"/>
     <p:sldId id="268" r:id="rId19"/>
     <p:sldId id="269" r:id="rId20"/>
     <p:sldId id="270" r:id="rId21"/>
+    <p:sldId id="278" r:id="rId29"/>
     <p:sldId id="271" r:id="rId22"/>
     <p:sldId id="272" r:id="rId23"/>
     <p:sldId id="273" r:id="rId24"/>
@@ -12485,6 +12486,961 @@
         </p:nvSpPr>
         <p:spPr>
           <a:xfrm>
+            <a:off x="502920" y="310896"/>
+            <a:ext cx="109728" cy="457200"/>
+          </a:xfrm>
+          <a:prstGeom prst="rect">
+            <a:avLst/>
+          </a:prstGeom>
+          <a:solidFill>
+            <a:srgbClr val="2C898A"/>
+          </a:solidFill>
+          <a:ln>
+            <a:noFill/>
+          </a:ln>
+          <a:effectLst/>
+        </p:spPr>
+        <p:style>
+          <a:lnRef idx="1">
+            <a:schemeClr val="accent1"/>
+          </a:lnRef>
+          <a:fillRef idx="3">
+            <a:schemeClr val="accent1"/>
+          </a:fillRef>
+          <a:effectRef idx="2">
+            <a:schemeClr val="accent1"/>
+          </a:effectRef>
+          <a:fontRef idx="minor">
+            <a:schemeClr val="lt1"/>
+          </a:fontRef>
+        </p:style>
+        <p:txBody>
+          <a:bodyPr rtlCol="0" anchor="ctr"/>
+          <a:lstStyle/>
+          <a:p>
+            <a:pPr algn="ctr"/>
+          </a:p>
+        </p:txBody>
+      </p:sp>
+      <p:sp>
+        <p:nvSpPr>
+          <p:cNvPr id="3" name="TextBox 2"/>
+          <p:cNvSpPr txBox="1"/>
+          <p:nvPr/>
+        </p:nvSpPr>
+        <p:spPr>
+          <a:xfrm>
+            <a:off x="731520" y="237744"/>
+            <a:ext cx="9509760" cy="685800"/>
+          </a:xfrm>
+          <a:prstGeom prst="rect">
+            <a:avLst/>
+          </a:prstGeom>
+          <a:noFill/>
+        </p:spPr>
+        <p:txBody>
+          <a:bodyPr wrap="square" anchor="ctr" lIns="0" rIns="0" tIns="0" bIns="0">
+            <a:spAutoFit/>
+          </a:bodyPr>
+          <a:lstStyle/>
+          <a:p>
+            <a:pPr algn="l">
+              <a:lnSpc>
+                <a:spcPct val="108000"/>
+              </a:lnSpc>
+              <a:spcAft>
+                <a:spcPts val="400"/>
+              </a:spcAft>
+            </a:pPr>
+            <a:r>
+              <a:rPr sz="2400" b="1" i="0">
+                <a:solidFill>
+                  <a:srgbClr val="1B355E"/>
+                </a:solidFill>
+                <a:latin typeface="NanumGothic"/>
+                <a:ea typeface="NanumGothic"/>
+              </a:rPr>
+              <a:t>신경병증은 당뇨병성만이 아니다 — 종류와 LSB 적용</a:t>
+            </a:r>
+          </a:p>
+        </p:txBody>
+      </p:sp>
+      <p:sp>
+        <p:nvSpPr>
+          <p:cNvPr id="4" name="TextBox 3"/>
+          <p:cNvSpPr txBox="1"/>
+          <p:nvPr/>
+        </p:nvSpPr>
+        <p:spPr>
+          <a:xfrm>
+            <a:off x="749808" y="109728"/>
+            <a:ext cx="7315200" cy="219456"/>
+          </a:xfrm>
+          <a:prstGeom prst="rect">
+            <a:avLst/>
+          </a:prstGeom>
+          <a:noFill/>
+        </p:spPr>
+        <p:txBody>
+          <a:bodyPr wrap="square" anchor="t" lIns="0" rIns="0" tIns="0" bIns="0">
+            <a:spAutoFit/>
+          </a:bodyPr>
+          <a:lstStyle/>
+          <a:p>
+            <a:pPr algn="l">
+              <a:lnSpc>
+                <a:spcPct val="108000"/>
+              </a:lnSpc>
+              <a:spcAft>
+                <a:spcPts val="400"/>
+              </a:spcAft>
+            </a:pPr>
+            <a:r>
+              <a:rPr sz="1100" b="1" i="0">
+                <a:solidFill>
+                  <a:srgbClr val="1F6E70"/>
+                </a:solidFill>
+                <a:latin typeface="NanumGothic"/>
+                <a:ea typeface="NanumGothic"/>
+              </a:rPr>
+              <a:t>적응증 · 심화</a:t>
+            </a:r>
+          </a:p>
+        </p:txBody>
+      </p:sp>
+      <p:sp>
+        <p:nvSpPr>
+          <p:cNvPr id="5" name="Rectangle 4"/>
+          <p:cNvSpPr/>
+          <p:nvPr/>
+        </p:nvSpPr>
+        <p:spPr>
+          <a:xfrm>
+            <a:off x="731520" y="969264"/>
+            <a:ext cx="10881360" cy="17780"/>
+          </a:xfrm>
+          <a:prstGeom prst="rect">
+            <a:avLst/>
+          </a:prstGeom>
+          <a:solidFill>
+            <a:srgbClr val="D5DEE7"/>
+          </a:solidFill>
+          <a:ln>
+            <a:noFill/>
+          </a:ln>
+          <a:effectLst/>
+        </p:spPr>
+        <p:style>
+          <a:lnRef idx="1">
+            <a:schemeClr val="accent1"/>
+          </a:lnRef>
+          <a:fillRef idx="3">
+            <a:schemeClr val="accent1"/>
+          </a:fillRef>
+          <a:effectRef idx="2">
+            <a:schemeClr val="accent1"/>
+          </a:effectRef>
+          <a:fontRef idx="minor">
+            <a:schemeClr val="lt1"/>
+          </a:fontRef>
+        </p:style>
+        <p:txBody>
+          <a:bodyPr rtlCol="0" anchor="ctr"/>
+          <a:lstStyle/>
+          <a:p>
+            <a:pPr algn="ctr"/>
+          </a:p>
+        </p:txBody>
+      </p:sp>
+      <p:sp>
+        <p:nvSpPr>
+          <p:cNvPr id="6" name="Rounded Rectangle 5"/>
+          <p:cNvSpPr/>
+          <p:nvPr/>
+        </p:nvSpPr>
+        <p:spPr>
+          <a:xfrm>
+            <a:off x="10646360" y="365760"/>
+            <a:ext cx="1042415" cy="347472"/>
+          </a:xfrm>
+          <a:prstGeom prst="roundRect">
+            <a:avLst>
+              <a:gd name="adj" fmla="val 8000"/>
+            </a:avLst>
+          </a:prstGeom>
+          <a:solidFill>
+            <a:srgbClr val="2C898A"/>
+          </a:solidFill>
+          <a:ln>
+            <a:noFill/>
+          </a:ln>
+          <a:effectLst/>
+        </p:spPr>
+        <p:style>
+          <a:lnRef idx="1">
+            <a:schemeClr val="accent1"/>
+          </a:lnRef>
+          <a:fillRef idx="3">
+            <a:schemeClr val="accent1"/>
+          </a:fillRef>
+          <a:effectRef idx="2">
+            <a:schemeClr val="accent1"/>
+          </a:effectRef>
+          <a:fontRef idx="minor">
+            <a:schemeClr val="lt1"/>
+          </a:fontRef>
+        </p:style>
+        <p:txBody>
+          <a:bodyPr rtlCol="0" anchor="ctr"/>
+          <a:lstStyle/>
+          <a:p>
+            <a:pPr algn="ctr"/>
+          </a:p>
+        </p:txBody>
+      </p:sp>
+      <p:sp>
+        <p:nvSpPr>
+          <p:cNvPr id="7" name="TextBox 6"/>
+          <p:cNvSpPr txBox="1"/>
+          <p:nvPr/>
+        </p:nvSpPr>
+        <p:spPr>
+          <a:xfrm>
+            <a:off x="10646360" y="365760"/>
+            <a:ext cx="1042415" cy="347472"/>
+          </a:xfrm>
+          <a:prstGeom prst="rect">
+            <a:avLst/>
+          </a:prstGeom>
+          <a:noFill/>
+        </p:spPr>
+        <p:txBody>
+          <a:bodyPr wrap="square" anchor="ctr" lIns="0" rIns="0" tIns="0" bIns="0">
+            <a:spAutoFit/>
+          </a:bodyPr>
+          <a:lstStyle/>
+          <a:p>
+            <a:pPr algn="ctr">
+              <a:lnSpc>
+                <a:spcPct val="108000"/>
+              </a:lnSpc>
+              <a:spcAft>
+                <a:spcPts val="400"/>
+              </a:spcAft>
+            </a:pPr>
+            <a:r>
+              <a:rPr sz="1150" b="1" i="0">
+                <a:solidFill>
+                  <a:srgbClr val="FFFFFF"/>
+                </a:solidFill>
+                <a:latin typeface="NanumGothic"/>
+                <a:ea typeface="NanumGothic"/>
+              </a:rPr>
+              <a:t>신경병증 분류</a:t>
+            </a:r>
+          </a:p>
+        </p:txBody>
+      </p:sp>
+      <p:graphicFrame>
+        <p:nvGraphicFramePr>
+          <p:cNvPr id="8" name="Table 7"/>
+          <p:cNvGraphicFramePr>
+            <a:graphicFrameLocks noGrp="1"/>
+          </p:cNvGraphicFramePr>
+          <p:nvPr/>
+        </p:nvGraphicFramePr>
+        <p:xfrm>
+          <a:off x="731520" y="1371600"/>
+          <a:ext cx="10835640" cy="3749040"/>
+        </p:xfrm>
+        <a:graphic>
+          <a:graphicData uri="http://schemas.openxmlformats.org/drawingml/2006/table">
+            <a:tbl>
+              <a:tblPr>
+                <a:tableStyleId>{5C22544A-7EE6-4342-B048-85BDC9FD1C3A}</a:tableStyleId>
+              </a:tblPr>
+              <a:tblGrid>
+                <a:gridCol w="2286000"/>
+                <a:gridCol w="6035040"/>
+                <a:gridCol w="2514600"/>
+              </a:tblGrid>
+              <a:tr h="457200">
+                <a:tc>
+                  <a:txBody>
+                    <a:bodyPr wrap="square"/>
+                    <a:lstStyle/>
+                    <a:p>
+                      <a:pPr algn="l"/>
+                      <a:r>
+                        <a:rPr sz="1250" b="1" i="0">
+                          <a:solidFill>
+                            <a:srgbClr val="FFFFFF"/>
+                          </a:solidFill>
+                          <a:latin typeface="NanumGothic"/>
+                          <a:ea typeface="NanumGothic"/>
+                        </a:rPr>
+                        <a:t>분류</a:t>
+                      </a:r>
+                    </a:p>
+                  </a:txBody>
+                  <a:tcPr marL="73152" marR="54864" marT="18288" marB="18288" anchor="ctr">
+                    <a:solidFill>
+                      <a:srgbClr val="1B355E"/>
+                    </a:solidFill>
+                  </a:tcPr>
+                </a:tc>
+                <a:tc>
+                  <a:txBody>
+                    <a:bodyPr wrap="square"/>
+                    <a:lstStyle/>
+                    <a:p>
+                      <a:pPr algn="ctr"/>
+                      <a:r>
+                        <a:rPr sz="1250" b="1" i="0">
+                          <a:solidFill>
+                            <a:srgbClr val="FFFFFF"/>
+                          </a:solidFill>
+                          <a:latin typeface="NanumGothic"/>
+                          <a:ea typeface="NanumGothic"/>
+                        </a:rPr>
+                        <a:t>대표 질환</a:t>
+                      </a:r>
+                    </a:p>
+                  </a:txBody>
+                  <a:tcPr marL="73152" marR="54864" marT="18288" marB="18288" anchor="ctr">
+                    <a:solidFill>
+                      <a:srgbClr val="1B355E"/>
+                    </a:solidFill>
+                  </a:tcPr>
+                </a:tc>
+                <a:tc>
+                  <a:txBody>
+                    <a:bodyPr wrap="square"/>
+                    <a:lstStyle/>
+                    <a:p>
+                      <a:pPr algn="ctr"/>
+                      <a:r>
+                        <a:rPr sz="1250" b="1" i="0">
+                          <a:solidFill>
+                            <a:srgbClr val="FFFFFF"/>
+                          </a:solidFill>
+                          <a:latin typeface="NanumGothic"/>
+                          <a:ea typeface="NanumGothic"/>
+                        </a:rPr>
+                        <a:t>LSB 적용</a:t>
+                      </a:r>
+                    </a:p>
+                  </a:txBody>
+                  <a:tcPr marL="73152" marR="54864" marT="18288" marB="18288" anchor="ctr">
+                    <a:solidFill>
+                      <a:srgbClr val="1B355E"/>
+                    </a:solidFill>
+                  </a:tcPr>
+                </a:tc>
+              </a:tr>
+              <a:tr h="548640">
+                <a:tc>
+                  <a:txBody>
+                    <a:bodyPr wrap="square"/>
+                    <a:lstStyle/>
+                    <a:p>
+                      <a:pPr algn="l"/>
+                      <a:r>
+                        <a:rPr sz="1150" b="0" i="0">
+                          <a:solidFill>
+                            <a:srgbClr val="1A202C"/>
+                          </a:solidFill>
+                          <a:latin typeface="NanumGothic"/>
+                          <a:ea typeface="NanumGothic"/>
+                        </a:rPr>
+                        <a:t>대사성</a:t>
+                      </a:r>
+                    </a:p>
+                  </a:txBody>
+                  <a:tcPr marL="73152" marR="54864" marT="18288" marB="18288" anchor="ctr">
+                    <a:solidFill>
+                      <a:srgbClr val="FFFFFF"/>
+                    </a:solidFill>
+                  </a:tcPr>
+                </a:tc>
+                <a:tc>
+                  <a:txBody>
+                    <a:bodyPr wrap="square"/>
+                    <a:lstStyle/>
+                    <a:p>
+                      <a:pPr algn="ctr"/>
+                      <a:r>
+                        <a:rPr sz="1150" b="0" i="0">
+                          <a:solidFill>
+                            <a:srgbClr val="1A202C"/>
+                          </a:solidFill>
+                          <a:latin typeface="NanumGothic"/>
+                          <a:ea typeface="NanumGothic"/>
+                        </a:rPr>
+                        <a:t>당뇨병성 말초신경병증(DPN) · 알코올성 · 영양결핍(B12)</a:t>
+                      </a:r>
+                    </a:p>
+                  </a:txBody>
+                  <a:tcPr marL="73152" marR="54864" marT="18288" marB="18288" anchor="ctr">
+                    <a:solidFill>
+                      <a:srgbClr val="FFFFFF"/>
+                    </a:solidFill>
+                  </a:tcPr>
+                </a:tc>
+                <a:tc>
+                  <a:txBody>
+                    <a:bodyPr wrap="square"/>
+                    <a:lstStyle/>
+                    <a:p>
+                      <a:pPr algn="ctr"/>
+                      <a:r>
+                        <a:rPr sz="1150" b="0" i="0">
+                          <a:solidFill>
+                            <a:srgbClr val="1A202C"/>
+                          </a:solidFill>
+                          <a:latin typeface="NanumGothic"/>
+                          <a:ea typeface="NanumGothic"/>
+                        </a:rPr>
+                        <a:t>△ 난치성 RCT</a:t>
+                      </a:r>
+                    </a:p>
+                  </a:txBody>
+                  <a:tcPr marL="73152" marR="54864" marT="18288" marB="18288" anchor="ctr">
+                    <a:solidFill>
+                      <a:srgbClr val="FFFFFF"/>
+                    </a:solidFill>
+                  </a:tcPr>
+                </a:tc>
+              </a:tr>
+              <a:tr h="548640">
+                <a:tc>
+                  <a:txBody>
+                    <a:bodyPr wrap="square"/>
+                    <a:lstStyle/>
+                    <a:p>
+                      <a:pPr algn="l"/>
+                      <a:r>
+                        <a:rPr sz="1150" b="0" i="0">
+                          <a:solidFill>
+                            <a:srgbClr val="1A202C"/>
+                          </a:solidFill>
+                          <a:latin typeface="NanumGothic"/>
+                          <a:ea typeface="NanumGothic"/>
+                        </a:rPr>
+                        <a:t>감염후</a:t>
+                      </a:r>
+                    </a:p>
+                  </a:txBody>
+                  <a:tcPr marL="73152" marR="54864" marT="18288" marB="18288" anchor="ctr">
+                    <a:solidFill>
+                      <a:srgbClr val="EEF2F6"/>
+                    </a:solidFill>
+                  </a:tcPr>
+                </a:tc>
+                <a:tc>
+                  <a:txBody>
+                    <a:bodyPr wrap="square"/>
+                    <a:lstStyle/>
+                    <a:p>
+                      <a:pPr algn="ctr"/>
+                      <a:r>
+                        <a:rPr sz="1150" b="0" i="0">
+                          <a:solidFill>
+                            <a:srgbClr val="1A202C"/>
+                          </a:solidFill>
+                          <a:latin typeface="NanumGothic"/>
+                          <a:ea typeface="NanumGothic"/>
+                        </a:rPr>
+                        <a:t>대상포진후신경통(PHN) 하지 분절 · HIV 신경병증</a:t>
+                      </a:r>
+                    </a:p>
+                  </a:txBody>
+                  <a:tcPr marL="73152" marR="54864" marT="18288" marB="18288" anchor="ctr">
+                    <a:solidFill>
+                      <a:srgbClr val="EEF2F6"/>
+                    </a:solidFill>
+                  </a:tcPr>
+                </a:tc>
+                <a:tc>
+                  <a:txBody>
+                    <a:bodyPr wrap="square"/>
+                    <a:lstStyle/>
+                    <a:p>
+                      <a:pPr algn="ctr"/>
+                      <a:r>
+                        <a:rPr sz="1150" b="0" i="0">
+                          <a:solidFill>
+                            <a:srgbClr val="1A202C"/>
+                          </a:solidFill>
+                          <a:latin typeface="NanumGothic"/>
+                          <a:ea typeface="NanumGothic"/>
+                        </a:rPr>
+                        <a:t>△ 선택적</a:t>
+                      </a:r>
+                    </a:p>
+                  </a:txBody>
+                  <a:tcPr marL="73152" marR="54864" marT="18288" marB="18288" anchor="ctr">
+                    <a:solidFill>
+                      <a:srgbClr val="EEF2F6"/>
+                    </a:solidFill>
+                  </a:tcPr>
+                </a:tc>
+              </a:tr>
+              <a:tr h="548640">
+                <a:tc>
+                  <a:txBody>
+                    <a:bodyPr wrap="square"/>
+                    <a:lstStyle/>
+                    <a:p>
+                      <a:pPr algn="l"/>
+                      <a:r>
+                        <a:rPr sz="1150" b="0" i="0">
+                          <a:solidFill>
+                            <a:srgbClr val="1A202C"/>
+                          </a:solidFill>
+                          <a:latin typeface="NanumGothic"/>
+                          <a:ea typeface="NanumGothic"/>
+                        </a:rPr>
+                        <a:t>약제성</a:t>
+                      </a:r>
+                    </a:p>
+                  </a:txBody>
+                  <a:tcPr marL="73152" marR="54864" marT="18288" marB="18288" anchor="ctr">
+                    <a:solidFill>
+                      <a:srgbClr val="FFFFFF"/>
+                    </a:solidFill>
+                  </a:tcPr>
+                </a:tc>
+                <a:tc>
+                  <a:txBody>
+                    <a:bodyPr wrap="square"/>
+                    <a:lstStyle/>
+                    <a:p>
+                      <a:pPr algn="ctr"/>
+                      <a:r>
+                        <a:rPr sz="1150" b="0" i="0">
+                          <a:solidFill>
+                            <a:srgbClr val="1A202C"/>
+                          </a:solidFill>
+                          <a:latin typeface="NanumGothic"/>
+                          <a:ea typeface="NanumGothic"/>
+                        </a:rPr>
+                        <a:t>항암제 유발 말초신경병증(CIPN) — 옥살리플라틴·탁센</a:t>
+                      </a:r>
+                    </a:p>
+                  </a:txBody>
+                  <a:tcPr marL="73152" marR="54864" marT="18288" marB="18288" anchor="ctr">
+                    <a:solidFill>
+                      <a:srgbClr val="FFFFFF"/>
+                    </a:solidFill>
+                  </a:tcPr>
+                </a:tc>
+                <a:tc>
+                  <a:txBody>
+                    <a:bodyPr wrap="square"/>
+                    <a:lstStyle/>
+                    <a:p>
+                      <a:pPr algn="ctr"/>
+                      <a:r>
+                        <a:rPr sz="1150" b="0" i="0">
+                          <a:solidFill>
+                            <a:srgbClr val="1A202C"/>
+                          </a:solidFill>
+                          <a:latin typeface="NanumGothic"/>
+                          <a:ea typeface="NanumGothic"/>
+                        </a:rPr>
+                        <a:t>△ 보고 수준</a:t>
+                      </a:r>
+                    </a:p>
+                  </a:txBody>
+                  <a:tcPr marL="73152" marR="54864" marT="18288" marB="18288" anchor="ctr">
+                    <a:solidFill>
+                      <a:srgbClr val="FFFFFF"/>
+                    </a:solidFill>
+                  </a:tcPr>
+                </a:tc>
+              </a:tr>
+              <a:tr h="548640">
+                <a:tc>
+                  <a:txBody>
+                    <a:bodyPr wrap="square"/>
+                    <a:lstStyle/>
+                    <a:p>
+                      <a:pPr algn="l"/>
+                      <a:r>
+                        <a:rPr sz="1150" b="0" i="0">
+                          <a:solidFill>
+                            <a:srgbClr val="1A202C"/>
+                          </a:solidFill>
+                          <a:latin typeface="NanumGothic"/>
+                          <a:ea typeface="NanumGothic"/>
+                        </a:rPr>
+                        <a:t>외상·수술후</a:t>
+                      </a:r>
+                    </a:p>
+                  </a:txBody>
+                  <a:tcPr marL="73152" marR="54864" marT="18288" marB="18288" anchor="ctr">
+                    <a:solidFill>
+                      <a:srgbClr val="EEF2F6"/>
+                    </a:solidFill>
+                  </a:tcPr>
+                </a:tc>
+                <a:tc>
+                  <a:txBody>
+                    <a:bodyPr wrap="square"/>
+                    <a:lstStyle/>
+                    <a:p>
+                      <a:pPr algn="ctr"/>
+                      <a:r>
+                        <a:rPr sz="1150" b="0" i="0">
+                          <a:solidFill>
+                            <a:srgbClr val="1A202C"/>
+                          </a:solidFill>
+                          <a:latin typeface="NanumGothic"/>
+                          <a:ea typeface="NanumGothic"/>
+                        </a:rPr>
+                        <a:t>환상지통·단단통 · 신경손상 후 통증 · 수술후 신경병증</a:t>
+                      </a:r>
+                    </a:p>
+                  </a:txBody>
+                  <a:tcPr marL="73152" marR="54864" marT="18288" marB="18288" anchor="ctr">
+                    <a:solidFill>
+                      <a:srgbClr val="EEF2F6"/>
+                    </a:solidFill>
+                  </a:tcPr>
+                </a:tc>
+                <a:tc>
+                  <a:txBody>
+                    <a:bodyPr wrap="square"/>
+                    <a:lstStyle/>
+                    <a:p>
+                      <a:pPr algn="ctr"/>
+                      <a:r>
+                        <a:rPr sz="1150" b="0" i="0">
+                          <a:solidFill>
+                            <a:srgbClr val="1A202C"/>
+                          </a:solidFill>
+                          <a:latin typeface="NanumGothic"/>
+                          <a:ea typeface="NanumGothic"/>
+                        </a:rPr>
+                        <a:t>○ SMP 흔함</a:t>
+                      </a:r>
+                    </a:p>
+                  </a:txBody>
+                  <a:tcPr marL="73152" marR="54864" marT="18288" marB="18288" anchor="ctr">
+                    <a:solidFill>
+                      <a:srgbClr val="EEF2F6"/>
+                    </a:solidFill>
+                  </a:tcPr>
+                </a:tc>
+              </a:tr>
+              <a:tr h="548640">
+                <a:tc>
+                  <a:txBody>
+                    <a:bodyPr wrap="square"/>
+                    <a:lstStyle/>
+                    <a:p>
+                      <a:pPr algn="l"/>
+                      <a:r>
+                        <a:rPr sz="1150" b="0" i="0">
+                          <a:solidFill>
+                            <a:srgbClr val="1A202C"/>
+                          </a:solidFill>
+                          <a:latin typeface="NanumGothic"/>
+                          <a:ea typeface="NanumGothic"/>
+                        </a:rPr>
+                        <a:t>교감매개 대표</a:t>
+                      </a:r>
+                    </a:p>
+                  </a:txBody>
+                  <a:tcPr marL="73152" marR="54864" marT="18288" marB="18288" anchor="ctr">
+                    <a:solidFill>
+                      <a:srgbClr val="FFFFFF"/>
+                    </a:solidFill>
+                  </a:tcPr>
+                </a:tc>
+                <a:tc>
+                  <a:txBody>
+                    <a:bodyPr wrap="square"/>
+                    <a:lstStyle/>
+                    <a:p>
+                      <a:pPr algn="ctr"/>
+                      <a:r>
+                        <a:rPr sz="1150" b="0" i="0">
+                          <a:solidFill>
+                            <a:srgbClr val="1A202C"/>
+                          </a:solidFill>
+                          <a:latin typeface="NanumGothic"/>
+                          <a:ea typeface="NanumGothic"/>
+                        </a:rPr>
+                        <a:t>CRPS I / II (반사교감이영양증·작열통)</a:t>
+                      </a:r>
+                    </a:p>
+                  </a:txBody>
+                  <a:tcPr marL="73152" marR="54864" marT="18288" marB="18288" anchor="ctr">
+                    <a:solidFill>
+                      <a:srgbClr val="FFFFFF"/>
+                    </a:solidFill>
+                  </a:tcPr>
+                </a:tc>
+                <a:tc>
+                  <a:txBody>
+                    <a:bodyPr wrap="square"/>
+                    <a:lstStyle/>
+                    <a:p>
+                      <a:pPr algn="ctr"/>
+                      <a:r>
+                        <a:rPr sz="1150" b="0" i="0">
+                          <a:solidFill>
+                            <a:srgbClr val="1A202C"/>
+                          </a:solidFill>
+                          <a:latin typeface="NanumGothic"/>
+                          <a:ea typeface="NanumGothic"/>
+                        </a:rPr>
+                        <a:t>◎ 대표 적응</a:t>
+                      </a:r>
+                    </a:p>
+                  </a:txBody>
+                  <a:tcPr marL="73152" marR="54864" marT="18288" marB="18288" anchor="ctr">
+                    <a:solidFill>
+                      <a:srgbClr val="FFFFFF"/>
+                    </a:solidFill>
+                  </a:tcPr>
+                </a:tc>
+              </a:tr>
+              <a:tr h="548640">
+                <a:tc>
+                  <a:txBody>
+                    <a:bodyPr wrap="square"/>
+                    <a:lstStyle/>
+                    <a:p>
+                      <a:pPr algn="l"/>
+                      <a:r>
+                        <a:rPr sz="1150" b="0" i="0">
+                          <a:solidFill>
+                            <a:srgbClr val="1A202C"/>
+                          </a:solidFill>
+                          <a:latin typeface="NanumGothic"/>
+                          <a:ea typeface="NanumGothic"/>
+                        </a:rPr>
+                        <a:t>압박·유전성</a:t>
+                      </a:r>
+                    </a:p>
+                  </a:txBody>
+                  <a:tcPr marL="73152" marR="54864" marT="18288" marB="18288" anchor="ctr">
+                    <a:solidFill>
+                      <a:srgbClr val="EEF2F6"/>
+                    </a:solidFill>
+                  </a:tcPr>
+                </a:tc>
+                <a:tc>
+                  <a:txBody>
+                    <a:bodyPr wrap="square"/>
+                    <a:lstStyle/>
+                    <a:p>
+                      <a:pPr algn="ctr"/>
+                      <a:r>
+                        <a:rPr sz="1150" b="0" i="0">
+                          <a:solidFill>
+                            <a:srgbClr val="1A202C"/>
+                          </a:solidFill>
+                          <a:latin typeface="NanumGothic"/>
+                          <a:ea typeface="NanumGothic"/>
+                        </a:rPr>
+                        <a:t>요추신경근병증 · 포착신경병증 · 유전성(CMT)</a:t>
+                      </a:r>
+                    </a:p>
+                  </a:txBody>
+                  <a:tcPr marL="73152" marR="54864" marT="18288" marB="18288" anchor="ctr">
+                    <a:solidFill>
+                      <a:srgbClr val="EEF2F6"/>
+                    </a:solidFill>
+                  </a:tcPr>
+                </a:tc>
+                <a:tc>
+                  <a:txBody>
+                    <a:bodyPr wrap="square"/>
+                    <a:lstStyle/>
+                    <a:p>
+                      <a:pPr algn="ctr"/>
+                      <a:r>
+                        <a:rPr sz="1150" b="0" i="0">
+                          <a:solidFill>
+                            <a:srgbClr val="1A202C"/>
+                          </a:solidFill>
+                          <a:latin typeface="NanumGothic"/>
+                          <a:ea typeface="NanumGothic"/>
+                        </a:rPr>
+                        <a:t>✕ 원인치료 우선</a:t>
+                      </a:r>
+                    </a:p>
+                  </a:txBody>
+                  <a:tcPr marL="73152" marR="54864" marT="18288" marB="18288" anchor="ctr">
+                    <a:solidFill>
+                      <a:srgbClr val="EEF2F6"/>
+                    </a:solidFill>
+                  </a:tcPr>
+                </a:tc>
+              </a:tr>
+            </a:tbl>
+          </a:graphicData>
+        </a:graphic>
+      </p:graphicFrame>
+      <p:sp>
+        <p:nvSpPr>
+          <p:cNvPr id="9" name="TextBox 8"/>
+          <p:cNvSpPr txBox="1"/>
+          <p:nvPr/>
+        </p:nvSpPr>
+        <p:spPr>
+          <a:xfrm>
+            <a:off x="731520" y="5989320"/>
+            <a:ext cx="10789920" cy="365760"/>
+          </a:xfrm>
+          <a:prstGeom prst="rect">
+            <a:avLst/>
+          </a:prstGeom>
+          <a:noFill/>
+        </p:spPr>
+        <p:txBody>
+          <a:bodyPr wrap="square" anchor="t" lIns="0" rIns="0" tIns="0" bIns="0">
+            <a:spAutoFit/>
+          </a:bodyPr>
+          <a:lstStyle/>
+          <a:p>
+            <a:pPr algn="l">
+              <a:lnSpc>
+                <a:spcPct val="108000"/>
+              </a:lnSpc>
+              <a:spcAft>
+                <a:spcPts val="400"/>
+              </a:spcAft>
+            </a:pPr>
+            <a:r>
+              <a:rPr sz="1150" b="1" i="0">
+                <a:solidFill>
+                  <a:srgbClr val="1F6E70"/>
+                </a:solidFill>
+                <a:latin typeface="NanumGothic"/>
+                <a:ea typeface="NanumGothic"/>
+              </a:rPr>
+              <a:t>핵심: 병명보다 교감신경 매개 통증(SMP)인가가 관건 — 진단적 차단으로 확인 후 결정.</a:t>
+            </a:r>
+          </a:p>
+        </p:txBody>
+      </p:sp>
+      <p:sp>
+        <p:nvSpPr>
+          <p:cNvPr id="10" name="TextBox 9"/>
+          <p:cNvSpPr txBox="1"/>
+          <p:nvPr/>
+        </p:nvSpPr>
+        <p:spPr>
+          <a:xfrm>
+            <a:off x="731520" y="6455664"/>
+            <a:ext cx="9875520" cy="292608"/>
+          </a:xfrm>
+          <a:prstGeom prst="rect">
+            <a:avLst/>
+          </a:prstGeom>
+          <a:noFill/>
+        </p:spPr>
+        <p:txBody>
+          <a:bodyPr wrap="square" anchor="ctr" lIns="0" rIns="0" tIns="0" bIns="0">
+            <a:spAutoFit/>
+          </a:bodyPr>
+          <a:lstStyle/>
+          <a:p>
+            <a:pPr algn="l">
+              <a:lnSpc>
+                <a:spcPct val="108000"/>
+              </a:lnSpc>
+              <a:spcAft>
+                <a:spcPts val="400"/>
+              </a:spcAft>
+            </a:pPr>
+            <a:r>
+              <a:rPr sz="900" b="0" i="0">
+                <a:solidFill>
+                  <a:srgbClr val="5A6B7B"/>
+                </a:solidFill>
+                <a:latin typeface="NanumGothic"/>
+                <a:ea typeface="NanumGothic"/>
+              </a:rPr>
+              <a:t>근거: 교감신경 매개 통증(SMP) 요소가 클수록 LSB 반응이 좋다</a:t>
+            </a:r>
+          </a:p>
+        </p:txBody>
+      </p:sp>
+      <p:sp>
+        <p:nvSpPr>
+          <p:cNvPr id="11" name="TextBox 10"/>
+          <p:cNvSpPr txBox="1"/>
+          <p:nvPr/>
+        </p:nvSpPr>
+        <p:spPr>
+          <a:xfrm>
+            <a:off x="11064240" y="6455664"/>
+            <a:ext cx="822960" cy="292608"/>
+          </a:xfrm>
+          <a:prstGeom prst="rect">
+            <a:avLst/>
+          </a:prstGeom>
+          <a:noFill/>
+        </p:spPr>
+        <p:txBody>
+          <a:bodyPr wrap="square" anchor="ctr" lIns="0" rIns="0" tIns="0" bIns="0">
+            <a:spAutoFit/>
+          </a:bodyPr>
+          <a:lstStyle/>
+          <a:p>
+            <a:pPr algn="r">
+              <a:lnSpc>
+                <a:spcPct val="108000"/>
+              </a:lnSpc>
+              <a:spcAft>
+                <a:spcPts val="400"/>
+              </a:spcAft>
+            </a:pPr>
+            <a:r>
+              <a:rPr sz="1000" b="1" i="0">
+                <a:solidFill>
+                  <a:srgbClr val="5A6B7B"/>
+                </a:solidFill>
+                <a:latin typeface="NanumGothic"/>
+                <a:ea typeface="NanumGothic"/>
+              </a:rPr>
+              <a:t>23</a:t>
+            </a:r>
+          </a:p>
+        </p:txBody>
+      </p:sp>
+    </p:spTree>
+  </p:cSld>
+  <p:clrMapOvr>
+    <a:masterClrMapping/>
+  </p:clrMapOvr>
+</p:sld>
+</file>
+
+<file path=ppt/slides/slide24.xml><?xml version="1.0" encoding="utf-8"?>
+<p:sld xmlns:a="http://schemas.openxmlformats.org/drawingml/2006/main" xmlns:p="http://schemas.openxmlformats.org/presentationml/2006/main" xmlns:r="http://schemas.openxmlformats.org/officeDocument/2006/relationships">
+  <p:cSld>
+    <p:spTree>
+      <p:nvGrpSpPr>
+        <p:cNvPr id="1" name=""/>
+        <p:cNvGrpSpPr/>
+        <p:nvPr/>
+      </p:nvGrpSpPr>
+      <p:grpSpPr/>
+      <p:sp>
+        <p:nvSpPr>
+          <p:cNvPr id="2" name="Rectangle 1"/>
+          <p:cNvSpPr/>
+          <p:nvPr/>
+        </p:nvSpPr>
+        <p:spPr>
+          <a:xfrm>
             <a:off x="0" y="0"/>
             <a:ext cx="12191695" cy="6858000"/>
           </a:xfrm>

--- a/문헌고찰_NLC_RLS_LSB/03_LSB/LSB_발표.pptx
+++ b/문헌고찰_NLC_RLS_LSB/03_LSB/LSB_발표.pptx
@@ -3863,8 +3863,8 @@
         </p:blipFill>
         <p:spPr>
           <a:xfrm>
-            <a:off x="2156145" y="1417320"/>
-            <a:ext cx="7879404" cy="4114800"/>
+            <a:off x="2158240" y="1417320"/>
+            <a:ext cx="7875215" cy="4114800"/>
           </a:xfrm>
           <a:prstGeom prst="rect">
             <a:avLst/>
@@ -15170,7 +15170,7 @@
                 <a:latin typeface="NanumGothic"/>
                 <a:ea typeface="NanumGothic"/>
               </a:rPr>
-              <a:t>표준: 방척추(paravertebral) 접근 + 투시 (CT·초음파도 가능)</a:t>
+              <a:t>복와위 · 방척추(paravertebral) 접근 + 투시 (CT·초음파 가능)</a:t>
             </a:r>
           </a:p>
           <a:p>
@@ -15193,6 +15193,36 @@
               <a:t>●  </a:t>
             </a:r>
             <a:r>
+              <a:rPr sz="1350" b="1" i="0">
+                <a:solidFill>
+                  <a:srgbClr val="1A202C"/>
+                </a:solidFill>
+                <a:latin typeface="NanumGothic"/>
+                <a:ea typeface="NanumGothic"/>
+              </a:rPr>
+              <a:t>자입점: 정중선 ~7 cm 외측 · 내측 경사 30–45°</a:t>
+            </a:r>
+          </a:p>
+          <a:p>
+            <a:pPr algn="l">
+              <a:lnSpc>
+                <a:spcPct val="108000"/>
+              </a:lnSpc>
+              <a:spcAft>
+                <a:spcPts val="900"/>
+              </a:spcAft>
+            </a:pPr>
+            <a:r>
+              <a:rPr sz="944" b="1" i="0">
+                <a:solidFill>
+                  <a:srgbClr val="2C898A"/>
+                </a:solidFill>
+                <a:latin typeface="NanumGothic"/>
+                <a:ea typeface="NanumGothic"/>
+              </a:rPr>
+              <a:t>●  </a:t>
+            </a:r>
+            <a:r>
               <a:rPr sz="1350" b="0" i="0">
                 <a:solidFill>
                   <a:srgbClr val="1A202C"/>
@@ -15200,7 +15230,7 @@
                 <a:latin typeface="NanumGothic"/>
                 <a:ea typeface="NanumGothic"/>
               </a:rPr>
-              <a:t>바늘: 정중선 ~7 cm 외측 → 척추체 접촉 후 전내측 'walk'</a:t>
+              <a:t>바늘 22 G 15 cm → 척추체 외측면 접촉 → 전내측 'walk' → 전외측면</a:t>
             </a:r>
           </a:p>
           <a:p>
@@ -15223,14 +15253,14 @@
               <a:t>●  </a:t>
             </a:r>
             <a:r>
-              <a:rPr sz="1350" b="0" i="0">
+              <a:rPr sz="1350" b="1" i="0">
                 <a:solidFill>
                   <a:srgbClr val="1A202C"/>
                 </a:solidFill>
                 <a:latin typeface="NanumGothic"/>
                 <a:ea typeface="NanumGothic"/>
               </a:rPr>
-              <a:t>조영제로 두미측 종방향 확산 확인</a:t>
+              <a:t>조영제 두미측 종방향 확산 · 성공지표 온도 ≥2°C↑</a:t>
             </a:r>
           </a:p>
           <a:p>
@@ -15243,54 +15273,24 @@
               </a:spcAft>
             </a:pPr>
             <a:r>
-              <a:rPr sz="944" b="1" i="0">
-                <a:solidFill>
-                  <a:srgbClr val="2C898A"/>
-                </a:solidFill>
-                <a:latin typeface="NanumGothic"/>
-                <a:ea typeface="NanumGothic"/>
-              </a:rPr>
-              <a:t>●  </a:t>
-            </a:r>
-            <a:r>
               <a:rPr sz="1350" b="1" i="0">
                 <a:solidFill>
-                  <a:srgbClr val="1A202C"/>
-                </a:solidFill>
-                <a:latin typeface="NanumGothic"/>
-                <a:ea typeface="NanumGothic"/>
-              </a:rPr>
-              <a:t>성공 지표: 피부온도 ≥2°C 상승</a:t>
-            </a:r>
-          </a:p>
-          <a:p>
-            <a:pPr algn="l">
-              <a:lnSpc>
-                <a:spcPct val="108000"/>
-              </a:lnSpc>
-              <a:spcAft>
-                <a:spcPts val="900"/>
-              </a:spcAft>
-            </a:pPr>
+                  <a:srgbClr val="5A6B7B"/>
+                </a:solidFill>
+                <a:latin typeface="NanumGothic"/>
+                <a:ea typeface="NanumGothic"/>
+              </a:rPr>
+              <a:t/>
+            </a:r>
             <a:r>
               <a:rPr sz="1350" b="1" i="0">
                 <a:solidFill>
-                  <a:srgbClr val="5A6B7B"/>
-                </a:solidFill>
-                <a:latin typeface="NanumGothic"/>
-                <a:ea typeface="NanumGothic"/>
-              </a:rPr>
-              <a:t/>
-            </a:r>
-            <a:r>
-              <a:rPr sz="1350" b="1" i="0">
-                <a:solidFill>
                   <a:srgbClr val="1F6E70"/>
                 </a:solidFill>
                 <a:latin typeface="NanumGothic"/>
                 <a:ea typeface="NanumGothic"/>
               </a:rPr>
-              <a:t>약제: 국소마취제 / 신경파괴(무수알코올·phenol·RFA)는 진단차단 양성 시에만</a:t>
+              <a:t>약제: 국소마취제 / 신경파괴는 진단차단 양성 시에만</a:t>
             </a:r>
           </a:p>
         </p:txBody>
@@ -15359,8 +15359,8 @@
         </p:blipFill>
         <p:spPr>
           <a:xfrm>
-            <a:off x="7178040" y="1958147"/>
-            <a:ext cx="4251960" cy="3444625"/>
+            <a:off x="7178040" y="1957087"/>
+            <a:ext cx="4251960" cy="3446745"/>
           </a:xfrm>
           <a:prstGeom prst="rect">
             <a:avLst/>
@@ -16272,8 +16272,8 @@
         </p:blipFill>
         <p:spPr>
           <a:xfrm>
-            <a:off x="2323947" y="1417320"/>
-            <a:ext cx="7543800" cy="4023360"/>
+            <a:off x="2326892" y="1417320"/>
+            <a:ext cx="7537911" cy="4023360"/>
           </a:xfrm>
           <a:prstGeom prst="rect">
             <a:avLst/>
@@ -17320,8 +17320,8 @@
         </p:blipFill>
         <p:spPr>
           <a:xfrm>
-            <a:off x="2033578" y="1417320"/>
-            <a:ext cx="8124539" cy="3977639"/>
+            <a:off x="2037032" y="1417320"/>
+            <a:ext cx="8117631" cy="3977639"/>
           </a:xfrm>
           <a:prstGeom prst="rect">
             <a:avLst/>

--- a/문헌고찰_NLC_RLS_LSB/03_LSB/LSB_발표.pptx
+++ b/문헌고찰_NLC_RLS_LSB/03_LSB/LSB_발표.pptx
@@ -11282,7 +11282,7 @@
                 <a:latin typeface="NanumGothic"/>
                 <a:ea typeface="NanumGothic"/>
               </a:rPr>
-              <a:t>L2–L3 방척추 접근·투시, 정중선 7 cm 외측, 조영제 두미측 확산, 성공지표 온도 ≥2°C.</a:t>
+              <a:t>L2–L3 방척추 접근 · C-arm 사위 30–35°로 첫 위치 → 동축 진입</a:t>
             </a:r>
           </a:p>
         </p:txBody>
@@ -15170,7 +15170,7 @@
                 <a:latin typeface="NanumGothic"/>
                 <a:ea typeface="NanumGothic"/>
               </a:rPr>
-              <a:t>복와위 · 방척추(paravertebral) 접근 + 투시 (CT·초음파 가능)</a:t>
+              <a:t>복와위 · 투시 유도 방척추(paravertebral) 접근 (CT·초음파 가능)</a:t>
             </a:r>
           </a:p>
           <a:p>
@@ -15200,7 +15200,7 @@
                 <a:latin typeface="NanumGothic"/>
                 <a:ea typeface="NanumGothic"/>
               </a:rPr>
-              <a:t>자입점: 정중선 ~7 cm 외측 · 내측 경사 30–45°</a:t>
+              <a:t>첫 위치: C-arm 환측 30–35° 사위(oblique) — 횡돌기 끝이 척추체 외측연에 겹치게</a:t>
             </a:r>
           </a:p>
           <a:p>
@@ -15223,6 +15223,36 @@
               <a:t>●  </a:t>
             </a:r>
             <a:r>
+              <a:rPr sz="1350" b="1" i="0">
+                <a:solidFill>
+                  <a:srgbClr val="1A202C"/>
+                </a:solidFill>
+                <a:latin typeface="NanumGothic"/>
+                <a:ea typeface="NanumGothic"/>
+              </a:rPr>
+              <a:t>자입점: 그 상에서 표적 바로 위 피부(정중선 ~7 cm) · 빔과 동축(tunnel view)</a:t>
+            </a:r>
+          </a:p>
+          <a:p>
+            <a:pPr algn="l">
+              <a:lnSpc>
+                <a:spcPct val="108000"/>
+              </a:lnSpc>
+              <a:spcAft>
+                <a:spcPts val="900"/>
+              </a:spcAft>
+            </a:pPr>
+            <a:r>
+              <a:rPr sz="944" b="1" i="0">
+                <a:solidFill>
+                  <a:srgbClr val="2C898A"/>
+                </a:solidFill>
+                <a:latin typeface="NanumGothic"/>
+                <a:ea typeface="NanumGothic"/>
+              </a:rPr>
+              <a:t>●  </a:t>
+            </a:r>
+            <a:r>
               <a:rPr sz="1350" b="0" i="0">
                 <a:solidFill>
                   <a:srgbClr val="1A202C"/>
@@ -15230,7 +15260,7 @@
                 <a:latin typeface="NanumGothic"/>
                 <a:ea typeface="NanumGothic"/>
               </a:rPr>
-              <a:t>바늘 22 G 15 cm → 척추체 외측면 접촉 → 전내측 'walk' → 전외측면</a:t>
+              <a:t>22 G 15 cm → 척추체 외측면 접촉 → 전내측 'walk' → 전외측면</a:t>
             </a:r>
           </a:p>
           <a:p>
@@ -15243,54 +15273,24 @@
               </a:spcAft>
             </a:pPr>
             <a:r>
-              <a:rPr sz="944" b="1" i="0">
-                <a:solidFill>
-                  <a:srgbClr val="2C898A"/>
-                </a:solidFill>
-                <a:latin typeface="NanumGothic"/>
-                <a:ea typeface="NanumGothic"/>
-              </a:rPr>
-              <a:t>●  </a:t>
-            </a:r>
-            <a:r>
               <a:rPr sz="1350" b="1" i="0">
                 <a:solidFill>
-                  <a:srgbClr val="1A202C"/>
-                </a:solidFill>
-                <a:latin typeface="NanumGothic"/>
-                <a:ea typeface="NanumGothic"/>
-              </a:rPr>
-              <a:t>조영제 두미측 종방향 확산 · 성공지표 온도 ≥2°C↑</a:t>
-            </a:r>
-          </a:p>
-          <a:p>
-            <a:pPr algn="l">
-              <a:lnSpc>
-                <a:spcPct val="108000"/>
-              </a:lnSpc>
-              <a:spcAft>
-                <a:spcPts val="900"/>
-              </a:spcAft>
-            </a:pPr>
+                  <a:srgbClr val="5A6B7B"/>
+                </a:solidFill>
+                <a:latin typeface="NanumGothic"/>
+                <a:ea typeface="NanumGothic"/>
+              </a:rPr>
+              <a:t/>
+            </a:r>
             <a:r>
               <a:rPr sz="1350" b="1" i="0">
                 <a:solidFill>
-                  <a:srgbClr val="5A6B7B"/>
-                </a:solidFill>
-                <a:latin typeface="NanumGothic"/>
-                <a:ea typeface="NanumGothic"/>
-              </a:rPr>
-              <a:t/>
-            </a:r>
-            <a:r>
-              <a:rPr sz="1350" b="1" i="0">
-                <a:solidFill>
                   <a:srgbClr val="1F6E70"/>
                 </a:solidFill>
                 <a:latin typeface="NanumGothic"/>
                 <a:ea typeface="NanumGothic"/>
               </a:rPr>
-              <a:t>약제: 국소마취제 / 신경파괴는 진단차단 양성 시에만</a:t>
+              <a:t>조영제 두미측 확산 · 측면상 전방 1/3 · 성공지표 온도 ≥2°C↑</a:t>
             </a:r>
           </a:p>
         </p:txBody>
@@ -15405,7 +15405,7 @@
                 <a:latin typeface="NanumGothic"/>
                 <a:ea typeface="NanumGothic"/>
               </a:rPr>
-              <a:t>근거: StatPearls NBK431107 · NBK560514 · 측면 모식도</a:t>
+              <a:t>근거: 약제: 국소마취제 / 신경파괴는 진단차단 양성 시에만 · StatPearls NBK431107 · NBK560514</a:t>
             </a:r>
           </a:p>
         </p:txBody>
